--- a/project_tracking.pptx
+++ b/project_tracking.pptx
@@ -6,6 +6,7 @@
   </p:sldMasterIdLst>
   <p:sldIdLst>
     <p:sldId id="256" r:id="rId7"/>
+    <p:sldId id="257" r:id="rId8"/>
   </p:sldIdLst>
   <p:sldSz cx="12191969" cy="6858000" type="screen4x3"/>
   <p:notesSz cx="6858000" cy="9144000"/>
@@ -4571,6 +4572,1568 @@
 </p:sld>
 </file>
 
+<file path=ppt/slides/slide2.xml><?xml version="1.0" encoding="utf-8"?>
+<p:sld xmlns:a="http://schemas.openxmlformats.org/drawingml/2006/main" xmlns:p="http://schemas.openxmlformats.org/presentationml/2006/main" xmlns:r="http://schemas.openxmlformats.org/officeDocument/2006/relationships">
+  <p:cSld>
+    <p:spTree>
+      <p:nvGrpSpPr>
+        <p:cNvPr id="1" name=""/>
+        <p:cNvGrpSpPr/>
+        <p:nvPr/>
+      </p:nvGrpSpPr>
+      <p:grpSpPr/>
+      <p:sp>
+        <p:nvSpPr>
+          <p:cNvPr id="2" name="TextBox 1"/>
+          <p:cNvSpPr txBox="1"/>
+          <p:nvPr/>
+        </p:nvSpPr>
+        <p:spPr>
+          <a:xfrm>
+            <a:off x="457200" y="320040"/>
+            <a:ext cx="8229600" cy="548640"/>
+          </a:xfrm>
+          <a:prstGeom prst="rect">
+            <a:avLst/>
+          </a:prstGeom>
+          <a:noFill/>
+        </p:spPr>
+        <p:txBody>
+          <a:bodyPr wrap="square" lIns="0" rIns="0" tIns="0" bIns="0">
+            <a:spAutoFit/>
+          </a:bodyPr>
+          <a:lstStyle/>
+          <a:p>
+            <a:pPr>
+              <a:spcAft>
+                <a:spcPts val="200"/>
+              </a:spcAft>
+            </a:pPr>
+            <a:r>
+              <a:rPr sz="3200" b="1">
+                <a:solidFill>
+                  <a:srgbClr val="1E2761"/>
+                </a:solidFill>
+                <a:latin typeface="Cambria"/>
+              </a:rPr>
+              <a:t>Phase 2 — Linear Consumer Heterogeneity</a:t>
+            </a:r>
+          </a:p>
+        </p:txBody>
+      </p:sp>
+      <p:sp>
+        <p:nvSpPr>
+          <p:cNvPr id="3" name="TextBox 2"/>
+          <p:cNvSpPr txBox="1"/>
+          <p:nvPr/>
+        </p:nvSpPr>
+        <p:spPr>
+          <a:xfrm>
+            <a:off x="457200" y="868680"/>
+            <a:ext cx="8229600" cy="274320"/>
+          </a:xfrm>
+          <a:prstGeom prst="rect">
+            <a:avLst/>
+          </a:prstGeom>
+          <a:noFill/>
+        </p:spPr>
+        <p:txBody>
+          <a:bodyPr wrap="square" lIns="0" rIns="0" tIns="0" bIns="0">
+            <a:spAutoFit/>
+          </a:bodyPr>
+          <a:lstStyle/>
+          <a:p>
+            <a:pPr>
+              <a:spcAft>
+                <a:spcPts val="200"/>
+              </a:spcAft>
+            </a:pPr>
+            <a:r>
+              <a:rPr sz="1200" b="0">
+                <a:solidFill>
+                  <a:srgbClr val="5B5F6E"/>
+                </a:solidFill>
+                <a:latin typeface="Calibri"/>
+              </a:rPr>
+              <a:t>Three buyer classes, two seller tiers  ·  git tag: phase2-validated  ·  30 seeds</a:t>
+            </a:r>
+          </a:p>
+        </p:txBody>
+      </p:sp>
+      <p:sp>
+        <p:nvSpPr>
+          <p:cNvPr id="4" name="Rounded Rectangle 3"/>
+          <p:cNvSpPr/>
+          <p:nvPr/>
+        </p:nvSpPr>
+        <p:spPr>
+          <a:xfrm>
+            <a:off x="9464040" y="365760"/>
+            <a:ext cx="2240280" cy="384048"/>
+          </a:xfrm>
+          <a:prstGeom prst="roundRect">
+            <a:avLst/>
+          </a:prstGeom>
+          <a:solidFill>
+            <a:srgbClr val="1E7A4D"/>
+          </a:solidFill>
+          <a:ln>
+            <a:noFill/>
+          </a:ln>
+        </p:spPr>
+        <p:style>
+          <a:lnRef idx="1">
+            <a:schemeClr val="accent1"/>
+          </a:lnRef>
+          <a:fillRef idx="3">
+            <a:schemeClr val="accent1"/>
+          </a:fillRef>
+          <a:effectRef idx="2">
+            <a:schemeClr val="accent1"/>
+          </a:effectRef>
+          <a:fontRef idx="minor">
+            <a:schemeClr val="lt1"/>
+          </a:fontRef>
+        </p:style>
+        <p:txBody>
+          <a:bodyPr rtlCol="0" anchor="ctr"/>
+          <a:lstStyle/>
+          <a:p>
+            <a:pPr algn="ctr"/>
+            <a:r>
+              <a:rPr sz="1050" b="1">
+                <a:solidFill>
+                  <a:srgbClr val="FFFFFF"/>
+                </a:solidFill>
+                <a:latin typeface="Calibri"/>
+              </a:rPr>
+              <a:t>ALL CRITERIA PASS</a:t>
+            </a:r>
+          </a:p>
+        </p:txBody>
+      </p:sp>
+      <p:sp>
+        <p:nvSpPr>
+          <p:cNvPr id="5" name="Rectangle 4"/>
+          <p:cNvSpPr/>
+          <p:nvPr/>
+        </p:nvSpPr>
+        <p:spPr>
+          <a:xfrm>
+            <a:off x="457200" y="1417320"/>
+            <a:ext cx="292608" cy="292608"/>
+          </a:xfrm>
+          <a:prstGeom prst="rect">
+            <a:avLst/>
+          </a:prstGeom>
+          <a:solidFill>
+            <a:srgbClr val="1E2761"/>
+          </a:solidFill>
+          <a:ln>
+            <a:noFill/>
+          </a:ln>
+        </p:spPr>
+        <p:style>
+          <a:lnRef idx="1">
+            <a:schemeClr val="accent1"/>
+          </a:lnRef>
+          <a:fillRef idx="3">
+            <a:schemeClr val="accent1"/>
+          </a:fillRef>
+          <a:effectRef idx="2">
+            <a:schemeClr val="accent1"/>
+          </a:effectRef>
+          <a:fontRef idx="minor">
+            <a:schemeClr val="lt1"/>
+          </a:fontRef>
+        </p:style>
+        <p:txBody>
+          <a:bodyPr rtlCol="0" anchor="ctr"/>
+          <a:lstStyle/>
+          <a:p/>
+        </p:txBody>
+      </p:sp>
+      <p:sp>
+        <p:nvSpPr>
+          <p:cNvPr id="6" name="TextBox 5"/>
+          <p:cNvSpPr txBox="1"/>
+          <p:nvPr/>
+        </p:nvSpPr>
+        <p:spPr>
+          <a:xfrm>
+            <a:off x="868680" y="1389888"/>
+            <a:ext cx="4617720" cy="347472"/>
+          </a:xfrm>
+          <a:prstGeom prst="rect">
+            <a:avLst/>
+          </a:prstGeom>
+          <a:noFill/>
+        </p:spPr>
+        <p:txBody>
+          <a:bodyPr wrap="square" lIns="0" rIns="0" tIns="0" bIns="0">
+            <a:spAutoFit/>
+          </a:bodyPr>
+          <a:lstStyle/>
+          <a:p>
+            <a:pPr>
+              <a:spcAft>
+                <a:spcPts val="200"/>
+              </a:spcAft>
+            </a:pPr>
+            <a:r>
+              <a:rPr sz="1500" b="1">
+                <a:solidFill>
+                  <a:srgbClr val="1E2761"/>
+                </a:solidFill>
+                <a:latin typeface="Calibri"/>
+              </a:rPr>
+              <a:t>AGENTS</a:t>
+            </a:r>
+          </a:p>
+        </p:txBody>
+      </p:sp>
+      <p:sp>
+        <p:nvSpPr>
+          <p:cNvPr id="7" name="TextBox 6"/>
+          <p:cNvSpPr txBox="1"/>
+          <p:nvPr/>
+        </p:nvSpPr>
+        <p:spPr>
+          <a:xfrm>
+            <a:off x="868680" y="1828800"/>
+            <a:ext cx="4617720" cy="566928"/>
+          </a:xfrm>
+          <a:prstGeom prst="rect">
+            <a:avLst/>
+          </a:prstGeom>
+          <a:noFill/>
+        </p:spPr>
+        <p:txBody>
+          <a:bodyPr wrap="square" lIns="0" rIns="0" tIns="0" bIns="0">
+            <a:spAutoFit/>
+          </a:bodyPr>
+          <a:lstStyle/>
+          <a:p>
+            <a:pPr>
+              <a:spcAft>
+                <a:spcPts val="200"/>
+              </a:spcAft>
+            </a:pPr>
+            <a:r>
+              <a:rPr sz="1300" b="1">
+                <a:solidFill>
+                  <a:srgbClr val="1E2761"/>
+                </a:solidFill>
+                <a:latin typeface="Calibri"/>
+              </a:rPr>
+              <a:t>Buyers: </a:t>
+            </a:r>
+            <a:r>
+              <a:rPr sz="1300" b="0">
+                <a:solidFill>
+                  <a:srgbClr val="5B5F6E"/>
+                </a:solidFill>
+                <a:latin typeface="Calibri"/>
+              </a:rPr>
+              <a:t>100 — Poor 70 / Middle 20 / Rich 10 (7:2:1); budget 3/7/10, α 0.85/0.5/0.2</a:t>
+            </a:r>
+          </a:p>
+          <a:p>
+            <a:pPr>
+              <a:spcAft>
+                <a:spcPts val="200"/>
+              </a:spcAft>
+            </a:pPr>
+            <a:r>
+              <a:rPr sz="1300" b="1">
+                <a:solidFill>
+                  <a:srgbClr val="1E2761"/>
+                </a:solidFill>
+                <a:latin typeface="Calibri"/>
+              </a:rPr>
+              <a:t>Sellers: </a:t>
+            </a:r>
+            <a:r>
+              <a:rPr sz="1300" b="0">
+                <a:solidFill>
+                  <a:srgbClr val="5B5F6E"/>
+                </a:solidFill>
+                <a:latin typeface="Calibri"/>
+              </a:rPr>
+              <a:t>5 — Slow ×3 (price 2, inv 130) / Shigh ×2 (price 6, inv 70)</a:t>
+            </a:r>
+          </a:p>
+        </p:txBody>
+      </p:sp>
+      <p:sp>
+        <p:nvSpPr>
+          <p:cNvPr id="8" name="Rectangle 7"/>
+          <p:cNvSpPr/>
+          <p:nvPr/>
+        </p:nvSpPr>
+        <p:spPr>
+          <a:xfrm>
+            <a:off x="457200" y="2651760"/>
+            <a:ext cx="292608" cy="292608"/>
+          </a:xfrm>
+          <a:prstGeom prst="rect">
+            <a:avLst/>
+          </a:prstGeom>
+          <a:solidFill>
+            <a:srgbClr val="1E2761"/>
+          </a:solidFill>
+          <a:ln>
+            <a:noFill/>
+          </a:ln>
+        </p:spPr>
+        <p:style>
+          <a:lnRef idx="1">
+            <a:schemeClr val="accent1"/>
+          </a:lnRef>
+          <a:fillRef idx="3">
+            <a:schemeClr val="accent1"/>
+          </a:fillRef>
+          <a:effectRef idx="2">
+            <a:schemeClr val="accent1"/>
+          </a:effectRef>
+          <a:fontRef idx="minor">
+            <a:schemeClr val="lt1"/>
+          </a:fontRef>
+        </p:style>
+        <p:txBody>
+          <a:bodyPr rtlCol="0" anchor="ctr"/>
+          <a:lstStyle/>
+          <a:p/>
+        </p:txBody>
+      </p:sp>
+      <p:sp>
+        <p:nvSpPr>
+          <p:cNvPr id="9" name="TextBox 8"/>
+          <p:cNvSpPr txBox="1"/>
+          <p:nvPr/>
+        </p:nvSpPr>
+        <p:spPr>
+          <a:xfrm>
+            <a:off x="868680" y="2624328"/>
+            <a:ext cx="4617720" cy="347472"/>
+          </a:xfrm>
+          <a:prstGeom prst="rect">
+            <a:avLst/>
+          </a:prstGeom>
+          <a:noFill/>
+        </p:spPr>
+        <p:txBody>
+          <a:bodyPr wrap="square" lIns="0" rIns="0" tIns="0" bIns="0">
+            <a:spAutoFit/>
+          </a:bodyPr>
+          <a:lstStyle/>
+          <a:p>
+            <a:pPr>
+              <a:spcAft>
+                <a:spcPts val="200"/>
+              </a:spcAft>
+            </a:pPr>
+            <a:r>
+              <a:rPr sz="1500" b="1">
+                <a:solidFill>
+                  <a:srgbClr val="1E2761"/>
+                </a:solidFill>
+                <a:latin typeface="Calibri"/>
+              </a:rPr>
+              <a:t>ENVIRONMENT &amp; CONTEXT</a:t>
+            </a:r>
+          </a:p>
+        </p:txBody>
+      </p:sp>
+      <p:sp>
+        <p:nvSpPr>
+          <p:cNvPr id="10" name="TextBox 9"/>
+          <p:cNvSpPr txBox="1"/>
+          <p:nvPr/>
+        </p:nvSpPr>
+        <p:spPr>
+          <a:xfrm>
+            <a:off x="868680" y="3063240"/>
+            <a:ext cx="4617720" cy="548640"/>
+          </a:xfrm>
+          <a:prstGeom prst="rect">
+            <a:avLst/>
+          </a:prstGeom>
+          <a:noFill/>
+        </p:spPr>
+        <p:txBody>
+          <a:bodyPr wrap="square" lIns="0" rIns="0" tIns="0" bIns="0">
+            <a:spAutoFit/>
+          </a:bodyPr>
+          <a:lstStyle/>
+          <a:p>
+            <a:pPr>
+              <a:spcAft>
+                <a:spcPts val="200"/>
+              </a:spcAft>
+            </a:pPr>
+            <a:r>
+              <a:rPr sz="1300" b="0">
+                <a:solidFill>
+                  <a:srgbClr val="5B5F6E"/>
+                </a:solidFill>
+                <a:latin typeface="Calibri"/>
+              </a:rPr>
+              <a:t>-  None — static baseline, single pass per run</a:t>
+            </a:r>
+          </a:p>
+          <a:p>
+            <a:pPr>
+              <a:spcAft>
+                <a:spcPts val="200"/>
+              </a:spcAft>
+            </a:pPr>
+            <a:r>
+              <a:rPr sz="1300" b="0">
+                <a:solidFill>
+                  <a:srgbClr val="5B5F6E"/>
+                </a:solidFill>
+                <a:latin typeface="Calibri"/>
+              </a:rPr>
+              <a:t>-  No environment variation, no context, no history</a:t>
+            </a:r>
+          </a:p>
+        </p:txBody>
+      </p:sp>
+      <p:sp>
+        <p:nvSpPr>
+          <p:cNvPr id="11" name="Rectangle 10"/>
+          <p:cNvSpPr/>
+          <p:nvPr/>
+        </p:nvSpPr>
+        <p:spPr>
+          <a:xfrm>
+            <a:off x="457200" y="3886200"/>
+            <a:ext cx="292608" cy="292608"/>
+          </a:xfrm>
+          <a:prstGeom prst="rect">
+            <a:avLst/>
+          </a:prstGeom>
+          <a:solidFill>
+            <a:srgbClr val="1E2761"/>
+          </a:solidFill>
+          <a:ln>
+            <a:noFill/>
+          </a:ln>
+        </p:spPr>
+        <p:style>
+          <a:lnRef idx="1">
+            <a:schemeClr val="accent1"/>
+          </a:lnRef>
+          <a:fillRef idx="3">
+            <a:schemeClr val="accent1"/>
+          </a:fillRef>
+          <a:effectRef idx="2">
+            <a:schemeClr val="accent1"/>
+          </a:effectRef>
+          <a:fontRef idx="minor">
+            <a:schemeClr val="lt1"/>
+          </a:fontRef>
+        </p:style>
+        <p:txBody>
+          <a:bodyPr rtlCol="0" anchor="ctr"/>
+          <a:lstStyle/>
+          <a:p/>
+        </p:txBody>
+      </p:sp>
+      <p:sp>
+        <p:nvSpPr>
+          <p:cNvPr id="12" name="TextBox 11"/>
+          <p:cNvSpPr txBox="1"/>
+          <p:nvPr/>
+        </p:nvSpPr>
+        <p:spPr>
+          <a:xfrm>
+            <a:off x="868680" y="3858768"/>
+            <a:ext cx="4617720" cy="347472"/>
+          </a:xfrm>
+          <a:prstGeom prst="rect">
+            <a:avLst/>
+          </a:prstGeom>
+          <a:noFill/>
+        </p:spPr>
+        <p:txBody>
+          <a:bodyPr wrap="square" lIns="0" rIns="0" tIns="0" bIns="0">
+            <a:spAutoFit/>
+          </a:bodyPr>
+          <a:lstStyle/>
+          <a:p>
+            <a:pPr>
+              <a:spcAft>
+                <a:spcPts val="200"/>
+              </a:spcAft>
+            </a:pPr>
+            <a:r>
+              <a:rPr sz="1500" b="1">
+                <a:solidFill>
+                  <a:srgbClr val="1E2761"/>
+                </a:solidFill>
+                <a:latin typeface="Calibri"/>
+              </a:rPr>
+              <a:t>METHOD</a:t>
+            </a:r>
+          </a:p>
+        </p:txBody>
+      </p:sp>
+      <p:sp>
+        <p:nvSpPr>
+          <p:cNvPr id="13" name="TextBox 12"/>
+          <p:cNvSpPr txBox="1"/>
+          <p:nvPr/>
+        </p:nvSpPr>
+        <p:spPr>
+          <a:xfrm>
+            <a:off x="868680" y="4297680"/>
+            <a:ext cx="4617720" cy="594360"/>
+          </a:xfrm>
+          <a:prstGeom prst="rect">
+            <a:avLst/>
+          </a:prstGeom>
+          <a:noFill/>
+        </p:spPr>
+        <p:txBody>
+          <a:bodyPr wrap="square" lIns="0" rIns="0" tIns="0" bIns="0">
+            <a:spAutoFit/>
+          </a:bodyPr>
+          <a:lstStyle/>
+          <a:p>
+            <a:pPr>
+              <a:spcAft>
+                <a:spcPts val="200"/>
+              </a:spcAft>
+            </a:pPr>
+            <a:r>
+              <a:rPr sz="1300" b="0">
+                <a:solidFill>
+                  <a:srgbClr val="5B5F6E"/>
+                </a:solidFill>
+                <a:latin typeface="Calibri"/>
+              </a:rPr>
+              <a:t>Rule-based linear utility + sigmoid, per-class parameters.</a:t>
+            </a:r>
+          </a:p>
+          <a:p>
+            <a:pPr>
+              <a:spcAft>
+                <a:spcPts val="200"/>
+              </a:spcAft>
+            </a:pPr>
+            <a:r>
+              <a:rPr sz="1300" b="0">
+                <a:solidFill>
+                  <a:srgbClr val="5B5F6E"/>
+                </a:solidFill>
+                <a:latin typeface="Calibri"/>
+              </a:rPr>
+              <a:t>price_reference = max(2, 6) = 6, market-wide.</a:t>
+            </a:r>
+          </a:p>
+        </p:txBody>
+      </p:sp>
+      <p:sp>
+        <p:nvSpPr>
+          <p:cNvPr id="14" name="Rectangle 13"/>
+          <p:cNvSpPr/>
+          <p:nvPr/>
+        </p:nvSpPr>
+        <p:spPr>
+          <a:xfrm>
+            <a:off x="457200" y="5029200"/>
+            <a:ext cx="292608" cy="292608"/>
+          </a:xfrm>
+          <a:prstGeom prst="rect">
+            <a:avLst/>
+          </a:prstGeom>
+          <a:solidFill>
+            <a:srgbClr val="1E2761"/>
+          </a:solidFill>
+          <a:ln>
+            <a:noFill/>
+          </a:ln>
+        </p:spPr>
+        <p:style>
+          <a:lnRef idx="1">
+            <a:schemeClr val="accent1"/>
+          </a:lnRef>
+          <a:fillRef idx="3">
+            <a:schemeClr val="accent1"/>
+          </a:fillRef>
+          <a:effectRef idx="2">
+            <a:schemeClr val="accent1"/>
+          </a:effectRef>
+          <a:fontRef idx="minor">
+            <a:schemeClr val="lt1"/>
+          </a:fontRef>
+        </p:style>
+        <p:txBody>
+          <a:bodyPr rtlCol="0" anchor="ctr"/>
+          <a:lstStyle/>
+          <a:p/>
+        </p:txBody>
+      </p:sp>
+      <p:sp>
+        <p:nvSpPr>
+          <p:cNvPr id="15" name="TextBox 14"/>
+          <p:cNvSpPr txBox="1"/>
+          <p:nvPr/>
+        </p:nvSpPr>
+        <p:spPr>
+          <a:xfrm>
+            <a:off x="868680" y="5001768"/>
+            <a:ext cx="4617720" cy="347472"/>
+          </a:xfrm>
+          <a:prstGeom prst="rect">
+            <a:avLst/>
+          </a:prstGeom>
+          <a:noFill/>
+        </p:spPr>
+        <p:txBody>
+          <a:bodyPr wrap="square" lIns="0" rIns="0" tIns="0" bIns="0">
+            <a:spAutoFit/>
+          </a:bodyPr>
+          <a:lstStyle/>
+          <a:p>
+            <a:pPr>
+              <a:spcAft>
+                <a:spcPts val="200"/>
+              </a:spcAft>
+            </a:pPr>
+            <a:r>
+              <a:rPr sz="1500" b="1">
+                <a:solidFill>
+                  <a:srgbClr val="1E2761"/>
+                </a:solidFill>
+                <a:latin typeface="Calibri"/>
+              </a:rPr>
+              <a:t>LITERATURE BASIS</a:t>
+            </a:r>
+          </a:p>
+        </p:txBody>
+      </p:sp>
+      <p:sp>
+        <p:nvSpPr>
+          <p:cNvPr id="16" name="TextBox 15"/>
+          <p:cNvSpPr txBox="1"/>
+          <p:nvPr/>
+        </p:nvSpPr>
+        <p:spPr>
+          <a:xfrm>
+            <a:off x="868680" y="5440680"/>
+            <a:ext cx="4617720" cy="1005840"/>
+          </a:xfrm>
+          <a:prstGeom prst="rect">
+            <a:avLst/>
+          </a:prstGeom>
+          <a:noFill/>
+        </p:spPr>
+        <p:txBody>
+          <a:bodyPr wrap="square" lIns="0" rIns="0" tIns="0" bIns="0">
+            <a:spAutoFit/>
+          </a:bodyPr>
+          <a:lstStyle/>
+          <a:p>
+            <a:pPr>
+              <a:spcAft>
+                <a:spcPts val="600"/>
+              </a:spcAft>
+            </a:pPr>
+            <a:r>
+              <a:rPr sz="1100" b="1">
+                <a:solidFill>
+                  <a:srgbClr val="1E2761"/>
+                </a:solidFill>
+                <a:latin typeface="Calibri"/>
+              </a:rPr>
+              <a:t>McFadden (1974), </a:t>
+            </a:r>
+            <a:r>
+              <a:rPr sz="1100" b="0">
+                <a:solidFill>
+                  <a:srgbClr val="5B5F6E"/>
+                </a:solidFill>
+                <a:latin typeface="Calibri"/>
+              </a:rPr>
+              <a:t>“Conditional Logit Analysis of Qualitative Choice Behavior” — the same random-utility framework as Phase 1.</a:t>
+            </a:r>
+          </a:p>
+          <a:p>
+            <a:pPr>
+              <a:spcAft>
+                <a:spcPts val="600"/>
+              </a:spcAft>
+            </a:pPr>
+            <a:r>
+              <a:rPr sz="1100" b="1">
+                <a:solidFill>
+                  <a:srgbClr val="1E2761"/>
+                </a:solidFill>
+                <a:latin typeface="Calibri"/>
+              </a:rPr>
+              <a:t>Train, </a:t>
+            </a:r>
+            <a:r>
+              <a:rPr sz="1100" b="0">
+                <a:solidFill>
+                  <a:srgbClr val="5B5F6E"/>
+                </a:solidFill>
+                <a:latin typeface="Calibri"/>
+              </a:rPr>
+              <a:t>“Discrete Choice Methods with Simulation” — heterogeneous per-class parameter extensions of RUM.</a:t>
+            </a:r>
+          </a:p>
+        </p:txBody>
+      </p:sp>
+      <p:sp>
+        <p:nvSpPr>
+          <p:cNvPr id="17" name="Rectangle 16"/>
+          <p:cNvSpPr/>
+          <p:nvPr/>
+        </p:nvSpPr>
+        <p:spPr>
+          <a:xfrm>
+            <a:off x="5943600" y="1417320"/>
+            <a:ext cx="292608" cy="292608"/>
+          </a:xfrm>
+          <a:prstGeom prst="rect">
+            <a:avLst/>
+          </a:prstGeom>
+          <a:solidFill>
+            <a:srgbClr val="1E2761"/>
+          </a:solidFill>
+          <a:ln>
+            <a:noFill/>
+          </a:ln>
+        </p:spPr>
+        <p:style>
+          <a:lnRef idx="1">
+            <a:schemeClr val="accent1"/>
+          </a:lnRef>
+          <a:fillRef idx="3">
+            <a:schemeClr val="accent1"/>
+          </a:fillRef>
+          <a:effectRef idx="2">
+            <a:schemeClr val="accent1"/>
+          </a:effectRef>
+          <a:fontRef idx="minor">
+            <a:schemeClr val="lt1"/>
+          </a:fontRef>
+        </p:style>
+        <p:txBody>
+          <a:bodyPr rtlCol="0" anchor="ctr"/>
+          <a:lstStyle/>
+          <a:p/>
+        </p:txBody>
+      </p:sp>
+      <p:sp>
+        <p:nvSpPr>
+          <p:cNvPr id="18" name="TextBox 17"/>
+          <p:cNvSpPr txBox="1"/>
+          <p:nvPr/>
+        </p:nvSpPr>
+        <p:spPr>
+          <a:xfrm>
+            <a:off x="6355080" y="1389888"/>
+            <a:ext cx="5349240" cy="347472"/>
+          </a:xfrm>
+          <a:prstGeom prst="rect">
+            <a:avLst/>
+          </a:prstGeom>
+          <a:noFill/>
+        </p:spPr>
+        <p:txBody>
+          <a:bodyPr wrap="square" lIns="0" rIns="0" tIns="0" bIns="0">
+            <a:spAutoFit/>
+          </a:bodyPr>
+          <a:lstStyle/>
+          <a:p>
+            <a:pPr>
+              <a:spcAft>
+                <a:spcPts val="200"/>
+              </a:spcAft>
+            </a:pPr>
+            <a:r>
+              <a:rPr sz="1500" b="1">
+                <a:solidFill>
+                  <a:srgbClr val="1E2761"/>
+                </a:solidFill>
+                <a:latin typeface="Calibri"/>
+              </a:rPr>
+              <a:t>KEY RESULTS</a:t>
+            </a:r>
+          </a:p>
+        </p:txBody>
+      </p:sp>
+      <p:graphicFrame>
+        <p:nvGraphicFramePr>
+          <p:cNvPr id="19" name="Table 18"/>
+          <p:cNvGraphicFramePr>
+            <a:graphicFrameLocks noGrp="1"/>
+          </p:cNvGraphicFramePr>
+          <p:nvPr/>
+        </p:nvGraphicFramePr>
+        <p:xfrm>
+          <a:off x="5943600" y="1874519"/>
+          <a:ext cx="5760720" cy="1920240"/>
+        </p:xfrm>
+        <a:graphic>
+          <a:graphicData uri="http://schemas.openxmlformats.org/drawingml/2006/table">
+            <a:tbl>
+              <a:tblPr firstRow="1" bandRow="1">
+                <a:tableStyleId>{5C22544A-7EE6-4342-B048-85BDC9FD1C3A}</a:tableStyleId>
+              </a:tblPr>
+              <a:tblGrid>
+                <a:gridCol w="3200400"/>
+                <a:gridCol w="1463040"/>
+                <a:gridCol w="1097280"/>
+              </a:tblGrid>
+              <a:tr h="274320">
+                <a:tc>
+                  <a:txBody>
+                    <a:bodyPr/>
+                    <a:lstStyle/>
+                    <a:p>
+                      <a:r>
+                        <a:rPr sz="1100" b="1">
+                          <a:solidFill>
+                            <a:srgbClr val="FFFFFF"/>
+                          </a:solidFill>
+                          <a:latin typeface="Calibri"/>
+                        </a:rPr>
+                        <a:t>Metric</a:t>
+                      </a:r>
+                    </a:p>
+                  </a:txBody>
+                  <a:tcPr>
+                    <a:solidFill>
+                      <a:srgbClr val="1E2761"/>
+                    </a:solidFill>
+                  </a:tcPr>
+                </a:tc>
+                <a:tc>
+                  <a:txBody>
+                    <a:bodyPr/>
+                    <a:lstStyle/>
+                    <a:p>
+                      <a:r>
+                        <a:rPr sz="1100" b="1">
+                          <a:solidFill>
+                            <a:srgbClr val="FFFFFF"/>
+                          </a:solidFill>
+                          <a:latin typeface="Calibri"/>
+                        </a:rPr>
+                        <a:t>Value</a:t>
+                      </a:r>
+                    </a:p>
+                  </a:txBody>
+                  <a:tcPr>
+                    <a:solidFill>
+                      <a:srgbClr val="1E2761"/>
+                    </a:solidFill>
+                  </a:tcPr>
+                </a:tc>
+                <a:tc>
+                  <a:txBody>
+                    <a:bodyPr/>
+                    <a:lstStyle/>
+                    <a:p>
+                      <a:r>
+                        <a:rPr sz="1100" b="1">
+                          <a:solidFill>
+                            <a:srgbClr val="FFFFFF"/>
+                          </a:solidFill>
+                          <a:latin typeface="Calibri"/>
+                        </a:rPr>
+                        <a:t/>
+                      </a:r>
+                    </a:p>
+                  </a:txBody>
+                  <a:tcPr>
+                    <a:solidFill>
+                      <a:srgbClr val="1E2761"/>
+                    </a:solidFill>
+                  </a:tcPr>
+                </a:tc>
+              </a:tr>
+              <a:tr h="274320">
+                <a:tc>
+                  <a:txBody>
+                    <a:bodyPr/>
+                    <a:lstStyle/>
+                    <a:p>
+                      <a:r>
+                        <a:rPr sz="1100">
+                          <a:solidFill>
+                            <a:srgbClr val="1E2761"/>
+                          </a:solidFill>
+                          <a:latin typeface="Calibri"/>
+                        </a:rPr>
+                        <a:t>Participation rate (0.6–1.0)</a:t>
+                      </a:r>
+                    </a:p>
+                  </a:txBody>
+                  <a:tcPr>
+                    <a:solidFill>
+                      <a:srgbClr val="FFFFFF"/>
+                    </a:solidFill>
+                  </a:tcPr>
+                </a:tc>
+                <a:tc>
+                  <a:txBody>
+                    <a:bodyPr/>
+                    <a:lstStyle/>
+                    <a:p>
+                      <a:r>
+                        <a:rPr sz="1100">
+                          <a:solidFill>
+                            <a:srgbClr val="5B5F6E"/>
+                          </a:solidFill>
+                          <a:latin typeface="Calibri"/>
+                        </a:rPr>
+                        <a:t>0.818</a:t>
+                      </a:r>
+                    </a:p>
+                  </a:txBody>
+                  <a:tcPr>
+                    <a:solidFill>
+                      <a:srgbClr val="FFFFFF"/>
+                    </a:solidFill>
+                  </a:tcPr>
+                </a:tc>
+                <a:tc>
+                  <a:txBody>
+                    <a:bodyPr/>
+                    <a:lstStyle/>
+                    <a:p>
+                      <a:pPr algn="ctr"/>
+                      <a:r>
+                        <a:rPr sz="1100" b="1">
+                          <a:solidFill>
+                            <a:srgbClr val="1E7A4D"/>
+                          </a:solidFill>
+                          <a:latin typeface="Calibri"/>
+                        </a:rPr>
+                        <a:t>PASS</a:t>
+                      </a:r>
+                    </a:p>
+                  </a:txBody>
+                  <a:tcPr>
+                    <a:solidFill>
+                      <a:srgbClr val="FFFFFF"/>
+                    </a:solidFill>
+                  </a:tcPr>
+                </a:tc>
+              </a:tr>
+              <a:tr h="274320">
+                <a:tc>
+                  <a:txBody>
+                    <a:bodyPr/>
+                    <a:lstStyle/>
+                    <a:p>
+                      <a:r>
+                        <a:rPr sz="1100">
+                          <a:solidFill>
+                            <a:srgbClr val="1E2761"/>
+                          </a:solidFill>
+                          <a:latin typeface="Calibri"/>
+                        </a:rPr>
+                        <a:t>Stratification: Rich−Middle to Shigh</a:t>
+                      </a:r>
+                    </a:p>
+                  </a:txBody>
+                  <a:tcPr>
+                    <a:solidFill>
+                      <a:srgbClr val="F7F8FC"/>
+                    </a:solidFill>
+                  </a:tcPr>
+                </a:tc>
+                <a:tc>
+                  <a:txBody>
+                    <a:bodyPr/>
+                    <a:lstStyle/>
+                    <a:p>
+                      <a:r>
+                        <a:rPr sz="1100">
+                          <a:solidFill>
+                            <a:srgbClr val="5B5F6E"/>
+                          </a:solidFill>
+                          <a:latin typeface="Calibri"/>
+                        </a:rPr>
+                        <a:t>+0.076</a:t>
+                      </a:r>
+                    </a:p>
+                  </a:txBody>
+                  <a:tcPr>
+                    <a:solidFill>
+                      <a:srgbClr val="F7F8FC"/>
+                    </a:solidFill>
+                  </a:tcPr>
+                </a:tc>
+                <a:tc>
+                  <a:txBody>
+                    <a:bodyPr/>
+                    <a:lstStyle/>
+                    <a:p>
+                      <a:pPr algn="ctr"/>
+                      <a:r>
+                        <a:rPr sz="1100" b="1">
+                          <a:solidFill>
+                            <a:srgbClr val="1E7A4D"/>
+                          </a:solidFill>
+                          <a:latin typeface="Calibri"/>
+                        </a:rPr>
+                        <a:t>PASS</a:t>
+                      </a:r>
+                    </a:p>
+                  </a:txBody>
+                  <a:tcPr>
+                    <a:solidFill>
+                      <a:srgbClr val="F7F8FC"/>
+                    </a:solidFill>
+                  </a:tcPr>
+                </a:tc>
+              </a:tr>
+              <a:tr h="274320">
+                <a:tc>
+                  <a:txBody>
+                    <a:bodyPr/>
+                    <a:lstStyle/>
+                    <a:p>
+                      <a:r>
+                        <a:rPr sz="1100">
+                          <a:solidFill>
+                            <a:srgbClr val="1E2761"/>
+                          </a:solidFill>
+                          <a:latin typeface="Calibri"/>
+                        </a:rPr>
+                        <a:t>  its 95% CI (must exclude 0)</a:t>
+                      </a:r>
+                    </a:p>
+                  </a:txBody>
+                  <a:tcPr>
+                    <a:solidFill>
+                      <a:srgbClr val="FFFFFF"/>
+                    </a:solidFill>
+                  </a:tcPr>
+                </a:tc>
+                <a:tc>
+                  <a:txBody>
+                    <a:bodyPr/>
+                    <a:lstStyle/>
+                    <a:p>
+                      <a:r>
+                        <a:rPr sz="1100">
+                          <a:solidFill>
+                            <a:srgbClr val="5B5F6E"/>
+                          </a:solidFill>
+                          <a:latin typeface="Calibri"/>
+                        </a:rPr>
+                        <a:t>[+0.04, +0.11]</a:t>
+                      </a:r>
+                    </a:p>
+                  </a:txBody>
+                  <a:tcPr>
+                    <a:solidFill>
+                      <a:srgbClr val="FFFFFF"/>
+                    </a:solidFill>
+                  </a:tcPr>
+                </a:tc>
+                <a:tc>
+                  <a:txBody>
+                    <a:bodyPr/>
+                    <a:lstStyle/>
+                    <a:p>
+                      <a:pPr algn="ctr"/>
+                      <a:r>
+                        <a:rPr sz="1100" b="1">
+                          <a:solidFill>
+                            <a:srgbClr val="1E7A4D"/>
+                          </a:solidFill>
+                          <a:latin typeface="Calibri"/>
+                        </a:rPr>
+                        <a:t>PASS</a:t>
+                      </a:r>
+                    </a:p>
+                  </a:txBody>
+                  <a:tcPr>
+                    <a:solidFill>
+                      <a:srgbClr val="FFFFFF"/>
+                    </a:solidFill>
+                  </a:tcPr>
+                </a:tc>
+              </a:tr>
+              <a:tr h="274320">
+                <a:tc>
+                  <a:txBody>
+                    <a:bodyPr/>
+                    <a:lstStyle/>
+                    <a:p>
+                      <a:r>
+                        <a:rPr sz="1100">
+                          <a:solidFill>
+                            <a:srgbClr val="1E2761"/>
+                          </a:solidFill>
+                          <a:latin typeface="Calibri"/>
+                        </a:rPr>
+                        <a:t>Shigh sellers not sold out</a:t>
+                      </a:r>
+                    </a:p>
+                  </a:txBody>
+                  <a:tcPr>
+                    <a:solidFill>
+                      <a:srgbClr val="F7F8FC"/>
+                    </a:solidFill>
+                  </a:tcPr>
+                </a:tc>
+                <a:tc>
+                  <a:txBody>
+                    <a:bodyPr/>
+                    <a:lstStyle/>
+                    <a:p>
+                      <a:r>
+                        <a:rPr sz="1100">
+                          <a:solidFill>
+                            <a:srgbClr val="5B5F6E"/>
+                          </a:solidFill>
+                          <a:latin typeface="Calibri"/>
+                        </a:rPr>
+                        <a:t>min 57</a:t>
+                      </a:r>
+                    </a:p>
+                  </a:txBody>
+                  <a:tcPr>
+                    <a:solidFill>
+                      <a:srgbClr val="F7F8FC"/>
+                    </a:solidFill>
+                  </a:tcPr>
+                </a:tc>
+                <a:tc>
+                  <a:txBody>
+                    <a:bodyPr/>
+                    <a:lstStyle/>
+                    <a:p>
+                      <a:pPr algn="ctr"/>
+                      <a:r>
+                        <a:rPr sz="1100" b="1">
+                          <a:solidFill>
+                            <a:srgbClr val="1E7A4D"/>
+                          </a:solidFill>
+                          <a:latin typeface="Calibri"/>
+                        </a:rPr>
+                        <a:t>PASS</a:t>
+                      </a:r>
+                    </a:p>
+                  </a:txBody>
+                  <a:tcPr>
+                    <a:solidFill>
+                      <a:srgbClr val="F7F8FC"/>
+                    </a:solidFill>
+                  </a:tcPr>
+                </a:tc>
+              </a:tr>
+              <a:tr h="274320">
+                <a:tc>
+                  <a:txBody>
+                    <a:bodyPr/>
+                    <a:lstStyle/>
+                    <a:p>
+                      <a:r>
+                        <a:rPr sz="1100">
+                          <a:solidFill>
+                            <a:srgbClr val="1E2761"/>
+                          </a:solidFill>
+                          <a:latin typeface="Calibri"/>
+                        </a:rPr>
+                        <a:t>Middle split to Shigh (no bar)</a:t>
+                      </a:r>
+                    </a:p>
+                  </a:txBody>
+                  <a:tcPr>
+                    <a:solidFill>
+                      <a:srgbClr val="FFFFFF"/>
+                    </a:solidFill>
+                  </a:tcPr>
+                </a:tc>
+                <a:tc>
+                  <a:txBody>
+                    <a:bodyPr/>
+                    <a:lstStyle/>
+                    <a:p>
+                      <a:r>
+                        <a:rPr sz="1100">
+                          <a:solidFill>
+                            <a:srgbClr val="5B5F6E"/>
+                          </a:solidFill>
+                          <a:latin typeface="Calibri"/>
+                        </a:rPr>
+                        <a:t>0.239</a:t>
+                      </a:r>
+                    </a:p>
+                  </a:txBody>
+                  <a:tcPr>
+                    <a:solidFill>
+                      <a:srgbClr val="FFFFFF"/>
+                    </a:solidFill>
+                  </a:tcPr>
+                </a:tc>
+                <a:tc>
+                  <a:txBody>
+                    <a:bodyPr/>
+                    <a:lstStyle/>
+                    <a:p>
+                      <a:pPr algn="ctr"/>
+                      <a:r>
+                        <a:rPr sz="1100" b="1">
+                          <a:solidFill>
+                            <a:srgbClr val="5B5F6E"/>
+                          </a:solidFill>
+                          <a:latin typeface="Calibri"/>
+                        </a:rPr>
+                        <a:t>—</a:t>
+                      </a:r>
+                    </a:p>
+                  </a:txBody>
+                  <a:tcPr>
+                    <a:solidFill>
+                      <a:srgbClr val="FFFFFF"/>
+                    </a:solidFill>
+                  </a:tcPr>
+                </a:tc>
+              </a:tr>
+              <a:tr h="274320">
+                <a:tc>
+                  <a:txBody>
+                    <a:bodyPr/>
+                    <a:lstStyle/>
+                    <a:p>
+                      <a:r>
+                        <a:rPr sz="1100">
+                          <a:solidFill>
+                            <a:srgbClr val="1E2761"/>
+                          </a:solidFill>
+                          <a:latin typeface="Calibri"/>
+                        </a:rPr>
+                        <a:t>Poor to Shigh (affordability wall)</a:t>
+                      </a:r>
+                    </a:p>
+                  </a:txBody>
+                  <a:tcPr>
+                    <a:solidFill>
+                      <a:srgbClr val="F7F8FC"/>
+                    </a:solidFill>
+                  </a:tcPr>
+                </a:tc>
+                <a:tc>
+                  <a:txBody>
+                    <a:bodyPr/>
+                    <a:lstStyle/>
+                    <a:p>
+                      <a:r>
+                        <a:rPr sz="1100">
+                          <a:solidFill>
+                            <a:srgbClr val="5B5F6E"/>
+                          </a:solidFill>
+                          <a:latin typeface="Calibri"/>
+                        </a:rPr>
+                        <a:t>0.000</a:t>
+                      </a:r>
+                    </a:p>
+                  </a:txBody>
+                  <a:tcPr>
+                    <a:solidFill>
+                      <a:srgbClr val="F7F8FC"/>
+                    </a:solidFill>
+                  </a:tcPr>
+                </a:tc>
+                <a:tc>
+                  <a:txBody>
+                    <a:bodyPr/>
+                    <a:lstStyle/>
+                    <a:p>
+                      <a:pPr algn="ctr"/>
+                      <a:r>
+                        <a:rPr sz="1100" b="1">
+                          <a:solidFill>
+                            <a:srgbClr val="5B5F6E"/>
+                          </a:solidFill>
+                          <a:latin typeface="Calibri"/>
+                        </a:rPr>
+                        <a:t>—</a:t>
+                      </a:r>
+                    </a:p>
+                  </a:txBody>
+                  <a:tcPr>
+                    <a:solidFill>
+                      <a:srgbClr val="F7F8FC"/>
+                    </a:solidFill>
+                  </a:tcPr>
+                </a:tc>
+              </a:tr>
+            </a:tbl>
+          </a:graphicData>
+        </a:graphic>
+      </p:graphicFrame>
+      <p:sp>
+        <p:nvSpPr>
+          <p:cNvPr id="20" name="Rectangle 19"/>
+          <p:cNvSpPr/>
+          <p:nvPr/>
+        </p:nvSpPr>
+        <p:spPr>
+          <a:xfrm>
+            <a:off x="5943600" y="4023360"/>
+            <a:ext cx="292608" cy="292608"/>
+          </a:xfrm>
+          <a:prstGeom prst="rect">
+            <a:avLst/>
+          </a:prstGeom>
+          <a:solidFill>
+            <a:srgbClr val="1E2761"/>
+          </a:solidFill>
+          <a:ln>
+            <a:noFill/>
+          </a:ln>
+        </p:spPr>
+        <p:style>
+          <a:lnRef idx="1">
+            <a:schemeClr val="accent1"/>
+          </a:lnRef>
+          <a:fillRef idx="3">
+            <a:schemeClr val="accent1"/>
+          </a:fillRef>
+          <a:effectRef idx="2">
+            <a:schemeClr val="accent1"/>
+          </a:effectRef>
+          <a:fontRef idx="minor">
+            <a:schemeClr val="lt1"/>
+          </a:fontRef>
+        </p:style>
+        <p:txBody>
+          <a:bodyPr rtlCol="0" anchor="ctr"/>
+          <a:lstStyle/>
+          <a:p/>
+        </p:txBody>
+      </p:sp>
+      <p:sp>
+        <p:nvSpPr>
+          <p:cNvPr id="21" name="TextBox 20"/>
+          <p:cNvSpPr txBox="1"/>
+          <p:nvPr/>
+        </p:nvSpPr>
+        <p:spPr>
+          <a:xfrm>
+            <a:off x="6355080" y="3995928"/>
+            <a:ext cx="5349240" cy="347472"/>
+          </a:xfrm>
+          <a:prstGeom prst="rect">
+            <a:avLst/>
+          </a:prstGeom>
+          <a:noFill/>
+        </p:spPr>
+        <p:txBody>
+          <a:bodyPr wrap="square" lIns="0" rIns="0" tIns="0" bIns="0">
+            <a:spAutoFit/>
+          </a:bodyPr>
+          <a:lstStyle/>
+          <a:p>
+            <a:pPr>
+              <a:spcAft>
+                <a:spcPts val="200"/>
+              </a:spcAft>
+            </a:pPr>
+            <a:r>
+              <a:rPr sz="1500" b="1">
+                <a:solidFill>
+                  <a:srgbClr val="1E2761"/>
+                </a:solidFill>
+                <a:latin typeface="Calibri"/>
+              </a:rPr>
+              <a:t>RESEARCH QUESTION</a:t>
+            </a:r>
+          </a:p>
+        </p:txBody>
+      </p:sp>
+      <p:sp>
+        <p:nvSpPr>
+          <p:cNvPr id="22" name="Rectangle 21"/>
+          <p:cNvSpPr/>
+          <p:nvPr/>
+        </p:nvSpPr>
+        <p:spPr>
+          <a:xfrm>
+            <a:off x="5943600" y="4434840"/>
+            <a:ext cx="5760720" cy="1965960"/>
+          </a:xfrm>
+          <a:prstGeom prst="rect">
+            <a:avLst/>
+          </a:prstGeom>
+          <a:solidFill>
+            <a:srgbClr val="F7F8FC"/>
+          </a:solidFill>
+          <a:ln>
+            <a:noFill/>
+          </a:ln>
+        </p:spPr>
+        <p:style>
+          <a:lnRef idx="1">
+            <a:schemeClr val="accent1"/>
+          </a:lnRef>
+          <a:fillRef idx="3">
+            <a:schemeClr val="accent1"/>
+          </a:fillRef>
+          <a:effectRef idx="2">
+            <a:schemeClr val="accent1"/>
+          </a:effectRef>
+          <a:fontRef idx="minor">
+            <a:schemeClr val="lt1"/>
+          </a:fontRef>
+        </p:style>
+        <p:txBody>
+          <a:bodyPr rtlCol="0" anchor="ctr"/>
+          <a:lstStyle/>
+          <a:p/>
+        </p:txBody>
+      </p:sp>
+      <p:sp>
+        <p:nvSpPr>
+          <p:cNvPr id="23" name="TextBox 22"/>
+          <p:cNvSpPr txBox="1"/>
+          <p:nvPr/>
+        </p:nvSpPr>
+        <p:spPr>
+          <a:xfrm>
+            <a:off x="6217920" y="4572000"/>
+            <a:ext cx="5212080" cy="1737360"/>
+          </a:xfrm>
+          <a:prstGeom prst="rect">
+            <a:avLst/>
+          </a:prstGeom>
+          <a:noFill/>
+        </p:spPr>
+        <p:txBody>
+          <a:bodyPr wrap="square" lIns="0" rIns="0" tIns="0" bIns="0">
+            <a:spAutoFit/>
+          </a:bodyPr>
+          <a:lstStyle/>
+          <a:p>
+            <a:pPr>
+              <a:spcAft>
+                <a:spcPts val="500"/>
+              </a:spcAft>
+            </a:pPr>
+            <a:r>
+              <a:rPr sz="1000" b="0">
+                <a:solidFill>
+                  <a:srgbClr val="5B5F6E"/>
+                </a:solidFill>
+                <a:latin typeface="Calibri"/>
+              </a:rPr>
+              <a:t>Does person-level heterogeneity alone produce different purchasing patterns, and specifically economic stratification?</a:t>
+            </a:r>
+          </a:p>
+          <a:p>
+            <a:pPr>
+              <a:spcAft>
+                <a:spcPts val="500"/>
+              </a:spcAft>
+            </a:pPr>
+            <a:r>
+              <a:rPr sz="1000" b="1">
+                <a:solidFill>
+                  <a:srgbClr val="1E2761"/>
+                </a:solidFill>
+                <a:latin typeface="Calibri"/>
+              </a:rPr>
+              <a:t>Finding: </a:t>
+            </a:r>
+            <a:r>
+              <a:rPr sz="1000" b="0">
+                <a:solidFill>
+                  <a:srgbClr val="5B5F6E"/>
+                </a:solidFill>
+                <a:latin typeface="Calibri"/>
+              </a:rPr>
+              <a:t>Yes, but mostly through budgets. Richer buyers reach the premium tier more than poorer ones (+0.076, CI excludes 0), and all 3 graded criteria pass.</a:t>
+            </a:r>
+          </a:p>
+          <a:p>
+            <a:pPr>
+              <a:spcAft>
+                <a:spcPts val="500"/>
+              </a:spcAft>
+            </a:pPr>
+            <a:r>
+              <a:rPr sz="1000" b="1">
+                <a:solidFill>
+                  <a:srgbClr val="1E2761"/>
+                </a:solidFill>
+                <a:latin typeface="Calibri"/>
+              </a:rPr>
+              <a:t>Caveat: </a:t>
+            </a:r>
+            <a:r>
+              <a:rPr sz="1000" b="0">
+                <a:solidFill>
+                  <a:srgbClr val="5B5F6E"/>
+                </a:solidFill>
+                <a:latin typeface="Calibri"/>
+              </a:rPr>
+              <a:t>Only ~22% of the gap is price sensitivity: equalizing α across classes leaves +0.059 of it standing, so budget heterogeneity does the rest. Poor's 0.000 Shigh share is an affordability wall (budget 3 &lt; price 6), unchanged by any α, and is not evidence for the price-sensitivity mechanism.</a:t>
+            </a:r>
+          </a:p>
+        </p:txBody>
+      </p:sp>
+      <p:sp>
+        <p:nvSpPr>
+          <p:cNvPr id="24" name="TextBox 23"/>
+          <p:cNvSpPr txBox="1"/>
+          <p:nvPr/>
+        </p:nvSpPr>
+        <p:spPr>
+          <a:xfrm>
+            <a:off x="457200" y="6446520"/>
+            <a:ext cx="11247120" cy="274320"/>
+          </a:xfrm>
+          <a:prstGeom prst="rect">
+            <a:avLst/>
+          </a:prstGeom>
+          <a:noFill/>
+        </p:spPr>
+        <p:txBody>
+          <a:bodyPr wrap="square" lIns="0" rIns="0" tIns="0" bIns="0">
+            <a:spAutoFit/>
+          </a:bodyPr>
+          <a:lstStyle/>
+          <a:p>
+            <a:pPr>
+              <a:spcAft>
+                <a:spcPts val="200"/>
+              </a:spcAft>
+            </a:pPr>
+            <a:r>
+              <a:rPr sz="950" b="0">
+                <a:solidFill>
+                  <a:srgbClr val="5B5F6E"/>
+                </a:solidFill>
+                <a:latin typeface="Calibri"/>
+              </a:rPr>
+              <a:t>Generated automatically at phase completion  ·  Phase Completion Deliverable  ·  market-sim project</a:t>
+            </a:r>
+          </a:p>
+        </p:txBody>
+      </p:sp>
+    </p:spTree>
+  </p:cSld>
+  <p:clrMapOvr>
+    <a:masterClrMapping/>
+  </p:clrMapOvr>
+</p:sld>
+</file>
+
 <file path=ppt/theme/theme1.xml><?xml version="1.0" encoding="utf-8"?>
 <a:theme xmlns:a="http://schemas.openxmlformats.org/drawingml/2006/main" name="Office Theme">
   <a:themeElements>

--- a/project_tracking.pptx
+++ b/project_tracking.pptx
@@ -7,6 +7,7 @@
   <p:sldIdLst>
     <p:sldId id="256" r:id="rId7"/>
     <p:sldId id="257" r:id="rId8"/>
+    <p:sldId id="258" r:id="rId9"/>
   </p:sldIdLst>
   <p:sldSz cx="12191969" cy="6858000" type="screen4x3"/>
   <p:notesSz cx="6858000" cy="9144000"/>
@@ -6134,6 +6135,1474 @@
 </p:sld>
 </file>
 
+<file path=ppt/slides/slide3.xml><?xml version="1.0" encoding="utf-8"?>
+<p:sld xmlns:a="http://schemas.openxmlformats.org/drawingml/2006/main" xmlns:p="http://schemas.openxmlformats.org/presentationml/2006/main" xmlns:r="http://schemas.openxmlformats.org/officeDocument/2006/relationships">
+  <p:cSld>
+    <p:spTree>
+      <p:nvGrpSpPr>
+        <p:cNvPr id="1" name=""/>
+        <p:cNvGrpSpPr/>
+        <p:nvPr/>
+      </p:nvGrpSpPr>
+      <p:grpSpPr/>
+      <p:sp>
+        <p:nvSpPr>
+          <p:cNvPr id="2" name="TextBox 1"/>
+          <p:cNvSpPr txBox="1"/>
+          <p:nvPr/>
+        </p:nvSpPr>
+        <p:spPr>
+          <a:xfrm>
+            <a:off x="457200" y="320040"/>
+            <a:ext cx="8229600" cy="548640"/>
+          </a:xfrm>
+          <a:prstGeom prst="rect">
+            <a:avLst/>
+          </a:prstGeom>
+          <a:noFill/>
+        </p:spPr>
+        <p:txBody>
+          <a:bodyPr wrap="square" lIns="0" rIns="0" tIns="0" bIns="0">
+            <a:spAutoFit/>
+          </a:bodyPr>
+          <a:lstStyle/>
+          <a:p>
+            <a:pPr>
+              <a:spcAft>
+                <a:spcPts val="200"/>
+              </a:spcAft>
+            </a:pPr>
+            <a:r>
+              <a:rPr sz="3200" b="1">
+                <a:solidFill>
+                  <a:srgbClr val="1E2761"/>
+                </a:solidFill>
+                <a:latin typeface="Cambria"/>
+              </a:rPr>
+              <a:t>Phase 3 — Person + Environment</a:t>
+            </a:r>
+          </a:p>
+        </p:txBody>
+      </p:sp>
+      <p:sp>
+        <p:nvSpPr>
+          <p:cNvPr id="3" name="TextBox 2"/>
+          <p:cNvSpPr txBox="1"/>
+          <p:nvPr/>
+        </p:nvSpPr>
+        <p:spPr>
+          <a:xfrm>
+            <a:off x="457200" y="868680"/>
+            <a:ext cx="8229600" cy="274320"/>
+          </a:xfrm>
+          <a:prstGeom prst="rect">
+            <a:avLst/>
+          </a:prstGeom>
+          <a:noFill/>
+        </p:spPr>
+        <p:txBody>
+          <a:bodyPr wrap="square" lIns="0" rIns="0" tIns="0" bIns="0">
+            <a:spAutoFit/>
+          </a:bodyPr>
+          <a:lstStyle/>
+          <a:p>
+            <a:pPr>
+              <a:spcAft>
+                <a:spcPts val="200"/>
+              </a:spcAft>
+            </a:pPr>
+            <a:r>
+              <a:rPr sz="1200" b="0">
+                <a:solidFill>
+                  <a:srgbClr val="5B5F6E"/>
+                </a:solidFill>
+                <a:latin typeface="Calibri"/>
+              </a:rPr>
+              <a:t>Stall position drives visibility  ·  git tag: phase3-validated  ·  30 seeds</a:t>
+            </a:r>
+          </a:p>
+        </p:txBody>
+      </p:sp>
+      <p:sp>
+        <p:nvSpPr>
+          <p:cNvPr id="4" name="Rounded Rectangle 3"/>
+          <p:cNvSpPr/>
+          <p:nvPr/>
+        </p:nvSpPr>
+        <p:spPr>
+          <a:xfrm>
+            <a:off x="9464040" y="365760"/>
+            <a:ext cx="2240280" cy="384048"/>
+          </a:xfrm>
+          <a:prstGeom prst="roundRect">
+            <a:avLst/>
+          </a:prstGeom>
+          <a:solidFill>
+            <a:srgbClr val="1E7A4D"/>
+          </a:solidFill>
+          <a:ln>
+            <a:noFill/>
+          </a:ln>
+        </p:spPr>
+        <p:style>
+          <a:lnRef idx="1">
+            <a:schemeClr val="accent1"/>
+          </a:lnRef>
+          <a:fillRef idx="3">
+            <a:schemeClr val="accent1"/>
+          </a:fillRef>
+          <a:effectRef idx="2">
+            <a:schemeClr val="accent1"/>
+          </a:effectRef>
+          <a:fontRef idx="minor">
+            <a:schemeClr val="lt1"/>
+          </a:fontRef>
+        </p:style>
+        <p:txBody>
+          <a:bodyPr rtlCol="0" anchor="ctr"/>
+          <a:lstStyle/>
+          <a:p>
+            <a:pPr algn="ctr"/>
+            <a:r>
+              <a:rPr sz="1050" b="1">
+                <a:solidFill>
+                  <a:srgbClr val="FFFFFF"/>
+                </a:solidFill>
+                <a:latin typeface="Calibri"/>
+              </a:rPr>
+              <a:t>ALL CRITERIA PASS</a:t>
+            </a:r>
+          </a:p>
+        </p:txBody>
+      </p:sp>
+      <p:sp>
+        <p:nvSpPr>
+          <p:cNvPr id="5" name="Rectangle 4"/>
+          <p:cNvSpPr/>
+          <p:nvPr/>
+        </p:nvSpPr>
+        <p:spPr>
+          <a:xfrm>
+            <a:off x="457200" y="1417320"/>
+            <a:ext cx="292608" cy="292608"/>
+          </a:xfrm>
+          <a:prstGeom prst="rect">
+            <a:avLst/>
+          </a:prstGeom>
+          <a:solidFill>
+            <a:srgbClr val="1E2761"/>
+          </a:solidFill>
+          <a:ln>
+            <a:noFill/>
+          </a:ln>
+        </p:spPr>
+        <p:style>
+          <a:lnRef idx="1">
+            <a:schemeClr val="accent1"/>
+          </a:lnRef>
+          <a:fillRef idx="3">
+            <a:schemeClr val="accent1"/>
+          </a:fillRef>
+          <a:effectRef idx="2">
+            <a:schemeClr val="accent1"/>
+          </a:effectRef>
+          <a:fontRef idx="minor">
+            <a:schemeClr val="lt1"/>
+          </a:fontRef>
+        </p:style>
+        <p:txBody>
+          <a:bodyPr rtlCol="0" anchor="ctr"/>
+          <a:lstStyle/>
+          <a:p/>
+        </p:txBody>
+      </p:sp>
+      <p:sp>
+        <p:nvSpPr>
+          <p:cNvPr id="6" name="TextBox 5"/>
+          <p:cNvSpPr txBox="1"/>
+          <p:nvPr/>
+        </p:nvSpPr>
+        <p:spPr>
+          <a:xfrm>
+            <a:off x="868680" y="1389888"/>
+            <a:ext cx="4617720" cy="347472"/>
+          </a:xfrm>
+          <a:prstGeom prst="rect">
+            <a:avLst/>
+          </a:prstGeom>
+          <a:noFill/>
+        </p:spPr>
+        <p:txBody>
+          <a:bodyPr wrap="square" lIns="0" rIns="0" tIns="0" bIns="0">
+            <a:spAutoFit/>
+          </a:bodyPr>
+          <a:lstStyle/>
+          <a:p>
+            <a:pPr>
+              <a:spcAft>
+                <a:spcPts val="200"/>
+              </a:spcAft>
+            </a:pPr>
+            <a:r>
+              <a:rPr sz="1500" b="1">
+                <a:solidFill>
+                  <a:srgbClr val="1E2761"/>
+                </a:solidFill>
+                <a:latin typeface="Calibri"/>
+              </a:rPr>
+              <a:t>AGENTS</a:t>
+            </a:r>
+          </a:p>
+        </p:txBody>
+      </p:sp>
+      <p:sp>
+        <p:nvSpPr>
+          <p:cNvPr id="7" name="TextBox 6"/>
+          <p:cNvSpPr txBox="1"/>
+          <p:nvPr/>
+        </p:nvSpPr>
+        <p:spPr>
+          <a:xfrm>
+            <a:off x="868680" y="1828800"/>
+            <a:ext cx="4617720" cy="566928"/>
+          </a:xfrm>
+          <a:prstGeom prst="rect">
+            <a:avLst/>
+          </a:prstGeom>
+          <a:noFill/>
+        </p:spPr>
+        <p:txBody>
+          <a:bodyPr wrap="square" lIns="0" rIns="0" tIns="0" bIns="0">
+            <a:spAutoFit/>
+          </a:bodyPr>
+          <a:lstStyle/>
+          <a:p>
+            <a:pPr>
+              <a:spcAft>
+                <a:spcPts val="200"/>
+              </a:spcAft>
+            </a:pPr>
+            <a:r>
+              <a:rPr sz="1300" b="1">
+                <a:solidFill>
+                  <a:srgbClr val="1E2761"/>
+                </a:solidFill>
+                <a:latin typeface="Calibri"/>
+              </a:rPr>
+              <a:t>Buyers: </a:t>
+            </a:r>
+            <a:r>
+              <a:rPr sz="1300" b="0">
+                <a:solidFill>
+                  <a:srgbClr val="5B5F6E"/>
+                </a:solidFill>
+                <a:latin typeface="Calibri"/>
+              </a:rPr>
+              <a:t>100 — Poor 70 / Middle 20 / Rich 10, unchanged from Phase 2</a:t>
+            </a:r>
+          </a:p>
+          <a:p>
+            <a:pPr>
+              <a:spcAft>
+                <a:spcPts val="200"/>
+              </a:spcAft>
+            </a:pPr>
+            <a:r>
+              <a:rPr sz="1300" b="1">
+                <a:solidFill>
+                  <a:srgbClr val="1E2761"/>
+                </a:solidFill>
+                <a:latin typeface="Calibri"/>
+              </a:rPr>
+              <a:t>Sellers: </a:t>
+            </a:r>
+            <a:r>
+              <a:rPr sz="1300" b="0">
+                <a:solidFill>
+                  <a:srgbClr val="5B5F6E"/>
+                </a:solidFill>
+                <a:latin typeface="Calibri"/>
+              </a:rPr>
+              <a:t>5 — Slow ×3 (2 near @0.9, 1 far @0.3) / Shigh ×2 (1 near @0.8, 1 far @0.3)</a:t>
+            </a:r>
+          </a:p>
+        </p:txBody>
+      </p:sp>
+      <p:sp>
+        <p:nvSpPr>
+          <p:cNvPr id="8" name="Rectangle 7"/>
+          <p:cNvSpPr/>
+          <p:nvPr/>
+        </p:nvSpPr>
+        <p:spPr>
+          <a:xfrm>
+            <a:off x="457200" y="2651760"/>
+            <a:ext cx="292608" cy="292608"/>
+          </a:xfrm>
+          <a:prstGeom prst="rect">
+            <a:avLst/>
+          </a:prstGeom>
+          <a:solidFill>
+            <a:srgbClr val="1E2761"/>
+          </a:solidFill>
+          <a:ln>
+            <a:noFill/>
+          </a:ln>
+        </p:spPr>
+        <p:style>
+          <a:lnRef idx="1">
+            <a:schemeClr val="accent1"/>
+          </a:lnRef>
+          <a:fillRef idx="3">
+            <a:schemeClr val="accent1"/>
+          </a:fillRef>
+          <a:effectRef idx="2">
+            <a:schemeClr val="accent1"/>
+          </a:effectRef>
+          <a:fontRef idx="minor">
+            <a:schemeClr val="lt1"/>
+          </a:fontRef>
+        </p:style>
+        <p:txBody>
+          <a:bodyPr rtlCol="0" anchor="ctr"/>
+          <a:lstStyle/>
+          <a:p/>
+        </p:txBody>
+      </p:sp>
+      <p:sp>
+        <p:nvSpPr>
+          <p:cNvPr id="9" name="TextBox 8"/>
+          <p:cNvSpPr txBox="1"/>
+          <p:nvPr/>
+        </p:nvSpPr>
+        <p:spPr>
+          <a:xfrm>
+            <a:off x="868680" y="2624328"/>
+            <a:ext cx="4617720" cy="347472"/>
+          </a:xfrm>
+          <a:prstGeom prst="rect">
+            <a:avLst/>
+          </a:prstGeom>
+          <a:noFill/>
+        </p:spPr>
+        <p:txBody>
+          <a:bodyPr wrap="square" lIns="0" rIns="0" tIns="0" bIns="0">
+            <a:spAutoFit/>
+          </a:bodyPr>
+          <a:lstStyle/>
+          <a:p>
+            <a:pPr>
+              <a:spcAft>
+                <a:spcPts val="200"/>
+              </a:spcAft>
+            </a:pPr>
+            <a:r>
+              <a:rPr sz="1500" b="1">
+                <a:solidFill>
+                  <a:srgbClr val="1E2761"/>
+                </a:solidFill>
+                <a:latin typeface="Calibri"/>
+              </a:rPr>
+              <a:t>ENVIRONMENT &amp; CONTEXT</a:t>
+            </a:r>
+          </a:p>
+        </p:txBody>
+      </p:sp>
+      <p:sp>
+        <p:nvSpPr>
+          <p:cNvPr id="10" name="TextBox 9"/>
+          <p:cNvSpPr txBox="1"/>
+          <p:nvPr/>
+        </p:nvSpPr>
+        <p:spPr>
+          <a:xfrm>
+            <a:off x="868680" y="3063240"/>
+            <a:ext cx="4617720" cy="548640"/>
+          </a:xfrm>
+          <a:prstGeom prst="rect">
+            <a:avLst/>
+          </a:prstGeom>
+          <a:noFill/>
+        </p:spPr>
+        <p:txBody>
+          <a:bodyPr wrap="square" lIns="0" rIns="0" tIns="0" bIns="0">
+            <a:spAutoFit/>
+          </a:bodyPr>
+          <a:lstStyle/>
+          <a:p>
+            <a:pPr>
+              <a:spcAft>
+                <a:spcPts val="200"/>
+              </a:spcAft>
+            </a:pPr>
+            <a:r>
+              <a:rPr sz="1300" b="0">
+                <a:solidFill>
+                  <a:srgbClr val="5B5F6E"/>
+                </a:solidFill>
+                <a:latin typeface="Calibri"/>
+              </a:rPr>
+              <a:t>-  Seller position_score → visibility_prob = 0.5 + 0.5 × position</a:t>
+            </a:r>
+          </a:p>
+          <a:p>
+            <a:pPr>
+              <a:spcAft>
+                <a:spcPts val="200"/>
+              </a:spcAft>
+            </a:pPr>
+            <a:r>
+              <a:rPr sz="1300" b="0">
+                <a:solidFill>
+                  <a:srgbClr val="5B5F6E"/>
+                </a:solidFill>
+                <a:latin typeface="Calibri"/>
+              </a:rPr>
+              <a:t>-  Unnoticed stalls are skipped, not declined. No context, no history.</a:t>
+            </a:r>
+          </a:p>
+        </p:txBody>
+      </p:sp>
+      <p:sp>
+        <p:nvSpPr>
+          <p:cNvPr id="11" name="Rectangle 10"/>
+          <p:cNvSpPr/>
+          <p:nvPr/>
+        </p:nvSpPr>
+        <p:spPr>
+          <a:xfrm>
+            <a:off x="457200" y="3886200"/>
+            <a:ext cx="292608" cy="292608"/>
+          </a:xfrm>
+          <a:prstGeom prst="rect">
+            <a:avLst/>
+          </a:prstGeom>
+          <a:solidFill>
+            <a:srgbClr val="1E2761"/>
+          </a:solidFill>
+          <a:ln>
+            <a:noFill/>
+          </a:ln>
+        </p:spPr>
+        <p:style>
+          <a:lnRef idx="1">
+            <a:schemeClr val="accent1"/>
+          </a:lnRef>
+          <a:fillRef idx="3">
+            <a:schemeClr val="accent1"/>
+          </a:fillRef>
+          <a:effectRef idx="2">
+            <a:schemeClr val="accent1"/>
+          </a:effectRef>
+          <a:fontRef idx="minor">
+            <a:schemeClr val="lt1"/>
+          </a:fontRef>
+        </p:style>
+        <p:txBody>
+          <a:bodyPr rtlCol="0" anchor="ctr"/>
+          <a:lstStyle/>
+          <a:p/>
+        </p:txBody>
+      </p:sp>
+      <p:sp>
+        <p:nvSpPr>
+          <p:cNvPr id="12" name="TextBox 11"/>
+          <p:cNvSpPr txBox="1"/>
+          <p:nvPr/>
+        </p:nvSpPr>
+        <p:spPr>
+          <a:xfrm>
+            <a:off x="868680" y="3858768"/>
+            <a:ext cx="4617720" cy="347472"/>
+          </a:xfrm>
+          <a:prstGeom prst="rect">
+            <a:avLst/>
+          </a:prstGeom>
+          <a:noFill/>
+        </p:spPr>
+        <p:txBody>
+          <a:bodyPr wrap="square" lIns="0" rIns="0" tIns="0" bIns="0">
+            <a:spAutoFit/>
+          </a:bodyPr>
+          <a:lstStyle/>
+          <a:p>
+            <a:pPr>
+              <a:spcAft>
+                <a:spcPts val="200"/>
+              </a:spcAft>
+            </a:pPr>
+            <a:r>
+              <a:rPr sz="1500" b="1">
+                <a:solidFill>
+                  <a:srgbClr val="1E2761"/>
+                </a:solidFill>
+                <a:latin typeface="Calibri"/>
+              </a:rPr>
+              <a:t>METHOD</a:t>
+            </a:r>
+          </a:p>
+        </p:txBody>
+      </p:sp>
+      <p:sp>
+        <p:nvSpPr>
+          <p:cNvPr id="13" name="TextBox 12"/>
+          <p:cNvSpPr txBox="1"/>
+          <p:nvPr/>
+        </p:nvSpPr>
+        <p:spPr>
+          <a:xfrm>
+            <a:off x="868680" y="4297680"/>
+            <a:ext cx="4617720" cy="594360"/>
+          </a:xfrm>
+          <a:prstGeom prst="rect">
+            <a:avLst/>
+          </a:prstGeom>
+          <a:noFill/>
+        </p:spPr>
+        <p:txBody>
+          <a:bodyPr wrap="square" lIns="0" rIns="0" tIns="0" bIns="0">
+            <a:spAutoFit/>
+          </a:bodyPr>
+          <a:lstStyle/>
+          <a:p>
+            <a:pPr>
+              <a:spcAft>
+                <a:spcPts val="200"/>
+              </a:spcAft>
+            </a:pPr>
+            <a:r>
+              <a:rPr sz="1300" b="0">
+                <a:solidFill>
+                  <a:srgbClr val="5B5F6E"/>
+                </a:solidFill>
+                <a:latin typeface="Calibri"/>
+              </a:rPr>
+              <a:t>Phase 2's utility and parameters, unchanged, behind a visibility gate.</a:t>
+            </a:r>
+          </a:p>
+          <a:p>
+            <a:pPr>
+              <a:spcAft>
+                <a:spcPts val="200"/>
+              </a:spcAft>
+            </a:pPr>
+            <a:r>
+              <a:rPr sz="1300" b="0">
+                <a:solidFill>
+                  <a:srgbClr val="5B5F6E"/>
+                </a:solidFill>
+                <a:latin typeface="Calibri"/>
+              </a:rPr>
+              <a:t>Visibility drawn last, so Phases 1–2 stay reproducible and this pairs with Phase 2.</a:t>
+            </a:r>
+          </a:p>
+        </p:txBody>
+      </p:sp>
+      <p:sp>
+        <p:nvSpPr>
+          <p:cNvPr id="14" name="Rectangle 13"/>
+          <p:cNvSpPr/>
+          <p:nvPr/>
+        </p:nvSpPr>
+        <p:spPr>
+          <a:xfrm>
+            <a:off x="457200" y="5029200"/>
+            <a:ext cx="292608" cy="292608"/>
+          </a:xfrm>
+          <a:prstGeom prst="rect">
+            <a:avLst/>
+          </a:prstGeom>
+          <a:solidFill>
+            <a:srgbClr val="1E2761"/>
+          </a:solidFill>
+          <a:ln>
+            <a:noFill/>
+          </a:ln>
+        </p:spPr>
+        <p:style>
+          <a:lnRef idx="1">
+            <a:schemeClr val="accent1"/>
+          </a:lnRef>
+          <a:fillRef idx="3">
+            <a:schemeClr val="accent1"/>
+          </a:fillRef>
+          <a:effectRef idx="2">
+            <a:schemeClr val="accent1"/>
+          </a:effectRef>
+          <a:fontRef idx="minor">
+            <a:schemeClr val="lt1"/>
+          </a:fontRef>
+        </p:style>
+        <p:txBody>
+          <a:bodyPr rtlCol="0" anchor="ctr"/>
+          <a:lstStyle/>
+          <a:p/>
+        </p:txBody>
+      </p:sp>
+      <p:sp>
+        <p:nvSpPr>
+          <p:cNvPr id="15" name="TextBox 14"/>
+          <p:cNvSpPr txBox="1"/>
+          <p:nvPr/>
+        </p:nvSpPr>
+        <p:spPr>
+          <a:xfrm>
+            <a:off x="868680" y="5001768"/>
+            <a:ext cx="4617720" cy="347472"/>
+          </a:xfrm>
+          <a:prstGeom prst="rect">
+            <a:avLst/>
+          </a:prstGeom>
+          <a:noFill/>
+        </p:spPr>
+        <p:txBody>
+          <a:bodyPr wrap="square" lIns="0" rIns="0" tIns="0" bIns="0">
+            <a:spAutoFit/>
+          </a:bodyPr>
+          <a:lstStyle/>
+          <a:p>
+            <a:pPr>
+              <a:spcAft>
+                <a:spcPts val="200"/>
+              </a:spcAft>
+            </a:pPr>
+            <a:r>
+              <a:rPr sz="1500" b="1">
+                <a:solidFill>
+                  <a:srgbClr val="1E2761"/>
+                </a:solidFill>
+                <a:latin typeface="Calibri"/>
+              </a:rPr>
+              <a:t>LITERATURE BASIS</a:t>
+            </a:r>
+          </a:p>
+        </p:txBody>
+      </p:sp>
+      <p:sp>
+        <p:nvSpPr>
+          <p:cNvPr id="16" name="TextBox 15"/>
+          <p:cNvSpPr txBox="1"/>
+          <p:nvPr/>
+        </p:nvSpPr>
+        <p:spPr>
+          <a:xfrm>
+            <a:off x="868680" y="5440680"/>
+            <a:ext cx="4617720" cy="1005840"/>
+          </a:xfrm>
+          <a:prstGeom prst="rect">
+            <a:avLst/>
+          </a:prstGeom>
+          <a:noFill/>
+        </p:spPr>
+        <p:txBody>
+          <a:bodyPr wrap="square" lIns="0" rIns="0" tIns="0" bIns="0">
+            <a:spAutoFit/>
+          </a:bodyPr>
+          <a:lstStyle/>
+          <a:p>
+            <a:pPr>
+              <a:spcAft>
+                <a:spcPts val="600"/>
+              </a:spcAft>
+            </a:pPr>
+            <a:r>
+              <a:rPr sz="1100" b="1">
+                <a:solidFill>
+                  <a:srgbClr val="1E2761"/>
+                </a:solidFill>
+                <a:latin typeface="Calibri"/>
+              </a:rPr>
+              <a:t>Huff (1963, 1964), </a:t>
+            </a:r>
+            <a:r>
+              <a:rPr sz="1100" b="0">
+                <a:solidFill>
+                  <a:srgbClr val="5B5F6E"/>
+                </a:solidFill>
+                <a:latin typeface="Calibri"/>
+              </a:rPr>
+              <a:t>gravity-based retail trade-area model — basis for visibility declining with distance from the entrance.</a:t>
+            </a:r>
+          </a:p>
+        </p:txBody>
+      </p:sp>
+      <p:sp>
+        <p:nvSpPr>
+          <p:cNvPr id="17" name="Rectangle 16"/>
+          <p:cNvSpPr/>
+          <p:nvPr/>
+        </p:nvSpPr>
+        <p:spPr>
+          <a:xfrm>
+            <a:off x="5943600" y="1417320"/>
+            <a:ext cx="292608" cy="292608"/>
+          </a:xfrm>
+          <a:prstGeom prst="rect">
+            <a:avLst/>
+          </a:prstGeom>
+          <a:solidFill>
+            <a:srgbClr val="1E2761"/>
+          </a:solidFill>
+          <a:ln>
+            <a:noFill/>
+          </a:ln>
+        </p:spPr>
+        <p:style>
+          <a:lnRef idx="1">
+            <a:schemeClr val="accent1"/>
+          </a:lnRef>
+          <a:fillRef idx="3">
+            <a:schemeClr val="accent1"/>
+          </a:fillRef>
+          <a:effectRef idx="2">
+            <a:schemeClr val="accent1"/>
+          </a:effectRef>
+          <a:fontRef idx="minor">
+            <a:schemeClr val="lt1"/>
+          </a:fontRef>
+        </p:style>
+        <p:txBody>
+          <a:bodyPr rtlCol="0" anchor="ctr"/>
+          <a:lstStyle/>
+          <a:p/>
+        </p:txBody>
+      </p:sp>
+      <p:sp>
+        <p:nvSpPr>
+          <p:cNvPr id="18" name="TextBox 17"/>
+          <p:cNvSpPr txBox="1"/>
+          <p:nvPr/>
+        </p:nvSpPr>
+        <p:spPr>
+          <a:xfrm>
+            <a:off x="6355080" y="1389888"/>
+            <a:ext cx="5349240" cy="347472"/>
+          </a:xfrm>
+          <a:prstGeom prst="rect">
+            <a:avLst/>
+          </a:prstGeom>
+          <a:noFill/>
+        </p:spPr>
+        <p:txBody>
+          <a:bodyPr wrap="square" lIns="0" rIns="0" tIns="0" bIns="0">
+            <a:spAutoFit/>
+          </a:bodyPr>
+          <a:lstStyle/>
+          <a:p>
+            <a:pPr>
+              <a:spcAft>
+                <a:spcPts val="200"/>
+              </a:spcAft>
+            </a:pPr>
+            <a:r>
+              <a:rPr sz="1500" b="1">
+                <a:solidFill>
+                  <a:srgbClr val="1E2761"/>
+                </a:solidFill>
+                <a:latin typeface="Calibri"/>
+              </a:rPr>
+              <a:t>KEY RESULTS</a:t>
+            </a:r>
+          </a:p>
+        </p:txBody>
+      </p:sp>
+      <p:graphicFrame>
+        <p:nvGraphicFramePr>
+          <p:cNvPr id="19" name="Table 18"/>
+          <p:cNvGraphicFramePr>
+            <a:graphicFrameLocks noGrp="1"/>
+          </p:cNvGraphicFramePr>
+          <p:nvPr/>
+        </p:nvGraphicFramePr>
+        <p:xfrm>
+          <a:off x="5943600" y="1874519"/>
+          <a:ext cx="5760720" cy="1645920"/>
+        </p:xfrm>
+        <a:graphic>
+          <a:graphicData uri="http://schemas.openxmlformats.org/drawingml/2006/table">
+            <a:tbl>
+              <a:tblPr firstRow="1" bandRow="1">
+                <a:tableStyleId>{5C22544A-7EE6-4342-B048-85BDC9FD1C3A}</a:tableStyleId>
+              </a:tblPr>
+              <a:tblGrid>
+                <a:gridCol w="3200400"/>
+                <a:gridCol w="1463040"/>
+                <a:gridCol w="1097280"/>
+              </a:tblGrid>
+              <a:tr h="274320">
+                <a:tc>
+                  <a:txBody>
+                    <a:bodyPr/>
+                    <a:lstStyle/>
+                    <a:p>
+                      <a:r>
+                        <a:rPr sz="1100" b="1">
+                          <a:solidFill>
+                            <a:srgbClr val="FFFFFF"/>
+                          </a:solidFill>
+                          <a:latin typeface="Calibri"/>
+                        </a:rPr>
+                        <a:t>Metric</a:t>
+                      </a:r>
+                    </a:p>
+                  </a:txBody>
+                  <a:tcPr>
+                    <a:solidFill>
+                      <a:srgbClr val="1E2761"/>
+                    </a:solidFill>
+                  </a:tcPr>
+                </a:tc>
+                <a:tc>
+                  <a:txBody>
+                    <a:bodyPr/>
+                    <a:lstStyle/>
+                    <a:p>
+                      <a:r>
+                        <a:rPr sz="1100" b="1">
+                          <a:solidFill>
+                            <a:srgbClr val="FFFFFF"/>
+                          </a:solidFill>
+                          <a:latin typeface="Calibri"/>
+                        </a:rPr>
+                        <a:t>Value</a:t>
+                      </a:r>
+                    </a:p>
+                  </a:txBody>
+                  <a:tcPr>
+                    <a:solidFill>
+                      <a:srgbClr val="1E2761"/>
+                    </a:solidFill>
+                  </a:tcPr>
+                </a:tc>
+                <a:tc>
+                  <a:txBody>
+                    <a:bodyPr/>
+                    <a:lstStyle/>
+                    <a:p>
+                      <a:r>
+                        <a:rPr sz="1100" b="1">
+                          <a:solidFill>
+                            <a:srgbClr val="FFFFFF"/>
+                          </a:solidFill>
+                          <a:latin typeface="Calibri"/>
+                        </a:rPr>
+                        <a:t/>
+                      </a:r>
+                    </a:p>
+                  </a:txBody>
+                  <a:tcPr>
+                    <a:solidFill>
+                      <a:srgbClr val="1E2761"/>
+                    </a:solidFill>
+                  </a:tcPr>
+                </a:tc>
+              </a:tr>
+              <a:tr h="274320">
+                <a:tc>
+                  <a:txBody>
+                    <a:bodyPr/>
+                    <a:lstStyle/>
+                    <a:p>
+                      <a:r>
+                        <a:rPr sz="1100">
+                          <a:solidFill>
+                            <a:srgbClr val="1E2761"/>
+                          </a:solidFill>
+                          <a:latin typeface="Calibri"/>
+                        </a:rPr>
+                        <a:t>Participation rate (0.6–1.0)</a:t>
+                      </a:r>
+                    </a:p>
+                  </a:txBody>
+                  <a:tcPr>
+                    <a:solidFill>
+                      <a:srgbClr val="FFFFFF"/>
+                    </a:solidFill>
+                  </a:tcPr>
+                </a:tc>
+                <a:tc>
+                  <a:txBody>
+                    <a:bodyPr/>
+                    <a:lstStyle/>
+                    <a:p>
+                      <a:r>
+                        <a:rPr sz="1100">
+                          <a:solidFill>
+                            <a:srgbClr val="5B5F6E"/>
+                          </a:solidFill>
+                          <a:latin typeface="Calibri"/>
+                        </a:rPr>
+                        <a:t>0.753</a:t>
+                      </a:r>
+                    </a:p>
+                  </a:txBody>
+                  <a:tcPr>
+                    <a:solidFill>
+                      <a:srgbClr val="FFFFFF"/>
+                    </a:solidFill>
+                  </a:tcPr>
+                </a:tc>
+                <a:tc>
+                  <a:txBody>
+                    <a:bodyPr/>
+                    <a:lstStyle/>
+                    <a:p>
+                      <a:pPr algn="ctr"/>
+                      <a:r>
+                        <a:rPr sz="1100" b="1">
+                          <a:solidFill>
+                            <a:srgbClr val="1E7A4D"/>
+                          </a:solidFill>
+                          <a:latin typeface="Calibri"/>
+                        </a:rPr>
+                        <a:t>PASS</a:t>
+                      </a:r>
+                    </a:p>
+                  </a:txBody>
+                  <a:tcPr>
+                    <a:solidFill>
+                      <a:srgbClr val="FFFFFF"/>
+                    </a:solidFill>
+                  </a:tcPr>
+                </a:tc>
+              </a:tr>
+              <a:tr h="274320">
+                <a:tc>
+                  <a:txBody>
+                    <a:bodyPr/>
+                    <a:lstStyle/>
+                    <a:p>
+                      <a:r>
+                        <a:rPr sz="1100">
+                          <a:solidFill>
+                            <a:srgbClr val="1E2761"/>
+                          </a:solidFill>
+                          <a:latin typeface="Calibri"/>
+                        </a:rPr>
+                        <a:t>Slow: near − far n_sold</a:t>
+                      </a:r>
+                    </a:p>
+                  </a:txBody>
+                  <a:tcPr>
+                    <a:solidFill>
+                      <a:srgbClr val="F7F8FC"/>
+                    </a:solidFill>
+                  </a:tcPr>
+                </a:tc>
+                <a:tc>
+                  <a:txBody>
+                    <a:bodyPr/>
+                    <a:lstStyle/>
+                    <a:p>
+                      <a:r>
+                        <a:rPr sz="1100">
+                          <a:solidFill>
+                            <a:srgbClr val="5B5F6E"/>
+                          </a:solidFill>
+                          <a:latin typeface="Calibri"/>
+                        </a:rPr>
+                        <a:t>+8.67</a:t>
+                      </a:r>
+                    </a:p>
+                  </a:txBody>
+                  <a:tcPr>
+                    <a:solidFill>
+                      <a:srgbClr val="F7F8FC"/>
+                    </a:solidFill>
+                  </a:tcPr>
+                </a:tc>
+                <a:tc>
+                  <a:txBody>
+                    <a:bodyPr/>
+                    <a:lstStyle/>
+                    <a:p>
+                      <a:pPr algn="ctr"/>
+                      <a:r>
+                        <a:rPr sz="1100" b="1">
+                          <a:solidFill>
+                            <a:srgbClr val="1E7A4D"/>
+                          </a:solidFill>
+                          <a:latin typeface="Calibri"/>
+                        </a:rPr>
+                        <a:t>PASS</a:t>
+                      </a:r>
+                    </a:p>
+                  </a:txBody>
+                  <a:tcPr>
+                    <a:solidFill>
+                      <a:srgbClr val="F7F8FC"/>
+                    </a:solidFill>
+                  </a:tcPr>
+                </a:tc>
+              </a:tr>
+              <a:tr h="274320">
+                <a:tc>
+                  <a:txBody>
+                    <a:bodyPr/>
+                    <a:lstStyle/>
+                    <a:p>
+                      <a:r>
+                        <a:rPr sz="1100">
+                          <a:solidFill>
+                            <a:srgbClr val="1E2761"/>
+                          </a:solidFill>
+                          <a:latin typeface="Calibri"/>
+                        </a:rPr>
+                        <a:t>Shigh: near − far n_sold</a:t>
+                      </a:r>
+                    </a:p>
+                  </a:txBody>
+                  <a:tcPr>
+                    <a:solidFill>
+                      <a:srgbClr val="FFFFFF"/>
+                    </a:solidFill>
+                  </a:tcPr>
+                </a:tc>
+                <a:tc>
+                  <a:txBody>
+                    <a:bodyPr/>
+                    <a:lstStyle/>
+                    <a:p>
+                      <a:r>
+                        <a:rPr sz="1100">
+                          <a:solidFill>
+                            <a:srgbClr val="5B5F6E"/>
+                          </a:solidFill>
+                          <a:latin typeface="Calibri"/>
+                        </a:rPr>
+                        <a:t>+1.97</a:t>
+                      </a:r>
+                    </a:p>
+                  </a:txBody>
+                  <a:tcPr>
+                    <a:solidFill>
+                      <a:srgbClr val="FFFFFF"/>
+                    </a:solidFill>
+                  </a:tcPr>
+                </a:tc>
+                <a:tc>
+                  <a:txBody>
+                    <a:bodyPr/>
+                    <a:lstStyle/>
+                    <a:p>
+                      <a:pPr algn="ctr"/>
+                      <a:r>
+                        <a:rPr sz="1100" b="1">
+                          <a:solidFill>
+                            <a:srgbClr val="1E7A4D"/>
+                          </a:solidFill>
+                          <a:latin typeface="Calibri"/>
+                        </a:rPr>
+                        <a:t>PASS</a:t>
+                      </a:r>
+                    </a:p>
+                  </a:txBody>
+                  <a:tcPr>
+                    <a:solidFill>
+                      <a:srgbClr val="FFFFFF"/>
+                    </a:solidFill>
+                  </a:tcPr>
+                </a:tc>
+              </a:tr>
+              <a:tr h="274320">
+                <a:tc>
+                  <a:txBody>
+                    <a:bodyPr/>
+                    <a:lstStyle/>
+                    <a:p>
+                      <a:r>
+                        <a:rPr sz="1100">
+                          <a:solidFill>
+                            <a:srgbClr val="1E2761"/>
+                          </a:solidFill>
+                          <a:latin typeface="Calibri"/>
+                        </a:rPr>
+                        <a:t>Class→tier share shift vs Phase 2</a:t>
+                      </a:r>
+                    </a:p>
+                  </a:txBody>
+                  <a:tcPr>
+                    <a:solidFill>
+                      <a:srgbClr val="F7F8FC"/>
+                    </a:solidFill>
+                  </a:tcPr>
+                </a:tc>
+                <a:tc>
+                  <a:txBody>
+                    <a:bodyPr/>
+                    <a:lstStyle/>
+                    <a:p>
+                      <a:r>
+                        <a:rPr sz="1100">
+                          <a:solidFill>
+                            <a:srgbClr val="5B5F6E"/>
+                          </a:solidFill>
+                          <a:latin typeface="Calibri"/>
+                        </a:rPr>
+                        <a:t>CI incl. 0</a:t>
+                      </a:r>
+                    </a:p>
+                  </a:txBody>
+                  <a:tcPr>
+                    <a:solidFill>
+                      <a:srgbClr val="F7F8FC"/>
+                    </a:solidFill>
+                  </a:tcPr>
+                </a:tc>
+                <a:tc>
+                  <a:txBody>
+                    <a:bodyPr/>
+                    <a:lstStyle/>
+                    <a:p>
+                      <a:pPr algn="ctr"/>
+                      <a:r>
+                        <a:rPr sz="1100" b="1">
+                          <a:solidFill>
+                            <a:srgbClr val="5B5F6E"/>
+                          </a:solidFill>
+                          <a:latin typeface="Calibri"/>
+                        </a:rPr>
+                        <a:t>—</a:t>
+                      </a:r>
+                    </a:p>
+                  </a:txBody>
+                  <a:tcPr>
+                    <a:solidFill>
+                      <a:srgbClr val="F7F8FC"/>
+                    </a:solidFill>
+                  </a:tcPr>
+                </a:tc>
+              </a:tr>
+              <a:tr h="274320">
+                <a:tc>
+                  <a:txBody>
+                    <a:bodyPr/>
+                    <a:lstStyle/>
+                    <a:p>
+                      <a:r>
+                        <a:rPr sz="1100">
+                          <a:solidFill>
+                            <a:srgbClr val="1E2761"/>
+                          </a:solidFill>
+                          <a:latin typeface="Calibri"/>
+                        </a:rPr>
+                        <a:t>Participation shift vs Phase 2</a:t>
+                      </a:r>
+                    </a:p>
+                  </a:txBody>
+                  <a:tcPr>
+                    <a:solidFill>
+                      <a:srgbClr val="FFFFFF"/>
+                    </a:solidFill>
+                  </a:tcPr>
+                </a:tc>
+                <a:tc>
+                  <a:txBody>
+                    <a:bodyPr/>
+                    <a:lstStyle/>
+                    <a:p>
+                      <a:r>
+                        <a:rPr sz="1100">
+                          <a:solidFill>
+                            <a:srgbClr val="5B5F6E"/>
+                          </a:solidFill>
+                          <a:latin typeface="Calibri"/>
+                        </a:rPr>
+                        <a:t>-0.065</a:t>
+                      </a:r>
+                    </a:p>
+                  </a:txBody>
+                  <a:tcPr>
+                    <a:solidFill>
+                      <a:srgbClr val="FFFFFF"/>
+                    </a:solidFill>
+                  </a:tcPr>
+                </a:tc>
+                <a:tc>
+                  <a:txBody>
+                    <a:bodyPr/>
+                    <a:lstStyle/>
+                    <a:p>
+                      <a:pPr algn="ctr"/>
+                      <a:r>
+                        <a:rPr sz="1100" b="1">
+                          <a:solidFill>
+                            <a:srgbClr val="5B5F6E"/>
+                          </a:solidFill>
+                          <a:latin typeface="Calibri"/>
+                        </a:rPr>
+                        <a:t>—</a:t>
+                      </a:r>
+                    </a:p>
+                  </a:txBody>
+                  <a:tcPr>
+                    <a:solidFill>
+                      <a:srgbClr val="FFFFFF"/>
+                    </a:solidFill>
+                  </a:tcPr>
+                </a:tc>
+              </a:tr>
+            </a:tbl>
+          </a:graphicData>
+        </a:graphic>
+      </p:graphicFrame>
+      <p:sp>
+        <p:nvSpPr>
+          <p:cNvPr id="20" name="Rectangle 19"/>
+          <p:cNvSpPr/>
+          <p:nvPr/>
+        </p:nvSpPr>
+        <p:spPr>
+          <a:xfrm>
+            <a:off x="5943600" y="4023360"/>
+            <a:ext cx="292608" cy="292608"/>
+          </a:xfrm>
+          <a:prstGeom prst="rect">
+            <a:avLst/>
+          </a:prstGeom>
+          <a:solidFill>
+            <a:srgbClr val="1E2761"/>
+          </a:solidFill>
+          <a:ln>
+            <a:noFill/>
+          </a:ln>
+        </p:spPr>
+        <p:style>
+          <a:lnRef idx="1">
+            <a:schemeClr val="accent1"/>
+          </a:lnRef>
+          <a:fillRef idx="3">
+            <a:schemeClr val="accent1"/>
+          </a:fillRef>
+          <a:effectRef idx="2">
+            <a:schemeClr val="accent1"/>
+          </a:effectRef>
+          <a:fontRef idx="minor">
+            <a:schemeClr val="lt1"/>
+          </a:fontRef>
+        </p:style>
+        <p:txBody>
+          <a:bodyPr rtlCol="0" anchor="ctr"/>
+          <a:lstStyle/>
+          <a:p/>
+        </p:txBody>
+      </p:sp>
+      <p:sp>
+        <p:nvSpPr>
+          <p:cNvPr id="21" name="TextBox 20"/>
+          <p:cNvSpPr txBox="1"/>
+          <p:nvPr/>
+        </p:nvSpPr>
+        <p:spPr>
+          <a:xfrm>
+            <a:off x="6355080" y="3995928"/>
+            <a:ext cx="5349240" cy="347472"/>
+          </a:xfrm>
+          <a:prstGeom prst="rect">
+            <a:avLst/>
+          </a:prstGeom>
+          <a:noFill/>
+        </p:spPr>
+        <p:txBody>
+          <a:bodyPr wrap="square" lIns="0" rIns="0" tIns="0" bIns="0">
+            <a:spAutoFit/>
+          </a:bodyPr>
+          <a:lstStyle/>
+          <a:p>
+            <a:pPr>
+              <a:spcAft>
+                <a:spcPts val="200"/>
+              </a:spcAft>
+            </a:pPr>
+            <a:r>
+              <a:rPr sz="1500" b="1">
+                <a:solidFill>
+                  <a:srgbClr val="1E2761"/>
+                </a:solidFill>
+                <a:latin typeface="Calibri"/>
+              </a:rPr>
+              <a:t>RESEARCH QUESTION</a:t>
+            </a:r>
+          </a:p>
+        </p:txBody>
+      </p:sp>
+      <p:sp>
+        <p:nvSpPr>
+          <p:cNvPr id="22" name="Rectangle 21"/>
+          <p:cNvSpPr/>
+          <p:nvPr/>
+        </p:nvSpPr>
+        <p:spPr>
+          <a:xfrm>
+            <a:off x="5943600" y="4434840"/>
+            <a:ext cx="5760720" cy="1965960"/>
+          </a:xfrm>
+          <a:prstGeom prst="rect">
+            <a:avLst/>
+          </a:prstGeom>
+          <a:solidFill>
+            <a:srgbClr val="F7F8FC"/>
+          </a:solidFill>
+          <a:ln>
+            <a:noFill/>
+          </a:ln>
+        </p:spPr>
+        <p:style>
+          <a:lnRef idx="1">
+            <a:schemeClr val="accent1"/>
+          </a:lnRef>
+          <a:fillRef idx="3">
+            <a:schemeClr val="accent1"/>
+          </a:fillRef>
+          <a:effectRef idx="2">
+            <a:schemeClr val="accent1"/>
+          </a:effectRef>
+          <a:fontRef idx="minor">
+            <a:schemeClr val="lt1"/>
+          </a:fontRef>
+        </p:style>
+        <p:txBody>
+          <a:bodyPr rtlCol="0" anchor="ctr"/>
+          <a:lstStyle/>
+          <a:p/>
+        </p:txBody>
+      </p:sp>
+      <p:sp>
+        <p:nvSpPr>
+          <p:cNvPr id="23" name="TextBox 22"/>
+          <p:cNvSpPr txBox="1"/>
+          <p:nvPr/>
+        </p:nvSpPr>
+        <p:spPr>
+          <a:xfrm>
+            <a:off x="6217920" y="4572000"/>
+            <a:ext cx="5212080" cy="1737360"/>
+          </a:xfrm>
+          <a:prstGeom prst="rect">
+            <a:avLst/>
+          </a:prstGeom>
+          <a:noFill/>
+        </p:spPr>
+        <p:txBody>
+          <a:bodyPr wrap="square" lIns="0" rIns="0" tIns="0" bIns="0">
+            <a:spAutoFit/>
+          </a:bodyPr>
+          <a:lstStyle/>
+          <a:p>
+            <a:pPr>
+              <a:spcAft>
+                <a:spcPts val="500"/>
+              </a:spcAft>
+            </a:pPr>
+            <a:r>
+              <a:rPr sz="1000" b="0">
+                <a:solidFill>
+                  <a:srgbClr val="5B5F6E"/>
+                </a:solidFill>
+                <a:latin typeface="Calibri"/>
+              </a:rPr>
+              <a:t>Does one environmental feature change purchase distribution beyond what person-level heterogeneity already explains?</a:t>
+            </a:r>
+          </a:p>
+          <a:p>
+            <a:pPr>
+              <a:spcAft>
+                <a:spcPts val="500"/>
+              </a:spcAft>
+            </a:pPr>
+            <a:r>
+              <a:rPr sz="1000" b="1">
+                <a:solidFill>
+                  <a:srgbClr val="1E2761"/>
+                </a:solidFill>
+                <a:latin typeface="Calibri"/>
+              </a:rPr>
+              <a:t>Finding: </a:t>
+            </a:r>
+            <a:r>
+              <a:rPr sz="1000" b="0">
+                <a:solidFill>
+                  <a:srgbClr val="5B5F6E"/>
+                </a:solidFill>
+                <a:latin typeface="Calibri"/>
+              </a:rPr>
+              <a:t>It changes which seller, not which tier. Near stalls outsell far ones in both tiers, while class-to-tier sorting is statistically unmoved (every shift's 95% CI contains zero, none wider than ±0.027).</a:t>
+            </a:r>
+          </a:p>
+          <a:p>
+            <a:pPr>
+              <a:spcAft>
+                <a:spcPts val="500"/>
+              </a:spcAft>
+            </a:pPr>
+            <a:r>
+              <a:rPr sz="1000" b="1">
+                <a:solidFill>
+                  <a:srgbClr val="1E2761"/>
+                </a:solidFill>
+                <a:latin typeface="Calibri"/>
+              </a:rPr>
+              <a:t>Caveat: </a:t>
+            </a:r>
+            <a:r>
+              <a:rPr sz="1000" b="0">
+                <a:solidFill>
+                  <a:srgbClr val="5B5F6E"/>
+                </a:solidFill>
+                <a:latin typeface="Calibri"/>
+              </a:rPr>
+              <a:t>The null share shift is a pre-registered valid outcome, not a failure. The phase's largest effect is ungraded: participation falls -0.065 (CI [-0.074, -0.057]) because unnoticed stalls cannot be bought from. Note also that this position assignment gives Slow a tier-level visibility edge (0.850 vs 0.775), so a different assignment would move tier shares differently.</a:t>
+            </a:r>
+          </a:p>
+        </p:txBody>
+      </p:sp>
+      <p:sp>
+        <p:nvSpPr>
+          <p:cNvPr id="24" name="TextBox 23"/>
+          <p:cNvSpPr txBox="1"/>
+          <p:nvPr/>
+        </p:nvSpPr>
+        <p:spPr>
+          <a:xfrm>
+            <a:off x="457200" y="6446520"/>
+            <a:ext cx="11247120" cy="274320"/>
+          </a:xfrm>
+          <a:prstGeom prst="rect">
+            <a:avLst/>
+          </a:prstGeom>
+          <a:noFill/>
+        </p:spPr>
+        <p:txBody>
+          <a:bodyPr wrap="square" lIns="0" rIns="0" tIns="0" bIns="0">
+            <a:spAutoFit/>
+          </a:bodyPr>
+          <a:lstStyle/>
+          <a:p>
+            <a:pPr>
+              <a:spcAft>
+                <a:spcPts val="200"/>
+              </a:spcAft>
+            </a:pPr>
+            <a:r>
+              <a:rPr sz="950" b="0">
+                <a:solidFill>
+                  <a:srgbClr val="5B5F6E"/>
+                </a:solidFill>
+                <a:latin typeface="Calibri"/>
+              </a:rPr>
+              <a:t>Generated automatically at phase completion  ·  Phase Completion Deliverable  ·  market-sim project</a:t>
+            </a:r>
+          </a:p>
+        </p:txBody>
+      </p:sp>
+    </p:spTree>
+  </p:cSld>
+  <p:clrMapOvr>
+    <a:masterClrMapping/>
+  </p:clrMapOvr>
+</p:sld>
+</file>
+
 <file path=ppt/theme/theme1.xml><?xml version="1.0" encoding="utf-8"?>
 <a:theme xmlns:a="http://schemas.openxmlformats.org/drawingml/2006/main" name="Office Theme">
   <a:themeElements>

--- a/project_tracking.pptx
+++ b/project_tracking.pptx
@@ -8,6 +8,7 @@
     <p:sldId id="256" r:id="rId7"/>
     <p:sldId id="257" r:id="rId8"/>
     <p:sldId id="258" r:id="rId9"/>
+    <p:sldId id="259" r:id="rId10"/>
   </p:sldIdLst>
   <p:sldSz cx="12191969" cy="6858000" type="screen4x3"/>
   <p:notesSz cx="6858000" cy="9144000"/>
@@ -7603,6 +7604,1474 @@
 </p:sld>
 </file>
 
+<file path=ppt/slides/slide4.xml><?xml version="1.0" encoding="utf-8"?>
+<p:sld xmlns:a="http://schemas.openxmlformats.org/drawingml/2006/main" xmlns:p="http://schemas.openxmlformats.org/presentationml/2006/main" xmlns:r="http://schemas.openxmlformats.org/officeDocument/2006/relationships">
+  <p:cSld>
+    <p:spTree>
+      <p:nvGrpSpPr>
+        <p:cNvPr id="1" name=""/>
+        <p:cNvGrpSpPr/>
+        <p:nvPr/>
+      </p:nvGrpSpPr>
+      <p:grpSpPr/>
+      <p:sp>
+        <p:nvSpPr>
+          <p:cNvPr id="2" name="TextBox 1"/>
+          <p:cNvSpPr txBox="1"/>
+          <p:nvPr/>
+        </p:nvSpPr>
+        <p:spPr>
+          <a:xfrm>
+            <a:off x="457200" y="320040"/>
+            <a:ext cx="8229600" cy="548640"/>
+          </a:xfrm>
+          <a:prstGeom prst="rect">
+            <a:avLst/>
+          </a:prstGeom>
+          <a:noFill/>
+        </p:spPr>
+        <p:txBody>
+          <a:bodyPr wrap="square" lIns="0" rIns="0" tIns="0" bIns="0">
+            <a:spAutoFit/>
+          </a:bodyPr>
+          <a:lstStyle/>
+          <a:p>
+            <a:pPr>
+              <a:spcAft>
+                <a:spcPts val="200"/>
+              </a:spcAft>
+            </a:pPr>
+            <a:r>
+              <a:rPr sz="3200" b="1">
+                <a:solidFill>
+                  <a:srgbClr val="1E2761"/>
+                </a:solidFill>
+                <a:latin typeface="Cambria"/>
+              </a:rPr>
+              <a:t>Phase 4 — Person + Environment + Context</a:t>
+            </a:r>
+          </a:p>
+        </p:txBody>
+      </p:sp>
+      <p:sp>
+        <p:nvSpPr>
+          <p:cNvPr id="3" name="TextBox 2"/>
+          <p:cNvSpPr txBox="1"/>
+          <p:nvPr/>
+        </p:nvSpPr>
+        <p:spPr>
+          <a:xfrm>
+            <a:off x="457200" y="868680"/>
+            <a:ext cx="8229600" cy="274320"/>
+          </a:xfrm>
+          <a:prstGeom prst="rect">
+            <a:avLst/>
+          </a:prstGeom>
+          <a:noFill/>
+        </p:spPr>
+        <p:txBody>
+          <a:bodyPr wrap="square" lIns="0" rIns="0" tIns="0" bIns="0">
+            <a:spAutoFit/>
+          </a:bodyPr>
+          <a:lstStyle/>
+          <a:p>
+            <a:pPr>
+              <a:spcAft>
+                <a:spcPts val="200"/>
+              </a:spcAft>
+            </a:pPr>
+            <a:r>
+              <a:rPr sz="1200" b="0">
+                <a:solidFill>
+                  <a:srgbClr val="5B5F6E"/>
+                </a:solidFill>
+                <a:latin typeface="Calibri"/>
+              </a:rPr>
+              <a:t>Temporary 30% promotion  ·  git tag: phase4-validated  ·  30 seeds</a:t>
+            </a:r>
+          </a:p>
+        </p:txBody>
+      </p:sp>
+      <p:sp>
+        <p:nvSpPr>
+          <p:cNvPr id="4" name="Rounded Rectangle 3"/>
+          <p:cNvSpPr/>
+          <p:nvPr/>
+        </p:nvSpPr>
+        <p:spPr>
+          <a:xfrm>
+            <a:off x="9464040" y="365760"/>
+            <a:ext cx="2240280" cy="384048"/>
+          </a:xfrm>
+          <a:prstGeom prst="roundRect">
+            <a:avLst/>
+          </a:prstGeom>
+          <a:solidFill>
+            <a:srgbClr val="1E7A4D"/>
+          </a:solidFill>
+          <a:ln>
+            <a:noFill/>
+          </a:ln>
+        </p:spPr>
+        <p:style>
+          <a:lnRef idx="1">
+            <a:schemeClr val="accent1"/>
+          </a:lnRef>
+          <a:fillRef idx="3">
+            <a:schemeClr val="accent1"/>
+          </a:fillRef>
+          <a:effectRef idx="2">
+            <a:schemeClr val="accent1"/>
+          </a:effectRef>
+          <a:fontRef idx="minor">
+            <a:schemeClr val="lt1"/>
+          </a:fontRef>
+        </p:style>
+        <p:txBody>
+          <a:bodyPr rtlCol="0" anchor="ctr"/>
+          <a:lstStyle/>
+          <a:p>
+            <a:pPr algn="ctr"/>
+            <a:r>
+              <a:rPr sz="1050" b="1">
+                <a:solidFill>
+                  <a:srgbClr val="FFFFFF"/>
+                </a:solidFill>
+                <a:latin typeface="Calibri"/>
+              </a:rPr>
+              <a:t>ALL CRITERIA PASS</a:t>
+            </a:r>
+          </a:p>
+        </p:txBody>
+      </p:sp>
+      <p:sp>
+        <p:nvSpPr>
+          <p:cNvPr id="5" name="Rectangle 4"/>
+          <p:cNvSpPr/>
+          <p:nvPr/>
+        </p:nvSpPr>
+        <p:spPr>
+          <a:xfrm>
+            <a:off x="457200" y="1417320"/>
+            <a:ext cx="292608" cy="292608"/>
+          </a:xfrm>
+          <a:prstGeom prst="rect">
+            <a:avLst/>
+          </a:prstGeom>
+          <a:solidFill>
+            <a:srgbClr val="1E2761"/>
+          </a:solidFill>
+          <a:ln>
+            <a:noFill/>
+          </a:ln>
+        </p:spPr>
+        <p:style>
+          <a:lnRef idx="1">
+            <a:schemeClr val="accent1"/>
+          </a:lnRef>
+          <a:fillRef idx="3">
+            <a:schemeClr val="accent1"/>
+          </a:fillRef>
+          <a:effectRef idx="2">
+            <a:schemeClr val="accent1"/>
+          </a:effectRef>
+          <a:fontRef idx="minor">
+            <a:schemeClr val="lt1"/>
+          </a:fontRef>
+        </p:style>
+        <p:txBody>
+          <a:bodyPr rtlCol="0" anchor="ctr"/>
+          <a:lstStyle/>
+          <a:p/>
+        </p:txBody>
+      </p:sp>
+      <p:sp>
+        <p:nvSpPr>
+          <p:cNvPr id="6" name="TextBox 5"/>
+          <p:cNvSpPr txBox="1"/>
+          <p:nvPr/>
+        </p:nvSpPr>
+        <p:spPr>
+          <a:xfrm>
+            <a:off x="868680" y="1389888"/>
+            <a:ext cx="4617720" cy="347472"/>
+          </a:xfrm>
+          <a:prstGeom prst="rect">
+            <a:avLst/>
+          </a:prstGeom>
+          <a:noFill/>
+        </p:spPr>
+        <p:txBody>
+          <a:bodyPr wrap="square" lIns="0" rIns="0" tIns="0" bIns="0">
+            <a:spAutoFit/>
+          </a:bodyPr>
+          <a:lstStyle/>
+          <a:p>
+            <a:pPr>
+              <a:spcAft>
+                <a:spcPts val="200"/>
+              </a:spcAft>
+            </a:pPr>
+            <a:r>
+              <a:rPr sz="1500" b="1">
+                <a:solidFill>
+                  <a:srgbClr val="1E2761"/>
+                </a:solidFill>
+                <a:latin typeface="Calibri"/>
+              </a:rPr>
+              <a:t>AGENTS</a:t>
+            </a:r>
+          </a:p>
+        </p:txBody>
+      </p:sp>
+      <p:sp>
+        <p:nvSpPr>
+          <p:cNvPr id="7" name="TextBox 6"/>
+          <p:cNvSpPr txBox="1"/>
+          <p:nvPr/>
+        </p:nvSpPr>
+        <p:spPr>
+          <a:xfrm>
+            <a:off x="868680" y="1828800"/>
+            <a:ext cx="4617720" cy="566928"/>
+          </a:xfrm>
+          <a:prstGeom prst="rect">
+            <a:avLst/>
+          </a:prstGeom>
+          <a:noFill/>
+        </p:spPr>
+        <p:txBody>
+          <a:bodyPr wrap="square" lIns="0" rIns="0" tIns="0" bIns="0">
+            <a:spAutoFit/>
+          </a:bodyPr>
+          <a:lstStyle/>
+          <a:p>
+            <a:pPr>
+              <a:spcAft>
+                <a:spcPts val="200"/>
+              </a:spcAft>
+            </a:pPr>
+            <a:r>
+              <a:rPr sz="1300" b="1">
+                <a:solidFill>
+                  <a:srgbClr val="1E2761"/>
+                </a:solidFill>
+                <a:latin typeface="Calibri"/>
+              </a:rPr>
+              <a:t>Buyers: </a:t>
+            </a:r>
+            <a:r>
+              <a:rPr sz="1300" b="0">
+                <a:solidFill>
+                  <a:srgbClr val="5B5F6E"/>
+                </a:solidFill>
+                <a:latin typeface="Calibri"/>
+              </a:rPr>
+              <a:t>100 — Poor 70 / Middle 20 / Rich 10, unchanged from Phase 2</a:t>
+            </a:r>
+          </a:p>
+          <a:p>
+            <a:pPr>
+              <a:spcAft>
+                <a:spcPts val="200"/>
+              </a:spcAft>
+            </a:pPr>
+            <a:r>
+              <a:rPr sz="1300" b="1">
+                <a:solidFill>
+                  <a:srgbClr val="1E2761"/>
+                </a:solidFill>
+                <a:latin typeface="Calibri"/>
+              </a:rPr>
+              <a:t>Sellers: </a:t>
+            </a:r>
+            <a:r>
+              <a:rPr sz="1300" b="0">
+                <a:solidFill>
+                  <a:srgbClr val="5B5F6E"/>
+                </a:solidFill>
+                <a:latin typeface="Calibri"/>
+              </a:rPr>
+              <a:t>5 — Slow ×3 / Shigh ×2, positions unchanged from Phase 3</a:t>
+            </a:r>
+          </a:p>
+        </p:txBody>
+      </p:sp>
+      <p:sp>
+        <p:nvSpPr>
+          <p:cNvPr id="8" name="Rectangle 7"/>
+          <p:cNvSpPr/>
+          <p:nvPr/>
+        </p:nvSpPr>
+        <p:spPr>
+          <a:xfrm>
+            <a:off x="457200" y="2651760"/>
+            <a:ext cx="292608" cy="292608"/>
+          </a:xfrm>
+          <a:prstGeom prst="rect">
+            <a:avLst/>
+          </a:prstGeom>
+          <a:solidFill>
+            <a:srgbClr val="1E2761"/>
+          </a:solidFill>
+          <a:ln>
+            <a:noFill/>
+          </a:ln>
+        </p:spPr>
+        <p:style>
+          <a:lnRef idx="1">
+            <a:schemeClr val="accent1"/>
+          </a:lnRef>
+          <a:fillRef idx="3">
+            <a:schemeClr val="accent1"/>
+          </a:fillRef>
+          <a:effectRef idx="2">
+            <a:schemeClr val="accent1"/>
+          </a:effectRef>
+          <a:fontRef idx="minor">
+            <a:schemeClr val="lt1"/>
+          </a:fontRef>
+        </p:style>
+        <p:txBody>
+          <a:bodyPr rtlCol="0" anchor="ctr"/>
+          <a:lstStyle/>
+          <a:p/>
+        </p:txBody>
+      </p:sp>
+      <p:sp>
+        <p:nvSpPr>
+          <p:cNvPr id="9" name="TextBox 8"/>
+          <p:cNvSpPr txBox="1"/>
+          <p:nvPr/>
+        </p:nvSpPr>
+        <p:spPr>
+          <a:xfrm>
+            <a:off x="868680" y="2624328"/>
+            <a:ext cx="4617720" cy="347472"/>
+          </a:xfrm>
+          <a:prstGeom prst="rect">
+            <a:avLst/>
+          </a:prstGeom>
+          <a:noFill/>
+        </p:spPr>
+        <p:txBody>
+          <a:bodyPr wrap="square" lIns="0" rIns="0" tIns="0" bIns="0">
+            <a:spAutoFit/>
+          </a:bodyPr>
+          <a:lstStyle/>
+          <a:p>
+            <a:pPr>
+              <a:spcAft>
+                <a:spcPts val="200"/>
+              </a:spcAft>
+            </a:pPr>
+            <a:r>
+              <a:rPr sz="1500" b="1">
+                <a:solidFill>
+                  <a:srgbClr val="1E2761"/>
+                </a:solidFill>
+                <a:latin typeface="Calibri"/>
+              </a:rPr>
+              <a:t>ENVIRONMENT &amp; CONTEXT</a:t>
+            </a:r>
+          </a:p>
+        </p:txBody>
+      </p:sp>
+      <p:sp>
+        <p:nvSpPr>
+          <p:cNvPr id="10" name="TextBox 9"/>
+          <p:cNvSpPr txBox="1"/>
+          <p:nvPr/>
+        </p:nvSpPr>
+        <p:spPr>
+          <a:xfrm>
+            <a:off x="868680" y="3063240"/>
+            <a:ext cx="4617720" cy="548640"/>
+          </a:xfrm>
+          <a:prstGeom prst="rect">
+            <a:avLst/>
+          </a:prstGeom>
+          <a:noFill/>
+        </p:spPr>
+        <p:txBody>
+          <a:bodyPr wrap="square" lIns="0" rIns="0" tIns="0" bIns="0">
+            <a:spAutoFit/>
+          </a:bodyPr>
+          <a:lstStyle/>
+          <a:p>
+            <a:pPr>
+              <a:spcAft>
+                <a:spcPts val="200"/>
+              </a:spcAft>
+            </a:pPr>
+            <a:r>
+              <a:rPr sz="1300" b="0">
+                <a:solidFill>
+                  <a:srgbClr val="5B5F6E"/>
+                </a:solidFill>
+                <a:latin typeface="Calibri"/>
+              </a:rPr>
+              <a:t>-  Phase 3's position → visibility, unchanged</a:t>
+            </a:r>
+          </a:p>
+          <a:p>
+            <a:pPr>
+              <a:spcAft>
+                <a:spcPts val="200"/>
+              </a:spcAft>
+            </a:pPr>
+            <a:r>
+              <a:rPr sz="1300" b="0">
+                <a:solidFill>
+                  <a:srgbClr val="5B5F6E"/>
+                </a:solidFill>
+                <a:latin typeface="Calibri"/>
+              </a:rPr>
+              <a:t>-  Context: 30% discount on one random stall, probability 0.2 per run</a:t>
+            </a:r>
+          </a:p>
+        </p:txBody>
+      </p:sp>
+      <p:sp>
+        <p:nvSpPr>
+          <p:cNvPr id="11" name="Rectangle 10"/>
+          <p:cNvSpPr/>
+          <p:nvPr/>
+        </p:nvSpPr>
+        <p:spPr>
+          <a:xfrm>
+            <a:off x="457200" y="3886200"/>
+            <a:ext cx="292608" cy="292608"/>
+          </a:xfrm>
+          <a:prstGeom prst="rect">
+            <a:avLst/>
+          </a:prstGeom>
+          <a:solidFill>
+            <a:srgbClr val="1E2761"/>
+          </a:solidFill>
+          <a:ln>
+            <a:noFill/>
+          </a:ln>
+        </p:spPr>
+        <p:style>
+          <a:lnRef idx="1">
+            <a:schemeClr val="accent1"/>
+          </a:lnRef>
+          <a:fillRef idx="3">
+            <a:schemeClr val="accent1"/>
+          </a:fillRef>
+          <a:effectRef idx="2">
+            <a:schemeClr val="accent1"/>
+          </a:effectRef>
+          <a:fontRef idx="minor">
+            <a:schemeClr val="lt1"/>
+          </a:fontRef>
+        </p:style>
+        <p:txBody>
+          <a:bodyPr rtlCol="0" anchor="ctr"/>
+          <a:lstStyle/>
+          <a:p/>
+        </p:txBody>
+      </p:sp>
+      <p:sp>
+        <p:nvSpPr>
+          <p:cNvPr id="12" name="TextBox 11"/>
+          <p:cNvSpPr txBox="1"/>
+          <p:nvPr/>
+        </p:nvSpPr>
+        <p:spPr>
+          <a:xfrm>
+            <a:off x="868680" y="3858768"/>
+            <a:ext cx="4617720" cy="347472"/>
+          </a:xfrm>
+          <a:prstGeom prst="rect">
+            <a:avLst/>
+          </a:prstGeom>
+          <a:noFill/>
+        </p:spPr>
+        <p:txBody>
+          <a:bodyPr wrap="square" lIns="0" rIns="0" tIns="0" bIns="0">
+            <a:spAutoFit/>
+          </a:bodyPr>
+          <a:lstStyle/>
+          <a:p>
+            <a:pPr>
+              <a:spcAft>
+                <a:spcPts val="200"/>
+              </a:spcAft>
+            </a:pPr>
+            <a:r>
+              <a:rPr sz="1500" b="1">
+                <a:solidFill>
+                  <a:srgbClr val="1E2761"/>
+                </a:solidFill>
+                <a:latin typeface="Calibri"/>
+              </a:rPr>
+              <a:t>METHOD</a:t>
+            </a:r>
+          </a:p>
+        </p:txBody>
+      </p:sp>
+      <p:sp>
+        <p:nvSpPr>
+          <p:cNvPr id="13" name="TextBox 12"/>
+          <p:cNvSpPr txBox="1"/>
+          <p:nvPr/>
+        </p:nvSpPr>
+        <p:spPr>
+          <a:xfrm>
+            <a:off x="868680" y="4297680"/>
+            <a:ext cx="4617720" cy="594360"/>
+          </a:xfrm>
+          <a:prstGeom prst="rect">
+            <a:avLst/>
+          </a:prstGeom>
+          <a:noFill/>
+        </p:spPr>
+        <p:txBody>
+          <a:bodyPr wrap="square" lIns="0" rIns="0" tIns="0" bIns="0">
+            <a:spAutoFit/>
+          </a:bodyPr>
+          <a:lstStyle/>
+          <a:p>
+            <a:pPr>
+              <a:spcAft>
+                <a:spcPts val="200"/>
+              </a:spcAft>
+            </a:pPr>
+            <a:r>
+              <a:rPr sz="1300" b="0">
+                <a:solidFill>
+                  <a:srgbClr val="5B5F6E"/>
+                </a:solidFill>
+                <a:latin typeface="Calibri"/>
+              </a:rPr>
+              <a:t>Phase 3's utility, unchanged; discount applies to the posted price.</a:t>
+            </a:r>
+          </a:p>
+          <a:p>
+            <a:pPr>
+              <a:spcAft>
+                <a:spcPts val="200"/>
+              </a:spcAft>
+            </a:pPr>
+            <a:r>
+              <a:rPr sz="1300" b="0">
+                <a:solidFill>
+                  <a:srgbClr val="5B5F6E"/>
+                </a:solidFill>
+                <a:latin typeface="Calibri"/>
+              </a:rPr>
+              <a:t>Criteria graded on paired forced-promotion arms, not the 0.2 lottery.</a:t>
+            </a:r>
+          </a:p>
+        </p:txBody>
+      </p:sp>
+      <p:sp>
+        <p:nvSpPr>
+          <p:cNvPr id="14" name="Rectangle 13"/>
+          <p:cNvSpPr/>
+          <p:nvPr/>
+        </p:nvSpPr>
+        <p:spPr>
+          <a:xfrm>
+            <a:off x="457200" y="5029200"/>
+            <a:ext cx="292608" cy="292608"/>
+          </a:xfrm>
+          <a:prstGeom prst="rect">
+            <a:avLst/>
+          </a:prstGeom>
+          <a:solidFill>
+            <a:srgbClr val="1E2761"/>
+          </a:solidFill>
+          <a:ln>
+            <a:noFill/>
+          </a:ln>
+        </p:spPr>
+        <p:style>
+          <a:lnRef idx="1">
+            <a:schemeClr val="accent1"/>
+          </a:lnRef>
+          <a:fillRef idx="3">
+            <a:schemeClr val="accent1"/>
+          </a:fillRef>
+          <a:effectRef idx="2">
+            <a:schemeClr val="accent1"/>
+          </a:effectRef>
+          <a:fontRef idx="minor">
+            <a:schemeClr val="lt1"/>
+          </a:fontRef>
+        </p:style>
+        <p:txBody>
+          <a:bodyPr rtlCol="0" anchor="ctr"/>
+          <a:lstStyle/>
+          <a:p/>
+        </p:txBody>
+      </p:sp>
+      <p:sp>
+        <p:nvSpPr>
+          <p:cNvPr id="15" name="TextBox 14"/>
+          <p:cNvSpPr txBox="1"/>
+          <p:nvPr/>
+        </p:nvSpPr>
+        <p:spPr>
+          <a:xfrm>
+            <a:off x="868680" y="5001768"/>
+            <a:ext cx="4617720" cy="347472"/>
+          </a:xfrm>
+          <a:prstGeom prst="rect">
+            <a:avLst/>
+          </a:prstGeom>
+          <a:noFill/>
+        </p:spPr>
+        <p:txBody>
+          <a:bodyPr wrap="square" lIns="0" rIns="0" tIns="0" bIns="0">
+            <a:spAutoFit/>
+          </a:bodyPr>
+          <a:lstStyle/>
+          <a:p>
+            <a:pPr>
+              <a:spcAft>
+                <a:spcPts val="200"/>
+              </a:spcAft>
+            </a:pPr>
+            <a:r>
+              <a:rPr sz="1500" b="1">
+                <a:solidFill>
+                  <a:srgbClr val="1E2761"/>
+                </a:solidFill>
+                <a:latin typeface="Calibri"/>
+              </a:rPr>
+              <a:t>LITERATURE BASIS</a:t>
+            </a:r>
+          </a:p>
+        </p:txBody>
+      </p:sp>
+      <p:sp>
+        <p:nvSpPr>
+          <p:cNvPr id="16" name="TextBox 15"/>
+          <p:cNvSpPr txBox="1"/>
+          <p:nvPr/>
+        </p:nvSpPr>
+        <p:spPr>
+          <a:xfrm>
+            <a:off x="868680" y="5440680"/>
+            <a:ext cx="4617720" cy="1005840"/>
+          </a:xfrm>
+          <a:prstGeom prst="rect">
+            <a:avLst/>
+          </a:prstGeom>
+          <a:noFill/>
+        </p:spPr>
+        <p:txBody>
+          <a:bodyPr wrap="square" lIns="0" rIns="0" tIns="0" bIns="0">
+            <a:spAutoFit/>
+          </a:bodyPr>
+          <a:lstStyle/>
+          <a:p>
+            <a:pPr>
+              <a:spcAft>
+                <a:spcPts val="600"/>
+              </a:spcAft>
+            </a:pPr>
+            <a:r>
+              <a:rPr sz="1100" b="1">
+                <a:solidFill>
+                  <a:srgbClr val="1E2761"/>
+                </a:solidFill>
+                <a:latin typeface="Calibri"/>
+              </a:rPr>
+              <a:t>Belk (1975), </a:t>
+            </a:r>
+            <a:r>
+              <a:rPr sz="1100" b="0">
+                <a:solidFill>
+                  <a:srgbClr val="5B5F6E"/>
+                </a:solidFill>
+                <a:latin typeface="Calibri"/>
+              </a:rPr>
+              <a:t>“Situational Variables and Consumer Behavior” (JCR) — basis for a transient promotion as a situational variable, distinct from stable person or environment features.</a:t>
+            </a:r>
+          </a:p>
+        </p:txBody>
+      </p:sp>
+      <p:sp>
+        <p:nvSpPr>
+          <p:cNvPr id="17" name="Rectangle 16"/>
+          <p:cNvSpPr/>
+          <p:nvPr/>
+        </p:nvSpPr>
+        <p:spPr>
+          <a:xfrm>
+            <a:off x="5943600" y="1417320"/>
+            <a:ext cx="292608" cy="292608"/>
+          </a:xfrm>
+          <a:prstGeom prst="rect">
+            <a:avLst/>
+          </a:prstGeom>
+          <a:solidFill>
+            <a:srgbClr val="1E2761"/>
+          </a:solidFill>
+          <a:ln>
+            <a:noFill/>
+          </a:ln>
+        </p:spPr>
+        <p:style>
+          <a:lnRef idx="1">
+            <a:schemeClr val="accent1"/>
+          </a:lnRef>
+          <a:fillRef idx="3">
+            <a:schemeClr val="accent1"/>
+          </a:fillRef>
+          <a:effectRef idx="2">
+            <a:schemeClr val="accent1"/>
+          </a:effectRef>
+          <a:fontRef idx="minor">
+            <a:schemeClr val="lt1"/>
+          </a:fontRef>
+        </p:style>
+        <p:txBody>
+          <a:bodyPr rtlCol="0" anchor="ctr"/>
+          <a:lstStyle/>
+          <a:p/>
+        </p:txBody>
+      </p:sp>
+      <p:sp>
+        <p:nvSpPr>
+          <p:cNvPr id="18" name="TextBox 17"/>
+          <p:cNvSpPr txBox="1"/>
+          <p:nvPr/>
+        </p:nvSpPr>
+        <p:spPr>
+          <a:xfrm>
+            <a:off x="6355080" y="1389888"/>
+            <a:ext cx="5349240" cy="347472"/>
+          </a:xfrm>
+          <a:prstGeom prst="rect">
+            <a:avLst/>
+          </a:prstGeom>
+          <a:noFill/>
+        </p:spPr>
+        <p:txBody>
+          <a:bodyPr wrap="square" lIns="0" rIns="0" tIns="0" bIns="0">
+            <a:spAutoFit/>
+          </a:bodyPr>
+          <a:lstStyle/>
+          <a:p>
+            <a:pPr>
+              <a:spcAft>
+                <a:spcPts val="200"/>
+              </a:spcAft>
+            </a:pPr>
+            <a:r>
+              <a:rPr sz="1500" b="1">
+                <a:solidFill>
+                  <a:srgbClr val="1E2761"/>
+                </a:solidFill>
+                <a:latin typeface="Calibri"/>
+              </a:rPr>
+              <a:t>KEY RESULTS</a:t>
+            </a:r>
+          </a:p>
+        </p:txBody>
+      </p:sp>
+      <p:graphicFrame>
+        <p:nvGraphicFramePr>
+          <p:cNvPr id="19" name="Table 18"/>
+          <p:cNvGraphicFramePr>
+            <a:graphicFrameLocks noGrp="1"/>
+          </p:cNvGraphicFramePr>
+          <p:nvPr/>
+        </p:nvGraphicFramePr>
+        <p:xfrm>
+          <a:off x="5943600" y="1874519"/>
+          <a:ext cx="5760720" cy="1645920"/>
+        </p:xfrm>
+        <a:graphic>
+          <a:graphicData uri="http://schemas.openxmlformats.org/drawingml/2006/table">
+            <a:tbl>
+              <a:tblPr firstRow="1" bandRow="1">
+                <a:tableStyleId>{5C22544A-7EE6-4342-B048-85BDC9FD1C3A}</a:tableStyleId>
+              </a:tblPr>
+              <a:tblGrid>
+                <a:gridCol w="3200400"/>
+                <a:gridCol w="1463040"/>
+                <a:gridCol w="1097280"/>
+              </a:tblGrid>
+              <a:tr h="274320">
+                <a:tc>
+                  <a:txBody>
+                    <a:bodyPr/>
+                    <a:lstStyle/>
+                    <a:p>
+                      <a:r>
+                        <a:rPr sz="1100" b="1">
+                          <a:solidFill>
+                            <a:srgbClr val="FFFFFF"/>
+                          </a:solidFill>
+                          <a:latin typeface="Calibri"/>
+                        </a:rPr>
+                        <a:t>Metric</a:t>
+                      </a:r>
+                    </a:p>
+                  </a:txBody>
+                  <a:tcPr>
+                    <a:solidFill>
+                      <a:srgbClr val="1E2761"/>
+                    </a:solidFill>
+                  </a:tcPr>
+                </a:tc>
+                <a:tc>
+                  <a:txBody>
+                    <a:bodyPr/>
+                    <a:lstStyle/>
+                    <a:p>
+                      <a:r>
+                        <a:rPr sz="1100" b="1">
+                          <a:solidFill>
+                            <a:srgbClr val="FFFFFF"/>
+                          </a:solidFill>
+                          <a:latin typeface="Calibri"/>
+                        </a:rPr>
+                        <a:t>Value</a:t>
+                      </a:r>
+                    </a:p>
+                  </a:txBody>
+                  <a:tcPr>
+                    <a:solidFill>
+                      <a:srgbClr val="1E2761"/>
+                    </a:solidFill>
+                  </a:tcPr>
+                </a:tc>
+                <a:tc>
+                  <a:txBody>
+                    <a:bodyPr/>
+                    <a:lstStyle/>
+                    <a:p>
+                      <a:r>
+                        <a:rPr sz="1100" b="1">
+                          <a:solidFill>
+                            <a:srgbClr val="FFFFFF"/>
+                          </a:solidFill>
+                          <a:latin typeface="Calibri"/>
+                        </a:rPr>
+                        <a:t/>
+                      </a:r>
+                    </a:p>
+                  </a:txBody>
+                  <a:tcPr>
+                    <a:solidFill>
+                      <a:srgbClr val="1E2761"/>
+                    </a:solidFill>
+                  </a:tcPr>
+                </a:tc>
+              </a:tr>
+              <a:tr h="274320">
+                <a:tc>
+                  <a:txBody>
+                    <a:bodyPr/>
+                    <a:lstStyle/>
+                    <a:p>
+                      <a:r>
+                        <a:rPr sz="1100">
+                          <a:solidFill>
+                            <a:srgbClr val="1E2761"/>
+                          </a:solidFill>
+                          <a:latin typeface="Calibri"/>
+                        </a:rPr>
+                        <a:t>Participation rate (0.6–1.0)</a:t>
+                      </a:r>
+                    </a:p>
+                  </a:txBody>
+                  <a:tcPr>
+                    <a:solidFill>
+                      <a:srgbClr val="FFFFFF"/>
+                    </a:solidFill>
+                  </a:tcPr>
+                </a:tc>
+                <a:tc>
+                  <a:txBody>
+                    <a:bodyPr/>
+                    <a:lstStyle/>
+                    <a:p>
+                      <a:r>
+                        <a:rPr sz="1100">
+                          <a:solidFill>
+                            <a:srgbClr val="5B5F6E"/>
+                          </a:solidFill>
+                          <a:latin typeface="Calibri"/>
+                        </a:rPr>
+                        <a:t>0.753</a:t>
+                      </a:r>
+                    </a:p>
+                  </a:txBody>
+                  <a:tcPr>
+                    <a:solidFill>
+                      <a:srgbClr val="FFFFFF"/>
+                    </a:solidFill>
+                  </a:tcPr>
+                </a:tc>
+                <a:tc>
+                  <a:txBody>
+                    <a:bodyPr/>
+                    <a:lstStyle/>
+                    <a:p>
+                      <a:pPr algn="ctr"/>
+                      <a:r>
+                        <a:rPr sz="1100" b="1">
+                          <a:solidFill>
+                            <a:srgbClr val="1E7A4D"/>
+                          </a:solidFill>
+                          <a:latin typeface="Calibri"/>
+                        </a:rPr>
+                        <a:t>PASS</a:t>
+                      </a:r>
+                    </a:p>
+                  </a:txBody>
+                  <a:tcPr>
+                    <a:solidFill>
+                      <a:srgbClr val="FFFFFF"/>
+                    </a:solidFill>
+                  </a:tcPr>
+                </a:tc>
+              </a:tr>
+              <a:tr h="274320">
+                <a:tc>
+                  <a:txBody>
+                    <a:bodyPr/>
+                    <a:lstStyle/>
+                    <a:p>
+                      <a:r>
+                        <a:rPr sz="1100">
+                          <a:solidFill>
+                            <a:srgbClr val="1E2761"/>
+                          </a:solidFill>
+                          <a:latin typeface="Calibri"/>
+                        </a:rPr>
+                        <a:t>Promotion lift, all 5 sellers</a:t>
+                      </a:r>
+                    </a:p>
+                  </a:txBody>
+                  <a:tcPr>
+                    <a:solidFill>
+                      <a:srgbClr val="F7F8FC"/>
+                    </a:solidFill>
+                  </a:tcPr>
+                </a:tc>
+                <a:tc>
+                  <a:txBody>
+                    <a:bodyPr/>
+                    <a:lstStyle/>
+                    <a:p>
+                      <a:r>
+                        <a:rPr sz="1100">
+                          <a:solidFill>
+                            <a:srgbClr val="5B5F6E"/>
+                          </a:solidFill>
+                          <a:latin typeface="Calibri"/>
+                        </a:rPr>
+                        <a:t>+1.13 to +2.93</a:t>
+                      </a:r>
+                    </a:p>
+                  </a:txBody>
+                  <a:tcPr>
+                    <a:solidFill>
+                      <a:srgbClr val="F7F8FC"/>
+                    </a:solidFill>
+                  </a:tcPr>
+                </a:tc>
+                <a:tc>
+                  <a:txBody>
+                    <a:bodyPr/>
+                    <a:lstStyle/>
+                    <a:p>
+                      <a:pPr algn="ctr"/>
+                      <a:r>
+                        <a:rPr sz="1100" b="1">
+                          <a:solidFill>
+                            <a:srgbClr val="1E7A4D"/>
+                          </a:solidFill>
+                          <a:latin typeface="Calibri"/>
+                        </a:rPr>
+                        <a:t>PASS</a:t>
+                      </a:r>
+                    </a:p>
+                  </a:txBody>
+                  <a:tcPr>
+                    <a:solidFill>
+                      <a:srgbClr val="F7F8FC"/>
+                    </a:solidFill>
+                  </a:tcPr>
+                </a:tc>
+              </a:tr>
+              <a:tr h="274320">
+                <a:tc>
+                  <a:txBody>
+                    <a:bodyPr/>
+                    <a:lstStyle/>
+                    <a:p>
+                      <a:r>
+                        <a:rPr sz="1100">
+                          <a:solidFill>
+                            <a:srgbClr val="1E2761"/>
+                          </a:solidFill>
+                          <a:latin typeface="Calibri"/>
+                        </a:rPr>
+                        <a:t>Slow promoted → Poor (predicted)</a:t>
+                      </a:r>
+                    </a:p>
+                  </a:txBody>
+                  <a:tcPr>
+                    <a:solidFill>
+                      <a:srgbClr val="FFFFFF"/>
+                    </a:solidFill>
+                  </a:tcPr>
+                </a:tc>
+                <a:tc>
+                  <a:txBody>
+                    <a:bodyPr/>
+                    <a:lstStyle/>
+                    <a:p>
+                      <a:r>
+                        <a:rPr sz="1100">
+                          <a:solidFill>
+                            <a:srgbClr val="5B5F6E"/>
+                          </a:solidFill>
+                          <a:latin typeface="Calibri"/>
+                        </a:rPr>
+                        <a:t>+1.37 vs +0.20</a:t>
+                      </a:r>
+                    </a:p>
+                  </a:txBody>
+                  <a:tcPr>
+                    <a:solidFill>
+                      <a:srgbClr val="FFFFFF"/>
+                    </a:solidFill>
+                  </a:tcPr>
+                </a:tc>
+                <a:tc>
+                  <a:txBody>
+                    <a:bodyPr/>
+                    <a:lstStyle/>
+                    <a:p>
+                      <a:pPr algn="ctr"/>
+                      <a:r>
+                        <a:rPr sz="1100" b="1">
+                          <a:solidFill>
+                            <a:srgbClr val="1E7A4D"/>
+                          </a:solidFill>
+                          <a:latin typeface="Calibri"/>
+                        </a:rPr>
+                        <a:t>PASS</a:t>
+                      </a:r>
+                    </a:p>
+                  </a:txBody>
+                  <a:tcPr>
+                    <a:solidFill>
+                      <a:srgbClr val="FFFFFF"/>
+                    </a:solidFill>
+                  </a:tcPr>
+                </a:tc>
+              </a:tr>
+              <a:tr h="274320">
+                <a:tc>
+                  <a:txBody>
+                    <a:bodyPr/>
+                    <a:lstStyle/>
+                    <a:p>
+                      <a:r>
+                        <a:rPr sz="1100">
+                          <a:solidFill>
+                            <a:srgbClr val="1E2761"/>
+                          </a:solidFill>
+                          <a:latin typeface="Calibri"/>
+                        </a:rPr>
+                        <a:t>Shigh promoted → Middle (predicted)</a:t>
+                      </a:r>
+                    </a:p>
+                  </a:txBody>
+                  <a:tcPr>
+                    <a:solidFill>
+                      <a:srgbClr val="F7F8FC"/>
+                    </a:solidFill>
+                  </a:tcPr>
+                </a:tc>
+                <a:tc>
+                  <a:txBody>
+                    <a:bodyPr/>
+                    <a:lstStyle/>
+                    <a:p>
+                      <a:r>
+                        <a:rPr sz="1100">
+                          <a:solidFill>
+                            <a:srgbClr val="5B5F6E"/>
+                          </a:solidFill>
+                          <a:latin typeface="Calibri"/>
+                        </a:rPr>
+                        <a:t>+2.87 vs +0.07</a:t>
+                      </a:r>
+                    </a:p>
+                  </a:txBody>
+                  <a:tcPr>
+                    <a:solidFill>
+                      <a:srgbClr val="F7F8FC"/>
+                    </a:solidFill>
+                  </a:tcPr>
+                </a:tc>
+                <a:tc>
+                  <a:txBody>
+                    <a:bodyPr/>
+                    <a:lstStyle/>
+                    <a:p>
+                      <a:pPr algn="ctr"/>
+                      <a:r>
+                        <a:rPr sz="1100" b="1">
+                          <a:solidFill>
+                            <a:srgbClr val="1E7A4D"/>
+                          </a:solidFill>
+                          <a:latin typeface="Calibri"/>
+                        </a:rPr>
+                        <a:t>PASS</a:t>
+                      </a:r>
+                    </a:p>
+                  </a:txBody>
+                  <a:tcPr>
+                    <a:solidFill>
+                      <a:srgbClr val="F7F8FC"/>
+                    </a:solidFill>
+                  </a:tcPr>
+                </a:tc>
+              </a:tr>
+              <a:tr h="274320">
+                <a:tc>
+                  <a:txBody>
+                    <a:bodyPr/>
+                    <a:lstStyle/>
+                    <a:p>
+                      <a:r>
+                        <a:rPr sz="1100">
+                          <a:solidFill>
+                            <a:srgbClr val="1E2761"/>
+                          </a:solidFill>
+                          <a:latin typeface="Calibri"/>
+                        </a:rPr>
+                        <a:t>Market arm: runs with a promotion</a:t>
+                      </a:r>
+                    </a:p>
+                  </a:txBody>
+                  <a:tcPr>
+                    <a:solidFill>
+                      <a:srgbClr val="FFFFFF"/>
+                    </a:solidFill>
+                  </a:tcPr>
+                </a:tc>
+                <a:tc>
+                  <a:txBody>
+                    <a:bodyPr/>
+                    <a:lstStyle/>
+                    <a:p>
+                      <a:r>
+                        <a:rPr sz="1100">
+                          <a:solidFill>
+                            <a:srgbClr val="5B5F6E"/>
+                          </a:solidFill>
+                          <a:latin typeface="Calibri"/>
+                        </a:rPr>
+                        <a:t>6/30</a:t>
+                      </a:r>
+                    </a:p>
+                  </a:txBody>
+                  <a:tcPr>
+                    <a:solidFill>
+                      <a:srgbClr val="FFFFFF"/>
+                    </a:solidFill>
+                  </a:tcPr>
+                </a:tc>
+                <a:tc>
+                  <a:txBody>
+                    <a:bodyPr/>
+                    <a:lstStyle/>
+                    <a:p>
+                      <a:pPr algn="ctr"/>
+                      <a:r>
+                        <a:rPr sz="1100" b="1">
+                          <a:solidFill>
+                            <a:srgbClr val="5B5F6E"/>
+                          </a:solidFill>
+                          <a:latin typeface="Calibri"/>
+                        </a:rPr>
+                        <a:t>—</a:t>
+                      </a:r>
+                    </a:p>
+                  </a:txBody>
+                  <a:tcPr>
+                    <a:solidFill>
+                      <a:srgbClr val="FFFFFF"/>
+                    </a:solidFill>
+                  </a:tcPr>
+                </a:tc>
+              </a:tr>
+            </a:tbl>
+          </a:graphicData>
+        </a:graphic>
+      </p:graphicFrame>
+      <p:sp>
+        <p:nvSpPr>
+          <p:cNvPr id="20" name="Rectangle 19"/>
+          <p:cNvSpPr/>
+          <p:nvPr/>
+        </p:nvSpPr>
+        <p:spPr>
+          <a:xfrm>
+            <a:off x="5943600" y="4023360"/>
+            <a:ext cx="292608" cy="292608"/>
+          </a:xfrm>
+          <a:prstGeom prst="rect">
+            <a:avLst/>
+          </a:prstGeom>
+          <a:solidFill>
+            <a:srgbClr val="1E2761"/>
+          </a:solidFill>
+          <a:ln>
+            <a:noFill/>
+          </a:ln>
+        </p:spPr>
+        <p:style>
+          <a:lnRef idx="1">
+            <a:schemeClr val="accent1"/>
+          </a:lnRef>
+          <a:fillRef idx="3">
+            <a:schemeClr val="accent1"/>
+          </a:fillRef>
+          <a:effectRef idx="2">
+            <a:schemeClr val="accent1"/>
+          </a:effectRef>
+          <a:fontRef idx="minor">
+            <a:schemeClr val="lt1"/>
+          </a:fontRef>
+        </p:style>
+        <p:txBody>
+          <a:bodyPr rtlCol="0" anchor="ctr"/>
+          <a:lstStyle/>
+          <a:p/>
+        </p:txBody>
+      </p:sp>
+      <p:sp>
+        <p:nvSpPr>
+          <p:cNvPr id="21" name="TextBox 20"/>
+          <p:cNvSpPr txBox="1"/>
+          <p:nvPr/>
+        </p:nvSpPr>
+        <p:spPr>
+          <a:xfrm>
+            <a:off x="6355080" y="3995928"/>
+            <a:ext cx="5349240" cy="347472"/>
+          </a:xfrm>
+          <a:prstGeom prst="rect">
+            <a:avLst/>
+          </a:prstGeom>
+          <a:noFill/>
+        </p:spPr>
+        <p:txBody>
+          <a:bodyPr wrap="square" lIns="0" rIns="0" tIns="0" bIns="0">
+            <a:spAutoFit/>
+          </a:bodyPr>
+          <a:lstStyle/>
+          <a:p>
+            <a:pPr>
+              <a:spcAft>
+                <a:spcPts val="200"/>
+              </a:spcAft>
+            </a:pPr>
+            <a:r>
+              <a:rPr sz="1500" b="1">
+                <a:solidFill>
+                  <a:srgbClr val="1E2761"/>
+                </a:solidFill>
+                <a:latin typeface="Calibri"/>
+              </a:rPr>
+              <a:t>RESEARCH QUESTION</a:t>
+            </a:r>
+          </a:p>
+        </p:txBody>
+      </p:sp>
+      <p:sp>
+        <p:nvSpPr>
+          <p:cNvPr id="22" name="Rectangle 21"/>
+          <p:cNvSpPr/>
+          <p:nvPr/>
+        </p:nvSpPr>
+        <p:spPr>
+          <a:xfrm>
+            <a:off x="5943600" y="4434840"/>
+            <a:ext cx="5760720" cy="1965960"/>
+          </a:xfrm>
+          <a:prstGeom prst="rect">
+            <a:avLst/>
+          </a:prstGeom>
+          <a:solidFill>
+            <a:srgbClr val="F7F8FC"/>
+          </a:solidFill>
+          <a:ln>
+            <a:noFill/>
+          </a:ln>
+        </p:spPr>
+        <p:style>
+          <a:lnRef idx="1">
+            <a:schemeClr val="accent1"/>
+          </a:lnRef>
+          <a:fillRef idx="3">
+            <a:schemeClr val="accent1"/>
+          </a:fillRef>
+          <a:effectRef idx="2">
+            <a:schemeClr val="accent1"/>
+          </a:effectRef>
+          <a:fontRef idx="minor">
+            <a:schemeClr val="lt1"/>
+          </a:fontRef>
+        </p:style>
+        <p:txBody>
+          <a:bodyPr rtlCol="0" anchor="ctr"/>
+          <a:lstStyle/>
+          <a:p/>
+        </p:txBody>
+      </p:sp>
+      <p:sp>
+        <p:nvSpPr>
+          <p:cNvPr id="23" name="TextBox 22"/>
+          <p:cNvSpPr txBox="1"/>
+          <p:nvPr/>
+        </p:nvSpPr>
+        <p:spPr>
+          <a:xfrm>
+            <a:off x="6217920" y="4572000"/>
+            <a:ext cx="5212080" cy="1737360"/>
+          </a:xfrm>
+          <a:prstGeom prst="rect">
+            <a:avLst/>
+          </a:prstGeom>
+          <a:noFill/>
+        </p:spPr>
+        <p:txBody>
+          <a:bodyPr wrap="square" lIns="0" rIns="0" tIns="0" bIns="0">
+            <a:spAutoFit/>
+          </a:bodyPr>
+          <a:lstStyle/>
+          <a:p>
+            <a:pPr>
+              <a:spcAft>
+                <a:spcPts val="500"/>
+              </a:spcAft>
+            </a:pPr>
+            <a:r>
+              <a:rPr sz="1000" b="0">
+                <a:solidFill>
+                  <a:srgbClr val="5B5F6E"/>
+                </a:solidFill>
+                <a:latin typeface="Calibri"/>
+              </a:rPr>
+              <a:t>Does a transient promotion shift buyer distribution beyond person + environment, and is its effect a level shift or a class interaction?</a:t>
+            </a:r>
+          </a:p>
+          <a:p>
+            <a:pPr>
+              <a:spcAft>
+                <a:spcPts val="500"/>
+              </a:spcAft>
+            </a:pPr>
+            <a:r>
+              <a:rPr sz="1000" b="1">
+                <a:solidFill>
+                  <a:srgbClr val="1E2761"/>
+                </a:solidFill>
+                <a:latin typeface="Calibri"/>
+              </a:rPr>
+              <a:t>Finding: </a:t>
+            </a:r>
+            <a:r>
+              <a:rPr sz="1000" b="0">
+                <a:solidFill>
+                  <a:srgbClr val="5B5F6E"/>
+                </a:solidFill>
+                <a:latin typeface="Calibri"/>
+              </a:rPr>
+              <a:t>An interaction, decisively. Lift concentrates in the lowest-budget class that can afford the discounted stall — Poor at Slow (+1.37 vs +0.03 for Rich), Middle at Shigh (+2.87 vs +0.07). Both responders were predicted from the parameters before the runs.</a:t>
+            </a:r>
+          </a:p>
+          <a:p>
+            <a:pPr>
+              <a:spcAft>
+                <a:spcPts val="500"/>
+              </a:spcAft>
+            </a:pPr>
+            <a:r>
+              <a:rPr sz="1000" b="1">
+                <a:solidFill>
+                  <a:srgbClr val="1E2761"/>
+                </a:solidFill>
+                <a:latin typeface="Calibri"/>
+              </a:rPr>
+              <a:t>Caveat: </a:t>
+            </a:r>
+            <a:r>
+              <a:rPr sz="1000" b="0">
+                <a:solidFill>
+                  <a:srgbClr val="5B5F6E"/>
+                </a:solidFill>
+                <a:latin typeface="Calibri"/>
+              </a:rPr>
+              <a:t>The specified 0.2 lottery cannot measure this: it fired 6 times in 30 runs, distributed [4, 0, 0, 1, 1], leaving sellers never promoted at all. Criteria are graded on paired forced arms instead; the lottery is kept as the market Phase 5 inherits. Poor's +0.00 at a promoted Shigh stall is arithmetic — 6 × 0.7 = 4.2 still exceeds its budget of 3 — not insensitivity to promotions.</a:t>
+            </a:r>
+          </a:p>
+        </p:txBody>
+      </p:sp>
+      <p:sp>
+        <p:nvSpPr>
+          <p:cNvPr id="24" name="TextBox 23"/>
+          <p:cNvSpPr txBox="1"/>
+          <p:nvPr/>
+        </p:nvSpPr>
+        <p:spPr>
+          <a:xfrm>
+            <a:off x="457200" y="6446520"/>
+            <a:ext cx="11247120" cy="274320"/>
+          </a:xfrm>
+          <a:prstGeom prst="rect">
+            <a:avLst/>
+          </a:prstGeom>
+          <a:noFill/>
+        </p:spPr>
+        <p:txBody>
+          <a:bodyPr wrap="square" lIns="0" rIns="0" tIns="0" bIns="0">
+            <a:spAutoFit/>
+          </a:bodyPr>
+          <a:lstStyle/>
+          <a:p>
+            <a:pPr>
+              <a:spcAft>
+                <a:spcPts val="200"/>
+              </a:spcAft>
+            </a:pPr>
+            <a:r>
+              <a:rPr sz="950" b="0">
+                <a:solidFill>
+                  <a:srgbClr val="5B5F6E"/>
+                </a:solidFill>
+                <a:latin typeface="Calibri"/>
+              </a:rPr>
+              <a:t>Generated automatically at phase completion  ·  Phase Completion Deliverable  ·  market-sim project</a:t>
+            </a:r>
+          </a:p>
+        </p:txBody>
+      </p:sp>
+    </p:spTree>
+  </p:cSld>
+  <p:clrMapOvr>
+    <a:masterClrMapping/>
+  </p:clrMapOvr>
+</p:sld>
+</file>
+
 <file path=ppt/theme/theme1.xml><?xml version="1.0" encoding="utf-8"?>
 <a:theme xmlns:a="http://schemas.openxmlformats.org/drawingml/2006/main" name="Office Theme">
   <a:themeElements>

--- a/project_tracking.pptx
+++ b/project_tracking.pptx
@@ -9,6 +9,7 @@
     <p:sldId id="257" r:id="rId8"/>
     <p:sldId id="258" r:id="rId9"/>
     <p:sldId id="259" r:id="rId10"/>
+    <p:sldId id="260" r:id="rId11"/>
   </p:sldIdLst>
   <p:sldSz cx="12191969" cy="6858000" type="screen4x3"/>
   <p:notesSz cx="6858000" cy="9144000"/>
@@ -9072,6 +9073,1474 @@
 </p:sld>
 </file>
 
+<file path=ppt/slides/slide5.xml><?xml version="1.0" encoding="utf-8"?>
+<p:sld xmlns:a="http://schemas.openxmlformats.org/drawingml/2006/main" xmlns:p="http://schemas.openxmlformats.org/presentationml/2006/main" xmlns:r="http://schemas.openxmlformats.org/officeDocument/2006/relationships">
+  <p:cSld>
+    <p:spTree>
+      <p:nvGrpSpPr>
+        <p:cNvPr id="1" name=""/>
+        <p:cNvGrpSpPr/>
+        <p:nvPr/>
+      </p:nvGrpSpPr>
+      <p:grpSpPr/>
+      <p:sp>
+        <p:nvSpPr>
+          <p:cNvPr id="2" name="TextBox 1"/>
+          <p:cNvSpPr txBox="1"/>
+          <p:nvPr/>
+        </p:nvSpPr>
+        <p:spPr>
+          <a:xfrm>
+            <a:off x="457200" y="320040"/>
+            <a:ext cx="8229600" cy="548640"/>
+          </a:xfrm>
+          <a:prstGeom prst="rect">
+            <a:avLst/>
+          </a:prstGeom>
+          <a:noFill/>
+        </p:spPr>
+        <p:txBody>
+          <a:bodyPr wrap="square" lIns="0" rIns="0" tIns="0" bIns="0">
+            <a:spAutoFit/>
+          </a:bodyPr>
+          <a:lstStyle/>
+          <a:p>
+            <a:pPr>
+              <a:spcAft>
+                <a:spcPts val="200"/>
+              </a:spcAft>
+            </a:pPr>
+            <a:r>
+              <a:rPr sz="3200" b="1">
+                <a:solidFill>
+                  <a:srgbClr val="1E2761"/>
+                </a:solidFill>
+                <a:latin typeface="Cambria"/>
+              </a:rPr>
+              <a:t>Phase 5 — Nonlinear Behavioural Effects</a:t>
+            </a:r>
+          </a:p>
+        </p:txBody>
+      </p:sp>
+      <p:sp>
+        <p:nvSpPr>
+          <p:cNvPr id="3" name="TextBox 2"/>
+          <p:cNvSpPr txBox="1"/>
+          <p:nvPr/>
+        </p:nvSpPr>
+        <p:spPr>
+          <a:xfrm>
+            <a:off x="457200" y="868680"/>
+            <a:ext cx="8229600" cy="274320"/>
+          </a:xfrm>
+          <a:prstGeom prst="rect">
+            <a:avLst/>
+          </a:prstGeom>
+          <a:noFill/>
+        </p:spPr>
+        <p:txBody>
+          <a:bodyPr wrap="square" lIns="0" rIns="0" tIns="0" bIns="0">
+            <a:spAutoFit/>
+          </a:bodyPr>
+          <a:lstStyle/>
+          <a:p>
+            <a:pPr>
+              <a:spcAft>
+                <a:spcPts val="200"/>
+              </a:spcAft>
+            </a:pPr>
+            <a:r>
+              <a:rPr sz="1200" b="0">
+                <a:solidFill>
+                  <a:srgbClr val="5B5F6E"/>
+                </a:solidFill>
+                <a:latin typeface="Calibri"/>
+              </a:rPr>
+              <a:t>Budget cliff vs linear  ·  git tag: phase5-validated  ·  30 seeds (1000 where undecided)</a:t>
+            </a:r>
+          </a:p>
+        </p:txBody>
+      </p:sp>
+      <p:sp>
+        <p:nvSpPr>
+          <p:cNvPr id="4" name="Rounded Rectangle 3"/>
+          <p:cNvSpPr/>
+          <p:nvPr/>
+        </p:nvSpPr>
+        <p:spPr>
+          <a:xfrm>
+            <a:off x="9464040" y="365760"/>
+            <a:ext cx="2240280" cy="384048"/>
+          </a:xfrm>
+          <a:prstGeom prst="roundRect">
+            <a:avLst/>
+          </a:prstGeom>
+          <a:solidFill>
+            <a:srgbClr val="C9922E"/>
+          </a:solidFill>
+          <a:ln>
+            <a:noFill/>
+          </a:ln>
+        </p:spPr>
+        <p:style>
+          <a:lnRef idx="1">
+            <a:schemeClr val="accent1"/>
+          </a:lnRef>
+          <a:fillRef idx="3">
+            <a:schemeClr val="accent1"/>
+          </a:fillRef>
+          <a:effectRef idx="2">
+            <a:schemeClr val="accent1"/>
+          </a:effectRef>
+          <a:fontRef idx="minor">
+            <a:schemeClr val="lt1"/>
+          </a:fontRef>
+        </p:style>
+        <p:txBody>
+          <a:bodyPr rtlCol="0" anchor="ctr"/>
+          <a:lstStyle/>
+          <a:p>
+            <a:pPr algn="ctr"/>
+            <a:r>
+              <a:rPr sz="1050" b="1">
+                <a:solidFill>
+                  <a:srgbClr val="FFFFFF"/>
+                </a:solidFill>
+                <a:latin typeface="Calibri"/>
+              </a:rPr>
+              <a:t>ROLLBACK TO LINEAR</a:t>
+            </a:r>
+          </a:p>
+        </p:txBody>
+      </p:sp>
+      <p:sp>
+        <p:nvSpPr>
+          <p:cNvPr id="5" name="Rectangle 4"/>
+          <p:cNvSpPr/>
+          <p:nvPr/>
+        </p:nvSpPr>
+        <p:spPr>
+          <a:xfrm>
+            <a:off x="457200" y="1417320"/>
+            <a:ext cx="292608" cy="292608"/>
+          </a:xfrm>
+          <a:prstGeom prst="rect">
+            <a:avLst/>
+          </a:prstGeom>
+          <a:solidFill>
+            <a:srgbClr val="1E2761"/>
+          </a:solidFill>
+          <a:ln>
+            <a:noFill/>
+          </a:ln>
+        </p:spPr>
+        <p:style>
+          <a:lnRef idx="1">
+            <a:schemeClr val="accent1"/>
+          </a:lnRef>
+          <a:fillRef idx="3">
+            <a:schemeClr val="accent1"/>
+          </a:fillRef>
+          <a:effectRef idx="2">
+            <a:schemeClr val="accent1"/>
+          </a:effectRef>
+          <a:fontRef idx="minor">
+            <a:schemeClr val="lt1"/>
+          </a:fontRef>
+        </p:style>
+        <p:txBody>
+          <a:bodyPr rtlCol="0" anchor="ctr"/>
+          <a:lstStyle/>
+          <a:p/>
+        </p:txBody>
+      </p:sp>
+      <p:sp>
+        <p:nvSpPr>
+          <p:cNvPr id="6" name="TextBox 5"/>
+          <p:cNvSpPr txBox="1"/>
+          <p:nvPr/>
+        </p:nvSpPr>
+        <p:spPr>
+          <a:xfrm>
+            <a:off x="868680" y="1389888"/>
+            <a:ext cx="4617720" cy="347472"/>
+          </a:xfrm>
+          <a:prstGeom prst="rect">
+            <a:avLst/>
+          </a:prstGeom>
+          <a:noFill/>
+        </p:spPr>
+        <p:txBody>
+          <a:bodyPr wrap="square" lIns="0" rIns="0" tIns="0" bIns="0">
+            <a:spAutoFit/>
+          </a:bodyPr>
+          <a:lstStyle/>
+          <a:p>
+            <a:pPr>
+              <a:spcAft>
+                <a:spcPts val="200"/>
+              </a:spcAft>
+            </a:pPr>
+            <a:r>
+              <a:rPr sz="1500" b="1">
+                <a:solidFill>
+                  <a:srgbClr val="1E2761"/>
+                </a:solidFill>
+                <a:latin typeface="Calibri"/>
+              </a:rPr>
+              <a:t>AGENTS</a:t>
+            </a:r>
+          </a:p>
+        </p:txBody>
+      </p:sp>
+      <p:sp>
+        <p:nvSpPr>
+          <p:cNvPr id="7" name="TextBox 6"/>
+          <p:cNvSpPr txBox="1"/>
+          <p:nvPr/>
+        </p:nvSpPr>
+        <p:spPr>
+          <a:xfrm>
+            <a:off x="868680" y="1828800"/>
+            <a:ext cx="4617720" cy="566928"/>
+          </a:xfrm>
+          <a:prstGeom prst="rect">
+            <a:avLst/>
+          </a:prstGeom>
+          <a:noFill/>
+        </p:spPr>
+        <p:txBody>
+          <a:bodyPr wrap="square" lIns="0" rIns="0" tIns="0" bIns="0">
+            <a:spAutoFit/>
+          </a:bodyPr>
+          <a:lstStyle/>
+          <a:p>
+            <a:pPr>
+              <a:spcAft>
+                <a:spcPts val="200"/>
+              </a:spcAft>
+            </a:pPr>
+            <a:r>
+              <a:rPr sz="1300" b="1">
+                <a:solidFill>
+                  <a:srgbClr val="1E2761"/>
+                </a:solidFill>
+                <a:latin typeface="Calibri"/>
+              </a:rPr>
+              <a:t>Buyers: </a:t>
+            </a:r>
+            <a:r>
+              <a:rPr sz="1300" b="0">
+                <a:solidFill>
+                  <a:srgbClr val="5B5F6E"/>
+                </a:solidFill>
+                <a:latin typeface="Calibri"/>
+              </a:rPr>
+              <a:t>100 — Poor 70 / Middle 20 / Rich 10, unchanged from Phase 2</a:t>
+            </a:r>
+          </a:p>
+          <a:p>
+            <a:pPr>
+              <a:spcAft>
+                <a:spcPts val="200"/>
+              </a:spcAft>
+            </a:pPr>
+            <a:r>
+              <a:rPr sz="1300" b="1">
+                <a:solidFill>
+                  <a:srgbClr val="1E2761"/>
+                </a:solidFill>
+                <a:latin typeface="Calibri"/>
+              </a:rPr>
+              <a:t>Sellers: </a:t>
+            </a:r>
+            <a:r>
+              <a:rPr sz="1300" b="0">
+                <a:solidFill>
+                  <a:srgbClr val="5B5F6E"/>
+                </a:solidFill>
+                <a:latin typeface="Calibri"/>
+              </a:rPr>
+              <a:t>5 — Slow ×3 / Shigh ×2, positions and promotion unchanged</a:t>
+            </a:r>
+          </a:p>
+        </p:txBody>
+      </p:sp>
+      <p:sp>
+        <p:nvSpPr>
+          <p:cNvPr id="8" name="Rectangle 7"/>
+          <p:cNvSpPr/>
+          <p:nvPr/>
+        </p:nvSpPr>
+        <p:spPr>
+          <a:xfrm>
+            <a:off x="457200" y="2651760"/>
+            <a:ext cx="292608" cy="292608"/>
+          </a:xfrm>
+          <a:prstGeom prst="rect">
+            <a:avLst/>
+          </a:prstGeom>
+          <a:solidFill>
+            <a:srgbClr val="1E2761"/>
+          </a:solidFill>
+          <a:ln>
+            <a:noFill/>
+          </a:ln>
+        </p:spPr>
+        <p:style>
+          <a:lnRef idx="1">
+            <a:schemeClr val="accent1"/>
+          </a:lnRef>
+          <a:fillRef idx="3">
+            <a:schemeClr val="accent1"/>
+          </a:fillRef>
+          <a:effectRef idx="2">
+            <a:schemeClr val="accent1"/>
+          </a:effectRef>
+          <a:fontRef idx="minor">
+            <a:schemeClr val="lt1"/>
+          </a:fontRef>
+        </p:style>
+        <p:txBody>
+          <a:bodyPr rtlCol="0" anchor="ctr"/>
+          <a:lstStyle/>
+          <a:p/>
+        </p:txBody>
+      </p:sp>
+      <p:sp>
+        <p:nvSpPr>
+          <p:cNvPr id="9" name="TextBox 8"/>
+          <p:cNvSpPr txBox="1"/>
+          <p:nvPr/>
+        </p:nvSpPr>
+        <p:spPr>
+          <a:xfrm>
+            <a:off x="868680" y="2624328"/>
+            <a:ext cx="4617720" cy="347472"/>
+          </a:xfrm>
+          <a:prstGeom prst="rect">
+            <a:avLst/>
+          </a:prstGeom>
+          <a:noFill/>
+        </p:spPr>
+        <p:txBody>
+          <a:bodyPr wrap="square" lIns="0" rIns="0" tIns="0" bIns="0">
+            <a:spAutoFit/>
+          </a:bodyPr>
+          <a:lstStyle/>
+          <a:p>
+            <a:pPr>
+              <a:spcAft>
+                <a:spcPts val="200"/>
+              </a:spcAft>
+            </a:pPr>
+            <a:r>
+              <a:rPr sz="1500" b="1">
+                <a:solidFill>
+                  <a:srgbClr val="1E2761"/>
+                </a:solidFill>
+                <a:latin typeface="Calibri"/>
+              </a:rPr>
+              <a:t>ENVIRONMENT &amp; CONTEXT</a:t>
+            </a:r>
+          </a:p>
+        </p:txBody>
+      </p:sp>
+      <p:sp>
+        <p:nvSpPr>
+          <p:cNvPr id="10" name="TextBox 9"/>
+          <p:cNvSpPr txBox="1"/>
+          <p:nvPr/>
+        </p:nvSpPr>
+        <p:spPr>
+          <a:xfrm>
+            <a:off x="868680" y="3063240"/>
+            <a:ext cx="4617720" cy="548640"/>
+          </a:xfrm>
+          <a:prstGeom prst="rect">
+            <a:avLst/>
+          </a:prstGeom>
+          <a:noFill/>
+        </p:spPr>
+        <p:txBody>
+          <a:bodyPr wrap="square" lIns="0" rIns="0" tIns="0" bIns="0">
+            <a:spAutoFit/>
+          </a:bodyPr>
+          <a:lstStyle/>
+          <a:p>
+            <a:pPr>
+              <a:spcAft>
+                <a:spcPts val="200"/>
+              </a:spcAft>
+            </a:pPr>
+            <a:r>
+              <a:rPr sz="1300" b="0">
+                <a:solidFill>
+                  <a:srgbClr val="5B5F6E"/>
+                </a:solidFill>
+                <a:latin typeface="Calibri"/>
+              </a:rPr>
+              <a:t>-  Phase 3 visibility and Phase 4 promotion, both unchanged</a:t>
+            </a:r>
+          </a:p>
+          <a:p>
+            <a:pPr>
+              <a:spcAft>
+                <a:spcPts val="200"/>
+              </a:spcAft>
+            </a:pPr>
+            <a:r>
+              <a:rPr sz="1300" b="0">
+                <a:solidFill>
+                  <a:srgbClr val="5B5F6E"/>
+                </a:solidFill>
+                <a:latin typeface="Calibri"/>
+              </a:rPr>
+              <a:t>-  Only how remaining budget enters utility differs across arms</a:t>
+            </a:r>
+          </a:p>
+        </p:txBody>
+      </p:sp>
+      <p:sp>
+        <p:nvSpPr>
+          <p:cNvPr id="11" name="Rectangle 10"/>
+          <p:cNvSpPr/>
+          <p:nvPr/>
+        </p:nvSpPr>
+        <p:spPr>
+          <a:xfrm>
+            <a:off x="457200" y="3886200"/>
+            <a:ext cx="292608" cy="292608"/>
+          </a:xfrm>
+          <a:prstGeom prst="rect">
+            <a:avLst/>
+          </a:prstGeom>
+          <a:solidFill>
+            <a:srgbClr val="1E2761"/>
+          </a:solidFill>
+          <a:ln>
+            <a:noFill/>
+          </a:ln>
+        </p:spPr>
+        <p:style>
+          <a:lnRef idx="1">
+            <a:schemeClr val="accent1"/>
+          </a:lnRef>
+          <a:fillRef idx="3">
+            <a:schemeClr val="accent1"/>
+          </a:fillRef>
+          <a:effectRef idx="2">
+            <a:schemeClr val="accent1"/>
+          </a:effectRef>
+          <a:fontRef idx="minor">
+            <a:schemeClr val="lt1"/>
+          </a:fontRef>
+        </p:style>
+        <p:txBody>
+          <a:bodyPr rtlCol="0" anchor="ctr"/>
+          <a:lstStyle/>
+          <a:p/>
+        </p:txBody>
+      </p:sp>
+      <p:sp>
+        <p:nvSpPr>
+          <p:cNvPr id="12" name="TextBox 11"/>
+          <p:cNvSpPr txBox="1"/>
+          <p:nvPr/>
+        </p:nvSpPr>
+        <p:spPr>
+          <a:xfrm>
+            <a:off x="868680" y="3858768"/>
+            <a:ext cx="4617720" cy="347472"/>
+          </a:xfrm>
+          <a:prstGeom prst="rect">
+            <a:avLst/>
+          </a:prstGeom>
+          <a:noFill/>
+        </p:spPr>
+        <p:txBody>
+          <a:bodyPr wrap="square" lIns="0" rIns="0" tIns="0" bIns="0">
+            <a:spAutoFit/>
+          </a:bodyPr>
+          <a:lstStyle/>
+          <a:p>
+            <a:pPr>
+              <a:spcAft>
+                <a:spcPts val="200"/>
+              </a:spcAft>
+            </a:pPr>
+            <a:r>
+              <a:rPr sz="1500" b="1">
+                <a:solidFill>
+                  <a:srgbClr val="1E2761"/>
+                </a:solidFill>
+                <a:latin typeface="Calibri"/>
+              </a:rPr>
+              <a:t>METHOD</a:t>
+            </a:r>
+          </a:p>
+        </p:txBody>
+      </p:sp>
+      <p:sp>
+        <p:nvSpPr>
+          <p:cNvPr id="13" name="TextBox 12"/>
+          <p:cNvSpPr txBox="1"/>
+          <p:nvPr/>
+        </p:nvSpPr>
+        <p:spPr>
+          <a:xfrm>
+            <a:off x="868680" y="4297680"/>
+            <a:ext cx="4617720" cy="594360"/>
+          </a:xfrm>
+          <a:prstGeom prst="rect">
+            <a:avLst/>
+          </a:prstGeom>
+          <a:noFill/>
+        </p:spPr>
+        <p:txBody>
+          <a:bodyPr wrap="square" lIns="0" rIns="0" tIns="0" bIns="0">
+            <a:spAutoFit/>
+          </a:bodyPr>
+          <a:lstStyle/>
+          <a:p>
+            <a:pPr>
+              <a:spcAft>
+                <a:spcPts val="200"/>
+              </a:spcAft>
+            </a:pPr>
+            <a:r>
+              <a:rPr sz="1300" b="0">
+                <a:solidFill>
+                  <a:srgbClr val="5B5F6E"/>
+                </a:solidFill>
+                <a:latin typeface="Calibri"/>
+              </a:rPr>
+              <a:t>Cliff: utility −= 1.0 when (budget_remaining − price) &lt; 0.5.</a:t>
+            </a:r>
+          </a:p>
+          <a:p>
+            <a:pPr>
+              <a:spcAft>
+                <a:spcPts val="200"/>
+              </a:spcAft>
+            </a:pPr>
+            <a:r>
+              <a:rPr sz="1300" b="0">
+                <a:solidFill>
+                  <a:srgbClr val="5B5F6E"/>
+                </a:solidFill>
+                <a:latin typeface="Calibri"/>
+              </a:rPr>
+              <a:t>Three arms — linear / linear+cliff / cliff-only — same seeds, exactly paired.</a:t>
+            </a:r>
+          </a:p>
+        </p:txBody>
+      </p:sp>
+      <p:sp>
+        <p:nvSpPr>
+          <p:cNvPr id="14" name="Rectangle 13"/>
+          <p:cNvSpPr/>
+          <p:nvPr/>
+        </p:nvSpPr>
+        <p:spPr>
+          <a:xfrm>
+            <a:off x="457200" y="5029200"/>
+            <a:ext cx="292608" cy="292608"/>
+          </a:xfrm>
+          <a:prstGeom prst="rect">
+            <a:avLst/>
+          </a:prstGeom>
+          <a:solidFill>
+            <a:srgbClr val="1E2761"/>
+          </a:solidFill>
+          <a:ln>
+            <a:noFill/>
+          </a:ln>
+        </p:spPr>
+        <p:style>
+          <a:lnRef idx="1">
+            <a:schemeClr val="accent1"/>
+          </a:lnRef>
+          <a:fillRef idx="3">
+            <a:schemeClr val="accent1"/>
+          </a:fillRef>
+          <a:effectRef idx="2">
+            <a:schemeClr val="accent1"/>
+          </a:effectRef>
+          <a:fontRef idx="minor">
+            <a:schemeClr val="lt1"/>
+          </a:fontRef>
+        </p:style>
+        <p:txBody>
+          <a:bodyPr rtlCol="0" anchor="ctr"/>
+          <a:lstStyle/>
+          <a:p/>
+        </p:txBody>
+      </p:sp>
+      <p:sp>
+        <p:nvSpPr>
+          <p:cNvPr id="15" name="TextBox 14"/>
+          <p:cNvSpPr txBox="1"/>
+          <p:nvPr/>
+        </p:nvSpPr>
+        <p:spPr>
+          <a:xfrm>
+            <a:off x="868680" y="5001768"/>
+            <a:ext cx="4617720" cy="347472"/>
+          </a:xfrm>
+          <a:prstGeom prst="rect">
+            <a:avLst/>
+          </a:prstGeom>
+          <a:noFill/>
+        </p:spPr>
+        <p:txBody>
+          <a:bodyPr wrap="square" lIns="0" rIns="0" tIns="0" bIns="0">
+            <a:spAutoFit/>
+          </a:bodyPr>
+          <a:lstStyle/>
+          <a:p>
+            <a:pPr>
+              <a:spcAft>
+                <a:spcPts val="200"/>
+              </a:spcAft>
+            </a:pPr>
+            <a:r>
+              <a:rPr sz="1500" b="1">
+                <a:solidFill>
+                  <a:srgbClr val="1E2761"/>
+                </a:solidFill>
+                <a:latin typeface="Calibri"/>
+              </a:rPr>
+              <a:t>LITERATURE BASIS</a:t>
+            </a:r>
+          </a:p>
+        </p:txBody>
+      </p:sp>
+      <p:sp>
+        <p:nvSpPr>
+          <p:cNvPr id="16" name="TextBox 15"/>
+          <p:cNvSpPr txBox="1"/>
+          <p:nvPr/>
+        </p:nvSpPr>
+        <p:spPr>
+          <a:xfrm>
+            <a:off x="868680" y="5440680"/>
+            <a:ext cx="4617720" cy="1005840"/>
+          </a:xfrm>
+          <a:prstGeom prst="rect">
+            <a:avLst/>
+          </a:prstGeom>
+          <a:noFill/>
+        </p:spPr>
+        <p:txBody>
+          <a:bodyPr wrap="square" lIns="0" rIns="0" tIns="0" bIns="0">
+            <a:spAutoFit/>
+          </a:bodyPr>
+          <a:lstStyle/>
+          <a:p>
+            <a:pPr>
+              <a:spcAft>
+                <a:spcPts val="600"/>
+              </a:spcAft>
+            </a:pPr>
+            <a:r>
+              <a:rPr sz="1100" b="1">
+                <a:solidFill>
+                  <a:srgbClr val="1E2761"/>
+                </a:solidFill>
+                <a:latin typeface="Calibri"/>
+              </a:rPr>
+              <a:t>Kahneman &amp; Tversky (1979), </a:t>
+            </a:r>
+            <a:r>
+              <a:rPr sz="1100" b="0">
+                <a:solidFill>
+                  <a:srgbClr val="5B5F6E"/>
+                </a:solidFill>
+                <a:latin typeface="Calibri"/>
+              </a:rPr>
+              <a:t>“Prospect Theory” (Econometrica) — basis for a reference-point penalty near budget exhaustion.</a:t>
+            </a:r>
+          </a:p>
+        </p:txBody>
+      </p:sp>
+      <p:sp>
+        <p:nvSpPr>
+          <p:cNvPr id="17" name="Rectangle 16"/>
+          <p:cNvSpPr/>
+          <p:nvPr/>
+        </p:nvSpPr>
+        <p:spPr>
+          <a:xfrm>
+            <a:off x="5943600" y="1417320"/>
+            <a:ext cx="292608" cy="292608"/>
+          </a:xfrm>
+          <a:prstGeom prst="rect">
+            <a:avLst/>
+          </a:prstGeom>
+          <a:solidFill>
+            <a:srgbClr val="1E2761"/>
+          </a:solidFill>
+          <a:ln>
+            <a:noFill/>
+          </a:ln>
+        </p:spPr>
+        <p:style>
+          <a:lnRef idx="1">
+            <a:schemeClr val="accent1"/>
+          </a:lnRef>
+          <a:fillRef idx="3">
+            <a:schemeClr val="accent1"/>
+          </a:fillRef>
+          <a:effectRef idx="2">
+            <a:schemeClr val="accent1"/>
+          </a:effectRef>
+          <a:fontRef idx="minor">
+            <a:schemeClr val="lt1"/>
+          </a:fontRef>
+        </p:style>
+        <p:txBody>
+          <a:bodyPr rtlCol="0" anchor="ctr"/>
+          <a:lstStyle/>
+          <a:p/>
+        </p:txBody>
+      </p:sp>
+      <p:sp>
+        <p:nvSpPr>
+          <p:cNvPr id="18" name="TextBox 17"/>
+          <p:cNvSpPr txBox="1"/>
+          <p:nvPr/>
+        </p:nvSpPr>
+        <p:spPr>
+          <a:xfrm>
+            <a:off x="6355080" y="1389888"/>
+            <a:ext cx="5349240" cy="347472"/>
+          </a:xfrm>
+          <a:prstGeom prst="rect">
+            <a:avLst/>
+          </a:prstGeom>
+          <a:noFill/>
+        </p:spPr>
+        <p:txBody>
+          <a:bodyPr wrap="square" lIns="0" rIns="0" tIns="0" bIns="0">
+            <a:spAutoFit/>
+          </a:bodyPr>
+          <a:lstStyle/>
+          <a:p>
+            <a:pPr>
+              <a:spcAft>
+                <a:spcPts val="200"/>
+              </a:spcAft>
+            </a:pPr>
+            <a:r>
+              <a:rPr sz="1500" b="1">
+                <a:solidFill>
+                  <a:srgbClr val="1E2761"/>
+                </a:solidFill>
+                <a:latin typeface="Calibri"/>
+              </a:rPr>
+              <a:t>KEY RESULTS</a:t>
+            </a:r>
+          </a:p>
+        </p:txBody>
+      </p:sp>
+      <p:graphicFrame>
+        <p:nvGraphicFramePr>
+          <p:cNvPr id="19" name="Table 18"/>
+          <p:cNvGraphicFramePr>
+            <a:graphicFrameLocks noGrp="1"/>
+          </p:cNvGraphicFramePr>
+          <p:nvPr/>
+        </p:nvGraphicFramePr>
+        <p:xfrm>
+          <a:off x="5943600" y="1874519"/>
+          <a:ext cx="5760720" cy="1645920"/>
+        </p:xfrm>
+        <a:graphic>
+          <a:graphicData uri="http://schemas.openxmlformats.org/drawingml/2006/table">
+            <a:tbl>
+              <a:tblPr firstRow="1" bandRow="1">
+                <a:tableStyleId>{5C22544A-7EE6-4342-B048-85BDC9FD1C3A}</a:tableStyleId>
+              </a:tblPr>
+              <a:tblGrid>
+                <a:gridCol w="3200400"/>
+                <a:gridCol w="1463040"/>
+                <a:gridCol w="1097280"/>
+              </a:tblGrid>
+              <a:tr h="274320">
+                <a:tc>
+                  <a:txBody>
+                    <a:bodyPr/>
+                    <a:lstStyle/>
+                    <a:p>
+                      <a:r>
+                        <a:rPr sz="1100" b="1">
+                          <a:solidFill>
+                            <a:srgbClr val="FFFFFF"/>
+                          </a:solidFill>
+                          <a:latin typeface="Calibri"/>
+                        </a:rPr>
+                        <a:t>Metric</a:t>
+                      </a:r>
+                    </a:p>
+                  </a:txBody>
+                  <a:tcPr>
+                    <a:solidFill>
+                      <a:srgbClr val="1E2761"/>
+                    </a:solidFill>
+                  </a:tcPr>
+                </a:tc>
+                <a:tc>
+                  <a:txBody>
+                    <a:bodyPr/>
+                    <a:lstStyle/>
+                    <a:p>
+                      <a:r>
+                        <a:rPr sz="1100" b="1">
+                          <a:solidFill>
+                            <a:srgbClr val="FFFFFF"/>
+                          </a:solidFill>
+                          <a:latin typeface="Calibri"/>
+                        </a:rPr>
+                        <a:t>Value</a:t>
+                      </a:r>
+                    </a:p>
+                  </a:txBody>
+                  <a:tcPr>
+                    <a:solidFill>
+                      <a:srgbClr val="1E2761"/>
+                    </a:solidFill>
+                  </a:tcPr>
+                </a:tc>
+                <a:tc>
+                  <a:txBody>
+                    <a:bodyPr/>
+                    <a:lstStyle/>
+                    <a:p>
+                      <a:r>
+                        <a:rPr sz="1100" b="1">
+                          <a:solidFill>
+                            <a:srgbClr val="FFFFFF"/>
+                          </a:solidFill>
+                          <a:latin typeface="Calibri"/>
+                        </a:rPr>
+                        <a:t/>
+                      </a:r>
+                    </a:p>
+                  </a:txBody>
+                  <a:tcPr>
+                    <a:solidFill>
+                      <a:srgbClr val="1E2761"/>
+                    </a:solidFill>
+                  </a:tcPr>
+                </a:tc>
+              </a:tr>
+              <a:tr h="274320">
+                <a:tc>
+                  <a:txBody>
+                    <a:bodyPr/>
+                    <a:lstStyle/>
+                    <a:p>
+                      <a:r>
+                        <a:rPr sz="1100">
+                          <a:solidFill>
+                            <a:srgbClr val="1E2761"/>
+                          </a:solidFill>
+                          <a:latin typeface="Calibri"/>
+                        </a:rPr>
+                        <a:t>Participation rate (0.6–1.0)</a:t>
+                      </a:r>
+                    </a:p>
+                  </a:txBody>
+                  <a:tcPr>
+                    <a:solidFill>
+                      <a:srgbClr val="FFFFFF"/>
+                    </a:solidFill>
+                  </a:tcPr>
+                </a:tc>
+                <a:tc>
+                  <a:txBody>
+                    <a:bodyPr/>
+                    <a:lstStyle/>
+                    <a:p>
+                      <a:r>
+                        <a:rPr sz="1100">
+                          <a:solidFill>
+                            <a:srgbClr val="5B5F6E"/>
+                          </a:solidFill>
+                          <a:latin typeface="Calibri"/>
+                        </a:rPr>
+                        <a:t>0.753</a:t>
+                      </a:r>
+                    </a:p>
+                  </a:txBody>
+                  <a:tcPr>
+                    <a:solidFill>
+                      <a:srgbClr val="FFFFFF"/>
+                    </a:solidFill>
+                  </a:tcPr>
+                </a:tc>
+                <a:tc>
+                  <a:txBody>
+                    <a:bodyPr/>
+                    <a:lstStyle/>
+                    <a:p>
+                      <a:pPr algn="ctr"/>
+                      <a:r>
+                        <a:rPr sz="1100" b="1">
+                          <a:solidFill>
+                            <a:srgbClr val="1E7A4D"/>
+                          </a:solidFill>
+                          <a:latin typeface="Calibri"/>
+                        </a:rPr>
+                        <a:t>PASS</a:t>
+                      </a:r>
+                    </a:p>
+                  </a:txBody>
+                  <a:tcPr>
+                    <a:solidFill>
+                      <a:srgbClr val="FFFFFF"/>
+                    </a:solidFill>
+                  </a:tcPr>
+                </a:tc>
+              </a:tr>
+              <a:tr h="274320">
+                <a:tc>
+                  <a:txBody>
+                    <a:bodyPr/>
+                    <a:lstStyle/>
+                    <a:p>
+                      <a:r>
+                        <a:rPr sz="1100">
+                          <a:solidFill>
+                            <a:srgbClr val="1E2761"/>
+                          </a:solidFill>
+                          <a:latin typeface="Calibri"/>
+                        </a:rPr>
+                        <a:t>linear+cliff: largest share shift</a:t>
+                      </a:r>
+                    </a:p>
+                  </a:txBody>
+                  <a:tcPr>
+                    <a:solidFill>
+                      <a:srgbClr val="F7F8FC"/>
+                    </a:solidFill>
+                  </a:tcPr>
+                </a:tc>
+                <a:tc>
+                  <a:txBody>
+                    <a:bodyPr/>
+                    <a:lstStyle/>
+                    <a:p>
+                      <a:r>
+                        <a:rPr sz="1100">
+                          <a:solidFill>
+                            <a:srgbClr val="5B5F6E"/>
+                          </a:solidFill>
+                          <a:latin typeface="Calibri"/>
+                        </a:rPr>
+                        <a:t>+0.17 pp</a:t>
+                      </a:r>
+                    </a:p>
+                  </a:txBody>
+                  <a:tcPr>
+                    <a:solidFill>
+                      <a:srgbClr val="F7F8FC"/>
+                    </a:solidFill>
+                  </a:tcPr>
+                </a:tc>
+                <a:tc>
+                  <a:txBody>
+                    <a:bodyPr/>
+                    <a:lstStyle/>
+                    <a:p>
+                      <a:pPr algn="ctr"/>
+                      <a:r>
+                        <a:rPr sz="1100" b="1">
+                          <a:solidFill>
+                            <a:srgbClr val="1E7A4D"/>
+                          </a:solidFill>
+                          <a:latin typeface="Calibri"/>
+                        </a:rPr>
+                        <a:t>PASS</a:t>
+                      </a:r>
+                    </a:p>
+                  </a:txBody>
+                  <a:tcPr>
+                    <a:solidFill>
+                      <a:srgbClr val="F7F8FC"/>
+                    </a:solidFill>
+                  </a:tcPr>
+                </a:tc>
+              </a:tr>
+              <a:tr h="274320">
+                <a:tc>
+                  <a:txBody>
+                    <a:bodyPr/>
+                    <a:lstStyle/>
+                    <a:p>
+                      <a:r>
+                        <a:rPr sz="1100">
+                          <a:solidFill>
+                            <a:srgbClr val="1E2761"/>
+                          </a:solidFill>
+                          <a:latin typeface="Calibri"/>
+                        </a:rPr>
+                        <a:t>  its 95% CI vs ±5 pp margin</a:t>
+                      </a:r>
+                    </a:p>
+                  </a:txBody>
+                  <a:tcPr>
+                    <a:solidFill>
+                      <a:srgbClr val="FFFFFF"/>
+                    </a:solidFill>
+                  </a:tcPr>
+                </a:tc>
+                <a:tc>
+                  <a:txBody>
+                    <a:bodyPr/>
+                    <a:lstStyle/>
+                    <a:p>
+                      <a:r>
+                        <a:rPr sz="1100">
+                          <a:solidFill>
+                            <a:srgbClr val="5B5F6E"/>
+                          </a:solidFill>
+                          <a:latin typeface="Calibri"/>
+                        </a:rPr>
+                        <a:t>[-0.9, +1.3]</a:t>
+                      </a:r>
+                    </a:p>
+                  </a:txBody>
+                  <a:tcPr>
+                    <a:solidFill>
+                      <a:srgbClr val="FFFFFF"/>
+                    </a:solidFill>
+                  </a:tcPr>
+                </a:tc>
+                <a:tc>
+                  <a:txBody>
+                    <a:bodyPr/>
+                    <a:lstStyle/>
+                    <a:p>
+                      <a:pPr algn="ctr"/>
+                      <a:r>
+                        <a:rPr sz="1100" b="1">
+                          <a:solidFill>
+                            <a:srgbClr val="1E7A4D"/>
+                          </a:solidFill>
+                          <a:latin typeface="Calibri"/>
+                        </a:rPr>
+                        <a:t>PASS</a:t>
+                      </a:r>
+                    </a:p>
+                  </a:txBody>
+                  <a:tcPr>
+                    <a:solidFill>
+                      <a:srgbClr val="FFFFFF"/>
+                    </a:solidFill>
+                  </a:tcPr>
+                </a:tc>
+              </a:tr>
+              <a:tr h="274320">
+                <a:tc>
+                  <a:txBody>
+                    <a:bodyPr/>
+                    <a:lstStyle/>
+                    <a:p>
+                      <a:r>
+                        <a:rPr sz="1100">
+                          <a:solidFill>
+                            <a:srgbClr val="1E2761"/>
+                          </a:solidFill>
+                          <a:latin typeface="Calibri"/>
+                        </a:rPr>
+                        <a:t>cliff-only @1000 seeds: largest shift</a:t>
+                      </a:r>
+                    </a:p>
+                  </a:txBody>
+                  <a:tcPr>
+                    <a:solidFill>
+                      <a:srgbClr val="F7F8FC"/>
+                    </a:solidFill>
+                  </a:tcPr>
+                </a:tc>
+                <a:tc>
+                  <a:txBody>
+                    <a:bodyPr/>
+                    <a:lstStyle/>
+                    <a:p>
+                      <a:r>
+                        <a:rPr sz="1100">
+                          <a:solidFill>
+                            <a:srgbClr val="5B5F6E"/>
+                          </a:solidFill>
+                          <a:latin typeface="Calibri"/>
+                        </a:rPr>
+                        <a:t>-2.73 pp</a:t>
+                      </a:r>
+                    </a:p>
+                  </a:txBody>
+                  <a:tcPr>
+                    <a:solidFill>
+                      <a:srgbClr val="F7F8FC"/>
+                    </a:solidFill>
+                  </a:tcPr>
+                </a:tc>
+                <a:tc>
+                  <a:txBody>
+                    <a:bodyPr/>
+                    <a:lstStyle/>
+                    <a:p>
+                      <a:pPr algn="ctr"/>
+                      <a:r>
+                        <a:rPr sz="1100" b="1">
+                          <a:solidFill>
+                            <a:srgbClr val="1E7A4D"/>
+                          </a:solidFill>
+                          <a:latin typeface="Calibri"/>
+                        </a:rPr>
+                        <a:t>PASS</a:t>
+                      </a:r>
+                    </a:p>
+                  </a:txBody>
+                  <a:tcPr>
+                    <a:solidFill>
+                      <a:srgbClr val="F7F8FC"/>
+                    </a:solidFill>
+                  </a:tcPr>
+                </a:tc>
+              </a:tr>
+              <a:tr h="274320">
+                <a:tc>
+                  <a:txBody>
+                    <a:bodyPr/>
+                    <a:lstStyle/>
+                    <a:p>
+                      <a:r>
+                        <a:rPr sz="1100">
+                          <a:solidFill>
+                            <a:srgbClr val="1E2761"/>
+                          </a:solidFill>
+                          <a:latin typeface="Calibri"/>
+                        </a:rPr>
+                        <a:t>Purchases that reached the cliff</a:t>
+                      </a:r>
+                    </a:p>
+                  </a:txBody>
+                  <a:tcPr>
+                    <a:solidFill>
+                      <a:srgbClr val="FFFFFF"/>
+                    </a:solidFill>
+                  </a:tcPr>
+                </a:tc>
+                <a:tc>
+                  <a:txBody>
+                    <a:bodyPr/>
+                    <a:lstStyle/>
+                    <a:p>
+                      <a:r>
+                        <a:rPr sz="1100">
+                          <a:solidFill>
+                            <a:srgbClr val="5B5F6E"/>
+                          </a:solidFill>
+                          <a:latin typeface="Calibri"/>
+                        </a:rPr>
+                        <a:t>17/2677 (0.6%)</a:t>
+                      </a:r>
+                    </a:p>
+                  </a:txBody>
+                  <a:tcPr>
+                    <a:solidFill>
+                      <a:srgbClr val="FFFFFF"/>
+                    </a:solidFill>
+                  </a:tcPr>
+                </a:tc>
+                <a:tc>
+                  <a:txBody>
+                    <a:bodyPr/>
+                    <a:lstStyle/>
+                    <a:p>
+                      <a:pPr algn="ctr"/>
+                      <a:r>
+                        <a:rPr sz="1100" b="1">
+                          <a:solidFill>
+                            <a:srgbClr val="5B5F6E"/>
+                          </a:solidFill>
+                          <a:latin typeface="Calibri"/>
+                        </a:rPr>
+                        <a:t>—</a:t>
+                      </a:r>
+                    </a:p>
+                  </a:txBody>
+                  <a:tcPr>
+                    <a:solidFill>
+                      <a:srgbClr val="FFFFFF"/>
+                    </a:solidFill>
+                  </a:tcPr>
+                </a:tc>
+              </a:tr>
+            </a:tbl>
+          </a:graphicData>
+        </a:graphic>
+      </p:graphicFrame>
+      <p:sp>
+        <p:nvSpPr>
+          <p:cNvPr id="20" name="Rectangle 19"/>
+          <p:cNvSpPr/>
+          <p:nvPr/>
+        </p:nvSpPr>
+        <p:spPr>
+          <a:xfrm>
+            <a:off x="5943600" y="4023360"/>
+            <a:ext cx="292608" cy="292608"/>
+          </a:xfrm>
+          <a:prstGeom prst="rect">
+            <a:avLst/>
+          </a:prstGeom>
+          <a:solidFill>
+            <a:srgbClr val="1E2761"/>
+          </a:solidFill>
+          <a:ln>
+            <a:noFill/>
+          </a:ln>
+        </p:spPr>
+        <p:style>
+          <a:lnRef idx="1">
+            <a:schemeClr val="accent1"/>
+          </a:lnRef>
+          <a:fillRef idx="3">
+            <a:schemeClr val="accent1"/>
+          </a:fillRef>
+          <a:effectRef idx="2">
+            <a:schemeClr val="accent1"/>
+          </a:effectRef>
+          <a:fontRef idx="minor">
+            <a:schemeClr val="lt1"/>
+          </a:fontRef>
+        </p:style>
+        <p:txBody>
+          <a:bodyPr rtlCol="0" anchor="ctr"/>
+          <a:lstStyle/>
+          <a:p/>
+        </p:txBody>
+      </p:sp>
+      <p:sp>
+        <p:nvSpPr>
+          <p:cNvPr id="21" name="TextBox 20"/>
+          <p:cNvSpPr txBox="1"/>
+          <p:nvPr/>
+        </p:nvSpPr>
+        <p:spPr>
+          <a:xfrm>
+            <a:off x="6355080" y="3995928"/>
+            <a:ext cx="5349240" cy="347472"/>
+          </a:xfrm>
+          <a:prstGeom prst="rect">
+            <a:avLst/>
+          </a:prstGeom>
+          <a:noFill/>
+        </p:spPr>
+        <p:txBody>
+          <a:bodyPr wrap="square" lIns="0" rIns="0" tIns="0" bIns="0">
+            <a:spAutoFit/>
+          </a:bodyPr>
+          <a:lstStyle/>
+          <a:p>
+            <a:pPr>
+              <a:spcAft>
+                <a:spcPts val="200"/>
+              </a:spcAft>
+            </a:pPr>
+            <a:r>
+              <a:rPr sz="1500" b="1">
+                <a:solidFill>
+                  <a:srgbClr val="1E2761"/>
+                </a:solidFill>
+                <a:latin typeface="Calibri"/>
+              </a:rPr>
+              <a:t>RESEARCH QUESTION</a:t>
+            </a:r>
+          </a:p>
+        </p:txBody>
+      </p:sp>
+      <p:sp>
+        <p:nvSpPr>
+          <p:cNvPr id="22" name="Rectangle 21"/>
+          <p:cNvSpPr/>
+          <p:nvPr/>
+        </p:nvSpPr>
+        <p:spPr>
+          <a:xfrm>
+            <a:off x="5943600" y="4434840"/>
+            <a:ext cx="5760720" cy="1965960"/>
+          </a:xfrm>
+          <a:prstGeom prst="rect">
+            <a:avLst/>
+          </a:prstGeom>
+          <a:solidFill>
+            <a:srgbClr val="F7F8FC"/>
+          </a:solidFill>
+          <a:ln>
+            <a:noFill/>
+          </a:ln>
+        </p:spPr>
+        <p:style>
+          <a:lnRef idx="1">
+            <a:schemeClr val="accent1"/>
+          </a:lnRef>
+          <a:fillRef idx="3">
+            <a:schemeClr val="accent1"/>
+          </a:fillRef>
+          <a:effectRef idx="2">
+            <a:schemeClr val="accent1"/>
+          </a:effectRef>
+          <a:fontRef idx="minor">
+            <a:schemeClr val="lt1"/>
+          </a:fontRef>
+        </p:style>
+        <p:txBody>
+          <a:bodyPr rtlCol="0" anchor="ctr"/>
+          <a:lstStyle/>
+          <a:p/>
+        </p:txBody>
+      </p:sp>
+      <p:sp>
+        <p:nvSpPr>
+          <p:cNvPr id="23" name="TextBox 22"/>
+          <p:cNvSpPr txBox="1"/>
+          <p:nvPr/>
+        </p:nvSpPr>
+        <p:spPr>
+          <a:xfrm>
+            <a:off x="6217920" y="4572000"/>
+            <a:ext cx="5212080" cy="1737360"/>
+          </a:xfrm>
+          <a:prstGeom prst="rect">
+            <a:avLst/>
+          </a:prstGeom>
+          <a:noFill/>
+        </p:spPr>
+        <p:txBody>
+          <a:bodyPr wrap="square" lIns="0" rIns="0" tIns="0" bIns="0">
+            <a:spAutoFit/>
+          </a:bodyPr>
+          <a:lstStyle/>
+          <a:p>
+            <a:pPr>
+              <a:spcAft>
+                <a:spcPts val="500"/>
+              </a:spcAft>
+            </a:pPr>
+            <a:r>
+              <a:rPr sz="1000" b="0">
+                <a:solidFill>
+                  <a:srgbClr val="5B5F6E"/>
+                </a:solidFill>
+                <a:latin typeface="Calibri"/>
+              </a:rPr>
+              <a:t>Does one nonlinear mechanism — a budget cliff — materially change conclusions versus the linear model used in Phases 2–4?</a:t>
+            </a:r>
+          </a:p>
+          <a:p>
+            <a:pPr>
+              <a:spcAft>
+                <a:spcPts val="500"/>
+              </a:spcAft>
+            </a:pPr>
+            <a:r>
+              <a:rPr sz="1000" b="1">
+                <a:solidFill>
+                  <a:srgbClr val="1E2761"/>
+                </a:solidFill>
+                <a:latin typeface="Calibri"/>
+              </a:rPr>
+              <a:t>Finding: </a:t>
+            </a:r>
+            <a:r>
+              <a:rPr sz="1000" b="0">
+                <a:solidFill>
+                  <a:srgbClr val="5B5F6E"/>
+                </a:solidFill>
+                <a:latin typeface="Calibri"/>
+              </a:rPr>
+              <a:t>No, under both readings of the spec. Every tracked class-share shift's 95% CI lies inside ±5 pp, so a material effect is ruled out rather than merely unobserved. The project rolls back to the linear model for Phase 6 onward, not linear-plus-an-inert-threshold.</a:t>
+            </a:r>
+          </a:p>
+          <a:p>
+            <a:pPr>
+              <a:spcAft>
+                <a:spcPts val="500"/>
+              </a:spcAft>
+            </a:pPr>
+            <a:r>
+              <a:rPr sz="1000" b="1">
+                <a:solidFill>
+                  <a:srgbClr val="1E2761"/>
+                </a:solidFill>
+                <a:latin typeface="Calibri"/>
+              </a:rPr>
+              <a:t>Caveat: </a:t>
+            </a:r>
+            <a:r>
+              <a:rPr sz="1000" b="0">
+                <a:solidFill>
+                  <a:srgbClr val="5B5F6E"/>
+                </a:solidFill>
+                <a:latin typeface="Calibri"/>
+              </a:rPr>
+              <a:t>The cliff cannot fire on any buyer's first purchase at these parameters (smallest first-purchase gap is 1.0 against a 0.5 threshold), so it reached only 0.6% of purchases. That is why the effect is small here, not evidence that threshold effects are unimportant. The cliff-only arm was undecided at 30 seeds — point estimate 4.68 pp with a CI reaching 6.36 — and needed 1000 seeds to settle at -2.73 pp.</a:t>
+            </a:r>
+          </a:p>
+        </p:txBody>
+      </p:sp>
+      <p:sp>
+        <p:nvSpPr>
+          <p:cNvPr id="24" name="TextBox 23"/>
+          <p:cNvSpPr txBox="1"/>
+          <p:nvPr/>
+        </p:nvSpPr>
+        <p:spPr>
+          <a:xfrm>
+            <a:off x="457200" y="6446520"/>
+            <a:ext cx="11247120" cy="274320"/>
+          </a:xfrm>
+          <a:prstGeom prst="rect">
+            <a:avLst/>
+          </a:prstGeom>
+          <a:noFill/>
+        </p:spPr>
+        <p:txBody>
+          <a:bodyPr wrap="square" lIns="0" rIns="0" tIns="0" bIns="0">
+            <a:spAutoFit/>
+          </a:bodyPr>
+          <a:lstStyle/>
+          <a:p>
+            <a:pPr>
+              <a:spcAft>
+                <a:spcPts val="200"/>
+              </a:spcAft>
+            </a:pPr>
+            <a:r>
+              <a:rPr sz="950" b="0">
+                <a:solidFill>
+                  <a:srgbClr val="5B5F6E"/>
+                </a:solidFill>
+                <a:latin typeface="Calibri"/>
+              </a:rPr>
+              <a:t>Generated automatically at phase completion  ·  Phase Completion Deliverable  ·  market-sim project</a:t>
+            </a:r>
+          </a:p>
+        </p:txBody>
+      </p:sp>
+    </p:spTree>
+  </p:cSld>
+  <p:clrMapOvr>
+    <a:masterClrMapping/>
+  </p:clrMapOvr>
+</p:sld>
+</file>
+
 <file path=ppt/theme/theme1.xml><?xml version="1.0" encoding="utf-8"?>
 <a:theme xmlns:a="http://schemas.openxmlformats.org/drawingml/2006/main" name="Office Theme">
   <a:themeElements>

--- a/project_tracking.pptx
+++ b/project_tracking.pptx
@@ -10,6 +10,7 @@
     <p:sldId id="258" r:id="rId9"/>
     <p:sldId id="259" r:id="rId10"/>
     <p:sldId id="260" r:id="rId11"/>
+    <p:sldId id="261" r:id="rId12"/>
   </p:sldIdLst>
   <p:sldSz cx="12191969" cy="6858000" type="screen4x3"/>
   <p:notesSz cx="6858000" cy="9144000"/>
@@ -10541,6 +10542,1543 @@
 </p:sld>
 </file>
 
+<file path=ppt/slides/slide6.xml><?xml version="1.0" encoding="utf-8"?>
+<p:sld xmlns:a="http://schemas.openxmlformats.org/drawingml/2006/main" xmlns:p="http://schemas.openxmlformats.org/presentationml/2006/main" xmlns:r="http://schemas.openxmlformats.org/officeDocument/2006/relationships">
+  <p:cSld>
+    <p:spTree>
+      <p:nvGrpSpPr>
+        <p:cNvPr id="1" name=""/>
+        <p:cNvGrpSpPr/>
+        <p:nvPr/>
+      </p:nvGrpSpPr>
+      <p:grpSpPr/>
+      <p:sp>
+        <p:nvSpPr>
+          <p:cNvPr id="2" name="TextBox 1"/>
+          <p:cNvSpPr txBox="1"/>
+          <p:nvPr/>
+        </p:nvSpPr>
+        <p:spPr>
+          <a:xfrm>
+            <a:off x="457200" y="320040"/>
+            <a:ext cx="8229600" cy="548640"/>
+          </a:xfrm>
+          <a:prstGeom prst="rect">
+            <a:avLst/>
+          </a:prstGeom>
+          <a:noFill/>
+        </p:spPr>
+        <p:txBody>
+          <a:bodyPr wrap="square" lIns="0" rIns="0" tIns="0" bIns="0">
+            <a:spAutoFit/>
+          </a:bodyPr>
+          <a:lstStyle/>
+          <a:p>
+            <a:pPr>
+              <a:spcAft>
+                <a:spcPts val="200"/>
+              </a:spcAft>
+            </a:pPr>
+            <a:r>
+              <a:rPr sz="3200" b="1">
+                <a:solidFill>
+                  <a:srgbClr val="1E2761"/>
+                </a:solidFill>
+                <a:latin typeface="Cambria"/>
+              </a:rPr>
+              <a:t>Phase 6 — Repeated Interaction</a:t>
+            </a:r>
+          </a:p>
+        </p:txBody>
+      </p:sp>
+      <p:sp>
+        <p:nvSpPr>
+          <p:cNvPr id="3" name="TextBox 2"/>
+          <p:cNvSpPr txBox="1"/>
+          <p:nvPr/>
+        </p:nvSpPr>
+        <p:spPr>
+          <a:xfrm>
+            <a:off x="457200" y="868680"/>
+            <a:ext cx="8229600" cy="274320"/>
+          </a:xfrm>
+          <a:prstGeom prst="rect">
+            <a:avLst/>
+          </a:prstGeom>
+          <a:noFill/>
+        </p:spPr>
+        <p:txBody>
+          <a:bodyPr wrap="square" lIns="0" rIns="0" tIns="0" bIns="0">
+            <a:spAutoFit/>
+          </a:bodyPr>
+          <a:lstStyle/>
+          <a:p>
+            <a:pPr>
+              <a:spcAft>
+                <a:spcPts val="200"/>
+              </a:spcAft>
+            </a:pPr>
+            <a:r>
+              <a:rPr sz="1200" b="0">
+                <a:solidFill>
+                  <a:srgbClr val="5B5F6E"/>
+                </a:solidFill>
+                <a:latin typeface="Calibri"/>
+              </a:rPr>
+              <a:t>22-week season, accumulating memory  ·  git tag: phase6-validated  ·  30 seeds</a:t>
+            </a:r>
+          </a:p>
+        </p:txBody>
+      </p:sp>
+      <p:sp>
+        <p:nvSpPr>
+          <p:cNvPr id="4" name="Rounded Rectangle 3"/>
+          <p:cNvSpPr/>
+          <p:nvPr/>
+        </p:nvSpPr>
+        <p:spPr>
+          <a:xfrm>
+            <a:off x="9464040" y="365760"/>
+            <a:ext cx="2240280" cy="384048"/>
+          </a:xfrm>
+          <a:prstGeom prst="roundRect">
+            <a:avLst/>
+          </a:prstGeom>
+          <a:solidFill>
+            <a:srgbClr val="1E7A4D"/>
+          </a:solidFill>
+          <a:ln>
+            <a:noFill/>
+          </a:ln>
+        </p:spPr>
+        <p:style>
+          <a:lnRef idx="1">
+            <a:schemeClr val="accent1"/>
+          </a:lnRef>
+          <a:fillRef idx="3">
+            <a:schemeClr val="accent1"/>
+          </a:fillRef>
+          <a:effectRef idx="2">
+            <a:schemeClr val="accent1"/>
+          </a:effectRef>
+          <a:fontRef idx="minor">
+            <a:schemeClr val="lt1"/>
+          </a:fontRef>
+        </p:style>
+        <p:txBody>
+          <a:bodyPr rtlCol="0" anchor="ctr"/>
+          <a:lstStyle/>
+          <a:p>
+            <a:pPr algn="ctr"/>
+            <a:r>
+              <a:rPr sz="1050" b="1">
+                <a:solidFill>
+                  <a:srgbClr val="FFFFFF"/>
+                </a:solidFill>
+                <a:latin typeface="Calibri"/>
+              </a:rPr>
+              <a:t>ALL CRITERIA PASS</a:t>
+            </a:r>
+          </a:p>
+        </p:txBody>
+      </p:sp>
+      <p:sp>
+        <p:nvSpPr>
+          <p:cNvPr id="5" name="Rectangle 4"/>
+          <p:cNvSpPr/>
+          <p:nvPr/>
+        </p:nvSpPr>
+        <p:spPr>
+          <a:xfrm>
+            <a:off x="457200" y="1417320"/>
+            <a:ext cx="292608" cy="292608"/>
+          </a:xfrm>
+          <a:prstGeom prst="rect">
+            <a:avLst/>
+          </a:prstGeom>
+          <a:solidFill>
+            <a:srgbClr val="1E2761"/>
+          </a:solidFill>
+          <a:ln>
+            <a:noFill/>
+          </a:ln>
+        </p:spPr>
+        <p:style>
+          <a:lnRef idx="1">
+            <a:schemeClr val="accent1"/>
+          </a:lnRef>
+          <a:fillRef idx="3">
+            <a:schemeClr val="accent1"/>
+          </a:fillRef>
+          <a:effectRef idx="2">
+            <a:schemeClr val="accent1"/>
+          </a:effectRef>
+          <a:fontRef idx="minor">
+            <a:schemeClr val="lt1"/>
+          </a:fontRef>
+        </p:style>
+        <p:txBody>
+          <a:bodyPr rtlCol="0" anchor="ctr"/>
+          <a:lstStyle/>
+          <a:p/>
+        </p:txBody>
+      </p:sp>
+      <p:sp>
+        <p:nvSpPr>
+          <p:cNvPr id="6" name="TextBox 5"/>
+          <p:cNvSpPr txBox="1"/>
+          <p:nvPr/>
+        </p:nvSpPr>
+        <p:spPr>
+          <a:xfrm>
+            <a:off x="868680" y="1389888"/>
+            <a:ext cx="4617720" cy="347472"/>
+          </a:xfrm>
+          <a:prstGeom prst="rect">
+            <a:avLst/>
+          </a:prstGeom>
+          <a:noFill/>
+        </p:spPr>
+        <p:txBody>
+          <a:bodyPr wrap="square" lIns="0" rIns="0" tIns="0" bIns="0">
+            <a:spAutoFit/>
+          </a:bodyPr>
+          <a:lstStyle/>
+          <a:p>
+            <a:pPr>
+              <a:spcAft>
+                <a:spcPts val="200"/>
+              </a:spcAft>
+            </a:pPr>
+            <a:r>
+              <a:rPr sz="1500" b="1">
+                <a:solidFill>
+                  <a:srgbClr val="1E2761"/>
+                </a:solidFill>
+                <a:latin typeface="Calibri"/>
+              </a:rPr>
+              <a:t>AGENTS</a:t>
+            </a:r>
+          </a:p>
+        </p:txBody>
+      </p:sp>
+      <p:sp>
+        <p:nvSpPr>
+          <p:cNvPr id="7" name="TextBox 6"/>
+          <p:cNvSpPr txBox="1"/>
+          <p:nvPr/>
+        </p:nvSpPr>
+        <p:spPr>
+          <a:xfrm>
+            <a:off x="868680" y="1828800"/>
+            <a:ext cx="4617720" cy="566928"/>
+          </a:xfrm>
+          <a:prstGeom prst="rect">
+            <a:avLst/>
+          </a:prstGeom>
+          <a:noFill/>
+        </p:spPr>
+        <p:txBody>
+          <a:bodyPr wrap="square" lIns="0" rIns="0" tIns="0" bIns="0">
+            <a:spAutoFit/>
+          </a:bodyPr>
+          <a:lstStyle/>
+          <a:p>
+            <a:pPr>
+              <a:spcAft>
+                <a:spcPts val="200"/>
+              </a:spcAft>
+            </a:pPr>
+            <a:r>
+              <a:rPr sz="1300" b="1">
+                <a:solidFill>
+                  <a:srgbClr val="1E2761"/>
+                </a:solidFill>
+                <a:latin typeface="Calibri"/>
+              </a:rPr>
+              <a:t>Buyers: </a:t>
+            </a:r>
+            <a:r>
+              <a:rPr sz="1300" b="0">
+                <a:solidFill>
+                  <a:srgbClr val="5B5F6E"/>
+                </a:solidFill>
+                <a:latin typeface="Calibri"/>
+              </a:rPr>
+              <a:t>100 — Poor 70 / Middle 20 / Rich 10; attendance 0.85 / 0.84 / 0.82</a:t>
+            </a:r>
+          </a:p>
+          <a:p>
+            <a:pPr>
+              <a:spcAft>
+                <a:spcPts val="200"/>
+              </a:spcAft>
+            </a:pPr>
+            <a:r>
+              <a:rPr sz="1300" b="1">
+                <a:solidFill>
+                  <a:srgbClr val="1E2761"/>
+                </a:solidFill>
+                <a:latin typeface="Calibri"/>
+              </a:rPr>
+              <a:t>Sellers: </a:t>
+            </a:r>
+            <a:r>
+              <a:rPr sz="1300" b="0">
+                <a:solidFill>
+                  <a:srgbClr val="5B5F6E"/>
+                </a:solidFill>
+                <a:latin typeface="Calibri"/>
+              </a:rPr>
+              <a:t>5 — Slow ×3 / Shigh ×2, positions and promotion from Phases 3–4</a:t>
+            </a:r>
+          </a:p>
+        </p:txBody>
+      </p:sp>
+      <p:sp>
+        <p:nvSpPr>
+          <p:cNvPr id="8" name="Rectangle 7"/>
+          <p:cNvSpPr/>
+          <p:nvPr/>
+        </p:nvSpPr>
+        <p:spPr>
+          <a:xfrm>
+            <a:off x="457200" y="2651760"/>
+            <a:ext cx="292608" cy="292608"/>
+          </a:xfrm>
+          <a:prstGeom prst="rect">
+            <a:avLst/>
+          </a:prstGeom>
+          <a:solidFill>
+            <a:srgbClr val="1E2761"/>
+          </a:solidFill>
+          <a:ln>
+            <a:noFill/>
+          </a:ln>
+        </p:spPr>
+        <p:style>
+          <a:lnRef idx="1">
+            <a:schemeClr val="accent1"/>
+          </a:lnRef>
+          <a:fillRef idx="3">
+            <a:schemeClr val="accent1"/>
+          </a:fillRef>
+          <a:effectRef idx="2">
+            <a:schemeClr val="accent1"/>
+          </a:effectRef>
+          <a:fontRef idx="minor">
+            <a:schemeClr val="lt1"/>
+          </a:fontRef>
+        </p:style>
+        <p:txBody>
+          <a:bodyPr rtlCol="0" anchor="ctr"/>
+          <a:lstStyle/>
+          <a:p/>
+        </p:txBody>
+      </p:sp>
+      <p:sp>
+        <p:nvSpPr>
+          <p:cNvPr id="9" name="TextBox 8"/>
+          <p:cNvSpPr txBox="1"/>
+          <p:nvPr/>
+        </p:nvSpPr>
+        <p:spPr>
+          <a:xfrm>
+            <a:off x="868680" y="2624328"/>
+            <a:ext cx="4617720" cy="347472"/>
+          </a:xfrm>
+          <a:prstGeom prst="rect">
+            <a:avLst/>
+          </a:prstGeom>
+          <a:noFill/>
+        </p:spPr>
+        <p:txBody>
+          <a:bodyPr wrap="square" lIns="0" rIns="0" tIns="0" bIns="0">
+            <a:spAutoFit/>
+          </a:bodyPr>
+          <a:lstStyle/>
+          <a:p>
+            <a:pPr>
+              <a:spcAft>
+                <a:spcPts val="200"/>
+              </a:spcAft>
+            </a:pPr>
+            <a:r>
+              <a:rPr sz="1500" b="1">
+                <a:solidFill>
+                  <a:srgbClr val="1E2761"/>
+                </a:solidFill>
+                <a:latin typeface="Calibri"/>
+              </a:rPr>
+              <a:t>ENVIRONMENT &amp; CONTEXT</a:t>
+            </a:r>
+          </a:p>
+        </p:txBody>
+      </p:sp>
+      <p:sp>
+        <p:nvSpPr>
+          <p:cNvPr id="10" name="TextBox 9"/>
+          <p:cNvSpPr txBox="1"/>
+          <p:nvPr/>
+        </p:nvSpPr>
+        <p:spPr>
+          <a:xfrm>
+            <a:off x="868680" y="3063240"/>
+            <a:ext cx="4617720" cy="548640"/>
+          </a:xfrm>
+          <a:prstGeom prst="rect">
+            <a:avLst/>
+          </a:prstGeom>
+          <a:noFill/>
+        </p:spPr>
+        <p:txBody>
+          <a:bodyPr wrap="square" lIns="0" rIns="0" tIns="0" bIns="0">
+            <a:spAutoFit/>
+          </a:bodyPr>
+          <a:lstStyle/>
+          <a:p>
+            <a:pPr>
+              <a:spcAft>
+                <a:spcPts val="200"/>
+              </a:spcAft>
+            </a:pPr>
+            <a:r>
+              <a:rPr sz="1300" b="0">
+                <a:solidFill>
+                  <a:srgbClr val="5B5F6E"/>
+                </a:solidFill>
+                <a:latin typeface="Calibri"/>
+              </a:rPr>
+              <a:t>-  Time axis: 22 weeks, one season. Budget and inventory reset weekly.</a:t>
+            </a:r>
+          </a:p>
+          <a:p>
+            <a:pPr>
+              <a:spcAft>
+                <a:spcPts val="200"/>
+              </a:spcAft>
+            </a:pPr>
+            <a:r>
+              <a:rPr sz="1300" b="0">
+                <a:solidFill>
+                  <a:srgbClr val="5B5F6E"/>
+                </a:solidFill>
+                <a:latin typeface="Calibri"/>
+              </a:rPr>
+              <a:t>-  Memory persists across weeks, including weeks a buyer sits out.</a:t>
+            </a:r>
+          </a:p>
+        </p:txBody>
+      </p:sp>
+      <p:sp>
+        <p:nvSpPr>
+          <p:cNvPr id="11" name="Rectangle 10"/>
+          <p:cNvSpPr/>
+          <p:nvPr/>
+        </p:nvSpPr>
+        <p:spPr>
+          <a:xfrm>
+            <a:off x="457200" y="3886200"/>
+            <a:ext cx="292608" cy="292608"/>
+          </a:xfrm>
+          <a:prstGeom prst="rect">
+            <a:avLst/>
+          </a:prstGeom>
+          <a:solidFill>
+            <a:srgbClr val="1E2761"/>
+          </a:solidFill>
+          <a:ln>
+            <a:noFill/>
+          </a:ln>
+        </p:spPr>
+        <p:style>
+          <a:lnRef idx="1">
+            <a:schemeClr val="accent1"/>
+          </a:lnRef>
+          <a:fillRef idx="3">
+            <a:schemeClr val="accent1"/>
+          </a:fillRef>
+          <a:effectRef idx="2">
+            <a:schemeClr val="accent1"/>
+          </a:effectRef>
+          <a:fontRef idx="minor">
+            <a:schemeClr val="lt1"/>
+          </a:fontRef>
+        </p:style>
+        <p:txBody>
+          <a:bodyPr rtlCol="0" anchor="ctr"/>
+          <a:lstStyle/>
+          <a:p/>
+        </p:txBody>
+      </p:sp>
+      <p:sp>
+        <p:nvSpPr>
+          <p:cNvPr id="12" name="TextBox 11"/>
+          <p:cNvSpPr txBox="1"/>
+          <p:nvPr/>
+        </p:nvSpPr>
+        <p:spPr>
+          <a:xfrm>
+            <a:off x="868680" y="3858768"/>
+            <a:ext cx="4617720" cy="347472"/>
+          </a:xfrm>
+          <a:prstGeom prst="rect">
+            <a:avLst/>
+          </a:prstGeom>
+          <a:noFill/>
+        </p:spPr>
+        <p:txBody>
+          <a:bodyPr wrap="square" lIns="0" rIns="0" tIns="0" bIns="0">
+            <a:spAutoFit/>
+          </a:bodyPr>
+          <a:lstStyle/>
+          <a:p>
+            <a:pPr>
+              <a:spcAft>
+                <a:spcPts val="200"/>
+              </a:spcAft>
+            </a:pPr>
+            <a:r>
+              <a:rPr sz="1500" b="1">
+                <a:solidFill>
+                  <a:srgbClr val="1E2761"/>
+                </a:solidFill>
+                <a:latin typeface="Calibri"/>
+              </a:rPr>
+              <a:t>METHOD</a:t>
+            </a:r>
+          </a:p>
+        </p:txBody>
+      </p:sp>
+      <p:sp>
+        <p:nvSpPr>
+          <p:cNvPr id="13" name="TextBox 12"/>
+          <p:cNvSpPr txBox="1"/>
+          <p:nvPr/>
+        </p:nvSpPr>
+        <p:spPr>
+          <a:xfrm>
+            <a:off x="868680" y="4297680"/>
+            <a:ext cx="4617720" cy="594360"/>
+          </a:xfrm>
+          <a:prstGeom prst="rect">
+            <a:avLst/>
+          </a:prstGeom>
+          <a:noFill/>
+        </p:spPr>
+        <p:txBody>
+          <a:bodyPr wrap="square" lIns="0" rIns="0" tIns="0" bIns="0">
+            <a:spAutoFit/>
+          </a:bodyPr>
+          <a:lstStyle/>
+          <a:p>
+            <a:pPr>
+              <a:spcAft>
+                <a:spcPts val="200"/>
+              </a:spcAft>
+            </a:pPr>
+            <a:r>
+              <a:rPr sz="1300" b="0">
+                <a:solidFill>
+                  <a:srgbClr val="5B5F6E"/>
+                </a:solidFill>
+                <a:latin typeface="Calibri"/>
+              </a:rPr>
+              <a:t>Loyalty bonus 0.5 × min(streak, 3), max 1.5 = preference_coef.</a:t>
+            </a:r>
+          </a:p>
+          <a:p>
+            <a:pPr>
+              <a:spcAft>
+                <a:spcPts val="200"/>
+              </a:spcAft>
+            </a:pPr>
+            <a:r>
+              <a:rPr sz="1300" b="0">
+                <a:solidFill>
+                  <a:srgbClr val="5B5F6E"/>
+                </a:solidFill>
+                <a:latin typeface="Calibri"/>
+              </a:rPr>
+              <a:t>Linear single-week model, per Phase 5's rollback. Graded vs a no-loyalty control.</a:t>
+            </a:r>
+          </a:p>
+        </p:txBody>
+      </p:sp>
+      <p:sp>
+        <p:nvSpPr>
+          <p:cNvPr id="14" name="Rectangle 13"/>
+          <p:cNvSpPr/>
+          <p:nvPr/>
+        </p:nvSpPr>
+        <p:spPr>
+          <a:xfrm>
+            <a:off x="457200" y="5029200"/>
+            <a:ext cx="292608" cy="292608"/>
+          </a:xfrm>
+          <a:prstGeom prst="rect">
+            <a:avLst/>
+          </a:prstGeom>
+          <a:solidFill>
+            <a:srgbClr val="1E2761"/>
+          </a:solidFill>
+          <a:ln>
+            <a:noFill/>
+          </a:ln>
+        </p:spPr>
+        <p:style>
+          <a:lnRef idx="1">
+            <a:schemeClr val="accent1"/>
+          </a:lnRef>
+          <a:fillRef idx="3">
+            <a:schemeClr val="accent1"/>
+          </a:fillRef>
+          <a:effectRef idx="2">
+            <a:schemeClr val="accent1"/>
+          </a:effectRef>
+          <a:fontRef idx="minor">
+            <a:schemeClr val="lt1"/>
+          </a:fontRef>
+        </p:style>
+        <p:txBody>
+          <a:bodyPr rtlCol="0" anchor="ctr"/>
+          <a:lstStyle/>
+          <a:p/>
+        </p:txBody>
+      </p:sp>
+      <p:sp>
+        <p:nvSpPr>
+          <p:cNvPr id="15" name="TextBox 14"/>
+          <p:cNvSpPr txBox="1"/>
+          <p:nvPr/>
+        </p:nvSpPr>
+        <p:spPr>
+          <a:xfrm>
+            <a:off x="868680" y="5001768"/>
+            <a:ext cx="4617720" cy="347472"/>
+          </a:xfrm>
+          <a:prstGeom prst="rect">
+            <a:avLst/>
+          </a:prstGeom>
+          <a:noFill/>
+        </p:spPr>
+        <p:txBody>
+          <a:bodyPr wrap="square" lIns="0" rIns="0" tIns="0" bIns="0">
+            <a:spAutoFit/>
+          </a:bodyPr>
+          <a:lstStyle/>
+          <a:p>
+            <a:pPr>
+              <a:spcAft>
+                <a:spcPts val="200"/>
+              </a:spcAft>
+            </a:pPr>
+            <a:r>
+              <a:rPr sz="1500" b="1">
+                <a:solidFill>
+                  <a:srgbClr val="1E2761"/>
+                </a:solidFill>
+                <a:latin typeface="Calibri"/>
+              </a:rPr>
+              <a:t>LITERATURE BASIS</a:t>
+            </a:r>
+          </a:p>
+        </p:txBody>
+      </p:sp>
+      <p:sp>
+        <p:nvSpPr>
+          <p:cNvPr id="16" name="TextBox 15"/>
+          <p:cNvSpPr txBox="1"/>
+          <p:nvPr/>
+        </p:nvSpPr>
+        <p:spPr>
+          <a:xfrm>
+            <a:off x="868680" y="5440680"/>
+            <a:ext cx="4617720" cy="1005840"/>
+          </a:xfrm>
+          <a:prstGeom prst="rect">
+            <a:avLst/>
+          </a:prstGeom>
+          <a:noFill/>
+        </p:spPr>
+        <p:txBody>
+          <a:bodyPr wrap="square" lIns="0" rIns="0" tIns="0" bIns="0">
+            <a:spAutoFit/>
+          </a:bodyPr>
+          <a:lstStyle/>
+          <a:p>
+            <a:pPr>
+              <a:spcAft>
+                <a:spcPts val="600"/>
+              </a:spcAft>
+            </a:pPr>
+            <a:r>
+              <a:rPr sz="1100" b="1">
+                <a:solidFill>
+                  <a:srgbClr val="1E2761"/>
+                </a:solidFill>
+                <a:latin typeface="Calibri"/>
+              </a:rPr>
+              <a:t>Massy, Montgomery &amp; Morrison (1970), </a:t>
+            </a:r>
+            <a:r>
+              <a:rPr sz="1100" b="0">
+                <a:solidFill>
+                  <a:srgbClr val="5B5F6E"/>
+                </a:solidFill>
+                <a:latin typeface="Calibri"/>
+              </a:rPr>
+              <a:t>“Stochastic Models of Buying Behavior” (MIT Press) — loyalty and switching dynamics in repeated purchasing.</a:t>
+            </a:r>
+          </a:p>
+        </p:txBody>
+      </p:sp>
+      <p:sp>
+        <p:nvSpPr>
+          <p:cNvPr id="17" name="Rectangle 16"/>
+          <p:cNvSpPr/>
+          <p:nvPr/>
+        </p:nvSpPr>
+        <p:spPr>
+          <a:xfrm>
+            <a:off x="5943600" y="1417320"/>
+            <a:ext cx="292608" cy="292608"/>
+          </a:xfrm>
+          <a:prstGeom prst="rect">
+            <a:avLst/>
+          </a:prstGeom>
+          <a:solidFill>
+            <a:srgbClr val="1E2761"/>
+          </a:solidFill>
+          <a:ln>
+            <a:noFill/>
+          </a:ln>
+        </p:spPr>
+        <p:style>
+          <a:lnRef idx="1">
+            <a:schemeClr val="accent1"/>
+          </a:lnRef>
+          <a:fillRef idx="3">
+            <a:schemeClr val="accent1"/>
+          </a:fillRef>
+          <a:effectRef idx="2">
+            <a:schemeClr val="accent1"/>
+          </a:effectRef>
+          <a:fontRef idx="minor">
+            <a:schemeClr val="lt1"/>
+          </a:fontRef>
+        </p:style>
+        <p:txBody>
+          <a:bodyPr rtlCol="0" anchor="ctr"/>
+          <a:lstStyle/>
+          <a:p/>
+        </p:txBody>
+      </p:sp>
+      <p:sp>
+        <p:nvSpPr>
+          <p:cNvPr id="18" name="TextBox 17"/>
+          <p:cNvSpPr txBox="1"/>
+          <p:nvPr/>
+        </p:nvSpPr>
+        <p:spPr>
+          <a:xfrm>
+            <a:off x="6355080" y="1389888"/>
+            <a:ext cx="5349240" cy="347472"/>
+          </a:xfrm>
+          <a:prstGeom prst="rect">
+            <a:avLst/>
+          </a:prstGeom>
+          <a:noFill/>
+        </p:spPr>
+        <p:txBody>
+          <a:bodyPr wrap="square" lIns="0" rIns="0" tIns="0" bIns="0">
+            <a:spAutoFit/>
+          </a:bodyPr>
+          <a:lstStyle/>
+          <a:p>
+            <a:pPr>
+              <a:spcAft>
+                <a:spcPts val="200"/>
+              </a:spcAft>
+            </a:pPr>
+            <a:r>
+              <a:rPr sz="1500" b="1">
+                <a:solidFill>
+                  <a:srgbClr val="1E2761"/>
+                </a:solidFill>
+                <a:latin typeface="Calibri"/>
+              </a:rPr>
+              <a:t>KEY RESULTS</a:t>
+            </a:r>
+          </a:p>
+        </p:txBody>
+      </p:sp>
+      <p:graphicFrame>
+        <p:nvGraphicFramePr>
+          <p:cNvPr id="19" name="Table 18"/>
+          <p:cNvGraphicFramePr>
+            <a:graphicFrameLocks noGrp="1"/>
+          </p:cNvGraphicFramePr>
+          <p:nvPr/>
+        </p:nvGraphicFramePr>
+        <p:xfrm>
+          <a:off x="5943600" y="1874519"/>
+          <a:ext cx="5760720" cy="1920240"/>
+        </p:xfrm>
+        <a:graphic>
+          <a:graphicData uri="http://schemas.openxmlformats.org/drawingml/2006/table">
+            <a:tbl>
+              <a:tblPr firstRow="1" bandRow="1">
+                <a:tableStyleId>{5C22544A-7EE6-4342-B048-85BDC9FD1C3A}</a:tableStyleId>
+              </a:tblPr>
+              <a:tblGrid>
+                <a:gridCol w="3200400"/>
+                <a:gridCol w="1463040"/>
+                <a:gridCol w="1097280"/>
+              </a:tblGrid>
+              <a:tr h="274320">
+                <a:tc>
+                  <a:txBody>
+                    <a:bodyPr/>
+                    <a:lstStyle/>
+                    <a:p>
+                      <a:r>
+                        <a:rPr sz="1100" b="1">
+                          <a:solidFill>
+                            <a:srgbClr val="FFFFFF"/>
+                          </a:solidFill>
+                          <a:latin typeface="Calibri"/>
+                        </a:rPr>
+                        <a:t>Metric</a:t>
+                      </a:r>
+                    </a:p>
+                  </a:txBody>
+                  <a:tcPr>
+                    <a:solidFill>
+                      <a:srgbClr val="1E2761"/>
+                    </a:solidFill>
+                  </a:tcPr>
+                </a:tc>
+                <a:tc>
+                  <a:txBody>
+                    <a:bodyPr/>
+                    <a:lstStyle/>
+                    <a:p>
+                      <a:r>
+                        <a:rPr sz="1100" b="1">
+                          <a:solidFill>
+                            <a:srgbClr val="FFFFFF"/>
+                          </a:solidFill>
+                          <a:latin typeface="Calibri"/>
+                        </a:rPr>
+                        <a:t>Value</a:t>
+                      </a:r>
+                    </a:p>
+                  </a:txBody>
+                  <a:tcPr>
+                    <a:solidFill>
+                      <a:srgbClr val="1E2761"/>
+                    </a:solidFill>
+                  </a:tcPr>
+                </a:tc>
+                <a:tc>
+                  <a:txBody>
+                    <a:bodyPr/>
+                    <a:lstStyle/>
+                    <a:p>
+                      <a:r>
+                        <a:rPr sz="1100" b="1">
+                          <a:solidFill>
+                            <a:srgbClr val="FFFFFF"/>
+                          </a:solidFill>
+                          <a:latin typeface="Calibri"/>
+                        </a:rPr>
+                        <a:t/>
+                      </a:r>
+                    </a:p>
+                  </a:txBody>
+                  <a:tcPr>
+                    <a:solidFill>
+                      <a:srgbClr val="1E2761"/>
+                    </a:solidFill>
+                  </a:tcPr>
+                </a:tc>
+              </a:tr>
+              <a:tr h="274320">
+                <a:tc>
+                  <a:txBody>
+                    <a:bodyPr/>
+                    <a:lstStyle/>
+                    <a:p>
+                      <a:r>
+                        <a:rPr sz="1100">
+                          <a:solidFill>
+                            <a:srgbClr val="1E2761"/>
+                          </a:solidFill>
+                          <a:latin typeface="Calibri"/>
+                        </a:rPr>
+                        <a:t>purchase_rate (0.6–1.0)</a:t>
+                      </a:r>
+                    </a:p>
+                  </a:txBody>
+                  <a:tcPr>
+                    <a:solidFill>
+                      <a:srgbClr val="FFFFFF"/>
+                    </a:solidFill>
+                  </a:tcPr>
+                </a:tc>
+                <a:tc>
+                  <a:txBody>
+                    <a:bodyPr/>
+                    <a:lstStyle/>
+                    <a:p>
+                      <a:r>
+                        <a:rPr sz="1100">
+                          <a:solidFill>
+                            <a:srgbClr val="5B5F6E"/>
+                          </a:solidFill>
+                          <a:latin typeface="Calibri"/>
+                        </a:rPr>
+                        <a:t>0.693</a:t>
+                      </a:r>
+                    </a:p>
+                  </a:txBody>
+                  <a:tcPr>
+                    <a:solidFill>
+                      <a:srgbClr val="FFFFFF"/>
+                    </a:solidFill>
+                  </a:tcPr>
+                </a:tc>
+                <a:tc>
+                  <a:txBody>
+                    <a:bodyPr/>
+                    <a:lstStyle/>
+                    <a:p>
+                      <a:pPr algn="ctr"/>
+                      <a:r>
+                        <a:rPr sz="1100" b="1">
+                          <a:solidFill>
+                            <a:srgbClr val="1E7A4D"/>
+                          </a:solidFill>
+                          <a:latin typeface="Calibri"/>
+                        </a:rPr>
+                        <a:t>PASS</a:t>
+                      </a:r>
+                    </a:p>
+                  </a:txBody>
+                  <a:tcPr>
+                    <a:solidFill>
+                      <a:srgbClr val="FFFFFF"/>
+                    </a:solidFill>
+                  </a:tcPr>
+                </a:tc>
+              </a:tr>
+              <a:tr h="274320">
+                <a:tc>
+                  <a:txBody>
+                    <a:bodyPr/>
+                    <a:lstStyle/>
+                    <a:p>
+                      <a:r>
+                        <a:rPr sz="1100">
+                          <a:solidFill>
+                            <a:srgbClr val="1E2761"/>
+                          </a:solidFill>
+                          <a:latin typeface="Calibri"/>
+                        </a:rPr>
+                        <a:t>  attendance_rate (reported)</a:t>
+                      </a:r>
+                    </a:p>
+                  </a:txBody>
+                  <a:tcPr>
+                    <a:solidFill>
+                      <a:srgbClr val="F7F8FC"/>
+                    </a:solidFill>
+                  </a:tcPr>
+                </a:tc>
+                <a:tc>
+                  <a:txBody>
+                    <a:bodyPr/>
+                    <a:lstStyle/>
+                    <a:p>
+                      <a:r>
+                        <a:rPr sz="1100">
+                          <a:solidFill>
+                            <a:srgbClr val="5B5F6E"/>
+                          </a:solidFill>
+                          <a:latin typeface="Calibri"/>
+                        </a:rPr>
+                        <a:t>0.845</a:t>
+                      </a:r>
+                    </a:p>
+                  </a:txBody>
+                  <a:tcPr>
+                    <a:solidFill>
+                      <a:srgbClr val="F7F8FC"/>
+                    </a:solidFill>
+                  </a:tcPr>
+                </a:tc>
+                <a:tc>
+                  <a:txBody>
+                    <a:bodyPr/>
+                    <a:lstStyle/>
+                    <a:p>
+                      <a:pPr algn="ctr"/>
+                      <a:r>
+                        <a:rPr sz="1100" b="1">
+                          <a:solidFill>
+                            <a:srgbClr val="5B5F6E"/>
+                          </a:solidFill>
+                          <a:latin typeface="Calibri"/>
+                        </a:rPr>
+                        <a:t>—</a:t>
+                      </a:r>
+                    </a:p>
+                  </a:txBody>
+                  <a:tcPr>
+                    <a:solidFill>
+                      <a:srgbClr val="F7F8FC"/>
+                    </a:solidFill>
+                  </a:tcPr>
+                </a:tc>
+              </a:tr>
+              <a:tr h="274320">
+                <a:tc>
+                  <a:txBody>
+                    <a:bodyPr/>
+                    <a:lstStyle/>
+                    <a:p>
+                      <a:r>
+                        <a:rPr sz="1100">
+                          <a:solidFill>
+                            <a:srgbClr val="1E2761"/>
+                          </a:solidFill>
+                          <a:latin typeface="Calibri"/>
+                        </a:rPr>
+                        <a:t>Stability vs no-loyalty control</a:t>
+                      </a:r>
+                    </a:p>
+                  </a:txBody>
+                  <a:tcPr>
+                    <a:solidFill>
+                      <a:srgbClr val="FFFFFF"/>
+                    </a:solidFill>
+                  </a:tcPr>
+                </a:tc>
+                <a:tc>
+                  <a:txBody>
+                    <a:bodyPr/>
+                    <a:lstStyle/>
+                    <a:p>
+                      <a:r>
+                        <a:rPr sz="1100">
+                          <a:solidFill>
+                            <a:srgbClr val="5B5F6E"/>
+                          </a:solidFill>
+                          <a:latin typeface="Calibri"/>
+                        </a:rPr>
+                        <a:t>+0.109</a:t>
+                      </a:r>
+                    </a:p>
+                  </a:txBody>
+                  <a:tcPr>
+                    <a:solidFill>
+                      <a:srgbClr val="FFFFFF"/>
+                    </a:solidFill>
+                  </a:tcPr>
+                </a:tc>
+                <a:tc>
+                  <a:txBody>
+                    <a:bodyPr/>
+                    <a:lstStyle/>
+                    <a:p>
+                      <a:pPr algn="ctr"/>
+                      <a:r>
+                        <a:rPr sz="1100" b="1">
+                          <a:solidFill>
+                            <a:srgbClr val="1E7A4D"/>
+                          </a:solidFill>
+                          <a:latin typeface="Calibri"/>
+                        </a:rPr>
+                        <a:t>PASS</a:t>
+                      </a:r>
+                    </a:p>
+                  </a:txBody>
+                  <a:tcPr>
+                    <a:solidFill>
+                      <a:srgbClr val="FFFFFF"/>
+                    </a:solidFill>
+                  </a:tcPr>
+                </a:tc>
+              </a:tr>
+              <a:tr h="274320">
+                <a:tc>
+                  <a:txBody>
+                    <a:bodyPr/>
+                    <a:lstStyle/>
+                    <a:p>
+                      <a:r>
+                        <a:rPr sz="1100">
+                          <a:solidFill>
+                            <a:srgbClr val="1E2761"/>
+                          </a:solidFill>
+                          <a:latin typeface="Calibri"/>
+                        </a:rPr>
+                        <a:t>  its 95% CI</a:t>
+                      </a:r>
+                    </a:p>
+                  </a:txBody>
+                  <a:tcPr>
+                    <a:solidFill>
+                      <a:srgbClr val="F7F8FC"/>
+                    </a:solidFill>
+                  </a:tcPr>
+                </a:tc>
+                <a:tc>
+                  <a:txBody>
+                    <a:bodyPr/>
+                    <a:lstStyle/>
+                    <a:p>
+                      <a:r>
+                        <a:rPr sz="1100">
+                          <a:solidFill>
+                            <a:srgbClr val="5B5F6E"/>
+                          </a:solidFill>
+                          <a:latin typeface="Calibri"/>
+                        </a:rPr>
+                        <a:t>[+0.105, +0.112]</a:t>
+                      </a:r>
+                    </a:p>
+                  </a:txBody>
+                  <a:tcPr>
+                    <a:solidFill>
+                      <a:srgbClr val="F7F8FC"/>
+                    </a:solidFill>
+                  </a:tcPr>
+                </a:tc>
+                <a:tc>
+                  <a:txBody>
+                    <a:bodyPr/>
+                    <a:lstStyle/>
+                    <a:p>
+                      <a:pPr algn="ctr"/>
+                      <a:r>
+                        <a:rPr sz="1100" b="1">
+                          <a:solidFill>
+                            <a:srgbClr val="1E7A4D"/>
+                          </a:solidFill>
+                          <a:latin typeface="Calibri"/>
+                        </a:rPr>
+                        <a:t>PASS</a:t>
+                      </a:r>
+                    </a:p>
+                  </a:txBody>
+                  <a:tcPr>
+                    <a:solidFill>
+                      <a:srgbClr val="F7F8FC"/>
+                    </a:solidFill>
+                  </a:tcPr>
+                </a:tc>
+              </a:tr>
+              <a:tr h="274320">
+                <a:tc>
+                  <a:txBody>
+                    <a:bodyPr/>
+                    <a:lstStyle/>
+                    <a:p>
+                      <a:r>
+                        <a:rPr sz="1100">
+                          <a:solidFill>
+                            <a:srgbClr val="1E2761"/>
+                          </a:solidFill>
+                          <a:latin typeface="Calibri"/>
+                        </a:rPr>
+                        <a:t>Rise, week 1 → weeks 17–21</a:t>
+                      </a:r>
+                    </a:p>
+                  </a:txBody>
+                  <a:tcPr>
+                    <a:solidFill>
+                      <a:srgbClr val="FFFFFF"/>
+                    </a:solidFill>
+                  </a:tcPr>
+                </a:tc>
+                <a:tc>
+                  <a:txBody>
+                    <a:bodyPr/>
+                    <a:lstStyle/>
+                    <a:p>
+                      <a:r>
+                        <a:rPr sz="1100">
+                          <a:solidFill>
+                            <a:srgbClr val="5B5F6E"/>
+                          </a:solidFill>
+                          <a:latin typeface="Calibri"/>
+                        </a:rPr>
+                        <a:t>+0.037</a:t>
+                      </a:r>
+                    </a:p>
+                  </a:txBody>
+                  <a:tcPr>
+                    <a:solidFill>
+                      <a:srgbClr val="FFFFFF"/>
+                    </a:solidFill>
+                  </a:tcPr>
+                </a:tc>
+                <a:tc>
+                  <a:txBody>
+                    <a:bodyPr/>
+                    <a:lstStyle/>
+                    <a:p>
+                      <a:pPr algn="ctr"/>
+                      <a:r>
+                        <a:rPr sz="1100" b="1">
+                          <a:solidFill>
+                            <a:srgbClr val="1E7A4D"/>
+                          </a:solidFill>
+                          <a:latin typeface="Calibri"/>
+                        </a:rPr>
+                        <a:t>PASS</a:t>
+                      </a:r>
+                    </a:p>
+                  </a:txBody>
+                  <a:tcPr>
+                    <a:solidFill>
+                      <a:srgbClr val="FFFFFF"/>
+                    </a:solidFill>
+                  </a:tcPr>
+                </a:tc>
+              </a:tr>
+              <a:tr h="274320">
+                <a:tc>
+                  <a:txBody>
+                    <a:bodyPr/>
+                    <a:lstStyle/>
+                    <a:p>
+                      <a:r>
+                        <a:rPr sz="1100">
+                          <a:solidFill>
+                            <a:srgbClr val="1E2761"/>
+                          </a:solidFill>
+                          <a:latin typeface="Calibri"/>
+                        </a:rPr>
+                        <a:t>Plateau week</a:t>
+                      </a:r>
+                    </a:p>
+                  </a:txBody>
+                  <a:tcPr>
+                    <a:solidFill>
+                      <a:srgbClr val="F7F8FC"/>
+                    </a:solidFill>
+                  </a:tcPr>
+                </a:tc>
+                <a:tc>
+                  <a:txBody>
+                    <a:bodyPr/>
+                    <a:lstStyle/>
+                    <a:p>
+                      <a:r>
+                        <a:rPr sz="1100">
+                          <a:solidFill>
+                            <a:srgbClr val="5B5F6E"/>
+                          </a:solidFill>
+                          <a:latin typeface="Calibri"/>
+                        </a:rPr>
+                        <a:t>week 14</a:t>
+                      </a:r>
+                    </a:p>
+                  </a:txBody>
+                  <a:tcPr>
+                    <a:solidFill>
+                      <a:srgbClr val="F7F8FC"/>
+                    </a:solidFill>
+                  </a:tcPr>
+                </a:tc>
+                <a:tc>
+                  <a:txBody>
+                    <a:bodyPr/>
+                    <a:lstStyle/>
+                    <a:p>
+                      <a:pPr algn="ctr"/>
+                      <a:r>
+                        <a:rPr sz="1100" b="1">
+                          <a:solidFill>
+                            <a:srgbClr val="5B5F6E"/>
+                          </a:solidFill>
+                          <a:latin typeface="Calibri"/>
+                        </a:rPr>
+                        <a:t>—</a:t>
+                      </a:r>
+                    </a:p>
+                  </a:txBody>
+                  <a:tcPr>
+                    <a:solidFill>
+                      <a:srgbClr val="F7F8FC"/>
+                    </a:solidFill>
+                  </a:tcPr>
+                </a:tc>
+              </a:tr>
+            </a:tbl>
+          </a:graphicData>
+        </a:graphic>
+      </p:graphicFrame>
+      <p:sp>
+        <p:nvSpPr>
+          <p:cNvPr id="20" name="Rectangle 19"/>
+          <p:cNvSpPr/>
+          <p:nvPr/>
+        </p:nvSpPr>
+        <p:spPr>
+          <a:xfrm>
+            <a:off x="5943600" y="4023360"/>
+            <a:ext cx="292608" cy="292608"/>
+          </a:xfrm>
+          <a:prstGeom prst="rect">
+            <a:avLst/>
+          </a:prstGeom>
+          <a:solidFill>
+            <a:srgbClr val="1E2761"/>
+          </a:solidFill>
+          <a:ln>
+            <a:noFill/>
+          </a:ln>
+        </p:spPr>
+        <p:style>
+          <a:lnRef idx="1">
+            <a:schemeClr val="accent1"/>
+          </a:lnRef>
+          <a:fillRef idx="3">
+            <a:schemeClr val="accent1"/>
+          </a:fillRef>
+          <a:effectRef idx="2">
+            <a:schemeClr val="accent1"/>
+          </a:effectRef>
+          <a:fontRef idx="minor">
+            <a:schemeClr val="lt1"/>
+          </a:fontRef>
+        </p:style>
+        <p:txBody>
+          <a:bodyPr rtlCol="0" anchor="ctr"/>
+          <a:lstStyle/>
+          <a:p/>
+        </p:txBody>
+      </p:sp>
+      <p:sp>
+        <p:nvSpPr>
+          <p:cNvPr id="21" name="TextBox 20"/>
+          <p:cNvSpPr txBox="1"/>
+          <p:nvPr/>
+        </p:nvSpPr>
+        <p:spPr>
+          <a:xfrm>
+            <a:off x="6355080" y="3995928"/>
+            <a:ext cx="5349240" cy="347472"/>
+          </a:xfrm>
+          <a:prstGeom prst="rect">
+            <a:avLst/>
+          </a:prstGeom>
+          <a:noFill/>
+        </p:spPr>
+        <p:txBody>
+          <a:bodyPr wrap="square" lIns="0" rIns="0" tIns="0" bIns="0">
+            <a:spAutoFit/>
+          </a:bodyPr>
+          <a:lstStyle/>
+          <a:p>
+            <a:pPr>
+              <a:spcAft>
+                <a:spcPts val="200"/>
+              </a:spcAft>
+            </a:pPr>
+            <a:r>
+              <a:rPr sz="1500" b="1">
+                <a:solidFill>
+                  <a:srgbClr val="1E2761"/>
+                </a:solidFill>
+                <a:latin typeface="Calibri"/>
+              </a:rPr>
+              <a:t>RESEARCH QUESTION</a:t>
+            </a:r>
+          </a:p>
+        </p:txBody>
+      </p:sp>
+      <p:sp>
+        <p:nvSpPr>
+          <p:cNvPr id="22" name="Rectangle 21"/>
+          <p:cNvSpPr/>
+          <p:nvPr/>
+        </p:nvSpPr>
+        <p:spPr>
+          <a:xfrm>
+            <a:off x="5943600" y="4434840"/>
+            <a:ext cx="5760720" cy="1965960"/>
+          </a:xfrm>
+          <a:prstGeom prst="rect">
+            <a:avLst/>
+          </a:prstGeom>
+          <a:solidFill>
+            <a:srgbClr val="F7F8FC"/>
+          </a:solidFill>
+          <a:ln>
+            <a:noFill/>
+          </a:ln>
+        </p:spPr>
+        <p:style>
+          <a:lnRef idx="1">
+            <a:schemeClr val="accent1"/>
+          </a:lnRef>
+          <a:fillRef idx="3">
+            <a:schemeClr val="accent1"/>
+          </a:fillRef>
+          <a:effectRef idx="2">
+            <a:schemeClr val="accent1"/>
+          </a:effectRef>
+          <a:fontRef idx="minor">
+            <a:schemeClr val="lt1"/>
+          </a:fontRef>
+        </p:style>
+        <p:txBody>
+          <a:bodyPr rtlCol="0" anchor="ctr"/>
+          <a:lstStyle/>
+          <a:p/>
+        </p:txBody>
+      </p:sp>
+      <p:sp>
+        <p:nvSpPr>
+          <p:cNvPr id="23" name="TextBox 22"/>
+          <p:cNvSpPr txBox="1"/>
+          <p:nvPr/>
+        </p:nvSpPr>
+        <p:spPr>
+          <a:xfrm>
+            <a:off x="6217920" y="4572000"/>
+            <a:ext cx="5212080" cy="1737360"/>
+          </a:xfrm>
+          <a:prstGeom prst="rect">
+            <a:avLst/>
+          </a:prstGeom>
+          <a:noFill/>
+        </p:spPr>
+        <p:txBody>
+          <a:bodyPr wrap="square" lIns="0" rIns="0" tIns="0" bIns="0">
+            <a:spAutoFit/>
+          </a:bodyPr>
+          <a:lstStyle/>
+          <a:p>
+            <a:pPr>
+              <a:spcAft>
+                <a:spcPts val="500"/>
+              </a:spcAft>
+            </a:pPr>
+            <a:r>
+              <a:rPr sz="1000" b="0">
+                <a:solidFill>
+                  <a:srgbClr val="5B5F6E"/>
+                </a:solidFill>
+                <a:latin typeface="Calibri"/>
+              </a:rPr>
+              <a:t>Does buyer memory change future behaviour and produce stable buyer–seller relationships over time?</a:t>
+            </a:r>
+          </a:p>
+          <a:p>
+            <a:pPr>
+              <a:spcAft>
+                <a:spcPts val="500"/>
+              </a:spcAft>
+            </a:pPr>
+            <a:r>
+              <a:rPr sz="1000" b="1">
+                <a:solidFill>
+                  <a:srgbClr val="1E2761"/>
+                </a:solidFill>
+                <a:latin typeface="Calibri"/>
+              </a:rPr>
+              <a:t>Finding: </a:t>
+            </a:r>
+            <a:r>
+              <a:rPr sz="1000" b="0">
+                <a:solidFill>
+                  <a:srgbClr val="5B5F6E"/>
+                </a:solidFill>
+                <a:latin typeface="Calibri"/>
+              </a:rPr>
+              <a:t>Yes. Memory raises pair stability from 0.312 to 0.420 against an identical no-loyalty control on the same seeds — +0.109, CI [+0.105, +0.112].</a:t>
+            </a:r>
+          </a:p>
+          <a:p>
+            <a:pPr>
+              <a:spcAft>
+                <a:spcPts val="500"/>
+              </a:spcAft>
+            </a:pPr>
+            <a:r>
+              <a:rPr sz="1000" b="1">
+                <a:solidFill>
+                  <a:srgbClr val="1E2761"/>
+                </a:solidFill>
+                <a:latin typeface="Calibri"/>
+              </a:rPr>
+              <a:t>Caveat: </a:t>
+            </a:r>
+            <a:r>
+              <a:rPr sz="1000" b="0">
+                <a:solidFill>
+                  <a:srgbClr val="5B5F6E"/>
+                </a:solidFill>
+                <a:latin typeface="Calibri"/>
+              </a:rPr>
+              <a:t>The control's own 0.312 is not memory: unequal seller popularity and season-long fixed preference produce most of it, so the raw level must never be read as a loyalty effect. The within-season rise (+0.037) is weak and window-sensitive — it fails at a weeks 1–2 early window, and its window was narrowed post-hoc after the pre-registered one failed. Lead with the control comparison, not the rise.</a:t>
+            </a:r>
+          </a:p>
+        </p:txBody>
+      </p:sp>
+      <p:sp>
+        <p:nvSpPr>
+          <p:cNvPr id="24" name="TextBox 23"/>
+          <p:cNvSpPr txBox="1"/>
+          <p:nvPr/>
+        </p:nvSpPr>
+        <p:spPr>
+          <a:xfrm>
+            <a:off x="457200" y="6446520"/>
+            <a:ext cx="11247120" cy="274320"/>
+          </a:xfrm>
+          <a:prstGeom prst="rect">
+            <a:avLst/>
+          </a:prstGeom>
+          <a:noFill/>
+        </p:spPr>
+        <p:txBody>
+          <a:bodyPr wrap="square" lIns="0" rIns="0" tIns="0" bIns="0">
+            <a:spAutoFit/>
+          </a:bodyPr>
+          <a:lstStyle/>
+          <a:p>
+            <a:pPr>
+              <a:spcAft>
+                <a:spcPts val="200"/>
+              </a:spcAft>
+            </a:pPr>
+            <a:r>
+              <a:rPr sz="950" b="0">
+                <a:solidFill>
+                  <a:srgbClr val="5B5F6E"/>
+                </a:solidFill>
+                <a:latin typeface="Calibri"/>
+              </a:rPr>
+              <a:t>Generated automatically at phase completion  ·  Phase Completion Deliverable  ·  market-sim project</a:t>
+            </a:r>
+          </a:p>
+        </p:txBody>
+      </p:sp>
+    </p:spTree>
+  </p:cSld>
+  <p:clrMapOvr>
+    <a:masterClrMapping/>
+  </p:clrMapOvr>
+</p:sld>
+</file>
+
 <file path=ppt/theme/theme1.xml><?xml version="1.0" encoding="utf-8"?>
 <a:theme xmlns:a="http://schemas.openxmlformats.org/drawingml/2006/main" name="Office Theme">
   <a:themeElements>

--- a/project_tracking.pptx
+++ b/project_tracking.pptx
@@ -11,6 +11,7 @@
     <p:sldId id="259" r:id="rId10"/>
     <p:sldId id="260" r:id="rId11"/>
     <p:sldId id="261" r:id="rId12"/>
+    <p:sldId id="262" r:id="rId13"/>
   </p:sldIdLst>
   <p:sldSz cx="12191969" cy="6858000" type="screen4x3"/>
   <p:notesSz cx="6858000" cy="9144000"/>
@@ -12079,6 +12080,1543 @@
 </p:sld>
 </file>
 
+<file path=ppt/slides/slide7.xml><?xml version="1.0" encoding="utf-8"?>
+<p:sld xmlns:a="http://schemas.openxmlformats.org/drawingml/2006/main" xmlns:p="http://schemas.openxmlformats.org/presentationml/2006/main" xmlns:r="http://schemas.openxmlformats.org/officeDocument/2006/relationships">
+  <p:cSld>
+    <p:spTree>
+      <p:nvGrpSpPr>
+        <p:cNvPr id="1" name=""/>
+        <p:cNvGrpSpPr/>
+        <p:nvPr/>
+      </p:nvGrpSpPr>
+      <p:grpSpPr/>
+      <p:sp>
+        <p:nvSpPr>
+          <p:cNvPr id="2" name="TextBox 1"/>
+          <p:cNvSpPr txBox="1"/>
+          <p:nvPr/>
+        </p:nvSpPr>
+        <p:spPr>
+          <a:xfrm>
+            <a:off x="457200" y="320040"/>
+            <a:ext cx="8229600" cy="548640"/>
+          </a:xfrm>
+          <a:prstGeom prst="rect">
+            <a:avLst/>
+          </a:prstGeom>
+          <a:noFill/>
+        </p:spPr>
+        <p:txBody>
+          <a:bodyPr wrap="square" lIns="0" rIns="0" tIns="0" bIns="0">
+            <a:spAutoFit/>
+          </a:bodyPr>
+          <a:lstStyle/>
+          <a:p>
+            <a:pPr>
+              <a:spcAft>
+                <a:spcPts val="200"/>
+              </a:spcAft>
+            </a:pPr>
+            <a:r>
+              <a:rPr sz="3200" b="1">
+                <a:solidFill>
+                  <a:srgbClr val="1E2761"/>
+                </a:solidFill>
+                <a:latin typeface="Cambria"/>
+              </a:rPr>
+              <a:t>Phase 7 — Seller Learning — 7a Heuristic Pricing</a:t>
+            </a:r>
+          </a:p>
+        </p:txBody>
+      </p:sp>
+      <p:sp>
+        <p:nvSpPr>
+          <p:cNvPr id="3" name="TextBox 2"/>
+          <p:cNvSpPr txBox="1"/>
+          <p:nvPr/>
+        </p:nvSpPr>
+        <p:spPr>
+          <a:xfrm>
+            <a:off x="457200" y="868680"/>
+            <a:ext cx="8229600" cy="274320"/>
+          </a:xfrm>
+          <a:prstGeom prst="rect">
+            <a:avLst/>
+          </a:prstGeom>
+          <a:noFill/>
+        </p:spPr>
+        <p:txBody>
+          <a:bodyPr wrap="square" lIns="0" rIns="0" tIns="0" bIns="0">
+            <a:spAutoFit/>
+          </a:bodyPr>
+          <a:lstStyle/>
+          <a:p>
+            <a:pPr>
+              <a:spcAft>
+                <a:spcPts val="200"/>
+              </a:spcAft>
+            </a:pPr>
+            <a:r>
+              <a:rPr sz="1200" b="0">
+                <a:solidFill>
+                  <a:srgbClr val="5B5F6E"/>
+                </a:solidFill>
+                <a:latin typeface="Calibri"/>
+              </a:rPr>
+              <a:t>Profit hill-climbing, 3 seasons  ·  git tag: phase7a-validated  ·  30 seeds</a:t>
+            </a:r>
+          </a:p>
+        </p:txBody>
+      </p:sp>
+      <p:sp>
+        <p:nvSpPr>
+          <p:cNvPr id="4" name="Rounded Rectangle 3"/>
+          <p:cNvSpPr/>
+          <p:nvPr/>
+        </p:nvSpPr>
+        <p:spPr>
+          <a:xfrm>
+            <a:off x="9464040" y="365760"/>
+            <a:ext cx="2240280" cy="384048"/>
+          </a:xfrm>
+          <a:prstGeom prst="roundRect">
+            <a:avLst/>
+          </a:prstGeom>
+          <a:solidFill>
+            <a:srgbClr val="1E7A4D"/>
+          </a:solidFill>
+          <a:ln>
+            <a:noFill/>
+          </a:ln>
+        </p:spPr>
+        <p:style>
+          <a:lnRef idx="1">
+            <a:schemeClr val="accent1"/>
+          </a:lnRef>
+          <a:fillRef idx="3">
+            <a:schemeClr val="accent1"/>
+          </a:fillRef>
+          <a:effectRef idx="2">
+            <a:schemeClr val="accent1"/>
+          </a:effectRef>
+          <a:fontRef idx="minor">
+            <a:schemeClr val="lt1"/>
+          </a:fontRef>
+        </p:style>
+        <p:txBody>
+          <a:bodyPr rtlCol="0" anchor="ctr"/>
+          <a:lstStyle/>
+          <a:p>
+            <a:pPr algn="ctr"/>
+            <a:r>
+              <a:rPr sz="1050" b="1">
+                <a:solidFill>
+                  <a:srgbClr val="FFFFFF"/>
+                </a:solidFill>
+                <a:latin typeface="Calibri"/>
+              </a:rPr>
+              <a:t>ALL CRITERIA PASS</a:t>
+            </a:r>
+          </a:p>
+        </p:txBody>
+      </p:sp>
+      <p:sp>
+        <p:nvSpPr>
+          <p:cNvPr id="5" name="Rectangle 4"/>
+          <p:cNvSpPr/>
+          <p:nvPr/>
+        </p:nvSpPr>
+        <p:spPr>
+          <a:xfrm>
+            <a:off x="457200" y="1417320"/>
+            <a:ext cx="292608" cy="292608"/>
+          </a:xfrm>
+          <a:prstGeom prst="rect">
+            <a:avLst/>
+          </a:prstGeom>
+          <a:solidFill>
+            <a:srgbClr val="1E2761"/>
+          </a:solidFill>
+          <a:ln>
+            <a:noFill/>
+          </a:ln>
+        </p:spPr>
+        <p:style>
+          <a:lnRef idx="1">
+            <a:schemeClr val="accent1"/>
+          </a:lnRef>
+          <a:fillRef idx="3">
+            <a:schemeClr val="accent1"/>
+          </a:fillRef>
+          <a:effectRef idx="2">
+            <a:schemeClr val="accent1"/>
+          </a:effectRef>
+          <a:fontRef idx="minor">
+            <a:schemeClr val="lt1"/>
+          </a:fontRef>
+        </p:style>
+        <p:txBody>
+          <a:bodyPr rtlCol="0" anchor="ctr"/>
+          <a:lstStyle/>
+          <a:p/>
+        </p:txBody>
+      </p:sp>
+      <p:sp>
+        <p:nvSpPr>
+          <p:cNvPr id="6" name="TextBox 5"/>
+          <p:cNvSpPr txBox="1"/>
+          <p:nvPr/>
+        </p:nvSpPr>
+        <p:spPr>
+          <a:xfrm>
+            <a:off x="868680" y="1389888"/>
+            <a:ext cx="4617720" cy="347472"/>
+          </a:xfrm>
+          <a:prstGeom prst="rect">
+            <a:avLst/>
+          </a:prstGeom>
+          <a:noFill/>
+        </p:spPr>
+        <p:txBody>
+          <a:bodyPr wrap="square" lIns="0" rIns="0" tIns="0" bIns="0">
+            <a:spAutoFit/>
+          </a:bodyPr>
+          <a:lstStyle/>
+          <a:p>
+            <a:pPr>
+              <a:spcAft>
+                <a:spcPts val="200"/>
+              </a:spcAft>
+            </a:pPr>
+            <a:r>
+              <a:rPr sz="1500" b="1">
+                <a:solidFill>
+                  <a:srgbClr val="1E2761"/>
+                </a:solidFill>
+                <a:latin typeface="Calibri"/>
+              </a:rPr>
+              <a:t>AGENTS</a:t>
+            </a:r>
+          </a:p>
+        </p:txBody>
+      </p:sp>
+      <p:sp>
+        <p:nvSpPr>
+          <p:cNvPr id="7" name="TextBox 6"/>
+          <p:cNvSpPr txBox="1"/>
+          <p:nvPr/>
+        </p:nvSpPr>
+        <p:spPr>
+          <a:xfrm>
+            <a:off x="868680" y="1828800"/>
+            <a:ext cx="4617720" cy="566928"/>
+          </a:xfrm>
+          <a:prstGeom prst="rect">
+            <a:avLst/>
+          </a:prstGeom>
+          <a:noFill/>
+        </p:spPr>
+        <p:txBody>
+          <a:bodyPr wrap="square" lIns="0" rIns="0" tIns="0" bIns="0">
+            <a:spAutoFit/>
+          </a:bodyPr>
+          <a:lstStyle/>
+          <a:p>
+            <a:pPr>
+              <a:spcAft>
+                <a:spcPts val="200"/>
+              </a:spcAft>
+            </a:pPr>
+            <a:r>
+              <a:rPr sz="1300" b="1">
+                <a:solidFill>
+                  <a:srgbClr val="1E2761"/>
+                </a:solidFill>
+                <a:latin typeface="Calibri"/>
+              </a:rPr>
+              <a:t>Buyers: </a:t>
+            </a:r>
+            <a:r>
+              <a:rPr sz="1300" b="0">
+                <a:solidFill>
+                  <a:srgbClr val="5B5F6E"/>
+                </a:solidFill>
+                <a:latin typeface="Calibri"/>
+              </a:rPr>
+              <a:t>100 — Poor 70 / Middle 20 / Rich 10, unchanged from Phase 6</a:t>
+            </a:r>
+          </a:p>
+          <a:p>
+            <a:pPr>
+              <a:spcAft>
+                <a:spcPts val="200"/>
+              </a:spcAft>
+            </a:pPr>
+            <a:r>
+              <a:rPr sz="1300" b="1">
+                <a:solidFill>
+                  <a:srgbClr val="1E2761"/>
+                </a:solidFill>
+                <a:latin typeface="Calibri"/>
+              </a:rPr>
+              <a:t>Sellers: </a:t>
+            </a:r>
+            <a:r>
+              <a:rPr sz="1300" b="0">
+                <a:solidFill>
+                  <a:srgbClr val="5B5F6E"/>
+                </a:solidFill>
+                <a:latin typeface="Calibri"/>
+              </a:rPr>
+              <a:t>5 — now with costs: unit cost half the initial price, 10/week fixed</a:t>
+            </a:r>
+          </a:p>
+        </p:txBody>
+      </p:sp>
+      <p:sp>
+        <p:nvSpPr>
+          <p:cNvPr id="8" name="Rectangle 7"/>
+          <p:cNvSpPr/>
+          <p:nvPr/>
+        </p:nvSpPr>
+        <p:spPr>
+          <a:xfrm>
+            <a:off x="457200" y="2651760"/>
+            <a:ext cx="292608" cy="292608"/>
+          </a:xfrm>
+          <a:prstGeom prst="rect">
+            <a:avLst/>
+          </a:prstGeom>
+          <a:solidFill>
+            <a:srgbClr val="1E2761"/>
+          </a:solidFill>
+          <a:ln>
+            <a:noFill/>
+          </a:ln>
+        </p:spPr>
+        <p:style>
+          <a:lnRef idx="1">
+            <a:schemeClr val="accent1"/>
+          </a:lnRef>
+          <a:fillRef idx="3">
+            <a:schemeClr val="accent1"/>
+          </a:fillRef>
+          <a:effectRef idx="2">
+            <a:schemeClr val="accent1"/>
+          </a:effectRef>
+          <a:fontRef idx="minor">
+            <a:schemeClr val="lt1"/>
+          </a:fontRef>
+        </p:style>
+        <p:txBody>
+          <a:bodyPr rtlCol="0" anchor="ctr"/>
+          <a:lstStyle/>
+          <a:p/>
+        </p:txBody>
+      </p:sp>
+      <p:sp>
+        <p:nvSpPr>
+          <p:cNvPr id="9" name="TextBox 8"/>
+          <p:cNvSpPr txBox="1"/>
+          <p:nvPr/>
+        </p:nvSpPr>
+        <p:spPr>
+          <a:xfrm>
+            <a:off x="868680" y="2624328"/>
+            <a:ext cx="4617720" cy="347472"/>
+          </a:xfrm>
+          <a:prstGeom prst="rect">
+            <a:avLst/>
+          </a:prstGeom>
+          <a:noFill/>
+        </p:spPr>
+        <p:txBody>
+          <a:bodyPr wrap="square" lIns="0" rIns="0" tIns="0" bIns="0">
+            <a:spAutoFit/>
+          </a:bodyPr>
+          <a:lstStyle/>
+          <a:p>
+            <a:pPr>
+              <a:spcAft>
+                <a:spcPts val="200"/>
+              </a:spcAft>
+            </a:pPr>
+            <a:r>
+              <a:rPr sz="1500" b="1">
+                <a:solidFill>
+                  <a:srgbClr val="1E2761"/>
+                </a:solidFill>
+                <a:latin typeface="Calibri"/>
+              </a:rPr>
+              <a:t>ENVIRONMENT &amp; CONTEXT</a:t>
+            </a:r>
+          </a:p>
+        </p:txBody>
+      </p:sp>
+      <p:sp>
+        <p:nvSpPr>
+          <p:cNvPr id="10" name="TextBox 9"/>
+          <p:cNvSpPr txBox="1"/>
+          <p:nvPr/>
+        </p:nvSpPr>
+        <p:spPr>
+          <a:xfrm>
+            <a:off x="868680" y="3063240"/>
+            <a:ext cx="4617720" cy="548640"/>
+          </a:xfrm>
+          <a:prstGeom prst="rect">
+            <a:avLst/>
+          </a:prstGeom>
+          <a:noFill/>
+        </p:spPr>
+        <p:txBody>
+          <a:bodyPr wrap="square" lIns="0" rIns="0" tIns="0" bIns="0">
+            <a:spAutoFit/>
+          </a:bodyPr>
+          <a:lstStyle/>
+          <a:p>
+            <a:pPr>
+              <a:spcAft>
+                <a:spcPts val="200"/>
+              </a:spcAft>
+            </a:pPr>
+            <a:r>
+              <a:rPr sz="1300" b="0">
+                <a:solidFill>
+                  <a:srgbClr val="5B5F6E"/>
+                </a:solidFill>
+                <a:latin typeface="Calibri"/>
+              </a:rPr>
+              <a:t>-  66 weeks (3 seasons). Price persists across weeks; stock and budget reset.</a:t>
+            </a:r>
+          </a:p>
+          <a:p>
+            <a:pPr>
+              <a:spcAft>
+                <a:spcPts val="200"/>
+              </a:spcAft>
+            </a:pPr>
+            <a:r>
+              <a:rPr sz="1300" b="0">
+                <a:solidFill>
+                  <a:srgbClr val="5B5F6E"/>
+                </a:solidFill>
+                <a:latin typeface="Calibri"/>
+              </a:rPr>
+              <a:t>-  Phase 3 visibility, Phase 4 promotion, Phase 6 memory all unchanged.</a:t>
+            </a:r>
+          </a:p>
+        </p:txBody>
+      </p:sp>
+      <p:sp>
+        <p:nvSpPr>
+          <p:cNvPr id="11" name="Rectangle 10"/>
+          <p:cNvSpPr/>
+          <p:nvPr/>
+        </p:nvSpPr>
+        <p:spPr>
+          <a:xfrm>
+            <a:off x="457200" y="3886200"/>
+            <a:ext cx="292608" cy="292608"/>
+          </a:xfrm>
+          <a:prstGeom prst="rect">
+            <a:avLst/>
+          </a:prstGeom>
+          <a:solidFill>
+            <a:srgbClr val="1E2761"/>
+          </a:solidFill>
+          <a:ln>
+            <a:noFill/>
+          </a:ln>
+        </p:spPr>
+        <p:style>
+          <a:lnRef idx="1">
+            <a:schemeClr val="accent1"/>
+          </a:lnRef>
+          <a:fillRef idx="3">
+            <a:schemeClr val="accent1"/>
+          </a:fillRef>
+          <a:effectRef idx="2">
+            <a:schemeClr val="accent1"/>
+          </a:effectRef>
+          <a:fontRef idx="minor">
+            <a:schemeClr val="lt1"/>
+          </a:fontRef>
+        </p:style>
+        <p:txBody>
+          <a:bodyPr rtlCol="0" anchor="ctr"/>
+          <a:lstStyle/>
+          <a:p/>
+        </p:txBody>
+      </p:sp>
+      <p:sp>
+        <p:nvSpPr>
+          <p:cNvPr id="12" name="TextBox 11"/>
+          <p:cNvSpPr txBox="1"/>
+          <p:nvPr/>
+        </p:nvSpPr>
+        <p:spPr>
+          <a:xfrm>
+            <a:off x="868680" y="3858768"/>
+            <a:ext cx="4617720" cy="347472"/>
+          </a:xfrm>
+          <a:prstGeom prst="rect">
+            <a:avLst/>
+          </a:prstGeom>
+          <a:noFill/>
+        </p:spPr>
+        <p:txBody>
+          <a:bodyPr wrap="square" lIns="0" rIns="0" tIns="0" bIns="0">
+            <a:spAutoFit/>
+          </a:bodyPr>
+          <a:lstStyle/>
+          <a:p>
+            <a:pPr>
+              <a:spcAft>
+                <a:spcPts val="200"/>
+              </a:spcAft>
+            </a:pPr>
+            <a:r>
+              <a:rPr sz="1500" b="1">
+                <a:solidFill>
+                  <a:srgbClr val="1E2761"/>
+                </a:solidFill>
+                <a:latin typeface="Calibri"/>
+              </a:rPr>
+              <a:t>METHOD</a:t>
+            </a:r>
+          </a:p>
+        </p:txBody>
+      </p:sp>
+      <p:sp>
+        <p:nvSpPr>
+          <p:cNvPr id="13" name="TextBox 12"/>
+          <p:cNvSpPr txBox="1"/>
+          <p:nvPr/>
+        </p:nvSpPr>
+        <p:spPr>
+          <a:xfrm>
+            <a:off x="868680" y="4297680"/>
+            <a:ext cx="4617720" cy="594360"/>
+          </a:xfrm>
+          <a:prstGeom prst="rect">
+            <a:avLst/>
+          </a:prstGeom>
+          <a:noFill/>
+        </p:spPr>
+        <p:txBody>
+          <a:bodyPr wrap="square" lIns="0" rIns="0" tIns="0" bIns="0">
+            <a:spAutoFit/>
+          </a:bodyPr>
+          <a:lstStyle/>
+          <a:p>
+            <a:pPr>
+              <a:spcAft>
+                <a:spcPts val="200"/>
+              </a:spcAft>
+            </a:pPr>
+            <a:r>
+              <a:rPr sz="1300" b="0">
+                <a:solidFill>
+                  <a:srgbClr val="5B5F6E"/>
+                </a:solidFill>
+                <a:latin typeface="Calibri"/>
+              </a:rPr>
+              <a:t>Move price ±5% the way it moved last week while profit improves.</a:t>
+            </a:r>
+          </a:p>
+          <a:p>
+            <a:pPr>
+              <a:spcAft>
+                <a:spcPts val="200"/>
+              </a:spcAft>
+            </a:pPr>
+            <a:r>
+              <a:rPr sz="1300" b="0">
+                <a:solidFill>
+                  <a:srgbClr val="5B5F6E"/>
+                </a:solidFill>
+                <a:latin typeface="Calibri"/>
+              </a:rPr>
+              <a:t>Act only on a change beyond the seller's own 8-week noise; floor at unit cost.</a:t>
+            </a:r>
+          </a:p>
+        </p:txBody>
+      </p:sp>
+      <p:sp>
+        <p:nvSpPr>
+          <p:cNvPr id="14" name="Rectangle 13"/>
+          <p:cNvSpPr/>
+          <p:nvPr/>
+        </p:nvSpPr>
+        <p:spPr>
+          <a:xfrm>
+            <a:off x="457200" y="5029200"/>
+            <a:ext cx="292608" cy="292608"/>
+          </a:xfrm>
+          <a:prstGeom prst="rect">
+            <a:avLst/>
+          </a:prstGeom>
+          <a:solidFill>
+            <a:srgbClr val="1E2761"/>
+          </a:solidFill>
+          <a:ln>
+            <a:noFill/>
+          </a:ln>
+        </p:spPr>
+        <p:style>
+          <a:lnRef idx="1">
+            <a:schemeClr val="accent1"/>
+          </a:lnRef>
+          <a:fillRef idx="3">
+            <a:schemeClr val="accent1"/>
+          </a:fillRef>
+          <a:effectRef idx="2">
+            <a:schemeClr val="accent1"/>
+          </a:effectRef>
+          <a:fontRef idx="minor">
+            <a:schemeClr val="lt1"/>
+          </a:fontRef>
+        </p:style>
+        <p:txBody>
+          <a:bodyPr rtlCol="0" anchor="ctr"/>
+          <a:lstStyle/>
+          <a:p/>
+        </p:txBody>
+      </p:sp>
+      <p:sp>
+        <p:nvSpPr>
+          <p:cNvPr id="15" name="TextBox 14"/>
+          <p:cNvSpPr txBox="1"/>
+          <p:nvPr/>
+        </p:nvSpPr>
+        <p:spPr>
+          <a:xfrm>
+            <a:off x="868680" y="5001768"/>
+            <a:ext cx="4617720" cy="347472"/>
+          </a:xfrm>
+          <a:prstGeom prst="rect">
+            <a:avLst/>
+          </a:prstGeom>
+          <a:noFill/>
+        </p:spPr>
+        <p:txBody>
+          <a:bodyPr wrap="square" lIns="0" rIns="0" tIns="0" bIns="0">
+            <a:spAutoFit/>
+          </a:bodyPr>
+          <a:lstStyle/>
+          <a:p>
+            <a:pPr>
+              <a:spcAft>
+                <a:spcPts val="200"/>
+              </a:spcAft>
+            </a:pPr>
+            <a:r>
+              <a:rPr sz="1500" b="1">
+                <a:solidFill>
+                  <a:srgbClr val="1E2761"/>
+                </a:solidFill>
+                <a:latin typeface="Calibri"/>
+              </a:rPr>
+              <a:t>LITERATURE BASIS</a:t>
+            </a:r>
+          </a:p>
+        </p:txBody>
+      </p:sp>
+      <p:sp>
+        <p:nvSpPr>
+          <p:cNvPr id="16" name="TextBox 15"/>
+          <p:cNvSpPr txBox="1"/>
+          <p:nvPr/>
+        </p:nvSpPr>
+        <p:spPr>
+          <a:xfrm>
+            <a:off x="868680" y="5440680"/>
+            <a:ext cx="4617720" cy="1005840"/>
+          </a:xfrm>
+          <a:prstGeom prst="rect">
+            <a:avLst/>
+          </a:prstGeom>
+          <a:noFill/>
+        </p:spPr>
+        <p:txBody>
+          <a:bodyPr wrap="square" lIns="0" rIns="0" tIns="0" bIns="0">
+            <a:spAutoFit/>
+          </a:bodyPr>
+          <a:lstStyle/>
+          <a:p>
+            <a:pPr>
+              <a:spcAft>
+                <a:spcPts val="600"/>
+              </a:spcAft>
+            </a:pPr>
+            <a:r>
+              <a:rPr sz="1100" b="1">
+                <a:solidFill>
+                  <a:srgbClr val="1E2761"/>
+                </a:solidFill>
+                <a:latin typeface="Calibri"/>
+              </a:rPr>
+              <a:t>den Boer (2015), </a:t>
+            </a:r>
+            <a:r>
+              <a:rPr sz="1100" b="0">
+                <a:solidFill>
+                  <a:srgbClr val="5B5F6E"/>
+                </a:solidFill>
+                <a:latin typeface="Calibri"/>
+              </a:rPr>
+              <a:t>“Dynamic Pricing and Learning” — heuristic, non-optimizing adaptive pricing as the stage before formal learning algorithms.</a:t>
+            </a:r>
+          </a:p>
+        </p:txBody>
+      </p:sp>
+      <p:sp>
+        <p:nvSpPr>
+          <p:cNvPr id="17" name="Rectangle 16"/>
+          <p:cNvSpPr/>
+          <p:nvPr/>
+        </p:nvSpPr>
+        <p:spPr>
+          <a:xfrm>
+            <a:off x="5943600" y="1417320"/>
+            <a:ext cx="292608" cy="292608"/>
+          </a:xfrm>
+          <a:prstGeom prst="rect">
+            <a:avLst/>
+          </a:prstGeom>
+          <a:solidFill>
+            <a:srgbClr val="1E2761"/>
+          </a:solidFill>
+          <a:ln>
+            <a:noFill/>
+          </a:ln>
+        </p:spPr>
+        <p:style>
+          <a:lnRef idx="1">
+            <a:schemeClr val="accent1"/>
+          </a:lnRef>
+          <a:fillRef idx="3">
+            <a:schemeClr val="accent1"/>
+          </a:fillRef>
+          <a:effectRef idx="2">
+            <a:schemeClr val="accent1"/>
+          </a:effectRef>
+          <a:fontRef idx="minor">
+            <a:schemeClr val="lt1"/>
+          </a:fontRef>
+        </p:style>
+        <p:txBody>
+          <a:bodyPr rtlCol="0" anchor="ctr"/>
+          <a:lstStyle/>
+          <a:p/>
+        </p:txBody>
+      </p:sp>
+      <p:sp>
+        <p:nvSpPr>
+          <p:cNvPr id="18" name="TextBox 17"/>
+          <p:cNvSpPr txBox="1"/>
+          <p:nvPr/>
+        </p:nvSpPr>
+        <p:spPr>
+          <a:xfrm>
+            <a:off x="6355080" y="1389888"/>
+            <a:ext cx="5349240" cy="347472"/>
+          </a:xfrm>
+          <a:prstGeom prst="rect">
+            <a:avLst/>
+          </a:prstGeom>
+          <a:noFill/>
+        </p:spPr>
+        <p:txBody>
+          <a:bodyPr wrap="square" lIns="0" rIns="0" tIns="0" bIns="0">
+            <a:spAutoFit/>
+          </a:bodyPr>
+          <a:lstStyle/>
+          <a:p>
+            <a:pPr>
+              <a:spcAft>
+                <a:spcPts val="200"/>
+              </a:spcAft>
+            </a:pPr>
+            <a:r>
+              <a:rPr sz="1500" b="1">
+                <a:solidFill>
+                  <a:srgbClr val="1E2761"/>
+                </a:solidFill>
+                <a:latin typeface="Calibri"/>
+              </a:rPr>
+              <a:t>KEY RESULTS</a:t>
+            </a:r>
+          </a:p>
+        </p:txBody>
+      </p:sp>
+      <p:graphicFrame>
+        <p:nvGraphicFramePr>
+          <p:cNvPr id="19" name="Table 18"/>
+          <p:cNvGraphicFramePr>
+            <a:graphicFrameLocks noGrp="1"/>
+          </p:cNvGraphicFramePr>
+          <p:nvPr/>
+        </p:nvGraphicFramePr>
+        <p:xfrm>
+          <a:off x="5943600" y="1874519"/>
+          <a:ext cx="5760720" cy="1920240"/>
+        </p:xfrm>
+        <a:graphic>
+          <a:graphicData uri="http://schemas.openxmlformats.org/drawingml/2006/table">
+            <a:tbl>
+              <a:tblPr firstRow="1" bandRow="1">
+                <a:tableStyleId>{5C22544A-7EE6-4342-B048-85BDC9FD1C3A}</a:tableStyleId>
+              </a:tblPr>
+              <a:tblGrid>
+                <a:gridCol w="3200400"/>
+                <a:gridCol w="1463040"/>
+                <a:gridCol w="1097280"/>
+              </a:tblGrid>
+              <a:tr h="274320">
+                <a:tc>
+                  <a:txBody>
+                    <a:bodyPr/>
+                    <a:lstStyle/>
+                    <a:p>
+                      <a:r>
+                        <a:rPr sz="1100" b="1">
+                          <a:solidFill>
+                            <a:srgbClr val="FFFFFF"/>
+                          </a:solidFill>
+                          <a:latin typeface="Calibri"/>
+                        </a:rPr>
+                        <a:t>Metric</a:t>
+                      </a:r>
+                    </a:p>
+                  </a:txBody>
+                  <a:tcPr>
+                    <a:solidFill>
+                      <a:srgbClr val="1E2761"/>
+                    </a:solidFill>
+                  </a:tcPr>
+                </a:tc>
+                <a:tc>
+                  <a:txBody>
+                    <a:bodyPr/>
+                    <a:lstStyle/>
+                    <a:p>
+                      <a:r>
+                        <a:rPr sz="1100" b="1">
+                          <a:solidFill>
+                            <a:srgbClr val="FFFFFF"/>
+                          </a:solidFill>
+                          <a:latin typeface="Calibri"/>
+                        </a:rPr>
+                        <a:t>Value</a:t>
+                      </a:r>
+                    </a:p>
+                  </a:txBody>
+                  <a:tcPr>
+                    <a:solidFill>
+                      <a:srgbClr val="1E2761"/>
+                    </a:solidFill>
+                  </a:tcPr>
+                </a:tc>
+                <a:tc>
+                  <a:txBody>
+                    <a:bodyPr/>
+                    <a:lstStyle/>
+                    <a:p>
+                      <a:r>
+                        <a:rPr sz="1100" b="1">
+                          <a:solidFill>
+                            <a:srgbClr val="FFFFFF"/>
+                          </a:solidFill>
+                          <a:latin typeface="Calibri"/>
+                        </a:rPr>
+                        <a:t/>
+                      </a:r>
+                    </a:p>
+                  </a:txBody>
+                  <a:tcPr>
+                    <a:solidFill>
+                      <a:srgbClr val="1E2761"/>
+                    </a:solidFill>
+                  </a:tcPr>
+                </a:tc>
+              </a:tr>
+              <a:tr h="274320">
+                <a:tc>
+                  <a:txBody>
+                    <a:bodyPr/>
+                    <a:lstStyle/>
+                    <a:p>
+                      <a:r>
+                        <a:rPr sz="1100">
+                          <a:solidFill>
+                            <a:srgbClr val="1E2761"/>
+                          </a:solidFill>
+                          <a:latin typeface="Calibri"/>
+                        </a:rPr>
+                        <a:t>purchase_rate (0.6–1.0)</a:t>
+                      </a:r>
+                    </a:p>
+                  </a:txBody>
+                  <a:tcPr>
+                    <a:solidFill>
+                      <a:srgbClr val="FFFFFF"/>
+                    </a:solidFill>
+                  </a:tcPr>
+                </a:tc>
+                <a:tc>
+                  <a:txBody>
+                    <a:bodyPr/>
+                    <a:lstStyle/>
+                    <a:p>
+                      <a:r>
+                        <a:rPr sz="1100">
+                          <a:solidFill>
+                            <a:srgbClr val="5B5F6E"/>
+                          </a:solidFill>
+                          <a:latin typeface="Calibri"/>
+                        </a:rPr>
+                        <a:t>0.688</a:t>
+                      </a:r>
+                    </a:p>
+                  </a:txBody>
+                  <a:tcPr>
+                    <a:solidFill>
+                      <a:srgbClr val="FFFFFF"/>
+                    </a:solidFill>
+                  </a:tcPr>
+                </a:tc>
+                <a:tc>
+                  <a:txBody>
+                    <a:bodyPr/>
+                    <a:lstStyle/>
+                    <a:p>
+                      <a:pPr algn="ctr"/>
+                      <a:r>
+                        <a:rPr sz="1100" b="1">
+                          <a:solidFill>
+                            <a:srgbClr val="1E7A4D"/>
+                          </a:solidFill>
+                          <a:latin typeface="Calibri"/>
+                        </a:rPr>
+                        <a:t>PASS</a:t>
+                      </a:r>
+                    </a:p>
+                  </a:txBody>
+                  <a:tcPr>
+                    <a:solidFill>
+                      <a:srgbClr val="FFFFFF"/>
+                    </a:solidFill>
+                  </a:tcPr>
+                </a:tc>
+              </a:tr>
+              <a:tr h="274320">
+                <a:tc>
+                  <a:txBody>
+                    <a:bodyPr/>
+                    <a:lstStyle/>
+                    <a:p>
+                      <a:r>
+                        <a:rPr sz="1100">
+                          <a:solidFill>
+                            <a:srgbClr val="1E2761"/>
+                          </a:solidFill>
+                          <a:latin typeface="Calibri"/>
+                        </a:rPr>
+                        <a:t>Final price ÷ initial</a:t>
+                      </a:r>
+                    </a:p>
+                  </a:txBody>
+                  <a:tcPr>
+                    <a:solidFill>
+                      <a:srgbClr val="F7F8FC"/>
+                    </a:solidFill>
+                  </a:tcPr>
+                </a:tc>
+                <a:tc>
+                  <a:txBody>
+                    <a:bodyPr/>
+                    <a:lstStyle/>
+                    <a:p>
+                      <a:r>
+                        <a:rPr sz="1100">
+                          <a:solidFill>
+                            <a:srgbClr val="5B5F6E"/>
+                          </a:solidFill>
+                          <a:latin typeface="Calibri"/>
+                        </a:rPr>
+                        <a:t>0.71–1.51×</a:t>
+                      </a:r>
+                    </a:p>
+                  </a:txBody>
+                  <a:tcPr>
+                    <a:solidFill>
+                      <a:srgbClr val="F7F8FC"/>
+                    </a:solidFill>
+                  </a:tcPr>
+                </a:tc>
+                <a:tc>
+                  <a:txBody>
+                    <a:bodyPr/>
+                    <a:lstStyle/>
+                    <a:p>
+                      <a:pPr algn="ctr"/>
+                      <a:r>
+                        <a:rPr sz="1100" b="1">
+                          <a:solidFill>
+                            <a:srgbClr val="1E7A4D"/>
+                          </a:solidFill>
+                          <a:latin typeface="Calibri"/>
+                        </a:rPr>
+                        <a:t>PASS</a:t>
+                      </a:r>
+                    </a:p>
+                  </a:txBody>
+                  <a:tcPr>
+                    <a:solidFill>
+                      <a:srgbClr val="F7F8FC"/>
+                    </a:solidFill>
+                  </a:tcPr>
+                </a:tc>
+              </a:tr>
+              <a:tr h="274320">
+                <a:tc>
+                  <a:txBody>
+                    <a:bodyPr/>
+                    <a:lstStyle/>
+                    <a:p>
+                      <a:r>
+                        <a:rPr sz="1100">
+                          <a:solidFill>
+                            <a:srgbClr val="1E2761"/>
+                          </a:solidFill>
+                          <a:latin typeface="Calibri"/>
+                        </a:rPr>
+                        <a:t>Lowest premium price vs Poor's budget</a:t>
+                      </a:r>
+                    </a:p>
+                  </a:txBody>
+                  <a:tcPr>
+                    <a:solidFill>
+                      <a:srgbClr val="FFFFFF"/>
+                    </a:solidFill>
+                  </a:tcPr>
+                </a:tc>
+                <a:tc>
+                  <a:txBody>
+                    <a:bodyPr/>
+                    <a:lstStyle/>
+                    <a:p>
+                      <a:r>
+                        <a:rPr sz="1100">
+                          <a:solidFill>
+                            <a:srgbClr val="5B5F6E"/>
+                          </a:solidFill>
+                          <a:latin typeface="Calibri"/>
+                        </a:rPr>
+                        <a:t>4.08 vs 3</a:t>
+                      </a:r>
+                    </a:p>
+                  </a:txBody>
+                  <a:tcPr>
+                    <a:solidFill>
+                      <a:srgbClr val="FFFFFF"/>
+                    </a:solidFill>
+                  </a:tcPr>
+                </a:tc>
+                <a:tc>
+                  <a:txBody>
+                    <a:bodyPr/>
+                    <a:lstStyle/>
+                    <a:p>
+                      <a:pPr algn="ctr"/>
+                      <a:r>
+                        <a:rPr sz="1100" b="1">
+                          <a:solidFill>
+                            <a:srgbClr val="1E7A4D"/>
+                          </a:solidFill>
+                          <a:latin typeface="Calibri"/>
+                        </a:rPr>
+                        <a:t>PASS</a:t>
+                      </a:r>
+                    </a:p>
+                  </a:txBody>
+                  <a:tcPr>
+                    <a:solidFill>
+                      <a:srgbClr val="FFFFFF"/>
+                    </a:solidFill>
+                  </a:tcPr>
+                </a:tc>
+              </a:tr>
+              <a:tr h="274320">
+                <a:tc>
+                  <a:txBody>
+                    <a:bodyPr/>
+                    <a:lstStyle/>
+                    <a:p>
+                      <a:r>
+                        <a:rPr sz="1100">
+                          <a:solidFill>
+                            <a:srgbClr val="1E2761"/>
+                          </a:solidFill>
+                          <a:latin typeface="Calibri"/>
+                        </a:rPr>
+                        <a:t>Weekly profit vs fixed price</a:t>
+                      </a:r>
+                    </a:p>
+                  </a:txBody>
+                  <a:tcPr>
+                    <a:solidFill>
+                      <a:srgbClr val="F7F8FC"/>
+                    </a:solidFill>
+                  </a:tcPr>
+                </a:tc>
+                <a:tc>
+                  <a:txBody>
+                    <a:bodyPr/>
+                    <a:lstStyle/>
+                    <a:p>
+                      <a:r>
+                        <a:rPr sz="1100">
+                          <a:solidFill>
+                            <a:srgbClr val="5B5F6E"/>
+                          </a:solidFill>
+                          <a:latin typeface="Calibri"/>
+                        </a:rPr>
+                        <a:t>49.5 → 64.3</a:t>
+                      </a:r>
+                    </a:p>
+                  </a:txBody>
+                  <a:tcPr>
+                    <a:solidFill>
+                      <a:srgbClr val="F7F8FC"/>
+                    </a:solidFill>
+                  </a:tcPr>
+                </a:tc>
+                <a:tc>
+                  <a:txBody>
+                    <a:bodyPr/>
+                    <a:lstStyle/>
+                    <a:p>
+                      <a:pPr algn="ctr"/>
+                      <a:r>
+                        <a:rPr sz="1100" b="1">
+                          <a:solidFill>
+                            <a:srgbClr val="1E7A4D"/>
+                          </a:solidFill>
+                          <a:latin typeface="Calibri"/>
+                        </a:rPr>
+                        <a:t>PASS</a:t>
+                      </a:r>
+                    </a:p>
+                  </a:txBody>
+                  <a:tcPr>
+                    <a:solidFill>
+                      <a:srgbClr val="F7F8FC"/>
+                    </a:solidFill>
+                  </a:tcPr>
+                </a:tc>
+              </a:tr>
+              <a:tr h="274320">
+                <a:tc>
+                  <a:txBody>
+                    <a:bodyPr/>
+                    <a:lstStyle/>
+                    <a:p>
+                      <a:r>
+                        <a:rPr sz="1100">
+                          <a:solidFill>
+                            <a:srgbClr val="1E2761"/>
+                          </a:solidFill>
+                          <a:latin typeface="Calibri"/>
+                        </a:rPr>
+                        <a:t>  its 95% CI</a:t>
+                      </a:r>
+                    </a:p>
+                  </a:txBody>
+                  <a:tcPr>
+                    <a:solidFill>
+                      <a:srgbClr val="FFFFFF"/>
+                    </a:solidFill>
+                  </a:tcPr>
+                </a:tc>
+                <a:tc>
+                  <a:txBody>
+                    <a:bodyPr/>
+                    <a:lstStyle/>
+                    <a:p>
+                      <a:r>
+                        <a:rPr sz="1100">
+                          <a:solidFill>
+                            <a:srgbClr val="5B5F6E"/>
+                          </a:solidFill>
+                          <a:latin typeface="Calibri"/>
+                        </a:rPr>
+                        <a:t>[+12.5, +17.1]</a:t>
+                      </a:r>
+                    </a:p>
+                  </a:txBody>
+                  <a:tcPr>
+                    <a:solidFill>
+                      <a:srgbClr val="FFFFFF"/>
+                    </a:solidFill>
+                  </a:tcPr>
+                </a:tc>
+                <a:tc>
+                  <a:txBody>
+                    <a:bodyPr/>
+                    <a:lstStyle/>
+                    <a:p>
+                      <a:pPr algn="ctr"/>
+                      <a:r>
+                        <a:rPr sz="1100" b="1">
+                          <a:solidFill>
+                            <a:srgbClr val="1E7A4D"/>
+                          </a:solidFill>
+                          <a:latin typeface="Calibri"/>
+                        </a:rPr>
+                        <a:t>PASS</a:t>
+                      </a:r>
+                    </a:p>
+                  </a:txBody>
+                  <a:tcPr>
+                    <a:solidFill>
+                      <a:srgbClr val="FFFFFF"/>
+                    </a:solidFill>
+                  </a:tcPr>
+                </a:tc>
+              </a:tr>
+              <a:tr h="274320">
+                <a:tc>
+                  <a:txBody>
+                    <a:bodyPr/>
+                    <a:lstStyle/>
+                    <a:p>
+                      <a:r>
+                        <a:rPr sz="1100">
+                          <a:solidFill>
+                            <a:srgbClr val="1E2761"/>
+                          </a:solidFill>
+                          <a:latin typeface="Calibri"/>
+                        </a:rPr>
+                        <a:t>Slow price reached (optimum 3.00)</a:t>
+                      </a:r>
+                    </a:p>
+                  </a:txBody>
+                  <a:tcPr>
+                    <a:solidFill>
+                      <a:srgbClr val="F7F8FC"/>
+                    </a:solidFill>
+                  </a:tcPr>
+                </a:tc>
+                <a:tc>
+                  <a:txBody>
+                    <a:bodyPr/>
+                    <a:lstStyle/>
+                    <a:p>
+                      <a:r>
+                        <a:rPr sz="1100">
+                          <a:solidFill>
+                            <a:srgbClr val="5B5F6E"/>
+                          </a:solidFill>
+                          <a:latin typeface="Calibri"/>
+                        </a:rPr>
+                        <a:t>2.37</a:t>
+                      </a:r>
+                    </a:p>
+                  </a:txBody>
+                  <a:tcPr>
+                    <a:solidFill>
+                      <a:srgbClr val="F7F8FC"/>
+                    </a:solidFill>
+                  </a:tcPr>
+                </a:tc>
+                <a:tc>
+                  <a:txBody>
+                    <a:bodyPr/>
+                    <a:lstStyle/>
+                    <a:p>
+                      <a:pPr algn="ctr"/>
+                      <a:r>
+                        <a:rPr sz="1100" b="1">
+                          <a:solidFill>
+                            <a:srgbClr val="5B5F6E"/>
+                          </a:solidFill>
+                          <a:latin typeface="Calibri"/>
+                        </a:rPr>
+                        <a:t>—</a:t>
+                      </a:r>
+                    </a:p>
+                  </a:txBody>
+                  <a:tcPr>
+                    <a:solidFill>
+                      <a:srgbClr val="F7F8FC"/>
+                    </a:solidFill>
+                  </a:tcPr>
+                </a:tc>
+              </a:tr>
+            </a:tbl>
+          </a:graphicData>
+        </a:graphic>
+      </p:graphicFrame>
+      <p:sp>
+        <p:nvSpPr>
+          <p:cNvPr id="20" name="Rectangle 19"/>
+          <p:cNvSpPr/>
+          <p:nvPr/>
+        </p:nvSpPr>
+        <p:spPr>
+          <a:xfrm>
+            <a:off x="5943600" y="4023360"/>
+            <a:ext cx="292608" cy="292608"/>
+          </a:xfrm>
+          <a:prstGeom prst="rect">
+            <a:avLst/>
+          </a:prstGeom>
+          <a:solidFill>
+            <a:srgbClr val="1E2761"/>
+          </a:solidFill>
+          <a:ln>
+            <a:noFill/>
+          </a:ln>
+        </p:spPr>
+        <p:style>
+          <a:lnRef idx="1">
+            <a:schemeClr val="accent1"/>
+          </a:lnRef>
+          <a:fillRef idx="3">
+            <a:schemeClr val="accent1"/>
+          </a:fillRef>
+          <a:effectRef idx="2">
+            <a:schemeClr val="accent1"/>
+          </a:effectRef>
+          <a:fontRef idx="minor">
+            <a:schemeClr val="lt1"/>
+          </a:fontRef>
+        </p:style>
+        <p:txBody>
+          <a:bodyPr rtlCol="0" anchor="ctr"/>
+          <a:lstStyle/>
+          <a:p/>
+        </p:txBody>
+      </p:sp>
+      <p:sp>
+        <p:nvSpPr>
+          <p:cNvPr id="21" name="TextBox 20"/>
+          <p:cNvSpPr txBox="1"/>
+          <p:nvPr/>
+        </p:nvSpPr>
+        <p:spPr>
+          <a:xfrm>
+            <a:off x="6355080" y="3995928"/>
+            <a:ext cx="5349240" cy="347472"/>
+          </a:xfrm>
+          <a:prstGeom prst="rect">
+            <a:avLst/>
+          </a:prstGeom>
+          <a:noFill/>
+        </p:spPr>
+        <p:txBody>
+          <a:bodyPr wrap="square" lIns="0" rIns="0" tIns="0" bIns="0">
+            <a:spAutoFit/>
+          </a:bodyPr>
+          <a:lstStyle/>
+          <a:p>
+            <a:pPr>
+              <a:spcAft>
+                <a:spcPts val="200"/>
+              </a:spcAft>
+            </a:pPr>
+            <a:r>
+              <a:rPr sz="1500" b="1">
+                <a:solidFill>
+                  <a:srgbClr val="1E2761"/>
+                </a:solidFill>
+                <a:latin typeface="Calibri"/>
+              </a:rPr>
+              <a:t>RESEARCH QUESTION</a:t>
+            </a:r>
+          </a:p>
+        </p:txBody>
+      </p:sp>
+      <p:sp>
+        <p:nvSpPr>
+          <p:cNvPr id="22" name="Rectangle 21"/>
+          <p:cNvSpPr/>
+          <p:nvPr/>
+        </p:nvSpPr>
+        <p:spPr>
+          <a:xfrm>
+            <a:off x="5943600" y="4434840"/>
+            <a:ext cx="5760720" cy="1965960"/>
+          </a:xfrm>
+          <a:prstGeom prst="rect">
+            <a:avLst/>
+          </a:prstGeom>
+          <a:solidFill>
+            <a:srgbClr val="F7F8FC"/>
+          </a:solidFill>
+          <a:ln>
+            <a:noFill/>
+          </a:ln>
+        </p:spPr>
+        <p:style>
+          <a:lnRef idx="1">
+            <a:schemeClr val="accent1"/>
+          </a:lnRef>
+          <a:fillRef idx="3">
+            <a:schemeClr val="accent1"/>
+          </a:fillRef>
+          <a:effectRef idx="2">
+            <a:schemeClr val="accent1"/>
+          </a:effectRef>
+          <a:fontRef idx="minor">
+            <a:schemeClr val="lt1"/>
+          </a:fontRef>
+        </p:style>
+        <p:txBody>
+          <a:bodyPr rtlCol="0" anchor="ctr"/>
+          <a:lstStyle/>
+          <a:p/>
+        </p:txBody>
+      </p:sp>
+      <p:sp>
+        <p:nvSpPr>
+          <p:cNvPr id="23" name="TextBox 22"/>
+          <p:cNvSpPr txBox="1"/>
+          <p:nvPr/>
+        </p:nvSpPr>
+        <p:spPr>
+          <a:xfrm>
+            <a:off x="6217920" y="4572000"/>
+            <a:ext cx="5212080" cy="1737360"/>
+          </a:xfrm>
+          <a:prstGeom prst="rect">
+            <a:avLst/>
+          </a:prstGeom>
+          <a:noFill/>
+        </p:spPr>
+        <p:txBody>
+          <a:bodyPr wrap="square" lIns="0" rIns="0" tIns="0" bIns="0">
+            <a:spAutoFit/>
+          </a:bodyPr>
+          <a:lstStyle/>
+          <a:p>
+            <a:pPr>
+              <a:spcAft>
+                <a:spcPts val="500"/>
+              </a:spcAft>
+            </a:pPr>
+            <a:r>
+              <a:rPr sz="1000" b="0">
+                <a:solidFill>
+                  <a:srgbClr val="5B5F6E"/>
+                </a:solidFill>
+                <a:latin typeface="Calibri"/>
+              </a:rPr>
+              <a:t>Does stateful policy learning produce market structures that cannot emerge from myopic bandit optimization? 7a sets the heuristic baseline.</a:t>
+            </a:r>
+          </a:p>
+          <a:p>
+            <a:pPr>
+              <a:spcAft>
+                <a:spcPts val="500"/>
+              </a:spcAft>
+            </a:pPr>
+            <a:r>
+              <a:rPr sz="1000" b="1">
+                <a:solidFill>
+                  <a:srgbClr val="1E2761"/>
+                </a:solidFill>
+                <a:latin typeface="Calibri"/>
+              </a:rPr>
+              <a:t>Finding: </a:t>
+            </a:r>
+            <a:r>
+              <a:rPr sz="1000" b="0">
+                <a:solidFill>
+                  <a:srgbClr val="5B5F6E"/>
+                </a:solidFill>
+                <a:latin typeface="Calibri"/>
+              </a:rPr>
+              <a:t>A non-learning heuristic already captures +14.8 profit per week over fixed pricing, CI [+12.5, +17.1], and stops at 2.37 — short of the 3.00 optimum. That gap is what 7b–7d have to win.</a:t>
+            </a:r>
+          </a:p>
+          <a:p>
+            <a:pPr>
+              <a:spcAft>
+                <a:spcPts val="500"/>
+              </a:spcAft>
+            </a:pPr>
+            <a:r>
+              <a:rPr sz="1000" b="1">
+                <a:solidFill>
+                  <a:srgbClr val="1E2761"/>
+                </a:solidFill>
+                <a:latin typeface="Calibri"/>
+              </a:rPr>
+              <a:t>Caveat: </a:t>
+            </a:r>
+            <a:r>
+              <a:rPr sz="1000" b="0">
+                <a:solidFill>
+                  <a:srgbClr val="5B5F6E"/>
+                </a:solidFill>
+                <a:latin typeface="Calibri"/>
+              </a:rPr>
+              <a:t>Two rules were rejected first. The specified one — raise if stock ran out, cut if half is left — fired its raise branch 0 times in 330 seller-weeks and collapsed prices to 0.036× initial, fabricating 1,987 Poor purchases at the premium tier. The ungated hill climber drifted a 3-units-a-week stall to 3.5× its price on noise. Since 7b–7d are all graded against 7a, either would have poisoned three gates at once.</a:t>
+            </a:r>
+          </a:p>
+        </p:txBody>
+      </p:sp>
+      <p:sp>
+        <p:nvSpPr>
+          <p:cNvPr id="24" name="TextBox 23"/>
+          <p:cNvSpPr txBox="1"/>
+          <p:nvPr/>
+        </p:nvSpPr>
+        <p:spPr>
+          <a:xfrm>
+            <a:off x="457200" y="6446520"/>
+            <a:ext cx="11247120" cy="274320"/>
+          </a:xfrm>
+          <a:prstGeom prst="rect">
+            <a:avLst/>
+          </a:prstGeom>
+          <a:noFill/>
+        </p:spPr>
+        <p:txBody>
+          <a:bodyPr wrap="square" lIns="0" rIns="0" tIns="0" bIns="0">
+            <a:spAutoFit/>
+          </a:bodyPr>
+          <a:lstStyle/>
+          <a:p>
+            <a:pPr>
+              <a:spcAft>
+                <a:spcPts val="200"/>
+              </a:spcAft>
+            </a:pPr>
+            <a:r>
+              <a:rPr sz="950" b="0">
+                <a:solidFill>
+                  <a:srgbClr val="5B5F6E"/>
+                </a:solidFill>
+                <a:latin typeface="Calibri"/>
+              </a:rPr>
+              <a:t>Generated automatically at phase completion  ·  Phase Completion Deliverable  ·  market-sim project</a:t>
+            </a:r>
+          </a:p>
+        </p:txBody>
+      </p:sp>
+    </p:spTree>
+  </p:cSld>
+  <p:clrMapOvr>
+    <a:masterClrMapping/>
+  </p:clrMapOvr>
+</p:sld>
+</file>
+
 <file path=ppt/theme/theme1.xml><?xml version="1.0" encoding="utf-8"?>
 <a:theme xmlns:a="http://schemas.openxmlformats.org/drawingml/2006/main" name="Office Theme">
   <a:themeElements>

--- a/project_tracking.pptx
+++ b/project_tracking.pptx
@@ -12,6 +12,7 @@
     <p:sldId id="260" r:id="rId11"/>
     <p:sldId id="261" r:id="rId12"/>
     <p:sldId id="262" r:id="rId13"/>
+    <p:sldId id="263" r:id="rId14"/>
   </p:sldIdLst>
   <p:sldSz cx="12191969" cy="6858000" type="screen4x3"/>
   <p:notesSz cx="6858000" cy="9144000"/>
@@ -13566,6 +13567,1543 @@
                 <a:latin typeface="Calibri"/>
               </a:rPr>
               <a:t>Two rules were rejected first. The specified one — raise if stock ran out, cut if half is left — fired its raise branch 0 times in 330 seller-weeks and collapsed prices to 0.036× initial, fabricating 1,987 Poor purchases at the premium tier. The ungated hill climber drifted a 3-units-a-week stall to 3.5× its price on noise. Since 7b–7d are all graded against 7a, either would have poisoned three gates at once.</a:t>
+            </a:r>
+          </a:p>
+        </p:txBody>
+      </p:sp>
+      <p:sp>
+        <p:nvSpPr>
+          <p:cNvPr id="24" name="TextBox 23"/>
+          <p:cNvSpPr txBox="1"/>
+          <p:nvPr/>
+        </p:nvSpPr>
+        <p:spPr>
+          <a:xfrm>
+            <a:off x="457200" y="6446520"/>
+            <a:ext cx="11247120" cy="274320"/>
+          </a:xfrm>
+          <a:prstGeom prst="rect">
+            <a:avLst/>
+          </a:prstGeom>
+          <a:noFill/>
+        </p:spPr>
+        <p:txBody>
+          <a:bodyPr wrap="square" lIns="0" rIns="0" tIns="0" bIns="0">
+            <a:spAutoFit/>
+          </a:bodyPr>
+          <a:lstStyle/>
+          <a:p>
+            <a:pPr>
+              <a:spcAft>
+                <a:spcPts val="200"/>
+              </a:spcAft>
+            </a:pPr>
+            <a:r>
+              <a:rPr sz="950" b="0">
+                <a:solidFill>
+                  <a:srgbClr val="5B5F6E"/>
+                </a:solidFill>
+                <a:latin typeface="Calibri"/>
+              </a:rPr>
+              <a:t>Generated automatically at phase completion  ·  Phase Completion Deliverable  ·  market-sim project</a:t>
+            </a:r>
+          </a:p>
+        </p:txBody>
+      </p:sp>
+    </p:spTree>
+  </p:cSld>
+  <p:clrMapOvr>
+    <a:masterClrMapping/>
+  </p:clrMapOvr>
+</p:sld>
+</file>
+
+<file path=ppt/slides/slide8.xml><?xml version="1.0" encoding="utf-8"?>
+<p:sld xmlns:a="http://schemas.openxmlformats.org/drawingml/2006/main" xmlns:p="http://schemas.openxmlformats.org/presentationml/2006/main" xmlns:r="http://schemas.openxmlformats.org/officeDocument/2006/relationships">
+  <p:cSld>
+    <p:spTree>
+      <p:nvGrpSpPr>
+        <p:cNvPr id="1" name=""/>
+        <p:cNvGrpSpPr/>
+        <p:nvPr/>
+      </p:nvGrpSpPr>
+      <p:grpSpPr/>
+      <p:sp>
+        <p:nvSpPr>
+          <p:cNvPr id="2" name="TextBox 1"/>
+          <p:cNvSpPr txBox="1"/>
+          <p:nvPr/>
+        </p:nvSpPr>
+        <p:spPr>
+          <a:xfrm>
+            <a:off x="457200" y="320040"/>
+            <a:ext cx="8229600" cy="548640"/>
+          </a:xfrm>
+          <a:prstGeom prst="rect">
+            <a:avLst/>
+          </a:prstGeom>
+          <a:noFill/>
+        </p:spPr>
+        <p:txBody>
+          <a:bodyPr wrap="square" lIns="0" rIns="0" tIns="0" bIns="0">
+            <a:spAutoFit/>
+          </a:bodyPr>
+          <a:lstStyle/>
+          <a:p>
+            <a:pPr>
+              <a:spcAft>
+                <a:spcPts val="200"/>
+              </a:spcAft>
+            </a:pPr>
+            <a:r>
+              <a:rPr sz="3200" b="1">
+                <a:solidFill>
+                  <a:srgbClr val="1E2761"/>
+                </a:solidFill>
+                <a:latin typeface="Cambria"/>
+              </a:rPr>
+              <a:t>Phase 7 — Seller Learning — 7b Multi-Armed Bandit</a:t>
+            </a:r>
+          </a:p>
+        </p:txBody>
+      </p:sp>
+      <p:sp>
+        <p:nvSpPr>
+          <p:cNvPr id="3" name="TextBox 2"/>
+          <p:cNvSpPr txBox="1"/>
+          <p:nvPr/>
+        </p:nvSpPr>
+        <p:spPr>
+          <a:xfrm>
+            <a:off x="457200" y="868680"/>
+            <a:ext cx="8229600" cy="274320"/>
+          </a:xfrm>
+          <a:prstGeom prst="rect">
+            <a:avLst/>
+          </a:prstGeom>
+          <a:noFill/>
+        </p:spPr>
+        <p:txBody>
+          <a:bodyPr wrap="square" lIns="0" rIns="0" tIns="0" bIns="0">
+            <a:spAutoFit/>
+          </a:bodyPr>
+          <a:lstStyle/>
+          <a:p>
+            <a:pPr>
+              <a:spcAft>
+                <a:spcPts val="200"/>
+              </a:spcAft>
+            </a:pPr>
+            <a:r>
+              <a:rPr sz="1200" b="0">
+                <a:solidFill>
+                  <a:srgbClr val="5B5F6E"/>
+                </a:solidFill>
+                <a:latin typeface="Calibri"/>
+              </a:rPr>
+              <a:t>Context-blind bandit vs the 7a heuristic  ·  git tag: phase7b-validated  ·  1000 seeds (escalated from 30)</a:t>
+            </a:r>
+          </a:p>
+        </p:txBody>
+      </p:sp>
+      <p:sp>
+        <p:nvSpPr>
+          <p:cNvPr id="4" name="Rounded Rectangle 3"/>
+          <p:cNvSpPr/>
+          <p:nvPr/>
+        </p:nvSpPr>
+        <p:spPr>
+          <a:xfrm>
+            <a:off x="9464040" y="365760"/>
+            <a:ext cx="2240280" cy="384048"/>
+          </a:xfrm>
+          <a:prstGeom prst="roundRect">
+            <a:avLst/>
+          </a:prstGeom>
+          <a:solidFill>
+            <a:srgbClr val="1E7A4D"/>
+          </a:solidFill>
+          <a:ln>
+            <a:noFill/>
+          </a:ln>
+        </p:spPr>
+        <p:style>
+          <a:lnRef idx="1">
+            <a:schemeClr val="accent1"/>
+          </a:lnRef>
+          <a:fillRef idx="3">
+            <a:schemeClr val="accent1"/>
+          </a:fillRef>
+          <a:effectRef idx="2">
+            <a:schemeClr val="accent1"/>
+          </a:effectRef>
+          <a:fontRef idx="minor">
+            <a:schemeClr val="lt1"/>
+          </a:fontRef>
+        </p:style>
+        <p:txBody>
+          <a:bodyPr rtlCol="0" anchor="ctr"/>
+          <a:lstStyle/>
+          <a:p>
+            <a:pPr algn="ctr"/>
+            <a:r>
+              <a:rPr sz="1050" b="1">
+                <a:solidFill>
+                  <a:srgbClr val="FFFFFF"/>
+                </a:solidFill>
+                <a:latin typeface="Calibri"/>
+              </a:rPr>
+              <a:t>GRADUATE TO 7c</a:t>
+            </a:r>
+          </a:p>
+        </p:txBody>
+      </p:sp>
+      <p:sp>
+        <p:nvSpPr>
+          <p:cNvPr id="5" name="Rectangle 4"/>
+          <p:cNvSpPr/>
+          <p:nvPr/>
+        </p:nvSpPr>
+        <p:spPr>
+          <a:xfrm>
+            <a:off x="457200" y="1417320"/>
+            <a:ext cx="292608" cy="292608"/>
+          </a:xfrm>
+          <a:prstGeom prst="rect">
+            <a:avLst/>
+          </a:prstGeom>
+          <a:solidFill>
+            <a:srgbClr val="1E2761"/>
+          </a:solidFill>
+          <a:ln>
+            <a:noFill/>
+          </a:ln>
+        </p:spPr>
+        <p:style>
+          <a:lnRef idx="1">
+            <a:schemeClr val="accent1"/>
+          </a:lnRef>
+          <a:fillRef idx="3">
+            <a:schemeClr val="accent1"/>
+          </a:fillRef>
+          <a:effectRef idx="2">
+            <a:schemeClr val="accent1"/>
+          </a:effectRef>
+          <a:fontRef idx="minor">
+            <a:schemeClr val="lt1"/>
+          </a:fontRef>
+        </p:style>
+        <p:txBody>
+          <a:bodyPr rtlCol="0" anchor="ctr"/>
+          <a:lstStyle/>
+          <a:p/>
+        </p:txBody>
+      </p:sp>
+      <p:sp>
+        <p:nvSpPr>
+          <p:cNvPr id="6" name="TextBox 5"/>
+          <p:cNvSpPr txBox="1"/>
+          <p:nvPr/>
+        </p:nvSpPr>
+        <p:spPr>
+          <a:xfrm>
+            <a:off x="868680" y="1389888"/>
+            <a:ext cx="4617720" cy="347472"/>
+          </a:xfrm>
+          <a:prstGeom prst="rect">
+            <a:avLst/>
+          </a:prstGeom>
+          <a:noFill/>
+        </p:spPr>
+        <p:txBody>
+          <a:bodyPr wrap="square" lIns="0" rIns="0" tIns="0" bIns="0">
+            <a:spAutoFit/>
+          </a:bodyPr>
+          <a:lstStyle/>
+          <a:p>
+            <a:pPr>
+              <a:spcAft>
+                <a:spcPts val="200"/>
+              </a:spcAft>
+            </a:pPr>
+            <a:r>
+              <a:rPr sz="1500" b="1">
+                <a:solidFill>
+                  <a:srgbClr val="1E2761"/>
+                </a:solidFill>
+                <a:latin typeface="Calibri"/>
+              </a:rPr>
+              <a:t>AGENTS</a:t>
+            </a:r>
+          </a:p>
+        </p:txBody>
+      </p:sp>
+      <p:sp>
+        <p:nvSpPr>
+          <p:cNvPr id="7" name="TextBox 6"/>
+          <p:cNvSpPr txBox="1"/>
+          <p:nvPr/>
+        </p:nvSpPr>
+        <p:spPr>
+          <a:xfrm>
+            <a:off x="868680" y="1828800"/>
+            <a:ext cx="4617720" cy="566928"/>
+          </a:xfrm>
+          <a:prstGeom prst="rect">
+            <a:avLst/>
+          </a:prstGeom>
+          <a:noFill/>
+        </p:spPr>
+        <p:txBody>
+          <a:bodyPr wrap="square" lIns="0" rIns="0" tIns="0" bIns="0">
+            <a:spAutoFit/>
+          </a:bodyPr>
+          <a:lstStyle/>
+          <a:p>
+            <a:pPr>
+              <a:spcAft>
+                <a:spcPts val="200"/>
+              </a:spcAft>
+            </a:pPr>
+            <a:r>
+              <a:rPr sz="1300" b="1">
+                <a:solidFill>
+                  <a:srgbClr val="1E2761"/>
+                </a:solidFill>
+                <a:latin typeface="Calibri"/>
+              </a:rPr>
+              <a:t>Buyers: </a:t>
+            </a:r>
+            <a:r>
+              <a:rPr sz="1300" b="0">
+                <a:solidFill>
+                  <a:srgbClr val="5B5F6E"/>
+                </a:solidFill>
+                <a:latin typeface="Calibri"/>
+              </a:rPr>
+              <a:t>100 — Poor 70 / Middle 20 / Rich 10, unchanged from Phase 6</a:t>
+            </a:r>
+          </a:p>
+          <a:p>
+            <a:pPr>
+              <a:spcAft>
+                <a:spcPts val="200"/>
+              </a:spcAft>
+            </a:pPr>
+            <a:r>
+              <a:rPr sz="1300" b="1">
+                <a:solidFill>
+                  <a:srgbClr val="1E2761"/>
+                </a:solidFill>
+                <a:latin typeface="Calibri"/>
+              </a:rPr>
+              <a:t>Sellers: </a:t>
+            </a:r>
+            <a:r>
+              <a:rPr sz="1300" b="0">
+                <a:solidFill>
+                  <a:srgbClr val="5B5F6E"/>
+                </a:solidFill>
+                <a:latin typeface="Calibri"/>
+              </a:rPr>
+              <a:t>5 — costs unchanged from 7a; price chosen from 5 fixed arms</a:t>
+            </a:r>
+          </a:p>
+        </p:txBody>
+      </p:sp>
+      <p:sp>
+        <p:nvSpPr>
+          <p:cNvPr id="8" name="Rectangle 7"/>
+          <p:cNvSpPr/>
+          <p:nvPr/>
+        </p:nvSpPr>
+        <p:spPr>
+          <a:xfrm>
+            <a:off x="457200" y="2651760"/>
+            <a:ext cx="292608" cy="292608"/>
+          </a:xfrm>
+          <a:prstGeom prst="rect">
+            <a:avLst/>
+          </a:prstGeom>
+          <a:solidFill>
+            <a:srgbClr val="1E2761"/>
+          </a:solidFill>
+          <a:ln>
+            <a:noFill/>
+          </a:ln>
+        </p:spPr>
+        <p:style>
+          <a:lnRef idx="1">
+            <a:schemeClr val="accent1"/>
+          </a:lnRef>
+          <a:fillRef idx="3">
+            <a:schemeClr val="accent1"/>
+          </a:fillRef>
+          <a:effectRef idx="2">
+            <a:schemeClr val="accent1"/>
+          </a:effectRef>
+          <a:fontRef idx="minor">
+            <a:schemeClr val="lt1"/>
+          </a:fontRef>
+        </p:style>
+        <p:txBody>
+          <a:bodyPr rtlCol="0" anchor="ctr"/>
+          <a:lstStyle/>
+          <a:p/>
+        </p:txBody>
+      </p:sp>
+      <p:sp>
+        <p:nvSpPr>
+          <p:cNvPr id="9" name="TextBox 8"/>
+          <p:cNvSpPr txBox="1"/>
+          <p:nvPr/>
+        </p:nvSpPr>
+        <p:spPr>
+          <a:xfrm>
+            <a:off x="868680" y="2624328"/>
+            <a:ext cx="4617720" cy="347472"/>
+          </a:xfrm>
+          <a:prstGeom prst="rect">
+            <a:avLst/>
+          </a:prstGeom>
+          <a:noFill/>
+        </p:spPr>
+        <p:txBody>
+          <a:bodyPr wrap="square" lIns="0" rIns="0" tIns="0" bIns="0">
+            <a:spAutoFit/>
+          </a:bodyPr>
+          <a:lstStyle/>
+          <a:p>
+            <a:pPr>
+              <a:spcAft>
+                <a:spcPts val="200"/>
+              </a:spcAft>
+            </a:pPr>
+            <a:r>
+              <a:rPr sz="1500" b="1">
+                <a:solidFill>
+                  <a:srgbClr val="1E2761"/>
+                </a:solidFill>
+                <a:latin typeface="Calibri"/>
+              </a:rPr>
+              <a:t>ENVIRONMENT &amp; CONTEXT</a:t>
+            </a:r>
+          </a:p>
+        </p:txBody>
+      </p:sp>
+      <p:sp>
+        <p:nvSpPr>
+          <p:cNvPr id="10" name="TextBox 9"/>
+          <p:cNvSpPr txBox="1"/>
+          <p:nvPr/>
+        </p:nvSpPr>
+        <p:spPr>
+          <a:xfrm>
+            <a:off x="868680" y="3063240"/>
+            <a:ext cx="4617720" cy="548640"/>
+          </a:xfrm>
+          <a:prstGeom prst="rect">
+            <a:avLst/>
+          </a:prstGeom>
+          <a:noFill/>
+        </p:spPr>
+        <p:txBody>
+          <a:bodyPr wrap="square" lIns="0" rIns="0" tIns="0" bIns="0">
+            <a:spAutoFit/>
+          </a:bodyPr>
+          <a:lstStyle/>
+          <a:p>
+            <a:pPr>
+              <a:spcAft>
+                <a:spcPts val="200"/>
+              </a:spcAft>
+            </a:pPr>
+            <a:r>
+              <a:rPr sz="1300" b="0">
+                <a:solidFill>
+                  <a:srgbClr val="5B5F6E"/>
+                </a:solidFill>
+                <a:latin typeface="Calibri"/>
+              </a:rPr>
+              <a:t>-  Arms {0.8, 0.9, 1, 1.1, 1.2} × initial price. Slow ceiling 2.40.</a:t>
+            </a:r>
+          </a:p>
+          <a:p>
+            <a:pPr>
+              <a:spcAft>
+                <a:spcPts val="200"/>
+              </a:spcAft>
+            </a:pPr>
+            <a:r>
+              <a:rPr sz="1300" b="0">
+                <a:solidFill>
+                  <a:srgbClr val="5B5F6E"/>
+                </a:solidFill>
+                <a:latin typeface="Calibri"/>
+              </a:rPr>
+              <a:t>-  Deliberately context-blind: no buyer-class or environment information.</a:t>
+            </a:r>
+          </a:p>
+        </p:txBody>
+      </p:sp>
+      <p:sp>
+        <p:nvSpPr>
+          <p:cNvPr id="11" name="Rectangle 10"/>
+          <p:cNvSpPr/>
+          <p:nvPr/>
+        </p:nvSpPr>
+        <p:spPr>
+          <a:xfrm>
+            <a:off x="457200" y="3886200"/>
+            <a:ext cx="292608" cy="292608"/>
+          </a:xfrm>
+          <a:prstGeom prst="rect">
+            <a:avLst/>
+          </a:prstGeom>
+          <a:solidFill>
+            <a:srgbClr val="1E2761"/>
+          </a:solidFill>
+          <a:ln>
+            <a:noFill/>
+          </a:ln>
+        </p:spPr>
+        <p:style>
+          <a:lnRef idx="1">
+            <a:schemeClr val="accent1"/>
+          </a:lnRef>
+          <a:fillRef idx="3">
+            <a:schemeClr val="accent1"/>
+          </a:fillRef>
+          <a:effectRef idx="2">
+            <a:schemeClr val="accent1"/>
+          </a:effectRef>
+          <a:fontRef idx="minor">
+            <a:schemeClr val="lt1"/>
+          </a:fontRef>
+        </p:style>
+        <p:txBody>
+          <a:bodyPr rtlCol="0" anchor="ctr"/>
+          <a:lstStyle/>
+          <a:p/>
+        </p:txBody>
+      </p:sp>
+      <p:sp>
+        <p:nvSpPr>
+          <p:cNvPr id="12" name="TextBox 11"/>
+          <p:cNvSpPr txBox="1"/>
+          <p:nvPr/>
+        </p:nvSpPr>
+        <p:spPr>
+          <a:xfrm>
+            <a:off x="868680" y="3858768"/>
+            <a:ext cx="4617720" cy="347472"/>
+          </a:xfrm>
+          <a:prstGeom prst="rect">
+            <a:avLst/>
+          </a:prstGeom>
+          <a:noFill/>
+        </p:spPr>
+        <p:txBody>
+          <a:bodyPr wrap="square" lIns="0" rIns="0" tIns="0" bIns="0">
+            <a:spAutoFit/>
+          </a:bodyPr>
+          <a:lstStyle/>
+          <a:p>
+            <a:pPr>
+              <a:spcAft>
+                <a:spcPts val="200"/>
+              </a:spcAft>
+            </a:pPr>
+            <a:r>
+              <a:rPr sz="1500" b="1">
+                <a:solidFill>
+                  <a:srgbClr val="1E2761"/>
+                </a:solidFill>
+                <a:latin typeface="Calibri"/>
+              </a:rPr>
+              <a:t>METHOD</a:t>
+            </a:r>
+          </a:p>
+        </p:txBody>
+      </p:sp>
+      <p:sp>
+        <p:nvSpPr>
+          <p:cNvPr id="13" name="TextBox 12"/>
+          <p:cNvSpPr txBox="1"/>
+          <p:nvPr/>
+        </p:nvSpPr>
+        <p:spPr>
+          <a:xfrm>
+            <a:off x="868680" y="4297680"/>
+            <a:ext cx="4617720" cy="594360"/>
+          </a:xfrm>
+          <a:prstGeom prst="rect">
+            <a:avLst/>
+          </a:prstGeom>
+          <a:noFill/>
+        </p:spPr>
+        <p:txBody>
+          <a:bodyPr wrap="square" lIns="0" rIns="0" tIns="0" bIns="0">
+            <a:spAutoFit/>
+          </a:bodyPr>
+          <a:lstStyle/>
+          <a:p>
+            <a:pPr>
+              <a:spcAft>
+                <a:spcPts val="200"/>
+              </a:spcAft>
+            </a:pPr>
+            <a:r>
+              <a:rPr sz="1300" b="0">
+                <a:solidFill>
+                  <a:srgbClr val="5B5F6E"/>
+                </a:solidFill>
+                <a:latin typeface="Calibri"/>
+              </a:rPr>
+              <a:t>Weekly profit as reward; every arm pulled once before any exploiting.</a:t>
+            </a:r>
+          </a:p>
+          <a:p>
+            <a:pPr>
+              <a:spcAft>
+                <a:spcPts val="200"/>
+              </a:spcAft>
+            </a:pPr>
+            <a:r>
+              <a:rPr sz="1300" b="0">
+                <a:solidFill>
+                  <a:srgbClr val="5B5F6E"/>
+                </a:solidFill>
+                <a:latin typeface="Calibri"/>
+              </a:rPr>
+              <a:t>Both ε-greedy and UCB1 run — the spec left the choice open.</a:t>
+            </a:r>
+          </a:p>
+        </p:txBody>
+      </p:sp>
+      <p:sp>
+        <p:nvSpPr>
+          <p:cNvPr id="14" name="Rectangle 13"/>
+          <p:cNvSpPr/>
+          <p:nvPr/>
+        </p:nvSpPr>
+        <p:spPr>
+          <a:xfrm>
+            <a:off x="457200" y="5029200"/>
+            <a:ext cx="292608" cy="292608"/>
+          </a:xfrm>
+          <a:prstGeom prst="rect">
+            <a:avLst/>
+          </a:prstGeom>
+          <a:solidFill>
+            <a:srgbClr val="1E2761"/>
+          </a:solidFill>
+          <a:ln>
+            <a:noFill/>
+          </a:ln>
+        </p:spPr>
+        <p:style>
+          <a:lnRef idx="1">
+            <a:schemeClr val="accent1"/>
+          </a:lnRef>
+          <a:fillRef idx="3">
+            <a:schemeClr val="accent1"/>
+          </a:fillRef>
+          <a:effectRef idx="2">
+            <a:schemeClr val="accent1"/>
+          </a:effectRef>
+          <a:fontRef idx="minor">
+            <a:schemeClr val="lt1"/>
+          </a:fontRef>
+        </p:style>
+        <p:txBody>
+          <a:bodyPr rtlCol="0" anchor="ctr"/>
+          <a:lstStyle/>
+          <a:p/>
+        </p:txBody>
+      </p:sp>
+      <p:sp>
+        <p:nvSpPr>
+          <p:cNvPr id="15" name="TextBox 14"/>
+          <p:cNvSpPr txBox="1"/>
+          <p:nvPr/>
+        </p:nvSpPr>
+        <p:spPr>
+          <a:xfrm>
+            <a:off x="868680" y="5001768"/>
+            <a:ext cx="4617720" cy="347472"/>
+          </a:xfrm>
+          <a:prstGeom prst="rect">
+            <a:avLst/>
+          </a:prstGeom>
+          <a:noFill/>
+        </p:spPr>
+        <p:txBody>
+          <a:bodyPr wrap="square" lIns="0" rIns="0" tIns="0" bIns="0">
+            <a:spAutoFit/>
+          </a:bodyPr>
+          <a:lstStyle/>
+          <a:p>
+            <a:pPr>
+              <a:spcAft>
+                <a:spcPts val="200"/>
+              </a:spcAft>
+            </a:pPr>
+            <a:r>
+              <a:rPr sz="1500" b="1">
+                <a:solidFill>
+                  <a:srgbClr val="1E2761"/>
+                </a:solidFill>
+                <a:latin typeface="Calibri"/>
+              </a:rPr>
+              <a:t>LITERATURE BASIS</a:t>
+            </a:r>
+          </a:p>
+        </p:txBody>
+      </p:sp>
+      <p:sp>
+        <p:nvSpPr>
+          <p:cNvPr id="16" name="TextBox 15"/>
+          <p:cNvSpPr txBox="1"/>
+          <p:nvPr/>
+        </p:nvSpPr>
+        <p:spPr>
+          <a:xfrm>
+            <a:off x="868680" y="5440680"/>
+            <a:ext cx="4617720" cy="1005840"/>
+          </a:xfrm>
+          <a:prstGeom prst="rect">
+            <a:avLst/>
+          </a:prstGeom>
+          <a:noFill/>
+        </p:spPr>
+        <p:txBody>
+          <a:bodyPr wrap="square" lIns="0" rIns="0" tIns="0" bIns="0">
+            <a:spAutoFit/>
+          </a:bodyPr>
+          <a:lstStyle/>
+          <a:p>
+            <a:pPr>
+              <a:spcAft>
+                <a:spcPts val="600"/>
+              </a:spcAft>
+            </a:pPr>
+            <a:r>
+              <a:rPr sz="1100" b="1">
+                <a:solidFill>
+                  <a:srgbClr val="1E2761"/>
+                </a:solidFill>
+                <a:latin typeface="Calibri"/>
+              </a:rPr>
+              <a:t>Robbins (1952), </a:t>
+            </a:r>
+            <a:r>
+              <a:rPr sz="1100" b="0">
+                <a:solidFill>
+                  <a:srgbClr val="5B5F6E"/>
+                </a:solidFill>
+                <a:latin typeface="Calibri"/>
+              </a:rPr>
+              <a:t>“Some Aspects of the Sequential Design of Experiments” (Bull. AMS) — origin of the multi-armed bandit problem.</a:t>
+            </a:r>
+          </a:p>
+        </p:txBody>
+      </p:sp>
+      <p:sp>
+        <p:nvSpPr>
+          <p:cNvPr id="17" name="Rectangle 16"/>
+          <p:cNvSpPr/>
+          <p:nvPr/>
+        </p:nvSpPr>
+        <p:spPr>
+          <a:xfrm>
+            <a:off x="5943600" y="1417320"/>
+            <a:ext cx="292608" cy="292608"/>
+          </a:xfrm>
+          <a:prstGeom prst="rect">
+            <a:avLst/>
+          </a:prstGeom>
+          <a:solidFill>
+            <a:srgbClr val="1E2761"/>
+          </a:solidFill>
+          <a:ln>
+            <a:noFill/>
+          </a:ln>
+        </p:spPr>
+        <p:style>
+          <a:lnRef idx="1">
+            <a:schemeClr val="accent1"/>
+          </a:lnRef>
+          <a:fillRef idx="3">
+            <a:schemeClr val="accent1"/>
+          </a:fillRef>
+          <a:effectRef idx="2">
+            <a:schemeClr val="accent1"/>
+          </a:effectRef>
+          <a:fontRef idx="minor">
+            <a:schemeClr val="lt1"/>
+          </a:fontRef>
+        </p:style>
+        <p:txBody>
+          <a:bodyPr rtlCol="0" anchor="ctr"/>
+          <a:lstStyle/>
+          <a:p/>
+        </p:txBody>
+      </p:sp>
+      <p:sp>
+        <p:nvSpPr>
+          <p:cNvPr id="18" name="TextBox 17"/>
+          <p:cNvSpPr txBox="1"/>
+          <p:nvPr/>
+        </p:nvSpPr>
+        <p:spPr>
+          <a:xfrm>
+            <a:off x="6355080" y="1389888"/>
+            <a:ext cx="5349240" cy="347472"/>
+          </a:xfrm>
+          <a:prstGeom prst="rect">
+            <a:avLst/>
+          </a:prstGeom>
+          <a:noFill/>
+        </p:spPr>
+        <p:txBody>
+          <a:bodyPr wrap="square" lIns="0" rIns="0" tIns="0" bIns="0">
+            <a:spAutoFit/>
+          </a:bodyPr>
+          <a:lstStyle/>
+          <a:p>
+            <a:pPr>
+              <a:spcAft>
+                <a:spcPts val="200"/>
+              </a:spcAft>
+            </a:pPr>
+            <a:r>
+              <a:rPr sz="1500" b="1">
+                <a:solidFill>
+                  <a:srgbClr val="1E2761"/>
+                </a:solidFill>
+                <a:latin typeface="Calibri"/>
+              </a:rPr>
+              <a:t>KEY RESULTS</a:t>
+            </a:r>
+          </a:p>
+        </p:txBody>
+      </p:sp>
+      <p:graphicFrame>
+        <p:nvGraphicFramePr>
+          <p:cNvPr id="19" name="Table 18"/>
+          <p:cNvGraphicFramePr>
+            <a:graphicFrameLocks noGrp="1"/>
+          </p:cNvGraphicFramePr>
+          <p:nvPr/>
+        </p:nvGraphicFramePr>
+        <p:xfrm>
+          <a:off x="5943600" y="1874519"/>
+          <a:ext cx="5760720" cy="1920240"/>
+        </p:xfrm>
+        <a:graphic>
+          <a:graphicData uri="http://schemas.openxmlformats.org/drawingml/2006/table">
+            <a:tbl>
+              <a:tblPr firstRow="1" bandRow="1">
+                <a:tableStyleId>{5C22544A-7EE6-4342-B048-85BDC9FD1C3A}</a:tableStyleId>
+              </a:tblPr>
+              <a:tblGrid>
+                <a:gridCol w="3200400"/>
+                <a:gridCol w="1463040"/>
+                <a:gridCol w="1097280"/>
+              </a:tblGrid>
+              <a:tr h="274320">
+                <a:tc>
+                  <a:txBody>
+                    <a:bodyPr/>
+                    <a:lstStyle/>
+                    <a:p>
+                      <a:r>
+                        <a:rPr sz="1100" b="1">
+                          <a:solidFill>
+                            <a:srgbClr val="FFFFFF"/>
+                          </a:solidFill>
+                          <a:latin typeface="Calibri"/>
+                        </a:rPr>
+                        <a:t>Metric</a:t>
+                      </a:r>
+                    </a:p>
+                  </a:txBody>
+                  <a:tcPr>
+                    <a:solidFill>
+                      <a:srgbClr val="1E2761"/>
+                    </a:solidFill>
+                  </a:tcPr>
+                </a:tc>
+                <a:tc>
+                  <a:txBody>
+                    <a:bodyPr/>
+                    <a:lstStyle/>
+                    <a:p>
+                      <a:r>
+                        <a:rPr sz="1100" b="1">
+                          <a:solidFill>
+                            <a:srgbClr val="FFFFFF"/>
+                          </a:solidFill>
+                          <a:latin typeface="Calibri"/>
+                        </a:rPr>
+                        <a:t>Value</a:t>
+                      </a:r>
+                    </a:p>
+                  </a:txBody>
+                  <a:tcPr>
+                    <a:solidFill>
+                      <a:srgbClr val="1E2761"/>
+                    </a:solidFill>
+                  </a:tcPr>
+                </a:tc>
+                <a:tc>
+                  <a:txBody>
+                    <a:bodyPr/>
+                    <a:lstStyle/>
+                    <a:p>
+                      <a:r>
+                        <a:rPr sz="1100" b="1">
+                          <a:solidFill>
+                            <a:srgbClr val="FFFFFF"/>
+                          </a:solidFill>
+                          <a:latin typeface="Calibri"/>
+                        </a:rPr>
+                        <a:t/>
+                      </a:r>
+                    </a:p>
+                  </a:txBody>
+                  <a:tcPr>
+                    <a:solidFill>
+                      <a:srgbClr val="1E2761"/>
+                    </a:solidFill>
+                  </a:tcPr>
+                </a:tc>
+              </a:tr>
+              <a:tr h="274320">
+                <a:tc>
+                  <a:txBody>
+                    <a:bodyPr/>
+                    <a:lstStyle/>
+                    <a:p>
+                      <a:r>
+                        <a:rPr sz="1100">
+                          <a:solidFill>
+                            <a:srgbClr val="1E2761"/>
+                          </a:solidFill>
+                          <a:latin typeface="Calibri"/>
+                        </a:rPr>
+                        <a:t>ε-greedy profit vs 7a</a:t>
+                      </a:r>
+                    </a:p>
+                  </a:txBody>
+                  <a:tcPr>
+                    <a:solidFill>
+                      <a:srgbClr val="FFFFFF"/>
+                    </a:solidFill>
+                  </a:tcPr>
+                </a:tc>
+                <a:tc>
+                  <a:txBody>
+                    <a:bodyPr/>
+                    <a:lstStyle/>
+                    <a:p>
+                      <a:r>
+                        <a:rPr sz="1100">
+                          <a:solidFill>
+                            <a:srgbClr val="5B5F6E"/>
+                          </a:solidFill>
+                          <a:latin typeface="Calibri"/>
+                        </a:rPr>
+                        <a:t>+6.6%</a:t>
+                      </a:r>
+                    </a:p>
+                  </a:txBody>
+                  <a:tcPr>
+                    <a:solidFill>
+                      <a:srgbClr val="FFFFFF"/>
+                    </a:solidFill>
+                  </a:tcPr>
+                </a:tc>
+                <a:tc>
+                  <a:txBody>
+                    <a:bodyPr/>
+                    <a:lstStyle/>
+                    <a:p>
+                      <a:pPr algn="ctr"/>
+                      <a:r>
+                        <a:rPr sz="1100" b="1">
+                          <a:solidFill>
+                            <a:srgbClr val="1E7A4D"/>
+                          </a:solidFill>
+                          <a:latin typeface="Calibri"/>
+                        </a:rPr>
+                        <a:t>PASS</a:t>
+                      </a:r>
+                    </a:p>
+                  </a:txBody>
+                  <a:tcPr>
+                    <a:solidFill>
+                      <a:srgbClr val="FFFFFF"/>
+                    </a:solidFill>
+                  </a:tcPr>
+                </a:tc>
+              </a:tr>
+              <a:tr h="274320">
+                <a:tc>
+                  <a:txBody>
+                    <a:bodyPr/>
+                    <a:lstStyle/>
+                    <a:p>
+                      <a:r>
+                        <a:rPr sz="1100">
+                          <a:solidFill>
+                            <a:srgbClr val="1E2761"/>
+                          </a:solidFill>
+                          <a:latin typeface="Calibri"/>
+                        </a:rPr>
+                        <a:t>  its 95% CI vs ±5% margin</a:t>
+                      </a:r>
+                    </a:p>
+                  </a:txBody>
+                  <a:tcPr>
+                    <a:solidFill>
+                      <a:srgbClr val="F7F8FC"/>
+                    </a:solidFill>
+                  </a:tcPr>
+                </a:tc>
+                <a:tc>
+                  <a:txBody>
+                    <a:bodyPr/>
+                    <a:lstStyle/>
+                    <a:p>
+                      <a:r>
+                        <a:rPr sz="1100">
+                          <a:solidFill>
+                            <a:srgbClr val="5B5F6E"/>
+                          </a:solidFill>
+                          <a:latin typeface="Calibri"/>
+                        </a:rPr>
+                        <a:t>[+5.9%, +7.4%]</a:t>
+                      </a:r>
+                    </a:p>
+                  </a:txBody>
+                  <a:tcPr>
+                    <a:solidFill>
+                      <a:srgbClr val="F7F8FC"/>
+                    </a:solidFill>
+                  </a:tcPr>
+                </a:tc>
+                <a:tc>
+                  <a:txBody>
+                    <a:bodyPr/>
+                    <a:lstStyle/>
+                    <a:p>
+                      <a:pPr algn="ctr"/>
+                      <a:r>
+                        <a:rPr sz="1100" b="1">
+                          <a:solidFill>
+                            <a:srgbClr val="1E7A4D"/>
+                          </a:solidFill>
+                          <a:latin typeface="Calibri"/>
+                        </a:rPr>
+                        <a:t>PASS</a:t>
+                      </a:r>
+                    </a:p>
+                  </a:txBody>
+                  <a:tcPr>
+                    <a:solidFill>
+                      <a:srgbClr val="F7F8FC"/>
+                    </a:solidFill>
+                  </a:tcPr>
+                </a:tc>
+              </a:tr>
+              <a:tr h="274320">
+                <a:tc>
+                  <a:txBody>
+                    <a:bodyPr/>
+                    <a:lstStyle/>
+                    <a:p>
+                      <a:r>
+                        <a:rPr sz="1100">
+                          <a:solidFill>
+                            <a:srgbClr val="1E2761"/>
+                          </a:solidFill>
+                          <a:latin typeface="Calibri"/>
+                        </a:rPr>
+                        <a:t>UCB1 profit vs 7a</a:t>
+                      </a:r>
+                    </a:p>
+                  </a:txBody>
+                  <a:tcPr>
+                    <a:solidFill>
+                      <a:srgbClr val="FFFFFF"/>
+                    </a:solidFill>
+                  </a:tcPr>
+                </a:tc>
+                <a:tc>
+                  <a:txBody>
+                    <a:bodyPr/>
+                    <a:lstStyle/>
+                    <a:p>
+                      <a:r>
+                        <a:rPr sz="1100">
+                          <a:solidFill>
+                            <a:srgbClr val="5B5F6E"/>
+                          </a:solidFill>
+                          <a:latin typeface="Calibri"/>
+                        </a:rPr>
+                        <a:t>+10.3%</a:t>
+                      </a:r>
+                    </a:p>
+                  </a:txBody>
+                  <a:tcPr>
+                    <a:solidFill>
+                      <a:srgbClr val="FFFFFF"/>
+                    </a:solidFill>
+                  </a:tcPr>
+                </a:tc>
+                <a:tc>
+                  <a:txBody>
+                    <a:bodyPr/>
+                    <a:lstStyle/>
+                    <a:p>
+                      <a:pPr algn="ctr"/>
+                      <a:r>
+                        <a:rPr sz="1100" b="1">
+                          <a:solidFill>
+                            <a:srgbClr val="1E7A4D"/>
+                          </a:solidFill>
+                          <a:latin typeface="Calibri"/>
+                        </a:rPr>
+                        <a:t>PASS</a:t>
+                      </a:r>
+                    </a:p>
+                  </a:txBody>
+                  <a:tcPr>
+                    <a:solidFill>
+                      <a:srgbClr val="FFFFFF"/>
+                    </a:solidFill>
+                  </a:tcPr>
+                </a:tc>
+              </a:tr>
+              <a:tr h="274320">
+                <a:tc>
+                  <a:txBody>
+                    <a:bodyPr/>
+                    <a:lstStyle/>
+                    <a:p>
+                      <a:r>
+                        <a:rPr sz="1100">
+                          <a:solidFill>
+                            <a:srgbClr val="1E2761"/>
+                          </a:solidFill>
+                          <a:latin typeface="Calibri"/>
+                        </a:rPr>
+                        <a:t>  its 95% CI vs ±5% margin</a:t>
+                      </a:r>
+                    </a:p>
+                  </a:txBody>
+                  <a:tcPr>
+                    <a:solidFill>
+                      <a:srgbClr val="F7F8FC"/>
+                    </a:solidFill>
+                  </a:tcPr>
+                </a:tc>
+                <a:tc>
+                  <a:txBody>
+                    <a:bodyPr/>
+                    <a:lstStyle/>
+                    <a:p>
+                      <a:r>
+                        <a:rPr sz="1100">
+                          <a:solidFill>
+                            <a:srgbClr val="5B5F6E"/>
+                          </a:solidFill>
+                          <a:latin typeface="Calibri"/>
+                        </a:rPr>
+                        <a:t>[+9.5%, +11.0%]</a:t>
+                      </a:r>
+                    </a:p>
+                  </a:txBody>
+                  <a:tcPr>
+                    <a:solidFill>
+                      <a:srgbClr val="F7F8FC"/>
+                    </a:solidFill>
+                  </a:tcPr>
+                </a:tc>
+                <a:tc>
+                  <a:txBody>
+                    <a:bodyPr/>
+                    <a:lstStyle/>
+                    <a:p>
+                      <a:pPr algn="ctr"/>
+                      <a:r>
+                        <a:rPr sz="1100" b="1">
+                          <a:solidFill>
+                            <a:srgbClr val="1E7A4D"/>
+                          </a:solidFill>
+                          <a:latin typeface="Calibri"/>
+                        </a:rPr>
+                        <a:t>PASS</a:t>
+                      </a:r>
+                    </a:p>
+                  </a:txBody>
+                  <a:tcPr>
+                    <a:solidFill>
+                      <a:srgbClr val="F7F8FC"/>
+                    </a:solidFill>
+                  </a:tcPr>
+                </a:tc>
+              </a:tr>
+              <a:tr h="274320">
+                <a:tc>
+                  <a:txBody>
+                    <a:bodyPr/>
+                    <a:lstStyle/>
+                    <a:p>
+                      <a:r>
+                        <a:rPr sz="1100">
+                          <a:solidFill>
+                            <a:srgbClr val="1E2761"/>
+                          </a:solidFill>
+                          <a:latin typeface="Calibri"/>
+                        </a:rPr>
+                        <a:t>Class shares vs 7a</a:t>
+                      </a:r>
+                    </a:p>
+                  </a:txBody>
+                  <a:tcPr>
+                    <a:solidFill>
+                      <a:srgbClr val="FFFFFF"/>
+                    </a:solidFill>
+                  </a:tcPr>
+                </a:tc>
+                <a:tc>
+                  <a:txBody>
+                    <a:bodyPr/>
+                    <a:lstStyle/>
+                    <a:p>
+                      <a:r>
+                        <a:rPr sz="1100">
+                          <a:solidFill>
+                            <a:srgbClr val="5B5F6E"/>
+                          </a:solidFill>
+                          <a:latin typeface="Calibri"/>
+                        </a:rPr>
+                        <a:t>equivalent</a:t>
+                      </a:r>
+                    </a:p>
+                  </a:txBody>
+                  <a:tcPr>
+                    <a:solidFill>
+                      <a:srgbClr val="FFFFFF"/>
+                    </a:solidFill>
+                  </a:tcPr>
+                </a:tc>
+                <a:tc>
+                  <a:txBody>
+                    <a:bodyPr/>
+                    <a:lstStyle/>
+                    <a:p>
+                      <a:pPr algn="ctr"/>
+                      <a:r>
+                        <a:rPr sz="1100" b="1">
+                          <a:solidFill>
+                            <a:srgbClr val="5B5F6E"/>
+                          </a:solidFill>
+                          <a:latin typeface="Calibri"/>
+                        </a:rPr>
+                        <a:t>—</a:t>
+                      </a:r>
+                    </a:p>
+                  </a:txBody>
+                  <a:tcPr>
+                    <a:solidFill>
+                      <a:srgbClr val="FFFFFF"/>
+                    </a:solidFill>
+                  </a:tcPr>
+                </a:tc>
+              </a:tr>
+              <a:tr h="274320">
+                <a:tc>
+                  <a:txBody>
+                    <a:bodyPr/>
+                    <a:lstStyle/>
+                    <a:p>
+                      <a:r>
+                        <a:rPr sz="1100">
+                          <a:solidFill>
+                            <a:srgbClr val="1E2761"/>
+                          </a:solidFill>
+                          <a:latin typeface="Calibri"/>
+                        </a:rPr>
+                        <a:t>Slow price reached (optimum 3.00)</a:t>
+                      </a:r>
+                    </a:p>
+                  </a:txBody>
+                  <a:tcPr>
+                    <a:solidFill>
+                      <a:srgbClr val="F7F8FC"/>
+                    </a:solidFill>
+                  </a:tcPr>
+                </a:tc>
+                <a:tc>
+                  <a:txBody>
+                    <a:bodyPr/>
+                    <a:lstStyle/>
+                    <a:p>
+                      <a:r>
+                        <a:rPr sz="1100">
+                          <a:solidFill>
+                            <a:srgbClr val="5B5F6E"/>
+                          </a:solidFill>
+                          <a:latin typeface="Calibri"/>
+                        </a:rPr>
+                        <a:t>2.37 vs ceiling 2.40</a:t>
+                      </a:r>
+                    </a:p>
+                  </a:txBody>
+                  <a:tcPr>
+                    <a:solidFill>
+                      <a:srgbClr val="F7F8FC"/>
+                    </a:solidFill>
+                  </a:tcPr>
+                </a:tc>
+                <a:tc>
+                  <a:txBody>
+                    <a:bodyPr/>
+                    <a:lstStyle/>
+                    <a:p>
+                      <a:pPr algn="ctr"/>
+                      <a:r>
+                        <a:rPr sz="1100" b="1">
+                          <a:solidFill>
+                            <a:srgbClr val="5B5F6E"/>
+                          </a:solidFill>
+                          <a:latin typeface="Calibri"/>
+                        </a:rPr>
+                        <a:t>—</a:t>
+                      </a:r>
+                    </a:p>
+                  </a:txBody>
+                  <a:tcPr>
+                    <a:solidFill>
+                      <a:srgbClr val="F7F8FC"/>
+                    </a:solidFill>
+                  </a:tcPr>
+                </a:tc>
+              </a:tr>
+            </a:tbl>
+          </a:graphicData>
+        </a:graphic>
+      </p:graphicFrame>
+      <p:sp>
+        <p:nvSpPr>
+          <p:cNvPr id="20" name="Rectangle 19"/>
+          <p:cNvSpPr/>
+          <p:nvPr/>
+        </p:nvSpPr>
+        <p:spPr>
+          <a:xfrm>
+            <a:off x="5943600" y="4023360"/>
+            <a:ext cx="292608" cy="292608"/>
+          </a:xfrm>
+          <a:prstGeom prst="rect">
+            <a:avLst/>
+          </a:prstGeom>
+          <a:solidFill>
+            <a:srgbClr val="1E2761"/>
+          </a:solidFill>
+          <a:ln>
+            <a:noFill/>
+          </a:ln>
+        </p:spPr>
+        <p:style>
+          <a:lnRef idx="1">
+            <a:schemeClr val="accent1"/>
+          </a:lnRef>
+          <a:fillRef idx="3">
+            <a:schemeClr val="accent1"/>
+          </a:fillRef>
+          <a:effectRef idx="2">
+            <a:schemeClr val="accent1"/>
+          </a:effectRef>
+          <a:fontRef idx="minor">
+            <a:schemeClr val="lt1"/>
+          </a:fontRef>
+        </p:style>
+        <p:txBody>
+          <a:bodyPr rtlCol="0" anchor="ctr"/>
+          <a:lstStyle/>
+          <a:p/>
+        </p:txBody>
+      </p:sp>
+      <p:sp>
+        <p:nvSpPr>
+          <p:cNvPr id="21" name="TextBox 20"/>
+          <p:cNvSpPr txBox="1"/>
+          <p:nvPr/>
+        </p:nvSpPr>
+        <p:spPr>
+          <a:xfrm>
+            <a:off x="6355080" y="3995928"/>
+            <a:ext cx="5349240" cy="347472"/>
+          </a:xfrm>
+          <a:prstGeom prst="rect">
+            <a:avLst/>
+          </a:prstGeom>
+          <a:noFill/>
+        </p:spPr>
+        <p:txBody>
+          <a:bodyPr wrap="square" lIns="0" rIns="0" tIns="0" bIns="0">
+            <a:spAutoFit/>
+          </a:bodyPr>
+          <a:lstStyle/>
+          <a:p>
+            <a:pPr>
+              <a:spcAft>
+                <a:spcPts val="200"/>
+              </a:spcAft>
+            </a:pPr>
+            <a:r>
+              <a:rPr sz="1500" b="1">
+                <a:solidFill>
+                  <a:srgbClr val="1E2761"/>
+                </a:solidFill>
+                <a:latin typeface="Calibri"/>
+              </a:rPr>
+              <a:t>RESEARCH QUESTION</a:t>
+            </a:r>
+          </a:p>
+        </p:txBody>
+      </p:sp>
+      <p:sp>
+        <p:nvSpPr>
+          <p:cNvPr id="22" name="Rectangle 21"/>
+          <p:cNvSpPr/>
+          <p:nvPr/>
+        </p:nvSpPr>
+        <p:spPr>
+          <a:xfrm>
+            <a:off x="5943600" y="4434840"/>
+            <a:ext cx="5760720" cy="1965960"/>
+          </a:xfrm>
+          <a:prstGeom prst="rect">
+            <a:avLst/>
+          </a:prstGeom>
+          <a:solidFill>
+            <a:srgbClr val="F7F8FC"/>
+          </a:solidFill>
+          <a:ln>
+            <a:noFill/>
+          </a:ln>
+        </p:spPr>
+        <p:style>
+          <a:lnRef idx="1">
+            <a:schemeClr val="accent1"/>
+          </a:lnRef>
+          <a:fillRef idx="3">
+            <a:schemeClr val="accent1"/>
+          </a:fillRef>
+          <a:effectRef idx="2">
+            <a:schemeClr val="accent1"/>
+          </a:effectRef>
+          <a:fontRef idx="minor">
+            <a:schemeClr val="lt1"/>
+          </a:fontRef>
+        </p:style>
+        <p:txBody>
+          <a:bodyPr rtlCol="0" anchor="ctr"/>
+          <a:lstStyle/>
+          <a:p/>
+        </p:txBody>
+      </p:sp>
+      <p:sp>
+        <p:nvSpPr>
+          <p:cNvPr id="23" name="TextBox 22"/>
+          <p:cNvSpPr txBox="1"/>
+          <p:nvPr/>
+        </p:nvSpPr>
+        <p:spPr>
+          <a:xfrm>
+            <a:off x="6217920" y="4572000"/>
+            <a:ext cx="5212080" cy="1737360"/>
+          </a:xfrm>
+          <a:prstGeom prst="rect">
+            <a:avLst/>
+          </a:prstGeom>
+          <a:noFill/>
+        </p:spPr>
+        <p:txBody>
+          <a:bodyPr wrap="square" lIns="0" rIns="0" tIns="0" bIns="0">
+            <a:spAutoFit/>
+          </a:bodyPr>
+          <a:lstStyle/>
+          <a:p>
+            <a:pPr>
+              <a:spcAft>
+                <a:spcPts val="500"/>
+              </a:spcAft>
+            </a:pPr>
+            <a:r>
+              <a:rPr sz="1000" b="0">
+                <a:solidFill>
+                  <a:srgbClr val="5B5F6E"/>
+                </a:solidFill>
+                <a:latin typeface="Calibri"/>
+              </a:rPr>
+              <a:t>Does treating price choice as a bandit problem outperform the 7a heuristic, without using any market context?</a:t>
+            </a:r>
+          </a:p>
+          <a:p>
+            <a:pPr>
+              <a:spcAft>
+                <a:spcPts val="500"/>
+              </a:spcAft>
+            </a:pPr>
+            <a:r>
+              <a:rPr sz="1000" b="1">
+                <a:solidFill>
+                  <a:srgbClr val="1E2761"/>
+                </a:solidFill>
+                <a:latin typeface="Calibri"/>
+              </a:rPr>
+              <a:t>Finding: </a:t>
+            </a:r>
+            <a:r>
+              <a:rPr sz="1000" b="0">
+                <a:solidFill>
+                  <a:srgbClr val="5B5F6E"/>
+                </a:solidFill>
+                <a:latin typeface="Calibri"/>
+              </a:rPr>
+              <a:t>Yes on profit, no on structure. Both algorithms clear the ±5% margin — ε-greedy +6.6%, UCB1 +10.3% — while every class-to-tier share stays equivalent to 7a. Myopic optimization raises the seller's own profit without changing the market.</a:t>
+            </a:r>
+          </a:p>
+          <a:p>
+            <a:pPr>
+              <a:spcAft>
+                <a:spcPts val="500"/>
+              </a:spcAft>
+            </a:pPr>
+            <a:r>
+              <a:rPr sz="1000" b="1">
+                <a:solidFill>
+                  <a:srgbClr val="1E2761"/>
+                </a:solidFill>
+                <a:latin typeface="Calibri"/>
+              </a:rPr>
+              <a:t>Caveat: </a:t>
+            </a:r>
+            <a:r>
+              <a:rPr sz="1000" b="0">
+                <a:solidFill>
+                  <a:srgbClr val="5B5F6E"/>
+                </a:solidFill>
+                <a:latin typeface="Calibri"/>
+              </a:rPr>
+              <a:t>The bandit stops at 2.37, its arm ceiling, while the profit optimum is 3.00 — exactly Poor's budget. Its binding limit is the fixed local hypothesis space, not the learning rule, and widening the arms to reach the optimum would encode the answer. What moved the result was initialization, not the algorithm: without an initial sweep ε-greedy swings 12.8/week and appears to lose to 7a.</a:t>
             </a:r>
           </a:p>
         </p:txBody>

--- a/project_tracking.pptx
+++ b/project_tracking.pptx
@@ -5500,7 +5500,7 @@
                           </a:solidFill>
                           <a:latin typeface="Calibri"/>
                         </a:rPr>
-                        <a:t>0.818</a:t>
+                        <a:t>0.816</a:t>
                       </a:r>
                     </a:p>
                   </a:txBody>
@@ -5569,7 +5569,7 @@
                           </a:solidFill>
                           <a:latin typeface="Calibri"/>
                         </a:rPr>
-                        <a:t>+0.076</a:t>
+                        <a:t>+0.088</a:t>
                       </a:r>
                     </a:p>
                   </a:txBody>
@@ -5638,7 +5638,7 @@
                           </a:solidFill>
                           <a:latin typeface="Calibri"/>
                         </a:rPr>
-                        <a:t>[+0.04, +0.11]</a:t>
+                        <a:t>[+0.05, +0.12]</a:t>
                       </a:r>
                     </a:p>
                   </a:txBody>
@@ -5707,7 +5707,7 @@
                           </a:solidFill>
                           <a:latin typeface="Calibri"/>
                         </a:rPr>
-                        <a:t>min 57</a:t>
+                        <a:t>min 58</a:t>
                       </a:r>
                     </a:p>
                   </a:txBody>
@@ -5776,7 +5776,7 @@
                           </a:solidFill>
                           <a:latin typeface="Calibri"/>
                         </a:rPr>
-                        <a:t>0.239</a:t>
+                        <a:t>0.232</a:t>
                       </a:r>
                     </a:p>
                   </a:txBody>
@@ -6063,7 +6063,7 @@
                 </a:solidFill>
                 <a:latin typeface="Calibri"/>
               </a:rPr>
-              <a:t>Yes, but mostly through budgets. Richer buyers reach the premium tier more than poorer ones (+0.076, CI excludes 0), and all 3 graded criteria pass.</a:t>
+              <a:t>Yes, but mostly through budgets. Richer buyers reach the premium tier more than poorer ones (+0.088, CI excludes 0), and all 3 graded criteria pass.</a:t>
             </a:r>
           </a:p>
           <a:p>
@@ -6088,7 +6088,7 @@
                 </a:solidFill>
                 <a:latin typeface="Calibri"/>
               </a:rPr>
-              <a:t>Only ~22% of the gap is price sensitivity: equalizing α across classes leaves +0.059 of it standing, so budget heterogeneity does the rest. Poor's 0.000 Shigh share is an affordability wall (budget 3 &lt; price 6), unchanged by any α, and is not evidence for the price-sensitivity mechanism.</a:t>
+              <a:t>Only ~27% of the gap is price sensitivity: equalizing α across classes leaves +0.065 of it standing, so budget heterogeneity does the rest. Poor's 0.000 Shigh share is an affordability wall (budget 3 &lt; price 6), unchanged by any α, and is not evidence for the price-sensitivity mechanism.</a:t>
             </a:r>
           </a:p>
         </p:txBody>
@@ -7037,7 +7037,7 @@
                           </a:solidFill>
                           <a:latin typeface="Calibri"/>
                         </a:rPr>
-                        <a:t>0.753</a:t>
+                        <a:t>0.752</a:t>
                       </a:r>
                     </a:p>
                   </a:txBody>
@@ -7106,7 +7106,7 @@
                           </a:solidFill>
                           <a:latin typeface="Calibri"/>
                         </a:rPr>
-                        <a:t>+8.67</a:t>
+                        <a:t>+8.53</a:t>
                       </a:r>
                     </a:p>
                   </a:txBody>
@@ -7175,7 +7175,7 @@
                           </a:solidFill>
                           <a:latin typeface="Calibri"/>
                         </a:rPr>
-                        <a:t>+1.97</a:t>
+                        <a:t>+2.13</a:t>
                       </a:r>
                     </a:p>
                   </a:txBody>
@@ -7531,7 +7531,7 @@
                 </a:solidFill>
                 <a:latin typeface="Calibri"/>
               </a:rPr>
-              <a:t>It changes which seller, not which tier. Near stalls outsell far ones in both tiers, while class-to-tier sorting is statistically unmoved (every shift's 95% CI contains zero, none wider than ±0.027).</a:t>
+              <a:t>It changes which seller, not which tier. Near stalls outsell far ones in both tiers, while class-to-tier sorting is statistically unmoved (every shift's 95% CI contains zero, none wider than ±0.032).</a:t>
             </a:r>
           </a:p>
           <a:p>
@@ -7556,7 +7556,7 @@
                 </a:solidFill>
                 <a:latin typeface="Calibri"/>
               </a:rPr>
-              <a:t>The null share shift is a pre-registered valid outcome, not a failure. The phase's largest effect is ungraded: participation falls -0.065 (CI [-0.074, -0.057]) because unnoticed stalls cannot be bought from. Note also that this position assignment gives Slow a tier-level visibility edge (0.850 vs 0.775), so a different assignment would move tier shares differently.</a:t>
+              <a:t>The null share shift is a pre-registered valid outcome, not a failure. The phase's largest effect is ungraded: participation falls -0.065 (CI [-0.073, -0.056]) because unnoticed stalls cannot be bought from. Note also that this position assignment gives Slow a tier-level visibility edge (0.850 vs 0.775), so a different assignment would move tier shares differently.</a:t>
             </a:r>
           </a:p>
         </p:txBody>
@@ -8505,7 +8505,7 @@
                           </a:solidFill>
                           <a:latin typeface="Calibri"/>
                         </a:rPr>
-                        <a:t>0.753</a:t>
+                        <a:t>0.752</a:t>
                       </a:r>
                     </a:p>
                   </a:txBody>
@@ -8574,7 +8574,7 @@
                           </a:solidFill>
                           <a:latin typeface="Calibri"/>
                         </a:rPr>
-                        <a:t>+1.13 to +2.93</a:t>
+                        <a:t>+1.97 to +3.37</a:t>
                       </a:r>
                     </a:p>
                   </a:txBody>
@@ -8643,7 +8643,7 @@
                           </a:solidFill>
                           <a:latin typeface="Calibri"/>
                         </a:rPr>
-                        <a:t>+1.37 vs +0.20</a:t>
+                        <a:t>+2.57 vs +0.43</a:t>
                       </a:r>
                     </a:p>
                   </a:txBody>
@@ -8712,7 +8712,7 @@
                           </a:solidFill>
                           <a:latin typeface="Calibri"/>
                         </a:rPr>
-                        <a:t>+2.87 vs +0.07</a:t>
+                        <a:t>+2.50 vs +0.43</a:t>
                       </a:r>
                     </a:p>
                   </a:txBody>
@@ -8999,7 +8999,7 @@
                 </a:solidFill>
                 <a:latin typeface="Calibri"/>
               </a:rPr>
-              <a:t>An interaction, decisively. Lift concentrates in the lowest-budget class that can afford the discounted stall — Poor at Slow (+1.37 vs +0.03 for Rich), Middle at Shigh (+2.87 vs +0.07). Both responders were predicted from the parameters before the runs.</a:t>
+              <a:t>An interaction, decisively. Lift concentrates in the lowest-budget class that can afford the discounted stall — Poor at Slow (+2.57 vs +0.37 for Rich), Middle at Shigh (+2.50 vs +0.43). Both responders were predicted from the parameters before the runs.</a:t>
             </a:r>
           </a:p>
           <a:p>
@@ -9024,7 +9024,7 @@
                 </a:solidFill>
                 <a:latin typeface="Calibri"/>
               </a:rPr>
-              <a:t>The specified 0.2 lottery cannot measure this: it fired 6 times in 30 runs, distributed [4, 0, 0, 1, 1], leaving sellers never promoted at all. Criteria are graded on paired forced arms instead; the lottery is kept as the market Phase 5 inherits. Poor's +0.00 at a promoted Shigh stall is arithmetic — 6 × 0.7 = 4.2 still exceeds its budget of 3 — not insensitivity to promotions.</a:t>
+              <a:t>The specified 0.2 lottery cannot measure this: it fired 6 times in 30 runs, distributed [4, 0, 0, 1, 1], leaving sellers never promoted at all. Criteria are graded on paired forced arms instead; the lottery is kept as the market Phase 5 inherits. Poor's +0.03 at a promoted Shigh stall is arithmetic — 6 × 0.7 = 4.2 still exceeds its budget of 3 — not insensitivity to promotions.</a:t>
             </a:r>
           </a:p>
         </p:txBody>
@@ -9973,7 +9973,7 @@
                           </a:solidFill>
                           <a:latin typeface="Calibri"/>
                         </a:rPr>
-                        <a:t>0.753</a:t>
+                        <a:t>0.739</a:t>
                       </a:r>
                     </a:p>
                   </a:txBody>
@@ -10042,7 +10042,7 @@
                           </a:solidFill>
                           <a:latin typeface="Calibri"/>
                         </a:rPr>
-                        <a:t>+0.17 pp</a:t>
+                        <a:t>-1.64 pp</a:t>
                       </a:r>
                     </a:p>
                   </a:txBody>
@@ -10111,7 +10111,7 @@
                           </a:solidFill>
                           <a:latin typeface="Calibri"/>
                         </a:rPr>
-                        <a:t>[-0.9, +1.3]</a:t>
+                        <a:t>[-2.4, -0.9]</a:t>
                       </a:r>
                     </a:p>
                   </a:txBody>
@@ -10180,7 +10180,7 @@
                           </a:solidFill>
                           <a:latin typeface="Calibri"/>
                         </a:rPr>
-                        <a:t>-2.73 pp</a:t>
+                        <a:t>+1.78 pp</a:t>
                       </a:r>
                     </a:p>
                   </a:txBody>
@@ -10249,7 +10249,7 @@
                           </a:solidFill>
                           <a:latin typeface="Calibri"/>
                         </a:rPr>
-                        <a:t>17/2677 (0.6%)</a:t>
+                        <a:t>111/2656 (4.2%)</a:t>
                       </a:r>
                     </a:p>
                   </a:txBody>
@@ -10492,7 +10492,7 @@
                 </a:solidFill>
                 <a:latin typeface="Calibri"/>
               </a:rPr>
-              <a:t>The cliff cannot fire on any buyer's first purchase at these parameters (smallest first-purchase gap is 1.0 against a 0.5 threshold), so it reached only 0.6% of purchases. That is why the effect is small here, not evidence that threshold effects are unimportant. The cliff-only arm was undecided at 30 seeds — point estimate 4.68 pp with a CI reaching 6.36 — and needed 1000 seeds to settle at -2.73 pp.</a:t>
+              <a:t>The cliff cannot fire on any buyer's first purchase at these parameters (smallest first-purchase gap is 1.0 against a 0.5 threshold), so it reached only 4.2% of purchases. That is why the effect is small here, not evidence that threshold effects are unimportant. The cliff-only arm was undecided at 30 seeds — point estimate 4.68 pp with a CI reaching 6.36 — and needed 1000 seeds to settle at +1.78 pp.</a:t>
             </a:r>
           </a:p>
         </p:txBody>
@@ -11441,7 +11441,7 @@
                           </a:solidFill>
                           <a:latin typeface="Calibri"/>
                         </a:rPr>
-                        <a:t>0.693</a:t>
+                        <a:t>0.692</a:t>
                       </a:r>
                     </a:p>
                   </a:txBody>
@@ -11717,7 +11717,7 @@
                           </a:solidFill>
                           <a:latin typeface="Calibri"/>
                         </a:rPr>
-                        <a:t>+0.037</a:t>
+                        <a:t>+0.042</a:t>
                       </a:r>
                     </a:p>
                   </a:txBody>
@@ -11786,7 +11786,7 @@
                           </a:solidFill>
                           <a:latin typeface="Calibri"/>
                         </a:rPr>
-                        <a:t>week 14</a:t>
+                        <a:t>week 15</a:t>
                       </a:r>
                     </a:p>
                   </a:txBody>
@@ -12004,7 +12004,7 @@
                 </a:solidFill>
                 <a:latin typeface="Calibri"/>
               </a:rPr>
-              <a:t>Yes. Memory raises pair stability from 0.312 to 0.420 against an identical no-loyalty control on the same seeds — +0.109, CI [+0.105, +0.112].</a:t>
+              <a:t>Yes. Memory raises pair stability from 0.316 to 0.425 against an identical no-loyalty control on the same seeds — +0.109, CI [+0.105, +0.112].</a:t>
             </a:r>
           </a:p>
           <a:p>
@@ -12029,7 +12029,7 @@
                 </a:solidFill>
                 <a:latin typeface="Calibri"/>
               </a:rPr>
-              <a:t>The control's own 0.312 is not memory: unequal seller popularity and season-long fixed preference produce most of it, so the raw level must never be read as a loyalty effect. The within-season rise (+0.037) is weak and window-sensitive — it fails at a weeks 1–2 early window, and its window was narrowed post-hoc after the pre-registered one failed. Lead with the control comparison, not the rise.</a:t>
+              <a:t>The control's own 0.316 is not memory: unequal seller popularity and season-long fixed preference produce most of it, so the raw level must never be read as a loyalty effect. The within-season rise (+0.042) is weak and window-sensitive — it fails at a weeks 1–2 early window, and its window was narrowed post-hoc after the pre-registered one failed. Lead with the control comparison, not the rise.</a:t>
             </a:r>
           </a:p>
         </p:txBody>
@@ -12978,7 +12978,7 @@
                           </a:solidFill>
                           <a:latin typeface="Calibri"/>
                         </a:rPr>
-                        <a:t>0.688</a:t>
+                        <a:t>0.679</a:t>
                       </a:r>
                     </a:p>
                   </a:txBody>
@@ -13047,7 +13047,7 @@
                           </a:solidFill>
                           <a:latin typeface="Calibri"/>
                         </a:rPr>
-                        <a:t>0.71–1.51×</a:t>
+                        <a:t>0.75–1.51×</a:t>
                       </a:r>
                     </a:p>
                   </a:txBody>
@@ -13116,7 +13116,7 @@
                           </a:solidFill>
                           <a:latin typeface="Calibri"/>
                         </a:rPr>
-                        <a:t>4.08 vs 3</a:t>
+                        <a:t>4.26 vs 3</a:t>
                       </a:r>
                     </a:p>
                   </a:txBody>
@@ -13185,7 +13185,7 @@
                           </a:solidFill>
                           <a:latin typeface="Calibri"/>
                         </a:rPr>
-                        <a:t>49.5 → 64.3</a:t>
+                        <a:t>48.4 → 60.9</a:t>
                       </a:r>
                     </a:p>
                   </a:txBody>
@@ -13254,7 +13254,7 @@
                           </a:solidFill>
                           <a:latin typeface="Calibri"/>
                         </a:rPr>
-                        <a:t>[+12.5, +17.1]</a:t>
+                        <a:t>[+10.6, +14.5]</a:t>
                       </a:r>
                     </a:p>
                   </a:txBody>
@@ -13323,7 +13323,7 @@
                           </a:solidFill>
                           <a:latin typeface="Calibri"/>
                         </a:rPr>
-                        <a:t>2.37</a:t>
+                        <a:t>2.34</a:t>
                       </a:r>
                     </a:p>
                   </a:txBody>
@@ -13541,7 +13541,7 @@
                 </a:solidFill>
                 <a:latin typeface="Calibri"/>
               </a:rPr>
-              <a:t>A non-learning heuristic already captures +14.8 profit per week over fixed pricing, CI [+12.5, +17.1], and stops at 2.37 — short of the 3.00 optimum. That gap is what 7b–7d have to win.</a:t>
+              <a:t>A non-learning heuristic already captures +12.5 profit per week over fixed pricing, CI [+10.6, +14.5], and stops at 2.34 — short of the 3.00 optimum. That gap is what 7b–7d have to win.</a:t>
             </a:r>
           </a:p>
           <a:p>
@@ -14515,7 +14515,7 @@
                           </a:solidFill>
                           <a:latin typeface="Calibri"/>
                         </a:rPr>
-                        <a:t>+6.6%</a:t>
+                        <a:t>+7.9%</a:t>
                       </a:r>
                     </a:p>
                   </a:txBody>
@@ -14584,7 +14584,7 @@
                           </a:solidFill>
                           <a:latin typeface="Calibri"/>
                         </a:rPr>
-                        <a:t>[+5.9%, +7.4%]</a:t>
+                        <a:t>[+7.2%, +8.5%]</a:t>
                       </a:r>
                     </a:p>
                   </a:txBody>
@@ -14653,7 +14653,7 @@
                           </a:solidFill>
                           <a:latin typeface="Calibri"/>
                         </a:rPr>
-                        <a:t>+10.3%</a:t>
+                        <a:t>+11.2%</a:t>
                       </a:r>
                     </a:p>
                   </a:txBody>
@@ -14722,7 +14722,7 @@
                           </a:solidFill>
                           <a:latin typeface="Calibri"/>
                         </a:rPr>
-                        <a:t>[+9.5%, +11.0%]</a:t>
+                        <a:t>[+10.5%, +11.9%]</a:t>
                       </a:r>
                     </a:p>
                   </a:txBody>
@@ -14860,7 +14860,7 @@
                           </a:solidFill>
                           <a:latin typeface="Calibri"/>
                         </a:rPr>
-                        <a:t>2.37 vs ceiling 2.40</a:t>
+                        <a:t>2.36 vs ceiling 2.40</a:t>
                       </a:r>
                     </a:p>
                   </a:txBody>
@@ -15078,7 +15078,7 @@
                 </a:solidFill>
                 <a:latin typeface="Calibri"/>
               </a:rPr>
-              <a:t>Yes on profit, no on structure. Both algorithms clear the ±5% margin — ε-greedy +6.6%, UCB1 +10.3% — while every class-to-tier share stays equivalent to 7a. Myopic optimization raises the seller's own profit without changing the market.</a:t>
+              <a:t>Yes on profit, no on structure. Both algorithms clear the ±5% margin — ε-greedy +7.9%, UCB1 +11.2% — while every class-to-tier share stays equivalent to 7a. Myopic optimization raises the seller's own profit without changing the market.</a:t>
             </a:r>
           </a:p>
           <a:p>
@@ -15103,7 +15103,7 @@
                 </a:solidFill>
                 <a:latin typeface="Calibri"/>
               </a:rPr>
-              <a:t>The bandit stops at 2.37, its arm ceiling, while the profit optimum is 3.00 — exactly Poor's budget. Its binding limit is the fixed local hypothesis space, not the learning rule, and widening the arms to reach the optimum would encode the answer. What moved the result was initialization, not the algorithm: without an initial sweep ε-greedy swings 12.8/week and appears to lose to 7a.</a:t>
+              <a:t>The bandit stops at 2.36, its arm ceiling, while the profit optimum is 3.00 — exactly Poor's budget. Its binding limit is the fixed local hypothesis space, not the learning rule, and widening the arms to reach the optimum would encode the answer. What moved the result was initialization, not the algorithm: without an initial sweep ε-greedy swings 12.8/week and appears to lose to 7a.</a:t>
             </a:r>
           </a:p>
         </p:txBody>

--- a/project_tracking.pptx
+++ b/project_tracking.pptx
@@ -13,6 +13,7 @@
     <p:sldId id="261" r:id="rId12"/>
     <p:sldId id="262" r:id="rId13"/>
     <p:sldId id="263" r:id="rId14"/>
+    <p:sldId id="264" r:id="rId15"/>
   </p:sldIdLst>
   <p:sldSz cx="12191969" cy="6858000" type="screen4x3"/>
   <p:notesSz cx="6858000" cy="9144000"/>
@@ -15104,6 +15105,1543 @@
                 <a:latin typeface="Calibri"/>
               </a:rPr>
               <a:t>The bandit stops at 2.36, its arm ceiling, while the profit optimum is 3.00 — exactly Poor's budget. Its binding limit is the fixed local hypothesis space, not the learning rule, and widening the arms to reach the optimum would encode the answer. What moved the result was initialization, not the algorithm: without an initial sweep ε-greedy swings 12.8/week and appears to lose to 7a.</a:t>
+            </a:r>
+          </a:p>
+        </p:txBody>
+      </p:sp>
+      <p:sp>
+        <p:nvSpPr>
+          <p:cNvPr id="24" name="TextBox 23"/>
+          <p:cNvSpPr txBox="1"/>
+          <p:nvPr/>
+        </p:nvSpPr>
+        <p:spPr>
+          <a:xfrm>
+            <a:off x="457200" y="6446520"/>
+            <a:ext cx="11247120" cy="274320"/>
+          </a:xfrm>
+          <a:prstGeom prst="rect">
+            <a:avLst/>
+          </a:prstGeom>
+          <a:noFill/>
+        </p:spPr>
+        <p:txBody>
+          <a:bodyPr wrap="square" lIns="0" rIns="0" tIns="0" bIns="0">
+            <a:spAutoFit/>
+          </a:bodyPr>
+          <a:lstStyle/>
+          <a:p>
+            <a:pPr>
+              <a:spcAft>
+                <a:spcPts val="200"/>
+              </a:spcAft>
+            </a:pPr>
+            <a:r>
+              <a:rPr sz="950" b="0">
+                <a:solidFill>
+                  <a:srgbClr val="5B5F6E"/>
+                </a:solidFill>
+                <a:latin typeface="Calibri"/>
+              </a:rPr>
+              <a:t>Generated automatically at phase completion  ·  Phase Completion Deliverable  ·  market-sim project</a:t>
+            </a:r>
+          </a:p>
+        </p:txBody>
+      </p:sp>
+    </p:spTree>
+  </p:cSld>
+  <p:clrMapOvr>
+    <a:masterClrMapping/>
+  </p:clrMapOvr>
+</p:sld>
+</file>
+
+<file path=ppt/slides/slide9.xml><?xml version="1.0" encoding="utf-8"?>
+<p:sld xmlns:a="http://schemas.openxmlformats.org/drawingml/2006/main" xmlns:p="http://schemas.openxmlformats.org/presentationml/2006/main" xmlns:r="http://schemas.openxmlformats.org/officeDocument/2006/relationships">
+  <p:cSld>
+    <p:spTree>
+      <p:nvGrpSpPr>
+        <p:cNvPr id="1" name=""/>
+        <p:cNvGrpSpPr/>
+        <p:nvPr/>
+      </p:nvGrpSpPr>
+      <p:grpSpPr/>
+      <p:sp>
+        <p:nvSpPr>
+          <p:cNvPr id="2" name="TextBox 1"/>
+          <p:cNvSpPr txBox="1"/>
+          <p:nvPr/>
+        </p:nvSpPr>
+        <p:spPr>
+          <a:xfrm>
+            <a:off x="457200" y="320040"/>
+            <a:ext cx="8229600" cy="548640"/>
+          </a:xfrm>
+          <a:prstGeom prst="rect">
+            <a:avLst/>
+          </a:prstGeom>
+          <a:noFill/>
+        </p:spPr>
+        <p:txBody>
+          <a:bodyPr wrap="square" lIns="0" rIns="0" tIns="0" bIns="0">
+            <a:spAutoFit/>
+          </a:bodyPr>
+          <a:lstStyle/>
+          <a:p>
+            <a:pPr>
+              <a:spcAft>
+                <a:spcPts val="200"/>
+              </a:spcAft>
+            </a:pPr>
+            <a:r>
+              <a:rPr sz="3200" b="1">
+                <a:solidFill>
+                  <a:srgbClr val="1E2761"/>
+                </a:solidFill>
+                <a:latin typeface="Cambria"/>
+              </a:rPr>
+              <a:t>Phase 7 — Seller Learning — 7d Reinforcement Learning</a:t>
+            </a:r>
+          </a:p>
+        </p:txBody>
+      </p:sp>
+      <p:sp>
+        <p:nvSpPr>
+          <p:cNvPr id="3" name="TextBox 2"/>
+          <p:cNvSpPr txBox="1"/>
+          <p:nvPr/>
+        </p:nvSpPr>
+        <p:spPr>
+          <a:xfrm>
+            <a:off x="457200" y="868680"/>
+            <a:ext cx="8229600" cy="274320"/>
+          </a:xfrm>
+          <a:prstGeom prst="rect">
+            <a:avLst/>
+          </a:prstGeom>
+          <a:noFill/>
+        </p:spPr>
+        <p:txBody>
+          <a:bodyPr wrap="square" lIns="0" rIns="0" tIns="0" bIns="0">
+            <a:spAutoFit/>
+          </a:bodyPr>
+          <a:lstStyle/>
+          <a:p>
+            <a:pPr>
+              <a:spcAft>
+                <a:spcPts val="200"/>
+              </a:spcAft>
+            </a:pPr>
+            <a:r>
+              <a:rPr sz="1200" b="0">
+                <a:solidFill>
+                  <a:srgbClr val="5B5F6E"/>
+                </a:solidFill>
+                <a:latin typeface="Calibri"/>
+              </a:rPr>
+              <a:t>Multi-week return vs the myopic bandit  ·  git tag: phase7d-validated  ·  train 1000–1119, evaluate 0–29</a:t>
+            </a:r>
+          </a:p>
+        </p:txBody>
+      </p:sp>
+      <p:sp>
+        <p:nvSpPr>
+          <p:cNvPr id="4" name="Rounded Rectangle 3"/>
+          <p:cNvSpPr/>
+          <p:nvPr/>
+        </p:nvSpPr>
+        <p:spPr>
+          <a:xfrm>
+            <a:off x="9464040" y="365760"/>
+            <a:ext cx="2240280" cy="384048"/>
+          </a:xfrm>
+          <a:prstGeom prst="roundRect">
+            <a:avLst/>
+          </a:prstGeom>
+          <a:solidFill>
+            <a:srgbClr val="C9922E"/>
+          </a:solidFill>
+          <a:ln>
+            <a:noFill/>
+          </a:ln>
+        </p:spPr>
+        <p:style>
+          <a:lnRef idx="1">
+            <a:schemeClr val="accent1"/>
+          </a:lnRef>
+          <a:fillRef idx="3">
+            <a:schemeClr val="accent1"/>
+          </a:fillRef>
+          <a:effectRef idx="2">
+            <a:schemeClr val="accent1"/>
+          </a:effectRef>
+          <a:fontRef idx="minor">
+            <a:schemeClr val="lt1"/>
+          </a:fontRef>
+        </p:style>
+        <p:txBody>
+          <a:bodyPr rtlCol="0" anchor="ctr"/>
+          <a:lstStyle/>
+          <a:p>
+            <a:pPr algn="ctr"/>
+            <a:r>
+              <a:rPr sz="1050" b="1">
+                <a:solidFill>
+                  <a:srgbClr val="FFFFFF"/>
+                </a:solidFill>
+                <a:latin typeface="Calibri"/>
+              </a:rPr>
+              <a:t>NULL — STOP AT 7b</a:t>
+            </a:r>
+          </a:p>
+        </p:txBody>
+      </p:sp>
+      <p:sp>
+        <p:nvSpPr>
+          <p:cNvPr id="5" name="Rectangle 4"/>
+          <p:cNvSpPr/>
+          <p:nvPr/>
+        </p:nvSpPr>
+        <p:spPr>
+          <a:xfrm>
+            <a:off x="457200" y="1417320"/>
+            <a:ext cx="292608" cy="292608"/>
+          </a:xfrm>
+          <a:prstGeom prst="rect">
+            <a:avLst/>
+          </a:prstGeom>
+          <a:solidFill>
+            <a:srgbClr val="1E2761"/>
+          </a:solidFill>
+          <a:ln>
+            <a:noFill/>
+          </a:ln>
+        </p:spPr>
+        <p:style>
+          <a:lnRef idx="1">
+            <a:schemeClr val="accent1"/>
+          </a:lnRef>
+          <a:fillRef idx="3">
+            <a:schemeClr val="accent1"/>
+          </a:fillRef>
+          <a:effectRef idx="2">
+            <a:schemeClr val="accent1"/>
+          </a:effectRef>
+          <a:fontRef idx="minor">
+            <a:schemeClr val="lt1"/>
+          </a:fontRef>
+        </p:style>
+        <p:txBody>
+          <a:bodyPr rtlCol="0" anchor="ctr"/>
+          <a:lstStyle/>
+          <a:p/>
+        </p:txBody>
+      </p:sp>
+      <p:sp>
+        <p:nvSpPr>
+          <p:cNvPr id="6" name="TextBox 5"/>
+          <p:cNvSpPr txBox="1"/>
+          <p:nvPr/>
+        </p:nvSpPr>
+        <p:spPr>
+          <a:xfrm>
+            <a:off x="868680" y="1389888"/>
+            <a:ext cx="4617720" cy="347472"/>
+          </a:xfrm>
+          <a:prstGeom prst="rect">
+            <a:avLst/>
+          </a:prstGeom>
+          <a:noFill/>
+        </p:spPr>
+        <p:txBody>
+          <a:bodyPr wrap="square" lIns="0" rIns="0" tIns="0" bIns="0">
+            <a:spAutoFit/>
+          </a:bodyPr>
+          <a:lstStyle/>
+          <a:p>
+            <a:pPr>
+              <a:spcAft>
+                <a:spcPts val="200"/>
+              </a:spcAft>
+            </a:pPr>
+            <a:r>
+              <a:rPr sz="1500" b="1">
+                <a:solidFill>
+                  <a:srgbClr val="1E2761"/>
+                </a:solidFill>
+                <a:latin typeface="Calibri"/>
+              </a:rPr>
+              <a:t>AGENTS</a:t>
+            </a:r>
+          </a:p>
+        </p:txBody>
+      </p:sp>
+      <p:sp>
+        <p:nvSpPr>
+          <p:cNvPr id="7" name="TextBox 6"/>
+          <p:cNvSpPr txBox="1"/>
+          <p:nvPr/>
+        </p:nvSpPr>
+        <p:spPr>
+          <a:xfrm>
+            <a:off x="868680" y="1828800"/>
+            <a:ext cx="4617720" cy="566928"/>
+          </a:xfrm>
+          <a:prstGeom prst="rect">
+            <a:avLst/>
+          </a:prstGeom>
+          <a:noFill/>
+        </p:spPr>
+        <p:txBody>
+          <a:bodyPr wrap="square" lIns="0" rIns="0" tIns="0" bIns="0">
+            <a:spAutoFit/>
+          </a:bodyPr>
+          <a:lstStyle/>
+          <a:p>
+            <a:pPr>
+              <a:spcAft>
+                <a:spcPts val="200"/>
+              </a:spcAft>
+            </a:pPr>
+            <a:r>
+              <a:rPr sz="1300" b="1">
+                <a:solidFill>
+                  <a:srgbClr val="1E2761"/>
+                </a:solidFill>
+                <a:latin typeface="Calibri"/>
+              </a:rPr>
+              <a:t>Buyers: </a:t>
+            </a:r>
+            <a:r>
+              <a:rPr sz="1300" b="0">
+                <a:solidFill>
+                  <a:srgbClr val="5B5F6E"/>
+                </a:solidFill>
+                <a:latin typeface="Calibri"/>
+              </a:rPr>
+              <a:t>100 — Poor 70 / Middle 20 / Rich 10, dispersed budgets</a:t>
+            </a:r>
+          </a:p>
+          <a:p>
+            <a:pPr>
+              <a:spcAft>
+                <a:spcPts val="200"/>
+              </a:spcAft>
+            </a:pPr>
+            <a:r>
+              <a:rPr sz="1300" b="1">
+                <a:solidFill>
+                  <a:srgbClr val="1E2761"/>
+                </a:solidFill>
+                <a:latin typeface="Calibri"/>
+              </a:rPr>
+              <a:t>Sellers: </a:t>
+            </a:r>
+            <a:r>
+              <a:rPr sz="1300" b="0">
+                <a:solidFill>
+                  <a:srgbClr val="5B5F6E"/>
+                </a:solidFill>
+                <a:latin typeface="Calibri"/>
+              </a:rPr>
+              <a:t>5 — same arms and costs as 7b, so only the horizon differs</a:t>
+            </a:r>
+          </a:p>
+        </p:txBody>
+      </p:sp>
+      <p:sp>
+        <p:nvSpPr>
+          <p:cNvPr id="8" name="Rectangle 7"/>
+          <p:cNvSpPr/>
+          <p:nvPr/>
+        </p:nvSpPr>
+        <p:spPr>
+          <a:xfrm>
+            <a:off x="457200" y="2651760"/>
+            <a:ext cx="292608" cy="292608"/>
+          </a:xfrm>
+          <a:prstGeom prst="rect">
+            <a:avLst/>
+          </a:prstGeom>
+          <a:solidFill>
+            <a:srgbClr val="1E2761"/>
+          </a:solidFill>
+          <a:ln>
+            <a:noFill/>
+          </a:ln>
+        </p:spPr>
+        <p:style>
+          <a:lnRef idx="1">
+            <a:schemeClr val="accent1"/>
+          </a:lnRef>
+          <a:fillRef idx="3">
+            <a:schemeClr val="accent1"/>
+          </a:fillRef>
+          <a:effectRef idx="2">
+            <a:schemeClr val="accent1"/>
+          </a:effectRef>
+          <a:fontRef idx="minor">
+            <a:schemeClr val="lt1"/>
+          </a:fontRef>
+        </p:style>
+        <p:txBody>
+          <a:bodyPr rtlCol="0" anchor="ctr"/>
+          <a:lstStyle/>
+          <a:p/>
+        </p:txBody>
+      </p:sp>
+      <p:sp>
+        <p:nvSpPr>
+          <p:cNvPr id="9" name="TextBox 8"/>
+          <p:cNvSpPr txBox="1"/>
+          <p:nvPr/>
+        </p:nvSpPr>
+        <p:spPr>
+          <a:xfrm>
+            <a:off x="868680" y="2624328"/>
+            <a:ext cx="4617720" cy="347472"/>
+          </a:xfrm>
+          <a:prstGeom prst="rect">
+            <a:avLst/>
+          </a:prstGeom>
+          <a:noFill/>
+        </p:spPr>
+        <p:txBody>
+          <a:bodyPr wrap="square" lIns="0" rIns="0" tIns="0" bIns="0">
+            <a:spAutoFit/>
+          </a:bodyPr>
+          <a:lstStyle/>
+          <a:p>
+            <a:pPr>
+              <a:spcAft>
+                <a:spcPts val="200"/>
+              </a:spcAft>
+            </a:pPr>
+            <a:r>
+              <a:rPr sz="1500" b="1">
+                <a:solidFill>
+                  <a:srgbClr val="1E2761"/>
+                </a:solidFill>
+                <a:latin typeface="Calibri"/>
+              </a:rPr>
+              <a:t>ENVIRONMENT &amp; CONTEXT</a:t>
+            </a:r>
+          </a:p>
+        </p:txBody>
+      </p:sp>
+      <p:sp>
+        <p:nvSpPr>
+          <p:cNvPr id="10" name="TextBox 9"/>
+          <p:cNvSpPr txBox="1"/>
+          <p:nvPr/>
+        </p:nvSpPr>
+        <p:spPr>
+          <a:xfrm>
+            <a:off x="868680" y="3063240"/>
+            <a:ext cx="4617720" cy="548640"/>
+          </a:xfrm>
+          <a:prstGeom prst="rect">
+            <a:avLst/>
+          </a:prstGeom>
+          <a:noFill/>
+        </p:spPr>
+        <p:txBody>
+          <a:bodyPr wrap="square" lIns="0" rIns="0" tIns="0" bIns="0">
+            <a:spAutoFit/>
+          </a:bodyPr>
+          <a:lstStyle/>
+          <a:p>
+            <a:pPr>
+              <a:spcAft>
+                <a:spcPts val="200"/>
+              </a:spcAft>
+            </a:pPr>
+            <a:r>
+              <a:rPr sz="1300" b="0">
+                <a:solidFill>
+                  <a:srgbClr val="5B5F6E"/>
+                </a:solidFill>
+                <a:latin typeface="Calibri"/>
+              </a:rPr>
+              <a:t>-  66 weeks. Loyalty is a 3-week capped counter that resets on a switch.</a:t>
+            </a:r>
+          </a:p>
+          <a:p>
+            <a:pPr>
+              <a:spcAft>
+                <a:spcPts val="200"/>
+              </a:spcAft>
+            </a:pPr>
+            <a:r>
+              <a:rPr sz="1300" b="0">
+                <a:solidFill>
+                  <a:srgbClr val="5B5F6E"/>
+                </a:solidFill>
+                <a:latin typeface="Calibri"/>
+              </a:rPr>
+              <a:t>-  7c skipped: no external market state predicts which arm is best.</a:t>
+            </a:r>
+          </a:p>
+        </p:txBody>
+      </p:sp>
+      <p:sp>
+        <p:nvSpPr>
+          <p:cNvPr id="11" name="Rectangle 10"/>
+          <p:cNvSpPr/>
+          <p:nvPr/>
+        </p:nvSpPr>
+        <p:spPr>
+          <a:xfrm>
+            <a:off x="457200" y="3886200"/>
+            <a:ext cx="292608" cy="292608"/>
+          </a:xfrm>
+          <a:prstGeom prst="rect">
+            <a:avLst/>
+          </a:prstGeom>
+          <a:solidFill>
+            <a:srgbClr val="1E2761"/>
+          </a:solidFill>
+          <a:ln>
+            <a:noFill/>
+          </a:ln>
+        </p:spPr>
+        <p:style>
+          <a:lnRef idx="1">
+            <a:schemeClr val="accent1"/>
+          </a:lnRef>
+          <a:fillRef idx="3">
+            <a:schemeClr val="accent1"/>
+          </a:fillRef>
+          <a:effectRef idx="2">
+            <a:schemeClr val="accent1"/>
+          </a:effectRef>
+          <a:fontRef idx="minor">
+            <a:schemeClr val="lt1"/>
+          </a:fontRef>
+        </p:style>
+        <p:txBody>
+          <a:bodyPr rtlCol="0" anchor="ctr"/>
+          <a:lstStyle/>
+          <a:p/>
+        </p:txBody>
+      </p:sp>
+      <p:sp>
+        <p:nvSpPr>
+          <p:cNvPr id="12" name="TextBox 11"/>
+          <p:cNvSpPr txBox="1"/>
+          <p:nvPr/>
+        </p:nvSpPr>
+        <p:spPr>
+          <a:xfrm>
+            <a:off x="868680" y="3858768"/>
+            <a:ext cx="4617720" cy="347472"/>
+          </a:xfrm>
+          <a:prstGeom prst="rect">
+            <a:avLst/>
+          </a:prstGeom>
+          <a:noFill/>
+        </p:spPr>
+        <p:txBody>
+          <a:bodyPr wrap="square" lIns="0" rIns="0" tIns="0" bIns="0">
+            <a:spAutoFit/>
+          </a:bodyPr>
+          <a:lstStyle/>
+          <a:p>
+            <a:pPr>
+              <a:spcAft>
+                <a:spcPts val="200"/>
+              </a:spcAft>
+            </a:pPr>
+            <a:r>
+              <a:rPr sz="1500" b="1">
+                <a:solidFill>
+                  <a:srgbClr val="1E2761"/>
+                </a:solidFill>
+                <a:latin typeface="Calibri"/>
+              </a:rPr>
+              <a:t>METHOD</a:t>
+            </a:r>
+          </a:p>
+        </p:txBody>
+      </p:sp>
+      <p:sp>
+        <p:nvSpPr>
+          <p:cNvPr id="13" name="TextBox 12"/>
+          <p:cNvSpPr txBox="1"/>
+          <p:nvPr/>
+        </p:nvSpPr>
+        <p:spPr>
+          <a:xfrm>
+            <a:off x="868680" y="4297680"/>
+            <a:ext cx="4617720" cy="594360"/>
+          </a:xfrm>
+          <a:prstGeom prst="rect">
+            <a:avLst/>
+          </a:prstGeom>
+          <a:noFill/>
+        </p:spPr>
+        <p:txBody>
+          <a:bodyPr wrap="square" lIns="0" rIns="0" tIns="0" bIns="0">
+            <a:spAutoFit/>
+          </a:bodyPr>
+          <a:lstStyle/>
+          <a:p>
+            <a:pPr>
+              <a:spcAft>
+                <a:spcPts val="200"/>
+              </a:spcAft>
+            </a:pPr>
+            <a:r>
+              <a:rPr sz="1300" b="0">
+                <a:solidFill>
+                  <a:srgbClr val="5B5F6E"/>
+                </a:solidFill>
+                <a:latin typeface="Calibri"/>
+              </a:rPr>
+              <a:t>PyTorch Q-network on a 10-week discounted return (γ = 0.9).</a:t>
+            </a:r>
+          </a:p>
+          <a:p>
+            <a:pPr>
+              <a:spcAft>
+                <a:spcPts val="200"/>
+              </a:spcAft>
+            </a:pPr>
+            <a:r>
+              <a:rPr sz="1300" b="0">
+                <a:solidFill>
+                  <a:srgbClr val="5B5F6E"/>
+                </a:solidFill>
+                <a:latin typeface="Calibri"/>
+              </a:rPr>
+              <a:t>State is the seller's own loyal count, last arm, last profit, week.</a:t>
+            </a:r>
+          </a:p>
+        </p:txBody>
+      </p:sp>
+      <p:sp>
+        <p:nvSpPr>
+          <p:cNvPr id="14" name="Rectangle 13"/>
+          <p:cNvSpPr/>
+          <p:nvPr/>
+        </p:nvSpPr>
+        <p:spPr>
+          <a:xfrm>
+            <a:off x="457200" y="5029200"/>
+            <a:ext cx="292608" cy="292608"/>
+          </a:xfrm>
+          <a:prstGeom prst="rect">
+            <a:avLst/>
+          </a:prstGeom>
+          <a:solidFill>
+            <a:srgbClr val="1E2761"/>
+          </a:solidFill>
+          <a:ln>
+            <a:noFill/>
+          </a:ln>
+        </p:spPr>
+        <p:style>
+          <a:lnRef idx="1">
+            <a:schemeClr val="accent1"/>
+          </a:lnRef>
+          <a:fillRef idx="3">
+            <a:schemeClr val="accent1"/>
+          </a:fillRef>
+          <a:effectRef idx="2">
+            <a:schemeClr val="accent1"/>
+          </a:effectRef>
+          <a:fontRef idx="minor">
+            <a:schemeClr val="lt1"/>
+          </a:fontRef>
+        </p:style>
+        <p:txBody>
+          <a:bodyPr rtlCol="0" anchor="ctr"/>
+          <a:lstStyle/>
+          <a:p/>
+        </p:txBody>
+      </p:sp>
+      <p:sp>
+        <p:nvSpPr>
+          <p:cNvPr id="15" name="TextBox 14"/>
+          <p:cNvSpPr txBox="1"/>
+          <p:nvPr/>
+        </p:nvSpPr>
+        <p:spPr>
+          <a:xfrm>
+            <a:off x="868680" y="5001768"/>
+            <a:ext cx="4617720" cy="347472"/>
+          </a:xfrm>
+          <a:prstGeom prst="rect">
+            <a:avLst/>
+          </a:prstGeom>
+          <a:noFill/>
+        </p:spPr>
+        <p:txBody>
+          <a:bodyPr wrap="square" lIns="0" rIns="0" tIns="0" bIns="0">
+            <a:spAutoFit/>
+          </a:bodyPr>
+          <a:lstStyle/>
+          <a:p>
+            <a:pPr>
+              <a:spcAft>
+                <a:spcPts val="200"/>
+              </a:spcAft>
+            </a:pPr>
+            <a:r>
+              <a:rPr sz="1500" b="1">
+                <a:solidFill>
+                  <a:srgbClr val="1E2761"/>
+                </a:solidFill>
+                <a:latin typeface="Calibri"/>
+              </a:rPr>
+              <a:t>LITERATURE BASIS</a:t>
+            </a:r>
+          </a:p>
+        </p:txBody>
+      </p:sp>
+      <p:sp>
+        <p:nvSpPr>
+          <p:cNvPr id="16" name="TextBox 15"/>
+          <p:cNvSpPr txBox="1"/>
+          <p:nvPr/>
+        </p:nvSpPr>
+        <p:spPr>
+          <a:xfrm>
+            <a:off x="868680" y="5440680"/>
+            <a:ext cx="4617720" cy="1005840"/>
+          </a:xfrm>
+          <a:prstGeom prst="rect">
+            <a:avLst/>
+          </a:prstGeom>
+          <a:noFill/>
+        </p:spPr>
+        <p:txBody>
+          <a:bodyPr wrap="square" lIns="0" rIns="0" tIns="0" bIns="0">
+            <a:spAutoFit/>
+          </a:bodyPr>
+          <a:lstStyle/>
+          <a:p>
+            <a:pPr>
+              <a:spcAft>
+                <a:spcPts val="600"/>
+              </a:spcAft>
+            </a:pPr>
+            <a:r>
+              <a:rPr sz="1100" b="1">
+                <a:solidFill>
+                  <a:srgbClr val="1E2761"/>
+                </a:solidFill>
+                <a:latin typeface="Calibri"/>
+              </a:rPr>
+              <a:t>den Boer &amp; Zwart (2015), </a:t>
+            </a:r>
+            <a:r>
+              <a:rPr sz="1100" b="0">
+                <a:solidFill>
+                  <a:srgbClr val="5B5F6E"/>
+                </a:solidFill>
+                <a:latin typeface="Calibri"/>
+              </a:rPr>
+              <a:t>“Dynamic Pricing and Learning with Finite Inventories” (Op. Res.) — learning to price under a finite-inventory constraint.</a:t>
+            </a:r>
+          </a:p>
+        </p:txBody>
+      </p:sp>
+      <p:sp>
+        <p:nvSpPr>
+          <p:cNvPr id="17" name="Rectangle 16"/>
+          <p:cNvSpPr/>
+          <p:nvPr/>
+        </p:nvSpPr>
+        <p:spPr>
+          <a:xfrm>
+            <a:off x="5943600" y="1417320"/>
+            <a:ext cx="292608" cy="292608"/>
+          </a:xfrm>
+          <a:prstGeom prst="rect">
+            <a:avLst/>
+          </a:prstGeom>
+          <a:solidFill>
+            <a:srgbClr val="1E2761"/>
+          </a:solidFill>
+          <a:ln>
+            <a:noFill/>
+          </a:ln>
+        </p:spPr>
+        <p:style>
+          <a:lnRef idx="1">
+            <a:schemeClr val="accent1"/>
+          </a:lnRef>
+          <a:fillRef idx="3">
+            <a:schemeClr val="accent1"/>
+          </a:fillRef>
+          <a:effectRef idx="2">
+            <a:schemeClr val="accent1"/>
+          </a:effectRef>
+          <a:fontRef idx="minor">
+            <a:schemeClr val="lt1"/>
+          </a:fontRef>
+        </p:style>
+        <p:txBody>
+          <a:bodyPr rtlCol="0" anchor="ctr"/>
+          <a:lstStyle/>
+          <a:p/>
+        </p:txBody>
+      </p:sp>
+      <p:sp>
+        <p:nvSpPr>
+          <p:cNvPr id="18" name="TextBox 17"/>
+          <p:cNvSpPr txBox="1"/>
+          <p:nvPr/>
+        </p:nvSpPr>
+        <p:spPr>
+          <a:xfrm>
+            <a:off x="6355080" y="1389888"/>
+            <a:ext cx="5349240" cy="347472"/>
+          </a:xfrm>
+          <a:prstGeom prst="rect">
+            <a:avLst/>
+          </a:prstGeom>
+          <a:noFill/>
+        </p:spPr>
+        <p:txBody>
+          <a:bodyPr wrap="square" lIns="0" rIns="0" tIns="0" bIns="0">
+            <a:spAutoFit/>
+          </a:bodyPr>
+          <a:lstStyle/>
+          <a:p>
+            <a:pPr>
+              <a:spcAft>
+                <a:spcPts val="200"/>
+              </a:spcAft>
+            </a:pPr>
+            <a:r>
+              <a:rPr sz="1500" b="1">
+                <a:solidFill>
+                  <a:srgbClr val="1E2761"/>
+                </a:solidFill>
+                <a:latin typeface="Calibri"/>
+              </a:rPr>
+              <a:t>KEY RESULTS</a:t>
+            </a:r>
+          </a:p>
+        </p:txBody>
+      </p:sp>
+      <p:graphicFrame>
+        <p:nvGraphicFramePr>
+          <p:cNvPr id="19" name="Table 18"/>
+          <p:cNvGraphicFramePr>
+            <a:graphicFrameLocks noGrp="1"/>
+          </p:cNvGraphicFramePr>
+          <p:nvPr/>
+        </p:nvGraphicFramePr>
+        <p:xfrm>
+          <a:off x="5943600" y="1874519"/>
+          <a:ext cx="5760720" cy="1920240"/>
+        </p:xfrm>
+        <a:graphic>
+          <a:graphicData uri="http://schemas.openxmlformats.org/drawingml/2006/table">
+            <a:tbl>
+              <a:tblPr firstRow="1" bandRow="1">
+                <a:tableStyleId>{5C22544A-7EE6-4342-B048-85BDC9FD1C3A}</a:tableStyleId>
+              </a:tblPr>
+              <a:tblGrid>
+                <a:gridCol w="3200400"/>
+                <a:gridCol w="1463040"/>
+                <a:gridCol w="1097280"/>
+              </a:tblGrid>
+              <a:tr h="274320">
+                <a:tc>
+                  <a:txBody>
+                    <a:bodyPr/>
+                    <a:lstStyle/>
+                    <a:p>
+                      <a:r>
+                        <a:rPr sz="1100" b="1">
+                          <a:solidFill>
+                            <a:srgbClr val="FFFFFF"/>
+                          </a:solidFill>
+                          <a:latin typeface="Calibri"/>
+                        </a:rPr>
+                        <a:t>Metric</a:t>
+                      </a:r>
+                    </a:p>
+                  </a:txBody>
+                  <a:tcPr>
+                    <a:solidFill>
+                      <a:srgbClr val="1E2761"/>
+                    </a:solidFill>
+                  </a:tcPr>
+                </a:tc>
+                <a:tc>
+                  <a:txBody>
+                    <a:bodyPr/>
+                    <a:lstStyle/>
+                    <a:p>
+                      <a:r>
+                        <a:rPr sz="1100" b="1">
+                          <a:solidFill>
+                            <a:srgbClr val="FFFFFF"/>
+                          </a:solidFill>
+                          <a:latin typeface="Calibri"/>
+                        </a:rPr>
+                        <a:t>Value</a:t>
+                      </a:r>
+                    </a:p>
+                  </a:txBody>
+                  <a:tcPr>
+                    <a:solidFill>
+                      <a:srgbClr val="1E2761"/>
+                    </a:solidFill>
+                  </a:tcPr>
+                </a:tc>
+                <a:tc>
+                  <a:txBody>
+                    <a:bodyPr/>
+                    <a:lstStyle/>
+                    <a:p>
+                      <a:r>
+                        <a:rPr sz="1100" b="1">
+                          <a:solidFill>
+                            <a:srgbClr val="FFFFFF"/>
+                          </a:solidFill>
+                          <a:latin typeface="Calibri"/>
+                        </a:rPr>
+                        <a:t/>
+                      </a:r>
+                    </a:p>
+                  </a:txBody>
+                  <a:tcPr>
+                    <a:solidFill>
+                      <a:srgbClr val="1E2761"/>
+                    </a:solidFill>
+                  </a:tcPr>
+                </a:tc>
+              </a:tr>
+              <a:tr h="274320">
+                <a:tc>
+                  <a:txBody>
+                    <a:bodyPr/>
+                    <a:lstStyle/>
+                    <a:p>
+                      <a:r>
+                        <a:rPr sz="1100">
+                          <a:solidFill>
+                            <a:srgbClr val="1E2761"/>
+                          </a:solidFill>
+                          <a:latin typeface="Calibri"/>
+                        </a:rPr>
+                        <a:t>7a heuristic</a:t>
+                      </a:r>
+                    </a:p>
+                  </a:txBody>
+                  <a:tcPr>
+                    <a:solidFill>
+                      <a:srgbClr val="FFFFFF"/>
+                    </a:solidFill>
+                  </a:tcPr>
+                </a:tc>
+                <a:tc>
+                  <a:txBody>
+                    <a:bodyPr/>
+                    <a:lstStyle/>
+                    <a:p>
+                      <a:r>
+                        <a:rPr sz="1100">
+                          <a:solidFill>
+                            <a:srgbClr val="5B5F6E"/>
+                          </a:solidFill>
+                          <a:latin typeface="Calibri"/>
+                        </a:rPr>
+                        <a:t>60.9/wk</a:t>
+                      </a:r>
+                    </a:p>
+                  </a:txBody>
+                  <a:tcPr>
+                    <a:solidFill>
+                      <a:srgbClr val="FFFFFF"/>
+                    </a:solidFill>
+                  </a:tcPr>
+                </a:tc>
+                <a:tc>
+                  <a:txBody>
+                    <a:bodyPr/>
+                    <a:lstStyle/>
+                    <a:p>
+                      <a:pPr algn="ctr"/>
+                      <a:r>
+                        <a:rPr sz="1100" b="1">
+                          <a:solidFill>
+                            <a:srgbClr val="5B5F6E"/>
+                          </a:solidFill>
+                          <a:latin typeface="Calibri"/>
+                        </a:rPr>
+                        <a:t>—</a:t>
+                      </a:r>
+                    </a:p>
+                  </a:txBody>
+                  <a:tcPr>
+                    <a:solidFill>
+                      <a:srgbClr val="FFFFFF"/>
+                    </a:solidFill>
+                  </a:tcPr>
+                </a:tc>
+              </a:tr>
+              <a:tr h="274320">
+                <a:tc>
+                  <a:txBody>
+                    <a:bodyPr/>
+                    <a:lstStyle/>
+                    <a:p>
+                      <a:r>
+                        <a:rPr sz="1100">
+                          <a:solidFill>
+                            <a:srgbClr val="1E2761"/>
+                          </a:solidFill>
+                          <a:latin typeface="Calibri"/>
+                        </a:rPr>
+                        <a:t>7b UCB1 bandit</a:t>
+                      </a:r>
+                    </a:p>
+                  </a:txBody>
+                  <a:tcPr>
+                    <a:solidFill>
+                      <a:srgbClr val="F7F8FC"/>
+                    </a:solidFill>
+                  </a:tcPr>
+                </a:tc>
+                <a:tc>
+                  <a:txBody>
+                    <a:bodyPr/>
+                    <a:lstStyle/>
+                    <a:p>
+                      <a:r>
+                        <a:rPr sz="1100">
+                          <a:solidFill>
+                            <a:srgbClr val="5B5F6E"/>
+                          </a:solidFill>
+                          <a:latin typeface="Calibri"/>
+                        </a:rPr>
+                        <a:t>66.0/wk</a:t>
+                      </a:r>
+                    </a:p>
+                  </a:txBody>
+                  <a:tcPr>
+                    <a:solidFill>
+                      <a:srgbClr val="F7F8FC"/>
+                    </a:solidFill>
+                  </a:tcPr>
+                </a:tc>
+                <a:tc>
+                  <a:txBody>
+                    <a:bodyPr/>
+                    <a:lstStyle/>
+                    <a:p>
+                      <a:pPr algn="ctr"/>
+                      <a:r>
+                        <a:rPr sz="1100" b="1">
+                          <a:solidFill>
+                            <a:srgbClr val="5B5F6E"/>
+                          </a:solidFill>
+                          <a:latin typeface="Calibri"/>
+                        </a:rPr>
+                        <a:t>—</a:t>
+                      </a:r>
+                    </a:p>
+                  </a:txBody>
+                  <a:tcPr>
+                    <a:solidFill>
+                      <a:srgbClr val="F7F8FC"/>
+                    </a:solidFill>
+                  </a:tcPr>
+                </a:tc>
+              </a:tr>
+              <a:tr h="274320">
+                <a:tc>
+                  <a:txBody>
+                    <a:bodyPr/>
+                    <a:lstStyle/>
+                    <a:p>
+                      <a:r>
+                        <a:rPr sz="1100">
+                          <a:solidFill>
+                            <a:srgbClr val="1E2761"/>
+                          </a:solidFill>
+                          <a:latin typeface="Calibri"/>
+                        </a:rPr>
+                        <a:t>7d RL, held-out seeds</a:t>
+                      </a:r>
+                    </a:p>
+                  </a:txBody>
+                  <a:tcPr>
+                    <a:solidFill>
+                      <a:srgbClr val="FFFFFF"/>
+                    </a:solidFill>
+                  </a:tcPr>
+                </a:tc>
+                <a:tc>
+                  <a:txBody>
+                    <a:bodyPr/>
+                    <a:lstStyle/>
+                    <a:p>
+                      <a:r>
+                        <a:rPr sz="1100">
+                          <a:solidFill>
+                            <a:srgbClr val="5B5F6E"/>
+                          </a:solidFill>
+                          <a:latin typeface="Calibri"/>
+                        </a:rPr>
+                        <a:t>65.2/wk</a:t>
+                      </a:r>
+                    </a:p>
+                  </a:txBody>
+                  <a:tcPr>
+                    <a:solidFill>
+                      <a:srgbClr val="FFFFFF"/>
+                    </a:solidFill>
+                  </a:tcPr>
+                </a:tc>
+                <a:tc>
+                  <a:txBody>
+                    <a:bodyPr/>
+                    <a:lstStyle/>
+                    <a:p>
+                      <a:pPr algn="ctr"/>
+                      <a:r>
+                        <a:rPr sz="1100" b="1">
+                          <a:solidFill>
+                            <a:srgbClr val="5B5F6E"/>
+                          </a:solidFill>
+                          <a:latin typeface="Calibri"/>
+                        </a:rPr>
+                        <a:t>—</a:t>
+                      </a:r>
+                    </a:p>
+                  </a:txBody>
+                  <a:tcPr>
+                    <a:solidFill>
+                      <a:srgbClr val="FFFFFF"/>
+                    </a:solidFill>
+                  </a:tcPr>
+                </a:tc>
+              </a:tr>
+              <a:tr h="274320">
+                <a:tc>
+                  <a:txBody>
+                    <a:bodyPr/>
+                    <a:lstStyle/>
+                    <a:p>
+                      <a:r>
+                        <a:rPr sz="1100">
+                          <a:solidFill>
+                            <a:srgbClr val="1E2761"/>
+                          </a:solidFill>
+                          <a:latin typeface="Calibri"/>
+                        </a:rPr>
+                        <a:t>RL vs bandit</a:t>
+                      </a:r>
+                    </a:p>
+                  </a:txBody>
+                  <a:tcPr>
+                    <a:solidFill>
+                      <a:srgbClr val="F7F8FC"/>
+                    </a:solidFill>
+                  </a:tcPr>
+                </a:tc>
+                <a:tc>
+                  <a:txBody>
+                    <a:bodyPr/>
+                    <a:lstStyle/>
+                    <a:p>
+                      <a:r>
+                        <a:rPr sz="1100">
+                          <a:solidFill>
+                            <a:srgbClr val="5B5F6E"/>
+                          </a:solidFill>
+                          <a:latin typeface="Calibri"/>
+                        </a:rPr>
+                        <a:t>-1.3%</a:t>
+                      </a:r>
+                    </a:p>
+                  </a:txBody>
+                  <a:tcPr>
+                    <a:solidFill>
+                      <a:srgbClr val="F7F8FC"/>
+                    </a:solidFill>
+                  </a:tcPr>
+                </a:tc>
+                <a:tc>
+                  <a:txBody>
+                    <a:bodyPr/>
+                    <a:lstStyle/>
+                    <a:p>
+                      <a:pPr algn="ctr"/>
+                      <a:r>
+                        <a:rPr sz="1100" b="1">
+                          <a:solidFill>
+                            <a:srgbClr val="1E7A4D"/>
+                          </a:solidFill>
+                          <a:latin typeface="Calibri"/>
+                        </a:rPr>
+                        <a:t>PASS</a:t>
+                      </a:r>
+                    </a:p>
+                  </a:txBody>
+                  <a:tcPr>
+                    <a:solidFill>
+                      <a:srgbClr val="F7F8FC"/>
+                    </a:solidFill>
+                  </a:tcPr>
+                </a:tc>
+              </a:tr>
+              <a:tr h="274320">
+                <a:tc>
+                  <a:txBody>
+                    <a:bodyPr/>
+                    <a:lstStyle/>
+                    <a:p>
+                      <a:r>
+                        <a:rPr sz="1100">
+                          <a:solidFill>
+                            <a:srgbClr val="1E2761"/>
+                          </a:solidFill>
+                          <a:latin typeface="Calibri"/>
+                        </a:rPr>
+                        <a:t>  its 95% CI vs ±5%</a:t>
+                      </a:r>
+                    </a:p>
+                  </a:txBody>
+                  <a:tcPr>
+                    <a:solidFill>
+                      <a:srgbClr val="FFFFFF"/>
+                    </a:solidFill>
+                  </a:tcPr>
+                </a:tc>
+                <a:tc>
+                  <a:txBody>
+                    <a:bodyPr/>
+                    <a:lstStyle/>
+                    <a:p>
+                      <a:r>
+                        <a:rPr sz="1100">
+                          <a:solidFill>
+                            <a:srgbClr val="5B5F6E"/>
+                          </a:solidFill>
+                          <a:latin typeface="Calibri"/>
+                        </a:rPr>
+                        <a:t>[-2.8%, +0.1%]</a:t>
+                      </a:r>
+                    </a:p>
+                  </a:txBody>
+                  <a:tcPr>
+                    <a:solidFill>
+                      <a:srgbClr val="FFFFFF"/>
+                    </a:solidFill>
+                  </a:tcPr>
+                </a:tc>
+                <a:tc>
+                  <a:txBody>
+                    <a:bodyPr/>
+                    <a:lstStyle/>
+                    <a:p>
+                      <a:pPr algn="ctr"/>
+                      <a:r>
+                        <a:rPr sz="1100" b="1">
+                          <a:solidFill>
+                            <a:srgbClr val="1E7A4D"/>
+                          </a:solidFill>
+                          <a:latin typeface="Calibri"/>
+                        </a:rPr>
+                        <a:t>PASS</a:t>
+                      </a:r>
+                    </a:p>
+                  </a:txBody>
+                  <a:tcPr>
+                    <a:solidFill>
+                      <a:srgbClr val="FFFFFF"/>
+                    </a:solidFill>
+                  </a:tcPr>
+                </a:tc>
+              </a:tr>
+              <a:tr h="274320">
+                <a:tc>
+                  <a:txBody>
+                    <a:bodyPr/>
+                    <a:lstStyle/>
+                    <a:p>
+                      <a:r>
+                        <a:rPr sz="1100">
+                          <a:solidFill>
+                            <a:srgbClr val="1E2761"/>
+                          </a:solidFill>
+                          <a:latin typeface="Calibri"/>
+                        </a:rPr>
+                        <a:t>Week–price correlation</a:t>
+                      </a:r>
+                    </a:p>
+                  </a:txBody>
+                  <a:tcPr>
+                    <a:solidFill>
+                      <a:srgbClr val="F7F8FC"/>
+                    </a:solidFill>
+                  </a:tcPr>
+                </a:tc>
+                <a:tc>
+                  <a:txBody>
+                    <a:bodyPr/>
+                    <a:lstStyle/>
+                    <a:p>
+                      <a:r>
+                        <a:rPr sz="1100">
+                          <a:solidFill>
+                            <a:srgbClr val="5B5F6E"/>
+                          </a:solidFill>
+                          <a:latin typeface="Calibri"/>
+                        </a:rPr>
+                        <a:t>RL 0.30 vs bandit 0.42</a:t>
+                      </a:r>
+                    </a:p>
+                  </a:txBody>
+                  <a:tcPr>
+                    <a:solidFill>
+                      <a:srgbClr val="F7F8FC"/>
+                    </a:solidFill>
+                  </a:tcPr>
+                </a:tc>
+                <a:tc>
+                  <a:txBody>
+                    <a:bodyPr/>
+                    <a:lstStyle/>
+                    <a:p>
+                      <a:pPr algn="ctr"/>
+                      <a:r>
+                        <a:rPr sz="1100" b="1">
+                          <a:solidFill>
+                            <a:srgbClr val="5B5F6E"/>
+                          </a:solidFill>
+                          <a:latin typeface="Calibri"/>
+                        </a:rPr>
+                        <a:t>—</a:t>
+                      </a:r>
+                    </a:p>
+                  </a:txBody>
+                  <a:tcPr>
+                    <a:solidFill>
+                      <a:srgbClr val="F7F8FC"/>
+                    </a:solidFill>
+                  </a:tcPr>
+                </a:tc>
+              </a:tr>
+            </a:tbl>
+          </a:graphicData>
+        </a:graphic>
+      </p:graphicFrame>
+      <p:sp>
+        <p:nvSpPr>
+          <p:cNvPr id="20" name="Rectangle 19"/>
+          <p:cNvSpPr/>
+          <p:nvPr/>
+        </p:nvSpPr>
+        <p:spPr>
+          <a:xfrm>
+            <a:off x="5943600" y="4023360"/>
+            <a:ext cx="292608" cy="292608"/>
+          </a:xfrm>
+          <a:prstGeom prst="rect">
+            <a:avLst/>
+          </a:prstGeom>
+          <a:solidFill>
+            <a:srgbClr val="1E2761"/>
+          </a:solidFill>
+          <a:ln>
+            <a:noFill/>
+          </a:ln>
+        </p:spPr>
+        <p:style>
+          <a:lnRef idx="1">
+            <a:schemeClr val="accent1"/>
+          </a:lnRef>
+          <a:fillRef idx="3">
+            <a:schemeClr val="accent1"/>
+          </a:fillRef>
+          <a:effectRef idx="2">
+            <a:schemeClr val="accent1"/>
+          </a:effectRef>
+          <a:fontRef idx="minor">
+            <a:schemeClr val="lt1"/>
+          </a:fontRef>
+        </p:style>
+        <p:txBody>
+          <a:bodyPr rtlCol="0" anchor="ctr"/>
+          <a:lstStyle/>
+          <a:p/>
+        </p:txBody>
+      </p:sp>
+      <p:sp>
+        <p:nvSpPr>
+          <p:cNvPr id="21" name="TextBox 20"/>
+          <p:cNvSpPr txBox="1"/>
+          <p:nvPr/>
+        </p:nvSpPr>
+        <p:spPr>
+          <a:xfrm>
+            <a:off x="6355080" y="3995928"/>
+            <a:ext cx="5349240" cy="347472"/>
+          </a:xfrm>
+          <a:prstGeom prst="rect">
+            <a:avLst/>
+          </a:prstGeom>
+          <a:noFill/>
+        </p:spPr>
+        <p:txBody>
+          <a:bodyPr wrap="square" lIns="0" rIns="0" tIns="0" bIns="0">
+            <a:spAutoFit/>
+          </a:bodyPr>
+          <a:lstStyle/>
+          <a:p>
+            <a:pPr>
+              <a:spcAft>
+                <a:spcPts val="200"/>
+              </a:spcAft>
+            </a:pPr>
+            <a:r>
+              <a:rPr sz="1500" b="1">
+                <a:solidFill>
+                  <a:srgbClr val="1E2761"/>
+                </a:solidFill>
+                <a:latin typeface="Calibri"/>
+              </a:rPr>
+              <a:t>RESEARCH QUESTION</a:t>
+            </a:r>
+          </a:p>
+        </p:txBody>
+      </p:sp>
+      <p:sp>
+        <p:nvSpPr>
+          <p:cNvPr id="22" name="Rectangle 21"/>
+          <p:cNvSpPr/>
+          <p:nvPr/>
+        </p:nvSpPr>
+        <p:spPr>
+          <a:xfrm>
+            <a:off x="5943600" y="4434840"/>
+            <a:ext cx="5760720" cy="1965960"/>
+          </a:xfrm>
+          <a:prstGeom prst="rect">
+            <a:avLst/>
+          </a:prstGeom>
+          <a:solidFill>
+            <a:srgbClr val="F7F8FC"/>
+          </a:solidFill>
+          <a:ln>
+            <a:noFill/>
+          </a:ln>
+        </p:spPr>
+        <p:style>
+          <a:lnRef idx="1">
+            <a:schemeClr val="accent1"/>
+          </a:lnRef>
+          <a:fillRef idx="3">
+            <a:schemeClr val="accent1"/>
+          </a:fillRef>
+          <a:effectRef idx="2">
+            <a:schemeClr val="accent1"/>
+          </a:effectRef>
+          <a:fontRef idx="minor">
+            <a:schemeClr val="lt1"/>
+          </a:fontRef>
+        </p:style>
+        <p:txBody>
+          <a:bodyPr rtlCol="0" anchor="ctr"/>
+          <a:lstStyle/>
+          <a:p/>
+        </p:txBody>
+      </p:sp>
+      <p:sp>
+        <p:nvSpPr>
+          <p:cNvPr id="23" name="TextBox 22"/>
+          <p:cNvSpPr txBox="1"/>
+          <p:nvPr/>
+        </p:nvSpPr>
+        <p:spPr>
+          <a:xfrm>
+            <a:off x="6217920" y="4572000"/>
+            <a:ext cx="5212080" cy="1737360"/>
+          </a:xfrm>
+          <a:prstGeom prst="rect">
+            <a:avLst/>
+          </a:prstGeom>
+          <a:noFill/>
+        </p:spPr>
+        <p:txBody>
+          <a:bodyPr wrap="square" lIns="0" rIns="0" tIns="0" bIns="0">
+            <a:spAutoFit/>
+          </a:bodyPr>
+          <a:lstStyle/>
+          <a:p>
+            <a:pPr>
+              <a:spcAft>
+                <a:spcPts val="500"/>
+              </a:spcAft>
+            </a:pPr>
+            <a:r>
+              <a:rPr sz="1000" b="0">
+                <a:solidFill>
+                  <a:srgbClr val="5B5F6E"/>
+                </a:solidFill>
+                <a:latin typeface="Calibri"/>
+              </a:rPr>
+              <a:t>Does optimizing cumulative multi-week reward change pricing behaviour or outcomes relative to per-week optimization?</a:t>
+            </a:r>
+          </a:p>
+          <a:p>
+            <a:pPr>
+              <a:spcAft>
+                <a:spcPts val="500"/>
+              </a:spcAft>
+            </a:pPr>
+            <a:r>
+              <a:rPr sz="1000" b="1">
+                <a:solidFill>
+                  <a:srgbClr val="1E2761"/>
+                </a:solidFill>
+                <a:latin typeface="Calibri"/>
+              </a:rPr>
+              <a:t>Finding: </a:t>
+            </a:r>
+            <a:r>
+              <a:rPr sz="1000" b="0">
+                <a:solidFill>
+                  <a:srgbClr val="5B5F6E"/>
+                </a:solidFill>
+                <a:latin typeface="Calibri"/>
+              </a:rPr>
+              <a:t>No — equivalent at -1.3%, CI [-2.8%, +0.1%]. A ten-week horizon converges to what the myopic bandit already found, and the sacrifice-then-recover trajectory is absent (2.24 early vs 2.28 late).</a:t>
+            </a:r>
+          </a:p>
+          <a:p>
+            <a:pPr>
+              <a:spcAft>
+                <a:spcPts val="500"/>
+              </a:spcAft>
+            </a:pPr>
+            <a:r>
+              <a:rPr sz="1000" b="1">
+                <a:solidFill>
+                  <a:srgbClr val="1E2761"/>
+                </a:solidFill>
+                <a:latin typeface="Calibri"/>
+              </a:rPr>
+              <a:t>Caveat: </a:t>
+            </a:r>
+            <a:r>
+              <a:rPr sz="1000" b="0">
+                <a:solidFill>
+                  <a:srgbClr val="5B5F6E"/>
+                </a:solidFill>
+                <a:latin typeface="Calibri"/>
+              </a:rPr>
+              <a:t>The pre-registered signature does not measure what it was meant to: any learner climbing toward a better arm produces a rising price path, and the *myopic* bandit scores higher on it (0.42) than the RL agent (0.30). The null itself traces to loyalty_streak_cap = 3 — a bounded counter that resets on one switch is not a stock, so there is nothing to invest in. Phase 7e tests that directly.</a:t>
             </a:r>
           </a:p>
         </p:txBody>

--- a/project_tracking.pptx
+++ b/project_tracking.pptx
@@ -14,6 +14,7 @@
     <p:sldId id="262" r:id="rId13"/>
     <p:sldId id="263" r:id="rId14"/>
     <p:sldId id="264" r:id="rId15"/>
+    <p:sldId id="265" r:id="rId16"/>
   </p:sldIdLst>
   <p:sldSz cx="12191969" cy="6858000" type="screen4x3"/>
   <p:notesSz cx="6858000" cy="9144000"/>
@@ -4528,6 +4529,1575 @@
                 <a:latin typeface="Calibri"/>
               </a:rPr>
               <a:t>Inventory cannot bind in the main run — budget 5 against price 3 caps demand at 80 units versus 480 in stock, so the inventory clause of the question is unanswered by it. A paired inventory=15 run blocked 1,101 sales on empty stock, confirming the constraint is enforced when it can bind.</a:t>
+            </a:r>
+          </a:p>
+        </p:txBody>
+      </p:sp>
+      <p:sp>
+        <p:nvSpPr>
+          <p:cNvPr id="24" name="TextBox 23"/>
+          <p:cNvSpPr txBox="1"/>
+          <p:nvPr/>
+        </p:nvSpPr>
+        <p:spPr>
+          <a:xfrm>
+            <a:off x="457200" y="6446520"/>
+            <a:ext cx="11247120" cy="274320"/>
+          </a:xfrm>
+          <a:prstGeom prst="rect">
+            <a:avLst/>
+          </a:prstGeom>
+          <a:noFill/>
+        </p:spPr>
+        <p:txBody>
+          <a:bodyPr wrap="square" lIns="0" rIns="0" tIns="0" bIns="0">
+            <a:spAutoFit/>
+          </a:bodyPr>
+          <a:lstStyle/>
+          <a:p>
+            <a:pPr>
+              <a:spcAft>
+                <a:spcPts val="200"/>
+              </a:spcAft>
+            </a:pPr>
+            <a:r>
+              <a:rPr sz="950" b="0">
+                <a:solidFill>
+                  <a:srgbClr val="5B5F6E"/>
+                </a:solidFill>
+                <a:latin typeface="Calibri"/>
+              </a:rPr>
+              <a:t>Generated automatically at phase completion  ·  Phase Completion Deliverable  ·  market-sim project</a:t>
+            </a:r>
+          </a:p>
+        </p:txBody>
+      </p:sp>
+    </p:spTree>
+  </p:cSld>
+  <p:clrMapOvr>
+    <a:masterClrMapping/>
+  </p:clrMapOvr>
+</p:sld>
+</file>
+
+<file path=ppt/slides/slide10.xml><?xml version="1.0" encoding="utf-8"?>
+<p:sld xmlns:a="http://schemas.openxmlformats.org/drawingml/2006/main" xmlns:p="http://schemas.openxmlformats.org/presentationml/2006/main" xmlns:r="http://schemas.openxmlformats.org/officeDocument/2006/relationships">
+  <p:cSld>
+    <p:spTree>
+      <p:nvGrpSpPr>
+        <p:cNvPr id="1" name=""/>
+        <p:cNvGrpSpPr/>
+        <p:nvPr/>
+      </p:nvGrpSpPr>
+      <p:grpSpPr/>
+      <p:sp>
+        <p:nvSpPr>
+          <p:cNvPr id="2" name="TextBox 1"/>
+          <p:cNvSpPr txBox="1"/>
+          <p:nvPr/>
+        </p:nvSpPr>
+        <p:spPr>
+          <a:xfrm>
+            <a:off x="457200" y="320040"/>
+            <a:ext cx="8229600" cy="548640"/>
+          </a:xfrm>
+          <a:prstGeom prst="rect">
+            <a:avLst/>
+          </a:prstGeom>
+          <a:noFill/>
+        </p:spPr>
+        <p:txBody>
+          <a:bodyPr wrap="square" lIns="0" rIns="0" tIns="0" bIns="0">
+            <a:spAutoFit/>
+          </a:bodyPr>
+          <a:lstStyle/>
+          <a:p>
+            <a:pPr>
+              <a:spcAft>
+                <a:spcPts val="200"/>
+              </a:spcAft>
+            </a:pPr>
+            <a:r>
+              <a:rPr sz="3200" b="1">
+                <a:solidFill>
+                  <a:srgbClr val="1E2761"/>
+                </a:solidFill>
+                <a:latin typeface="Cambria"/>
+              </a:rPr>
+              <a:t>Phase 7 — Mechanism Sufficiency — 7e-1 Calibration</a:t>
+            </a:r>
+          </a:p>
+        </p:txBody>
+      </p:sp>
+      <p:sp>
+        <p:nvSpPr>
+          <p:cNvPr id="3" name="TextBox 2"/>
+          <p:cNvSpPr txBox="1"/>
+          <p:nvPr/>
+        </p:nvSpPr>
+        <p:spPr>
+          <a:xfrm>
+            <a:off x="457200" y="868680"/>
+            <a:ext cx="8229600" cy="274320"/>
+          </a:xfrm>
+          <a:prstGeom prst="rect">
+            <a:avLst/>
+          </a:prstGeom>
+          <a:noFill/>
+        </p:spPr>
+        <p:txBody>
+          <a:bodyPr wrap="square" lIns="0" rIns="0" tIns="0" bIns="0">
+            <a:spAutoFit/>
+          </a:bodyPr>
+          <a:lstStyle/>
+          <a:p>
+            <a:pPr>
+              <a:spcAft>
+                <a:spcPts val="200"/>
+              </a:spcAft>
+            </a:pPr>
+            <a:r>
+              <a:rPr sz="1200" b="0">
+                <a:solidFill>
+                  <a:srgbClr val="5B5F6E"/>
+                </a:solidFill>
+                <a:latin typeface="Calibri"/>
+              </a:rPr>
+              <a:t>A second environment where loyalty is a stock  ·  git tag: phase7e1-calibrated  ·  30 seeds x 66 weeks</a:t>
+            </a:r>
+          </a:p>
+        </p:txBody>
+      </p:sp>
+      <p:sp>
+        <p:nvSpPr>
+          <p:cNvPr id="4" name="Rounded Rectangle 3"/>
+          <p:cNvSpPr/>
+          <p:nvPr/>
+        </p:nvSpPr>
+        <p:spPr>
+          <a:xfrm>
+            <a:off x="9464040" y="365760"/>
+            <a:ext cx="2240280" cy="384048"/>
+          </a:xfrm>
+          <a:prstGeom prst="roundRect">
+            <a:avLst/>
+          </a:prstGeom>
+          <a:solidFill>
+            <a:srgbClr val="1E7A4D"/>
+          </a:solidFill>
+          <a:ln>
+            <a:noFill/>
+          </a:ln>
+        </p:spPr>
+        <p:style>
+          <a:lnRef idx="1">
+            <a:schemeClr val="accent1"/>
+          </a:lnRef>
+          <a:fillRef idx="3">
+            <a:schemeClr val="accent1"/>
+          </a:fillRef>
+          <a:effectRef idx="2">
+            <a:schemeClr val="accent1"/>
+          </a:effectRef>
+          <a:fontRef idx="minor">
+            <a:schemeClr val="lt1"/>
+          </a:fontRef>
+        </p:style>
+        <p:txBody>
+          <a:bodyPr rtlCol="0" anchor="ctr"/>
+          <a:lstStyle/>
+          <a:p>
+            <a:pPr algn="ctr"/>
+            <a:r>
+              <a:rPr sz="1050" b="1">
+                <a:solidFill>
+                  <a:srgbClr val="FFFFFF"/>
+                </a:solidFill>
+                <a:latin typeface="Calibri"/>
+              </a:rPr>
+              <a:t>GATE 1 PASSED</a:t>
+            </a:r>
+          </a:p>
+        </p:txBody>
+      </p:sp>
+      <p:sp>
+        <p:nvSpPr>
+          <p:cNvPr id="5" name="Rectangle 4"/>
+          <p:cNvSpPr/>
+          <p:nvPr/>
+        </p:nvSpPr>
+        <p:spPr>
+          <a:xfrm>
+            <a:off x="457200" y="1417320"/>
+            <a:ext cx="292608" cy="292608"/>
+          </a:xfrm>
+          <a:prstGeom prst="rect">
+            <a:avLst/>
+          </a:prstGeom>
+          <a:solidFill>
+            <a:srgbClr val="1E2761"/>
+          </a:solidFill>
+          <a:ln>
+            <a:noFill/>
+          </a:ln>
+        </p:spPr>
+        <p:style>
+          <a:lnRef idx="1">
+            <a:schemeClr val="accent1"/>
+          </a:lnRef>
+          <a:fillRef idx="3">
+            <a:schemeClr val="accent1"/>
+          </a:fillRef>
+          <a:effectRef idx="2">
+            <a:schemeClr val="accent1"/>
+          </a:effectRef>
+          <a:fontRef idx="minor">
+            <a:schemeClr val="lt1"/>
+          </a:fontRef>
+        </p:style>
+        <p:txBody>
+          <a:bodyPr rtlCol="0" anchor="ctr"/>
+          <a:lstStyle/>
+          <a:p/>
+        </p:txBody>
+      </p:sp>
+      <p:sp>
+        <p:nvSpPr>
+          <p:cNvPr id="6" name="TextBox 5"/>
+          <p:cNvSpPr txBox="1"/>
+          <p:nvPr/>
+        </p:nvSpPr>
+        <p:spPr>
+          <a:xfrm>
+            <a:off x="868680" y="1389888"/>
+            <a:ext cx="4617720" cy="347472"/>
+          </a:xfrm>
+          <a:prstGeom prst="rect">
+            <a:avLst/>
+          </a:prstGeom>
+          <a:noFill/>
+        </p:spPr>
+        <p:txBody>
+          <a:bodyPr wrap="square" lIns="0" rIns="0" tIns="0" bIns="0">
+            <a:spAutoFit/>
+          </a:bodyPr>
+          <a:lstStyle/>
+          <a:p>
+            <a:pPr>
+              <a:spcAft>
+                <a:spcPts val="200"/>
+              </a:spcAft>
+            </a:pPr>
+            <a:r>
+              <a:rPr sz="1500" b="1">
+                <a:solidFill>
+                  <a:srgbClr val="1E2761"/>
+                </a:solidFill>
+                <a:latin typeface="Calibri"/>
+              </a:rPr>
+              <a:t>AGENTS</a:t>
+            </a:r>
+          </a:p>
+        </p:txBody>
+      </p:sp>
+      <p:sp>
+        <p:nvSpPr>
+          <p:cNvPr id="7" name="TextBox 6"/>
+          <p:cNvSpPr txBox="1"/>
+          <p:nvPr/>
+        </p:nvSpPr>
+        <p:spPr>
+          <a:xfrm>
+            <a:off x="868680" y="1828800"/>
+            <a:ext cx="4617720" cy="566928"/>
+          </a:xfrm>
+          <a:prstGeom prst="rect">
+            <a:avLst/>
+          </a:prstGeom>
+          <a:noFill/>
+        </p:spPr>
+        <p:txBody>
+          <a:bodyPr wrap="square" lIns="0" rIns="0" tIns="0" bIns="0">
+            <a:spAutoFit/>
+          </a:bodyPr>
+          <a:lstStyle/>
+          <a:p>
+            <a:pPr>
+              <a:spcAft>
+                <a:spcPts val="200"/>
+              </a:spcAft>
+            </a:pPr>
+            <a:r>
+              <a:rPr sz="1300" b="1">
+                <a:solidFill>
+                  <a:srgbClr val="1E2761"/>
+                </a:solidFill>
+                <a:latin typeface="Calibri"/>
+              </a:rPr>
+              <a:t>Buyers: </a:t>
+            </a:r>
+            <a:r>
+              <a:rPr sz="1300" b="0">
+                <a:solidFill>
+                  <a:srgbClr val="5B5F6E"/>
+                </a:solidFill>
+                <a:latin typeface="Calibri"/>
+              </a:rPr>
+              <a:t>100 — Poor 70 / Middle 20 / Rich 10, dispersed budgets</a:t>
+            </a:r>
+          </a:p>
+          <a:p>
+            <a:pPr>
+              <a:spcAft>
+                <a:spcPts val="200"/>
+              </a:spcAft>
+            </a:pPr>
+            <a:r>
+              <a:rPr sz="1300" b="1">
+                <a:solidFill>
+                  <a:srgbClr val="1E2761"/>
+                </a:solidFill>
+                <a:latin typeface="Calibri"/>
+              </a:rPr>
+              <a:t>Sellers: </a:t>
+            </a:r>
+            <a:r>
+              <a:rPr sz="1300" b="0">
+                <a:solidFill>
+                  <a:srgbClr val="5B5F6E"/>
+                </a:solidFill>
+                <a:latin typeface="Calibri"/>
+              </a:rPr>
+              <a:t>5 — flat prices, so this measures the mechanism not a learner</a:t>
+            </a:r>
+          </a:p>
+        </p:txBody>
+      </p:sp>
+      <p:sp>
+        <p:nvSpPr>
+          <p:cNvPr id="8" name="Rectangle 7"/>
+          <p:cNvSpPr/>
+          <p:nvPr/>
+        </p:nvSpPr>
+        <p:spPr>
+          <a:xfrm>
+            <a:off x="457200" y="2651760"/>
+            <a:ext cx="292608" cy="292608"/>
+          </a:xfrm>
+          <a:prstGeom prst="rect">
+            <a:avLst/>
+          </a:prstGeom>
+          <a:solidFill>
+            <a:srgbClr val="1E2761"/>
+          </a:solidFill>
+          <a:ln>
+            <a:noFill/>
+          </a:ln>
+        </p:spPr>
+        <p:style>
+          <a:lnRef idx="1">
+            <a:schemeClr val="accent1"/>
+          </a:lnRef>
+          <a:fillRef idx="3">
+            <a:schemeClr val="accent1"/>
+          </a:fillRef>
+          <a:effectRef idx="2">
+            <a:schemeClr val="accent1"/>
+          </a:effectRef>
+          <a:fontRef idx="minor">
+            <a:schemeClr val="lt1"/>
+          </a:fontRef>
+        </p:style>
+        <p:txBody>
+          <a:bodyPr rtlCol="0" anchor="ctr"/>
+          <a:lstStyle/>
+          <a:p/>
+        </p:txBody>
+      </p:sp>
+      <p:sp>
+        <p:nvSpPr>
+          <p:cNvPr id="9" name="TextBox 8"/>
+          <p:cNvSpPr txBox="1"/>
+          <p:nvPr/>
+        </p:nvSpPr>
+        <p:spPr>
+          <a:xfrm>
+            <a:off x="868680" y="2624328"/>
+            <a:ext cx="4617720" cy="347472"/>
+          </a:xfrm>
+          <a:prstGeom prst="rect">
+            <a:avLst/>
+          </a:prstGeom>
+          <a:noFill/>
+        </p:spPr>
+        <p:txBody>
+          <a:bodyPr wrap="square" lIns="0" rIns="0" tIns="0" bIns="0">
+            <a:spAutoFit/>
+          </a:bodyPr>
+          <a:lstStyle/>
+          <a:p>
+            <a:pPr>
+              <a:spcAft>
+                <a:spcPts val="200"/>
+              </a:spcAft>
+            </a:pPr>
+            <a:r>
+              <a:rPr sz="1500" b="1">
+                <a:solidFill>
+                  <a:srgbClr val="1E2761"/>
+                </a:solidFill>
+                <a:latin typeface="Calibri"/>
+              </a:rPr>
+              <a:t>ENVIRONMENT &amp; CONTEXT</a:t>
+            </a:r>
+          </a:p>
+        </p:txBody>
+      </p:sp>
+      <p:sp>
+        <p:nvSpPr>
+          <p:cNvPr id="10" name="TextBox 9"/>
+          <p:cNvSpPr txBox="1"/>
+          <p:nvPr/>
+        </p:nvSpPr>
+        <p:spPr>
+          <a:xfrm>
+            <a:off x="868680" y="3063240"/>
+            <a:ext cx="4617720" cy="548640"/>
+          </a:xfrm>
+          <a:prstGeom prst="rect">
+            <a:avLst/>
+          </a:prstGeom>
+          <a:noFill/>
+        </p:spPr>
+        <p:txBody>
+          <a:bodyPr wrap="square" lIns="0" rIns="0" tIns="0" bIns="0">
+            <a:spAutoFit/>
+          </a:bodyPr>
+          <a:lstStyle/>
+          <a:p>
+            <a:pPr>
+              <a:spcAft>
+                <a:spcPts val="200"/>
+              </a:spcAft>
+            </a:pPr>
+            <a:r>
+              <a:rPr sz="1300" b="0">
+                <a:solidFill>
+                  <a:srgbClr val="5B5F6E"/>
+                </a:solidFill>
+                <a:latin typeface="Calibri"/>
+              </a:rPr>
+              <a:t>-  Loyalty is a per-pair stock: decays at rho, saturates through tanh,</a:t>
+            </a:r>
+          </a:p>
+          <a:p>
+            <a:pPr>
+              <a:spcAft>
+                <a:spcPts val="200"/>
+              </a:spcAft>
+            </a:pPr>
+            <a:r>
+              <a:rPr sz="1300" b="0">
+                <a:solidFill>
+                  <a:srgbClr val="5B5F6E"/>
+                </a:solidFill>
+                <a:latin typeface="Calibri"/>
+              </a:rPr>
+              <a:t>   and accrues more from a cheaper purchase. It never resets to zero.</a:t>
+            </a:r>
+          </a:p>
+          <a:p>
+            <a:pPr>
+              <a:spcAft>
+                <a:spcPts val="200"/>
+              </a:spcAft>
+            </a:pPr>
+            <a:r>
+              <a:rPr sz="1300" b="0">
+                <a:solidFill>
+                  <a:srgbClr val="5B5F6E"/>
+                </a:solidFill>
+                <a:latin typeface="Calibri"/>
+              </a:rPr>
+              <a:t>-  The base environment's counter runs alongside as the reference cell.</a:t>
+            </a:r>
+          </a:p>
+        </p:txBody>
+      </p:sp>
+      <p:sp>
+        <p:nvSpPr>
+          <p:cNvPr id="11" name="Rectangle 10"/>
+          <p:cNvSpPr/>
+          <p:nvPr/>
+        </p:nvSpPr>
+        <p:spPr>
+          <a:xfrm>
+            <a:off x="457200" y="3886200"/>
+            <a:ext cx="292608" cy="292608"/>
+          </a:xfrm>
+          <a:prstGeom prst="rect">
+            <a:avLst/>
+          </a:prstGeom>
+          <a:solidFill>
+            <a:srgbClr val="1E2761"/>
+          </a:solidFill>
+          <a:ln>
+            <a:noFill/>
+          </a:ln>
+        </p:spPr>
+        <p:style>
+          <a:lnRef idx="1">
+            <a:schemeClr val="accent1"/>
+          </a:lnRef>
+          <a:fillRef idx="3">
+            <a:schemeClr val="accent1"/>
+          </a:fillRef>
+          <a:effectRef idx="2">
+            <a:schemeClr val="accent1"/>
+          </a:effectRef>
+          <a:fontRef idx="minor">
+            <a:schemeClr val="lt1"/>
+          </a:fontRef>
+        </p:style>
+        <p:txBody>
+          <a:bodyPr rtlCol="0" anchor="ctr"/>
+          <a:lstStyle/>
+          <a:p/>
+        </p:txBody>
+      </p:sp>
+      <p:sp>
+        <p:nvSpPr>
+          <p:cNvPr id="12" name="TextBox 11"/>
+          <p:cNvSpPr txBox="1"/>
+          <p:nvPr/>
+        </p:nvSpPr>
+        <p:spPr>
+          <a:xfrm>
+            <a:off x="868680" y="3858768"/>
+            <a:ext cx="4617720" cy="347472"/>
+          </a:xfrm>
+          <a:prstGeom prst="rect">
+            <a:avLst/>
+          </a:prstGeom>
+          <a:noFill/>
+        </p:spPr>
+        <p:txBody>
+          <a:bodyPr wrap="square" lIns="0" rIns="0" tIns="0" bIns="0">
+            <a:spAutoFit/>
+          </a:bodyPr>
+          <a:lstStyle/>
+          <a:p>
+            <a:pPr>
+              <a:spcAft>
+                <a:spcPts val="200"/>
+              </a:spcAft>
+            </a:pPr>
+            <a:r>
+              <a:rPr sz="1500" b="1">
+                <a:solidFill>
+                  <a:srgbClr val="1E2761"/>
+                </a:solidFill>
+                <a:latin typeface="Calibri"/>
+              </a:rPr>
+              <a:t>METHOD</a:t>
+            </a:r>
+          </a:p>
+        </p:txBody>
+      </p:sp>
+      <p:sp>
+        <p:nvSpPr>
+          <p:cNvPr id="13" name="TextBox 12"/>
+          <p:cNvSpPr txBox="1"/>
+          <p:nvPr/>
+        </p:nvSpPr>
+        <p:spPr>
+          <a:xfrm>
+            <a:off x="868680" y="4297680"/>
+            <a:ext cx="4617720" cy="594360"/>
+          </a:xfrm>
+          <a:prstGeom prst="rect">
+            <a:avLst/>
+          </a:prstGeom>
+          <a:noFill/>
+        </p:spPr>
+        <p:txBody>
+          <a:bodyPr wrap="square" lIns="0" rIns="0" tIns="0" bIns="0">
+            <a:spAutoFit/>
+          </a:bodyPr>
+          <a:lstStyle/>
+          <a:p>
+            <a:pPr>
+              <a:spcAft>
+                <a:spcPts val="200"/>
+              </a:spcAft>
+            </a:pPr>
+            <a:r>
+              <a:rPr sz="1300" b="0">
+                <a:solidFill>
+                  <a:srgbClr val="5B5F6E"/>
+                </a:solidFill>
+                <a:latin typeface="Calibri"/>
+              </a:rPr>
+              <a:t>L_max is solved per cell so incumbency advantage matches the counter's,</a:t>
+            </a:r>
+          </a:p>
+          <a:p>
+            <a:pPr>
+              <a:spcAft>
+                <a:spcPts val="200"/>
+              </a:spcAft>
+            </a:pPr>
+            <a:r>
+              <a:rPr sz="1300" b="0">
+                <a:solidFill>
+                  <a:srgbClr val="5B5F6E"/>
+                </a:solidFill>
+                <a:latin typeface="Calibri"/>
+              </a:rPr>
+              <a:t>then rho is swept with beta holding the steady-state stock fixed.</a:t>
+            </a:r>
+          </a:p>
+          <a:p>
+            <a:pPr>
+              <a:spcAft>
+                <a:spcPts val="200"/>
+              </a:spcAft>
+            </a:pPr>
+            <a:r>
+              <a:rPr sz="1300" b="0">
+                <a:solidFill>
+                  <a:srgbClr val="5B5F6E"/>
+                </a:solidFill>
+                <a:latin typeface="Calibri"/>
+              </a:rPr>
+              <a:t>Gate: excess repeat rate at lag 8 vs the memory-OFF twin, same seeds.</a:t>
+            </a:r>
+          </a:p>
+        </p:txBody>
+      </p:sp>
+      <p:sp>
+        <p:nvSpPr>
+          <p:cNvPr id="14" name="Rectangle 13"/>
+          <p:cNvSpPr/>
+          <p:nvPr/>
+        </p:nvSpPr>
+        <p:spPr>
+          <a:xfrm>
+            <a:off x="457200" y="5029200"/>
+            <a:ext cx="292608" cy="292608"/>
+          </a:xfrm>
+          <a:prstGeom prst="rect">
+            <a:avLst/>
+          </a:prstGeom>
+          <a:solidFill>
+            <a:srgbClr val="1E2761"/>
+          </a:solidFill>
+          <a:ln>
+            <a:noFill/>
+          </a:ln>
+        </p:spPr>
+        <p:style>
+          <a:lnRef idx="1">
+            <a:schemeClr val="accent1"/>
+          </a:lnRef>
+          <a:fillRef idx="3">
+            <a:schemeClr val="accent1"/>
+          </a:fillRef>
+          <a:effectRef idx="2">
+            <a:schemeClr val="accent1"/>
+          </a:effectRef>
+          <a:fontRef idx="minor">
+            <a:schemeClr val="lt1"/>
+          </a:fontRef>
+        </p:style>
+        <p:txBody>
+          <a:bodyPr rtlCol="0" anchor="ctr"/>
+          <a:lstStyle/>
+          <a:p/>
+        </p:txBody>
+      </p:sp>
+      <p:sp>
+        <p:nvSpPr>
+          <p:cNvPr id="15" name="TextBox 14"/>
+          <p:cNvSpPr txBox="1"/>
+          <p:nvPr/>
+        </p:nvSpPr>
+        <p:spPr>
+          <a:xfrm>
+            <a:off x="868680" y="5001768"/>
+            <a:ext cx="4617720" cy="347472"/>
+          </a:xfrm>
+          <a:prstGeom prst="rect">
+            <a:avLst/>
+          </a:prstGeom>
+          <a:noFill/>
+        </p:spPr>
+        <p:txBody>
+          <a:bodyPr wrap="square" lIns="0" rIns="0" tIns="0" bIns="0">
+            <a:spAutoFit/>
+          </a:bodyPr>
+          <a:lstStyle/>
+          <a:p>
+            <a:pPr>
+              <a:spcAft>
+                <a:spcPts val="200"/>
+              </a:spcAft>
+            </a:pPr>
+            <a:r>
+              <a:rPr sz="1500" b="1">
+                <a:solidFill>
+                  <a:srgbClr val="1E2761"/>
+                </a:solidFill>
+                <a:latin typeface="Calibri"/>
+              </a:rPr>
+              <a:t>LITERATURE BASIS</a:t>
+            </a:r>
+          </a:p>
+        </p:txBody>
+      </p:sp>
+      <p:sp>
+        <p:nvSpPr>
+          <p:cNvPr id="16" name="TextBox 15"/>
+          <p:cNvSpPr txBox="1"/>
+          <p:nvPr/>
+        </p:nvSpPr>
+        <p:spPr>
+          <a:xfrm>
+            <a:off x="868680" y="5440680"/>
+            <a:ext cx="4617720" cy="1005840"/>
+          </a:xfrm>
+          <a:prstGeom prst="rect">
+            <a:avLst/>
+          </a:prstGeom>
+          <a:noFill/>
+        </p:spPr>
+        <p:txBody>
+          <a:bodyPr wrap="square" lIns="0" rIns="0" tIns="0" bIns="0">
+            <a:spAutoFit/>
+          </a:bodyPr>
+          <a:lstStyle/>
+          <a:p>
+            <a:pPr>
+              <a:spcAft>
+                <a:spcPts val="600"/>
+              </a:spcAft>
+            </a:pPr>
+            <a:r>
+              <a:rPr sz="1100" b="1">
+                <a:solidFill>
+                  <a:srgbClr val="1E2761"/>
+                </a:solidFill>
+                <a:latin typeface="Calibri"/>
+              </a:rPr>
+              <a:t>Guadagni &amp; Little (1983), </a:t>
+            </a:r>
+            <a:r>
+              <a:rPr sz="1100" b="0">
+                <a:solidFill>
+                  <a:srgbClr val="5B5F6E"/>
+                </a:solidFill>
+                <a:latin typeface="Calibri"/>
+              </a:rPr>
+              <a:t>“A Logit Model of Brand Choice Calibrated on Scanner Data” (Marketing Science) — exponentially smoothed loyalty in a logit choice model, which is the stock used here.</a:t>
+            </a:r>
+          </a:p>
+        </p:txBody>
+      </p:sp>
+      <p:sp>
+        <p:nvSpPr>
+          <p:cNvPr id="17" name="Rectangle 16"/>
+          <p:cNvSpPr/>
+          <p:nvPr/>
+        </p:nvSpPr>
+        <p:spPr>
+          <a:xfrm>
+            <a:off x="5943600" y="1417320"/>
+            <a:ext cx="292608" cy="292608"/>
+          </a:xfrm>
+          <a:prstGeom prst="rect">
+            <a:avLst/>
+          </a:prstGeom>
+          <a:solidFill>
+            <a:srgbClr val="1E2761"/>
+          </a:solidFill>
+          <a:ln>
+            <a:noFill/>
+          </a:ln>
+        </p:spPr>
+        <p:style>
+          <a:lnRef idx="1">
+            <a:schemeClr val="accent1"/>
+          </a:lnRef>
+          <a:fillRef idx="3">
+            <a:schemeClr val="accent1"/>
+          </a:fillRef>
+          <a:effectRef idx="2">
+            <a:schemeClr val="accent1"/>
+          </a:effectRef>
+          <a:fontRef idx="minor">
+            <a:schemeClr val="lt1"/>
+          </a:fontRef>
+        </p:style>
+        <p:txBody>
+          <a:bodyPr rtlCol="0" anchor="ctr"/>
+          <a:lstStyle/>
+          <a:p/>
+        </p:txBody>
+      </p:sp>
+      <p:sp>
+        <p:nvSpPr>
+          <p:cNvPr id="18" name="TextBox 17"/>
+          <p:cNvSpPr txBox="1"/>
+          <p:nvPr/>
+        </p:nvSpPr>
+        <p:spPr>
+          <a:xfrm>
+            <a:off x="6355080" y="1389888"/>
+            <a:ext cx="5349240" cy="347472"/>
+          </a:xfrm>
+          <a:prstGeom prst="rect">
+            <a:avLst/>
+          </a:prstGeom>
+          <a:noFill/>
+        </p:spPr>
+        <p:txBody>
+          <a:bodyPr wrap="square" lIns="0" rIns="0" tIns="0" bIns="0">
+            <a:spAutoFit/>
+          </a:bodyPr>
+          <a:lstStyle/>
+          <a:p>
+            <a:pPr>
+              <a:spcAft>
+                <a:spcPts val="200"/>
+              </a:spcAft>
+            </a:pPr>
+            <a:r>
+              <a:rPr sz="1500" b="1">
+                <a:solidFill>
+                  <a:srgbClr val="1E2761"/>
+                </a:solidFill>
+                <a:latin typeface="Calibri"/>
+              </a:rPr>
+              <a:t>KEY RESULTS</a:t>
+            </a:r>
+          </a:p>
+        </p:txBody>
+      </p:sp>
+      <p:graphicFrame>
+        <p:nvGraphicFramePr>
+          <p:cNvPr id="19" name="Table 18"/>
+          <p:cNvGraphicFramePr>
+            <a:graphicFrameLocks noGrp="1"/>
+          </p:cNvGraphicFramePr>
+          <p:nvPr/>
+        </p:nvGraphicFramePr>
+        <p:xfrm>
+          <a:off x="5943600" y="1874519"/>
+          <a:ext cx="5760720" cy="1920240"/>
+        </p:xfrm>
+        <a:graphic>
+          <a:graphicData uri="http://schemas.openxmlformats.org/drawingml/2006/table">
+            <a:tbl>
+              <a:tblPr firstRow="1" bandRow="1">
+                <a:tableStyleId>{5C22544A-7EE6-4342-B048-85BDC9FD1C3A}</a:tableStyleId>
+              </a:tblPr>
+              <a:tblGrid>
+                <a:gridCol w="3200400"/>
+                <a:gridCol w="1463040"/>
+                <a:gridCol w="1097280"/>
+              </a:tblGrid>
+              <a:tr h="274320">
+                <a:tc>
+                  <a:txBody>
+                    <a:bodyPr/>
+                    <a:lstStyle/>
+                    <a:p>
+                      <a:r>
+                        <a:rPr sz="1100" b="1">
+                          <a:solidFill>
+                            <a:srgbClr val="FFFFFF"/>
+                          </a:solidFill>
+                          <a:latin typeface="Calibri"/>
+                        </a:rPr>
+                        <a:t>Metric</a:t>
+                      </a:r>
+                    </a:p>
+                  </a:txBody>
+                  <a:tcPr>
+                    <a:solidFill>
+                      <a:srgbClr val="1E2761"/>
+                    </a:solidFill>
+                  </a:tcPr>
+                </a:tc>
+                <a:tc>
+                  <a:txBody>
+                    <a:bodyPr/>
+                    <a:lstStyle/>
+                    <a:p>
+                      <a:r>
+                        <a:rPr sz="1100" b="1">
+                          <a:solidFill>
+                            <a:srgbClr val="FFFFFF"/>
+                          </a:solidFill>
+                          <a:latin typeface="Calibri"/>
+                        </a:rPr>
+                        <a:t>Value</a:t>
+                      </a:r>
+                    </a:p>
+                  </a:txBody>
+                  <a:tcPr>
+                    <a:solidFill>
+                      <a:srgbClr val="1E2761"/>
+                    </a:solidFill>
+                  </a:tcPr>
+                </a:tc>
+                <a:tc>
+                  <a:txBody>
+                    <a:bodyPr/>
+                    <a:lstStyle/>
+                    <a:p>
+                      <a:r>
+                        <a:rPr sz="1100" b="1">
+                          <a:solidFill>
+                            <a:srgbClr val="FFFFFF"/>
+                          </a:solidFill>
+                          <a:latin typeface="Calibri"/>
+                        </a:rPr>
+                        <a:t/>
+                      </a:r>
+                    </a:p>
+                  </a:txBody>
+                  <a:tcPr>
+                    <a:solidFill>
+                      <a:srgbClr val="1E2761"/>
+                    </a:solidFill>
+                  </a:tcPr>
+                </a:tc>
+              </a:tr>
+              <a:tr h="274320">
+                <a:tc>
+                  <a:txBody>
+                    <a:bodyPr/>
+                    <a:lstStyle/>
+                    <a:p>
+                      <a:r>
+                        <a:rPr sz="1100">
+                          <a:solidFill>
+                            <a:srgbClr val="1E2761"/>
+                          </a:solidFill>
+                          <a:latin typeface="Calibri"/>
+                        </a:rPr>
+                        <a:t>Counter, lag-8 memory</a:t>
+                      </a:r>
+                    </a:p>
+                  </a:txBody>
+                  <a:tcPr>
+                    <a:solidFill>
+                      <a:srgbClr val="FFFFFF"/>
+                    </a:solidFill>
+                  </a:tcPr>
+                </a:tc>
+                <a:tc>
+                  <a:txBody>
+                    <a:bodyPr/>
+                    <a:lstStyle/>
+                    <a:p>
+                      <a:r>
+                        <a:rPr sz="1100">
+                          <a:solidFill>
+                            <a:srgbClr val="5B5F6E"/>
+                          </a:solidFill>
+                          <a:latin typeface="Calibri"/>
+                        </a:rPr>
+                        <a:t>+0.019</a:t>
+                      </a:r>
+                    </a:p>
+                  </a:txBody>
+                  <a:tcPr>
+                    <a:solidFill>
+                      <a:srgbClr val="FFFFFF"/>
+                    </a:solidFill>
+                  </a:tcPr>
+                </a:tc>
+                <a:tc>
+                  <a:txBody>
+                    <a:bodyPr/>
+                    <a:lstStyle/>
+                    <a:p>
+                      <a:pPr algn="ctr"/>
+                      <a:r>
+                        <a:rPr sz="1100" b="1">
+                          <a:solidFill>
+                            <a:srgbClr val="5B5F6E"/>
+                          </a:solidFill>
+                          <a:latin typeface="Calibri"/>
+                        </a:rPr>
+                        <a:t>—</a:t>
+                      </a:r>
+                    </a:p>
+                  </a:txBody>
+                  <a:tcPr>
+                    <a:solidFill>
+                      <a:srgbClr val="FFFFFF"/>
+                    </a:solidFill>
+                  </a:tcPr>
+                </a:tc>
+              </a:tr>
+              <a:tr h="274320">
+                <a:tc>
+                  <a:txBody>
+                    <a:bodyPr/>
+                    <a:lstStyle/>
+                    <a:p>
+                      <a:r>
+                        <a:rPr sz="1100">
+                          <a:solidFill>
+                            <a:srgbClr val="1E2761"/>
+                          </a:solidFill>
+                          <a:latin typeface="Calibri"/>
+                        </a:rPr>
+                        <a:t>Stock rho=0.8, lag-8</a:t>
+                      </a:r>
+                    </a:p>
+                  </a:txBody>
+                  <a:tcPr>
+                    <a:solidFill>
+                      <a:srgbClr val="F7F8FC"/>
+                    </a:solidFill>
+                  </a:tcPr>
+                </a:tc>
+                <a:tc>
+                  <a:txBody>
+                    <a:bodyPr/>
+                    <a:lstStyle/>
+                    <a:p>
+                      <a:r>
+                        <a:rPr sz="1100">
+                          <a:solidFill>
+                            <a:srgbClr val="5B5F6E"/>
+                          </a:solidFill>
+                          <a:latin typeface="Calibri"/>
+                        </a:rPr>
+                        <a:t>+0.054</a:t>
+                      </a:r>
+                    </a:p>
+                  </a:txBody>
+                  <a:tcPr>
+                    <a:solidFill>
+                      <a:srgbClr val="F7F8FC"/>
+                    </a:solidFill>
+                  </a:tcPr>
+                </a:tc>
+                <a:tc>
+                  <a:txBody>
+                    <a:bodyPr/>
+                    <a:lstStyle/>
+                    <a:p>
+                      <a:pPr algn="ctr"/>
+                      <a:r>
+                        <a:rPr sz="1100" b="1">
+                          <a:solidFill>
+                            <a:srgbClr val="5B5F6E"/>
+                          </a:solidFill>
+                          <a:latin typeface="Calibri"/>
+                        </a:rPr>
+                        <a:t>—</a:t>
+                      </a:r>
+                    </a:p>
+                  </a:txBody>
+                  <a:tcPr>
+                    <a:solidFill>
+                      <a:srgbClr val="F7F8FC"/>
+                    </a:solidFill>
+                  </a:tcPr>
+                </a:tc>
+              </a:tr>
+              <a:tr h="274320">
+                <a:tc>
+                  <a:txBody>
+                    <a:bodyPr/>
+                    <a:lstStyle/>
+                    <a:p>
+                      <a:r>
+                        <a:rPr sz="1100">
+                          <a:solidFill>
+                            <a:srgbClr val="1E2761"/>
+                          </a:solidFill>
+                          <a:latin typeface="Calibri"/>
+                        </a:rPr>
+                        <a:t>  as a multiple</a:t>
+                      </a:r>
+                    </a:p>
+                  </a:txBody>
+                  <a:tcPr>
+                    <a:solidFill>
+                      <a:srgbClr val="FFFFFF"/>
+                    </a:solidFill>
+                  </a:tcPr>
+                </a:tc>
+                <a:tc>
+                  <a:txBody>
+                    <a:bodyPr/>
+                    <a:lstStyle/>
+                    <a:p>
+                      <a:r>
+                        <a:rPr sz="1100">
+                          <a:solidFill>
+                            <a:srgbClr val="5B5F6E"/>
+                          </a:solidFill>
+                          <a:latin typeface="Calibri"/>
+                        </a:rPr>
+                        <a:t>2.83x</a:t>
+                      </a:r>
+                    </a:p>
+                  </a:txBody>
+                  <a:tcPr>
+                    <a:solidFill>
+                      <a:srgbClr val="FFFFFF"/>
+                    </a:solidFill>
+                  </a:tcPr>
+                </a:tc>
+                <a:tc>
+                  <a:txBody>
+                    <a:bodyPr/>
+                    <a:lstStyle/>
+                    <a:p>
+                      <a:pPr algn="ctr"/>
+                      <a:r>
+                        <a:rPr sz="1100" b="1">
+                          <a:solidFill>
+                            <a:srgbClr val="1E7A4D"/>
+                          </a:solidFill>
+                          <a:latin typeface="Calibri"/>
+                        </a:rPr>
+                        <a:t>PASS</a:t>
+                      </a:r>
+                    </a:p>
+                  </a:txBody>
+                  <a:tcPr>
+                    <a:solidFill>
+                      <a:srgbClr val="FFFFFF"/>
+                    </a:solidFill>
+                  </a:tcPr>
+                </a:tc>
+              </a:tr>
+              <a:tr h="274320">
+                <a:tc>
+                  <a:txBody>
+                    <a:bodyPr/>
+                    <a:lstStyle/>
+                    <a:p>
+                      <a:r>
+                        <a:rPr sz="1100">
+                          <a:solidFill>
+                            <a:srgbClr val="1E2761"/>
+                          </a:solidFill>
+                          <a:latin typeface="Calibri"/>
+                        </a:rPr>
+                        <a:t>Lock-in, stock vs counter</a:t>
+                      </a:r>
+                    </a:p>
+                  </a:txBody>
+                  <a:tcPr>
+                    <a:solidFill>
+                      <a:srgbClr val="F7F8FC"/>
+                    </a:solidFill>
+                  </a:tcPr>
+                </a:tc>
+                <a:tc>
+                  <a:txBody>
+                    <a:bodyPr/>
+                    <a:lstStyle/>
+                    <a:p>
+                      <a:r>
+                        <a:rPr sz="1100">
+                          <a:solidFill>
+                            <a:srgbClr val="5B5F6E"/>
+                          </a:solidFill>
+                          <a:latin typeface="Calibri"/>
+                        </a:rPr>
+                        <a:t>0.81 vs 0.81</a:t>
+                      </a:r>
+                    </a:p>
+                  </a:txBody>
+                  <a:tcPr>
+                    <a:solidFill>
+                      <a:srgbClr val="F7F8FC"/>
+                    </a:solidFill>
+                  </a:tcPr>
+                </a:tc>
+                <a:tc>
+                  <a:txBody>
+                    <a:bodyPr/>
+                    <a:lstStyle/>
+                    <a:p>
+                      <a:pPr algn="ctr"/>
+                      <a:r>
+                        <a:rPr sz="1100" b="1">
+                          <a:solidFill>
+                            <a:srgbClr val="1E7A4D"/>
+                          </a:solidFill>
+                          <a:latin typeface="Calibri"/>
+                        </a:rPr>
+                        <a:t>PASS</a:t>
+                      </a:r>
+                    </a:p>
+                  </a:txBody>
+                  <a:tcPr>
+                    <a:solidFill>
+                      <a:srgbClr val="F7F8FC"/>
+                    </a:solidFill>
+                  </a:tcPr>
+                </a:tc>
+              </a:tr>
+              <a:tr h="274320">
+                <a:tc>
+                  <a:txBody>
+                    <a:bodyPr/>
+                    <a:lstStyle/>
+                    <a:p>
+                      <a:r>
+                        <a:rPr sz="1100">
+                          <a:solidFill>
+                            <a:srgbClr val="1E2761"/>
+                          </a:solidFill>
+                          <a:latin typeface="Calibri"/>
+                        </a:rPr>
+                        <a:t>Pair stability</a:t>
+                      </a:r>
+                    </a:p>
+                  </a:txBody>
+                  <a:tcPr>
+                    <a:solidFill>
+                      <a:srgbClr val="FFFFFF"/>
+                    </a:solidFill>
+                  </a:tcPr>
+                </a:tc>
+                <a:tc>
+                  <a:txBody>
+                    <a:bodyPr/>
+                    <a:lstStyle/>
+                    <a:p>
+                      <a:r>
+                        <a:rPr sz="1100">
+                          <a:solidFill>
+                            <a:srgbClr val="5B5F6E"/>
+                          </a:solidFill>
+                          <a:latin typeface="Calibri"/>
+                        </a:rPr>
+                        <a:t>0.401 vs 0.430</a:t>
+                      </a:r>
+                    </a:p>
+                  </a:txBody>
+                  <a:tcPr>
+                    <a:solidFill>
+                      <a:srgbClr val="FFFFFF"/>
+                    </a:solidFill>
+                  </a:tcPr>
+                </a:tc>
+                <a:tc>
+                  <a:txBody>
+                    <a:bodyPr/>
+                    <a:lstStyle/>
+                    <a:p>
+                      <a:pPr algn="ctr"/>
+                      <a:r>
+                        <a:rPr sz="1100" b="1">
+                          <a:solidFill>
+                            <a:srgbClr val="5B5F6E"/>
+                          </a:solidFill>
+                          <a:latin typeface="Calibri"/>
+                        </a:rPr>
+                        <a:t>—</a:t>
+                      </a:r>
+                    </a:p>
+                  </a:txBody>
+                  <a:tcPr>
+                    <a:solidFill>
+                      <a:srgbClr val="FFFFFF"/>
+                    </a:solidFill>
+                  </a:tcPr>
+                </a:tc>
+              </a:tr>
+              <a:tr h="274320">
+                <a:tc>
+                  <a:txBody>
+                    <a:bodyPr/>
+                    <a:lstStyle/>
+                    <a:p>
+                      <a:r>
+                        <a:rPr sz="1100">
+                          <a:solidFill>
+                            <a:srgbClr val="1E2761"/>
+                          </a:solidFill>
+                          <a:latin typeface="Calibri"/>
+                        </a:rPr>
+                        <a:t>Oracle optimum</a:t>
+                      </a:r>
+                    </a:p>
+                  </a:txBody>
+                  <a:tcPr>
+                    <a:solidFill>
+                      <a:srgbClr val="F7F8FC"/>
+                    </a:solidFill>
+                  </a:tcPr>
+                </a:tc>
+                <a:tc>
+                  <a:txBody>
+                    <a:bodyPr/>
+                    <a:lstStyle/>
+                    <a:p>
+                      <a:r>
+                        <a:rPr sz="1100">
+                          <a:solidFill>
+                            <a:srgbClr val="5B5F6E"/>
+                          </a:solidFill>
+                          <a:latin typeface="Calibri"/>
+                        </a:rPr>
+                        <a:t>2.65 vs 2.60</a:t>
+                      </a:r>
+                    </a:p>
+                  </a:txBody>
+                  <a:tcPr>
+                    <a:solidFill>
+                      <a:srgbClr val="F7F8FC"/>
+                    </a:solidFill>
+                  </a:tcPr>
+                </a:tc>
+                <a:tc>
+                  <a:txBody>
+                    <a:bodyPr/>
+                    <a:lstStyle/>
+                    <a:p>
+                      <a:pPr algn="ctr"/>
+                      <a:r>
+                        <a:rPr sz="1100" b="1">
+                          <a:solidFill>
+                            <a:srgbClr val="5B5F6E"/>
+                          </a:solidFill>
+                          <a:latin typeface="Calibri"/>
+                        </a:rPr>
+                        <a:t>—</a:t>
+                      </a:r>
+                    </a:p>
+                  </a:txBody>
+                  <a:tcPr>
+                    <a:solidFill>
+                      <a:srgbClr val="F7F8FC"/>
+                    </a:solidFill>
+                  </a:tcPr>
+                </a:tc>
+              </a:tr>
+            </a:tbl>
+          </a:graphicData>
+        </a:graphic>
+      </p:graphicFrame>
+      <p:sp>
+        <p:nvSpPr>
+          <p:cNvPr id="20" name="Rectangle 19"/>
+          <p:cNvSpPr/>
+          <p:nvPr/>
+        </p:nvSpPr>
+        <p:spPr>
+          <a:xfrm>
+            <a:off x="5943600" y="4023360"/>
+            <a:ext cx="292608" cy="292608"/>
+          </a:xfrm>
+          <a:prstGeom prst="rect">
+            <a:avLst/>
+          </a:prstGeom>
+          <a:solidFill>
+            <a:srgbClr val="1E2761"/>
+          </a:solidFill>
+          <a:ln>
+            <a:noFill/>
+          </a:ln>
+        </p:spPr>
+        <p:style>
+          <a:lnRef idx="1">
+            <a:schemeClr val="accent1"/>
+          </a:lnRef>
+          <a:fillRef idx="3">
+            <a:schemeClr val="accent1"/>
+          </a:fillRef>
+          <a:effectRef idx="2">
+            <a:schemeClr val="accent1"/>
+          </a:effectRef>
+          <a:fontRef idx="minor">
+            <a:schemeClr val="lt1"/>
+          </a:fontRef>
+        </p:style>
+        <p:txBody>
+          <a:bodyPr rtlCol="0" anchor="ctr"/>
+          <a:lstStyle/>
+          <a:p/>
+        </p:txBody>
+      </p:sp>
+      <p:sp>
+        <p:nvSpPr>
+          <p:cNvPr id="21" name="TextBox 20"/>
+          <p:cNvSpPr txBox="1"/>
+          <p:nvPr/>
+        </p:nvSpPr>
+        <p:spPr>
+          <a:xfrm>
+            <a:off x="6355080" y="3995928"/>
+            <a:ext cx="5349240" cy="347472"/>
+          </a:xfrm>
+          <a:prstGeom prst="rect">
+            <a:avLst/>
+          </a:prstGeom>
+          <a:noFill/>
+        </p:spPr>
+        <p:txBody>
+          <a:bodyPr wrap="square" lIns="0" rIns="0" tIns="0" bIns="0">
+            <a:spAutoFit/>
+          </a:bodyPr>
+          <a:lstStyle/>
+          <a:p>
+            <a:pPr>
+              <a:spcAft>
+                <a:spcPts val="200"/>
+              </a:spcAft>
+            </a:pPr>
+            <a:r>
+              <a:rPr sz="1500" b="1">
+                <a:solidFill>
+                  <a:srgbClr val="1E2761"/>
+                </a:solidFill>
+                <a:latin typeface="Calibri"/>
+              </a:rPr>
+              <a:t>RESEARCH QUESTION</a:t>
+            </a:r>
+          </a:p>
+        </p:txBody>
+      </p:sp>
+      <p:sp>
+        <p:nvSpPr>
+          <p:cNvPr id="22" name="Rectangle 21"/>
+          <p:cNvSpPr/>
+          <p:nvPr/>
+        </p:nvSpPr>
+        <p:spPr>
+          <a:xfrm>
+            <a:off x="5943600" y="4434840"/>
+            <a:ext cx="5760720" cy="1965960"/>
+          </a:xfrm>
+          <a:prstGeom prst="rect">
+            <a:avLst/>
+          </a:prstGeom>
+          <a:solidFill>
+            <a:srgbClr val="F7F8FC"/>
+          </a:solidFill>
+          <a:ln>
+            <a:noFill/>
+          </a:ln>
+        </p:spPr>
+        <p:style>
+          <a:lnRef idx="1">
+            <a:schemeClr val="accent1"/>
+          </a:lnRef>
+          <a:fillRef idx="3">
+            <a:schemeClr val="accent1"/>
+          </a:fillRef>
+          <a:effectRef idx="2">
+            <a:schemeClr val="accent1"/>
+          </a:effectRef>
+          <a:fontRef idx="minor">
+            <a:schemeClr val="lt1"/>
+          </a:fontRef>
+        </p:style>
+        <p:txBody>
+          <a:bodyPr rtlCol="0" anchor="ctr"/>
+          <a:lstStyle/>
+          <a:p/>
+        </p:txBody>
+      </p:sp>
+      <p:sp>
+        <p:nvSpPr>
+          <p:cNvPr id="23" name="TextBox 22"/>
+          <p:cNvSpPr txBox="1"/>
+          <p:nvPr/>
+        </p:nvSpPr>
+        <p:spPr>
+          <a:xfrm>
+            <a:off x="6217920" y="4572000"/>
+            <a:ext cx="5212080" cy="1737360"/>
+          </a:xfrm>
+          <a:prstGeom prst="rect">
+            <a:avLst/>
+          </a:prstGeom>
+          <a:noFill/>
+        </p:spPr>
+        <p:txBody>
+          <a:bodyPr wrap="square" lIns="0" rIns="0" tIns="0" bIns="0">
+            <a:spAutoFit/>
+          </a:bodyPr>
+          <a:lstStyle/>
+          <a:p>
+            <a:pPr>
+              <a:spcAft>
+                <a:spcPts val="500"/>
+              </a:spcAft>
+            </a:pPr>
+            <a:r>
+              <a:rPr sz="1000" b="0">
+                <a:solidFill>
+                  <a:srgbClr val="5B5F6E"/>
+                </a:solidFill>
+                <a:latin typeface="Calibri"/>
+              </a:rPr>
+              <a:t>With lock-in strength held equal to the base environment's, does a persistent loyalty stock reach further back in time than a three-week counter?</a:t>
+            </a:r>
+          </a:p>
+          <a:p>
+            <a:pPr>
+              <a:spcAft>
+                <a:spcPts val="500"/>
+              </a:spcAft>
+            </a:pPr>
+            <a:r>
+              <a:rPr sz="1000" b="1">
+                <a:solidFill>
+                  <a:srgbClr val="1E2761"/>
+                </a:solidFill>
+                <a:latin typeface="Calibri"/>
+              </a:rPr>
+              <a:t>Finding: </a:t>
+            </a:r>
+            <a:r>
+              <a:rPr sz="1000" b="0">
+                <a:solidFill>
+                  <a:srgbClr val="5B5F6E"/>
+                </a:solidFill>
+                <a:latin typeface="Calibri"/>
+              </a:rPr>
+              <a:t>Yes — 2.8x the counter's memory at a lag of 8 weeks, in all four horizons tested. The counter starts stronger (+0.019 at lag 8 against a lag-1 advantage) and collapses at exactly its 3-week cap; the stock is weaker at lag 1 and still measurable at lag 16. A state now exists for a contextual or multi-week policy to condition on.</a:t>
+            </a:r>
+          </a:p>
+          <a:p>
+            <a:pPr>
+              <a:spcAft>
+                <a:spcPts val="500"/>
+              </a:spcAft>
+            </a:pPr>
+            <a:r>
+              <a:rPr sz="1000" b="1">
+                <a:solidFill>
+                  <a:srgbClr val="1E2761"/>
+                </a:solidFill>
+                <a:latin typeface="Calibri"/>
+              </a:rPr>
+              <a:t>Caveat: </a:t>
+            </a:r>
+            <a:r>
+              <a:rPr sz="1000" b="0">
+                <a:solidFill>
+                  <a:srgbClr val="5B5F6E"/>
+                </a:solidFill>
+                <a:latin typeface="Calibri"/>
+              </a:rPr>
+              <a:t>The first grid ran with L_max pinned at Phase 6's ceiling and failed, for a reason worth keeping: a nominal ceiling is not strength. The stock bound about a third as hard as the counter (0.25 vs 0.81) and was the *weaker* mechanism. Its gate 1b threshold was also unreachable — 5 pp below a 4.0% baseline. Both are recorded in the spec. Profit levels are not comparable across the two environments: this one sells more (0.81 vs 0.69), so only within-environment comparisons are drawn.</a:t>
             </a:r>
           </a:p>
         </p:txBody>

--- a/project_tracking.pptx
+++ b/project_tracking.pptx
@@ -15,6 +15,7 @@
     <p:sldId id="263" r:id="rId14"/>
     <p:sldId id="264" r:id="rId15"/>
     <p:sldId id="265" r:id="rId16"/>
+    <p:sldId id="266" r:id="rId17"/>
   </p:sldIdLst>
   <p:sldSz cx="12191969" cy="6858000" type="screen4x3"/>
   <p:notesSz cx="6858000" cy="9144000"/>
@@ -6098,6 +6099,1575 @@
                 <a:latin typeface="Calibri"/>
               </a:rPr>
               <a:t>The first grid ran with L_max pinned at Phase 6's ceiling and failed, for a reason worth keeping: a nominal ceiling is not strength. The stock bound about a third as hard as the counter (0.25 vs 0.81) and was the *weaker* mechanism. Its gate 1b threshold was also unreachable — 5 pp below a 4.0% baseline. Both are recorded in the spec. Profit levels are not comparable across the two environments: this one sells more (0.81 vs 0.69), so only within-environment comparisons are drawn.</a:t>
+            </a:r>
+          </a:p>
+        </p:txBody>
+      </p:sp>
+      <p:sp>
+        <p:nvSpPr>
+          <p:cNvPr id="24" name="TextBox 23"/>
+          <p:cNvSpPr txBox="1"/>
+          <p:nvPr/>
+        </p:nvSpPr>
+        <p:spPr>
+          <a:xfrm>
+            <a:off x="457200" y="6446520"/>
+            <a:ext cx="11247120" cy="274320"/>
+          </a:xfrm>
+          <a:prstGeom prst="rect">
+            <a:avLst/>
+          </a:prstGeom>
+          <a:noFill/>
+        </p:spPr>
+        <p:txBody>
+          <a:bodyPr wrap="square" lIns="0" rIns="0" tIns="0" bIns="0">
+            <a:spAutoFit/>
+          </a:bodyPr>
+          <a:lstStyle/>
+          <a:p>
+            <a:pPr>
+              <a:spcAft>
+                <a:spcPts val="200"/>
+              </a:spcAft>
+            </a:pPr>
+            <a:r>
+              <a:rPr sz="950" b="0">
+                <a:solidFill>
+                  <a:srgbClr val="5B5F6E"/>
+                </a:solidFill>
+                <a:latin typeface="Calibri"/>
+              </a:rPr>
+              <a:t>Generated automatically at phase completion  ·  Phase Completion Deliverable  ·  market-sim project</a:t>
+            </a:r>
+          </a:p>
+        </p:txBody>
+      </p:sp>
+    </p:spTree>
+  </p:cSld>
+  <p:clrMapOvr>
+    <a:masterClrMapping/>
+  </p:clrMapOvr>
+</p:sld>
+</file>
+
+<file path=ppt/slides/slide11.xml><?xml version="1.0" encoding="utf-8"?>
+<p:sld xmlns:a="http://schemas.openxmlformats.org/drawingml/2006/main" xmlns:p="http://schemas.openxmlformats.org/presentationml/2006/main" xmlns:r="http://schemas.openxmlformats.org/officeDocument/2006/relationships">
+  <p:cSld>
+    <p:spTree>
+      <p:nvGrpSpPr>
+        <p:cNvPr id="1" name=""/>
+        <p:cNvGrpSpPr/>
+        <p:nvPr/>
+      </p:nvGrpSpPr>
+      <p:grpSpPr/>
+      <p:sp>
+        <p:nvSpPr>
+          <p:cNvPr id="2" name="TextBox 1"/>
+          <p:cNvSpPr txBox="1"/>
+          <p:nvPr/>
+        </p:nvSpPr>
+        <p:spPr>
+          <a:xfrm>
+            <a:off x="457200" y="320040"/>
+            <a:ext cx="8229600" cy="548640"/>
+          </a:xfrm>
+          <a:prstGeom prst="rect">
+            <a:avLst/>
+          </a:prstGeom>
+          <a:noFill/>
+        </p:spPr>
+        <p:txBody>
+          <a:bodyPr wrap="square" lIns="0" rIns="0" tIns="0" bIns="0">
+            <a:spAutoFit/>
+          </a:bodyPr>
+          <a:lstStyle/>
+          <a:p>
+            <a:pPr>
+              <a:spcAft>
+                <a:spcPts val="200"/>
+              </a:spcAft>
+            </a:pPr>
+            <a:r>
+              <a:rPr sz="3200" b="1">
+                <a:solidFill>
+                  <a:srgbClr val="1E2761"/>
+                </a:solidFill>
+                <a:latin typeface="Cambria"/>
+              </a:rPr>
+              <a:t>Phase 7 — Mechanism Sufficiency — 7e-2 Intertemporal Headroom</a:t>
+            </a:r>
+          </a:p>
+        </p:txBody>
+      </p:sp>
+      <p:sp>
+        <p:nvSpPr>
+          <p:cNvPr id="3" name="TextBox 2"/>
+          <p:cNvSpPr txBox="1"/>
+          <p:nvPr/>
+        </p:nvSpPr>
+        <p:spPr>
+          <a:xfrm>
+            <a:off x="457200" y="868680"/>
+            <a:ext cx="8229600" cy="274320"/>
+          </a:xfrm>
+          <a:prstGeom prst="rect">
+            <a:avLst/>
+          </a:prstGeom>
+          <a:noFill/>
+        </p:spPr>
+        <p:txBody>
+          <a:bodyPr wrap="square" lIns="0" rIns="0" tIns="0" bIns="0">
+            <a:spAutoFit/>
+          </a:bodyPr>
+          <a:lstStyle/>
+          <a:p>
+            <a:pPr>
+              <a:spcAft>
+                <a:spcPts val="200"/>
+              </a:spcAft>
+            </a:pPr>
+            <a:r>
+              <a:rPr sz="1200" b="0">
+                <a:solidFill>
+                  <a:srgbClr val="5B5F6E"/>
+                </a:solidFill>
+                <a:latin typeface="Calibri"/>
+              </a:rPr>
+              <a:t>Hand-designed schedules vs the best standing price  ·  git tag: phase7e2-headroom  ·  select on 2000–2059, test on 0–29</a:t>
+            </a:r>
+          </a:p>
+        </p:txBody>
+      </p:sp>
+      <p:sp>
+        <p:nvSpPr>
+          <p:cNvPr id="4" name="Rounded Rectangle 3"/>
+          <p:cNvSpPr/>
+          <p:nvPr/>
+        </p:nvSpPr>
+        <p:spPr>
+          <a:xfrm>
+            <a:off x="9464040" y="365760"/>
+            <a:ext cx="2240280" cy="384048"/>
+          </a:xfrm>
+          <a:prstGeom prst="roundRect">
+            <a:avLst/>
+          </a:prstGeom>
+          <a:solidFill>
+            <a:srgbClr val="1E7A4D"/>
+          </a:solidFill>
+          <a:ln>
+            <a:noFill/>
+          </a:ln>
+        </p:spPr>
+        <p:style>
+          <a:lnRef idx="1">
+            <a:schemeClr val="accent1"/>
+          </a:lnRef>
+          <a:fillRef idx="3">
+            <a:schemeClr val="accent1"/>
+          </a:fillRef>
+          <a:effectRef idx="2">
+            <a:schemeClr val="accent1"/>
+          </a:effectRef>
+          <a:fontRef idx="minor">
+            <a:schemeClr val="lt1"/>
+          </a:fontRef>
+        </p:style>
+        <p:txBody>
+          <a:bodyPr rtlCol="0" anchor="ctr"/>
+          <a:lstStyle/>
+          <a:p>
+            <a:pPr algn="ctr"/>
+            <a:r>
+              <a:rPr sz="1050" b="1">
+                <a:solidFill>
+                  <a:srgbClr val="FFFFFF"/>
+                </a:solidFill>
+                <a:latin typeface="Calibri"/>
+              </a:rPr>
+              <a:t>GATE 2 PASSED</a:t>
+            </a:r>
+          </a:p>
+        </p:txBody>
+      </p:sp>
+      <p:sp>
+        <p:nvSpPr>
+          <p:cNvPr id="5" name="Rectangle 4"/>
+          <p:cNvSpPr/>
+          <p:nvPr/>
+        </p:nvSpPr>
+        <p:spPr>
+          <a:xfrm>
+            <a:off x="457200" y="1417320"/>
+            <a:ext cx="292608" cy="292608"/>
+          </a:xfrm>
+          <a:prstGeom prst="rect">
+            <a:avLst/>
+          </a:prstGeom>
+          <a:solidFill>
+            <a:srgbClr val="1E2761"/>
+          </a:solidFill>
+          <a:ln>
+            <a:noFill/>
+          </a:ln>
+        </p:spPr>
+        <p:style>
+          <a:lnRef idx="1">
+            <a:schemeClr val="accent1"/>
+          </a:lnRef>
+          <a:fillRef idx="3">
+            <a:schemeClr val="accent1"/>
+          </a:fillRef>
+          <a:effectRef idx="2">
+            <a:schemeClr val="accent1"/>
+          </a:effectRef>
+          <a:fontRef idx="minor">
+            <a:schemeClr val="lt1"/>
+          </a:fontRef>
+        </p:style>
+        <p:txBody>
+          <a:bodyPr rtlCol="0" anchor="ctr"/>
+          <a:lstStyle/>
+          <a:p/>
+        </p:txBody>
+      </p:sp>
+      <p:sp>
+        <p:nvSpPr>
+          <p:cNvPr id="6" name="TextBox 5"/>
+          <p:cNvSpPr txBox="1"/>
+          <p:nvPr/>
+        </p:nvSpPr>
+        <p:spPr>
+          <a:xfrm>
+            <a:off x="868680" y="1389888"/>
+            <a:ext cx="4617720" cy="347472"/>
+          </a:xfrm>
+          <a:prstGeom prst="rect">
+            <a:avLst/>
+          </a:prstGeom>
+          <a:noFill/>
+        </p:spPr>
+        <p:txBody>
+          <a:bodyPr wrap="square" lIns="0" rIns="0" tIns="0" bIns="0">
+            <a:spAutoFit/>
+          </a:bodyPr>
+          <a:lstStyle/>
+          <a:p>
+            <a:pPr>
+              <a:spcAft>
+                <a:spcPts val="200"/>
+              </a:spcAft>
+            </a:pPr>
+            <a:r>
+              <a:rPr sz="1500" b="1">
+                <a:solidFill>
+                  <a:srgbClr val="1E2761"/>
+                </a:solidFill>
+                <a:latin typeface="Calibri"/>
+              </a:rPr>
+              <a:t>AGENTS</a:t>
+            </a:r>
+          </a:p>
+        </p:txBody>
+      </p:sp>
+      <p:sp>
+        <p:nvSpPr>
+          <p:cNvPr id="7" name="TextBox 6"/>
+          <p:cNvSpPr txBox="1"/>
+          <p:nvPr/>
+        </p:nvSpPr>
+        <p:spPr>
+          <a:xfrm>
+            <a:off x="868680" y="1828800"/>
+            <a:ext cx="4617720" cy="566928"/>
+          </a:xfrm>
+          <a:prstGeom prst="rect">
+            <a:avLst/>
+          </a:prstGeom>
+          <a:noFill/>
+        </p:spPr>
+        <p:txBody>
+          <a:bodyPr wrap="square" lIns="0" rIns="0" tIns="0" bIns="0">
+            <a:spAutoFit/>
+          </a:bodyPr>
+          <a:lstStyle/>
+          <a:p>
+            <a:pPr>
+              <a:spcAft>
+                <a:spcPts val="200"/>
+              </a:spcAft>
+            </a:pPr>
+            <a:r>
+              <a:rPr sz="1300" b="1">
+                <a:solidFill>
+                  <a:srgbClr val="1E2761"/>
+                </a:solidFill>
+                <a:latin typeface="Calibri"/>
+              </a:rPr>
+              <a:t>Buyers: </a:t>
+            </a:r>
+            <a:r>
+              <a:rPr sz="1300" b="0">
+                <a:solidFill>
+                  <a:srgbClr val="5B5F6E"/>
+                </a:solidFill>
+                <a:latin typeface="Calibri"/>
+              </a:rPr>
+              <a:t>100 — Poor 70 / Middle 20 / Rich 10, dispersed budgets</a:t>
+            </a:r>
+          </a:p>
+          <a:p>
+            <a:pPr>
+              <a:spcAft>
+                <a:spcPts val="200"/>
+              </a:spcAft>
+            </a:pPr>
+            <a:r>
+              <a:rPr sz="1300" b="1">
+                <a:solidFill>
+                  <a:srgbClr val="1E2761"/>
+                </a:solidFill>
+                <a:latin typeface="Calibri"/>
+              </a:rPr>
+              <a:t>Sellers: </a:t>
+            </a:r>
+            <a:r>
+              <a:rPr sz="1300" b="0">
+                <a:solidFill>
+                  <a:srgbClr val="5B5F6E"/>
+                </a:solidFill>
+                <a:latin typeface="Calibri"/>
+              </a:rPr>
+              <a:t>5 — one prices on a schedule, the rest hold their list price</a:t>
+            </a:r>
+          </a:p>
+        </p:txBody>
+      </p:sp>
+      <p:sp>
+        <p:nvSpPr>
+          <p:cNvPr id="8" name="Rectangle 7"/>
+          <p:cNvSpPr/>
+          <p:nvPr/>
+        </p:nvSpPr>
+        <p:spPr>
+          <a:xfrm>
+            <a:off x="457200" y="2651760"/>
+            <a:ext cx="292608" cy="292608"/>
+          </a:xfrm>
+          <a:prstGeom prst="rect">
+            <a:avLst/>
+          </a:prstGeom>
+          <a:solidFill>
+            <a:srgbClr val="1E2761"/>
+          </a:solidFill>
+          <a:ln>
+            <a:noFill/>
+          </a:ln>
+        </p:spPr>
+        <p:style>
+          <a:lnRef idx="1">
+            <a:schemeClr val="accent1"/>
+          </a:lnRef>
+          <a:fillRef idx="3">
+            <a:schemeClr val="accent1"/>
+          </a:fillRef>
+          <a:effectRef idx="2">
+            <a:schemeClr val="accent1"/>
+          </a:effectRef>
+          <a:fontRef idx="minor">
+            <a:schemeClr val="lt1"/>
+          </a:fontRef>
+        </p:style>
+        <p:txBody>
+          <a:bodyPr rtlCol="0" anchor="ctr"/>
+          <a:lstStyle/>
+          <a:p/>
+        </p:txBody>
+      </p:sp>
+      <p:sp>
+        <p:nvSpPr>
+          <p:cNvPr id="9" name="TextBox 8"/>
+          <p:cNvSpPr txBox="1"/>
+          <p:nvPr/>
+        </p:nvSpPr>
+        <p:spPr>
+          <a:xfrm>
+            <a:off x="868680" y="2624328"/>
+            <a:ext cx="4617720" cy="347472"/>
+          </a:xfrm>
+          <a:prstGeom prst="rect">
+            <a:avLst/>
+          </a:prstGeom>
+          <a:noFill/>
+        </p:spPr>
+        <p:txBody>
+          <a:bodyPr wrap="square" lIns="0" rIns="0" tIns="0" bIns="0">
+            <a:spAutoFit/>
+          </a:bodyPr>
+          <a:lstStyle/>
+          <a:p>
+            <a:pPr>
+              <a:spcAft>
+                <a:spcPts val="200"/>
+              </a:spcAft>
+            </a:pPr>
+            <a:r>
+              <a:rPr sz="1500" b="1">
+                <a:solidFill>
+                  <a:srgbClr val="1E2761"/>
+                </a:solidFill>
+                <a:latin typeface="Calibri"/>
+              </a:rPr>
+              <a:t>ENVIRONMENT &amp; CONTEXT</a:t>
+            </a:r>
+          </a:p>
+        </p:txBody>
+      </p:sp>
+      <p:sp>
+        <p:nvSpPr>
+          <p:cNvPr id="10" name="TextBox 9"/>
+          <p:cNvSpPr txBox="1"/>
+          <p:nvPr/>
+        </p:nvSpPr>
+        <p:spPr>
+          <a:xfrm>
+            <a:off x="868680" y="3063240"/>
+            <a:ext cx="4617720" cy="548640"/>
+          </a:xfrm>
+          <a:prstGeom prst="rect">
+            <a:avLst/>
+          </a:prstGeom>
+          <a:noFill/>
+        </p:spPr>
+        <p:txBody>
+          <a:bodyPr wrap="square" lIns="0" rIns="0" tIns="0" bIns="0">
+            <a:spAutoFit/>
+          </a:bodyPr>
+          <a:lstStyle/>
+          <a:p>
+            <a:pPr>
+              <a:spcAft>
+                <a:spcPts val="200"/>
+              </a:spcAft>
+            </a:pPr>
+            <a:r>
+              <a:rPr sz="1300" b="0">
+                <a:solidFill>
+                  <a:srgbClr val="5B5F6E"/>
+                </a:solidFill>
+                <a:latin typeface="Calibri"/>
+              </a:rPr>
+              <a:t>-  7e-1's calibrated stock: rho = 0.80, L_max = 3.30, half-life 3.1 weeks.</a:t>
+            </a:r>
+          </a:p>
+          <a:p>
+            <a:pPr>
+              <a:spcAft>
+                <a:spcPts val="200"/>
+              </a:spcAft>
+            </a:pPr>
+            <a:r>
+              <a:rPr sz="1300" b="0">
+                <a:solidFill>
+                  <a:srgbClr val="5B5F6E"/>
+                </a:solidFill>
+                <a:latin typeface="Calibri"/>
+              </a:rPr>
+              <a:t>-  The scheduling stall's standing price is its own oracle optimum, 2.65,</a:t>
+            </a:r>
+          </a:p>
+          <a:p>
+            <a:pPr>
+              <a:spcAft>
+                <a:spcPts val="200"/>
+              </a:spcAft>
+            </a:pPr>
+            <a:r>
+              <a:rPr sz="1300" b="0">
+                <a:solidFill>
+                  <a:srgbClr val="5B5F6E"/>
+                </a:solidFill>
+                <a:latin typeface="Calibri"/>
+              </a:rPr>
+              <a:t>   so the schedule deviates from a price buyers have adapted to.</a:t>
+            </a:r>
+          </a:p>
+        </p:txBody>
+      </p:sp>
+      <p:sp>
+        <p:nvSpPr>
+          <p:cNvPr id="11" name="Rectangle 10"/>
+          <p:cNvSpPr/>
+          <p:nvPr/>
+        </p:nvSpPr>
+        <p:spPr>
+          <a:xfrm>
+            <a:off x="457200" y="3886200"/>
+            <a:ext cx="292608" cy="292608"/>
+          </a:xfrm>
+          <a:prstGeom prst="rect">
+            <a:avLst/>
+          </a:prstGeom>
+          <a:solidFill>
+            <a:srgbClr val="1E2761"/>
+          </a:solidFill>
+          <a:ln>
+            <a:noFill/>
+          </a:ln>
+        </p:spPr>
+        <p:style>
+          <a:lnRef idx="1">
+            <a:schemeClr val="accent1"/>
+          </a:lnRef>
+          <a:fillRef idx="3">
+            <a:schemeClr val="accent1"/>
+          </a:fillRef>
+          <a:effectRef idx="2">
+            <a:schemeClr val="accent1"/>
+          </a:effectRef>
+          <a:fontRef idx="minor">
+            <a:schemeClr val="lt1"/>
+          </a:fontRef>
+        </p:style>
+        <p:txBody>
+          <a:bodyPr rtlCol="0" anchor="ctr"/>
+          <a:lstStyle/>
+          <a:p/>
+        </p:txBody>
+      </p:sp>
+      <p:sp>
+        <p:nvSpPr>
+          <p:cNvPr id="12" name="TextBox 11"/>
+          <p:cNvSpPr txBox="1"/>
+          <p:nvPr/>
+        </p:nvSpPr>
+        <p:spPr>
+          <a:xfrm>
+            <a:off x="868680" y="3858768"/>
+            <a:ext cx="4617720" cy="347472"/>
+          </a:xfrm>
+          <a:prstGeom prst="rect">
+            <a:avLst/>
+          </a:prstGeom>
+          <a:noFill/>
+        </p:spPr>
+        <p:txBody>
+          <a:bodyPr wrap="square" lIns="0" rIns="0" tIns="0" bIns="0">
+            <a:spAutoFit/>
+          </a:bodyPr>
+          <a:lstStyle/>
+          <a:p>
+            <a:pPr>
+              <a:spcAft>
+                <a:spcPts val="200"/>
+              </a:spcAft>
+            </a:pPr>
+            <a:r>
+              <a:rPr sz="1500" b="1">
+                <a:solidFill>
+                  <a:srgbClr val="1E2761"/>
+                </a:solidFill>
+                <a:latin typeface="Calibri"/>
+              </a:rPr>
+              <a:t>METHOD</a:t>
+            </a:r>
+          </a:p>
+        </p:txBody>
+      </p:sp>
+      <p:sp>
+        <p:nvSpPr>
+          <p:cNvPr id="13" name="TextBox 12"/>
+          <p:cNvSpPr txBox="1"/>
+          <p:nvPr/>
+        </p:nvSpPr>
+        <p:spPr>
+          <a:xfrm>
+            <a:off x="868680" y="4297680"/>
+            <a:ext cx="4617720" cy="594360"/>
+          </a:xfrm>
+          <a:prstGeom prst="rect">
+            <a:avLst/>
+          </a:prstGeom>
+          <a:noFill/>
+        </p:spPr>
+        <p:txBody>
+          <a:bodyPr wrap="square" lIns="0" rIns="0" tIns="0" bIns="0">
+            <a:spAutoFit/>
+          </a:bodyPr>
+          <a:lstStyle/>
+          <a:p>
+            <a:pPr>
+              <a:spcAft>
+                <a:spcPts val="200"/>
+              </a:spcAft>
+            </a:pPr>
+            <a:r>
+              <a:rPr sz="1300" b="0">
+                <a:solidFill>
+                  <a:srgbClr val="5B5F6E"/>
+                </a:solidFill>
+                <a:latin typeface="Calibri"/>
+              </a:rPr>
+              <a:t>36 schedules x 4 deltas: one-shot invest-then-harvest, and cycles.</a:t>
+            </a:r>
+          </a:p>
+          <a:p>
+            <a:pPr>
+              <a:spcAft>
+                <a:spcPts val="200"/>
+              </a:spcAft>
+            </a:pPr>
+            <a:r>
+              <a:rPr sz="1300" b="0">
+                <a:solidFill>
+                  <a:srgbClr val="5B5F6E"/>
+                </a:solidFill>
+                <a:latin typeface="Calibri"/>
+              </a:rPr>
+              <a:t>Selected on a discovery seed block, tested on the evaluation block —</a:t>
+            </a:r>
+          </a:p>
+          <a:p>
+            <a:pPr>
+              <a:spcAft>
+                <a:spcPts val="200"/>
+              </a:spcAft>
+            </a:pPr>
+            <a:r>
+              <a:rPr sz="1300" b="0">
+                <a:solidFill>
+                  <a:srgbClr val="5B5F6E"/>
+                </a:solidFill>
+                <a:latin typeface="Calibri"/>
+              </a:rPr>
+              <a:t>a maximum over ~150 comparisons is significant by construction.</a:t>
+            </a:r>
+          </a:p>
+        </p:txBody>
+      </p:sp>
+      <p:sp>
+        <p:nvSpPr>
+          <p:cNvPr id="14" name="Rectangle 13"/>
+          <p:cNvSpPr/>
+          <p:nvPr/>
+        </p:nvSpPr>
+        <p:spPr>
+          <a:xfrm>
+            <a:off x="457200" y="5029200"/>
+            <a:ext cx="292608" cy="292608"/>
+          </a:xfrm>
+          <a:prstGeom prst="rect">
+            <a:avLst/>
+          </a:prstGeom>
+          <a:solidFill>
+            <a:srgbClr val="1E2761"/>
+          </a:solidFill>
+          <a:ln>
+            <a:noFill/>
+          </a:ln>
+        </p:spPr>
+        <p:style>
+          <a:lnRef idx="1">
+            <a:schemeClr val="accent1"/>
+          </a:lnRef>
+          <a:fillRef idx="3">
+            <a:schemeClr val="accent1"/>
+          </a:fillRef>
+          <a:effectRef idx="2">
+            <a:schemeClr val="accent1"/>
+          </a:effectRef>
+          <a:fontRef idx="minor">
+            <a:schemeClr val="lt1"/>
+          </a:fontRef>
+        </p:style>
+        <p:txBody>
+          <a:bodyPr rtlCol="0" anchor="ctr"/>
+          <a:lstStyle/>
+          <a:p/>
+        </p:txBody>
+      </p:sp>
+      <p:sp>
+        <p:nvSpPr>
+          <p:cNvPr id="15" name="TextBox 14"/>
+          <p:cNvSpPr txBox="1"/>
+          <p:nvPr/>
+        </p:nvSpPr>
+        <p:spPr>
+          <a:xfrm>
+            <a:off x="868680" y="5001768"/>
+            <a:ext cx="4617720" cy="347472"/>
+          </a:xfrm>
+          <a:prstGeom prst="rect">
+            <a:avLst/>
+          </a:prstGeom>
+          <a:noFill/>
+        </p:spPr>
+        <p:txBody>
+          <a:bodyPr wrap="square" lIns="0" rIns="0" tIns="0" bIns="0">
+            <a:spAutoFit/>
+          </a:bodyPr>
+          <a:lstStyle/>
+          <a:p>
+            <a:pPr>
+              <a:spcAft>
+                <a:spcPts val="200"/>
+              </a:spcAft>
+            </a:pPr>
+            <a:r>
+              <a:rPr sz="1500" b="1">
+                <a:solidFill>
+                  <a:srgbClr val="1E2761"/>
+                </a:solidFill>
+                <a:latin typeface="Calibri"/>
+              </a:rPr>
+              <a:t>LITERATURE BASIS</a:t>
+            </a:r>
+          </a:p>
+        </p:txBody>
+      </p:sp>
+      <p:sp>
+        <p:nvSpPr>
+          <p:cNvPr id="16" name="TextBox 15"/>
+          <p:cNvSpPr txBox="1"/>
+          <p:nvPr/>
+        </p:nvSpPr>
+        <p:spPr>
+          <a:xfrm>
+            <a:off x="868680" y="5440680"/>
+            <a:ext cx="4617720" cy="1005840"/>
+          </a:xfrm>
+          <a:prstGeom prst="rect">
+            <a:avLst/>
+          </a:prstGeom>
+          <a:noFill/>
+        </p:spPr>
+        <p:txBody>
+          <a:bodyPr wrap="square" lIns="0" rIns="0" tIns="0" bIns="0">
+            <a:spAutoFit/>
+          </a:bodyPr>
+          <a:lstStyle/>
+          <a:p>
+            <a:pPr>
+              <a:spcAft>
+                <a:spcPts val="600"/>
+              </a:spcAft>
+            </a:pPr>
+            <a:r>
+              <a:rPr sz="1100" b="1">
+                <a:solidFill>
+                  <a:srgbClr val="1E2761"/>
+                </a:solidFill>
+                <a:latin typeface="Calibri"/>
+              </a:rPr>
+              <a:t>Nerlove &amp; Arrow (1962), </a:t>
+            </a:r>
+            <a:r>
+              <a:rPr sz="1100" b="0">
+                <a:solidFill>
+                  <a:srgbClr val="5B5F6E"/>
+                </a:solidFill>
+                <a:latin typeface="Calibri"/>
+              </a:rPr>
+              <a:t>“Optimal Advertising Policy under Dynamic Conditions” (Economica) — goodwill as a depreciating stock bought with current spending, which is the trade-off tested here.</a:t>
+            </a:r>
+          </a:p>
+        </p:txBody>
+      </p:sp>
+      <p:sp>
+        <p:nvSpPr>
+          <p:cNvPr id="17" name="Rectangle 16"/>
+          <p:cNvSpPr/>
+          <p:nvPr/>
+        </p:nvSpPr>
+        <p:spPr>
+          <a:xfrm>
+            <a:off x="5943600" y="1417320"/>
+            <a:ext cx="292608" cy="292608"/>
+          </a:xfrm>
+          <a:prstGeom prst="rect">
+            <a:avLst/>
+          </a:prstGeom>
+          <a:solidFill>
+            <a:srgbClr val="1E2761"/>
+          </a:solidFill>
+          <a:ln>
+            <a:noFill/>
+          </a:ln>
+        </p:spPr>
+        <p:style>
+          <a:lnRef idx="1">
+            <a:schemeClr val="accent1"/>
+          </a:lnRef>
+          <a:fillRef idx="3">
+            <a:schemeClr val="accent1"/>
+          </a:fillRef>
+          <a:effectRef idx="2">
+            <a:schemeClr val="accent1"/>
+          </a:effectRef>
+          <a:fontRef idx="minor">
+            <a:schemeClr val="lt1"/>
+          </a:fontRef>
+        </p:style>
+        <p:txBody>
+          <a:bodyPr rtlCol="0" anchor="ctr"/>
+          <a:lstStyle/>
+          <a:p/>
+        </p:txBody>
+      </p:sp>
+      <p:sp>
+        <p:nvSpPr>
+          <p:cNvPr id="18" name="TextBox 17"/>
+          <p:cNvSpPr txBox="1"/>
+          <p:nvPr/>
+        </p:nvSpPr>
+        <p:spPr>
+          <a:xfrm>
+            <a:off x="6355080" y="1389888"/>
+            <a:ext cx="5349240" cy="347472"/>
+          </a:xfrm>
+          <a:prstGeom prst="rect">
+            <a:avLst/>
+          </a:prstGeom>
+          <a:noFill/>
+        </p:spPr>
+        <p:txBody>
+          <a:bodyPr wrap="square" lIns="0" rIns="0" tIns="0" bIns="0">
+            <a:spAutoFit/>
+          </a:bodyPr>
+          <a:lstStyle/>
+          <a:p>
+            <a:pPr>
+              <a:spcAft>
+                <a:spcPts val="200"/>
+              </a:spcAft>
+            </a:pPr>
+            <a:r>
+              <a:rPr sz="1500" b="1">
+                <a:solidFill>
+                  <a:srgbClr val="1E2761"/>
+                </a:solidFill>
+                <a:latin typeface="Calibri"/>
+              </a:rPr>
+              <a:t>KEY RESULTS</a:t>
+            </a:r>
+          </a:p>
+        </p:txBody>
+      </p:sp>
+      <p:graphicFrame>
+        <p:nvGraphicFramePr>
+          <p:cNvPr id="19" name="Table 18"/>
+          <p:cNvGraphicFramePr>
+            <a:graphicFrameLocks noGrp="1"/>
+          </p:cNvGraphicFramePr>
+          <p:nvPr/>
+        </p:nvGraphicFramePr>
+        <p:xfrm>
+          <a:off x="5943600" y="1874519"/>
+          <a:ext cx="5760720" cy="1920240"/>
+        </p:xfrm>
+        <a:graphic>
+          <a:graphicData uri="http://schemas.openxmlformats.org/drawingml/2006/table">
+            <a:tbl>
+              <a:tblPr firstRow="1" bandRow="1">
+                <a:tableStyleId>{5C22544A-7EE6-4342-B048-85BDC9FD1C3A}</a:tableStyleId>
+              </a:tblPr>
+              <a:tblGrid>
+                <a:gridCol w="3200400"/>
+                <a:gridCol w="1463040"/>
+                <a:gridCol w="1097280"/>
+              </a:tblGrid>
+              <a:tr h="274320">
+                <a:tc>
+                  <a:txBody>
+                    <a:bodyPr/>
+                    <a:lstStyle/>
+                    <a:p>
+                      <a:r>
+                        <a:rPr sz="1100" b="1">
+                          <a:solidFill>
+                            <a:srgbClr val="FFFFFF"/>
+                          </a:solidFill>
+                          <a:latin typeface="Calibri"/>
+                        </a:rPr>
+                        <a:t>Metric</a:t>
+                      </a:r>
+                    </a:p>
+                  </a:txBody>
+                  <a:tcPr>
+                    <a:solidFill>
+                      <a:srgbClr val="1E2761"/>
+                    </a:solidFill>
+                  </a:tcPr>
+                </a:tc>
+                <a:tc>
+                  <a:txBody>
+                    <a:bodyPr/>
+                    <a:lstStyle/>
+                    <a:p>
+                      <a:r>
+                        <a:rPr sz="1100" b="1">
+                          <a:solidFill>
+                            <a:srgbClr val="FFFFFF"/>
+                          </a:solidFill>
+                          <a:latin typeface="Calibri"/>
+                        </a:rPr>
+                        <a:t>Value</a:t>
+                      </a:r>
+                    </a:p>
+                  </a:txBody>
+                  <a:tcPr>
+                    <a:solidFill>
+                      <a:srgbClr val="1E2761"/>
+                    </a:solidFill>
+                  </a:tcPr>
+                </a:tc>
+                <a:tc>
+                  <a:txBody>
+                    <a:bodyPr/>
+                    <a:lstStyle/>
+                    <a:p>
+                      <a:r>
+                        <a:rPr sz="1100" b="1">
+                          <a:solidFill>
+                            <a:srgbClr val="FFFFFF"/>
+                          </a:solidFill>
+                          <a:latin typeface="Calibri"/>
+                        </a:rPr>
+                        <a:t/>
+                      </a:r>
+                    </a:p>
+                  </a:txBody>
+                  <a:tcPr>
+                    <a:solidFill>
+                      <a:srgbClr val="1E2761"/>
+                    </a:solidFill>
+                  </a:tcPr>
+                </a:tc>
+              </a:tr>
+              <a:tr h="274320">
+                <a:tc>
+                  <a:txBody>
+                    <a:bodyPr/>
+                    <a:lstStyle/>
+                    <a:p>
+                      <a:r>
+                        <a:rPr sz="1100">
+                          <a:solidFill>
+                            <a:srgbClr val="1E2761"/>
+                          </a:solidFill>
+                          <a:latin typeface="Calibri"/>
+                        </a:rPr>
+                        <a:t>Flat at the optimum</a:t>
+                      </a:r>
+                    </a:p>
+                  </a:txBody>
+                  <a:tcPr>
+                    <a:solidFill>
+                      <a:srgbClr val="FFFFFF"/>
+                    </a:solidFill>
+                  </a:tcPr>
+                </a:tc>
+                <a:tc>
+                  <a:txBody>
+                    <a:bodyPr/>
+                    <a:lstStyle/>
+                    <a:p>
+                      <a:r>
+                        <a:rPr sz="1100">
+                          <a:solidFill>
+                            <a:srgbClr val="5B5F6E"/>
+                          </a:solidFill>
+                          <a:latin typeface="Calibri"/>
+                        </a:rPr>
+                        <a:t>43.2/wk</a:t>
+                      </a:r>
+                    </a:p>
+                  </a:txBody>
+                  <a:tcPr>
+                    <a:solidFill>
+                      <a:srgbClr val="FFFFFF"/>
+                    </a:solidFill>
+                  </a:tcPr>
+                </a:tc>
+                <a:tc>
+                  <a:txBody>
+                    <a:bodyPr/>
+                    <a:lstStyle/>
+                    <a:p>
+                      <a:pPr algn="ctr"/>
+                      <a:r>
+                        <a:rPr sz="1100" b="1">
+                          <a:solidFill>
+                            <a:srgbClr val="5B5F6E"/>
+                          </a:solidFill>
+                          <a:latin typeface="Calibri"/>
+                        </a:rPr>
+                        <a:t>—</a:t>
+                      </a:r>
+                    </a:p>
+                  </a:txBody>
+                  <a:tcPr>
+                    <a:solidFill>
+                      <a:srgbClr val="FFFFFF"/>
+                    </a:solidFill>
+                  </a:tcPr>
+                </a:tc>
+              </a:tr>
+              <a:tr h="274320">
+                <a:tc>
+                  <a:txBody>
+                    <a:bodyPr/>
+                    <a:lstStyle/>
+                    <a:p>
+                      <a:r>
+                        <a:rPr sz="1100">
+                          <a:solidFill>
+                            <a:srgbClr val="1E2761"/>
+                          </a:solidFill>
+                          <a:latin typeface="Calibri"/>
+                        </a:rPr>
+                        <a:t>Selected schedule, held out</a:t>
+                      </a:r>
+                    </a:p>
+                  </a:txBody>
+                  <a:tcPr>
+                    <a:solidFill>
+                      <a:srgbClr val="F7F8FC"/>
+                    </a:solidFill>
+                  </a:tcPr>
+                </a:tc>
+                <a:tc>
+                  <a:txBody>
+                    <a:bodyPr/>
+                    <a:lstStyle/>
+                    <a:p>
+                      <a:r>
+                        <a:rPr sz="1100">
+                          <a:solidFill>
+                            <a:srgbClr val="5B5F6E"/>
+                          </a:solidFill>
+                          <a:latin typeface="Calibri"/>
+                        </a:rPr>
+                        <a:t>44.3/wk</a:t>
+                      </a:r>
+                    </a:p>
+                  </a:txBody>
+                  <a:tcPr>
+                    <a:solidFill>
+                      <a:srgbClr val="F7F8FC"/>
+                    </a:solidFill>
+                  </a:tcPr>
+                </a:tc>
+                <a:tc>
+                  <a:txBody>
+                    <a:bodyPr/>
+                    <a:lstStyle/>
+                    <a:p>
+                      <a:pPr algn="ctr"/>
+                      <a:r>
+                        <a:rPr sz="1100" b="1">
+                          <a:solidFill>
+                            <a:srgbClr val="5B5F6E"/>
+                          </a:solidFill>
+                          <a:latin typeface="Calibri"/>
+                        </a:rPr>
+                        <a:t>—</a:t>
+                      </a:r>
+                    </a:p>
+                  </a:txBody>
+                  <a:tcPr>
+                    <a:solidFill>
+                      <a:srgbClr val="F7F8FC"/>
+                    </a:solidFill>
+                  </a:tcPr>
+                </a:tc>
+              </a:tr>
+              <a:tr h="274320">
+                <a:tc>
+                  <a:txBody>
+                    <a:bodyPr/>
+                    <a:lstStyle/>
+                    <a:p>
+                      <a:r>
+                        <a:rPr sz="1100">
+                          <a:solidFill>
+                            <a:srgbClr val="1E2761"/>
+                          </a:solidFill>
+                          <a:latin typeface="Calibri"/>
+                        </a:rPr>
+                        <a:t>  gain</a:t>
+                      </a:r>
+                    </a:p>
+                  </a:txBody>
+                  <a:tcPr>
+                    <a:solidFill>
+                      <a:srgbClr val="FFFFFF"/>
+                    </a:solidFill>
+                  </a:tcPr>
+                </a:tc>
+                <a:tc>
+                  <a:txBody>
+                    <a:bodyPr/>
+                    <a:lstStyle/>
+                    <a:p>
+                      <a:r>
+                        <a:rPr sz="1100">
+                          <a:solidFill>
+                            <a:srgbClr val="5B5F6E"/>
+                          </a:solidFill>
+                          <a:latin typeface="Calibri"/>
+                        </a:rPr>
+                        <a:t>+2.6%</a:t>
+                      </a:r>
+                    </a:p>
+                  </a:txBody>
+                  <a:tcPr>
+                    <a:solidFill>
+                      <a:srgbClr val="FFFFFF"/>
+                    </a:solidFill>
+                  </a:tcPr>
+                </a:tc>
+                <a:tc>
+                  <a:txBody>
+                    <a:bodyPr/>
+                    <a:lstStyle/>
+                    <a:p>
+                      <a:pPr algn="ctr"/>
+                      <a:r>
+                        <a:rPr sz="1100" b="1">
+                          <a:solidFill>
+                            <a:srgbClr val="1E7A4D"/>
+                          </a:solidFill>
+                          <a:latin typeface="Calibri"/>
+                        </a:rPr>
+                        <a:t>PASS</a:t>
+                      </a:r>
+                    </a:p>
+                  </a:txBody>
+                  <a:tcPr>
+                    <a:solidFill>
+                      <a:srgbClr val="FFFFFF"/>
+                    </a:solidFill>
+                  </a:tcPr>
+                </a:tc>
+              </a:tr>
+              <a:tr h="274320">
+                <a:tc>
+                  <a:txBody>
+                    <a:bodyPr/>
+                    <a:lstStyle/>
+                    <a:p>
+                      <a:r>
+                        <a:rPr sz="1100">
+                          <a:solidFill>
+                            <a:srgbClr val="1E2761"/>
+                          </a:solidFill>
+                          <a:latin typeface="Calibri"/>
+                        </a:rPr>
+                        <a:t>  its 95% CI vs +2%</a:t>
+                      </a:r>
+                    </a:p>
+                  </a:txBody>
+                  <a:tcPr>
+                    <a:solidFill>
+                      <a:srgbClr val="F7F8FC"/>
+                    </a:solidFill>
+                  </a:tcPr>
+                </a:tc>
+                <a:tc>
+                  <a:txBody>
+                    <a:bodyPr/>
+                    <a:lstStyle/>
+                    <a:p>
+                      <a:r>
+                        <a:rPr sz="1100">
+                          <a:solidFill>
+                            <a:srgbClr val="5B5F6E"/>
+                          </a:solidFill>
+                          <a:latin typeface="Calibri"/>
+                        </a:rPr>
+                        <a:t>[+2.0%, +3.2%]</a:t>
+                      </a:r>
+                    </a:p>
+                  </a:txBody>
+                  <a:tcPr>
+                    <a:solidFill>
+                      <a:srgbClr val="F7F8FC"/>
+                    </a:solidFill>
+                  </a:tcPr>
+                </a:tc>
+                <a:tc>
+                  <a:txBody>
+                    <a:bodyPr/>
+                    <a:lstStyle/>
+                    <a:p>
+                      <a:pPr algn="ctr"/>
+                      <a:r>
+                        <a:rPr sz="1100" b="1">
+                          <a:solidFill>
+                            <a:srgbClr val="1E7A4D"/>
+                          </a:solidFill>
+                          <a:latin typeface="Calibri"/>
+                        </a:rPr>
+                        <a:t>PASS</a:t>
+                      </a:r>
+                    </a:p>
+                  </a:txBody>
+                  <a:tcPr>
+                    <a:solidFill>
+                      <a:srgbClr val="F7F8FC"/>
+                    </a:solidFill>
+                  </a:tcPr>
+                </a:tc>
+              </a:tr>
+              <a:tr h="274320">
+                <a:tc>
+                  <a:txBody>
+                    <a:bodyPr/>
+                    <a:lstStyle/>
+                    <a:p>
+                      <a:r>
+                        <a:rPr sz="1100">
+                          <a:solidFill>
+                            <a:srgbClr val="1E2761"/>
+                          </a:solidFill>
+                          <a:latin typeface="Calibri"/>
+                        </a:rPr>
+                        <a:t>delta = 0 control, same path</a:t>
+                      </a:r>
+                    </a:p>
+                  </a:txBody>
+                  <a:tcPr>
+                    <a:solidFill>
+                      <a:srgbClr val="FFFFFF"/>
+                    </a:solidFill>
+                  </a:tcPr>
+                </a:tc>
+                <a:tc>
+                  <a:txBody>
+                    <a:bodyPr/>
+                    <a:lstStyle/>
+                    <a:p>
+                      <a:r>
+                        <a:rPr sz="1100">
+                          <a:solidFill>
+                            <a:srgbClr val="5B5F6E"/>
+                          </a:solidFill>
+                          <a:latin typeface="Calibri"/>
+                        </a:rPr>
+                        <a:t>-1.2%</a:t>
+                      </a:r>
+                    </a:p>
+                  </a:txBody>
+                  <a:tcPr>
+                    <a:solidFill>
+                      <a:srgbClr val="FFFFFF"/>
+                    </a:solidFill>
+                  </a:tcPr>
+                </a:tc>
+                <a:tc>
+                  <a:txBody>
+                    <a:bodyPr/>
+                    <a:lstStyle/>
+                    <a:p>
+                      <a:pPr algn="ctr"/>
+                      <a:r>
+                        <a:rPr sz="1100" b="1">
+                          <a:solidFill>
+                            <a:srgbClr val="5B5F6E"/>
+                          </a:solidFill>
+                          <a:latin typeface="Calibri"/>
+                        </a:rPr>
+                        <a:t>—</a:t>
+                      </a:r>
+                    </a:p>
+                  </a:txBody>
+                  <a:tcPr>
+                    <a:solidFill>
+                      <a:srgbClr val="FFFFFF"/>
+                    </a:solidFill>
+                  </a:tcPr>
+                </a:tc>
+              </a:tr>
+              <a:tr h="274320">
+                <a:tc>
+                  <a:txBody>
+                    <a:bodyPr/>
+                    <a:lstStyle/>
+                    <a:p>
+                      <a:r>
+                        <a:rPr sz="1100">
+                          <a:solidFill>
+                            <a:srgbClr val="1E2761"/>
+                          </a:solidFill>
+                          <a:latin typeface="Calibri"/>
+                        </a:rPr>
+                        <a:t>Best harvesting schedule</a:t>
+                      </a:r>
+                    </a:p>
+                  </a:txBody>
+                  <a:tcPr>
+                    <a:solidFill>
+                      <a:srgbClr val="F7F8FC"/>
+                    </a:solidFill>
+                  </a:tcPr>
+                </a:tc>
+                <a:tc>
+                  <a:txBody>
+                    <a:bodyPr/>
+                    <a:lstStyle/>
+                    <a:p>
+                      <a:r>
+                        <a:rPr sz="1100">
+                          <a:solidFill>
+                            <a:srgbClr val="5B5F6E"/>
+                          </a:solidFill>
+                          <a:latin typeface="Calibri"/>
+                        </a:rPr>
+                        <a:t>-5.5%</a:t>
+                      </a:r>
+                    </a:p>
+                  </a:txBody>
+                  <a:tcPr>
+                    <a:solidFill>
+                      <a:srgbClr val="F7F8FC"/>
+                    </a:solidFill>
+                  </a:tcPr>
+                </a:tc>
+                <a:tc>
+                  <a:txBody>
+                    <a:bodyPr/>
+                    <a:lstStyle/>
+                    <a:p>
+                      <a:pPr algn="ctr"/>
+                      <a:r>
+                        <a:rPr sz="1100" b="1">
+                          <a:solidFill>
+                            <a:srgbClr val="5B5F6E"/>
+                          </a:solidFill>
+                          <a:latin typeface="Calibri"/>
+                        </a:rPr>
+                        <a:t>—</a:t>
+                      </a:r>
+                    </a:p>
+                  </a:txBody>
+                  <a:tcPr>
+                    <a:solidFill>
+                      <a:srgbClr val="F7F8FC"/>
+                    </a:solidFill>
+                  </a:tcPr>
+                </a:tc>
+              </a:tr>
+            </a:tbl>
+          </a:graphicData>
+        </a:graphic>
+      </p:graphicFrame>
+      <p:sp>
+        <p:nvSpPr>
+          <p:cNvPr id="20" name="Rectangle 19"/>
+          <p:cNvSpPr/>
+          <p:nvPr/>
+        </p:nvSpPr>
+        <p:spPr>
+          <a:xfrm>
+            <a:off x="5943600" y="4023360"/>
+            <a:ext cx="292608" cy="292608"/>
+          </a:xfrm>
+          <a:prstGeom prst="rect">
+            <a:avLst/>
+          </a:prstGeom>
+          <a:solidFill>
+            <a:srgbClr val="1E2761"/>
+          </a:solidFill>
+          <a:ln>
+            <a:noFill/>
+          </a:ln>
+        </p:spPr>
+        <p:style>
+          <a:lnRef idx="1">
+            <a:schemeClr val="accent1"/>
+          </a:lnRef>
+          <a:fillRef idx="3">
+            <a:schemeClr val="accent1"/>
+          </a:fillRef>
+          <a:effectRef idx="2">
+            <a:schemeClr val="accent1"/>
+          </a:effectRef>
+          <a:fontRef idx="minor">
+            <a:schemeClr val="lt1"/>
+          </a:fontRef>
+        </p:style>
+        <p:txBody>
+          <a:bodyPr rtlCol="0" anchor="ctr"/>
+          <a:lstStyle/>
+          <a:p/>
+        </p:txBody>
+      </p:sp>
+      <p:sp>
+        <p:nvSpPr>
+          <p:cNvPr id="21" name="TextBox 20"/>
+          <p:cNvSpPr txBox="1"/>
+          <p:nvPr/>
+        </p:nvSpPr>
+        <p:spPr>
+          <a:xfrm>
+            <a:off x="6355080" y="3995928"/>
+            <a:ext cx="5349240" cy="347472"/>
+          </a:xfrm>
+          <a:prstGeom prst="rect">
+            <a:avLst/>
+          </a:prstGeom>
+          <a:noFill/>
+        </p:spPr>
+        <p:txBody>
+          <a:bodyPr wrap="square" lIns="0" rIns="0" tIns="0" bIns="0">
+            <a:spAutoFit/>
+          </a:bodyPr>
+          <a:lstStyle/>
+          <a:p>
+            <a:pPr>
+              <a:spcAft>
+                <a:spcPts val="200"/>
+              </a:spcAft>
+            </a:pPr>
+            <a:r>
+              <a:rPr sz="1500" b="1">
+                <a:solidFill>
+                  <a:srgbClr val="1E2761"/>
+                </a:solidFill>
+                <a:latin typeface="Calibri"/>
+              </a:rPr>
+              <a:t>RESEARCH QUESTION</a:t>
+            </a:r>
+          </a:p>
+        </p:txBody>
+      </p:sp>
+      <p:sp>
+        <p:nvSpPr>
+          <p:cNvPr id="22" name="Rectangle 21"/>
+          <p:cNvSpPr/>
+          <p:nvPr/>
+        </p:nvSpPr>
+        <p:spPr>
+          <a:xfrm>
+            <a:off x="5943600" y="4434840"/>
+            <a:ext cx="5760720" cy="1965960"/>
+          </a:xfrm>
+          <a:prstGeom prst="rect">
+            <a:avLst/>
+          </a:prstGeom>
+          <a:solidFill>
+            <a:srgbClr val="F7F8FC"/>
+          </a:solidFill>
+          <a:ln>
+            <a:noFill/>
+          </a:ln>
+        </p:spPr>
+        <p:style>
+          <a:lnRef idx="1">
+            <a:schemeClr val="accent1"/>
+          </a:lnRef>
+          <a:fillRef idx="3">
+            <a:schemeClr val="accent1"/>
+          </a:fillRef>
+          <a:effectRef idx="2">
+            <a:schemeClr val="accent1"/>
+          </a:effectRef>
+          <a:fontRef idx="minor">
+            <a:schemeClr val="lt1"/>
+          </a:fontRef>
+        </p:style>
+        <p:txBody>
+          <a:bodyPr rtlCol="0" anchor="ctr"/>
+          <a:lstStyle/>
+          <a:p/>
+        </p:txBody>
+      </p:sp>
+      <p:sp>
+        <p:nvSpPr>
+          <p:cNvPr id="23" name="TextBox 22"/>
+          <p:cNvSpPr txBox="1"/>
+          <p:nvPr/>
+        </p:nvSpPr>
+        <p:spPr>
+          <a:xfrm>
+            <a:off x="6217920" y="4572000"/>
+            <a:ext cx="5212080" cy="1737360"/>
+          </a:xfrm>
+          <a:prstGeom prst="rect">
+            <a:avLst/>
+          </a:prstGeom>
+          <a:noFill/>
+        </p:spPr>
+        <p:txBody>
+          <a:bodyPr wrap="square" lIns="0" rIns="0" tIns="0" bIns="0">
+            <a:spAutoFit/>
+          </a:bodyPr>
+          <a:lstStyle/>
+          <a:p>
+            <a:pPr>
+              <a:spcAft>
+                <a:spcPts val="500"/>
+              </a:spcAft>
+            </a:pPr>
+            <a:r>
+              <a:rPr sz="1000" b="0">
+                <a:solidFill>
+                  <a:srgbClr val="5B5F6E"/>
+                </a:solidFill>
+                <a:latin typeface="Calibri"/>
+              </a:rPr>
+              <a:t>In an environment where loyalty persists as a stock, can any pricing schedule beat the best standing price?</a:t>
+            </a:r>
+          </a:p>
+          <a:p>
+            <a:pPr>
+              <a:spcAft>
+                <a:spcPts val="500"/>
+              </a:spcAft>
+            </a:pPr>
+            <a:r>
+              <a:rPr sz="1000" b="1">
+                <a:solidFill>
+                  <a:srgbClr val="1E2761"/>
+                </a:solidFill>
+                <a:latin typeface="Calibri"/>
+              </a:rPr>
+              <a:t>Finding: </a:t>
+            </a:r>
+            <a:r>
+              <a:rPr sz="1000" b="0">
+                <a:solidFill>
+                  <a:srgbClr val="5B5F6E"/>
+                </a:solidFill>
+                <a:latin typeface="Calibri"/>
+              </a:rPr>
+              <a:t>Yes, and the control says why: the winning path is invest 16wk @0.90x -&gt; 1.00x, worth +2.6% on held-out seeds, and the identical path with the investment channel switched off (delta = 0) loses 1.2%. The gain is loyalty, not the price path. But the value is in acquisition, not extraction — every schedule that ever charges above the standing price loses, the best of them by 6%.</a:t>
+            </a:r>
+          </a:p>
+          <a:p>
+            <a:pPr>
+              <a:spcAft>
+                <a:spcPts val="500"/>
+              </a:spcAft>
+            </a:pPr>
+            <a:r>
+              <a:rPr sz="1000" b="1">
+                <a:solidFill>
+                  <a:srgbClr val="1E2761"/>
+                </a:solidFill>
+                <a:latin typeface="Calibri"/>
+              </a:rPr>
+              <a:t>Caveat: </a:t>
+            </a:r>
+            <a:r>
+              <a:rPr sz="1000" b="0">
+                <a:solidFill>
+                  <a:srgbClr val="5B5F6E"/>
+                </a:solidFill>
+                <a:latin typeface="Calibri"/>
+              </a:rPr>
+              <a:t>A marginal pass at the edge of the ladder. The CI's lower bound sits on the +2% threshold, and headroom appears only at delta = 1, the strongest investment channel tested; the registered delta = 0.25 gives +0.1% and would have failed. Carrying the best cell into 7e-3 is selection on the outcome, pre-registered as valid for an existence claim and not for effect size. The ladder is not extended to chase a larger effect.</a:t>
             </a:r>
           </a:p>
         </p:txBody>

--- a/project_tracking.pptx
+++ b/project_tracking.pptx
@@ -16,6 +16,7 @@
     <p:sldId id="264" r:id="rId15"/>
     <p:sldId id="265" r:id="rId16"/>
     <p:sldId id="266" r:id="rId17"/>
+    <p:sldId id="267" r:id="rId18"/>
   </p:sldIdLst>
   <p:sldSz cx="12191969" cy="6858000" type="screen4x3"/>
   <p:notesSz cx="6858000" cy="9144000"/>
@@ -7668,6 +7669,1591 @@
                 <a:latin typeface="Calibri"/>
               </a:rPr>
               <a:t>A marginal pass at the edge of the ladder. The CI's lower bound sits on the +2% threshold, and headroom appears only at delta = 1, the strongest investment channel tested; the registered delta = 0.25 gives +0.1% and would have failed. Carrying the best cell into 7e-3 is selection on the outcome, pre-registered as valid for an existence claim and not for effect size. The ladder is not extended to chase a larger effect.</a:t>
+            </a:r>
+          </a:p>
+        </p:txBody>
+      </p:sp>
+      <p:sp>
+        <p:nvSpPr>
+          <p:cNvPr id="24" name="TextBox 23"/>
+          <p:cNvSpPr txBox="1"/>
+          <p:nvPr/>
+        </p:nvSpPr>
+        <p:spPr>
+          <a:xfrm>
+            <a:off x="457200" y="6446520"/>
+            <a:ext cx="11247120" cy="274320"/>
+          </a:xfrm>
+          <a:prstGeom prst="rect">
+            <a:avLst/>
+          </a:prstGeom>
+          <a:noFill/>
+        </p:spPr>
+        <p:txBody>
+          <a:bodyPr wrap="square" lIns="0" rIns="0" tIns="0" bIns="0">
+            <a:spAutoFit/>
+          </a:bodyPr>
+          <a:lstStyle/>
+          <a:p>
+            <a:pPr>
+              <a:spcAft>
+                <a:spcPts val="200"/>
+              </a:spcAft>
+            </a:pPr>
+            <a:r>
+              <a:rPr sz="950" b="0">
+                <a:solidFill>
+                  <a:srgbClr val="5B5F6E"/>
+                </a:solidFill>
+                <a:latin typeface="Calibri"/>
+              </a:rPr>
+              <a:t>Generated automatically at phase completion  ·  Phase Completion Deliverable  ·  market-sim project</a:t>
+            </a:r>
+          </a:p>
+        </p:txBody>
+      </p:sp>
+    </p:spTree>
+  </p:cSld>
+  <p:clrMapOvr>
+    <a:masterClrMapping/>
+  </p:clrMapOvr>
+</p:sld>
+</file>
+
+<file path=ppt/slides/slide12.xml><?xml version="1.0" encoding="utf-8"?>
+<p:sld xmlns:a="http://schemas.openxmlformats.org/drawingml/2006/main" xmlns:p="http://schemas.openxmlformats.org/presentationml/2006/main" xmlns:r="http://schemas.openxmlformats.org/officeDocument/2006/relationships">
+  <p:cSld>
+    <p:spTree>
+      <p:nvGrpSpPr>
+        <p:cNvPr id="1" name=""/>
+        <p:cNvGrpSpPr/>
+        <p:nvPr/>
+      </p:nvGrpSpPr>
+      <p:grpSpPr/>
+      <p:sp>
+        <p:nvSpPr>
+          <p:cNvPr id="2" name="TextBox 1"/>
+          <p:cNvSpPr txBox="1"/>
+          <p:nvPr/>
+        </p:nvSpPr>
+        <p:spPr>
+          <a:xfrm>
+            <a:off x="457200" y="320040"/>
+            <a:ext cx="8229600" cy="548640"/>
+          </a:xfrm>
+          <a:prstGeom prst="rect">
+            <a:avLst/>
+          </a:prstGeom>
+          <a:noFill/>
+        </p:spPr>
+        <p:txBody>
+          <a:bodyPr wrap="square" lIns="0" rIns="0" tIns="0" bIns="0">
+            <a:spAutoFit/>
+          </a:bodyPr>
+          <a:lstStyle/>
+          <a:p>
+            <a:pPr>
+              <a:spcAft>
+                <a:spcPts val="200"/>
+              </a:spcAft>
+            </a:pPr>
+            <a:r>
+              <a:rPr sz="3200" b="1">
+                <a:solidFill>
+                  <a:srgbClr val="1E2761"/>
+                </a:solidFill>
+                <a:latin typeface="Cambria"/>
+              </a:rPr>
+              <a:t>Phase 7 — Mechanism Sufficiency — 7e-3a Does Context Pay?</a:t>
+            </a:r>
+          </a:p>
+        </p:txBody>
+      </p:sp>
+      <p:sp>
+        <p:nvSpPr>
+          <p:cNvPr id="3" name="TextBox 2"/>
+          <p:cNvSpPr txBox="1"/>
+          <p:nvPr/>
+        </p:nvSpPr>
+        <p:spPr>
+          <a:xfrm>
+            <a:off x="457200" y="868680"/>
+            <a:ext cx="8229600" cy="274320"/>
+          </a:xfrm>
+          <a:prstGeom prst="rect">
+            <a:avLst/>
+          </a:prstGeom>
+          <a:noFill/>
+        </p:spPr>
+        <p:txBody>
+          <a:bodyPr wrap="square" lIns="0" rIns="0" tIns="0" bIns="0">
+            <a:spAutoFit/>
+          </a:bodyPr>
+          <a:lstStyle/>
+          <a:p>
+            <a:pPr>
+              <a:spcAft>
+                <a:spcPts val="200"/>
+              </a:spcAft>
+            </a:pPr>
+            <a:r>
+              <a:rPr sz="1200" b="0">
+                <a:solidFill>
+                  <a:srgbClr val="5B5F6E"/>
+                </a:solidFill>
+                <a:latin typeface="Calibri"/>
+              </a:rPr>
+              <a:t>7c's question, asked where the state exists  ·  git tag: phase7e3a-context  ·  tune on 2000–2059, test on 0–29</a:t>
+            </a:r>
+          </a:p>
+        </p:txBody>
+      </p:sp>
+      <p:sp>
+        <p:nvSpPr>
+          <p:cNvPr id="4" name="Rounded Rectangle 3"/>
+          <p:cNvSpPr/>
+          <p:nvPr/>
+        </p:nvSpPr>
+        <p:spPr>
+          <a:xfrm>
+            <a:off x="9464040" y="365760"/>
+            <a:ext cx="2240280" cy="384048"/>
+          </a:xfrm>
+          <a:prstGeom prst="roundRect">
+            <a:avLst/>
+          </a:prstGeom>
+          <a:solidFill>
+            <a:srgbClr val="C9922E"/>
+          </a:solidFill>
+          <a:ln>
+            <a:noFill/>
+          </a:ln>
+        </p:spPr>
+        <p:style>
+          <a:lnRef idx="1">
+            <a:schemeClr val="accent1"/>
+          </a:lnRef>
+          <a:fillRef idx="3">
+            <a:schemeClr val="accent1"/>
+          </a:fillRef>
+          <a:effectRef idx="2">
+            <a:schemeClr val="accent1"/>
+          </a:effectRef>
+          <a:fontRef idx="minor">
+            <a:schemeClr val="lt1"/>
+          </a:fontRef>
+        </p:style>
+        <p:txBody>
+          <a:bodyPr rtlCol="0" anchor="ctr"/>
+          <a:lstStyle/>
+          <a:p>
+            <a:pPr algn="ctr"/>
+            <a:r>
+              <a:rPr sz="1050" b="1">
+                <a:solidFill>
+                  <a:srgbClr val="FFFFFF"/>
+                </a:solidFill>
+                <a:latin typeface="Calibri"/>
+              </a:rPr>
+              <a:t>EQUIVALENT — CONTEXT DOES NOT PAY</a:t>
+            </a:r>
+          </a:p>
+        </p:txBody>
+      </p:sp>
+      <p:sp>
+        <p:nvSpPr>
+          <p:cNvPr id="5" name="Rectangle 4"/>
+          <p:cNvSpPr/>
+          <p:nvPr/>
+        </p:nvSpPr>
+        <p:spPr>
+          <a:xfrm>
+            <a:off x="457200" y="1417320"/>
+            <a:ext cx="292608" cy="292608"/>
+          </a:xfrm>
+          <a:prstGeom prst="rect">
+            <a:avLst/>
+          </a:prstGeom>
+          <a:solidFill>
+            <a:srgbClr val="1E2761"/>
+          </a:solidFill>
+          <a:ln>
+            <a:noFill/>
+          </a:ln>
+        </p:spPr>
+        <p:style>
+          <a:lnRef idx="1">
+            <a:schemeClr val="accent1"/>
+          </a:lnRef>
+          <a:fillRef idx="3">
+            <a:schemeClr val="accent1"/>
+          </a:fillRef>
+          <a:effectRef idx="2">
+            <a:schemeClr val="accent1"/>
+          </a:effectRef>
+          <a:fontRef idx="minor">
+            <a:schemeClr val="lt1"/>
+          </a:fontRef>
+        </p:style>
+        <p:txBody>
+          <a:bodyPr rtlCol="0" anchor="ctr"/>
+          <a:lstStyle/>
+          <a:p/>
+        </p:txBody>
+      </p:sp>
+      <p:sp>
+        <p:nvSpPr>
+          <p:cNvPr id="6" name="TextBox 5"/>
+          <p:cNvSpPr txBox="1"/>
+          <p:nvPr/>
+        </p:nvSpPr>
+        <p:spPr>
+          <a:xfrm>
+            <a:off x="868680" y="1389888"/>
+            <a:ext cx="4617720" cy="347472"/>
+          </a:xfrm>
+          <a:prstGeom prst="rect">
+            <a:avLst/>
+          </a:prstGeom>
+          <a:noFill/>
+        </p:spPr>
+        <p:txBody>
+          <a:bodyPr wrap="square" lIns="0" rIns="0" tIns="0" bIns="0">
+            <a:spAutoFit/>
+          </a:bodyPr>
+          <a:lstStyle/>
+          <a:p>
+            <a:pPr>
+              <a:spcAft>
+                <a:spcPts val="200"/>
+              </a:spcAft>
+            </a:pPr>
+            <a:r>
+              <a:rPr sz="1500" b="1">
+                <a:solidFill>
+                  <a:srgbClr val="1E2761"/>
+                </a:solidFill>
+                <a:latin typeface="Calibri"/>
+              </a:rPr>
+              <a:t>AGENTS</a:t>
+            </a:r>
+          </a:p>
+        </p:txBody>
+      </p:sp>
+      <p:sp>
+        <p:nvSpPr>
+          <p:cNvPr id="7" name="TextBox 6"/>
+          <p:cNvSpPr txBox="1"/>
+          <p:nvPr/>
+        </p:nvSpPr>
+        <p:spPr>
+          <a:xfrm>
+            <a:off x="868680" y="1828800"/>
+            <a:ext cx="4617720" cy="566928"/>
+          </a:xfrm>
+          <a:prstGeom prst="rect">
+            <a:avLst/>
+          </a:prstGeom>
+          <a:noFill/>
+        </p:spPr>
+        <p:txBody>
+          <a:bodyPr wrap="square" lIns="0" rIns="0" tIns="0" bIns="0">
+            <a:spAutoFit/>
+          </a:bodyPr>
+          <a:lstStyle/>
+          <a:p>
+            <a:pPr>
+              <a:spcAft>
+                <a:spcPts val="200"/>
+              </a:spcAft>
+            </a:pPr>
+            <a:r>
+              <a:rPr sz="1300" b="1">
+                <a:solidFill>
+                  <a:srgbClr val="1E2761"/>
+                </a:solidFill>
+                <a:latin typeface="Calibri"/>
+              </a:rPr>
+              <a:t>Buyers: </a:t>
+            </a:r>
+            <a:r>
+              <a:rPr sz="1300" b="0">
+                <a:solidFill>
+                  <a:srgbClr val="5B5F6E"/>
+                </a:solidFill>
+                <a:latin typeface="Calibri"/>
+              </a:rPr>
+              <a:t>100 — Poor 70 / Middle 20 / Rich 10, dispersed budgets</a:t>
+            </a:r>
+          </a:p>
+          <a:p>
+            <a:pPr>
+              <a:spcAft>
+                <a:spcPts val="200"/>
+              </a:spcAft>
+            </a:pPr>
+            <a:r>
+              <a:rPr sz="1300" b="1">
+                <a:solidFill>
+                  <a:srgbClr val="1E2761"/>
+                </a:solidFill>
+                <a:latin typeface="Calibri"/>
+              </a:rPr>
+              <a:t>Sellers: </a:t>
+            </a:r>
+            <a:r>
+              <a:rPr sz="1300" b="0">
+                <a:solidFill>
+                  <a:srgbClr val="5B5F6E"/>
+                </a:solidFill>
+                <a:latin typeface="Calibri"/>
+              </a:rPr>
+              <a:t>5 — one learns its price, the rest hold their list price</a:t>
+            </a:r>
+          </a:p>
+        </p:txBody>
+      </p:sp>
+      <p:sp>
+        <p:nvSpPr>
+          <p:cNvPr id="8" name="Rectangle 7"/>
+          <p:cNvSpPr/>
+          <p:nvPr/>
+        </p:nvSpPr>
+        <p:spPr>
+          <a:xfrm>
+            <a:off x="457200" y="2651760"/>
+            <a:ext cx="292608" cy="292608"/>
+          </a:xfrm>
+          <a:prstGeom prst="rect">
+            <a:avLst/>
+          </a:prstGeom>
+          <a:solidFill>
+            <a:srgbClr val="1E2761"/>
+          </a:solidFill>
+          <a:ln>
+            <a:noFill/>
+          </a:ln>
+        </p:spPr>
+        <p:style>
+          <a:lnRef idx="1">
+            <a:schemeClr val="accent1"/>
+          </a:lnRef>
+          <a:fillRef idx="3">
+            <a:schemeClr val="accent1"/>
+          </a:fillRef>
+          <a:effectRef idx="2">
+            <a:schemeClr val="accent1"/>
+          </a:effectRef>
+          <a:fontRef idx="minor">
+            <a:schemeClr val="lt1"/>
+          </a:fontRef>
+        </p:style>
+        <p:txBody>
+          <a:bodyPr rtlCol="0" anchor="ctr"/>
+          <a:lstStyle/>
+          <a:p/>
+        </p:txBody>
+      </p:sp>
+      <p:sp>
+        <p:nvSpPr>
+          <p:cNvPr id="9" name="TextBox 8"/>
+          <p:cNvSpPr txBox="1"/>
+          <p:nvPr/>
+        </p:nvSpPr>
+        <p:spPr>
+          <a:xfrm>
+            <a:off x="868680" y="2624328"/>
+            <a:ext cx="4617720" cy="347472"/>
+          </a:xfrm>
+          <a:prstGeom prst="rect">
+            <a:avLst/>
+          </a:prstGeom>
+          <a:noFill/>
+        </p:spPr>
+        <p:txBody>
+          <a:bodyPr wrap="square" lIns="0" rIns="0" tIns="0" bIns="0">
+            <a:spAutoFit/>
+          </a:bodyPr>
+          <a:lstStyle/>
+          <a:p>
+            <a:pPr>
+              <a:spcAft>
+                <a:spcPts val="200"/>
+              </a:spcAft>
+            </a:pPr>
+            <a:r>
+              <a:rPr sz="1500" b="1">
+                <a:solidFill>
+                  <a:srgbClr val="1E2761"/>
+                </a:solidFill>
+                <a:latin typeface="Calibri"/>
+              </a:rPr>
+              <a:t>ENVIRONMENT &amp; CONTEXT</a:t>
+            </a:r>
+          </a:p>
+        </p:txBody>
+      </p:sp>
+      <p:sp>
+        <p:nvSpPr>
+          <p:cNvPr id="10" name="TextBox 9"/>
+          <p:cNvSpPr txBox="1"/>
+          <p:nvPr/>
+        </p:nvSpPr>
+        <p:spPr>
+          <a:xfrm>
+            <a:off x="868680" y="3063240"/>
+            <a:ext cx="4617720" cy="548640"/>
+          </a:xfrm>
+          <a:prstGeom prst="rect">
+            <a:avLst/>
+          </a:prstGeom>
+          <a:noFill/>
+        </p:spPr>
+        <p:txBody>
+          <a:bodyPr wrap="square" lIns="0" rIns="0" tIns="0" bIns="0">
+            <a:spAutoFit/>
+          </a:bodyPr>
+          <a:lstStyle/>
+          <a:p>
+            <a:pPr>
+              <a:spcAft>
+                <a:spcPts val="200"/>
+              </a:spcAft>
+            </a:pPr>
+            <a:r>
+              <a:rPr sz="1300" b="0">
+                <a:solidFill>
+                  <a:srgbClr val="5B5F6E"/>
+                </a:solidFill>
+                <a:latin typeface="Calibri"/>
+              </a:rPr>
+              <a:t>-  7e-1's calibrated stock at the cell 7e-2 carried: delta = 1.0,</a:t>
+            </a:r>
+          </a:p>
+          <a:p>
+            <a:pPr>
+              <a:spcAft>
+                <a:spcPts val="200"/>
+              </a:spcAft>
+            </a:pPr>
+            <a:r>
+              <a:rPr sz="1300" b="0">
+                <a:solidFill>
+                  <a:srgbClr val="5B5F6E"/>
+                </a:solidFill>
+                <a:latin typeface="Calibri"/>
+              </a:rPr>
+              <a:t>   L_max = 3.30, standing price 2.65, arms at ±20% of it.</a:t>
+            </a:r>
+          </a:p>
+          <a:p>
+            <a:pPr>
+              <a:spcAft>
+                <a:spcPts val="200"/>
+              </a:spcAft>
+            </a:pPr>
+            <a:r>
+              <a:rPr sz="1300" b="0">
+                <a:solidFill>
+                  <a:srgbClr val="5B5F6E"/>
+                </a:solidFill>
+                <a:latin typeface="Calibri"/>
+              </a:rPr>
+              <a:t>-  Gate 1 established the state is dispersed and persistent.</a:t>
+            </a:r>
+          </a:p>
+        </p:txBody>
+      </p:sp>
+      <p:sp>
+        <p:nvSpPr>
+          <p:cNvPr id="11" name="Rectangle 10"/>
+          <p:cNvSpPr/>
+          <p:nvPr/>
+        </p:nvSpPr>
+        <p:spPr>
+          <a:xfrm>
+            <a:off x="457200" y="3886200"/>
+            <a:ext cx="292608" cy="292608"/>
+          </a:xfrm>
+          <a:prstGeom prst="rect">
+            <a:avLst/>
+          </a:prstGeom>
+          <a:solidFill>
+            <a:srgbClr val="1E2761"/>
+          </a:solidFill>
+          <a:ln>
+            <a:noFill/>
+          </a:ln>
+        </p:spPr>
+        <p:style>
+          <a:lnRef idx="1">
+            <a:schemeClr val="accent1"/>
+          </a:lnRef>
+          <a:fillRef idx="3">
+            <a:schemeClr val="accent1"/>
+          </a:fillRef>
+          <a:effectRef idx="2">
+            <a:schemeClr val="accent1"/>
+          </a:effectRef>
+          <a:fontRef idx="minor">
+            <a:schemeClr val="lt1"/>
+          </a:fontRef>
+        </p:style>
+        <p:txBody>
+          <a:bodyPr rtlCol="0" anchor="ctr"/>
+          <a:lstStyle/>
+          <a:p/>
+        </p:txBody>
+      </p:sp>
+      <p:sp>
+        <p:nvSpPr>
+          <p:cNvPr id="12" name="TextBox 11"/>
+          <p:cNvSpPr txBox="1"/>
+          <p:nvPr/>
+        </p:nvSpPr>
+        <p:spPr>
+          <a:xfrm>
+            <a:off x="868680" y="3858768"/>
+            <a:ext cx="4617720" cy="347472"/>
+          </a:xfrm>
+          <a:prstGeom prst="rect">
+            <a:avLst/>
+          </a:prstGeom>
+          <a:noFill/>
+        </p:spPr>
+        <p:txBody>
+          <a:bodyPr wrap="square" lIns="0" rIns="0" tIns="0" bIns="0">
+            <a:spAutoFit/>
+          </a:bodyPr>
+          <a:lstStyle/>
+          <a:p>
+            <a:pPr>
+              <a:spcAft>
+                <a:spcPts val="200"/>
+              </a:spcAft>
+            </a:pPr>
+            <a:r>
+              <a:rPr sz="1500" b="1">
+                <a:solidFill>
+                  <a:srgbClr val="1E2761"/>
+                </a:solidFill>
+                <a:latin typeface="Calibri"/>
+              </a:rPr>
+              <a:t>METHOD</a:t>
+            </a:r>
+          </a:p>
+        </p:txBody>
+      </p:sp>
+      <p:sp>
+        <p:nvSpPr>
+          <p:cNvPr id="13" name="TextBox 12"/>
+          <p:cNvSpPr txBox="1"/>
+          <p:nvPr/>
+        </p:nvSpPr>
+        <p:spPr>
+          <a:xfrm>
+            <a:off x="868680" y="4297680"/>
+            <a:ext cx="4617720" cy="594360"/>
+          </a:xfrm>
+          <a:prstGeom prst="rect">
+            <a:avLst/>
+          </a:prstGeom>
+          <a:noFill/>
+        </p:spPr>
+        <p:txBody>
+          <a:bodyPr wrap="square" lIns="0" rIns="0" tIns="0" bIns="0">
+            <a:spAutoFit/>
+          </a:bodyPr>
+          <a:lstStyle/>
+          <a:p>
+            <a:pPr>
+              <a:spcAft>
+                <a:spcPts val="200"/>
+              </a:spcAft>
+            </a:pPr>
+            <a:r>
+              <a:rPr sz="1300" b="0">
+                <a:solidFill>
+                  <a:srgbClr val="5B5F6E"/>
+                </a:solidFill>
+                <a:latin typeface="Calibri"/>
+              </a:rPr>
+              <a:t>LinUCB on the loyalty stock and the week, against the identical</a:t>
+            </a:r>
+          </a:p>
+          <a:p>
+            <a:pPr>
+              <a:spcAft>
+                <a:spcPts val="200"/>
+              </a:spcAft>
+            </a:pPr>
+            <a:r>
+              <a:rPr sz="1300" b="0">
+                <a:solidFill>
+                  <a:srgbClr val="5B5F6E"/>
+                </a:solidFill>
+                <a:latin typeface="Calibri"/>
+              </a:rPr>
+              <a:t>algorithm restricted to an intercept — same exploration mechanics,</a:t>
+            </a:r>
+          </a:p>
+          <a:p>
+            <a:pPr>
+              <a:spcAft>
+                <a:spcPts val="200"/>
+              </a:spcAft>
+            </a:pPr>
+            <a:r>
+              <a:rPr sz="1300" b="0">
+                <a:solidFill>
+                  <a:srgbClr val="5B5F6E"/>
+                </a:solidFill>
+                <a:latin typeface="Calibri"/>
+              </a:rPr>
+              <a:t>same initial arm sweep, both tuned on the discovery block.</a:t>
+            </a:r>
+          </a:p>
+          <a:p>
+            <a:pPr>
+              <a:spcAft>
+                <a:spcPts val="200"/>
+              </a:spcAft>
+            </a:pPr>
+            <a:r>
+              <a:rPr sz="1300" b="0">
+                <a:solidFill>
+                  <a:srgbClr val="5B5F6E"/>
+                </a:solidFill>
+                <a:latin typeface="Calibri"/>
+              </a:rPr>
+              <a:t>Plus an oracle diagnostic: does the best arm move with the state?</a:t>
+            </a:r>
+          </a:p>
+        </p:txBody>
+      </p:sp>
+      <p:sp>
+        <p:nvSpPr>
+          <p:cNvPr id="14" name="Rectangle 13"/>
+          <p:cNvSpPr/>
+          <p:nvPr/>
+        </p:nvSpPr>
+        <p:spPr>
+          <a:xfrm>
+            <a:off x="457200" y="5029200"/>
+            <a:ext cx="292608" cy="292608"/>
+          </a:xfrm>
+          <a:prstGeom prst="rect">
+            <a:avLst/>
+          </a:prstGeom>
+          <a:solidFill>
+            <a:srgbClr val="1E2761"/>
+          </a:solidFill>
+          <a:ln>
+            <a:noFill/>
+          </a:ln>
+        </p:spPr>
+        <p:style>
+          <a:lnRef idx="1">
+            <a:schemeClr val="accent1"/>
+          </a:lnRef>
+          <a:fillRef idx="3">
+            <a:schemeClr val="accent1"/>
+          </a:fillRef>
+          <a:effectRef idx="2">
+            <a:schemeClr val="accent1"/>
+          </a:effectRef>
+          <a:fontRef idx="minor">
+            <a:schemeClr val="lt1"/>
+          </a:fontRef>
+        </p:style>
+        <p:txBody>
+          <a:bodyPr rtlCol="0" anchor="ctr"/>
+          <a:lstStyle/>
+          <a:p/>
+        </p:txBody>
+      </p:sp>
+      <p:sp>
+        <p:nvSpPr>
+          <p:cNvPr id="15" name="TextBox 14"/>
+          <p:cNvSpPr txBox="1"/>
+          <p:nvPr/>
+        </p:nvSpPr>
+        <p:spPr>
+          <a:xfrm>
+            <a:off x="868680" y="5001768"/>
+            <a:ext cx="4617720" cy="347472"/>
+          </a:xfrm>
+          <a:prstGeom prst="rect">
+            <a:avLst/>
+          </a:prstGeom>
+          <a:noFill/>
+        </p:spPr>
+        <p:txBody>
+          <a:bodyPr wrap="square" lIns="0" rIns="0" tIns="0" bIns="0">
+            <a:spAutoFit/>
+          </a:bodyPr>
+          <a:lstStyle/>
+          <a:p>
+            <a:pPr>
+              <a:spcAft>
+                <a:spcPts val="200"/>
+              </a:spcAft>
+            </a:pPr>
+            <a:r>
+              <a:rPr sz="1500" b="1">
+                <a:solidFill>
+                  <a:srgbClr val="1E2761"/>
+                </a:solidFill>
+                <a:latin typeface="Calibri"/>
+              </a:rPr>
+              <a:t>LITERATURE BASIS</a:t>
+            </a:r>
+          </a:p>
+        </p:txBody>
+      </p:sp>
+      <p:sp>
+        <p:nvSpPr>
+          <p:cNvPr id="16" name="TextBox 15"/>
+          <p:cNvSpPr txBox="1"/>
+          <p:nvPr/>
+        </p:nvSpPr>
+        <p:spPr>
+          <a:xfrm>
+            <a:off x="868680" y="5440680"/>
+            <a:ext cx="4617720" cy="1005840"/>
+          </a:xfrm>
+          <a:prstGeom prst="rect">
+            <a:avLst/>
+          </a:prstGeom>
+          <a:noFill/>
+        </p:spPr>
+        <p:txBody>
+          <a:bodyPr wrap="square" lIns="0" rIns="0" tIns="0" bIns="0">
+            <a:spAutoFit/>
+          </a:bodyPr>
+          <a:lstStyle/>
+          <a:p>
+            <a:pPr>
+              <a:spcAft>
+                <a:spcPts val="600"/>
+              </a:spcAft>
+            </a:pPr>
+            <a:r>
+              <a:rPr sz="1100" b="1">
+                <a:solidFill>
+                  <a:srgbClr val="1E2761"/>
+                </a:solidFill>
+                <a:latin typeface="Calibri"/>
+              </a:rPr>
+              <a:t>Li, Chu, Langford &amp; Schapire (2010), </a:t>
+            </a:r>
+            <a:r>
+              <a:rPr sz="1100" b="0">
+                <a:solidFill>
+                  <a:srgbClr val="5B5F6E"/>
+                </a:solidFill>
+                <a:latin typeface="Calibri"/>
+              </a:rPr>
+              <a:t>“A Contextual-Bandit Approach to Personalized News Article Recommendation” (WWW) — LinUCB, used in its original linear form since the state is three interpretable features.</a:t>
+            </a:r>
+          </a:p>
+        </p:txBody>
+      </p:sp>
+      <p:sp>
+        <p:nvSpPr>
+          <p:cNvPr id="17" name="Rectangle 16"/>
+          <p:cNvSpPr/>
+          <p:nvPr/>
+        </p:nvSpPr>
+        <p:spPr>
+          <a:xfrm>
+            <a:off x="5943600" y="1417320"/>
+            <a:ext cx="292608" cy="292608"/>
+          </a:xfrm>
+          <a:prstGeom prst="rect">
+            <a:avLst/>
+          </a:prstGeom>
+          <a:solidFill>
+            <a:srgbClr val="1E2761"/>
+          </a:solidFill>
+          <a:ln>
+            <a:noFill/>
+          </a:ln>
+        </p:spPr>
+        <p:style>
+          <a:lnRef idx="1">
+            <a:schemeClr val="accent1"/>
+          </a:lnRef>
+          <a:fillRef idx="3">
+            <a:schemeClr val="accent1"/>
+          </a:fillRef>
+          <a:effectRef idx="2">
+            <a:schemeClr val="accent1"/>
+          </a:effectRef>
+          <a:fontRef idx="minor">
+            <a:schemeClr val="lt1"/>
+          </a:fontRef>
+        </p:style>
+        <p:txBody>
+          <a:bodyPr rtlCol="0" anchor="ctr"/>
+          <a:lstStyle/>
+          <a:p/>
+        </p:txBody>
+      </p:sp>
+      <p:sp>
+        <p:nvSpPr>
+          <p:cNvPr id="18" name="TextBox 17"/>
+          <p:cNvSpPr txBox="1"/>
+          <p:nvPr/>
+        </p:nvSpPr>
+        <p:spPr>
+          <a:xfrm>
+            <a:off x="6355080" y="1389888"/>
+            <a:ext cx="5349240" cy="347472"/>
+          </a:xfrm>
+          <a:prstGeom prst="rect">
+            <a:avLst/>
+          </a:prstGeom>
+          <a:noFill/>
+        </p:spPr>
+        <p:txBody>
+          <a:bodyPr wrap="square" lIns="0" rIns="0" tIns="0" bIns="0">
+            <a:spAutoFit/>
+          </a:bodyPr>
+          <a:lstStyle/>
+          <a:p>
+            <a:pPr>
+              <a:spcAft>
+                <a:spcPts val="200"/>
+              </a:spcAft>
+            </a:pPr>
+            <a:r>
+              <a:rPr sz="1500" b="1">
+                <a:solidFill>
+                  <a:srgbClr val="1E2761"/>
+                </a:solidFill>
+                <a:latin typeface="Calibri"/>
+              </a:rPr>
+              <a:t>KEY RESULTS</a:t>
+            </a:r>
+          </a:p>
+        </p:txBody>
+      </p:sp>
+      <p:graphicFrame>
+        <p:nvGraphicFramePr>
+          <p:cNvPr id="19" name="Table 18"/>
+          <p:cNvGraphicFramePr>
+            <a:graphicFrameLocks noGrp="1"/>
+          </p:cNvGraphicFramePr>
+          <p:nvPr/>
+        </p:nvGraphicFramePr>
+        <p:xfrm>
+          <a:off x="5943600" y="1874519"/>
+          <a:ext cx="5760720" cy="1920240"/>
+        </p:xfrm>
+        <a:graphic>
+          <a:graphicData uri="http://schemas.openxmlformats.org/drawingml/2006/table">
+            <a:tbl>
+              <a:tblPr firstRow="1" bandRow="1">
+                <a:tableStyleId>{5C22544A-7EE6-4342-B048-85BDC9FD1C3A}</a:tableStyleId>
+              </a:tblPr>
+              <a:tblGrid>
+                <a:gridCol w="3200400"/>
+                <a:gridCol w="1463040"/>
+                <a:gridCol w="1097280"/>
+              </a:tblGrid>
+              <a:tr h="274320">
+                <a:tc>
+                  <a:txBody>
+                    <a:bodyPr/>
+                    <a:lstStyle/>
+                    <a:p>
+                      <a:r>
+                        <a:rPr sz="1100" b="1">
+                          <a:solidFill>
+                            <a:srgbClr val="FFFFFF"/>
+                          </a:solidFill>
+                          <a:latin typeface="Calibri"/>
+                        </a:rPr>
+                        <a:t>Metric</a:t>
+                      </a:r>
+                    </a:p>
+                  </a:txBody>
+                  <a:tcPr>
+                    <a:solidFill>
+                      <a:srgbClr val="1E2761"/>
+                    </a:solidFill>
+                  </a:tcPr>
+                </a:tc>
+                <a:tc>
+                  <a:txBody>
+                    <a:bodyPr/>
+                    <a:lstStyle/>
+                    <a:p>
+                      <a:r>
+                        <a:rPr sz="1100" b="1">
+                          <a:solidFill>
+                            <a:srgbClr val="FFFFFF"/>
+                          </a:solidFill>
+                          <a:latin typeface="Calibri"/>
+                        </a:rPr>
+                        <a:t>Value</a:t>
+                      </a:r>
+                    </a:p>
+                  </a:txBody>
+                  <a:tcPr>
+                    <a:solidFill>
+                      <a:srgbClr val="1E2761"/>
+                    </a:solidFill>
+                  </a:tcPr>
+                </a:tc>
+                <a:tc>
+                  <a:txBody>
+                    <a:bodyPr/>
+                    <a:lstStyle/>
+                    <a:p>
+                      <a:r>
+                        <a:rPr sz="1100" b="1">
+                          <a:solidFill>
+                            <a:srgbClr val="FFFFFF"/>
+                          </a:solidFill>
+                          <a:latin typeface="Calibri"/>
+                        </a:rPr>
+                        <a:t/>
+                      </a:r>
+                    </a:p>
+                  </a:txBody>
+                  <a:tcPr>
+                    <a:solidFill>
+                      <a:srgbClr val="1E2761"/>
+                    </a:solidFill>
+                  </a:tcPr>
+                </a:tc>
+              </a:tr>
+              <a:tr h="274320">
+                <a:tc>
+                  <a:txBody>
+                    <a:bodyPr/>
+                    <a:lstStyle/>
+                    <a:p>
+                      <a:r>
+                        <a:rPr sz="1100">
+                          <a:solidFill>
+                            <a:srgbClr val="1E2761"/>
+                          </a:solidFill>
+                          <a:latin typeface="Calibri"/>
+                        </a:rPr>
+                        <a:t>Oracle best arm, low state</a:t>
+                      </a:r>
+                    </a:p>
+                  </a:txBody>
+                  <a:tcPr>
+                    <a:solidFill>
+                      <a:srgbClr val="FFFFFF"/>
+                    </a:solidFill>
+                  </a:tcPr>
+                </a:tc>
+                <a:tc>
+                  <a:txBody>
+                    <a:bodyPr/>
+                    <a:lstStyle/>
+                    <a:p>
+                      <a:r>
+                        <a:rPr sz="1100">
+                          <a:solidFill>
+                            <a:srgbClr val="5B5F6E"/>
+                          </a:solidFill>
+                          <a:latin typeface="Calibri"/>
+                        </a:rPr>
+                        <a:t>1.00x</a:t>
+                      </a:r>
+                    </a:p>
+                  </a:txBody>
+                  <a:tcPr>
+                    <a:solidFill>
+                      <a:srgbClr val="FFFFFF"/>
+                    </a:solidFill>
+                  </a:tcPr>
+                </a:tc>
+                <a:tc>
+                  <a:txBody>
+                    <a:bodyPr/>
+                    <a:lstStyle/>
+                    <a:p>
+                      <a:pPr algn="ctr"/>
+                      <a:r>
+                        <a:rPr sz="1100" b="1">
+                          <a:solidFill>
+                            <a:srgbClr val="5B5F6E"/>
+                          </a:solidFill>
+                          <a:latin typeface="Calibri"/>
+                        </a:rPr>
+                        <a:t>—</a:t>
+                      </a:r>
+                    </a:p>
+                  </a:txBody>
+                  <a:tcPr>
+                    <a:solidFill>
+                      <a:srgbClr val="FFFFFF"/>
+                    </a:solidFill>
+                  </a:tcPr>
+                </a:tc>
+              </a:tr>
+              <a:tr h="274320">
+                <a:tc>
+                  <a:txBody>
+                    <a:bodyPr/>
+                    <a:lstStyle/>
+                    <a:p>
+                      <a:r>
+                        <a:rPr sz="1100">
+                          <a:solidFill>
+                            <a:srgbClr val="1E2761"/>
+                          </a:solidFill>
+                          <a:latin typeface="Calibri"/>
+                        </a:rPr>
+                        <a:t>Oracle best arm, high state</a:t>
+                      </a:r>
+                    </a:p>
+                  </a:txBody>
+                  <a:tcPr>
+                    <a:solidFill>
+                      <a:srgbClr val="F7F8FC"/>
+                    </a:solidFill>
+                  </a:tcPr>
+                </a:tc>
+                <a:tc>
+                  <a:txBody>
+                    <a:bodyPr/>
+                    <a:lstStyle/>
+                    <a:p>
+                      <a:r>
+                        <a:rPr sz="1100">
+                          <a:solidFill>
+                            <a:srgbClr val="5B5F6E"/>
+                          </a:solidFill>
+                          <a:latin typeface="Calibri"/>
+                        </a:rPr>
+                        <a:t>1.00x</a:t>
+                      </a:r>
+                    </a:p>
+                  </a:txBody>
+                  <a:tcPr>
+                    <a:solidFill>
+                      <a:srgbClr val="F7F8FC"/>
+                    </a:solidFill>
+                  </a:tcPr>
+                </a:tc>
+                <a:tc>
+                  <a:txBody>
+                    <a:bodyPr/>
+                    <a:lstStyle/>
+                    <a:p>
+                      <a:pPr algn="ctr"/>
+                      <a:r>
+                        <a:rPr sz="1100" b="1">
+                          <a:solidFill>
+                            <a:srgbClr val="5B5F6E"/>
+                          </a:solidFill>
+                          <a:latin typeface="Calibri"/>
+                        </a:rPr>
+                        <a:t>—</a:t>
+                      </a:r>
+                    </a:p>
+                  </a:txBody>
+                  <a:tcPr>
+                    <a:solidFill>
+                      <a:srgbClr val="F7F8FC"/>
+                    </a:solidFill>
+                  </a:tcPr>
+                </a:tc>
+              </a:tr>
+              <a:tr h="274320">
+                <a:tc>
+                  <a:txBody>
+                    <a:bodyPr/>
+                    <a:lstStyle/>
+                    <a:p>
+                      <a:r>
+                        <a:rPr sz="1100">
+                          <a:solidFill>
+                            <a:srgbClr val="1E2761"/>
+                          </a:solidFill>
+                          <a:latin typeface="Calibri"/>
+                        </a:rPr>
+                        <a:t>LinUCB blind</a:t>
+                      </a:r>
+                    </a:p>
+                  </a:txBody>
+                  <a:tcPr>
+                    <a:solidFill>
+                      <a:srgbClr val="FFFFFF"/>
+                    </a:solidFill>
+                  </a:tcPr>
+                </a:tc>
+                <a:tc>
+                  <a:txBody>
+                    <a:bodyPr/>
+                    <a:lstStyle/>
+                    <a:p>
+                      <a:r>
+                        <a:rPr sz="1100">
+                          <a:solidFill>
+                            <a:srgbClr val="5B5F6E"/>
+                          </a:solidFill>
+                          <a:latin typeface="Calibri"/>
+                        </a:rPr>
+                        <a:t>40.6/wk</a:t>
+                      </a:r>
+                    </a:p>
+                  </a:txBody>
+                  <a:tcPr>
+                    <a:solidFill>
+                      <a:srgbClr val="FFFFFF"/>
+                    </a:solidFill>
+                  </a:tcPr>
+                </a:tc>
+                <a:tc>
+                  <a:txBody>
+                    <a:bodyPr/>
+                    <a:lstStyle/>
+                    <a:p>
+                      <a:pPr algn="ctr"/>
+                      <a:r>
+                        <a:rPr sz="1100" b="1">
+                          <a:solidFill>
+                            <a:srgbClr val="5B5F6E"/>
+                          </a:solidFill>
+                          <a:latin typeface="Calibri"/>
+                        </a:rPr>
+                        <a:t>—</a:t>
+                      </a:r>
+                    </a:p>
+                  </a:txBody>
+                  <a:tcPr>
+                    <a:solidFill>
+                      <a:srgbClr val="FFFFFF"/>
+                    </a:solidFill>
+                  </a:tcPr>
+                </a:tc>
+              </a:tr>
+              <a:tr h="274320">
+                <a:tc>
+                  <a:txBody>
+                    <a:bodyPr/>
+                    <a:lstStyle/>
+                    <a:p>
+                      <a:r>
+                        <a:rPr sz="1100">
+                          <a:solidFill>
+                            <a:srgbClr val="1E2761"/>
+                          </a:solidFill>
+                          <a:latin typeface="Calibri"/>
+                        </a:rPr>
+                        <a:t>LinUCB with context</a:t>
+                      </a:r>
+                    </a:p>
+                  </a:txBody>
+                  <a:tcPr>
+                    <a:solidFill>
+                      <a:srgbClr val="F7F8FC"/>
+                    </a:solidFill>
+                  </a:tcPr>
+                </a:tc>
+                <a:tc>
+                  <a:txBody>
+                    <a:bodyPr/>
+                    <a:lstStyle/>
+                    <a:p>
+                      <a:r>
+                        <a:rPr sz="1100">
+                          <a:solidFill>
+                            <a:srgbClr val="5B5F6E"/>
+                          </a:solidFill>
+                          <a:latin typeface="Calibri"/>
+                        </a:rPr>
+                        <a:t>39.7/wk</a:t>
+                      </a:r>
+                    </a:p>
+                  </a:txBody>
+                  <a:tcPr>
+                    <a:solidFill>
+                      <a:srgbClr val="F7F8FC"/>
+                    </a:solidFill>
+                  </a:tcPr>
+                </a:tc>
+                <a:tc>
+                  <a:txBody>
+                    <a:bodyPr/>
+                    <a:lstStyle/>
+                    <a:p>
+                      <a:pPr algn="ctr"/>
+                      <a:r>
+                        <a:rPr sz="1100" b="1">
+                          <a:solidFill>
+                            <a:srgbClr val="5B5F6E"/>
+                          </a:solidFill>
+                          <a:latin typeface="Calibri"/>
+                        </a:rPr>
+                        <a:t>—</a:t>
+                      </a:r>
+                    </a:p>
+                  </a:txBody>
+                  <a:tcPr>
+                    <a:solidFill>
+                      <a:srgbClr val="F7F8FC"/>
+                    </a:solidFill>
+                  </a:tcPr>
+                </a:tc>
+              </a:tr>
+              <a:tr h="274320">
+                <a:tc>
+                  <a:txBody>
+                    <a:bodyPr/>
+                    <a:lstStyle/>
+                    <a:p>
+                      <a:r>
+                        <a:rPr sz="1100">
+                          <a:solidFill>
+                            <a:srgbClr val="1E2761"/>
+                          </a:solidFill>
+                          <a:latin typeface="Calibri"/>
+                        </a:rPr>
+                        <a:t>  context vs blind</a:t>
+                      </a:r>
+                    </a:p>
+                  </a:txBody>
+                  <a:tcPr>
+                    <a:solidFill>
+                      <a:srgbClr val="FFFFFF"/>
+                    </a:solidFill>
+                  </a:tcPr>
+                </a:tc>
+                <a:tc>
+                  <a:txBody>
+                    <a:bodyPr/>
+                    <a:lstStyle/>
+                    <a:p>
+                      <a:r>
+                        <a:rPr sz="1100">
+                          <a:solidFill>
+                            <a:srgbClr val="5B5F6E"/>
+                          </a:solidFill>
+                          <a:latin typeface="Calibri"/>
+                        </a:rPr>
+                        <a:t>-2.3%</a:t>
+                      </a:r>
+                    </a:p>
+                  </a:txBody>
+                  <a:tcPr>
+                    <a:solidFill>
+                      <a:srgbClr val="FFFFFF"/>
+                    </a:solidFill>
+                  </a:tcPr>
+                </a:tc>
+                <a:tc>
+                  <a:txBody>
+                    <a:bodyPr/>
+                    <a:lstStyle/>
+                    <a:p>
+                      <a:pPr algn="ctr"/>
+                      <a:r>
+                        <a:rPr sz="1100" b="1">
+                          <a:solidFill>
+                            <a:srgbClr val="1E7A4D"/>
+                          </a:solidFill>
+                          <a:latin typeface="Calibri"/>
+                        </a:rPr>
+                        <a:t>PASS</a:t>
+                      </a:r>
+                    </a:p>
+                  </a:txBody>
+                  <a:tcPr>
+                    <a:solidFill>
+                      <a:srgbClr val="FFFFFF"/>
+                    </a:solidFill>
+                  </a:tcPr>
+                </a:tc>
+              </a:tr>
+              <a:tr h="274320">
+                <a:tc>
+                  <a:txBody>
+                    <a:bodyPr/>
+                    <a:lstStyle/>
+                    <a:p>
+                      <a:r>
+                        <a:rPr sz="1100">
+                          <a:solidFill>
+                            <a:srgbClr val="1E2761"/>
+                          </a:solidFill>
+                          <a:latin typeface="Calibri"/>
+                        </a:rPr>
+                        <a:t>  its 95% CI vs ±5%</a:t>
+                      </a:r>
+                    </a:p>
+                  </a:txBody>
+                  <a:tcPr>
+                    <a:solidFill>
+                      <a:srgbClr val="F7F8FC"/>
+                    </a:solidFill>
+                  </a:tcPr>
+                </a:tc>
+                <a:tc>
+                  <a:txBody>
+                    <a:bodyPr/>
+                    <a:lstStyle/>
+                    <a:p>
+                      <a:r>
+                        <a:rPr sz="1100">
+                          <a:solidFill>
+                            <a:srgbClr val="5B5F6E"/>
+                          </a:solidFill>
+                          <a:latin typeface="Calibri"/>
+                        </a:rPr>
+                        <a:t>[-3.0%, -1.5%]</a:t>
+                      </a:r>
+                    </a:p>
+                  </a:txBody>
+                  <a:tcPr>
+                    <a:solidFill>
+                      <a:srgbClr val="F7F8FC"/>
+                    </a:solidFill>
+                  </a:tcPr>
+                </a:tc>
+                <a:tc>
+                  <a:txBody>
+                    <a:bodyPr/>
+                    <a:lstStyle/>
+                    <a:p>
+                      <a:pPr algn="ctr"/>
+                      <a:r>
+                        <a:rPr sz="1100" b="1">
+                          <a:solidFill>
+                            <a:srgbClr val="1E7A4D"/>
+                          </a:solidFill>
+                          <a:latin typeface="Calibri"/>
+                        </a:rPr>
+                        <a:t>PASS</a:t>
+                      </a:r>
+                    </a:p>
+                  </a:txBody>
+                  <a:tcPr>
+                    <a:solidFill>
+                      <a:srgbClr val="F7F8FC"/>
+                    </a:solidFill>
+                  </a:tcPr>
+                </a:tc>
+              </a:tr>
+            </a:tbl>
+          </a:graphicData>
+        </a:graphic>
+      </p:graphicFrame>
+      <p:sp>
+        <p:nvSpPr>
+          <p:cNvPr id="20" name="Rectangle 19"/>
+          <p:cNvSpPr/>
+          <p:nvPr/>
+        </p:nvSpPr>
+        <p:spPr>
+          <a:xfrm>
+            <a:off x="5943600" y="4023360"/>
+            <a:ext cx="292608" cy="292608"/>
+          </a:xfrm>
+          <a:prstGeom prst="rect">
+            <a:avLst/>
+          </a:prstGeom>
+          <a:solidFill>
+            <a:srgbClr val="1E2761"/>
+          </a:solidFill>
+          <a:ln>
+            <a:noFill/>
+          </a:ln>
+        </p:spPr>
+        <p:style>
+          <a:lnRef idx="1">
+            <a:schemeClr val="accent1"/>
+          </a:lnRef>
+          <a:fillRef idx="3">
+            <a:schemeClr val="accent1"/>
+          </a:fillRef>
+          <a:effectRef idx="2">
+            <a:schemeClr val="accent1"/>
+          </a:effectRef>
+          <a:fontRef idx="minor">
+            <a:schemeClr val="lt1"/>
+          </a:fontRef>
+        </p:style>
+        <p:txBody>
+          <a:bodyPr rtlCol="0" anchor="ctr"/>
+          <a:lstStyle/>
+          <a:p/>
+        </p:txBody>
+      </p:sp>
+      <p:sp>
+        <p:nvSpPr>
+          <p:cNvPr id="21" name="TextBox 20"/>
+          <p:cNvSpPr txBox="1"/>
+          <p:nvPr/>
+        </p:nvSpPr>
+        <p:spPr>
+          <a:xfrm>
+            <a:off x="6355080" y="3995928"/>
+            <a:ext cx="5349240" cy="347472"/>
+          </a:xfrm>
+          <a:prstGeom prst="rect">
+            <a:avLst/>
+          </a:prstGeom>
+          <a:noFill/>
+        </p:spPr>
+        <p:txBody>
+          <a:bodyPr wrap="square" lIns="0" rIns="0" tIns="0" bIns="0">
+            <a:spAutoFit/>
+          </a:bodyPr>
+          <a:lstStyle/>
+          <a:p>
+            <a:pPr>
+              <a:spcAft>
+                <a:spcPts val="200"/>
+              </a:spcAft>
+            </a:pPr>
+            <a:r>
+              <a:rPr sz="1500" b="1">
+                <a:solidFill>
+                  <a:srgbClr val="1E2761"/>
+                </a:solidFill>
+                <a:latin typeface="Calibri"/>
+              </a:rPr>
+              <a:t>RESEARCH QUESTION</a:t>
+            </a:r>
+          </a:p>
+        </p:txBody>
+      </p:sp>
+      <p:sp>
+        <p:nvSpPr>
+          <p:cNvPr id="22" name="Rectangle 21"/>
+          <p:cNvSpPr/>
+          <p:nvPr/>
+        </p:nvSpPr>
+        <p:spPr>
+          <a:xfrm>
+            <a:off x="5943600" y="4434840"/>
+            <a:ext cx="5760720" cy="1965960"/>
+          </a:xfrm>
+          <a:prstGeom prst="rect">
+            <a:avLst/>
+          </a:prstGeom>
+          <a:solidFill>
+            <a:srgbClr val="F7F8FC"/>
+          </a:solidFill>
+          <a:ln>
+            <a:noFill/>
+          </a:ln>
+        </p:spPr>
+        <p:style>
+          <a:lnRef idx="1">
+            <a:schemeClr val="accent1"/>
+          </a:lnRef>
+          <a:fillRef idx="3">
+            <a:schemeClr val="accent1"/>
+          </a:fillRef>
+          <a:effectRef idx="2">
+            <a:schemeClr val="accent1"/>
+          </a:effectRef>
+          <a:fontRef idx="minor">
+            <a:schemeClr val="lt1"/>
+          </a:fontRef>
+        </p:style>
+        <p:txBody>
+          <a:bodyPr rtlCol="0" anchor="ctr"/>
+          <a:lstStyle/>
+          <a:p/>
+        </p:txBody>
+      </p:sp>
+      <p:sp>
+        <p:nvSpPr>
+          <p:cNvPr id="23" name="TextBox 22"/>
+          <p:cNvSpPr txBox="1"/>
+          <p:nvPr/>
+        </p:nvSpPr>
+        <p:spPr>
+          <a:xfrm>
+            <a:off x="6217920" y="4572000"/>
+            <a:ext cx="5212080" cy="1737360"/>
+          </a:xfrm>
+          <a:prstGeom prst="rect">
+            <a:avLst/>
+          </a:prstGeom>
+          <a:noFill/>
+        </p:spPr>
+        <p:txBody>
+          <a:bodyPr wrap="square" lIns="0" rIns="0" tIns="0" bIns="0">
+            <a:spAutoFit/>
+          </a:bodyPr>
+          <a:lstStyle/>
+          <a:p>
+            <a:pPr>
+              <a:spcAft>
+                <a:spcPts val="500"/>
+              </a:spcAft>
+            </a:pPr>
+            <a:r>
+              <a:rPr sz="1000" b="0">
+                <a:solidFill>
+                  <a:srgbClr val="5B5F6E"/>
+                </a:solidFill>
+                <a:latin typeface="Calibri"/>
+              </a:rPr>
+              <a:t>Now that a persistent, dispersed loyalty state exists, does a policy that conditions on it beat one that ignores it?</a:t>
+            </a:r>
+          </a:p>
+          <a:p>
+            <a:pPr>
+              <a:spcAft>
+                <a:spcPts val="500"/>
+              </a:spcAft>
+            </a:pPr>
+            <a:r>
+              <a:rPr sz="1000" b="1">
+                <a:solidFill>
+                  <a:srgbClr val="1E2761"/>
+                </a:solidFill>
+                <a:latin typeface="Calibri"/>
+              </a:rPr>
+              <a:t>Finding: </a:t>
+            </a:r>
+            <a:r>
+              <a:rPr sz="1000" b="0">
+                <a:solidFill>
+                  <a:srgbClr val="5B5F6E"/>
+                </a:solidFill>
+                <a:latin typeface="Calibri"/>
+              </a:rPr>
+              <a:t>No, and the oracle says why rather than leaving it ambiguous. Over 460 seller-weeks split at the median loyalty state, the profit-maximizing arm is 1.00x on both sides — a seller with a loyal base and one without want the same price. The learner agrees: -2.3%, CI [-3.0%, -1.5%], equivalent. 7c's finding survives the mechanism change.</a:t>
+            </a:r>
+          </a:p>
+          <a:p>
+            <a:pPr>
+              <a:spcAft>
+                <a:spcPts val="500"/>
+              </a:spcAft>
+            </a:pPr>
+            <a:r>
+              <a:rPr sz="1000" b="1">
+                <a:solidFill>
+                  <a:srgbClr val="1E2761"/>
+                </a:solidFill>
+                <a:latin typeface="Calibri"/>
+              </a:rPr>
+              <a:t>Caveat: </a:t>
+            </a:r>
+            <a:r>
+              <a:rPr sz="1000" b="0">
+                <a:solidFill>
+                  <a:srgbClr val="5B5F6E"/>
+                </a:solidFill>
+                <a:latin typeface="Calibri"/>
+              </a:rPr>
+              <a:t>The two measurements together rule out the reading a learned null alone cannot: with hindsight, perfect state measurement and no exploration cost, there is still nothing to condition on. And it connects back — no one-week deviation pays at any state, but 7e-2's sixteen-week one pays 2.6%. The exploitable structure is a sustained commitment, not a weekly state-contingent choice, so a contextual bandit is the wrong instrument by construction. Every learner also loses to flat pricing at the oracle price (43.4/wk), which is not attainable by a learner and bounds rather than enters the comparison.</a:t>
             </a:r>
           </a:p>
         </p:txBody>

--- a/project_tracking.pptx
+++ b/project_tracking.pptx
@@ -17,6 +17,7 @@
     <p:sldId id="265" r:id="rId16"/>
     <p:sldId id="266" r:id="rId17"/>
     <p:sldId id="267" r:id="rId18"/>
+    <p:sldId id="268" r:id="rId19"/>
   </p:sldIdLst>
   <p:sldSz cx="12191969" cy="6858000" type="screen4x3"/>
   <p:notesSz cx="6858000" cy="9144000"/>
@@ -9254,6 +9255,1575 @@
                 <a:latin typeface="Calibri"/>
               </a:rPr>
               <a:t>The two measurements together rule out the reading a learned null alone cannot: with hindsight, perfect state measurement and no exploration cost, there is still nothing to condition on. And it connects back — no one-week deviation pays at any state, but 7e-2's sixteen-week one pays 2.6%. The exploitable structure is a sustained commitment, not a weekly state-contingent choice, so a contextual bandit is the wrong instrument by construction. Every learner also loses to flat pricing at the oracle price (43.4/wk), which is not attainable by a learner and bounds rather than enters the comparison.</a:t>
+            </a:r>
+          </a:p>
+        </p:txBody>
+      </p:sp>
+      <p:sp>
+        <p:nvSpPr>
+          <p:cNvPr id="24" name="TextBox 23"/>
+          <p:cNvSpPr txBox="1"/>
+          <p:nvPr/>
+        </p:nvSpPr>
+        <p:spPr>
+          <a:xfrm>
+            <a:off x="457200" y="6446520"/>
+            <a:ext cx="11247120" cy="274320"/>
+          </a:xfrm>
+          <a:prstGeom prst="rect">
+            <a:avLst/>
+          </a:prstGeom>
+          <a:noFill/>
+        </p:spPr>
+        <p:txBody>
+          <a:bodyPr wrap="square" lIns="0" rIns="0" tIns="0" bIns="0">
+            <a:spAutoFit/>
+          </a:bodyPr>
+          <a:lstStyle/>
+          <a:p>
+            <a:pPr>
+              <a:spcAft>
+                <a:spcPts val="200"/>
+              </a:spcAft>
+            </a:pPr>
+            <a:r>
+              <a:rPr sz="950" b="0">
+                <a:solidFill>
+                  <a:srgbClr val="5B5F6E"/>
+                </a:solidFill>
+                <a:latin typeface="Calibri"/>
+              </a:rPr>
+              <a:t>Generated automatically at phase completion  ·  Phase Completion Deliverable  ·  market-sim project</a:t>
+            </a:r>
+          </a:p>
+        </p:txBody>
+      </p:sp>
+    </p:spTree>
+  </p:cSld>
+  <p:clrMapOvr>
+    <a:masterClrMapping/>
+  </p:clrMapOvr>
+</p:sld>
+</file>
+
+<file path=ppt/slides/slide13.xml><?xml version="1.0" encoding="utf-8"?>
+<p:sld xmlns:a="http://schemas.openxmlformats.org/drawingml/2006/main" xmlns:p="http://schemas.openxmlformats.org/presentationml/2006/main" xmlns:r="http://schemas.openxmlformats.org/officeDocument/2006/relationships">
+  <p:cSld>
+    <p:spTree>
+      <p:nvGrpSpPr>
+        <p:cNvPr id="1" name=""/>
+        <p:cNvGrpSpPr/>
+        <p:nvPr/>
+      </p:nvGrpSpPr>
+      <p:grpSpPr/>
+      <p:sp>
+        <p:nvSpPr>
+          <p:cNvPr id="2" name="TextBox 1"/>
+          <p:cNvSpPr txBox="1"/>
+          <p:nvPr/>
+        </p:nvSpPr>
+        <p:spPr>
+          <a:xfrm>
+            <a:off x="457200" y="320040"/>
+            <a:ext cx="8229600" cy="548640"/>
+          </a:xfrm>
+          <a:prstGeom prst="rect">
+            <a:avLst/>
+          </a:prstGeom>
+          <a:noFill/>
+        </p:spPr>
+        <p:txBody>
+          <a:bodyPr wrap="square" lIns="0" rIns="0" tIns="0" bIns="0">
+            <a:spAutoFit/>
+          </a:bodyPr>
+          <a:lstStyle/>
+          <a:p>
+            <a:pPr>
+              <a:spcAft>
+                <a:spcPts val="200"/>
+              </a:spcAft>
+            </a:pPr>
+            <a:r>
+              <a:rPr sz="3200" b="1">
+                <a:solidFill>
+                  <a:srgbClr val="1E2761"/>
+                </a:solidFill>
+                <a:latin typeface="Cambria"/>
+              </a:rPr>
+              <a:t>Phase 7 — Mechanism Sufficiency — 7e-3b Does the Horizon Pay?</a:t>
+            </a:r>
+          </a:p>
+        </p:txBody>
+      </p:sp>
+      <p:sp>
+        <p:nvSpPr>
+          <p:cNvPr id="3" name="TextBox 2"/>
+          <p:cNvSpPr txBox="1"/>
+          <p:nvPr/>
+        </p:nvSpPr>
+        <p:spPr>
+          <a:xfrm>
+            <a:off x="457200" y="868680"/>
+            <a:ext cx="8229600" cy="274320"/>
+          </a:xfrm>
+          <a:prstGeom prst="rect">
+            <a:avLst/>
+          </a:prstGeom>
+          <a:noFill/>
+        </p:spPr>
+        <p:txBody>
+          <a:bodyPr wrap="square" lIns="0" rIns="0" tIns="0" bIns="0">
+            <a:spAutoFit/>
+          </a:bodyPr>
+          <a:lstStyle/>
+          <a:p>
+            <a:pPr>
+              <a:spcAft>
+                <a:spcPts val="200"/>
+              </a:spcAft>
+            </a:pPr>
+            <a:r>
+              <a:rPr sz="1200" b="0">
+                <a:solidFill>
+                  <a:srgbClr val="5B5F6E"/>
+                </a:solidFill>
+                <a:latin typeface="Calibri"/>
+              </a:rPr>
+              <a:t>A trade-off known to exist, and a learner sent to find it  ·  git tag: phase7e3b-horizon  ·  train 1000–1119, test 0–29</a:t>
+            </a:r>
+          </a:p>
+        </p:txBody>
+      </p:sp>
+      <p:sp>
+        <p:nvSpPr>
+          <p:cNvPr id="4" name="Rounded Rectangle 3"/>
+          <p:cNvSpPr/>
+          <p:nvPr/>
+        </p:nvSpPr>
+        <p:spPr>
+          <a:xfrm>
+            <a:off x="9464040" y="365760"/>
+            <a:ext cx="2240280" cy="384048"/>
+          </a:xfrm>
+          <a:prstGeom prst="roundRect">
+            <a:avLst/>
+          </a:prstGeom>
+          <a:solidFill>
+            <a:srgbClr val="C9922E"/>
+          </a:solidFill>
+          <a:ln>
+            <a:noFill/>
+          </a:ln>
+        </p:spPr>
+        <p:style>
+          <a:lnRef idx="1">
+            <a:schemeClr val="accent1"/>
+          </a:lnRef>
+          <a:fillRef idx="3">
+            <a:schemeClr val="accent1"/>
+          </a:fillRef>
+          <a:effectRef idx="2">
+            <a:schemeClr val="accent1"/>
+          </a:effectRef>
+          <a:fontRef idx="minor">
+            <a:schemeClr val="lt1"/>
+          </a:fontRef>
+        </p:style>
+        <p:txBody>
+          <a:bodyPr rtlCol="0" anchor="ctr"/>
+          <a:lstStyle/>
+          <a:p>
+            <a:pPr algn="ctr"/>
+            <a:r>
+              <a:rPr sz="1050" b="1">
+                <a:solidFill>
+                  <a:srgbClr val="FFFFFF"/>
+                </a:solidFill>
+                <a:latin typeface="Calibri"/>
+              </a:rPr>
+              <a:t>GATE 3b NOT PASSED</a:t>
+            </a:r>
+          </a:p>
+        </p:txBody>
+      </p:sp>
+      <p:sp>
+        <p:nvSpPr>
+          <p:cNvPr id="5" name="Rectangle 4"/>
+          <p:cNvSpPr/>
+          <p:nvPr/>
+        </p:nvSpPr>
+        <p:spPr>
+          <a:xfrm>
+            <a:off x="457200" y="1417320"/>
+            <a:ext cx="292608" cy="292608"/>
+          </a:xfrm>
+          <a:prstGeom prst="rect">
+            <a:avLst/>
+          </a:prstGeom>
+          <a:solidFill>
+            <a:srgbClr val="1E2761"/>
+          </a:solidFill>
+          <a:ln>
+            <a:noFill/>
+          </a:ln>
+        </p:spPr>
+        <p:style>
+          <a:lnRef idx="1">
+            <a:schemeClr val="accent1"/>
+          </a:lnRef>
+          <a:fillRef idx="3">
+            <a:schemeClr val="accent1"/>
+          </a:fillRef>
+          <a:effectRef idx="2">
+            <a:schemeClr val="accent1"/>
+          </a:effectRef>
+          <a:fontRef idx="minor">
+            <a:schemeClr val="lt1"/>
+          </a:fontRef>
+        </p:style>
+        <p:txBody>
+          <a:bodyPr rtlCol="0" anchor="ctr"/>
+          <a:lstStyle/>
+          <a:p/>
+        </p:txBody>
+      </p:sp>
+      <p:sp>
+        <p:nvSpPr>
+          <p:cNvPr id="6" name="TextBox 5"/>
+          <p:cNvSpPr txBox="1"/>
+          <p:nvPr/>
+        </p:nvSpPr>
+        <p:spPr>
+          <a:xfrm>
+            <a:off x="868680" y="1389888"/>
+            <a:ext cx="4617720" cy="347472"/>
+          </a:xfrm>
+          <a:prstGeom prst="rect">
+            <a:avLst/>
+          </a:prstGeom>
+          <a:noFill/>
+        </p:spPr>
+        <p:txBody>
+          <a:bodyPr wrap="square" lIns="0" rIns="0" tIns="0" bIns="0">
+            <a:spAutoFit/>
+          </a:bodyPr>
+          <a:lstStyle/>
+          <a:p>
+            <a:pPr>
+              <a:spcAft>
+                <a:spcPts val="200"/>
+              </a:spcAft>
+            </a:pPr>
+            <a:r>
+              <a:rPr sz="1500" b="1">
+                <a:solidFill>
+                  <a:srgbClr val="1E2761"/>
+                </a:solidFill>
+                <a:latin typeface="Calibri"/>
+              </a:rPr>
+              <a:t>AGENTS</a:t>
+            </a:r>
+          </a:p>
+        </p:txBody>
+      </p:sp>
+      <p:sp>
+        <p:nvSpPr>
+          <p:cNvPr id="7" name="TextBox 6"/>
+          <p:cNvSpPr txBox="1"/>
+          <p:nvPr/>
+        </p:nvSpPr>
+        <p:spPr>
+          <a:xfrm>
+            <a:off x="868680" y="1828800"/>
+            <a:ext cx="4617720" cy="566928"/>
+          </a:xfrm>
+          <a:prstGeom prst="rect">
+            <a:avLst/>
+          </a:prstGeom>
+          <a:noFill/>
+        </p:spPr>
+        <p:txBody>
+          <a:bodyPr wrap="square" lIns="0" rIns="0" tIns="0" bIns="0">
+            <a:spAutoFit/>
+          </a:bodyPr>
+          <a:lstStyle/>
+          <a:p>
+            <a:pPr>
+              <a:spcAft>
+                <a:spcPts val="200"/>
+              </a:spcAft>
+            </a:pPr>
+            <a:r>
+              <a:rPr sz="1300" b="1">
+                <a:solidFill>
+                  <a:srgbClr val="1E2761"/>
+                </a:solidFill>
+                <a:latin typeface="Calibri"/>
+              </a:rPr>
+              <a:t>Buyers: </a:t>
+            </a:r>
+            <a:r>
+              <a:rPr sz="1300" b="0">
+                <a:solidFill>
+                  <a:srgbClr val="5B5F6E"/>
+                </a:solidFill>
+                <a:latin typeface="Calibri"/>
+              </a:rPr>
+              <a:t>100 — Poor 70 / Middle 20 / Rich 10, dispersed budgets</a:t>
+            </a:r>
+          </a:p>
+          <a:p>
+            <a:pPr>
+              <a:spcAft>
+                <a:spcPts val="200"/>
+              </a:spcAft>
+            </a:pPr>
+            <a:r>
+              <a:rPr sz="1300" b="1">
+                <a:solidFill>
+                  <a:srgbClr val="1E2761"/>
+                </a:solidFill>
+                <a:latin typeface="Calibri"/>
+              </a:rPr>
+              <a:t>Sellers: </a:t>
+            </a:r>
+            <a:r>
+              <a:rPr sz="1300" b="0">
+                <a:solidFill>
+                  <a:srgbClr val="5B5F6E"/>
+                </a:solidFill>
+                <a:latin typeface="Calibri"/>
+              </a:rPr>
+              <a:t>5 — one learns its price, the rest hold their list price</a:t>
+            </a:r>
+          </a:p>
+        </p:txBody>
+      </p:sp>
+      <p:sp>
+        <p:nvSpPr>
+          <p:cNvPr id="8" name="Rectangle 7"/>
+          <p:cNvSpPr/>
+          <p:nvPr/>
+        </p:nvSpPr>
+        <p:spPr>
+          <a:xfrm>
+            <a:off x="457200" y="2651760"/>
+            <a:ext cx="292608" cy="292608"/>
+          </a:xfrm>
+          <a:prstGeom prst="rect">
+            <a:avLst/>
+          </a:prstGeom>
+          <a:solidFill>
+            <a:srgbClr val="1E2761"/>
+          </a:solidFill>
+          <a:ln>
+            <a:noFill/>
+          </a:ln>
+        </p:spPr>
+        <p:style>
+          <a:lnRef idx="1">
+            <a:schemeClr val="accent1"/>
+          </a:lnRef>
+          <a:fillRef idx="3">
+            <a:schemeClr val="accent1"/>
+          </a:fillRef>
+          <a:effectRef idx="2">
+            <a:schemeClr val="accent1"/>
+          </a:effectRef>
+          <a:fontRef idx="minor">
+            <a:schemeClr val="lt1"/>
+          </a:fontRef>
+        </p:style>
+        <p:txBody>
+          <a:bodyPr rtlCol="0" anchor="ctr"/>
+          <a:lstStyle/>
+          <a:p/>
+        </p:txBody>
+      </p:sp>
+      <p:sp>
+        <p:nvSpPr>
+          <p:cNvPr id="9" name="TextBox 8"/>
+          <p:cNvSpPr txBox="1"/>
+          <p:nvPr/>
+        </p:nvSpPr>
+        <p:spPr>
+          <a:xfrm>
+            <a:off x="868680" y="2624328"/>
+            <a:ext cx="4617720" cy="347472"/>
+          </a:xfrm>
+          <a:prstGeom prst="rect">
+            <a:avLst/>
+          </a:prstGeom>
+          <a:noFill/>
+        </p:spPr>
+        <p:txBody>
+          <a:bodyPr wrap="square" lIns="0" rIns="0" tIns="0" bIns="0">
+            <a:spAutoFit/>
+          </a:bodyPr>
+          <a:lstStyle/>
+          <a:p>
+            <a:pPr>
+              <a:spcAft>
+                <a:spcPts val="200"/>
+              </a:spcAft>
+            </a:pPr>
+            <a:r>
+              <a:rPr sz="1500" b="1">
+                <a:solidFill>
+                  <a:srgbClr val="1E2761"/>
+                </a:solidFill>
+                <a:latin typeface="Calibri"/>
+              </a:rPr>
+              <a:t>ENVIRONMENT &amp; CONTEXT</a:t>
+            </a:r>
+          </a:p>
+        </p:txBody>
+      </p:sp>
+      <p:sp>
+        <p:nvSpPr>
+          <p:cNvPr id="10" name="TextBox 9"/>
+          <p:cNvSpPr txBox="1"/>
+          <p:nvPr/>
+        </p:nvSpPr>
+        <p:spPr>
+          <a:xfrm>
+            <a:off x="868680" y="3063240"/>
+            <a:ext cx="4617720" cy="548640"/>
+          </a:xfrm>
+          <a:prstGeom prst="rect">
+            <a:avLst/>
+          </a:prstGeom>
+          <a:noFill/>
+        </p:spPr>
+        <p:txBody>
+          <a:bodyPr wrap="square" lIns="0" rIns="0" tIns="0" bIns="0">
+            <a:spAutoFit/>
+          </a:bodyPr>
+          <a:lstStyle/>
+          <a:p>
+            <a:pPr>
+              <a:spcAft>
+                <a:spcPts val="200"/>
+              </a:spcAft>
+            </a:pPr>
+            <a:r>
+              <a:rPr sz="1300" b="0">
+                <a:solidFill>
+                  <a:srgbClr val="5B5F6E"/>
+                </a:solidFill>
+                <a:latin typeface="Calibri"/>
+              </a:rPr>
+              <a:t>-  The cell 7e-2 carried: persistent stock, delta = 1.0, L_max = 3.30.</a:t>
+            </a:r>
+          </a:p>
+          <a:p>
+            <a:pPr>
+              <a:spcAft>
+                <a:spcPts val="200"/>
+              </a:spcAft>
+            </a:pPr>
+            <a:r>
+              <a:rPr sz="1300" b="0">
+                <a:solidFill>
+                  <a:srgbClr val="5B5F6E"/>
+                </a:solidFill>
+                <a:latin typeface="Calibri"/>
+              </a:rPr>
+              <a:t>-  7e-2 measured a schedule worth +2.6% here before this was built,</a:t>
+            </a:r>
+          </a:p>
+          <a:p>
+            <a:pPr>
+              <a:spcAft>
+                <a:spcPts val="200"/>
+              </a:spcAft>
+            </a:pPr>
+            <a:r>
+              <a:rPr sz="1300" b="0">
+                <a:solidFill>
+                  <a:srgbClr val="5B5F6E"/>
+                </a:solidFill>
+                <a:latin typeface="Calibri"/>
+              </a:rPr>
+              <a:t>   so the thing to find is known, priced, and inside the policy class.</a:t>
+            </a:r>
+          </a:p>
+        </p:txBody>
+      </p:sp>
+      <p:sp>
+        <p:nvSpPr>
+          <p:cNvPr id="11" name="Rectangle 10"/>
+          <p:cNvSpPr/>
+          <p:nvPr/>
+        </p:nvSpPr>
+        <p:spPr>
+          <a:xfrm>
+            <a:off x="457200" y="3886200"/>
+            <a:ext cx="292608" cy="292608"/>
+          </a:xfrm>
+          <a:prstGeom prst="rect">
+            <a:avLst/>
+          </a:prstGeom>
+          <a:solidFill>
+            <a:srgbClr val="1E2761"/>
+          </a:solidFill>
+          <a:ln>
+            <a:noFill/>
+          </a:ln>
+        </p:spPr>
+        <p:style>
+          <a:lnRef idx="1">
+            <a:schemeClr val="accent1"/>
+          </a:lnRef>
+          <a:fillRef idx="3">
+            <a:schemeClr val="accent1"/>
+          </a:fillRef>
+          <a:effectRef idx="2">
+            <a:schemeClr val="accent1"/>
+          </a:effectRef>
+          <a:fontRef idx="minor">
+            <a:schemeClr val="lt1"/>
+          </a:fontRef>
+        </p:style>
+        <p:txBody>
+          <a:bodyPr rtlCol="0" anchor="ctr"/>
+          <a:lstStyle/>
+          <a:p/>
+        </p:txBody>
+      </p:sp>
+      <p:sp>
+        <p:nvSpPr>
+          <p:cNvPr id="12" name="TextBox 11"/>
+          <p:cNvSpPr txBox="1"/>
+          <p:nvPr/>
+        </p:nvSpPr>
+        <p:spPr>
+          <a:xfrm>
+            <a:off x="868680" y="3858768"/>
+            <a:ext cx="4617720" cy="347472"/>
+          </a:xfrm>
+          <a:prstGeom prst="rect">
+            <a:avLst/>
+          </a:prstGeom>
+          <a:noFill/>
+        </p:spPr>
+        <p:txBody>
+          <a:bodyPr wrap="square" lIns="0" rIns="0" tIns="0" bIns="0">
+            <a:spAutoFit/>
+          </a:bodyPr>
+          <a:lstStyle/>
+          <a:p>
+            <a:pPr>
+              <a:spcAft>
+                <a:spcPts val="200"/>
+              </a:spcAft>
+            </a:pPr>
+            <a:r>
+              <a:rPr sz="1500" b="1">
+                <a:solidFill>
+                  <a:srgbClr val="1E2761"/>
+                </a:solidFill>
+                <a:latin typeface="Calibri"/>
+              </a:rPr>
+              <a:t>METHOD</a:t>
+            </a:r>
+          </a:p>
+        </p:txBody>
+      </p:sp>
+      <p:sp>
+        <p:nvSpPr>
+          <p:cNvPr id="13" name="TextBox 12"/>
+          <p:cNvSpPr txBox="1"/>
+          <p:nvPr/>
+        </p:nvSpPr>
+        <p:spPr>
+          <a:xfrm>
+            <a:off x="868680" y="4297680"/>
+            <a:ext cx="4617720" cy="594360"/>
+          </a:xfrm>
+          <a:prstGeom prst="rect">
+            <a:avLst/>
+          </a:prstGeom>
+          <a:noFill/>
+        </p:spPr>
+        <p:txBody>
+          <a:bodyPr wrap="square" lIns="0" rIns="0" tIns="0" bIns="0">
+            <a:spAutoFit/>
+          </a:bodyPr>
+          <a:lstStyle/>
+          <a:p>
+            <a:pPr>
+              <a:spcAft>
+                <a:spcPts val="200"/>
+              </a:spcAft>
+            </a:pPr>
+            <a:r>
+              <a:rPr sz="1300" b="0">
+                <a:solidFill>
+                  <a:srgbClr val="5B5F6E"/>
+                </a:solidFill>
+                <a:latin typeface="Calibri"/>
+              </a:rPr>
+              <a:t>Phase 7d's Q-network on a 10-week discounted return, with the</a:t>
+            </a:r>
+          </a:p>
+          <a:p>
+            <a:pPr>
+              <a:spcAft>
+                <a:spcPts val="200"/>
+              </a:spcAft>
+            </a:pPr>
+            <a:r>
+              <a:rPr sz="1300" b="0">
+                <a:solidFill>
+                  <a:srgbClr val="5B5F6E"/>
+                </a:solidFill>
+                <a:latin typeface="Calibri"/>
+              </a:rPr>
+              <a:t>loyalty stock added to its features. Its module is reused and</a:t>
+            </a:r>
+          </a:p>
+          <a:p>
+            <a:pPr>
+              <a:spcAft>
+                <a:spcPts val="200"/>
+              </a:spcAft>
+            </a:pPr>
+            <a:r>
+              <a:rPr sz="1300" b="0">
+                <a:solidFill>
+                  <a:srgbClr val="5B5F6E"/>
+                </a:solidFill>
+                <a:latin typeface="Calibri"/>
+              </a:rPr>
+              <a:t>parameterized, so 7d still trains on exactly its own four features.</a:t>
+            </a:r>
+          </a:p>
+        </p:txBody>
+      </p:sp>
+      <p:sp>
+        <p:nvSpPr>
+          <p:cNvPr id="14" name="Rectangle 13"/>
+          <p:cNvSpPr/>
+          <p:nvPr/>
+        </p:nvSpPr>
+        <p:spPr>
+          <a:xfrm>
+            <a:off x="457200" y="5029200"/>
+            <a:ext cx="292608" cy="292608"/>
+          </a:xfrm>
+          <a:prstGeom prst="rect">
+            <a:avLst/>
+          </a:prstGeom>
+          <a:solidFill>
+            <a:srgbClr val="1E2761"/>
+          </a:solidFill>
+          <a:ln>
+            <a:noFill/>
+          </a:ln>
+        </p:spPr>
+        <p:style>
+          <a:lnRef idx="1">
+            <a:schemeClr val="accent1"/>
+          </a:lnRef>
+          <a:fillRef idx="3">
+            <a:schemeClr val="accent1"/>
+          </a:fillRef>
+          <a:effectRef idx="2">
+            <a:schemeClr val="accent1"/>
+          </a:effectRef>
+          <a:fontRef idx="minor">
+            <a:schemeClr val="lt1"/>
+          </a:fontRef>
+        </p:style>
+        <p:txBody>
+          <a:bodyPr rtlCol="0" anchor="ctr"/>
+          <a:lstStyle/>
+          <a:p/>
+        </p:txBody>
+      </p:sp>
+      <p:sp>
+        <p:nvSpPr>
+          <p:cNvPr id="15" name="TextBox 14"/>
+          <p:cNvSpPr txBox="1"/>
+          <p:nvPr/>
+        </p:nvSpPr>
+        <p:spPr>
+          <a:xfrm>
+            <a:off x="868680" y="5001768"/>
+            <a:ext cx="4617720" cy="347472"/>
+          </a:xfrm>
+          <a:prstGeom prst="rect">
+            <a:avLst/>
+          </a:prstGeom>
+          <a:noFill/>
+        </p:spPr>
+        <p:txBody>
+          <a:bodyPr wrap="square" lIns="0" rIns="0" tIns="0" bIns="0">
+            <a:spAutoFit/>
+          </a:bodyPr>
+          <a:lstStyle/>
+          <a:p>
+            <a:pPr>
+              <a:spcAft>
+                <a:spcPts val="200"/>
+              </a:spcAft>
+            </a:pPr>
+            <a:r>
+              <a:rPr sz="1500" b="1">
+                <a:solidFill>
+                  <a:srgbClr val="1E2761"/>
+                </a:solidFill>
+                <a:latin typeface="Calibri"/>
+              </a:rPr>
+              <a:t>LITERATURE BASIS</a:t>
+            </a:r>
+          </a:p>
+        </p:txBody>
+      </p:sp>
+      <p:sp>
+        <p:nvSpPr>
+          <p:cNvPr id="16" name="TextBox 15"/>
+          <p:cNvSpPr txBox="1"/>
+          <p:nvPr/>
+        </p:nvSpPr>
+        <p:spPr>
+          <a:xfrm>
+            <a:off x="868680" y="5440680"/>
+            <a:ext cx="4617720" cy="1005840"/>
+          </a:xfrm>
+          <a:prstGeom prst="rect">
+            <a:avLst/>
+          </a:prstGeom>
+          <a:noFill/>
+        </p:spPr>
+        <p:txBody>
+          <a:bodyPr wrap="square" lIns="0" rIns="0" tIns="0" bIns="0">
+            <a:spAutoFit/>
+          </a:bodyPr>
+          <a:lstStyle/>
+          <a:p>
+            <a:pPr>
+              <a:spcAft>
+                <a:spcPts val="600"/>
+              </a:spcAft>
+            </a:pPr>
+            <a:r>
+              <a:rPr sz="1100" b="1">
+                <a:solidFill>
+                  <a:srgbClr val="1E2761"/>
+                </a:solidFill>
+                <a:latin typeface="Calibri"/>
+              </a:rPr>
+              <a:t>Nerlove &amp; Arrow (1962), </a:t>
+            </a:r>
+            <a:r>
+              <a:rPr sz="1100" b="0">
+                <a:solidFill>
+                  <a:srgbClr val="5B5F6E"/>
+                </a:solidFill>
+                <a:latin typeface="Calibri"/>
+              </a:rPr>
+              <a:t>“Optimal Advertising Policy under Dynamic Conditions” (Economica) — goodwill as a depreciating stock bought with current spending, the trade-off the learner is sent after.</a:t>
+            </a:r>
+          </a:p>
+        </p:txBody>
+      </p:sp>
+      <p:sp>
+        <p:nvSpPr>
+          <p:cNvPr id="17" name="Rectangle 16"/>
+          <p:cNvSpPr/>
+          <p:nvPr/>
+        </p:nvSpPr>
+        <p:spPr>
+          <a:xfrm>
+            <a:off x="5943600" y="1417320"/>
+            <a:ext cx="292608" cy="292608"/>
+          </a:xfrm>
+          <a:prstGeom prst="rect">
+            <a:avLst/>
+          </a:prstGeom>
+          <a:solidFill>
+            <a:srgbClr val="1E2761"/>
+          </a:solidFill>
+          <a:ln>
+            <a:noFill/>
+          </a:ln>
+        </p:spPr>
+        <p:style>
+          <a:lnRef idx="1">
+            <a:schemeClr val="accent1"/>
+          </a:lnRef>
+          <a:fillRef idx="3">
+            <a:schemeClr val="accent1"/>
+          </a:fillRef>
+          <a:effectRef idx="2">
+            <a:schemeClr val="accent1"/>
+          </a:effectRef>
+          <a:fontRef idx="minor">
+            <a:schemeClr val="lt1"/>
+          </a:fontRef>
+        </p:style>
+        <p:txBody>
+          <a:bodyPr rtlCol="0" anchor="ctr"/>
+          <a:lstStyle/>
+          <a:p/>
+        </p:txBody>
+      </p:sp>
+      <p:sp>
+        <p:nvSpPr>
+          <p:cNvPr id="18" name="TextBox 17"/>
+          <p:cNvSpPr txBox="1"/>
+          <p:nvPr/>
+        </p:nvSpPr>
+        <p:spPr>
+          <a:xfrm>
+            <a:off x="6355080" y="1389888"/>
+            <a:ext cx="5349240" cy="347472"/>
+          </a:xfrm>
+          <a:prstGeom prst="rect">
+            <a:avLst/>
+          </a:prstGeom>
+          <a:noFill/>
+        </p:spPr>
+        <p:txBody>
+          <a:bodyPr wrap="square" lIns="0" rIns="0" tIns="0" bIns="0">
+            <a:spAutoFit/>
+          </a:bodyPr>
+          <a:lstStyle/>
+          <a:p>
+            <a:pPr>
+              <a:spcAft>
+                <a:spcPts val="200"/>
+              </a:spcAft>
+            </a:pPr>
+            <a:r>
+              <a:rPr sz="1500" b="1">
+                <a:solidFill>
+                  <a:srgbClr val="1E2761"/>
+                </a:solidFill>
+                <a:latin typeface="Calibri"/>
+              </a:rPr>
+              <a:t>KEY RESULTS</a:t>
+            </a:r>
+          </a:p>
+        </p:txBody>
+      </p:sp>
+      <p:graphicFrame>
+        <p:nvGraphicFramePr>
+          <p:cNvPr id="19" name="Table 18"/>
+          <p:cNvGraphicFramePr>
+            <a:graphicFrameLocks noGrp="1"/>
+          </p:cNvGraphicFramePr>
+          <p:nvPr/>
+        </p:nvGraphicFramePr>
+        <p:xfrm>
+          <a:off x="5943600" y="1874519"/>
+          <a:ext cx="5760720" cy="1920240"/>
+        </p:xfrm>
+        <a:graphic>
+          <a:graphicData uri="http://schemas.openxmlformats.org/drawingml/2006/table">
+            <a:tbl>
+              <a:tblPr firstRow="1" bandRow="1">
+                <a:tableStyleId>{5C22544A-7EE6-4342-B048-85BDC9FD1C3A}</a:tableStyleId>
+              </a:tblPr>
+              <a:tblGrid>
+                <a:gridCol w="3200400"/>
+                <a:gridCol w="1463040"/>
+                <a:gridCol w="1097280"/>
+              </a:tblGrid>
+              <a:tr h="274320">
+                <a:tc>
+                  <a:txBody>
+                    <a:bodyPr/>
+                    <a:lstStyle/>
+                    <a:p>
+                      <a:r>
+                        <a:rPr sz="1100" b="1">
+                          <a:solidFill>
+                            <a:srgbClr val="FFFFFF"/>
+                          </a:solidFill>
+                          <a:latin typeface="Calibri"/>
+                        </a:rPr>
+                        <a:t>Metric</a:t>
+                      </a:r>
+                    </a:p>
+                  </a:txBody>
+                  <a:tcPr>
+                    <a:solidFill>
+                      <a:srgbClr val="1E2761"/>
+                    </a:solidFill>
+                  </a:tcPr>
+                </a:tc>
+                <a:tc>
+                  <a:txBody>
+                    <a:bodyPr/>
+                    <a:lstStyle/>
+                    <a:p>
+                      <a:r>
+                        <a:rPr sz="1100" b="1">
+                          <a:solidFill>
+                            <a:srgbClr val="FFFFFF"/>
+                          </a:solidFill>
+                          <a:latin typeface="Calibri"/>
+                        </a:rPr>
+                        <a:t>Value</a:t>
+                      </a:r>
+                    </a:p>
+                  </a:txBody>
+                  <a:tcPr>
+                    <a:solidFill>
+                      <a:srgbClr val="1E2761"/>
+                    </a:solidFill>
+                  </a:tcPr>
+                </a:tc>
+                <a:tc>
+                  <a:txBody>
+                    <a:bodyPr/>
+                    <a:lstStyle/>
+                    <a:p>
+                      <a:r>
+                        <a:rPr sz="1100" b="1">
+                          <a:solidFill>
+                            <a:srgbClr val="FFFFFF"/>
+                          </a:solidFill>
+                          <a:latin typeface="Calibri"/>
+                        </a:rPr>
+                        <a:t/>
+                      </a:r>
+                    </a:p>
+                  </a:txBody>
+                  <a:tcPr>
+                    <a:solidFill>
+                      <a:srgbClr val="1E2761"/>
+                    </a:solidFill>
+                  </a:tcPr>
+                </a:tc>
+              </a:tr>
+              <a:tr h="274320">
+                <a:tc>
+                  <a:txBody>
+                    <a:bodyPr/>
+                    <a:lstStyle/>
+                    <a:p>
+                      <a:r>
+                        <a:rPr sz="1100">
+                          <a:solidFill>
+                            <a:srgbClr val="1E2761"/>
+                          </a:solidFill>
+                          <a:latin typeface="Calibri"/>
+                        </a:rPr>
+                        <a:t>7e-2 schedule (attainable)</a:t>
+                      </a:r>
+                    </a:p>
+                  </a:txBody>
+                  <a:tcPr>
+                    <a:solidFill>
+                      <a:srgbClr val="FFFFFF"/>
+                    </a:solidFill>
+                  </a:tcPr>
+                </a:tc>
+                <a:tc>
+                  <a:txBody>
+                    <a:bodyPr/>
+                    <a:lstStyle/>
+                    <a:p>
+                      <a:r>
+                        <a:rPr sz="1100">
+                          <a:solidFill>
+                            <a:srgbClr val="5B5F6E"/>
+                          </a:solidFill>
+                          <a:latin typeface="Calibri"/>
+                        </a:rPr>
+                        <a:t>44.3/wk</a:t>
+                      </a:r>
+                    </a:p>
+                  </a:txBody>
+                  <a:tcPr>
+                    <a:solidFill>
+                      <a:srgbClr val="FFFFFF"/>
+                    </a:solidFill>
+                  </a:tcPr>
+                </a:tc>
+                <a:tc>
+                  <a:txBody>
+                    <a:bodyPr/>
+                    <a:lstStyle/>
+                    <a:p>
+                      <a:pPr algn="ctr"/>
+                      <a:r>
+                        <a:rPr sz="1100" b="1">
+                          <a:solidFill>
+                            <a:srgbClr val="5B5F6E"/>
+                          </a:solidFill>
+                          <a:latin typeface="Calibri"/>
+                        </a:rPr>
+                        <a:t>—</a:t>
+                      </a:r>
+                    </a:p>
+                  </a:txBody>
+                  <a:tcPr>
+                    <a:solidFill>
+                      <a:srgbClr val="FFFFFF"/>
+                    </a:solidFill>
+                  </a:tcPr>
+                </a:tc>
+              </a:tr>
+              <a:tr h="274320">
+                <a:tc>
+                  <a:txBody>
+                    <a:bodyPr/>
+                    <a:lstStyle/>
+                    <a:p>
+                      <a:r>
+                        <a:rPr sz="1100">
+                          <a:solidFill>
+                            <a:srgbClr val="1E2761"/>
+                          </a:solidFill>
+                          <a:latin typeface="Calibri"/>
+                        </a:rPr>
+                        <a:t>flat at the oracle price</a:t>
+                      </a:r>
+                    </a:p>
+                  </a:txBody>
+                  <a:tcPr>
+                    <a:solidFill>
+                      <a:srgbClr val="F7F8FC"/>
+                    </a:solidFill>
+                  </a:tcPr>
+                </a:tc>
+                <a:tc>
+                  <a:txBody>
+                    <a:bodyPr/>
+                    <a:lstStyle/>
+                    <a:p>
+                      <a:r>
+                        <a:rPr sz="1100">
+                          <a:solidFill>
+                            <a:srgbClr val="5B5F6E"/>
+                          </a:solidFill>
+                          <a:latin typeface="Calibri"/>
+                        </a:rPr>
+                        <a:t>43.2/wk</a:t>
+                      </a:r>
+                    </a:p>
+                  </a:txBody>
+                  <a:tcPr>
+                    <a:solidFill>
+                      <a:srgbClr val="F7F8FC"/>
+                    </a:solidFill>
+                  </a:tcPr>
+                </a:tc>
+                <a:tc>
+                  <a:txBody>
+                    <a:bodyPr/>
+                    <a:lstStyle/>
+                    <a:p>
+                      <a:pPr algn="ctr"/>
+                      <a:r>
+                        <a:rPr sz="1100" b="1">
+                          <a:solidFill>
+                            <a:srgbClr val="5B5F6E"/>
+                          </a:solidFill>
+                          <a:latin typeface="Calibri"/>
+                        </a:rPr>
+                        <a:t>—</a:t>
+                      </a:r>
+                    </a:p>
+                  </a:txBody>
+                  <a:tcPr>
+                    <a:solidFill>
+                      <a:srgbClr val="F7F8FC"/>
+                    </a:solidFill>
+                  </a:tcPr>
+                </a:tc>
+              </a:tr>
+              <a:tr h="274320">
+                <a:tc>
+                  <a:txBody>
+                    <a:bodyPr/>
+                    <a:lstStyle/>
+                    <a:p>
+                      <a:r>
+                        <a:rPr sz="1100">
+                          <a:solidFill>
+                            <a:srgbClr val="1E2761"/>
+                          </a:solidFill>
+                          <a:latin typeface="Calibri"/>
+                        </a:rPr>
+                        <a:t>LinUCB blind</a:t>
+                      </a:r>
+                    </a:p>
+                  </a:txBody>
+                  <a:tcPr>
+                    <a:solidFill>
+                      <a:srgbClr val="FFFFFF"/>
+                    </a:solidFill>
+                  </a:tcPr>
+                </a:tc>
+                <a:tc>
+                  <a:txBody>
+                    <a:bodyPr/>
+                    <a:lstStyle/>
+                    <a:p>
+                      <a:r>
+                        <a:rPr sz="1100">
+                          <a:solidFill>
+                            <a:srgbClr val="5B5F6E"/>
+                          </a:solidFill>
+                          <a:latin typeface="Calibri"/>
+                        </a:rPr>
+                        <a:t>41.4/wk</a:t>
+                      </a:r>
+                    </a:p>
+                  </a:txBody>
+                  <a:tcPr>
+                    <a:solidFill>
+                      <a:srgbClr val="FFFFFF"/>
+                    </a:solidFill>
+                  </a:tcPr>
+                </a:tc>
+                <a:tc>
+                  <a:txBody>
+                    <a:bodyPr/>
+                    <a:lstStyle/>
+                    <a:p>
+                      <a:pPr algn="ctr"/>
+                      <a:r>
+                        <a:rPr sz="1100" b="1">
+                          <a:solidFill>
+                            <a:srgbClr val="5B5F6E"/>
+                          </a:solidFill>
+                          <a:latin typeface="Calibri"/>
+                        </a:rPr>
+                        <a:t>—</a:t>
+                      </a:r>
+                    </a:p>
+                  </a:txBody>
+                  <a:tcPr>
+                    <a:solidFill>
+                      <a:srgbClr val="FFFFFF"/>
+                    </a:solidFill>
+                  </a:tcPr>
+                </a:tc>
+              </a:tr>
+              <a:tr h="274320">
+                <a:tc>
+                  <a:txBody>
+                    <a:bodyPr/>
+                    <a:lstStyle/>
+                    <a:p>
+                      <a:r>
+                        <a:rPr sz="1100">
+                          <a:solidFill>
+                            <a:srgbClr val="1E2761"/>
+                          </a:solidFill>
+                          <a:latin typeface="Calibri"/>
+                        </a:rPr>
+                        <a:t>Q-network</a:t>
+                      </a:r>
+                    </a:p>
+                  </a:txBody>
+                  <a:tcPr>
+                    <a:solidFill>
+                      <a:srgbClr val="F7F8FC"/>
+                    </a:solidFill>
+                  </a:tcPr>
+                </a:tc>
+                <a:tc>
+                  <a:txBody>
+                    <a:bodyPr/>
+                    <a:lstStyle/>
+                    <a:p>
+                      <a:r>
+                        <a:rPr sz="1100">
+                          <a:solidFill>
+                            <a:srgbClr val="5B5F6E"/>
+                          </a:solidFill>
+                          <a:latin typeface="Calibri"/>
+                        </a:rPr>
+                        <a:t>42.3/wk</a:t>
+                      </a:r>
+                    </a:p>
+                  </a:txBody>
+                  <a:tcPr>
+                    <a:solidFill>
+                      <a:srgbClr val="F7F8FC"/>
+                    </a:solidFill>
+                  </a:tcPr>
+                </a:tc>
+                <a:tc>
+                  <a:txBody>
+                    <a:bodyPr/>
+                    <a:lstStyle/>
+                    <a:p>
+                      <a:pPr algn="ctr"/>
+                      <a:r>
+                        <a:rPr sz="1100" b="1">
+                          <a:solidFill>
+                            <a:srgbClr val="5B5F6E"/>
+                          </a:solidFill>
+                          <a:latin typeface="Calibri"/>
+                        </a:rPr>
+                        <a:t>—</a:t>
+                      </a:r>
+                    </a:p>
+                  </a:txBody>
+                  <a:tcPr>
+                    <a:solidFill>
+                      <a:srgbClr val="F7F8FC"/>
+                    </a:solidFill>
+                  </a:tcPr>
+                </a:tc>
+              </a:tr>
+              <a:tr h="274320">
+                <a:tc>
+                  <a:txBody>
+                    <a:bodyPr/>
+                    <a:lstStyle/>
+                    <a:p>
+                      <a:r>
+                        <a:rPr sz="1100">
+                          <a:solidFill>
+                            <a:srgbClr val="1E2761"/>
+                          </a:solidFill>
+                          <a:latin typeface="Calibri"/>
+                        </a:rPr>
+                        <a:t>  vs the bandit</a:t>
+                      </a:r>
+                    </a:p>
+                  </a:txBody>
+                  <a:tcPr>
+                    <a:solidFill>
+                      <a:srgbClr val="FFFFFF"/>
+                    </a:solidFill>
+                  </a:tcPr>
+                </a:tc>
+                <a:tc>
+                  <a:txBody>
+                    <a:bodyPr/>
+                    <a:lstStyle/>
+                    <a:p>
+                      <a:r>
+                        <a:rPr sz="1100">
+                          <a:solidFill>
+                            <a:srgbClr val="5B5F6E"/>
+                          </a:solidFill>
+                          <a:latin typeface="Calibri"/>
+                        </a:rPr>
+                        <a:t>+2.2%</a:t>
+                      </a:r>
+                    </a:p>
+                  </a:txBody>
+                  <a:tcPr>
+                    <a:solidFill>
+                      <a:srgbClr val="FFFFFF"/>
+                    </a:solidFill>
+                  </a:tcPr>
+                </a:tc>
+                <a:tc>
+                  <a:txBody>
+                    <a:bodyPr/>
+                    <a:lstStyle/>
+                    <a:p>
+                      <a:pPr algn="ctr"/>
+                      <a:r>
+                        <a:rPr sz="1100" b="1">
+                          <a:solidFill>
+                            <a:srgbClr val="1E7A4D"/>
+                          </a:solidFill>
+                          <a:latin typeface="Calibri"/>
+                        </a:rPr>
+                        <a:t>PASS</a:t>
+                      </a:r>
+                    </a:p>
+                  </a:txBody>
+                  <a:tcPr>
+                    <a:solidFill>
+                      <a:srgbClr val="FFFFFF"/>
+                    </a:solidFill>
+                  </a:tcPr>
+                </a:tc>
+              </a:tr>
+              <a:tr h="274320">
+                <a:tc>
+                  <a:txBody>
+                    <a:bodyPr/>
+                    <a:lstStyle/>
+                    <a:p>
+                      <a:r>
+                        <a:rPr sz="1100">
+                          <a:solidFill>
+                            <a:srgbClr val="1E2761"/>
+                          </a:solidFill>
+                          <a:latin typeface="Calibri"/>
+                        </a:rPr>
+                        <a:t>  of the way to the schedule</a:t>
+                      </a:r>
+                    </a:p>
+                  </a:txBody>
+                  <a:tcPr>
+                    <a:solidFill>
+                      <a:srgbClr val="F7F8FC"/>
+                    </a:solidFill>
+                  </a:tcPr>
+                </a:tc>
+                <a:tc>
+                  <a:txBody>
+                    <a:bodyPr/>
+                    <a:lstStyle/>
+                    <a:p>
+                      <a:r>
+                        <a:rPr sz="1100">
+                          <a:solidFill>
+                            <a:srgbClr val="5B5F6E"/>
+                          </a:solidFill>
+                          <a:latin typeface="Calibri"/>
+                        </a:rPr>
+                        <a:t>31%</a:t>
+                      </a:r>
+                    </a:p>
+                  </a:txBody>
+                  <a:tcPr>
+                    <a:solidFill>
+                      <a:srgbClr val="F7F8FC"/>
+                    </a:solidFill>
+                  </a:tcPr>
+                </a:tc>
+                <a:tc>
+                  <a:txBody>
+                    <a:bodyPr/>
+                    <a:lstStyle/>
+                    <a:p>
+                      <a:pPr algn="ctr"/>
+                      <a:r>
+                        <a:rPr sz="1100" b="1">
+                          <a:solidFill>
+                            <a:srgbClr val="B3262A"/>
+                          </a:solidFill>
+                          <a:latin typeface="Calibri"/>
+                        </a:rPr>
+                        <a:t>FAIL</a:t>
+                      </a:r>
+                    </a:p>
+                  </a:txBody>
+                  <a:tcPr>
+                    <a:solidFill>
+                      <a:srgbClr val="F7F8FC"/>
+                    </a:solidFill>
+                  </a:tcPr>
+                </a:tc>
+              </a:tr>
+            </a:tbl>
+          </a:graphicData>
+        </a:graphic>
+      </p:graphicFrame>
+      <p:sp>
+        <p:nvSpPr>
+          <p:cNvPr id="20" name="Rectangle 19"/>
+          <p:cNvSpPr/>
+          <p:nvPr/>
+        </p:nvSpPr>
+        <p:spPr>
+          <a:xfrm>
+            <a:off x="5943600" y="4023360"/>
+            <a:ext cx="292608" cy="292608"/>
+          </a:xfrm>
+          <a:prstGeom prst="rect">
+            <a:avLst/>
+          </a:prstGeom>
+          <a:solidFill>
+            <a:srgbClr val="1E2761"/>
+          </a:solidFill>
+          <a:ln>
+            <a:noFill/>
+          </a:ln>
+        </p:spPr>
+        <p:style>
+          <a:lnRef idx="1">
+            <a:schemeClr val="accent1"/>
+          </a:lnRef>
+          <a:fillRef idx="3">
+            <a:schemeClr val="accent1"/>
+          </a:fillRef>
+          <a:effectRef idx="2">
+            <a:schemeClr val="accent1"/>
+          </a:effectRef>
+          <a:fontRef idx="minor">
+            <a:schemeClr val="lt1"/>
+          </a:fontRef>
+        </p:style>
+        <p:txBody>
+          <a:bodyPr rtlCol="0" anchor="ctr"/>
+          <a:lstStyle/>
+          <a:p/>
+        </p:txBody>
+      </p:sp>
+      <p:sp>
+        <p:nvSpPr>
+          <p:cNvPr id="21" name="TextBox 20"/>
+          <p:cNvSpPr txBox="1"/>
+          <p:nvPr/>
+        </p:nvSpPr>
+        <p:spPr>
+          <a:xfrm>
+            <a:off x="6355080" y="3995928"/>
+            <a:ext cx="5349240" cy="347472"/>
+          </a:xfrm>
+          <a:prstGeom prst="rect">
+            <a:avLst/>
+          </a:prstGeom>
+          <a:noFill/>
+        </p:spPr>
+        <p:txBody>
+          <a:bodyPr wrap="square" lIns="0" rIns="0" tIns="0" bIns="0">
+            <a:spAutoFit/>
+          </a:bodyPr>
+          <a:lstStyle/>
+          <a:p>
+            <a:pPr>
+              <a:spcAft>
+                <a:spcPts val="200"/>
+              </a:spcAft>
+            </a:pPr>
+            <a:r>
+              <a:rPr sz="1500" b="1">
+                <a:solidFill>
+                  <a:srgbClr val="1E2761"/>
+                </a:solidFill>
+                <a:latin typeface="Calibri"/>
+              </a:rPr>
+              <a:t>RESEARCH QUESTION</a:t>
+            </a:r>
+          </a:p>
+        </p:txBody>
+      </p:sp>
+      <p:sp>
+        <p:nvSpPr>
+          <p:cNvPr id="22" name="Rectangle 21"/>
+          <p:cNvSpPr/>
+          <p:nvPr/>
+        </p:nvSpPr>
+        <p:spPr>
+          <a:xfrm>
+            <a:off x="5943600" y="4434840"/>
+            <a:ext cx="5760720" cy="1965960"/>
+          </a:xfrm>
+          <a:prstGeom prst="rect">
+            <a:avLst/>
+          </a:prstGeom>
+          <a:solidFill>
+            <a:srgbClr val="F7F8FC"/>
+          </a:solidFill>
+          <a:ln>
+            <a:noFill/>
+          </a:ln>
+        </p:spPr>
+        <p:style>
+          <a:lnRef idx="1">
+            <a:schemeClr val="accent1"/>
+          </a:lnRef>
+          <a:fillRef idx="3">
+            <a:schemeClr val="accent1"/>
+          </a:fillRef>
+          <a:effectRef idx="2">
+            <a:schemeClr val="accent1"/>
+          </a:effectRef>
+          <a:fontRef idx="minor">
+            <a:schemeClr val="lt1"/>
+          </a:fontRef>
+        </p:style>
+        <p:txBody>
+          <a:bodyPr rtlCol="0" anchor="ctr"/>
+          <a:lstStyle/>
+          <a:p/>
+        </p:txBody>
+      </p:sp>
+      <p:sp>
+        <p:nvSpPr>
+          <p:cNvPr id="23" name="TextBox 22"/>
+          <p:cNvSpPr txBox="1"/>
+          <p:nvPr/>
+        </p:nvSpPr>
+        <p:spPr>
+          <a:xfrm>
+            <a:off x="6217920" y="4572000"/>
+            <a:ext cx="5212080" cy="1737360"/>
+          </a:xfrm>
+          <a:prstGeom prst="rect">
+            <a:avLst/>
+          </a:prstGeom>
+          <a:noFill/>
+        </p:spPr>
+        <p:txBody>
+          <a:bodyPr wrap="square" lIns="0" rIns="0" tIns="0" bIns="0">
+            <a:spAutoFit/>
+          </a:bodyPr>
+          <a:lstStyle/>
+          <a:p>
+            <a:pPr>
+              <a:spcAft>
+                <a:spcPts val="500"/>
+              </a:spcAft>
+            </a:pPr>
+            <a:r>
+              <a:rPr sz="1000" b="0">
+                <a:solidFill>
+                  <a:srgbClr val="5B5F6E"/>
+                </a:solidFill>
+                <a:latin typeface="Calibri"/>
+              </a:rPr>
+              <a:t>A sustained investment schedule is known to beat the best standing price here by 2.6%. Can a multi-week learner find it?</a:t>
+            </a:r>
+          </a:p>
+          <a:p>
+            <a:pPr>
+              <a:spcAft>
+                <a:spcPts val="500"/>
+              </a:spcAft>
+            </a:pPr>
+            <a:r>
+              <a:rPr sz="1000" b="1">
+                <a:solidFill>
+                  <a:srgbClr val="1E2761"/>
+                </a:solidFill>
+                <a:latin typeface="Calibri"/>
+              </a:rPr>
+              <a:t>Finding: </a:t>
+            </a:r>
+            <a:r>
+              <a:rPr sz="1000" b="0">
+                <a:solidFill>
+                  <a:srgbClr val="5B5F6E"/>
+                </a:solidFill>
+                <a:latin typeface="Calibri"/>
+              </a:rPr>
+              <a:t>The right shape, the right depth, half the duration — and a third of the value. Weeks 0–7 it prices at 2.379 against the hand-found schedule's 2.385; weeks 8–15 it has already returned to 2.635 while the schedule holds at 2.385. It spends 75% of the discount and collects 31% of the gain, because a stock compounds while it is fed. This is 7d's missing sacrifice-then-recover trajectory, appearing for the first time — in the environment built to contain it.</a:t>
+            </a:r>
+          </a:p>
+          <a:p>
+            <a:pPr>
+              <a:spcAft>
+                <a:spcPts val="500"/>
+              </a:spcAft>
+            </a:pPr>
+            <a:r>
+              <a:rPr sz="1000" b="1">
+                <a:solidFill>
+                  <a:srgbClr val="1E2761"/>
+                </a:solidFill>
+                <a:latin typeface="Calibri"/>
+              </a:rPr>
+              <a:t>Caveat: </a:t>
+            </a:r>
+            <a:r>
+              <a:rPr sz="1000" b="0">
+                <a:solidFill>
+                  <a:srgbClr val="5B5F6E"/>
+                </a:solidFill>
+                <a:latin typeface="Calibri"/>
+              </a:rPr>
+              <a:t>Gate 3b does not pass: +2.2% is equivalent, not material. And the interval [-0.4%, +4.8%] crosses zero, so the sign of the advantage is not established — 300 seeds would settle it in a minute, but the registered escalation fires only on an interval straddling the materiality boundary, which this one does not. The limitation is reported rather than repaired. Phase 7e's answer: complexity became valuable (gate 2) without becoming learnable — the structure that makes a sophisticated policy worth having is not the structure that makes it findable.</a:t>
             </a:r>
           </a:p>
         </p:txBody>

--- a/project_tracking.pptx
+++ b/project_tracking.pptx
@@ -18,6 +18,7 @@
     <p:sldId id="266" r:id="rId17"/>
     <p:sldId id="267" r:id="rId18"/>
     <p:sldId id="268" r:id="rId19"/>
+    <p:sldId id="269" r:id="rId20"/>
   </p:sldIdLst>
   <p:sldSz cx="12191969" cy="6858000" type="screen4x3"/>
   <p:notesSz cx="6858000" cy="9144000"/>
@@ -10824,6 +10825,1575 @@
                 <a:latin typeface="Calibri"/>
               </a:rPr>
               <a:t>Gate 3b does not pass: +2.2% is equivalent, not material. And the interval [-0.4%, +4.8%] crosses zero, so the sign of the advantage is not established — 300 seeds would settle it in a minute, but the registered escalation fires only on an interval straddling the materiality boundary, which this one does not. The limitation is reported rather than repaired. Phase 7e's answer: complexity became valuable (gate 2) without becoming learnable — the structure that makes a sophisticated policy worth having is not the structure that makes it findable.</a:t>
+            </a:r>
+          </a:p>
+        </p:txBody>
+      </p:sp>
+      <p:sp>
+        <p:nvSpPr>
+          <p:cNvPr id="24" name="TextBox 23"/>
+          <p:cNvSpPr txBox="1"/>
+          <p:nvPr/>
+        </p:nvSpPr>
+        <p:spPr>
+          <a:xfrm>
+            <a:off x="457200" y="6446520"/>
+            <a:ext cx="11247120" cy="274320"/>
+          </a:xfrm>
+          <a:prstGeom prst="rect">
+            <a:avLst/>
+          </a:prstGeom>
+          <a:noFill/>
+        </p:spPr>
+        <p:txBody>
+          <a:bodyPr wrap="square" lIns="0" rIns="0" tIns="0" bIns="0">
+            <a:spAutoFit/>
+          </a:bodyPr>
+          <a:lstStyle/>
+          <a:p>
+            <a:pPr>
+              <a:spcAft>
+                <a:spcPts val="200"/>
+              </a:spcAft>
+            </a:pPr>
+            <a:r>
+              <a:rPr sz="950" b="0">
+                <a:solidFill>
+                  <a:srgbClr val="5B5F6E"/>
+                </a:solidFill>
+                <a:latin typeface="Calibri"/>
+              </a:rPr>
+              <a:t>Generated automatically at phase completion  ·  Phase Completion Deliverable  ·  market-sim project</a:t>
+            </a:r>
+          </a:p>
+        </p:txBody>
+      </p:sp>
+    </p:spTree>
+  </p:cSld>
+  <p:clrMapOvr>
+    <a:masterClrMapping/>
+  </p:clrMapOvr>
+</p:sld>
+</file>
+
+<file path=ppt/slides/slide14.xml><?xml version="1.0" encoding="utf-8"?>
+<p:sld xmlns:a="http://schemas.openxmlformats.org/drawingml/2006/main" xmlns:p="http://schemas.openxmlformats.org/presentationml/2006/main" xmlns:r="http://schemas.openxmlformats.org/officeDocument/2006/relationships">
+  <p:cSld>
+    <p:spTree>
+      <p:nvGrpSpPr>
+        <p:cNvPr id="1" name=""/>
+        <p:cNvGrpSpPr/>
+        <p:nvPr/>
+      </p:nvGrpSpPr>
+      <p:grpSpPr/>
+      <p:sp>
+        <p:nvSpPr>
+          <p:cNvPr id="2" name="TextBox 1"/>
+          <p:cNvSpPr txBox="1"/>
+          <p:nvPr/>
+        </p:nvSpPr>
+        <p:spPr>
+          <a:xfrm>
+            <a:off x="457200" y="320040"/>
+            <a:ext cx="8229600" cy="548640"/>
+          </a:xfrm>
+          <a:prstGeom prst="rect">
+            <a:avLst/>
+          </a:prstGeom>
+          <a:noFill/>
+        </p:spPr>
+        <p:txBody>
+          <a:bodyPr wrap="square" lIns="0" rIns="0" tIns="0" bIns="0">
+            <a:spAutoFit/>
+          </a:bodyPr>
+          <a:lstStyle/>
+          <a:p>
+            <a:pPr>
+              <a:spcAft>
+                <a:spcPts val="200"/>
+              </a:spcAft>
+            </a:pPr>
+            <a:r>
+              <a:rPr sz="3200" b="1">
+                <a:solidFill>
+                  <a:srgbClr val="1E2761"/>
+                </a:solidFill>
+                <a:latin typeface="Cambria"/>
+              </a:rPr>
+              <a:t>Phase 8 — Endogenous Market Structure</a:t>
+            </a:r>
+          </a:p>
+        </p:txBody>
+      </p:sp>
+      <p:sp>
+        <p:nvSpPr>
+          <p:cNvPr id="3" name="TextBox 2"/>
+          <p:cNvSpPr txBox="1"/>
+          <p:nvPr/>
+        </p:nvSpPr>
+        <p:spPr>
+          <a:xfrm>
+            <a:off x="457200" y="868680"/>
+            <a:ext cx="8229600" cy="274320"/>
+          </a:xfrm>
+          <a:prstGeom prst="rect">
+            <a:avLst/>
+          </a:prstGeom>
+          <a:noFill/>
+        </p:spPr>
+        <p:txBody>
+          <a:bodyPr wrap="square" lIns="0" rIns="0" tIns="0" bIns="0">
+            <a:spAutoFit/>
+          </a:bodyPr>
+          <a:lstStyle/>
+          <a:p>
+            <a:pPr>
+              <a:spcAft>
+                <a:spcPts val="200"/>
+              </a:spcAft>
+            </a:pPr>
+            <a:r>
+              <a:rPr sz="1200" b="0">
+                <a:solidFill>
+                  <a:srgbClr val="5B5F6E"/>
+                </a:solidFill>
+                <a:latin typeface="Calibri"/>
+              </a:rPr>
+              <a:t>Entry and exit switched on, nothing else changed  ·  git tag: phase8-validated  ·  300 seeds x 110 weeks</a:t>
+            </a:r>
+          </a:p>
+        </p:txBody>
+      </p:sp>
+      <p:sp>
+        <p:nvSpPr>
+          <p:cNvPr id="4" name="Rounded Rectangle 3"/>
+          <p:cNvSpPr/>
+          <p:nvPr/>
+        </p:nvSpPr>
+        <p:spPr>
+          <a:xfrm>
+            <a:off x="9464040" y="365760"/>
+            <a:ext cx="2240280" cy="384048"/>
+          </a:xfrm>
+          <a:prstGeom prst="roundRect">
+            <a:avLst/>
+          </a:prstGeom>
+          <a:solidFill>
+            <a:srgbClr val="1E7A4D"/>
+          </a:solidFill>
+          <a:ln>
+            <a:noFill/>
+          </a:ln>
+        </p:spPr>
+        <p:style>
+          <a:lnRef idx="1">
+            <a:schemeClr val="accent1"/>
+          </a:lnRef>
+          <a:fillRef idx="3">
+            <a:schemeClr val="accent1"/>
+          </a:fillRef>
+          <a:effectRef idx="2">
+            <a:schemeClr val="accent1"/>
+          </a:effectRef>
+          <a:fontRef idx="minor">
+            <a:schemeClr val="lt1"/>
+          </a:fontRef>
+        </p:style>
+        <p:txBody>
+          <a:bodyPr rtlCol="0" anchor="ctr"/>
+          <a:lstStyle/>
+          <a:p>
+            <a:pPr algn="ctr"/>
+            <a:r>
+              <a:rPr sz="1050" b="1">
+                <a:solidFill>
+                  <a:srgbClr val="FFFFFF"/>
+                </a:solidFill>
+                <a:latin typeface="Calibri"/>
+              </a:rPr>
+              <a:t>EMERGENT</a:t>
+            </a:r>
+          </a:p>
+        </p:txBody>
+      </p:sp>
+      <p:sp>
+        <p:nvSpPr>
+          <p:cNvPr id="5" name="Rectangle 4"/>
+          <p:cNvSpPr/>
+          <p:nvPr/>
+        </p:nvSpPr>
+        <p:spPr>
+          <a:xfrm>
+            <a:off x="457200" y="1417320"/>
+            <a:ext cx="292608" cy="292608"/>
+          </a:xfrm>
+          <a:prstGeom prst="rect">
+            <a:avLst/>
+          </a:prstGeom>
+          <a:solidFill>
+            <a:srgbClr val="1E2761"/>
+          </a:solidFill>
+          <a:ln>
+            <a:noFill/>
+          </a:ln>
+        </p:spPr>
+        <p:style>
+          <a:lnRef idx="1">
+            <a:schemeClr val="accent1"/>
+          </a:lnRef>
+          <a:fillRef idx="3">
+            <a:schemeClr val="accent1"/>
+          </a:fillRef>
+          <a:effectRef idx="2">
+            <a:schemeClr val="accent1"/>
+          </a:effectRef>
+          <a:fontRef idx="minor">
+            <a:schemeClr val="lt1"/>
+          </a:fontRef>
+        </p:style>
+        <p:txBody>
+          <a:bodyPr rtlCol="0" anchor="ctr"/>
+          <a:lstStyle/>
+          <a:p/>
+        </p:txBody>
+      </p:sp>
+      <p:sp>
+        <p:nvSpPr>
+          <p:cNvPr id="6" name="TextBox 5"/>
+          <p:cNvSpPr txBox="1"/>
+          <p:nvPr/>
+        </p:nvSpPr>
+        <p:spPr>
+          <a:xfrm>
+            <a:off x="868680" y="1389888"/>
+            <a:ext cx="4617720" cy="347472"/>
+          </a:xfrm>
+          <a:prstGeom prst="rect">
+            <a:avLst/>
+          </a:prstGeom>
+          <a:noFill/>
+        </p:spPr>
+        <p:txBody>
+          <a:bodyPr wrap="square" lIns="0" rIns="0" tIns="0" bIns="0">
+            <a:spAutoFit/>
+          </a:bodyPr>
+          <a:lstStyle/>
+          <a:p>
+            <a:pPr>
+              <a:spcAft>
+                <a:spcPts val="200"/>
+              </a:spcAft>
+            </a:pPr>
+            <a:r>
+              <a:rPr sz="1500" b="1">
+                <a:solidFill>
+                  <a:srgbClr val="1E2761"/>
+                </a:solidFill>
+                <a:latin typeface="Calibri"/>
+              </a:rPr>
+              <a:t>AGENTS</a:t>
+            </a:r>
+          </a:p>
+        </p:txBody>
+      </p:sp>
+      <p:sp>
+        <p:nvSpPr>
+          <p:cNvPr id="7" name="TextBox 6"/>
+          <p:cNvSpPr txBox="1"/>
+          <p:nvPr/>
+        </p:nvSpPr>
+        <p:spPr>
+          <a:xfrm>
+            <a:off x="868680" y="1828800"/>
+            <a:ext cx="4617720" cy="566928"/>
+          </a:xfrm>
+          <a:prstGeom prst="rect">
+            <a:avLst/>
+          </a:prstGeom>
+          <a:noFill/>
+        </p:spPr>
+        <p:txBody>
+          <a:bodyPr wrap="square" lIns="0" rIns="0" tIns="0" bIns="0">
+            <a:spAutoFit/>
+          </a:bodyPr>
+          <a:lstStyle/>
+          <a:p>
+            <a:pPr>
+              <a:spcAft>
+                <a:spcPts val="200"/>
+              </a:spcAft>
+            </a:pPr>
+            <a:r>
+              <a:rPr sz="1300" b="1">
+                <a:solidFill>
+                  <a:srgbClr val="1E2761"/>
+                </a:solidFill>
+                <a:latin typeface="Calibri"/>
+              </a:rPr>
+              <a:t>Buyers: </a:t>
+            </a:r>
+            <a:r>
+              <a:rPr sz="1300" b="0">
+                <a:solidFill>
+                  <a:srgbClr val="5B5F6E"/>
+                </a:solidFill>
+                <a:latin typeface="Calibri"/>
+              </a:rPr>
+              <a:t>100 — Poor 70 / Middle 20 / Rich 10, dispersed budgets</a:t>
+            </a:r>
+          </a:p>
+          <a:p>
+            <a:pPr>
+              <a:spcAft>
+                <a:spcPts val="200"/>
+              </a:spcAft>
+            </a:pPr>
+            <a:r>
+              <a:rPr sz="1300" b="1">
+                <a:solidFill>
+                  <a:srgbClr val="1E2761"/>
+                </a:solidFill>
+                <a:latin typeface="Calibri"/>
+              </a:rPr>
+              <a:t>Sellers: </a:t>
+            </a:r>
+            <a:r>
+              <a:rPr sz="1300" b="0">
+                <a:solidFill>
+                  <a:srgbClr val="5B5F6E"/>
+                </a:solidFill>
+                <a:latin typeface="Calibri"/>
+              </a:rPr>
+              <a:t>5 at week 0 — 3 Slow, 2 Shigh — then whoever survives</a:t>
+            </a:r>
+          </a:p>
+        </p:txBody>
+      </p:sp>
+      <p:sp>
+        <p:nvSpPr>
+          <p:cNvPr id="8" name="Rectangle 7"/>
+          <p:cNvSpPr/>
+          <p:nvPr/>
+        </p:nvSpPr>
+        <p:spPr>
+          <a:xfrm>
+            <a:off x="457200" y="2651760"/>
+            <a:ext cx="292608" cy="292608"/>
+          </a:xfrm>
+          <a:prstGeom prst="rect">
+            <a:avLst/>
+          </a:prstGeom>
+          <a:solidFill>
+            <a:srgbClr val="1E2761"/>
+          </a:solidFill>
+          <a:ln>
+            <a:noFill/>
+          </a:ln>
+        </p:spPr>
+        <p:style>
+          <a:lnRef idx="1">
+            <a:schemeClr val="accent1"/>
+          </a:lnRef>
+          <a:fillRef idx="3">
+            <a:schemeClr val="accent1"/>
+          </a:fillRef>
+          <a:effectRef idx="2">
+            <a:schemeClr val="accent1"/>
+          </a:effectRef>
+          <a:fontRef idx="minor">
+            <a:schemeClr val="lt1"/>
+          </a:fontRef>
+        </p:style>
+        <p:txBody>
+          <a:bodyPr rtlCol="0" anchor="ctr"/>
+          <a:lstStyle/>
+          <a:p/>
+        </p:txBody>
+      </p:sp>
+      <p:sp>
+        <p:nvSpPr>
+          <p:cNvPr id="9" name="TextBox 8"/>
+          <p:cNvSpPr txBox="1"/>
+          <p:nvPr/>
+        </p:nvSpPr>
+        <p:spPr>
+          <a:xfrm>
+            <a:off x="868680" y="2624328"/>
+            <a:ext cx="4617720" cy="347472"/>
+          </a:xfrm>
+          <a:prstGeom prst="rect">
+            <a:avLst/>
+          </a:prstGeom>
+          <a:noFill/>
+        </p:spPr>
+        <p:txBody>
+          <a:bodyPr wrap="square" lIns="0" rIns="0" tIns="0" bIns="0">
+            <a:spAutoFit/>
+          </a:bodyPr>
+          <a:lstStyle/>
+          <a:p>
+            <a:pPr>
+              <a:spcAft>
+                <a:spcPts val="200"/>
+              </a:spcAft>
+            </a:pPr>
+            <a:r>
+              <a:rPr sz="1500" b="1">
+                <a:solidFill>
+                  <a:srgbClr val="1E2761"/>
+                </a:solidFill>
+                <a:latin typeface="Calibri"/>
+              </a:rPr>
+              <a:t>ENVIRONMENT &amp; CONTEXT</a:t>
+            </a:r>
+          </a:p>
+        </p:txBody>
+      </p:sp>
+      <p:sp>
+        <p:nvSpPr>
+          <p:cNvPr id="10" name="TextBox 9"/>
+          <p:cNvSpPr txBox="1"/>
+          <p:nvPr/>
+        </p:nvSpPr>
+        <p:spPr>
+          <a:xfrm>
+            <a:off x="868680" y="3063240"/>
+            <a:ext cx="4617720" cy="548640"/>
+          </a:xfrm>
+          <a:prstGeom prst="rect">
+            <a:avLst/>
+          </a:prstGeom>
+          <a:noFill/>
+        </p:spPr>
+        <p:txBody>
+          <a:bodyPr wrap="square" lIns="0" rIns="0" tIns="0" bIns="0">
+            <a:spAutoFit/>
+          </a:bodyPr>
+          <a:lstStyle/>
+          <a:p>
+            <a:pPr>
+              <a:spcAft>
+                <a:spcPts val="200"/>
+              </a:spcAft>
+            </a:pPr>
+            <a:r>
+              <a:rPr sz="1300" b="0">
+                <a:solidFill>
+                  <a:srgbClr val="5B5F6E"/>
+                </a:solidFill>
+                <a:latin typeface="Calibri"/>
+              </a:rPr>
+              <a:t>-  40 fixed slots, drawn at slot width whatever the occupancy, so</a:t>
+            </a:r>
+          </a:p>
+          <a:p>
+            <a:pPr>
+              <a:spcAft>
+                <a:spcPts val="200"/>
+              </a:spcAft>
+            </a:pPr>
+            <a:r>
+              <a:rPr sz="1300" b="0">
+                <a:solidFill>
+                  <a:srgbClr val="5B5F6E"/>
+                </a:solidFill>
+                <a:latin typeface="Calibri"/>
+              </a:rPr>
+              <a:t>   arms with different entry histories stay paired on a seed.</a:t>
+            </a:r>
+          </a:p>
+          <a:p>
+            <a:pPr>
+              <a:spcAft>
+                <a:spcPts val="200"/>
+              </a:spcAft>
+            </a:pPr>
+            <a:r>
+              <a:rPr sz="1300" b="0">
+                <a:solidFill>
+                  <a:srgbClr val="5B5F6E"/>
+                </a:solidFill>
+                <a:latin typeface="Calibri"/>
+              </a:rPr>
+              <a:t>-  price_reference frozen at the week-0 configuration for all 110 weeks.</a:t>
+            </a:r>
+          </a:p>
+        </p:txBody>
+      </p:sp>
+      <p:sp>
+        <p:nvSpPr>
+          <p:cNvPr id="11" name="Rectangle 10"/>
+          <p:cNvSpPr/>
+          <p:nvPr/>
+        </p:nvSpPr>
+        <p:spPr>
+          <a:xfrm>
+            <a:off x="457200" y="3886200"/>
+            <a:ext cx="292608" cy="292608"/>
+          </a:xfrm>
+          <a:prstGeom prst="rect">
+            <a:avLst/>
+          </a:prstGeom>
+          <a:solidFill>
+            <a:srgbClr val="1E2761"/>
+          </a:solidFill>
+          <a:ln>
+            <a:noFill/>
+          </a:ln>
+        </p:spPr>
+        <p:style>
+          <a:lnRef idx="1">
+            <a:schemeClr val="accent1"/>
+          </a:lnRef>
+          <a:fillRef idx="3">
+            <a:schemeClr val="accent1"/>
+          </a:fillRef>
+          <a:effectRef idx="2">
+            <a:schemeClr val="accent1"/>
+          </a:effectRef>
+          <a:fontRef idx="minor">
+            <a:schemeClr val="lt1"/>
+          </a:fontRef>
+        </p:style>
+        <p:txBody>
+          <a:bodyPr rtlCol="0" anchor="ctr"/>
+          <a:lstStyle/>
+          <a:p/>
+        </p:txBody>
+      </p:sp>
+      <p:sp>
+        <p:nvSpPr>
+          <p:cNvPr id="12" name="TextBox 11"/>
+          <p:cNvSpPr txBox="1"/>
+          <p:nvPr/>
+        </p:nvSpPr>
+        <p:spPr>
+          <a:xfrm>
+            <a:off x="868680" y="3858768"/>
+            <a:ext cx="4617720" cy="347472"/>
+          </a:xfrm>
+          <a:prstGeom prst="rect">
+            <a:avLst/>
+          </a:prstGeom>
+          <a:noFill/>
+        </p:spPr>
+        <p:txBody>
+          <a:bodyPr wrap="square" lIns="0" rIns="0" tIns="0" bIns="0">
+            <a:spAutoFit/>
+          </a:bodyPr>
+          <a:lstStyle/>
+          <a:p>
+            <a:pPr>
+              <a:spcAft>
+                <a:spcPts val="200"/>
+              </a:spcAft>
+            </a:pPr>
+            <a:r>
+              <a:rPr sz="1500" b="1">
+                <a:solidFill>
+                  <a:srgbClr val="1E2761"/>
+                </a:solidFill>
+                <a:latin typeface="Calibri"/>
+              </a:rPr>
+              <a:t>METHOD</a:t>
+            </a:r>
+          </a:p>
+        </p:txBody>
+      </p:sp>
+      <p:sp>
+        <p:nvSpPr>
+          <p:cNvPr id="13" name="TextBox 12"/>
+          <p:cNvSpPr txBox="1"/>
+          <p:nvPr/>
+        </p:nvSpPr>
+        <p:spPr>
+          <a:xfrm>
+            <a:off x="868680" y="4297680"/>
+            <a:ext cx="4617720" cy="594360"/>
+          </a:xfrm>
+          <a:prstGeom prst="rect">
+            <a:avLst/>
+          </a:prstGeom>
+          <a:noFill/>
+        </p:spPr>
+        <p:txBody>
+          <a:bodyPr wrap="square" lIns="0" rIns="0" tIns="0" bIns="0">
+            <a:spAutoFit/>
+          </a:bodyPr>
+          <a:lstStyle/>
+          <a:p>
+            <a:pPr>
+              <a:spcAft>
+                <a:spcPts val="200"/>
+              </a:spcAft>
+            </a:pPr>
+            <a:r>
+              <a:rPr sz="1300" b="0">
+                <a:solidFill>
+                  <a:srgbClr val="5B5F6E"/>
+                </a:solidFill>
+                <a:latin typeface="Calibri"/>
+              </a:rPr>
+              <a:t>Entry: copy a stall that is making money, after two weeks of mean</a:t>
+            </a:r>
+          </a:p>
+          <a:p>
+            <a:pPr>
+              <a:spcAft>
+                <a:spcPts val="200"/>
+              </a:spcAft>
+            </a:pPr>
+            <a:r>
+              <a:rPr sz="1300" b="0">
+                <a:solidFill>
+                  <a:srgbClr val="5B5F6E"/>
+                </a:solidFill>
+                <a:latin typeface="Calibri"/>
+              </a:rPr>
+              <a:t>profit above zero. Exit: capital exhausted, or three losing weeks —</a:t>
+            </a:r>
+          </a:p>
+          <a:p>
+            <a:pPr>
+              <a:spcAft>
+                <a:spcPts val="200"/>
+              </a:spcAft>
+            </a:pPr>
+            <a:r>
+              <a:rPr sz="1300" b="0">
+                <a:solidFill>
+                  <a:srgbClr val="5B5F6E"/>
+                </a:solidFill>
+                <a:latin typeface="Calibri"/>
+              </a:rPr>
+              <a:t>both run. Fixed weekly cost swept over 6 / 8 / 10 / 12.</a:t>
+            </a:r>
+          </a:p>
+        </p:txBody>
+      </p:sp>
+      <p:sp>
+        <p:nvSpPr>
+          <p:cNvPr id="14" name="Rectangle 13"/>
+          <p:cNvSpPr/>
+          <p:nvPr/>
+        </p:nvSpPr>
+        <p:spPr>
+          <a:xfrm>
+            <a:off x="457200" y="5029200"/>
+            <a:ext cx="292608" cy="292608"/>
+          </a:xfrm>
+          <a:prstGeom prst="rect">
+            <a:avLst/>
+          </a:prstGeom>
+          <a:solidFill>
+            <a:srgbClr val="1E2761"/>
+          </a:solidFill>
+          <a:ln>
+            <a:noFill/>
+          </a:ln>
+        </p:spPr>
+        <p:style>
+          <a:lnRef idx="1">
+            <a:schemeClr val="accent1"/>
+          </a:lnRef>
+          <a:fillRef idx="3">
+            <a:schemeClr val="accent1"/>
+          </a:fillRef>
+          <a:effectRef idx="2">
+            <a:schemeClr val="accent1"/>
+          </a:effectRef>
+          <a:fontRef idx="minor">
+            <a:schemeClr val="lt1"/>
+          </a:fontRef>
+        </p:style>
+        <p:txBody>
+          <a:bodyPr rtlCol="0" anchor="ctr"/>
+          <a:lstStyle/>
+          <a:p/>
+        </p:txBody>
+      </p:sp>
+      <p:sp>
+        <p:nvSpPr>
+          <p:cNvPr id="15" name="TextBox 14"/>
+          <p:cNvSpPr txBox="1"/>
+          <p:nvPr/>
+        </p:nvSpPr>
+        <p:spPr>
+          <a:xfrm>
+            <a:off x="868680" y="5001768"/>
+            <a:ext cx="4617720" cy="347472"/>
+          </a:xfrm>
+          <a:prstGeom prst="rect">
+            <a:avLst/>
+          </a:prstGeom>
+          <a:noFill/>
+        </p:spPr>
+        <p:txBody>
+          <a:bodyPr wrap="square" lIns="0" rIns="0" tIns="0" bIns="0">
+            <a:spAutoFit/>
+          </a:bodyPr>
+          <a:lstStyle/>
+          <a:p>
+            <a:pPr>
+              <a:spcAft>
+                <a:spcPts val="200"/>
+              </a:spcAft>
+            </a:pPr>
+            <a:r>
+              <a:rPr sz="1500" b="1">
+                <a:solidFill>
+                  <a:srgbClr val="1E2761"/>
+                </a:solidFill>
+                <a:latin typeface="Calibri"/>
+              </a:rPr>
+              <a:t>LITERATURE BASIS</a:t>
+            </a:r>
+          </a:p>
+        </p:txBody>
+      </p:sp>
+      <p:sp>
+        <p:nvSpPr>
+          <p:cNvPr id="16" name="TextBox 15"/>
+          <p:cNvSpPr txBox="1"/>
+          <p:nvPr/>
+        </p:nvSpPr>
+        <p:spPr>
+          <a:xfrm>
+            <a:off x="868680" y="5440680"/>
+            <a:ext cx="4617720" cy="1005840"/>
+          </a:xfrm>
+          <a:prstGeom prst="rect">
+            <a:avLst/>
+          </a:prstGeom>
+          <a:noFill/>
+        </p:spPr>
+        <p:txBody>
+          <a:bodyPr wrap="square" lIns="0" rIns="0" tIns="0" bIns="0">
+            <a:spAutoFit/>
+          </a:bodyPr>
+          <a:lstStyle/>
+          <a:p>
+            <a:pPr>
+              <a:spcAft>
+                <a:spcPts val="600"/>
+              </a:spcAft>
+            </a:pPr>
+            <a:r>
+              <a:rPr sz="1100" b="1">
+                <a:solidFill>
+                  <a:srgbClr val="1E2761"/>
+                </a:solidFill>
+                <a:latin typeface="Calibri"/>
+              </a:rPr>
+              <a:t>Schelling (1971), </a:t>
+            </a:r>
+            <a:r>
+              <a:rPr sz="1100" b="0">
+                <a:solidFill>
+                  <a:srgbClr val="5B5F6E"/>
+                </a:solidFill>
+                <a:latin typeface="Calibri"/>
+              </a:rPr>
+              <a:t>“Dynamic Models of Segregation” (J. Math. Sociology) — origin of the encoded-vs-emergent question this phase tests.</a:t>
+            </a:r>
+          </a:p>
+        </p:txBody>
+      </p:sp>
+      <p:sp>
+        <p:nvSpPr>
+          <p:cNvPr id="17" name="Rectangle 16"/>
+          <p:cNvSpPr/>
+          <p:nvPr/>
+        </p:nvSpPr>
+        <p:spPr>
+          <a:xfrm>
+            <a:off x="5943600" y="1417320"/>
+            <a:ext cx="292608" cy="292608"/>
+          </a:xfrm>
+          <a:prstGeom prst="rect">
+            <a:avLst/>
+          </a:prstGeom>
+          <a:solidFill>
+            <a:srgbClr val="1E2761"/>
+          </a:solidFill>
+          <a:ln>
+            <a:noFill/>
+          </a:ln>
+        </p:spPr>
+        <p:style>
+          <a:lnRef idx="1">
+            <a:schemeClr val="accent1"/>
+          </a:lnRef>
+          <a:fillRef idx="3">
+            <a:schemeClr val="accent1"/>
+          </a:fillRef>
+          <a:effectRef idx="2">
+            <a:schemeClr val="accent1"/>
+          </a:effectRef>
+          <a:fontRef idx="minor">
+            <a:schemeClr val="lt1"/>
+          </a:fontRef>
+        </p:style>
+        <p:txBody>
+          <a:bodyPr rtlCol="0" anchor="ctr"/>
+          <a:lstStyle/>
+          <a:p/>
+        </p:txBody>
+      </p:sp>
+      <p:sp>
+        <p:nvSpPr>
+          <p:cNvPr id="18" name="TextBox 17"/>
+          <p:cNvSpPr txBox="1"/>
+          <p:nvPr/>
+        </p:nvSpPr>
+        <p:spPr>
+          <a:xfrm>
+            <a:off x="6355080" y="1389888"/>
+            <a:ext cx="5349240" cy="347472"/>
+          </a:xfrm>
+          <a:prstGeom prst="rect">
+            <a:avLst/>
+          </a:prstGeom>
+          <a:noFill/>
+        </p:spPr>
+        <p:txBody>
+          <a:bodyPr wrap="square" lIns="0" rIns="0" tIns="0" bIns="0">
+            <a:spAutoFit/>
+          </a:bodyPr>
+          <a:lstStyle/>
+          <a:p>
+            <a:pPr>
+              <a:spcAft>
+                <a:spcPts val="200"/>
+              </a:spcAft>
+            </a:pPr>
+            <a:r>
+              <a:rPr sz="1500" b="1">
+                <a:solidFill>
+                  <a:srgbClr val="1E2761"/>
+                </a:solidFill>
+                <a:latin typeface="Calibri"/>
+              </a:rPr>
+              <a:t>KEY RESULTS</a:t>
+            </a:r>
+          </a:p>
+        </p:txBody>
+      </p:sp>
+      <p:graphicFrame>
+        <p:nvGraphicFramePr>
+          <p:cNvPr id="19" name="Table 18"/>
+          <p:cNvGraphicFramePr>
+            <a:graphicFrameLocks noGrp="1"/>
+          </p:cNvGraphicFramePr>
+          <p:nvPr/>
+        </p:nvGraphicFramePr>
+        <p:xfrm>
+          <a:off x="5943600" y="1874519"/>
+          <a:ext cx="5760720" cy="1920240"/>
+        </p:xfrm>
+        <a:graphic>
+          <a:graphicData uri="http://schemas.openxmlformats.org/drawingml/2006/table">
+            <a:tbl>
+              <a:tblPr firstRow="1" bandRow="1">
+                <a:tableStyleId>{5C22544A-7EE6-4342-B048-85BDC9FD1C3A}</a:tableStyleId>
+              </a:tblPr>
+              <a:tblGrid>
+                <a:gridCol w="3200400"/>
+                <a:gridCol w="1463040"/>
+                <a:gridCol w="1097280"/>
+              </a:tblGrid>
+              <a:tr h="274320">
+                <a:tc>
+                  <a:txBody>
+                    <a:bodyPr/>
+                    <a:lstStyle/>
+                    <a:p>
+                      <a:r>
+                        <a:rPr sz="1100" b="1">
+                          <a:solidFill>
+                            <a:srgbClr val="FFFFFF"/>
+                          </a:solidFill>
+                          <a:latin typeface="Calibri"/>
+                        </a:rPr>
+                        <a:t>Metric</a:t>
+                      </a:r>
+                    </a:p>
+                  </a:txBody>
+                  <a:tcPr>
+                    <a:solidFill>
+                      <a:srgbClr val="1E2761"/>
+                    </a:solidFill>
+                  </a:tcPr>
+                </a:tc>
+                <a:tc>
+                  <a:txBody>
+                    <a:bodyPr/>
+                    <a:lstStyle/>
+                    <a:p>
+                      <a:r>
+                        <a:rPr sz="1100" b="1">
+                          <a:solidFill>
+                            <a:srgbClr val="FFFFFF"/>
+                          </a:solidFill>
+                          <a:latin typeface="Calibri"/>
+                        </a:rPr>
+                        <a:t>Value</a:t>
+                      </a:r>
+                    </a:p>
+                  </a:txBody>
+                  <a:tcPr>
+                    <a:solidFill>
+                      <a:srgbClr val="1E2761"/>
+                    </a:solidFill>
+                  </a:tcPr>
+                </a:tc>
+                <a:tc>
+                  <a:txBody>
+                    <a:bodyPr/>
+                    <a:lstStyle/>
+                    <a:p>
+                      <a:r>
+                        <a:rPr sz="1100" b="1">
+                          <a:solidFill>
+                            <a:srgbClr val="FFFFFF"/>
+                          </a:solidFill>
+                          <a:latin typeface="Calibri"/>
+                        </a:rPr>
+                        <a:t/>
+                      </a:r>
+                    </a:p>
+                  </a:txBody>
+                  <a:tcPr>
+                    <a:solidFill>
+                      <a:srgbClr val="1E2761"/>
+                    </a:solidFill>
+                  </a:tcPr>
+                </a:tc>
+              </a:tr>
+              <a:tr h="274320">
+                <a:tc>
+                  <a:txBody>
+                    <a:bodyPr/>
+                    <a:lstStyle/>
+                    <a:p>
+                      <a:r>
+                        <a:rPr sz="1100">
+                          <a:solidFill>
+                            <a:srgbClr val="1E2761"/>
+                          </a:solidFill>
+                          <a:latin typeface="Calibri"/>
+                        </a:rPr>
+                        <a:t>Premium tier, week 0</a:t>
+                      </a:r>
+                    </a:p>
+                  </a:txBody>
+                  <a:tcPr>
+                    <a:solidFill>
+                      <a:srgbClr val="FFFFFF"/>
+                    </a:solidFill>
+                  </a:tcPr>
+                </a:tc>
+                <a:tc>
+                  <a:txBody>
+                    <a:bodyPr/>
+                    <a:lstStyle/>
+                    <a:p>
+                      <a:r>
+                        <a:rPr sz="1100">
+                          <a:solidFill>
+                            <a:srgbClr val="5B5F6E"/>
+                          </a:solidFill>
+                          <a:latin typeface="Calibri"/>
+                        </a:rPr>
+                        <a:t>40% of stalls</a:t>
+                      </a:r>
+                    </a:p>
+                  </a:txBody>
+                  <a:tcPr>
+                    <a:solidFill>
+                      <a:srgbClr val="FFFFFF"/>
+                    </a:solidFill>
+                  </a:tcPr>
+                </a:tc>
+                <a:tc>
+                  <a:txBody>
+                    <a:bodyPr/>
+                    <a:lstStyle/>
+                    <a:p>
+                      <a:pPr algn="ctr"/>
+                      <a:r>
+                        <a:rPr sz="1100" b="1">
+                          <a:solidFill>
+                            <a:srgbClr val="5B5F6E"/>
+                          </a:solidFill>
+                          <a:latin typeface="Calibri"/>
+                        </a:rPr>
+                        <a:t>—</a:t>
+                      </a:r>
+                    </a:p>
+                  </a:txBody>
+                  <a:tcPr>
+                    <a:solidFill>
+                      <a:srgbClr val="FFFFFF"/>
+                    </a:solidFill>
+                  </a:tcPr>
+                </a:tc>
+              </a:tr>
+              <a:tr h="274320">
+                <a:tc>
+                  <a:txBody>
+                    <a:bodyPr/>
+                    <a:lstStyle/>
+                    <a:p>
+                      <a:r>
+                        <a:rPr sz="1100">
+                          <a:solidFill>
+                            <a:srgbClr val="1E2761"/>
+                          </a:solidFill>
+                          <a:latin typeface="Calibri"/>
+                        </a:rPr>
+                        <a:t>Premium tier, week 110</a:t>
+                      </a:r>
+                    </a:p>
+                  </a:txBody>
+                  <a:tcPr>
+                    <a:solidFill>
+                      <a:srgbClr val="F7F8FC"/>
+                    </a:solidFill>
+                  </a:tcPr>
+                </a:tc>
+                <a:tc>
+                  <a:txBody>
+                    <a:bodyPr/>
+                    <a:lstStyle/>
+                    <a:p>
+                      <a:r>
+                        <a:rPr sz="1100">
+                          <a:solidFill>
+                            <a:srgbClr val="5B5F6E"/>
+                          </a:solidFill>
+                          <a:latin typeface="Calibri"/>
+                        </a:rPr>
+                        <a:t>0%</a:t>
+                      </a:r>
+                    </a:p>
+                  </a:txBody>
+                  <a:tcPr>
+                    <a:solidFill>
+                      <a:srgbClr val="F7F8FC"/>
+                    </a:solidFill>
+                  </a:tcPr>
+                </a:tc>
+                <a:tc>
+                  <a:txBody>
+                    <a:bodyPr/>
+                    <a:lstStyle/>
+                    <a:p>
+                      <a:pPr algn="ctr"/>
+                      <a:r>
+                        <a:rPr sz="1100" b="1">
+                          <a:solidFill>
+                            <a:srgbClr val="5B5F6E"/>
+                          </a:solidFill>
+                          <a:latin typeface="Calibri"/>
+                        </a:rPr>
+                        <a:t>—</a:t>
+                      </a:r>
+                    </a:p>
+                  </a:txBody>
+                  <a:tcPr>
+                    <a:solidFill>
+                      <a:srgbClr val="F7F8FC"/>
+                    </a:solidFill>
+                  </a:tcPr>
+                </a:tc>
+              </a:tr>
+              <a:tr h="274320">
+                <a:tc>
+                  <a:txBody>
+                    <a:bodyPr/>
+                    <a:lstStyle/>
+                    <a:p>
+                      <a:r>
+                        <a:rPr sz="1100">
+                          <a:solidFill>
+                            <a:srgbClr val="1E2761"/>
+                          </a:solidFill>
+                          <a:latin typeface="Calibri"/>
+                        </a:rPr>
+                        <a:t>Sellers at F=6 / F=12</a:t>
+                      </a:r>
+                    </a:p>
+                  </a:txBody>
+                  <a:tcPr>
+                    <a:solidFill>
+                      <a:srgbClr val="FFFFFF"/>
+                    </a:solidFill>
+                  </a:tcPr>
+                </a:tc>
+                <a:tc>
+                  <a:txBody>
+                    <a:bodyPr/>
+                    <a:lstStyle/>
+                    <a:p>
+                      <a:r>
+                        <a:rPr sz="1100">
+                          <a:solidFill>
+                            <a:srgbClr val="5B5F6E"/>
+                          </a:solidFill>
+                          <a:latin typeface="Calibri"/>
+                        </a:rPr>
+                        <a:t>24.9 / 12.4</a:t>
+                      </a:r>
+                    </a:p>
+                  </a:txBody>
+                  <a:tcPr>
+                    <a:solidFill>
+                      <a:srgbClr val="FFFFFF"/>
+                    </a:solidFill>
+                  </a:tcPr>
+                </a:tc>
+                <a:tc>
+                  <a:txBody>
+                    <a:bodyPr/>
+                    <a:lstStyle/>
+                    <a:p>
+                      <a:pPr algn="ctr"/>
+                      <a:r>
+                        <a:rPr sz="1100" b="1">
+                          <a:solidFill>
+                            <a:srgbClr val="1E7A4D"/>
+                          </a:solidFill>
+                          <a:latin typeface="Calibri"/>
+                        </a:rPr>
+                        <a:t>PASS</a:t>
+                      </a:r>
+                    </a:p>
+                  </a:txBody>
+                  <a:tcPr>
+                    <a:solidFill>
+                      <a:srgbClr val="FFFFFF"/>
+                    </a:solidFill>
+                  </a:tcPr>
+                </a:tc>
+              </a:tr>
+              <a:tr h="274320">
+                <a:tc>
+                  <a:txBody>
+                    <a:bodyPr/>
+                    <a:lstStyle/>
+                    <a:p>
+                      <a:r>
+                        <a:rPr sz="1100">
+                          <a:solidFill>
+                            <a:srgbClr val="1E2761"/>
+                          </a:solidFill>
+                          <a:latin typeface="Calibri"/>
+                        </a:rPr>
+                        <a:t>Churn, streak vs capital</a:t>
+                      </a:r>
+                    </a:p>
+                  </a:txBody>
+                  <a:tcPr>
+                    <a:solidFill>
+                      <a:srgbClr val="F7F8FC"/>
+                    </a:solidFill>
+                  </a:tcPr>
+                </a:tc>
+                <a:tc>
+                  <a:txBody>
+                    <a:bodyPr/>
+                    <a:lstStyle/>
+                    <a:p>
+                      <a:r>
+                        <a:rPr sz="1100">
+                          <a:solidFill>
+                            <a:srgbClr val="5B5F6E"/>
+                          </a:solidFill>
+                          <a:latin typeface="Calibri"/>
+                        </a:rPr>
+                        <a:t>2.4x</a:t>
+                      </a:r>
+                    </a:p>
+                  </a:txBody>
+                  <a:tcPr>
+                    <a:solidFill>
+                      <a:srgbClr val="F7F8FC"/>
+                    </a:solidFill>
+                  </a:tcPr>
+                </a:tc>
+                <a:tc>
+                  <a:txBody>
+                    <a:bodyPr/>
+                    <a:lstStyle/>
+                    <a:p>
+                      <a:pPr algn="ctr"/>
+                      <a:r>
+                        <a:rPr sz="1100" b="1">
+                          <a:solidFill>
+                            <a:srgbClr val="5B5F6E"/>
+                          </a:solidFill>
+                          <a:latin typeface="Calibri"/>
+                        </a:rPr>
+                        <a:t>—</a:t>
+                      </a:r>
+                    </a:p>
+                  </a:txBody>
+                  <a:tcPr>
+                    <a:solidFill>
+                      <a:srgbClr val="F7F8FC"/>
+                    </a:solidFill>
+                  </a:tcPr>
+                </a:tc>
+              </a:tr>
+              <a:tr h="274320">
+                <a:tc>
+                  <a:txBody>
+                    <a:bodyPr/>
+                    <a:lstStyle/>
+                    <a:p>
+                      <a:r>
+                        <a:rPr sz="1100">
+                          <a:solidFill>
+                            <a:srgbClr val="1E2761"/>
+                          </a:solidFill>
+                          <a:latin typeface="Calibri"/>
+                        </a:rPr>
+                        <a:t>Volatility vs RI DEM</a:t>
+                      </a:r>
+                    </a:p>
+                  </a:txBody>
+                  <a:tcPr>
+                    <a:solidFill>
+                      <a:srgbClr val="FFFFFF"/>
+                    </a:solidFill>
+                  </a:tcPr>
+                </a:tc>
+                <a:tc>
+                  <a:txBody>
+                    <a:bodyPr/>
+                    <a:lstStyle/>
+                    <a:p>
+                      <a:r>
+                        <a:rPr sz="1100">
+                          <a:solidFill>
+                            <a:srgbClr val="5B5F6E"/>
+                          </a:solidFill>
+                          <a:latin typeface="Calibri"/>
+                        </a:rPr>
+                        <a:t>12.7% vs 15.2%</a:t>
+                      </a:r>
+                    </a:p>
+                  </a:txBody>
+                  <a:tcPr>
+                    <a:solidFill>
+                      <a:srgbClr val="FFFFFF"/>
+                    </a:solidFill>
+                  </a:tcPr>
+                </a:tc>
+                <a:tc>
+                  <a:txBody>
+                    <a:bodyPr/>
+                    <a:lstStyle/>
+                    <a:p>
+                      <a:pPr algn="ctr"/>
+                      <a:r>
+                        <a:rPr sz="1100" b="1">
+                          <a:solidFill>
+                            <a:srgbClr val="5B5F6E"/>
+                          </a:solidFill>
+                          <a:latin typeface="Calibri"/>
+                        </a:rPr>
+                        <a:t>—</a:t>
+                      </a:r>
+                    </a:p>
+                  </a:txBody>
+                  <a:tcPr>
+                    <a:solidFill>
+                      <a:srgbClr val="FFFFFF"/>
+                    </a:solidFill>
+                  </a:tcPr>
+                </a:tc>
+              </a:tr>
+              <a:tr h="274320">
+                <a:tc>
+                  <a:txBody>
+                    <a:bodyPr/>
+                    <a:lstStyle/>
+                    <a:p>
+                      <a:r>
+                        <a:rPr sz="1100">
+                          <a:solidFill>
+                            <a:srgbClr val="1E2761"/>
+                          </a:solidFill>
+                          <a:latin typeface="Calibri"/>
+                        </a:rPr>
+                        <a:t>Peak sellers vs capacity</a:t>
+                      </a:r>
+                    </a:p>
+                  </a:txBody>
+                  <a:tcPr>
+                    <a:solidFill>
+                      <a:srgbClr val="F7F8FC"/>
+                    </a:solidFill>
+                  </a:tcPr>
+                </a:tc>
+                <a:tc>
+                  <a:txBody>
+                    <a:bodyPr/>
+                    <a:lstStyle/>
+                    <a:p>
+                      <a:r>
+                        <a:rPr sz="1100">
+                          <a:solidFill>
+                            <a:srgbClr val="5B5F6E"/>
+                          </a:solidFill>
+                          <a:latin typeface="Calibri"/>
+                        </a:rPr>
+                        <a:t>28 of 40</a:t>
+                      </a:r>
+                    </a:p>
+                  </a:txBody>
+                  <a:tcPr>
+                    <a:solidFill>
+                      <a:srgbClr val="F7F8FC"/>
+                    </a:solidFill>
+                  </a:tcPr>
+                </a:tc>
+                <a:tc>
+                  <a:txBody>
+                    <a:bodyPr/>
+                    <a:lstStyle/>
+                    <a:p>
+                      <a:pPr algn="ctr"/>
+                      <a:r>
+                        <a:rPr sz="1100" b="1">
+                          <a:solidFill>
+                            <a:srgbClr val="1E7A4D"/>
+                          </a:solidFill>
+                          <a:latin typeface="Calibri"/>
+                        </a:rPr>
+                        <a:t>PASS</a:t>
+                      </a:r>
+                    </a:p>
+                  </a:txBody>
+                  <a:tcPr>
+                    <a:solidFill>
+                      <a:srgbClr val="F7F8FC"/>
+                    </a:solidFill>
+                  </a:tcPr>
+                </a:tc>
+              </a:tr>
+            </a:tbl>
+          </a:graphicData>
+        </a:graphic>
+      </p:graphicFrame>
+      <p:sp>
+        <p:nvSpPr>
+          <p:cNvPr id="20" name="Rectangle 19"/>
+          <p:cNvSpPr/>
+          <p:nvPr/>
+        </p:nvSpPr>
+        <p:spPr>
+          <a:xfrm>
+            <a:off x="5943600" y="4023360"/>
+            <a:ext cx="292608" cy="292608"/>
+          </a:xfrm>
+          <a:prstGeom prst="rect">
+            <a:avLst/>
+          </a:prstGeom>
+          <a:solidFill>
+            <a:srgbClr val="1E2761"/>
+          </a:solidFill>
+          <a:ln>
+            <a:noFill/>
+          </a:ln>
+        </p:spPr>
+        <p:style>
+          <a:lnRef idx="1">
+            <a:schemeClr val="accent1"/>
+          </a:lnRef>
+          <a:fillRef idx="3">
+            <a:schemeClr val="accent1"/>
+          </a:fillRef>
+          <a:effectRef idx="2">
+            <a:schemeClr val="accent1"/>
+          </a:effectRef>
+          <a:fontRef idx="minor">
+            <a:schemeClr val="lt1"/>
+          </a:fontRef>
+        </p:style>
+        <p:txBody>
+          <a:bodyPr rtlCol="0" anchor="ctr"/>
+          <a:lstStyle/>
+          <a:p/>
+        </p:txBody>
+      </p:sp>
+      <p:sp>
+        <p:nvSpPr>
+          <p:cNvPr id="21" name="TextBox 20"/>
+          <p:cNvSpPr txBox="1"/>
+          <p:nvPr/>
+        </p:nvSpPr>
+        <p:spPr>
+          <a:xfrm>
+            <a:off x="6355080" y="3995928"/>
+            <a:ext cx="5349240" cy="347472"/>
+          </a:xfrm>
+          <a:prstGeom prst="rect">
+            <a:avLst/>
+          </a:prstGeom>
+          <a:noFill/>
+        </p:spPr>
+        <p:txBody>
+          <a:bodyPr wrap="square" lIns="0" rIns="0" tIns="0" bIns="0">
+            <a:spAutoFit/>
+          </a:bodyPr>
+          <a:lstStyle/>
+          <a:p>
+            <a:pPr>
+              <a:spcAft>
+                <a:spcPts val="200"/>
+              </a:spcAft>
+            </a:pPr>
+            <a:r>
+              <a:rPr sz="1500" b="1">
+                <a:solidFill>
+                  <a:srgbClr val="1E2761"/>
+                </a:solidFill>
+                <a:latin typeface="Calibri"/>
+              </a:rPr>
+              <a:t>RESEARCH QUESTION</a:t>
+            </a:r>
+          </a:p>
+        </p:txBody>
+      </p:sp>
+      <p:sp>
+        <p:nvSpPr>
+          <p:cNvPr id="22" name="Rectangle 21"/>
+          <p:cNvSpPr/>
+          <p:nvPr/>
+        </p:nvSpPr>
+        <p:spPr>
+          <a:xfrm>
+            <a:off x="5943600" y="4434840"/>
+            <a:ext cx="5760720" cy="1965960"/>
+          </a:xfrm>
+          <a:prstGeom prst="rect">
+            <a:avLst/>
+          </a:prstGeom>
+          <a:solidFill>
+            <a:srgbClr val="F7F8FC"/>
+          </a:solidFill>
+          <a:ln>
+            <a:noFill/>
+          </a:ln>
+        </p:spPr>
+        <p:style>
+          <a:lnRef idx="1">
+            <a:schemeClr val="accent1"/>
+          </a:lnRef>
+          <a:fillRef idx="3">
+            <a:schemeClr val="accent1"/>
+          </a:fillRef>
+          <a:effectRef idx="2">
+            <a:schemeClr val="accent1"/>
+          </a:effectRef>
+          <a:fontRef idx="minor">
+            <a:schemeClr val="lt1"/>
+          </a:fontRef>
+        </p:style>
+        <p:txBody>
+          <a:bodyPr rtlCol="0" anchor="ctr"/>
+          <a:lstStyle/>
+          <a:p/>
+        </p:txBody>
+      </p:sp>
+      <p:sp>
+        <p:nvSpPr>
+          <p:cNvPr id="23" name="TextBox 22"/>
+          <p:cNvSpPr txBox="1"/>
+          <p:nvPr/>
+        </p:nvSpPr>
+        <p:spPr>
+          <a:xfrm>
+            <a:off x="6217920" y="4572000"/>
+            <a:ext cx="5212080" cy="1737360"/>
+          </a:xfrm>
+          <a:prstGeom prst="rect">
+            <a:avLst/>
+          </a:prstGeom>
+          <a:noFill/>
+        </p:spPr>
+        <p:txBody>
+          <a:bodyPr wrap="square" lIns="0" rIns="0" tIns="0" bIns="0">
+            <a:spAutoFit/>
+          </a:bodyPr>
+          <a:lstStyle/>
+          <a:p>
+            <a:pPr>
+              <a:spcAft>
+                <a:spcPts val="500"/>
+              </a:spcAft>
+            </a:pPr>
+            <a:r>
+              <a:rPr sz="1000" b="0">
+                <a:solidFill>
+                  <a:srgbClr val="5B5F6E"/>
+                </a:solidFill>
+                <a:latin typeface="Calibri"/>
+              </a:rPr>
+              <a:t>Can repeated micro-level interaction produce macro-level market structure without that structure being programmed in?</a:t>
+            </a:r>
+          </a:p>
+          <a:p>
+            <a:pPr>
+              <a:spcAft>
+                <a:spcPts val="500"/>
+              </a:spcAft>
+            </a:pPr>
+            <a:r>
+              <a:rPr sz="1000" b="1">
+                <a:solidFill>
+                  <a:srgbClr val="1E2761"/>
+                </a:solidFill>
+                <a:latin typeface="Calibri"/>
+              </a:rPr>
+              <a:t>Finding: </a:t>
+            </a:r>
+            <a:r>
+              <a:rPr sz="1000" b="0">
+                <a:solidFill>
+                  <a:srgbClr val="5B5F6E"/>
+                </a:solidFill>
+                <a:latin typeface="Calibri"/>
+              </a:rPr>
+              <a:t>Yes. The premium tier is competed out of existence in all eight cells, from 40% of stalls to essentially zero, and no rule anywhere reads a class label — verified by swapping the tier names and getting a bit-identical run. Free entry sets the size and the fixed cost sets the equilibrium: 24.9 sellers at a cost of 6, 12.4 at 12. The exit rule changes the churn and not the destination — the three-week rule turns over 2.4x as many firms and lands within 15% of the same count.</a:t>
+            </a:r>
+          </a:p>
+          <a:p>
+            <a:pPr>
+              <a:spcAft>
+                <a:spcPts val="500"/>
+              </a:spcAft>
+            </a:pPr>
+            <a:r>
+              <a:rPr sz="1000" b="1">
+                <a:solidFill>
+                  <a:srgbClr val="1E2761"/>
+                </a:solidFill>
+                <a:latin typeface="Calibri"/>
+              </a:rPr>
+              <a:t>Caveat: </a:t>
+            </a:r>
+            <a:r>
+              <a:rPr sz="1000" b="0">
+                <a:solidFill>
+                  <a:srgbClr val="5B5F6E"/>
+                </a:solidFill>
+                <a:latin typeface="Calibri"/>
+              </a:rPr>
+              <a:t>Emergent is meant narrowly. The mechanism did not encode the outcome, but *why* the premium tier loses was fixed at Phase 2: 70% of buyers hold a budget of 3.0 against its price of 6.0, so it sells to 30% of the market while paying the same rent. The market discovered what the population already made true. Both halves of the registered mechanism were also inoperative and were replaced at the gate — exit fired on week-0 arithmetic in 100% of seeds, and the unmet-demand entry trigger was identically zero across 1,980 seller-weeks.</a:t>
             </a:r>
           </a:p>
         </p:txBody>

--- a/project_tracking.pptx
+++ b/project_tracking.pptx
@@ -18,7 +18,7 @@
     <p:sldId id="266" r:id="rId17"/>
     <p:sldId id="267" r:id="rId18"/>
     <p:sldId id="268" r:id="rId19"/>
-    <p:sldId id="269" r:id="rId20"/>
+    <p:sldId id="269" r:id="rId21"/>
   </p:sldIdLst>
   <p:sldSz cx="12191969" cy="6858000" type="screen4x3"/>
   <p:notesSz cx="6858000" cy="9144000"/>
@@ -11011,7 +11011,7 @@
                 </a:solidFill>
                 <a:latin typeface="Calibri"/>
               </a:rPr>
-              <a:t>EMERGENT</a:t>
+              <a:t>DIFFERENTIAL SURVIVAL</a:t>
             </a:r>
           </a:p>
         </p:txBody>
@@ -11783,7 +11783,7 @@
                           </a:solidFill>
                           <a:latin typeface="Calibri"/>
                         </a:rPr>
-                        <a:t>Premium tier, week 0</a:t>
+                        <a:t>Premium tier, week 0 -&gt; 110</a:t>
                       </a:r>
                     </a:p>
                   </a:txBody>
@@ -11805,7 +11805,7 @@
                           </a:solidFill>
                           <a:latin typeface="Calibri"/>
                         </a:rPr>
-                        <a:t>40% of stalls</a:t>
+                        <a:t>40% -&gt; 0%</a:t>
                       </a:r>
                     </a:p>
                   </a:txBody>
@@ -11852,7 +11852,7 @@
                           </a:solidFill>
                           <a:latin typeface="Calibri"/>
                         </a:rPr>
-                        <a:t>Premium tier, week 110</a:t>
+                        <a:t>Stationary count, F=6 / F=12</a:t>
                       </a:r>
                     </a:p>
                   </a:txBody>
@@ -11874,7 +11874,7 @@
                           </a:solidFill>
                           <a:latin typeface="Calibri"/>
                         </a:rPr>
-                        <a:t>0%</a:t>
+                        <a:t>24.9 / 12.4</a:t>
                       </a:r>
                     </a:p>
                   </a:txBody>
@@ -11893,11 +11893,11 @@
                       <a:r>
                         <a:rPr sz="1100" b="1">
                           <a:solidFill>
-                            <a:srgbClr val="5B5F6E"/>
-                          </a:solidFill>
-                          <a:latin typeface="Calibri"/>
-                        </a:rPr>
-                        <a:t>—</a:t>
+                            <a:srgbClr val="1E7A4D"/>
+                          </a:solidFill>
+                          <a:latin typeface="Calibri"/>
+                        </a:rPr>
+                        <a:t>PASS</a:t>
                       </a:r>
                     </a:p>
                   </a:txBody>
@@ -11921,7 +11921,7 @@
                           </a:solidFill>
                           <a:latin typeface="Calibri"/>
                         </a:rPr>
-                        <a:t>Sellers at F=6 / F=12</a:t>
+                        <a:t>Final-season entry / exit</a:t>
                       </a:r>
                     </a:p>
                   </a:txBody>
@@ -11943,7 +11943,7 @@
                           </a:solidFill>
                           <a:latin typeface="Calibri"/>
                         </a:rPr>
-                        <a:t>24.9 / 12.4</a:t>
+                        <a:t>0.10-0.47 per wk</a:t>
                       </a:r>
                     </a:p>
                   </a:txBody>
@@ -11962,11 +11962,11 @@
                       <a:r>
                         <a:rPr sz="1100" b="1">
                           <a:solidFill>
-                            <a:srgbClr val="1E7A4D"/>
-                          </a:solidFill>
-                          <a:latin typeface="Calibri"/>
-                        </a:rPr>
-                        <a:t>PASS</a:t>
+                            <a:srgbClr val="5B5F6E"/>
+                          </a:solidFill>
+                          <a:latin typeface="Calibri"/>
+                        </a:rPr>
+                        <a:t>—</a:t>
                       </a:r>
                     </a:p>
                   </a:txBody>
@@ -11990,7 +11990,7 @@
                           </a:solidFill>
                           <a:latin typeface="Calibri"/>
                         </a:rPr>
-                        <a:t>Churn, streak vs capital</a:t>
+                        <a:t>  firms surviving a season</a:t>
                       </a:r>
                     </a:p>
                   </a:txBody>
@@ -12012,7 +12012,7 @@
                           </a:solidFill>
                           <a:latin typeface="Calibri"/>
                         </a:rPr>
-                        <a:t>2.4x</a:t>
+                        <a:t>48%-88%</a:t>
                       </a:r>
                     </a:p>
                   </a:txBody>
@@ -12059,7 +12059,7 @@
                           </a:solidFill>
                           <a:latin typeface="Calibri"/>
                         </a:rPr>
-                        <a:t>Volatility vs RI DEM</a:t>
+                        <a:t>Turnover, streak vs capital</a:t>
                       </a:r>
                     </a:p>
                   </a:txBody>
@@ -12081,7 +12081,7 @@
                           </a:solidFill>
                           <a:latin typeface="Calibri"/>
                         </a:rPr>
-                        <a:t>12.7% vs 15.2%</a:t>
+                        <a:t>3.7x</a:t>
                       </a:r>
                     </a:p>
                   </a:txBody>
@@ -12368,7 +12368,7 @@
                 </a:solidFill>
                 <a:latin typeface="Calibri"/>
               </a:rPr>
-              <a:t>Yes. The premium tier is competed out of existence in all eight cells, from 40% of stalls to essentially zero, and no rule anywhere reads a class label — verified by swapping the tier names and getting a bit-identical run. Free entry sets the size and the fixed cost sets the equilibrium: 24.9 sellers at a cost of 6, 12.4 at 12. The exit rule changes the churn and not the destination — the three-week rule turns over 2.4x as many firms and lands within 15% of the same count.</a:t>
+              <a:t>Entry/exit dynamics selectively eliminate the premium tier — 40% of stalls to essentially zero in all eight cells — under this population and cost structure. Free entry endogenizes market size and the fixed cost strongly determines its stationary level: 24.9 sellers at a cost of 6, 12.4 at 12. What settles is a *stochastic stationary* structure, not an equilibrium: in the final season entry and exit both run, and under the three-week rule only 48%-62% of firms survive a season while the count does not move.</a:t>
             </a:r>
           </a:p>
           <a:p>
@@ -12393,7 +12393,1576 @@
                 </a:solidFill>
                 <a:latin typeface="Calibri"/>
               </a:rPr>
-              <a:t>Emergent is meant narrowly. The mechanism did not encode the outcome, but *why* the premium tier loses was fixed at Phase 2: 70% of buyers hold a budget of 3.0 against its price of 6.0, so it sells to 30% of the market while paying the same rent. The market discovered what the population already made true. Both halves of the registered mechanism were also inoperative and were replaced at the gate — exit fired on week-0 arithmetic in 100% of seeds, and the unmet-demand entry trigger was identically zero across 1,980 seller-weeks.</a:t>
+              <a:t>Emergent with respect to the decision *rules*, conditional on exogenously specified buyer affordability and seller economics. Swapping the tier names gives a bit-identical run, which proves the outcome is label-invariant — no rule reads a class — but not that the composition is independent of the parameterization: Phase 2 gave 70% of buyers a budget of 3.0 against a premium price of 6.0, and both tiers pay the same rent. The exit rule mainly changes turnover and convergence speed, and the long-run count only modestly (~15%). Season-over-season change 12.7% against the RI DEM reference's 15.2% supports a comparable order of magnitude only — provenance, seller definition and entry/exit definition are unverified, so it is not a reproduction claim.</a:t>
+            </a:r>
+          </a:p>
+        </p:txBody>
+      </p:sp>
+      <p:sp>
+        <p:nvSpPr>
+          <p:cNvPr id="24" name="TextBox 23"/>
+          <p:cNvSpPr txBox="1"/>
+          <p:nvPr/>
+        </p:nvSpPr>
+        <p:spPr>
+          <a:xfrm>
+            <a:off x="457200" y="6446520"/>
+            <a:ext cx="11247120" cy="274320"/>
+          </a:xfrm>
+          <a:prstGeom prst="rect">
+            <a:avLst/>
+          </a:prstGeom>
+          <a:noFill/>
+        </p:spPr>
+        <p:txBody>
+          <a:bodyPr wrap="square" lIns="0" rIns="0" tIns="0" bIns="0">
+            <a:spAutoFit/>
+          </a:bodyPr>
+          <a:lstStyle/>
+          <a:p>
+            <a:pPr>
+              <a:spcAft>
+                <a:spcPts val="200"/>
+              </a:spcAft>
+            </a:pPr>
+            <a:r>
+              <a:rPr sz="950" b="0">
+                <a:solidFill>
+                  <a:srgbClr val="5B5F6E"/>
+                </a:solidFill>
+                <a:latin typeface="Calibri"/>
+              </a:rPr>
+              <a:t>Generated automatically at phase completion  ·  Phase Completion Deliverable  ·  market-sim project</a:t>
+            </a:r>
+          </a:p>
+        </p:txBody>
+      </p:sp>
+    </p:spTree>
+  </p:cSld>
+  <p:clrMapOvr>
+    <a:masterClrMapping/>
+  </p:clrMapOvr>
+</p:sld>
+</file>
+
+<file path=ppt/slides/slide14.xml><?xml version="1.0" encoding="utf-8"?>
+<p:sld xmlns:a="http://schemas.openxmlformats.org/drawingml/2006/main" xmlns:p="http://schemas.openxmlformats.org/presentationml/2006/main" xmlns:r="http://schemas.openxmlformats.org/officeDocument/2006/relationships">
+  <p:cSld>
+    <p:spTree>
+      <p:nvGrpSpPr>
+        <p:cNvPr id="1" name=""/>
+        <p:cNvGrpSpPr/>
+        <p:nvPr/>
+      </p:nvGrpSpPr>
+      <p:grpSpPr/>
+      <p:sp>
+        <p:nvSpPr>
+          <p:cNvPr id="2" name="TextBox 1"/>
+          <p:cNvSpPr txBox="1"/>
+          <p:nvPr/>
+        </p:nvSpPr>
+        <p:spPr>
+          <a:xfrm>
+            <a:off x="457200" y="320040"/>
+            <a:ext cx="8229600" cy="548640"/>
+          </a:xfrm>
+          <a:prstGeom prst="rect">
+            <a:avLst/>
+          </a:prstGeom>
+          <a:noFill/>
+        </p:spPr>
+        <p:txBody>
+          <a:bodyPr wrap="square" lIns="0" rIns="0" tIns="0" bIns="0">
+            <a:spAutoFit/>
+          </a:bodyPr>
+          <a:lstStyle/>
+          <a:p>
+            <a:pPr>
+              <a:spcAft>
+                <a:spcPts val="200"/>
+              </a:spcAft>
+            </a:pPr>
+            <a:r>
+              <a:rPr sz="3200" b="1">
+                <a:solidFill>
+                  <a:srgbClr val="1E2761"/>
+                </a:solidFill>
+                <a:latin typeface="Cambria"/>
+              </a:rPr>
+              <a:t>Phase 8 — Endogenous Market Structure</a:t>
+            </a:r>
+          </a:p>
+        </p:txBody>
+      </p:sp>
+      <p:sp>
+        <p:nvSpPr>
+          <p:cNvPr id="3" name="TextBox 2"/>
+          <p:cNvSpPr txBox="1"/>
+          <p:nvPr/>
+        </p:nvSpPr>
+        <p:spPr>
+          <a:xfrm>
+            <a:off x="457200" y="868680"/>
+            <a:ext cx="8229600" cy="274320"/>
+          </a:xfrm>
+          <a:prstGeom prst="rect">
+            <a:avLst/>
+          </a:prstGeom>
+          <a:noFill/>
+        </p:spPr>
+        <p:txBody>
+          <a:bodyPr wrap="square" lIns="0" rIns="0" tIns="0" bIns="0">
+            <a:spAutoFit/>
+          </a:bodyPr>
+          <a:lstStyle/>
+          <a:p>
+            <a:pPr>
+              <a:spcAft>
+                <a:spcPts val="200"/>
+              </a:spcAft>
+            </a:pPr>
+            <a:r>
+              <a:rPr sz="1200" b="0">
+                <a:solidFill>
+                  <a:srgbClr val="5B5F6E"/>
+                </a:solidFill>
+                <a:latin typeface="Calibri"/>
+              </a:rPr>
+              <a:t>Entry and exit switched on, nothing else changed  ·  git tag: phase8-validated  ·  300 seeds x 110 weeks</a:t>
+            </a:r>
+          </a:p>
+        </p:txBody>
+      </p:sp>
+      <p:sp>
+        <p:nvSpPr>
+          <p:cNvPr id="4" name="Rounded Rectangle 3"/>
+          <p:cNvSpPr/>
+          <p:nvPr/>
+        </p:nvSpPr>
+        <p:spPr>
+          <a:xfrm>
+            <a:off x="9464040" y="365760"/>
+            <a:ext cx="2240280" cy="384048"/>
+          </a:xfrm>
+          <a:prstGeom prst="roundRect">
+            <a:avLst/>
+          </a:prstGeom>
+          <a:solidFill>
+            <a:srgbClr val="1E7A4D"/>
+          </a:solidFill>
+          <a:ln>
+            <a:noFill/>
+          </a:ln>
+        </p:spPr>
+        <p:style>
+          <a:lnRef idx="1">
+            <a:schemeClr val="accent1"/>
+          </a:lnRef>
+          <a:fillRef idx="3">
+            <a:schemeClr val="accent1"/>
+          </a:fillRef>
+          <a:effectRef idx="2">
+            <a:schemeClr val="accent1"/>
+          </a:effectRef>
+          <a:fontRef idx="minor">
+            <a:schemeClr val="lt1"/>
+          </a:fontRef>
+        </p:style>
+        <p:txBody>
+          <a:bodyPr rtlCol="0" anchor="ctr"/>
+          <a:lstStyle/>
+          <a:p>
+            <a:pPr algn="ctr"/>
+            <a:r>
+              <a:rPr sz="1050" b="1">
+                <a:solidFill>
+                  <a:srgbClr val="FFFFFF"/>
+                </a:solidFill>
+                <a:latin typeface="Calibri"/>
+              </a:rPr>
+              <a:t>DIFFERENTIAL SURVIVAL</a:t>
+            </a:r>
+          </a:p>
+        </p:txBody>
+      </p:sp>
+      <p:sp>
+        <p:nvSpPr>
+          <p:cNvPr id="5" name="Rectangle 4"/>
+          <p:cNvSpPr/>
+          <p:nvPr/>
+        </p:nvSpPr>
+        <p:spPr>
+          <a:xfrm>
+            <a:off x="457200" y="1417320"/>
+            <a:ext cx="292608" cy="292608"/>
+          </a:xfrm>
+          <a:prstGeom prst="rect">
+            <a:avLst/>
+          </a:prstGeom>
+          <a:solidFill>
+            <a:srgbClr val="1E2761"/>
+          </a:solidFill>
+          <a:ln>
+            <a:noFill/>
+          </a:ln>
+        </p:spPr>
+        <p:style>
+          <a:lnRef idx="1">
+            <a:schemeClr val="accent1"/>
+          </a:lnRef>
+          <a:fillRef idx="3">
+            <a:schemeClr val="accent1"/>
+          </a:fillRef>
+          <a:effectRef idx="2">
+            <a:schemeClr val="accent1"/>
+          </a:effectRef>
+          <a:fontRef idx="minor">
+            <a:schemeClr val="lt1"/>
+          </a:fontRef>
+        </p:style>
+        <p:txBody>
+          <a:bodyPr rtlCol="0" anchor="ctr"/>
+          <a:lstStyle/>
+          <a:p/>
+        </p:txBody>
+      </p:sp>
+      <p:sp>
+        <p:nvSpPr>
+          <p:cNvPr id="6" name="TextBox 5"/>
+          <p:cNvSpPr txBox="1"/>
+          <p:nvPr/>
+        </p:nvSpPr>
+        <p:spPr>
+          <a:xfrm>
+            <a:off x="868680" y="1389888"/>
+            <a:ext cx="4617720" cy="347472"/>
+          </a:xfrm>
+          <a:prstGeom prst="rect">
+            <a:avLst/>
+          </a:prstGeom>
+          <a:noFill/>
+        </p:spPr>
+        <p:txBody>
+          <a:bodyPr wrap="square" lIns="0" rIns="0" tIns="0" bIns="0">
+            <a:spAutoFit/>
+          </a:bodyPr>
+          <a:lstStyle/>
+          <a:p>
+            <a:pPr>
+              <a:spcAft>
+                <a:spcPts val="200"/>
+              </a:spcAft>
+            </a:pPr>
+            <a:r>
+              <a:rPr sz="1500" b="1">
+                <a:solidFill>
+                  <a:srgbClr val="1E2761"/>
+                </a:solidFill>
+                <a:latin typeface="Calibri"/>
+              </a:rPr>
+              <a:t>AGENTS</a:t>
+            </a:r>
+          </a:p>
+        </p:txBody>
+      </p:sp>
+      <p:sp>
+        <p:nvSpPr>
+          <p:cNvPr id="7" name="TextBox 6"/>
+          <p:cNvSpPr txBox="1"/>
+          <p:nvPr/>
+        </p:nvSpPr>
+        <p:spPr>
+          <a:xfrm>
+            <a:off x="868680" y="1828800"/>
+            <a:ext cx="4617720" cy="566928"/>
+          </a:xfrm>
+          <a:prstGeom prst="rect">
+            <a:avLst/>
+          </a:prstGeom>
+          <a:noFill/>
+        </p:spPr>
+        <p:txBody>
+          <a:bodyPr wrap="square" lIns="0" rIns="0" tIns="0" bIns="0">
+            <a:spAutoFit/>
+          </a:bodyPr>
+          <a:lstStyle/>
+          <a:p>
+            <a:pPr>
+              <a:spcAft>
+                <a:spcPts val="200"/>
+              </a:spcAft>
+            </a:pPr>
+            <a:r>
+              <a:rPr sz="1300" b="1">
+                <a:solidFill>
+                  <a:srgbClr val="1E2761"/>
+                </a:solidFill>
+                <a:latin typeface="Calibri"/>
+              </a:rPr>
+              <a:t>Buyers: </a:t>
+            </a:r>
+            <a:r>
+              <a:rPr sz="1300" b="0">
+                <a:solidFill>
+                  <a:srgbClr val="5B5F6E"/>
+                </a:solidFill>
+                <a:latin typeface="Calibri"/>
+              </a:rPr>
+              <a:t>100 — Poor 70 / Middle 20 / Rich 10, dispersed budgets</a:t>
+            </a:r>
+          </a:p>
+          <a:p>
+            <a:pPr>
+              <a:spcAft>
+                <a:spcPts val="200"/>
+              </a:spcAft>
+            </a:pPr>
+            <a:r>
+              <a:rPr sz="1300" b="1">
+                <a:solidFill>
+                  <a:srgbClr val="1E2761"/>
+                </a:solidFill>
+                <a:latin typeface="Calibri"/>
+              </a:rPr>
+              <a:t>Sellers: </a:t>
+            </a:r>
+            <a:r>
+              <a:rPr sz="1300" b="0">
+                <a:solidFill>
+                  <a:srgbClr val="5B5F6E"/>
+                </a:solidFill>
+                <a:latin typeface="Calibri"/>
+              </a:rPr>
+              <a:t>5 at week 0 — 3 Slow, 2 Shigh — then whoever survives</a:t>
+            </a:r>
+          </a:p>
+        </p:txBody>
+      </p:sp>
+      <p:sp>
+        <p:nvSpPr>
+          <p:cNvPr id="8" name="Rectangle 7"/>
+          <p:cNvSpPr/>
+          <p:nvPr/>
+        </p:nvSpPr>
+        <p:spPr>
+          <a:xfrm>
+            <a:off x="457200" y="2651760"/>
+            <a:ext cx="292608" cy="292608"/>
+          </a:xfrm>
+          <a:prstGeom prst="rect">
+            <a:avLst/>
+          </a:prstGeom>
+          <a:solidFill>
+            <a:srgbClr val="1E2761"/>
+          </a:solidFill>
+          <a:ln>
+            <a:noFill/>
+          </a:ln>
+        </p:spPr>
+        <p:style>
+          <a:lnRef idx="1">
+            <a:schemeClr val="accent1"/>
+          </a:lnRef>
+          <a:fillRef idx="3">
+            <a:schemeClr val="accent1"/>
+          </a:fillRef>
+          <a:effectRef idx="2">
+            <a:schemeClr val="accent1"/>
+          </a:effectRef>
+          <a:fontRef idx="minor">
+            <a:schemeClr val="lt1"/>
+          </a:fontRef>
+        </p:style>
+        <p:txBody>
+          <a:bodyPr rtlCol="0" anchor="ctr"/>
+          <a:lstStyle/>
+          <a:p/>
+        </p:txBody>
+      </p:sp>
+      <p:sp>
+        <p:nvSpPr>
+          <p:cNvPr id="9" name="TextBox 8"/>
+          <p:cNvSpPr txBox="1"/>
+          <p:nvPr/>
+        </p:nvSpPr>
+        <p:spPr>
+          <a:xfrm>
+            <a:off x="868680" y="2624328"/>
+            <a:ext cx="4617720" cy="347472"/>
+          </a:xfrm>
+          <a:prstGeom prst="rect">
+            <a:avLst/>
+          </a:prstGeom>
+          <a:noFill/>
+        </p:spPr>
+        <p:txBody>
+          <a:bodyPr wrap="square" lIns="0" rIns="0" tIns="0" bIns="0">
+            <a:spAutoFit/>
+          </a:bodyPr>
+          <a:lstStyle/>
+          <a:p>
+            <a:pPr>
+              <a:spcAft>
+                <a:spcPts val="200"/>
+              </a:spcAft>
+            </a:pPr>
+            <a:r>
+              <a:rPr sz="1500" b="1">
+                <a:solidFill>
+                  <a:srgbClr val="1E2761"/>
+                </a:solidFill>
+                <a:latin typeface="Calibri"/>
+              </a:rPr>
+              <a:t>ENVIRONMENT &amp; CONTEXT</a:t>
+            </a:r>
+          </a:p>
+        </p:txBody>
+      </p:sp>
+      <p:sp>
+        <p:nvSpPr>
+          <p:cNvPr id="10" name="TextBox 9"/>
+          <p:cNvSpPr txBox="1"/>
+          <p:nvPr/>
+        </p:nvSpPr>
+        <p:spPr>
+          <a:xfrm>
+            <a:off x="868680" y="3063240"/>
+            <a:ext cx="4617720" cy="548640"/>
+          </a:xfrm>
+          <a:prstGeom prst="rect">
+            <a:avLst/>
+          </a:prstGeom>
+          <a:noFill/>
+        </p:spPr>
+        <p:txBody>
+          <a:bodyPr wrap="square" lIns="0" rIns="0" tIns="0" bIns="0">
+            <a:spAutoFit/>
+          </a:bodyPr>
+          <a:lstStyle/>
+          <a:p>
+            <a:pPr>
+              <a:spcAft>
+                <a:spcPts val="200"/>
+              </a:spcAft>
+            </a:pPr>
+            <a:r>
+              <a:rPr sz="1300" b="0">
+                <a:solidFill>
+                  <a:srgbClr val="5B5F6E"/>
+                </a:solidFill>
+                <a:latin typeface="Calibri"/>
+              </a:rPr>
+              <a:t>-  40 fixed slots, drawn at slot width whatever the occupancy, so</a:t>
+            </a:r>
+          </a:p>
+          <a:p>
+            <a:pPr>
+              <a:spcAft>
+                <a:spcPts val="200"/>
+              </a:spcAft>
+            </a:pPr>
+            <a:r>
+              <a:rPr sz="1300" b="0">
+                <a:solidFill>
+                  <a:srgbClr val="5B5F6E"/>
+                </a:solidFill>
+                <a:latin typeface="Calibri"/>
+              </a:rPr>
+              <a:t>   arms with different entry histories stay paired on a seed.</a:t>
+            </a:r>
+          </a:p>
+          <a:p>
+            <a:pPr>
+              <a:spcAft>
+                <a:spcPts val="200"/>
+              </a:spcAft>
+            </a:pPr>
+            <a:r>
+              <a:rPr sz="1300" b="0">
+                <a:solidFill>
+                  <a:srgbClr val="5B5F6E"/>
+                </a:solidFill>
+                <a:latin typeface="Calibri"/>
+              </a:rPr>
+              <a:t>-  price_reference frozen at the week-0 configuration for all 110 weeks.</a:t>
+            </a:r>
+          </a:p>
+        </p:txBody>
+      </p:sp>
+      <p:sp>
+        <p:nvSpPr>
+          <p:cNvPr id="11" name="Rectangle 10"/>
+          <p:cNvSpPr/>
+          <p:nvPr/>
+        </p:nvSpPr>
+        <p:spPr>
+          <a:xfrm>
+            <a:off x="457200" y="3886200"/>
+            <a:ext cx="292608" cy="292608"/>
+          </a:xfrm>
+          <a:prstGeom prst="rect">
+            <a:avLst/>
+          </a:prstGeom>
+          <a:solidFill>
+            <a:srgbClr val="1E2761"/>
+          </a:solidFill>
+          <a:ln>
+            <a:noFill/>
+          </a:ln>
+        </p:spPr>
+        <p:style>
+          <a:lnRef idx="1">
+            <a:schemeClr val="accent1"/>
+          </a:lnRef>
+          <a:fillRef idx="3">
+            <a:schemeClr val="accent1"/>
+          </a:fillRef>
+          <a:effectRef idx="2">
+            <a:schemeClr val="accent1"/>
+          </a:effectRef>
+          <a:fontRef idx="minor">
+            <a:schemeClr val="lt1"/>
+          </a:fontRef>
+        </p:style>
+        <p:txBody>
+          <a:bodyPr rtlCol="0" anchor="ctr"/>
+          <a:lstStyle/>
+          <a:p/>
+        </p:txBody>
+      </p:sp>
+      <p:sp>
+        <p:nvSpPr>
+          <p:cNvPr id="12" name="TextBox 11"/>
+          <p:cNvSpPr txBox="1"/>
+          <p:nvPr/>
+        </p:nvSpPr>
+        <p:spPr>
+          <a:xfrm>
+            <a:off x="868680" y="3858768"/>
+            <a:ext cx="4617720" cy="347472"/>
+          </a:xfrm>
+          <a:prstGeom prst="rect">
+            <a:avLst/>
+          </a:prstGeom>
+          <a:noFill/>
+        </p:spPr>
+        <p:txBody>
+          <a:bodyPr wrap="square" lIns="0" rIns="0" tIns="0" bIns="0">
+            <a:spAutoFit/>
+          </a:bodyPr>
+          <a:lstStyle/>
+          <a:p>
+            <a:pPr>
+              <a:spcAft>
+                <a:spcPts val="200"/>
+              </a:spcAft>
+            </a:pPr>
+            <a:r>
+              <a:rPr sz="1500" b="1">
+                <a:solidFill>
+                  <a:srgbClr val="1E2761"/>
+                </a:solidFill>
+                <a:latin typeface="Calibri"/>
+              </a:rPr>
+              <a:t>METHOD</a:t>
+            </a:r>
+          </a:p>
+        </p:txBody>
+      </p:sp>
+      <p:sp>
+        <p:nvSpPr>
+          <p:cNvPr id="13" name="TextBox 12"/>
+          <p:cNvSpPr txBox="1"/>
+          <p:nvPr/>
+        </p:nvSpPr>
+        <p:spPr>
+          <a:xfrm>
+            <a:off x="868680" y="4297680"/>
+            <a:ext cx="4617720" cy="594360"/>
+          </a:xfrm>
+          <a:prstGeom prst="rect">
+            <a:avLst/>
+          </a:prstGeom>
+          <a:noFill/>
+        </p:spPr>
+        <p:txBody>
+          <a:bodyPr wrap="square" lIns="0" rIns="0" tIns="0" bIns="0">
+            <a:spAutoFit/>
+          </a:bodyPr>
+          <a:lstStyle/>
+          <a:p>
+            <a:pPr>
+              <a:spcAft>
+                <a:spcPts val="200"/>
+              </a:spcAft>
+            </a:pPr>
+            <a:r>
+              <a:rPr sz="1300" b="0">
+                <a:solidFill>
+                  <a:srgbClr val="5B5F6E"/>
+                </a:solidFill>
+                <a:latin typeface="Calibri"/>
+              </a:rPr>
+              <a:t>Entry: copy a stall that is making money, after two weeks of mean</a:t>
+            </a:r>
+          </a:p>
+          <a:p>
+            <a:pPr>
+              <a:spcAft>
+                <a:spcPts val="200"/>
+              </a:spcAft>
+            </a:pPr>
+            <a:r>
+              <a:rPr sz="1300" b="0">
+                <a:solidFill>
+                  <a:srgbClr val="5B5F6E"/>
+                </a:solidFill>
+                <a:latin typeface="Calibri"/>
+              </a:rPr>
+              <a:t>profit above zero. Exit: capital exhausted, or three losing weeks —</a:t>
+            </a:r>
+          </a:p>
+          <a:p>
+            <a:pPr>
+              <a:spcAft>
+                <a:spcPts val="200"/>
+              </a:spcAft>
+            </a:pPr>
+            <a:r>
+              <a:rPr sz="1300" b="0">
+                <a:solidFill>
+                  <a:srgbClr val="5B5F6E"/>
+                </a:solidFill>
+                <a:latin typeface="Calibri"/>
+              </a:rPr>
+              <a:t>both run. Fixed weekly cost swept over 6 / 8 / 10 / 12.</a:t>
+            </a:r>
+          </a:p>
+        </p:txBody>
+      </p:sp>
+      <p:sp>
+        <p:nvSpPr>
+          <p:cNvPr id="14" name="Rectangle 13"/>
+          <p:cNvSpPr/>
+          <p:nvPr/>
+        </p:nvSpPr>
+        <p:spPr>
+          <a:xfrm>
+            <a:off x="457200" y="5029200"/>
+            <a:ext cx="292608" cy="292608"/>
+          </a:xfrm>
+          <a:prstGeom prst="rect">
+            <a:avLst/>
+          </a:prstGeom>
+          <a:solidFill>
+            <a:srgbClr val="1E2761"/>
+          </a:solidFill>
+          <a:ln>
+            <a:noFill/>
+          </a:ln>
+        </p:spPr>
+        <p:style>
+          <a:lnRef idx="1">
+            <a:schemeClr val="accent1"/>
+          </a:lnRef>
+          <a:fillRef idx="3">
+            <a:schemeClr val="accent1"/>
+          </a:fillRef>
+          <a:effectRef idx="2">
+            <a:schemeClr val="accent1"/>
+          </a:effectRef>
+          <a:fontRef idx="minor">
+            <a:schemeClr val="lt1"/>
+          </a:fontRef>
+        </p:style>
+        <p:txBody>
+          <a:bodyPr rtlCol="0" anchor="ctr"/>
+          <a:lstStyle/>
+          <a:p/>
+        </p:txBody>
+      </p:sp>
+      <p:sp>
+        <p:nvSpPr>
+          <p:cNvPr id="15" name="TextBox 14"/>
+          <p:cNvSpPr txBox="1"/>
+          <p:nvPr/>
+        </p:nvSpPr>
+        <p:spPr>
+          <a:xfrm>
+            <a:off x="868680" y="5001768"/>
+            <a:ext cx="4617720" cy="347472"/>
+          </a:xfrm>
+          <a:prstGeom prst="rect">
+            <a:avLst/>
+          </a:prstGeom>
+          <a:noFill/>
+        </p:spPr>
+        <p:txBody>
+          <a:bodyPr wrap="square" lIns="0" rIns="0" tIns="0" bIns="0">
+            <a:spAutoFit/>
+          </a:bodyPr>
+          <a:lstStyle/>
+          <a:p>
+            <a:pPr>
+              <a:spcAft>
+                <a:spcPts val="200"/>
+              </a:spcAft>
+            </a:pPr>
+            <a:r>
+              <a:rPr sz="1500" b="1">
+                <a:solidFill>
+                  <a:srgbClr val="1E2761"/>
+                </a:solidFill>
+                <a:latin typeface="Calibri"/>
+              </a:rPr>
+              <a:t>LITERATURE BASIS</a:t>
+            </a:r>
+          </a:p>
+        </p:txBody>
+      </p:sp>
+      <p:sp>
+        <p:nvSpPr>
+          <p:cNvPr id="16" name="TextBox 15"/>
+          <p:cNvSpPr txBox="1"/>
+          <p:nvPr/>
+        </p:nvSpPr>
+        <p:spPr>
+          <a:xfrm>
+            <a:off x="868680" y="5440680"/>
+            <a:ext cx="4617720" cy="1005840"/>
+          </a:xfrm>
+          <a:prstGeom prst="rect">
+            <a:avLst/>
+          </a:prstGeom>
+          <a:noFill/>
+        </p:spPr>
+        <p:txBody>
+          <a:bodyPr wrap="square" lIns="0" rIns="0" tIns="0" bIns="0">
+            <a:spAutoFit/>
+          </a:bodyPr>
+          <a:lstStyle/>
+          <a:p>
+            <a:pPr>
+              <a:spcAft>
+                <a:spcPts val="600"/>
+              </a:spcAft>
+            </a:pPr>
+            <a:r>
+              <a:rPr sz="1100" b="1">
+                <a:solidFill>
+                  <a:srgbClr val="1E2761"/>
+                </a:solidFill>
+                <a:latin typeface="Calibri"/>
+              </a:rPr>
+              <a:t>Schelling (1971), </a:t>
+            </a:r>
+            <a:r>
+              <a:rPr sz="1100" b="0">
+                <a:solidFill>
+                  <a:srgbClr val="5B5F6E"/>
+                </a:solidFill>
+                <a:latin typeface="Calibri"/>
+              </a:rPr>
+              <a:t>“Dynamic Models of Segregation” (J. Math. Sociology) — origin of the encoded-vs-emergent question this phase tests.</a:t>
+            </a:r>
+          </a:p>
+        </p:txBody>
+      </p:sp>
+      <p:sp>
+        <p:nvSpPr>
+          <p:cNvPr id="17" name="Rectangle 16"/>
+          <p:cNvSpPr/>
+          <p:nvPr/>
+        </p:nvSpPr>
+        <p:spPr>
+          <a:xfrm>
+            <a:off x="5943600" y="1417320"/>
+            <a:ext cx="292608" cy="292608"/>
+          </a:xfrm>
+          <a:prstGeom prst="rect">
+            <a:avLst/>
+          </a:prstGeom>
+          <a:solidFill>
+            <a:srgbClr val="1E2761"/>
+          </a:solidFill>
+          <a:ln>
+            <a:noFill/>
+          </a:ln>
+        </p:spPr>
+        <p:style>
+          <a:lnRef idx="1">
+            <a:schemeClr val="accent1"/>
+          </a:lnRef>
+          <a:fillRef idx="3">
+            <a:schemeClr val="accent1"/>
+          </a:fillRef>
+          <a:effectRef idx="2">
+            <a:schemeClr val="accent1"/>
+          </a:effectRef>
+          <a:fontRef idx="minor">
+            <a:schemeClr val="lt1"/>
+          </a:fontRef>
+        </p:style>
+        <p:txBody>
+          <a:bodyPr rtlCol="0" anchor="ctr"/>
+          <a:lstStyle/>
+          <a:p/>
+        </p:txBody>
+      </p:sp>
+      <p:sp>
+        <p:nvSpPr>
+          <p:cNvPr id="18" name="TextBox 17"/>
+          <p:cNvSpPr txBox="1"/>
+          <p:nvPr/>
+        </p:nvSpPr>
+        <p:spPr>
+          <a:xfrm>
+            <a:off x="6355080" y="1389888"/>
+            <a:ext cx="5349240" cy="347472"/>
+          </a:xfrm>
+          <a:prstGeom prst="rect">
+            <a:avLst/>
+          </a:prstGeom>
+          <a:noFill/>
+        </p:spPr>
+        <p:txBody>
+          <a:bodyPr wrap="square" lIns="0" rIns="0" tIns="0" bIns="0">
+            <a:spAutoFit/>
+          </a:bodyPr>
+          <a:lstStyle/>
+          <a:p>
+            <a:pPr>
+              <a:spcAft>
+                <a:spcPts val="200"/>
+              </a:spcAft>
+            </a:pPr>
+            <a:r>
+              <a:rPr sz="1500" b="1">
+                <a:solidFill>
+                  <a:srgbClr val="1E2761"/>
+                </a:solidFill>
+                <a:latin typeface="Calibri"/>
+              </a:rPr>
+              <a:t>KEY RESULTS</a:t>
+            </a:r>
+          </a:p>
+        </p:txBody>
+      </p:sp>
+      <p:graphicFrame>
+        <p:nvGraphicFramePr>
+          <p:cNvPr id="19" name="Table 18"/>
+          <p:cNvGraphicFramePr>
+            <a:graphicFrameLocks noGrp="1"/>
+          </p:cNvGraphicFramePr>
+          <p:nvPr/>
+        </p:nvGraphicFramePr>
+        <p:xfrm>
+          <a:off x="5943600" y="1874519"/>
+          <a:ext cx="5760720" cy="1920240"/>
+        </p:xfrm>
+        <a:graphic>
+          <a:graphicData uri="http://schemas.openxmlformats.org/drawingml/2006/table">
+            <a:tbl>
+              <a:tblPr firstRow="1" bandRow="1">
+                <a:tableStyleId>{5C22544A-7EE6-4342-B048-85BDC9FD1C3A}</a:tableStyleId>
+              </a:tblPr>
+              <a:tblGrid>
+                <a:gridCol w="3200400"/>
+                <a:gridCol w="1463040"/>
+                <a:gridCol w="1097280"/>
+              </a:tblGrid>
+              <a:tr h="274320">
+                <a:tc>
+                  <a:txBody>
+                    <a:bodyPr/>
+                    <a:lstStyle/>
+                    <a:p>
+                      <a:r>
+                        <a:rPr sz="1100" b="1">
+                          <a:solidFill>
+                            <a:srgbClr val="FFFFFF"/>
+                          </a:solidFill>
+                          <a:latin typeface="Calibri"/>
+                        </a:rPr>
+                        <a:t>Metric</a:t>
+                      </a:r>
+                    </a:p>
+                  </a:txBody>
+                  <a:tcPr>
+                    <a:solidFill>
+                      <a:srgbClr val="1E2761"/>
+                    </a:solidFill>
+                  </a:tcPr>
+                </a:tc>
+                <a:tc>
+                  <a:txBody>
+                    <a:bodyPr/>
+                    <a:lstStyle/>
+                    <a:p>
+                      <a:r>
+                        <a:rPr sz="1100" b="1">
+                          <a:solidFill>
+                            <a:srgbClr val="FFFFFF"/>
+                          </a:solidFill>
+                          <a:latin typeface="Calibri"/>
+                        </a:rPr>
+                        <a:t>Value</a:t>
+                      </a:r>
+                    </a:p>
+                  </a:txBody>
+                  <a:tcPr>
+                    <a:solidFill>
+                      <a:srgbClr val="1E2761"/>
+                    </a:solidFill>
+                  </a:tcPr>
+                </a:tc>
+                <a:tc>
+                  <a:txBody>
+                    <a:bodyPr/>
+                    <a:lstStyle/>
+                    <a:p>
+                      <a:r>
+                        <a:rPr sz="1100" b="1">
+                          <a:solidFill>
+                            <a:srgbClr val="FFFFFF"/>
+                          </a:solidFill>
+                          <a:latin typeface="Calibri"/>
+                        </a:rPr>
+                        <a:t/>
+                      </a:r>
+                    </a:p>
+                  </a:txBody>
+                  <a:tcPr>
+                    <a:solidFill>
+                      <a:srgbClr val="1E2761"/>
+                    </a:solidFill>
+                  </a:tcPr>
+                </a:tc>
+              </a:tr>
+              <a:tr h="274320">
+                <a:tc>
+                  <a:txBody>
+                    <a:bodyPr/>
+                    <a:lstStyle/>
+                    <a:p>
+                      <a:r>
+                        <a:rPr sz="1100">
+                          <a:solidFill>
+                            <a:srgbClr val="1E2761"/>
+                          </a:solidFill>
+                          <a:latin typeface="Calibri"/>
+                        </a:rPr>
+                        <a:t>Premium tier, week 0 -&gt; 110</a:t>
+                      </a:r>
+                    </a:p>
+                  </a:txBody>
+                  <a:tcPr>
+                    <a:solidFill>
+                      <a:srgbClr val="FFFFFF"/>
+                    </a:solidFill>
+                  </a:tcPr>
+                </a:tc>
+                <a:tc>
+                  <a:txBody>
+                    <a:bodyPr/>
+                    <a:lstStyle/>
+                    <a:p>
+                      <a:r>
+                        <a:rPr sz="1100">
+                          <a:solidFill>
+                            <a:srgbClr val="5B5F6E"/>
+                          </a:solidFill>
+                          <a:latin typeface="Calibri"/>
+                        </a:rPr>
+                        <a:t>40% -&gt; 0%</a:t>
+                      </a:r>
+                    </a:p>
+                  </a:txBody>
+                  <a:tcPr>
+                    <a:solidFill>
+                      <a:srgbClr val="FFFFFF"/>
+                    </a:solidFill>
+                  </a:tcPr>
+                </a:tc>
+                <a:tc>
+                  <a:txBody>
+                    <a:bodyPr/>
+                    <a:lstStyle/>
+                    <a:p>
+                      <a:pPr algn="ctr"/>
+                      <a:r>
+                        <a:rPr sz="1100" b="1">
+                          <a:solidFill>
+                            <a:srgbClr val="5B5F6E"/>
+                          </a:solidFill>
+                          <a:latin typeface="Calibri"/>
+                        </a:rPr>
+                        <a:t>—</a:t>
+                      </a:r>
+                    </a:p>
+                  </a:txBody>
+                  <a:tcPr>
+                    <a:solidFill>
+                      <a:srgbClr val="FFFFFF"/>
+                    </a:solidFill>
+                  </a:tcPr>
+                </a:tc>
+              </a:tr>
+              <a:tr h="274320">
+                <a:tc>
+                  <a:txBody>
+                    <a:bodyPr/>
+                    <a:lstStyle/>
+                    <a:p>
+                      <a:r>
+                        <a:rPr sz="1100">
+                          <a:solidFill>
+                            <a:srgbClr val="1E2761"/>
+                          </a:solidFill>
+                          <a:latin typeface="Calibri"/>
+                        </a:rPr>
+                        <a:t>Stationary count, F=6 / F=12</a:t>
+                      </a:r>
+                    </a:p>
+                  </a:txBody>
+                  <a:tcPr>
+                    <a:solidFill>
+                      <a:srgbClr val="F7F8FC"/>
+                    </a:solidFill>
+                  </a:tcPr>
+                </a:tc>
+                <a:tc>
+                  <a:txBody>
+                    <a:bodyPr/>
+                    <a:lstStyle/>
+                    <a:p>
+                      <a:r>
+                        <a:rPr sz="1100">
+                          <a:solidFill>
+                            <a:srgbClr val="5B5F6E"/>
+                          </a:solidFill>
+                          <a:latin typeface="Calibri"/>
+                        </a:rPr>
+                        <a:t>24.9 / 12.4</a:t>
+                      </a:r>
+                    </a:p>
+                  </a:txBody>
+                  <a:tcPr>
+                    <a:solidFill>
+                      <a:srgbClr val="F7F8FC"/>
+                    </a:solidFill>
+                  </a:tcPr>
+                </a:tc>
+                <a:tc>
+                  <a:txBody>
+                    <a:bodyPr/>
+                    <a:lstStyle/>
+                    <a:p>
+                      <a:pPr algn="ctr"/>
+                      <a:r>
+                        <a:rPr sz="1100" b="1">
+                          <a:solidFill>
+                            <a:srgbClr val="1E7A4D"/>
+                          </a:solidFill>
+                          <a:latin typeface="Calibri"/>
+                        </a:rPr>
+                        <a:t>PASS</a:t>
+                      </a:r>
+                    </a:p>
+                  </a:txBody>
+                  <a:tcPr>
+                    <a:solidFill>
+                      <a:srgbClr val="F7F8FC"/>
+                    </a:solidFill>
+                  </a:tcPr>
+                </a:tc>
+              </a:tr>
+              <a:tr h="274320">
+                <a:tc>
+                  <a:txBody>
+                    <a:bodyPr/>
+                    <a:lstStyle/>
+                    <a:p>
+                      <a:r>
+                        <a:rPr sz="1100">
+                          <a:solidFill>
+                            <a:srgbClr val="1E2761"/>
+                          </a:solidFill>
+                          <a:latin typeface="Calibri"/>
+                        </a:rPr>
+                        <a:t>Final-season entry / exit</a:t>
+                      </a:r>
+                    </a:p>
+                  </a:txBody>
+                  <a:tcPr>
+                    <a:solidFill>
+                      <a:srgbClr val="FFFFFF"/>
+                    </a:solidFill>
+                  </a:tcPr>
+                </a:tc>
+                <a:tc>
+                  <a:txBody>
+                    <a:bodyPr/>
+                    <a:lstStyle/>
+                    <a:p>
+                      <a:r>
+                        <a:rPr sz="1100">
+                          <a:solidFill>
+                            <a:srgbClr val="5B5F6E"/>
+                          </a:solidFill>
+                          <a:latin typeface="Calibri"/>
+                        </a:rPr>
+                        <a:t>0.10-0.47 per wk</a:t>
+                      </a:r>
+                    </a:p>
+                  </a:txBody>
+                  <a:tcPr>
+                    <a:solidFill>
+                      <a:srgbClr val="FFFFFF"/>
+                    </a:solidFill>
+                  </a:tcPr>
+                </a:tc>
+                <a:tc>
+                  <a:txBody>
+                    <a:bodyPr/>
+                    <a:lstStyle/>
+                    <a:p>
+                      <a:pPr algn="ctr"/>
+                      <a:r>
+                        <a:rPr sz="1100" b="1">
+                          <a:solidFill>
+                            <a:srgbClr val="5B5F6E"/>
+                          </a:solidFill>
+                          <a:latin typeface="Calibri"/>
+                        </a:rPr>
+                        <a:t>—</a:t>
+                      </a:r>
+                    </a:p>
+                  </a:txBody>
+                  <a:tcPr>
+                    <a:solidFill>
+                      <a:srgbClr val="FFFFFF"/>
+                    </a:solidFill>
+                  </a:tcPr>
+                </a:tc>
+              </a:tr>
+              <a:tr h="274320">
+                <a:tc>
+                  <a:txBody>
+                    <a:bodyPr/>
+                    <a:lstStyle/>
+                    <a:p>
+                      <a:r>
+                        <a:rPr sz="1100">
+                          <a:solidFill>
+                            <a:srgbClr val="1E2761"/>
+                          </a:solidFill>
+                          <a:latin typeface="Calibri"/>
+                        </a:rPr>
+                        <a:t>  firms surviving a season</a:t>
+                      </a:r>
+                    </a:p>
+                  </a:txBody>
+                  <a:tcPr>
+                    <a:solidFill>
+                      <a:srgbClr val="F7F8FC"/>
+                    </a:solidFill>
+                  </a:tcPr>
+                </a:tc>
+                <a:tc>
+                  <a:txBody>
+                    <a:bodyPr/>
+                    <a:lstStyle/>
+                    <a:p>
+                      <a:r>
+                        <a:rPr sz="1100">
+                          <a:solidFill>
+                            <a:srgbClr val="5B5F6E"/>
+                          </a:solidFill>
+                          <a:latin typeface="Calibri"/>
+                        </a:rPr>
+                        <a:t>48%-88%</a:t>
+                      </a:r>
+                    </a:p>
+                  </a:txBody>
+                  <a:tcPr>
+                    <a:solidFill>
+                      <a:srgbClr val="F7F8FC"/>
+                    </a:solidFill>
+                  </a:tcPr>
+                </a:tc>
+                <a:tc>
+                  <a:txBody>
+                    <a:bodyPr/>
+                    <a:lstStyle/>
+                    <a:p>
+                      <a:pPr algn="ctr"/>
+                      <a:r>
+                        <a:rPr sz="1100" b="1">
+                          <a:solidFill>
+                            <a:srgbClr val="5B5F6E"/>
+                          </a:solidFill>
+                          <a:latin typeface="Calibri"/>
+                        </a:rPr>
+                        <a:t>—</a:t>
+                      </a:r>
+                    </a:p>
+                  </a:txBody>
+                  <a:tcPr>
+                    <a:solidFill>
+                      <a:srgbClr val="F7F8FC"/>
+                    </a:solidFill>
+                  </a:tcPr>
+                </a:tc>
+              </a:tr>
+              <a:tr h="274320">
+                <a:tc>
+                  <a:txBody>
+                    <a:bodyPr/>
+                    <a:lstStyle/>
+                    <a:p>
+                      <a:r>
+                        <a:rPr sz="1100">
+                          <a:solidFill>
+                            <a:srgbClr val="1E2761"/>
+                          </a:solidFill>
+                          <a:latin typeface="Calibri"/>
+                        </a:rPr>
+                        <a:t>Turnover, streak vs capital</a:t>
+                      </a:r>
+                    </a:p>
+                  </a:txBody>
+                  <a:tcPr>
+                    <a:solidFill>
+                      <a:srgbClr val="FFFFFF"/>
+                    </a:solidFill>
+                  </a:tcPr>
+                </a:tc>
+                <a:tc>
+                  <a:txBody>
+                    <a:bodyPr/>
+                    <a:lstStyle/>
+                    <a:p>
+                      <a:r>
+                        <a:rPr sz="1100">
+                          <a:solidFill>
+                            <a:srgbClr val="5B5F6E"/>
+                          </a:solidFill>
+                          <a:latin typeface="Calibri"/>
+                        </a:rPr>
+                        <a:t>3.7x</a:t>
+                      </a:r>
+                    </a:p>
+                  </a:txBody>
+                  <a:tcPr>
+                    <a:solidFill>
+                      <a:srgbClr val="FFFFFF"/>
+                    </a:solidFill>
+                  </a:tcPr>
+                </a:tc>
+                <a:tc>
+                  <a:txBody>
+                    <a:bodyPr/>
+                    <a:lstStyle/>
+                    <a:p>
+                      <a:pPr algn="ctr"/>
+                      <a:r>
+                        <a:rPr sz="1100" b="1">
+                          <a:solidFill>
+                            <a:srgbClr val="5B5F6E"/>
+                          </a:solidFill>
+                          <a:latin typeface="Calibri"/>
+                        </a:rPr>
+                        <a:t>—</a:t>
+                      </a:r>
+                    </a:p>
+                  </a:txBody>
+                  <a:tcPr>
+                    <a:solidFill>
+                      <a:srgbClr val="FFFFFF"/>
+                    </a:solidFill>
+                  </a:tcPr>
+                </a:tc>
+              </a:tr>
+              <a:tr h="274320">
+                <a:tc>
+                  <a:txBody>
+                    <a:bodyPr/>
+                    <a:lstStyle/>
+                    <a:p>
+                      <a:r>
+                        <a:rPr sz="1100">
+                          <a:solidFill>
+                            <a:srgbClr val="1E2761"/>
+                          </a:solidFill>
+                          <a:latin typeface="Calibri"/>
+                        </a:rPr>
+                        <a:t>Peak sellers vs capacity</a:t>
+                      </a:r>
+                    </a:p>
+                  </a:txBody>
+                  <a:tcPr>
+                    <a:solidFill>
+                      <a:srgbClr val="F7F8FC"/>
+                    </a:solidFill>
+                  </a:tcPr>
+                </a:tc>
+                <a:tc>
+                  <a:txBody>
+                    <a:bodyPr/>
+                    <a:lstStyle/>
+                    <a:p>
+                      <a:r>
+                        <a:rPr sz="1100">
+                          <a:solidFill>
+                            <a:srgbClr val="5B5F6E"/>
+                          </a:solidFill>
+                          <a:latin typeface="Calibri"/>
+                        </a:rPr>
+                        <a:t>28 of 40</a:t>
+                      </a:r>
+                    </a:p>
+                  </a:txBody>
+                  <a:tcPr>
+                    <a:solidFill>
+                      <a:srgbClr val="F7F8FC"/>
+                    </a:solidFill>
+                  </a:tcPr>
+                </a:tc>
+                <a:tc>
+                  <a:txBody>
+                    <a:bodyPr/>
+                    <a:lstStyle/>
+                    <a:p>
+                      <a:pPr algn="ctr"/>
+                      <a:r>
+                        <a:rPr sz="1100" b="1">
+                          <a:solidFill>
+                            <a:srgbClr val="1E7A4D"/>
+                          </a:solidFill>
+                          <a:latin typeface="Calibri"/>
+                        </a:rPr>
+                        <a:t>PASS</a:t>
+                      </a:r>
+                    </a:p>
+                  </a:txBody>
+                  <a:tcPr>
+                    <a:solidFill>
+                      <a:srgbClr val="F7F8FC"/>
+                    </a:solidFill>
+                  </a:tcPr>
+                </a:tc>
+              </a:tr>
+            </a:tbl>
+          </a:graphicData>
+        </a:graphic>
+      </p:graphicFrame>
+      <p:sp>
+        <p:nvSpPr>
+          <p:cNvPr id="20" name="Rectangle 19"/>
+          <p:cNvSpPr/>
+          <p:nvPr/>
+        </p:nvSpPr>
+        <p:spPr>
+          <a:xfrm>
+            <a:off x="5943600" y="4023360"/>
+            <a:ext cx="292608" cy="292608"/>
+          </a:xfrm>
+          <a:prstGeom prst="rect">
+            <a:avLst/>
+          </a:prstGeom>
+          <a:solidFill>
+            <a:srgbClr val="1E2761"/>
+          </a:solidFill>
+          <a:ln>
+            <a:noFill/>
+          </a:ln>
+        </p:spPr>
+        <p:style>
+          <a:lnRef idx="1">
+            <a:schemeClr val="accent1"/>
+          </a:lnRef>
+          <a:fillRef idx="3">
+            <a:schemeClr val="accent1"/>
+          </a:fillRef>
+          <a:effectRef idx="2">
+            <a:schemeClr val="accent1"/>
+          </a:effectRef>
+          <a:fontRef idx="minor">
+            <a:schemeClr val="lt1"/>
+          </a:fontRef>
+        </p:style>
+        <p:txBody>
+          <a:bodyPr rtlCol="0" anchor="ctr"/>
+          <a:lstStyle/>
+          <a:p/>
+        </p:txBody>
+      </p:sp>
+      <p:sp>
+        <p:nvSpPr>
+          <p:cNvPr id="21" name="TextBox 20"/>
+          <p:cNvSpPr txBox="1"/>
+          <p:nvPr/>
+        </p:nvSpPr>
+        <p:spPr>
+          <a:xfrm>
+            <a:off x="6355080" y="3995928"/>
+            <a:ext cx="5349240" cy="347472"/>
+          </a:xfrm>
+          <a:prstGeom prst="rect">
+            <a:avLst/>
+          </a:prstGeom>
+          <a:noFill/>
+        </p:spPr>
+        <p:txBody>
+          <a:bodyPr wrap="square" lIns="0" rIns="0" tIns="0" bIns="0">
+            <a:spAutoFit/>
+          </a:bodyPr>
+          <a:lstStyle/>
+          <a:p>
+            <a:pPr>
+              <a:spcAft>
+                <a:spcPts val="200"/>
+              </a:spcAft>
+            </a:pPr>
+            <a:r>
+              <a:rPr sz="1500" b="1">
+                <a:solidFill>
+                  <a:srgbClr val="1E2761"/>
+                </a:solidFill>
+                <a:latin typeface="Calibri"/>
+              </a:rPr>
+              <a:t>RESEARCH QUESTION</a:t>
+            </a:r>
+          </a:p>
+        </p:txBody>
+      </p:sp>
+      <p:sp>
+        <p:nvSpPr>
+          <p:cNvPr id="22" name="Rectangle 21"/>
+          <p:cNvSpPr/>
+          <p:nvPr/>
+        </p:nvSpPr>
+        <p:spPr>
+          <a:xfrm>
+            <a:off x="5943600" y="4434840"/>
+            <a:ext cx="5760720" cy="1965960"/>
+          </a:xfrm>
+          <a:prstGeom prst="rect">
+            <a:avLst/>
+          </a:prstGeom>
+          <a:solidFill>
+            <a:srgbClr val="F7F8FC"/>
+          </a:solidFill>
+          <a:ln>
+            <a:noFill/>
+          </a:ln>
+        </p:spPr>
+        <p:style>
+          <a:lnRef idx="1">
+            <a:schemeClr val="accent1"/>
+          </a:lnRef>
+          <a:fillRef idx="3">
+            <a:schemeClr val="accent1"/>
+          </a:fillRef>
+          <a:effectRef idx="2">
+            <a:schemeClr val="accent1"/>
+          </a:effectRef>
+          <a:fontRef idx="minor">
+            <a:schemeClr val="lt1"/>
+          </a:fontRef>
+        </p:style>
+        <p:txBody>
+          <a:bodyPr rtlCol="0" anchor="ctr"/>
+          <a:lstStyle/>
+          <a:p/>
+        </p:txBody>
+      </p:sp>
+      <p:sp>
+        <p:nvSpPr>
+          <p:cNvPr id="23" name="TextBox 22"/>
+          <p:cNvSpPr txBox="1"/>
+          <p:nvPr/>
+        </p:nvSpPr>
+        <p:spPr>
+          <a:xfrm>
+            <a:off x="6217920" y="4572000"/>
+            <a:ext cx="5212080" cy="1737360"/>
+          </a:xfrm>
+          <a:prstGeom prst="rect">
+            <a:avLst/>
+          </a:prstGeom>
+          <a:noFill/>
+        </p:spPr>
+        <p:txBody>
+          <a:bodyPr wrap="square" lIns="0" rIns="0" tIns="0" bIns="0">
+            <a:spAutoFit/>
+          </a:bodyPr>
+          <a:lstStyle/>
+          <a:p>
+            <a:pPr>
+              <a:spcAft>
+                <a:spcPts val="500"/>
+              </a:spcAft>
+            </a:pPr>
+            <a:r>
+              <a:rPr sz="1000" b="0">
+                <a:solidFill>
+                  <a:srgbClr val="5B5F6E"/>
+                </a:solidFill>
+                <a:latin typeface="Calibri"/>
+              </a:rPr>
+              <a:t>Can repeated micro-level interaction produce macro-level market structure without that structure being programmed in?</a:t>
+            </a:r>
+          </a:p>
+          <a:p>
+            <a:pPr>
+              <a:spcAft>
+                <a:spcPts val="500"/>
+              </a:spcAft>
+            </a:pPr>
+            <a:r>
+              <a:rPr sz="1000" b="1">
+                <a:solidFill>
+                  <a:srgbClr val="1E2761"/>
+                </a:solidFill>
+                <a:latin typeface="Calibri"/>
+              </a:rPr>
+              <a:t>Finding: </a:t>
+            </a:r>
+            <a:r>
+              <a:rPr sz="1000" b="0">
+                <a:solidFill>
+                  <a:srgbClr val="5B5F6E"/>
+                </a:solidFill>
+                <a:latin typeface="Calibri"/>
+              </a:rPr>
+              <a:t>Entry/exit dynamics selectively eliminate the premium tier — 40% of stalls to essentially zero in all eight cells — under this population and cost structure. Free entry endogenizes market size and the fixed cost strongly determines its stationary level: 24.9 sellers at a cost of 6, 12.4 at 12. What settles is a *stochastic stationary* structure, not an equilibrium: in the final season entry and exit both run, and under the three-week rule only 48%-62% of firms survive a season while the count does not move.</a:t>
+            </a:r>
+          </a:p>
+          <a:p>
+            <a:pPr>
+              <a:spcAft>
+                <a:spcPts val="500"/>
+              </a:spcAft>
+            </a:pPr>
+            <a:r>
+              <a:rPr sz="1000" b="1">
+                <a:solidFill>
+                  <a:srgbClr val="1E2761"/>
+                </a:solidFill>
+                <a:latin typeface="Calibri"/>
+              </a:rPr>
+              <a:t>Caveat: </a:t>
+            </a:r>
+            <a:r>
+              <a:rPr sz="1000" b="0">
+                <a:solidFill>
+                  <a:srgbClr val="5B5F6E"/>
+                </a:solidFill>
+                <a:latin typeface="Calibri"/>
+              </a:rPr>
+              <a:t>Emergent with respect to the decision *rules*, conditional on exogenously specified buyer affordability and seller economics. Swapping the tier names gives a bit-identical run, which proves the outcome is label-invariant — no rule reads a class — but not that the composition is independent of the parameterization: Phase 2 gave 70% of buyers a budget of 3.0 against a premium price of 6.0, and both tiers pay the same rent. The exit rule mainly changes turnover and convergence speed, and the long-run count only modestly (~15%). Season-over-season change 12.7% against the RI DEM reference's 15.2% supports a comparable order of magnitude only — provenance, seller definition and entry/exit definition are unverified, so it is not a reproduction claim.</a:t>
             </a:r>
           </a:p>
         </p:txBody>

--- a/project_tracking.pptx
+++ b/project_tracking.pptx
@@ -19,6 +19,7 @@
     <p:sldId id="267" r:id="rId18"/>
     <p:sldId id="268" r:id="rId19"/>
     <p:sldId id="269" r:id="rId21"/>
+    <p:sldId id="270" r:id="rId22"/>
   </p:sldIdLst>
   <p:sldSz cx="12191969" cy="6858000" type="screen4x3"/>
   <p:notesSz cx="6858000" cy="9144000"/>
@@ -12445,7 +12446,7 @@
 </p:sld>
 </file>
 
-<file path=ppt/slides/slide14.xml><?xml version="1.0" encoding="utf-8"?>
+<file path=ppt/slides/slide15.xml><?xml version="1.0" encoding="utf-8"?>
 <p:sld xmlns:a="http://schemas.openxmlformats.org/drawingml/2006/main" xmlns:p="http://schemas.openxmlformats.org/presentationml/2006/main" xmlns:r="http://schemas.openxmlformats.org/officeDocument/2006/relationships">
   <p:cSld>
     <p:spTree>
@@ -12489,7 +12490,7 @@
                 </a:solidFill>
                 <a:latin typeface="Cambria"/>
               </a:rPr>
-              <a:t>Phase 8 — Endogenous Market Structure</a:t>
+              <a:t>Phase 9 — Learned Buyer Policy — 9a Distillation</a:t>
             </a:r>
           </a:p>
         </p:txBody>
@@ -12528,7 +12529,7 @@
                 </a:solidFill>
                 <a:latin typeface="Calibri"/>
               </a:rPr>
-              <a:t>Entry and exit switched on, nothing else changed  ·  git tag: phase8-validated  ·  300 seeds x 110 weeks</a:t>
+              <a:t>Distil the hand-written buyer, then deploy it  ·  git tag: phase9a-distilled  ·  train 1000–1119, held out 200–239, deploy 0–29</a:t>
             </a:r>
           </a:p>
         </p:txBody>
@@ -12548,7 +12549,7 @@
             <a:avLst/>
           </a:prstGeom>
           <a:solidFill>
-            <a:srgbClr val="1E7A4D"/>
+            <a:srgbClr val="C9922E"/>
           </a:solidFill>
           <a:ln>
             <a:noFill/>
@@ -12580,7 +12581,7 @@
                 </a:solidFill>
                 <a:latin typeface="Calibri"/>
               </a:rPr>
-              <a:t>DIFFERENTIAL SURVIVAL</a:t>
+              <a:t>GATE PASSED — LOOP DOES NOT COMPOUND</a:t>
             </a:r>
           </a:p>
         </p:txBody>
@@ -12708,7 +12709,7 @@
                 </a:solidFill>
                 <a:latin typeface="Calibri"/>
               </a:rPr>
-              <a:t>100 — Poor 70 / Middle 20 / Rich 10, dispersed budgets</a:t>
+              <a:t>100 — acting on a fitted policy instead of the rule</a:t>
             </a:r>
           </a:p>
           <a:p>
@@ -12733,7 +12734,7 @@
                 </a:solidFill>
                 <a:latin typeface="Calibri"/>
               </a:rPr>
-              <a:t>5 at week 0 — 3 Slow, 2 Shigh — then whoever survives</a:t>
+              <a:t>5 — Phase 6's market, unchanged</a:t>
             </a:r>
           </a:p>
         </p:txBody>
@@ -12852,7 +12853,7 @@
                 </a:solidFill>
                 <a:latin typeface="Calibri"/>
               </a:rPr>
-              <a:t>-  40 fixed slots, drawn at slot width whatever the occupancy, so</a:t>
+              <a:t>-  22 weeks. The teacher is this project's own hand-coded buyer, so</a:t>
             </a:r>
           </a:p>
           <a:p>
@@ -12868,7 +12869,7 @@
                 </a:solidFill>
                 <a:latin typeface="Calibri"/>
               </a:rPr>
-              <a:t>   arms with different entry histories stay paired on a seed.</a:t>
+              <a:t>   what is fitted is distillation of a simulator, not human behaviour.</a:t>
             </a:r>
           </a:p>
           <a:p>
@@ -12884,7 +12885,23 @@
                 </a:solidFill>
                 <a:latin typeface="Calibri"/>
               </a:rPr>
-              <a:t>-  price_reference frozen at the week-0 configuration for all 110 weeks.</a:t>
+              <a:t>-  The student sees 8 observable columns; the season-long taste draw,</a:t>
+            </a:r>
+          </a:p>
+          <a:p>
+            <a:pPr>
+              <a:spcAft>
+                <a:spcPts val="200"/>
+              </a:spcAft>
+            </a:pPr>
+            <a:r>
+              <a:rPr sz="1300" b="0">
+                <a:solidFill>
+                  <a:srgbClr val="5B5F6E"/>
+                </a:solidFill>
+                <a:latin typeface="Calibri"/>
+              </a:rPr>
+              <a:t>   the dispersed budget and the exact price sensitivity are hidden.</a:t>
             </a:r>
           </a:p>
         </p:txBody>
@@ -13003,7 +13020,7 @@
                 </a:solidFill>
                 <a:latin typeface="Calibri"/>
               </a:rPr>
-              <a:t>Entry: copy a stall that is making money, after two weeks of mean</a:t>
+              <a:t>Soft labels p_T(s), which the simulator makes available. Scored on</a:t>
             </a:r>
           </a:p>
           <a:p>
@@ -13019,7 +13036,7 @@
                 </a:solidFill>
                 <a:latin typeface="Calibri"/>
               </a:rPr>
-              <a:t>profit above zero. Exit: capital exhausted, or three losing weeks —</a:t>
+              <a:t>E|p_T - p_theta| — under the shared purchase_draw this is the</a:t>
             </a:r>
           </a:p>
           <a:p>
@@ -13035,7 +13052,23 @@
                 </a:solidFill>
                 <a:latin typeface="Calibri"/>
               </a:rPr>
-              <a:t>both run. Fixed weekly cost swept over 6 / 8 / 10 / 12.</a:t>
+              <a:t>expected TV distance between two Bernoulli policies, not an accuracy.</a:t>
+            </a:r>
+          </a:p>
+          <a:p>
+            <a:pPr>
+              <a:spcAft>
+                <a:spcPts val="200"/>
+              </a:spcAft>
+            </a:pPr>
+            <a:r>
+              <a:rPr sz="1300" b="0">
+                <a:solidFill>
+                  <a:srgbClr val="5B5F6E"/>
+                </a:solidFill>
+                <a:latin typeface="Calibri"/>
+              </a:rPr>
+              <a:t>Gate: policy distance + stratified calibration + proper score.</a:t>
             </a:r>
           </a:p>
         </p:txBody>
@@ -13154,7 +13187,7 @@
                 </a:solidFill>
                 <a:latin typeface="Calibri"/>
               </a:rPr>
-              <a:t>Schelling (1971), </a:t>
+              <a:t>Ross, Gordon &amp; Bagnell (2011), </a:t>
             </a:r>
             <a:r>
               <a:rPr sz="1100" b="0">
@@ -13163,7 +13196,7 @@
                 </a:solidFill>
                 <a:latin typeface="Calibri"/>
               </a:rPr>
-              <a:t>“Dynamic Models of Segregation” (J. Math. Sociology) — origin of the encoded-vs-emergent question this phase tests.</a:t>
+              <a:t>“A Reduction of Imitation Learning and Structured Prediction to No-Regret Online Learning” (AISTATS) — the compounding-error argument this phase measures rather than assumes.</a:t>
             </a:r>
           </a:p>
         </p:txBody>
@@ -13352,7 +13385,7 @@
                           </a:solidFill>
                           <a:latin typeface="Calibri"/>
                         </a:rPr>
-                        <a:t>Premium tier, week 0 -&gt; 110</a:t>
+                        <a:t>Constant predictor</a:t>
                       </a:r>
                     </a:p>
                   </a:txBody>
@@ -13374,7 +13407,7 @@
                           </a:solidFill>
                           <a:latin typeface="Calibri"/>
                         </a:rPr>
-                        <a:t>40% -&gt; 0%</a:t>
+                        <a:t>0.1234</a:t>
                       </a:r>
                     </a:p>
                   </a:txBody>
@@ -13421,7 +13454,7 @@
                           </a:solidFill>
                           <a:latin typeface="Calibri"/>
                         </a:rPr>
-                        <a:t>Stationary count, F=6 / F=12</a:t>
+                        <a:t>Observation-set floor</a:t>
                       </a:r>
                     </a:p>
                   </a:txBody>
@@ -13443,7 +13476,7 @@
                           </a:solidFill>
                           <a:latin typeface="Calibri"/>
                         </a:rPr>
-                        <a:t>24.9 / 12.4</a:t>
+                        <a:t>0.0832</a:t>
                       </a:r>
                     </a:p>
                   </a:txBody>
@@ -13462,11 +13495,11 @@
                       <a:r>
                         <a:rPr sz="1100" b="1">
                           <a:solidFill>
-                            <a:srgbClr val="1E7A4D"/>
-                          </a:solidFill>
-                          <a:latin typeface="Calibri"/>
-                        </a:rPr>
-                        <a:t>PASS</a:t>
+                            <a:srgbClr val="5B5F6E"/>
+                          </a:solidFill>
+                          <a:latin typeface="Calibri"/>
+                        </a:rPr>
+                        <a:t>—</a:t>
                       </a:r>
                     </a:p>
                   </a:txBody>
@@ -13490,7 +13523,7 @@
                           </a:solidFill>
                           <a:latin typeface="Calibri"/>
                         </a:rPr>
-                        <a:t>Final-season entry / exit</a:t>
+                        <a:t>Student, held out</a:t>
                       </a:r>
                     </a:p>
                   </a:txBody>
@@ -13512,7 +13545,7 @@
                           </a:solidFill>
                           <a:latin typeface="Calibri"/>
                         </a:rPr>
-                        <a:t>0.10-0.47 per wk</a:t>
+                        <a:t>0.0834</a:t>
                       </a:r>
                     </a:p>
                   </a:txBody>
@@ -13531,11 +13564,11 @@
                       <a:r>
                         <a:rPr sz="1100" b="1">
                           <a:solidFill>
-                            <a:srgbClr val="5B5F6E"/>
-                          </a:solidFill>
-                          <a:latin typeface="Calibri"/>
-                        </a:rPr>
-                        <a:t>—</a:t>
+                            <a:srgbClr val="1E7A4D"/>
+                          </a:solidFill>
+                          <a:latin typeface="Calibri"/>
+                        </a:rPr>
+                        <a:t>PASS</a:t>
                       </a:r>
                     </a:p>
                   </a:txBody>
@@ -13559,7 +13592,7 @@
                           </a:solidFill>
                           <a:latin typeface="Calibri"/>
                         </a:rPr>
-                        <a:t>  firms surviving a season</a:t>
+                        <a:t>  worst stratum</a:t>
                       </a:r>
                     </a:p>
                   </a:txBody>
@@ -13581,7 +13614,7 @@
                           </a:solidFill>
                           <a:latin typeface="Calibri"/>
                         </a:rPr>
-                        <a:t>48%-88%</a:t>
+                        <a:t>0.0157</a:t>
                       </a:r>
                     </a:p>
                   </a:txBody>
@@ -13600,11 +13633,11 @@
                       <a:r>
                         <a:rPr sz="1100" b="1">
                           <a:solidFill>
-                            <a:srgbClr val="5B5F6E"/>
-                          </a:solidFill>
-                          <a:latin typeface="Calibri"/>
-                        </a:rPr>
-                        <a:t>—</a:t>
+                            <a:srgbClr val="1E7A4D"/>
+                          </a:solidFill>
+                          <a:latin typeface="Calibri"/>
+                        </a:rPr>
+                        <a:t>PASS</a:t>
                       </a:r>
                     </a:p>
                   </a:txBody>
@@ -13628,7 +13661,7 @@
                           </a:solidFill>
                           <a:latin typeface="Calibri"/>
                         </a:rPr>
-                        <a:t>Turnover, streak vs capital</a:t>
+                        <a:t>D_offline -&gt; D_shadow</a:t>
                       </a:r>
                     </a:p>
                   </a:txBody>
@@ -13650,7 +13683,7 @@
                           </a:solidFill>
                           <a:latin typeface="Calibri"/>
                         </a:rPr>
-                        <a:t>3.7x</a:t>
+                        <a:t>0.0828 -&gt; 0.0886</a:t>
                       </a:r>
                     </a:p>
                   </a:txBody>
@@ -13697,7 +13730,7 @@
                           </a:solidFill>
                           <a:latin typeface="Calibri"/>
                         </a:rPr>
-                        <a:t>Peak sellers vs capacity</a:t>
+                        <a:t>  excess, 95% CI</a:t>
                       </a:r>
                     </a:p>
                   </a:txBody>
@@ -13719,7 +13752,7 @@
                           </a:solidFill>
                           <a:latin typeface="Calibri"/>
                         </a:rPr>
-                        <a:t>28 of 40</a:t>
+                        <a:t>[+0.0055, +0.0060]</a:t>
                       </a:r>
                     </a:p>
                   </a:txBody>
@@ -13912,7 +13945,7 @@
                 </a:solidFill>
                 <a:latin typeface="Calibri"/>
               </a:rPr>
-              <a:t>Can repeated micro-level interaction produce macro-level market structure without that structure being programmed in?</a:t>
+              <a:t>Can a learned policy recover the conditional behaviour of the rule-based buyer it replaces, and does that one-step fidelity survive endogenous distribution shift in closed loop?</a:t>
             </a:r>
           </a:p>
           <a:p>
@@ -13937,7 +13970,7 @@
                 </a:solidFill>
                 <a:latin typeface="Calibri"/>
               </a:rPr>
-              <a:t>Entry/exit dynamics selectively eliminate the premium tier — 40% of stalls to essentially zero in all eight cells — under this population and cost structure. Free entry endogenizes market size and the fixed cost strongly determines its stationary level: 24.9 sellers at a cost of 6, 12.4 at 12. What settles is a *stochastic stationary* structure, not an equilibrium: in the final season entry and exit both run, and under the three-week rule only 48%-62% of firms survive a season while the count does not move.</a:t>
+              <a:t>The loop is real and it does not compound. D_shadow exceeds D_offline by +0.0057, CI [+0.0055, +0.0060] — the same student is measurably worse at imitating the teacher on the states *it* brings about. But the amplification is 1.07x, the largest state drift is a Wasserstein-1 of 0.0100, and all six class-to-tier shares return equivalent. Capacity confirms the floor is the observation set: 16x the parameters buys 0.0005.</a:t>
             </a:r>
           </a:p>
           <a:p>
@@ -13962,7 +13995,7 @@
                 </a:solidFill>
                 <a:latin typeface="Calibri"/>
               </a:rPr>
-              <a:t>Emergent with respect to the decision *rules*, conditional on exogenously specified buyer affordability and seller economics. Swapping the tier names gives a bit-identical run, which proves the outcome is label-invariant — no rule reads a class — but not that the composition is independent of the parameterization: Phase 2 gave 70% of buyers a budget of 3.0 against a premium price of 6.0, and both tiers pay the same rent. The exit rule mainly changes turnover and convergence speed, and the long-run count only modestly (~15%). Season-over-season change 12.7% against the RI DEM reference's 15.2% supports a comparable order of magnitude only — provenance, seller definition and entry/exit definition are unverified, so it is not a reproduction claim.</a:t>
+              <a:t>The explanation is the teacher's own stochasticity, and it bounds the claim rather than settling it: per decision the teacher's noise has an sd of 0.475 against the student's systematic deviation of 0.083, so the bias is 17% of the coin-flip the market already runs on. Compounding imitation error needs a near-deterministic teacher — the regime a temperature-0 LLM agent occupies — which is why this null is a reason to expect a different answer at 9b. Soft labels matter for calibration, not fit: sampled labels cost 0.0009 in mean distance and reach 0.0338 at worst stratum, which fails the gate.</a:t>
             </a:r>
           </a:p>
         </p:txBody>

--- a/project_tracking.pptx
+++ b/project_tracking.pptx
@@ -20,6 +20,7 @@
     <p:sldId id="268" r:id="rId19"/>
     <p:sldId id="269" r:id="rId21"/>
     <p:sldId id="270" r:id="rId22"/>
+    <p:sldId id="271" r:id="rId23"/>
   </p:sldIdLst>
   <p:sldSz cx="12191969" cy="6858000" type="screen4x3"/>
   <p:notesSz cx="6858000" cy="9144000"/>
@@ -13996,6 +13997,1591 @@
                 <a:latin typeface="Calibri"/>
               </a:rPr>
               <a:t>The explanation is the teacher's own stochasticity, and it bounds the claim rather than settling it: per decision the teacher's noise has an sd of 0.475 against the student's systematic deviation of 0.083, so the bias is 17% of the coin-flip the market already runs on. Compounding imitation error needs a near-deterministic teacher — the regime a temperature-0 LLM agent occupies — which is why this null is a reason to expect a different answer at 9b. Soft labels matter for calibration, not fit: sampled labels cost 0.0009 in mean distance and reach 0.0338 at worst stratum, which fails the gate.</a:t>
+            </a:r>
+          </a:p>
+        </p:txBody>
+      </p:sp>
+      <p:sp>
+        <p:nvSpPr>
+          <p:cNvPr id="24" name="TextBox 23"/>
+          <p:cNvSpPr txBox="1"/>
+          <p:nvPr/>
+        </p:nvSpPr>
+        <p:spPr>
+          <a:xfrm>
+            <a:off x="457200" y="6446520"/>
+            <a:ext cx="11247120" cy="274320"/>
+          </a:xfrm>
+          <a:prstGeom prst="rect">
+            <a:avLst/>
+          </a:prstGeom>
+          <a:noFill/>
+        </p:spPr>
+        <p:txBody>
+          <a:bodyPr wrap="square" lIns="0" rIns="0" tIns="0" bIns="0">
+            <a:spAutoFit/>
+          </a:bodyPr>
+          <a:lstStyle/>
+          <a:p>
+            <a:pPr>
+              <a:spcAft>
+                <a:spcPts val="200"/>
+              </a:spcAft>
+            </a:pPr>
+            <a:r>
+              <a:rPr sz="950" b="0">
+                <a:solidFill>
+                  <a:srgbClr val="5B5F6E"/>
+                </a:solidFill>
+                <a:latin typeface="Calibri"/>
+              </a:rPr>
+              <a:t>Generated automatically at phase completion  ·  Phase Completion Deliverable  ·  market-sim project</a:t>
+            </a:r>
+          </a:p>
+        </p:txBody>
+      </p:sp>
+    </p:spTree>
+  </p:cSld>
+  <p:clrMapOvr>
+    <a:masterClrMapping/>
+  </p:clrMapOvr>
+</p:sld>
+</file>
+
+<file path=ppt/slides/slide16.xml><?xml version="1.0" encoding="utf-8"?>
+<p:sld xmlns:a="http://schemas.openxmlformats.org/drawingml/2006/main" xmlns:p="http://schemas.openxmlformats.org/presentationml/2006/main" xmlns:r="http://schemas.openxmlformats.org/officeDocument/2006/relationships">
+  <p:cSld>
+    <p:spTree>
+      <p:nvGrpSpPr>
+        <p:cNvPr id="1" name=""/>
+        <p:cNvGrpSpPr/>
+        <p:nvPr/>
+      </p:nvGrpSpPr>
+      <p:grpSpPr/>
+      <p:sp>
+        <p:nvSpPr>
+          <p:cNvPr id="2" name="TextBox 1"/>
+          <p:cNvSpPr txBox="1"/>
+          <p:nvPr/>
+        </p:nvSpPr>
+        <p:spPr>
+          <a:xfrm>
+            <a:off x="457200" y="320040"/>
+            <a:ext cx="8229600" cy="548640"/>
+          </a:xfrm>
+          <a:prstGeom prst="rect">
+            <a:avLst/>
+          </a:prstGeom>
+          <a:noFill/>
+        </p:spPr>
+        <p:txBody>
+          <a:bodyPr wrap="square" lIns="0" rIns="0" tIns="0" bIns="0">
+            <a:spAutoFit/>
+          </a:bodyPr>
+          <a:lstStyle/>
+          <a:p>
+            <a:pPr>
+              <a:spcAft>
+                <a:spcPts val="200"/>
+              </a:spcAft>
+            </a:pPr>
+            <a:r>
+              <a:rPr sz="3200" b="1">
+                <a:solidFill>
+                  <a:srgbClr val="1E2761"/>
+                </a:solidFill>
+                <a:latin typeface="Cambria"/>
+              </a:rPr>
+              <a:t>Phase 9 — Teacher Entropy Sweep — 9b</a:t>
+            </a:r>
+          </a:p>
+        </p:txBody>
+      </p:sp>
+      <p:sp>
+        <p:nvSpPr>
+          <p:cNvPr id="3" name="TextBox 2"/>
+          <p:cNvSpPr txBox="1"/>
+          <p:nvPr/>
+        </p:nvSpPr>
+        <p:spPr>
+          <a:xfrm>
+            <a:off x="457200" y="868680"/>
+            <a:ext cx="8229600" cy="274320"/>
+          </a:xfrm>
+          <a:prstGeom prst="rect">
+            <a:avLst/>
+          </a:prstGeom>
+          <a:noFill/>
+        </p:spPr>
+        <p:txBody>
+          <a:bodyPr wrap="square" lIns="0" rIns="0" tIns="0" bIns="0">
+            <a:spAutoFit/>
+          </a:bodyPr>
+          <a:lstStyle/>
+          <a:p>
+            <a:pPr>
+              <a:spcAft>
+                <a:spcPts val="200"/>
+              </a:spcAft>
+            </a:pPr>
+            <a:r>
+              <a:rPr sz="1200" b="0">
+                <a:solidFill>
+                  <a:srgbClr val="5B5F6E"/>
+                </a:solidFill>
+                <a:latin typeface="Calibri"/>
+              </a:rPr>
+              <a:t>When does one-step imitation error compound?  ·  git tag: phase9b-entropy  ·  5 regimes x 30 deployment seeds</a:t>
+            </a:r>
+          </a:p>
+        </p:txBody>
+      </p:sp>
+      <p:sp>
+        <p:nvSpPr>
+          <p:cNvPr id="4" name="Rounded Rectangle 3"/>
+          <p:cNvSpPr/>
+          <p:nvPr/>
+        </p:nvSpPr>
+        <p:spPr>
+          <a:xfrm>
+            <a:off x="9464040" y="365760"/>
+            <a:ext cx="2240280" cy="384048"/>
+          </a:xfrm>
+          <a:prstGeom prst="roundRect">
+            <a:avLst/>
+          </a:prstGeom>
+          <a:solidFill>
+            <a:srgbClr val="C9922E"/>
+          </a:solidFill>
+          <a:ln>
+            <a:noFill/>
+          </a:ln>
+        </p:spPr>
+        <p:style>
+          <a:lnRef idx="1">
+            <a:schemeClr val="accent1"/>
+          </a:lnRef>
+          <a:fillRef idx="3">
+            <a:schemeClr val="accent1"/>
+          </a:fillRef>
+          <a:effectRef idx="2">
+            <a:schemeClr val="accent1"/>
+          </a:effectRef>
+          <a:fontRef idx="minor">
+            <a:schemeClr val="lt1"/>
+          </a:fontRef>
+        </p:style>
+        <p:txBody>
+          <a:bodyPr rtlCol="0" anchor="ctr"/>
+          <a:lstStyle/>
+          <a:p>
+            <a:pPr algn="ctr"/>
+            <a:r>
+              <a:rPr sz="1050" b="1">
+                <a:solidFill>
+                  <a:srgbClr val="FFFFFF"/>
+                </a:solidFill>
+                <a:latin typeface="Calibri"/>
+              </a:rPr>
+              <a:t>MONOTONE — NOT YET MATERIAL</a:t>
+            </a:r>
+          </a:p>
+        </p:txBody>
+      </p:sp>
+      <p:sp>
+        <p:nvSpPr>
+          <p:cNvPr id="5" name="Rectangle 4"/>
+          <p:cNvSpPr/>
+          <p:nvPr/>
+        </p:nvSpPr>
+        <p:spPr>
+          <a:xfrm>
+            <a:off x="457200" y="1417320"/>
+            <a:ext cx="292608" cy="292608"/>
+          </a:xfrm>
+          <a:prstGeom prst="rect">
+            <a:avLst/>
+          </a:prstGeom>
+          <a:solidFill>
+            <a:srgbClr val="1E2761"/>
+          </a:solidFill>
+          <a:ln>
+            <a:noFill/>
+          </a:ln>
+        </p:spPr>
+        <p:style>
+          <a:lnRef idx="1">
+            <a:schemeClr val="accent1"/>
+          </a:lnRef>
+          <a:fillRef idx="3">
+            <a:schemeClr val="accent1"/>
+          </a:fillRef>
+          <a:effectRef idx="2">
+            <a:schemeClr val="accent1"/>
+          </a:effectRef>
+          <a:fontRef idx="minor">
+            <a:schemeClr val="lt1"/>
+          </a:fontRef>
+        </p:style>
+        <p:txBody>
+          <a:bodyPr rtlCol="0" anchor="ctr"/>
+          <a:lstStyle/>
+          <a:p/>
+        </p:txBody>
+      </p:sp>
+      <p:sp>
+        <p:nvSpPr>
+          <p:cNvPr id="6" name="TextBox 5"/>
+          <p:cNvSpPr txBox="1"/>
+          <p:nvPr/>
+        </p:nvSpPr>
+        <p:spPr>
+          <a:xfrm>
+            <a:off x="868680" y="1389888"/>
+            <a:ext cx="4617720" cy="347472"/>
+          </a:xfrm>
+          <a:prstGeom prst="rect">
+            <a:avLst/>
+          </a:prstGeom>
+          <a:noFill/>
+        </p:spPr>
+        <p:txBody>
+          <a:bodyPr wrap="square" lIns="0" rIns="0" tIns="0" bIns="0">
+            <a:spAutoFit/>
+          </a:bodyPr>
+          <a:lstStyle/>
+          <a:p>
+            <a:pPr>
+              <a:spcAft>
+                <a:spcPts val="200"/>
+              </a:spcAft>
+            </a:pPr>
+            <a:r>
+              <a:rPr sz="1500" b="1">
+                <a:solidFill>
+                  <a:srgbClr val="1E2761"/>
+                </a:solidFill>
+                <a:latin typeface="Calibri"/>
+              </a:rPr>
+              <a:t>AGENTS</a:t>
+            </a:r>
+          </a:p>
+        </p:txBody>
+      </p:sp>
+      <p:sp>
+        <p:nvSpPr>
+          <p:cNvPr id="7" name="TextBox 6"/>
+          <p:cNvSpPr txBox="1"/>
+          <p:nvPr/>
+        </p:nvSpPr>
+        <p:spPr>
+          <a:xfrm>
+            <a:off x="868680" y="1828800"/>
+            <a:ext cx="4617720" cy="566928"/>
+          </a:xfrm>
+          <a:prstGeom prst="rect">
+            <a:avLst/>
+          </a:prstGeom>
+          <a:noFill/>
+        </p:spPr>
+        <p:txBody>
+          <a:bodyPr wrap="square" lIns="0" rIns="0" tIns="0" bIns="0">
+            <a:spAutoFit/>
+          </a:bodyPr>
+          <a:lstStyle/>
+          <a:p>
+            <a:pPr>
+              <a:spcAft>
+                <a:spcPts val="200"/>
+              </a:spcAft>
+            </a:pPr>
+            <a:r>
+              <a:rPr sz="1300" b="1">
+                <a:solidFill>
+                  <a:srgbClr val="1E2761"/>
+                </a:solidFill>
+                <a:latin typeface="Calibri"/>
+              </a:rPr>
+              <a:t>Buyers: </a:t>
+            </a:r>
+            <a:r>
+              <a:rPr sz="1300" b="0">
+                <a:solidFill>
+                  <a:srgbClr val="5B5F6E"/>
+                </a:solidFill>
+                <a:latin typeface="Calibri"/>
+              </a:rPr>
+              <a:t>100 — a distilled policy deployed against the rule</a:t>
+            </a:r>
+          </a:p>
+          <a:p>
+            <a:pPr>
+              <a:spcAft>
+                <a:spcPts val="200"/>
+              </a:spcAft>
+            </a:pPr>
+            <a:r>
+              <a:rPr sz="1300" b="1">
+                <a:solidFill>
+                  <a:srgbClr val="1E2761"/>
+                </a:solidFill>
+                <a:latin typeface="Calibri"/>
+              </a:rPr>
+              <a:t>Sellers: </a:t>
+            </a:r>
+            <a:r>
+              <a:rPr sz="1300" b="0">
+                <a:solidFill>
+                  <a:srgbClr val="5B5F6E"/>
+                </a:solidFill>
+                <a:latin typeface="Calibri"/>
+              </a:rPr>
+              <a:t>5 — Phase 6's market, unchanged in every regime</a:t>
+            </a:r>
+          </a:p>
+        </p:txBody>
+      </p:sp>
+      <p:sp>
+        <p:nvSpPr>
+          <p:cNvPr id="8" name="Rectangle 7"/>
+          <p:cNvSpPr/>
+          <p:nvPr/>
+        </p:nvSpPr>
+        <p:spPr>
+          <a:xfrm>
+            <a:off x="457200" y="2651760"/>
+            <a:ext cx="292608" cy="292608"/>
+          </a:xfrm>
+          <a:prstGeom prst="rect">
+            <a:avLst/>
+          </a:prstGeom>
+          <a:solidFill>
+            <a:srgbClr val="1E2761"/>
+          </a:solidFill>
+          <a:ln>
+            <a:noFill/>
+          </a:ln>
+        </p:spPr>
+        <p:style>
+          <a:lnRef idx="1">
+            <a:schemeClr val="accent1"/>
+          </a:lnRef>
+          <a:fillRef idx="3">
+            <a:schemeClr val="accent1"/>
+          </a:fillRef>
+          <a:effectRef idx="2">
+            <a:schemeClr val="accent1"/>
+          </a:effectRef>
+          <a:fontRef idx="minor">
+            <a:schemeClr val="lt1"/>
+          </a:fontRef>
+        </p:style>
+        <p:txBody>
+          <a:bodyPr rtlCol="0" anchor="ctr"/>
+          <a:lstStyle/>
+          <a:p/>
+        </p:txBody>
+      </p:sp>
+      <p:sp>
+        <p:nvSpPr>
+          <p:cNvPr id="9" name="TextBox 8"/>
+          <p:cNvSpPr txBox="1"/>
+          <p:nvPr/>
+        </p:nvSpPr>
+        <p:spPr>
+          <a:xfrm>
+            <a:off x="868680" y="2624328"/>
+            <a:ext cx="4617720" cy="347472"/>
+          </a:xfrm>
+          <a:prstGeom prst="rect">
+            <a:avLst/>
+          </a:prstGeom>
+          <a:noFill/>
+        </p:spPr>
+        <p:txBody>
+          <a:bodyPr wrap="square" lIns="0" rIns="0" tIns="0" bIns="0">
+            <a:spAutoFit/>
+          </a:bodyPr>
+          <a:lstStyle/>
+          <a:p>
+            <a:pPr>
+              <a:spcAft>
+                <a:spcPts val="200"/>
+              </a:spcAft>
+            </a:pPr>
+            <a:r>
+              <a:rPr sz="1500" b="1">
+                <a:solidFill>
+                  <a:srgbClr val="1E2761"/>
+                </a:solidFill>
+                <a:latin typeface="Calibri"/>
+              </a:rPr>
+              <a:t>ENVIRONMENT &amp; CONTEXT</a:t>
+            </a:r>
+          </a:p>
+        </p:txBody>
+      </p:sp>
+      <p:sp>
+        <p:nvSpPr>
+          <p:cNvPr id="10" name="TextBox 9"/>
+          <p:cNvSpPr txBox="1"/>
+          <p:nvPr/>
+        </p:nvSpPr>
+        <p:spPr>
+          <a:xfrm>
+            <a:off x="868680" y="3063240"/>
+            <a:ext cx="4617720" cy="548640"/>
+          </a:xfrm>
+          <a:prstGeom prst="rect">
+            <a:avLst/>
+          </a:prstGeom>
+          <a:noFill/>
+        </p:spPr>
+        <p:txBody>
+          <a:bodyPr wrap="square" lIns="0" rIns="0" tIns="0" bIns="0">
+            <a:spAutoFit/>
+          </a:bodyPr>
+          <a:lstStyle/>
+          <a:p>
+            <a:pPr>
+              <a:spcAft>
+                <a:spcPts val="200"/>
+              </a:spcAft>
+            </a:pPr>
+            <a:r>
+              <a:rPr sz="1300" b="0">
+                <a:solidFill>
+                  <a:srgbClr val="5B5F6E"/>
+                </a:solidFill>
+                <a:latin typeface="Calibri"/>
+              </a:rPr>
+              <a:t>-  Teacher logit temperature over 2.0 / 1.0 / 0.5 / 0.25 / 0.1,</a:t>
+            </a:r>
+          </a:p>
+          <a:p>
+            <a:pPr>
+              <a:spcAft>
+                <a:spcPts val="200"/>
+              </a:spcAft>
+            </a:pPr>
+            <a:r>
+              <a:rPr sz="1300" b="0">
+                <a:solidFill>
+                  <a:srgbClr val="5B5F6E"/>
+                </a:solidFill>
+                <a:latin typeface="Calibri"/>
+              </a:rPr>
+              <a:t>   sharpening the same preference ordering rather than changing it.</a:t>
+            </a:r>
+          </a:p>
+          <a:p>
+            <a:pPr>
+              <a:spcAft>
+                <a:spcPts val="200"/>
+              </a:spcAft>
+            </a:pPr>
+            <a:r>
+              <a:rPr sz="1300" b="0">
+                <a:solidFill>
+                  <a:srgbClr val="5B5F6E"/>
+                </a:solidFill>
+                <a:latin typeface="Calibri"/>
+              </a:rPr>
+              <a:t>-  The sigmoid offset is re-solved at each so the mean purchase</a:t>
+            </a:r>
+          </a:p>
+          <a:p>
+            <a:pPr>
+              <a:spcAft>
+                <a:spcPts val="200"/>
+              </a:spcAft>
+            </a:pPr>
+            <a:r>
+              <a:rPr sz="1300" b="0">
+                <a:solidFill>
+                  <a:srgbClr val="5B5F6E"/>
+                </a:solidFill>
+                <a:latin typeface="Calibri"/>
+              </a:rPr>
+              <a:t>   probability holds at 0.4594: entropy moves, the level does not.</a:t>
+            </a:r>
+          </a:p>
+        </p:txBody>
+      </p:sp>
+      <p:sp>
+        <p:nvSpPr>
+          <p:cNvPr id="11" name="Rectangle 10"/>
+          <p:cNvSpPr/>
+          <p:nvPr/>
+        </p:nvSpPr>
+        <p:spPr>
+          <a:xfrm>
+            <a:off x="457200" y="3886200"/>
+            <a:ext cx="292608" cy="292608"/>
+          </a:xfrm>
+          <a:prstGeom prst="rect">
+            <a:avLst/>
+          </a:prstGeom>
+          <a:solidFill>
+            <a:srgbClr val="1E2761"/>
+          </a:solidFill>
+          <a:ln>
+            <a:noFill/>
+          </a:ln>
+        </p:spPr>
+        <p:style>
+          <a:lnRef idx="1">
+            <a:schemeClr val="accent1"/>
+          </a:lnRef>
+          <a:fillRef idx="3">
+            <a:schemeClr val="accent1"/>
+          </a:fillRef>
+          <a:effectRef idx="2">
+            <a:schemeClr val="accent1"/>
+          </a:effectRef>
+          <a:fontRef idx="minor">
+            <a:schemeClr val="lt1"/>
+          </a:fontRef>
+        </p:style>
+        <p:txBody>
+          <a:bodyPr rtlCol="0" anchor="ctr"/>
+          <a:lstStyle/>
+          <a:p/>
+        </p:txBody>
+      </p:sp>
+      <p:sp>
+        <p:nvSpPr>
+          <p:cNvPr id="12" name="TextBox 11"/>
+          <p:cNvSpPr txBox="1"/>
+          <p:nvPr/>
+        </p:nvSpPr>
+        <p:spPr>
+          <a:xfrm>
+            <a:off x="868680" y="3858768"/>
+            <a:ext cx="4617720" cy="347472"/>
+          </a:xfrm>
+          <a:prstGeom prst="rect">
+            <a:avLst/>
+          </a:prstGeom>
+          <a:noFill/>
+        </p:spPr>
+        <p:txBody>
+          <a:bodyPr wrap="square" lIns="0" rIns="0" tIns="0" bIns="0">
+            <a:spAutoFit/>
+          </a:bodyPr>
+          <a:lstStyle/>
+          <a:p>
+            <a:pPr>
+              <a:spcAft>
+                <a:spcPts val="200"/>
+              </a:spcAft>
+            </a:pPr>
+            <a:r>
+              <a:rPr sz="1500" b="1">
+                <a:solidFill>
+                  <a:srgbClr val="1E2761"/>
+                </a:solidFill>
+                <a:latin typeface="Calibri"/>
+              </a:rPr>
+              <a:t>METHOD</a:t>
+            </a:r>
+          </a:p>
+        </p:txBody>
+      </p:sp>
+      <p:sp>
+        <p:nvSpPr>
+          <p:cNvPr id="13" name="TextBox 12"/>
+          <p:cNvSpPr txBox="1"/>
+          <p:nvPr/>
+        </p:nvSpPr>
+        <p:spPr>
+          <a:xfrm>
+            <a:off x="868680" y="4297680"/>
+            <a:ext cx="4617720" cy="594360"/>
+          </a:xfrm>
+          <a:prstGeom prst="rect">
+            <a:avLst/>
+          </a:prstGeom>
+          <a:noFill/>
+        </p:spPr>
+        <p:txBody>
+          <a:bodyPr wrap="square" lIns="0" rIns="0" tIns="0" bIns="0">
+            <a:spAutoFit/>
+          </a:bodyPr>
+          <a:lstStyle/>
+          <a:p>
+            <a:pPr>
+              <a:spcAft>
+                <a:spcPts val="200"/>
+              </a:spcAft>
+            </a:pPr>
+            <a:r>
+              <a:rPr sz="1300" b="0">
+                <a:solidFill>
+                  <a:srgbClr val="5B5F6E"/>
+                </a:solidFill>
+                <a:latin typeface="Calibri"/>
+              </a:rPr>
+              <a:t>Per regime: fit up a capacity ladder, deploy the smallest student</a:t>
+            </a:r>
+          </a:p>
+          <a:p>
+            <a:pPr>
+              <a:spcAft>
+                <a:spcPts val="200"/>
+              </a:spcAft>
+            </a:pPr>
+            <a:r>
+              <a:rPr sz="1300" b="0">
+                <a:solidFill>
+                  <a:srgbClr val="5B5F6E"/>
+                </a:solidFill>
+                <a:latin typeface="Calibri"/>
+              </a:rPr>
+              <a:t>that clears Gate 9a against that regime's own floor, then measure</a:t>
+            </a:r>
+          </a:p>
+          <a:p>
+            <a:pPr>
+              <a:spcAft>
+                <a:spcPts val="200"/>
+              </a:spcAft>
+            </a:pPr>
+            <a:r>
+              <a:rPr sz="1300" b="0">
+                <a:solidFill>
+                  <a:srgbClr val="5B5F6E"/>
+                </a:solidFill>
+                <a:latin typeface="Calibri"/>
+              </a:rPr>
+              <a:t>D_offline, D_shadow, state drift and behavioural divergence.</a:t>
+            </a:r>
+          </a:p>
+        </p:txBody>
+      </p:sp>
+      <p:sp>
+        <p:nvSpPr>
+          <p:cNvPr id="14" name="Rectangle 13"/>
+          <p:cNvSpPr/>
+          <p:nvPr/>
+        </p:nvSpPr>
+        <p:spPr>
+          <a:xfrm>
+            <a:off x="457200" y="5029200"/>
+            <a:ext cx="292608" cy="292608"/>
+          </a:xfrm>
+          <a:prstGeom prst="rect">
+            <a:avLst/>
+          </a:prstGeom>
+          <a:solidFill>
+            <a:srgbClr val="1E2761"/>
+          </a:solidFill>
+          <a:ln>
+            <a:noFill/>
+          </a:ln>
+        </p:spPr>
+        <p:style>
+          <a:lnRef idx="1">
+            <a:schemeClr val="accent1"/>
+          </a:lnRef>
+          <a:fillRef idx="3">
+            <a:schemeClr val="accent1"/>
+          </a:fillRef>
+          <a:effectRef idx="2">
+            <a:schemeClr val="accent1"/>
+          </a:effectRef>
+          <a:fontRef idx="minor">
+            <a:schemeClr val="lt1"/>
+          </a:fontRef>
+        </p:style>
+        <p:txBody>
+          <a:bodyPr rtlCol="0" anchor="ctr"/>
+          <a:lstStyle/>
+          <a:p/>
+        </p:txBody>
+      </p:sp>
+      <p:sp>
+        <p:nvSpPr>
+          <p:cNvPr id="15" name="TextBox 14"/>
+          <p:cNvSpPr txBox="1"/>
+          <p:nvPr/>
+        </p:nvSpPr>
+        <p:spPr>
+          <a:xfrm>
+            <a:off x="868680" y="5001768"/>
+            <a:ext cx="4617720" cy="347472"/>
+          </a:xfrm>
+          <a:prstGeom prst="rect">
+            <a:avLst/>
+          </a:prstGeom>
+          <a:noFill/>
+        </p:spPr>
+        <p:txBody>
+          <a:bodyPr wrap="square" lIns="0" rIns="0" tIns="0" bIns="0">
+            <a:spAutoFit/>
+          </a:bodyPr>
+          <a:lstStyle/>
+          <a:p>
+            <a:pPr>
+              <a:spcAft>
+                <a:spcPts val="200"/>
+              </a:spcAft>
+            </a:pPr>
+            <a:r>
+              <a:rPr sz="1500" b="1">
+                <a:solidFill>
+                  <a:srgbClr val="1E2761"/>
+                </a:solidFill>
+                <a:latin typeface="Calibri"/>
+              </a:rPr>
+              <a:t>LITERATURE BASIS</a:t>
+            </a:r>
+          </a:p>
+        </p:txBody>
+      </p:sp>
+      <p:sp>
+        <p:nvSpPr>
+          <p:cNvPr id="16" name="TextBox 15"/>
+          <p:cNvSpPr txBox="1"/>
+          <p:nvPr/>
+        </p:nvSpPr>
+        <p:spPr>
+          <a:xfrm>
+            <a:off x="868680" y="5440680"/>
+            <a:ext cx="4617720" cy="1005840"/>
+          </a:xfrm>
+          <a:prstGeom prst="rect">
+            <a:avLst/>
+          </a:prstGeom>
+          <a:noFill/>
+        </p:spPr>
+        <p:txBody>
+          <a:bodyPr wrap="square" lIns="0" rIns="0" tIns="0" bIns="0">
+            <a:spAutoFit/>
+          </a:bodyPr>
+          <a:lstStyle/>
+          <a:p>
+            <a:pPr>
+              <a:spcAft>
+                <a:spcPts val="600"/>
+              </a:spcAft>
+            </a:pPr>
+            <a:r>
+              <a:rPr sz="1100" b="1">
+                <a:solidFill>
+                  <a:srgbClr val="1E2761"/>
+                </a:solidFill>
+                <a:latin typeface="Calibri"/>
+              </a:rPr>
+              <a:t>Ross, Gordon &amp; Bagnell (2011), </a:t>
+            </a:r>
+            <a:r>
+              <a:rPr sz="1100" b="0">
+                <a:solidFill>
+                  <a:srgbClr val="5B5F6E"/>
+                </a:solidFill>
+                <a:latin typeface="Calibri"/>
+              </a:rPr>
+              <a:t>“A Reduction of Imitation Learning and Structured Prediction to No-Regret Online Learning” (AISTATS) — a bound driven by the per-step error rate and silent on the environment's own noise, which is the gap this sweep measures.</a:t>
+            </a:r>
+          </a:p>
+        </p:txBody>
+      </p:sp>
+      <p:sp>
+        <p:nvSpPr>
+          <p:cNvPr id="17" name="Rectangle 16"/>
+          <p:cNvSpPr/>
+          <p:nvPr/>
+        </p:nvSpPr>
+        <p:spPr>
+          <a:xfrm>
+            <a:off x="5943600" y="1417320"/>
+            <a:ext cx="292608" cy="292608"/>
+          </a:xfrm>
+          <a:prstGeom prst="rect">
+            <a:avLst/>
+          </a:prstGeom>
+          <a:solidFill>
+            <a:srgbClr val="1E2761"/>
+          </a:solidFill>
+          <a:ln>
+            <a:noFill/>
+          </a:ln>
+        </p:spPr>
+        <p:style>
+          <a:lnRef idx="1">
+            <a:schemeClr val="accent1"/>
+          </a:lnRef>
+          <a:fillRef idx="3">
+            <a:schemeClr val="accent1"/>
+          </a:fillRef>
+          <a:effectRef idx="2">
+            <a:schemeClr val="accent1"/>
+          </a:effectRef>
+          <a:fontRef idx="minor">
+            <a:schemeClr val="lt1"/>
+          </a:fontRef>
+        </p:style>
+        <p:txBody>
+          <a:bodyPr rtlCol="0" anchor="ctr"/>
+          <a:lstStyle/>
+          <a:p/>
+        </p:txBody>
+      </p:sp>
+      <p:sp>
+        <p:nvSpPr>
+          <p:cNvPr id="18" name="TextBox 17"/>
+          <p:cNvSpPr txBox="1"/>
+          <p:nvPr/>
+        </p:nvSpPr>
+        <p:spPr>
+          <a:xfrm>
+            <a:off x="6355080" y="1389888"/>
+            <a:ext cx="5349240" cy="347472"/>
+          </a:xfrm>
+          <a:prstGeom prst="rect">
+            <a:avLst/>
+          </a:prstGeom>
+          <a:noFill/>
+        </p:spPr>
+        <p:txBody>
+          <a:bodyPr wrap="square" lIns="0" rIns="0" tIns="0" bIns="0">
+            <a:spAutoFit/>
+          </a:bodyPr>
+          <a:lstStyle/>
+          <a:p>
+            <a:pPr>
+              <a:spcAft>
+                <a:spcPts val="200"/>
+              </a:spcAft>
+            </a:pPr>
+            <a:r>
+              <a:rPr sz="1500" b="1">
+                <a:solidFill>
+                  <a:srgbClr val="1E2761"/>
+                </a:solidFill>
+                <a:latin typeface="Calibri"/>
+              </a:rPr>
+              <a:t>KEY RESULTS</a:t>
+            </a:r>
+          </a:p>
+        </p:txBody>
+      </p:sp>
+      <p:graphicFrame>
+        <p:nvGraphicFramePr>
+          <p:cNvPr id="19" name="Table 18"/>
+          <p:cNvGraphicFramePr>
+            <a:graphicFrameLocks noGrp="1"/>
+          </p:cNvGraphicFramePr>
+          <p:nvPr/>
+        </p:nvGraphicFramePr>
+        <p:xfrm>
+          <a:off x="5943600" y="1874519"/>
+          <a:ext cx="5760720" cy="1920240"/>
+        </p:xfrm>
+        <a:graphic>
+          <a:graphicData uri="http://schemas.openxmlformats.org/drawingml/2006/table">
+            <a:tbl>
+              <a:tblPr firstRow="1" bandRow="1">
+                <a:tableStyleId>{5C22544A-7EE6-4342-B048-85BDC9FD1C3A}</a:tableStyleId>
+              </a:tblPr>
+              <a:tblGrid>
+                <a:gridCol w="3200400"/>
+                <a:gridCol w="1463040"/>
+                <a:gridCol w="1097280"/>
+              </a:tblGrid>
+              <a:tr h="274320">
+                <a:tc>
+                  <a:txBody>
+                    <a:bodyPr/>
+                    <a:lstStyle/>
+                    <a:p>
+                      <a:r>
+                        <a:rPr sz="1100" b="1">
+                          <a:solidFill>
+                            <a:srgbClr val="FFFFFF"/>
+                          </a:solidFill>
+                          <a:latin typeface="Calibri"/>
+                        </a:rPr>
+                        <a:t>Metric</a:t>
+                      </a:r>
+                    </a:p>
+                  </a:txBody>
+                  <a:tcPr>
+                    <a:solidFill>
+                      <a:srgbClr val="1E2761"/>
+                    </a:solidFill>
+                  </a:tcPr>
+                </a:tc>
+                <a:tc>
+                  <a:txBody>
+                    <a:bodyPr/>
+                    <a:lstStyle/>
+                    <a:p>
+                      <a:r>
+                        <a:rPr sz="1100" b="1">
+                          <a:solidFill>
+                            <a:srgbClr val="FFFFFF"/>
+                          </a:solidFill>
+                          <a:latin typeface="Calibri"/>
+                        </a:rPr>
+                        <a:t>Value</a:t>
+                      </a:r>
+                    </a:p>
+                  </a:txBody>
+                  <a:tcPr>
+                    <a:solidFill>
+                      <a:srgbClr val="1E2761"/>
+                    </a:solidFill>
+                  </a:tcPr>
+                </a:tc>
+                <a:tc>
+                  <a:txBody>
+                    <a:bodyPr/>
+                    <a:lstStyle/>
+                    <a:p>
+                      <a:r>
+                        <a:rPr sz="1100" b="1">
+                          <a:solidFill>
+                            <a:srgbClr val="FFFFFF"/>
+                          </a:solidFill>
+                          <a:latin typeface="Calibri"/>
+                        </a:rPr>
+                        <a:t/>
+                      </a:r>
+                    </a:p>
+                  </a:txBody>
+                  <a:tcPr>
+                    <a:solidFill>
+                      <a:srgbClr val="1E2761"/>
+                    </a:solidFill>
+                  </a:tcPr>
+                </a:tc>
+              </a:tr>
+              <a:tr h="274320">
+                <a:tc>
+                  <a:txBody>
+                    <a:bodyPr/>
+                    <a:lstStyle/>
+                    <a:p>
+                      <a:r>
+                        <a:rPr sz="1100">
+                          <a:solidFill>
+                            <a:srgbClr val="1E2761"/>
+                          </a:solidFill>
+                          <a:latin typeface="Calibri"/>
+                        </a:rPr>
+                        <a:t>Entropy swept</a:t>
+                      </a:r>
+                    </a:p>
+                  </a:txBody>
+                  <a:tcPr>
+                    <a:solidFill>
+                      <a:srgbClr val="FFFFFF"/>
+                    </a:solidFill>
+                  </a:tcPr>
+                </a:tc>
+                <a:tc>
+                  <a:txBody>
+                    <a:bodyPr/>
+                    <a:lstStyle/>
+                    <a:p>
+                      <a:r>
+                        <a:rPr sz="1100">
+                          <a:solidFill>
+                            <a:srgbClr val="5B5F6E"/>
+                          </a:solidFill>
+                          <a:latin typeface="Calibri"/>
+                        </a:rPr>
+                        <a:t>0.98 → 0.19 bits</a:t>
+                      </a:r>
+                    </a:p>
+                  </a:txBody>
+                  <a:tcPr>
+                    <a:solidFill>
+                      <a:srgbClr val="FFFFFF"/>
+                    </a:solidFill>
+                  </a:tcPr>
+                </a:tc>
+                <a:tc>
+                  <a:txBody>
+                    <a:bodyPr/>
+                    <a:lstStyle/>
+                    <a:p>
+                      <a:pPr algn="ctr"/>
+                      <a:r>
+                        <a:rPr sz="1100" b="1">
+                          <a:solidFill>
+                            <a:srgbClr val="5B5F6E"/>
+                          </a:solidFill>
+                          <a:latin typeface="Calibri"/>
+                        </a:rPr>
+                        <a:t>—</a:t>
+                      </a:r>
+                    </a:p>
+                  </a:txBody>
+                  <a:tcPr>
+                    <a:solidFill>
+                      <a:srgbClr val="FFFFFF"/>
+                    </a:solidFill>
+                  </a:tcPr>
+                </a:tc>
+              </a:tr>
+              <a:tr h="274320">
+                <a:tc>
+                  <a:txBody>
+                    <a:bodyPr/>
+                    <a:lstStyle/>
+                    <a:p>
+                      <a:r>
+                        <a:rPr sz="1100">
+                          <a:solidFill>
+                            <a:srgbClr val="1E2761"/>
+                          </a:solidFill>
+                          <a:latin typeface="Calibri"/>
+                        </a:rPr>
+                        <a:t>Error / noise ratio R</a:t>
+                      </a:r>
+                    </a:p>
+                  </a:txBody>
+                  <a:tcPr>
+                    <a:solidFill>
+                      <a:srgbClr val="F7F8FC"/>
+                    </a:solidFill>
+                  </a:tcPr>
+                </a:tc>
+                <a:tc>
+                  <a:txBody>
+                    <a:bodyPr/>
+                    <a:lstStyle/>
+                    <a:p>
+                      <a:r>
+                        <a:rPr sz="1100">
+                          <a:solidFill>
+                            <a:srgbClr val="5B5F6E"/>
+                          </a:solidFill>
+                          <a:latin typeface="Calibri"/>
+                        </a:rPr>
+                        <a:t>9% → 85%</a:t>
+                      </a:r>
+                    </a:p>
+                  </a:txBody>
+                  <a:tcPr>
+                    <a:solidFill>
+                      <a:srgbClr val="F7F8FC"/>
+                    </a:solidFill>
+                  </a:tcPr>
+                </a:tc>
+                <a:tc>
+                  <a:txBody>
+                    <a:bodyPr/>
+                    <a:lstStyle/>
+                    <a:p>
+                      <a:pPr algn="ctr"/>
+                      <a:r>
+                        <a:rPr sz="1100" b="1">
+                          <a:solidFill>
+                            <a:srgbClr val="5B5F6E"/>
+                          </a:solidFill>
+                          <a:latin typeface="Calibri"/>
+                        </a:rPr>
+                        <a:t>—</a:t>
+                      </a:r>
+                    </a:p>
+                  </a:txBody>
+                  <a:tcPr>
+                    <a:solidFill>
+                      <a:srgbClr val="F7F8FC"/>
+                    </a:solidFill>
+                  </a:tcPr>
+                </a:tc>
+              </a:tr>
+              <a:tr h="274320">
+                <a:tc>
+                  <a:txBody>
+                    <a:bodyPr/>
+                    <a:lstStyle/>
+                    <a:p>
+                      <a:r>
+                        <a:rPr sz="1100">
+                          <a:solidFill>
+                            <a:srgbClr val="1E2761"/>
+                          </a:solidFill>
+                          <a:latin typeface="Calibri"/>
+                        </a:rPr>
+                        <a:t>Amplification</a:t>
+                      </a:r>
+                    </a:p>
+                  </a:txBody>
+                  <a:tcPr>
+                    <a:solidFill>
+                      <a:srgbClr val="FFFFFF"/>
+                    </a:solidFill>
+                  </a:tcPr>
+                </a:tc>
+                <a:tc>
+                  <a:txBody>
+                    <a:bodyPr/>
+                    <a:lstStyle/>
+                    <a:p>
+                      <a:r>
+                        <a:rPr sz="1100">
+                          <a:solidFill>
+                            <a:srgbClr val="5B5F6E"/>
+                          </a:solidFill>
+                          <a:latin typeface="Calibri"/>
+                        </a:rPr>
+                        <a:t>1.02x → 1.67x</a:t>
+                      </a:r>
+                    </a:p>
+                  </a:txBody>
+                  <a:tcPr>
+                    <a:solidFill>
+                      <a:srgbClr val="FFFFFF"/>
+                    </a:solidFill>
+                  </a:tcPr>
+                </a:tc>
+                <a:tc>
+                  <a:txBody>
+                    <a:bodyPr/>
+                    <a:lstStyle/>
+                    <a:p>
+                      <a:pPr algn="ctr"/>
+                      <a:r>
+                        <a:rPr sz="1100" b="1">
+                          <a:solidFill>
+                            <a:srgbClr val="5B5F6E"/>
+                          </a:solidFill>
+                          <a:latin typeface="Calibri"/>
+                        </a:rPr>
+                        <a:t>—</a:t>
+                      </a:r>
+                    </a:p>
+                  </a:txBody>
+                  <a:tcPr>
+                    <a:solidFill>
+                      <a:srgbClr val="FFFFFF"/>
+                    </a:solidFill>
+                  </a:tcPr>
+                </a:tc>
+              </a:tr>
+              <a:tr h="274320">
+                <a:tc>
+                  <a:txBody>
+                    <a:bodyPr/>
+                    <a:lstStyle/>
+                    <a:p>
+                      <a:r>
+                        <a:rPr sz="1100">
+                          <a:solidFill>
+                            <a:srgbClr val="1E2761"/>
+                          </a:solidFill>
+                          <a:latin typeface="Calibri"/>
+                        </a:rPr>
+                        <a:t>  Spearman vs entropy</a:t>
+                      </a:r>
+                    </a:p>
+                  </a:txBody>
+                  <a:tcPr>
+                    <a:solidFill>
+                      <a:srgbClr val="F7F8FC"/>
+                    </a:solidFill>
+                  </a:tcPr>
+                </a:tc>
+                <a:tc>
+                  <a:txBody>
+                    <a:bodyPr/>
+                    <a:lstStyle/>
+                    <a:p>
+                      <a:r>
+                        <a:rPr sz="1100">
+                          <a:solidFill>
+                            <a:srgbClr val="5B5F6E"/>
+                          </a:solidFill>
+                          <a:latin typeface="Calibri"/>
+                        </a:rPr>
+                        <a:t>-1.00</a:t>
+                      </a:r>
+                    </a:p>
+                  </a:txBody>
+                  <a:tcPr>
+                    <a:solidFill>
+                      <a:srgbClr val="F7F8FC"/>
+                    </a:solidFill>
+                  </a:tcPr>
+                </a:tc>
+                <a:tc>
+                  <a:txBody>
+                    <a:bodyPr/>
+                    <a:lstStyle/>
+                    <a:p>
+                      <a:pPr algn="ctr"/>
+                      <a:r>
+                        <a:rPr sz="1100" b="1">
+                          <a:solidFill>
+                            <a:srgbClr val="1E7A4D"/>
+                          </a:solidFill>
+                          <a:latin typeface="Calibri"/>
+                        </a:rPr>
+                        <a:t>PASS</a:t>
+                      </a:r>
+                    </a:p>
+                  </a:txBody>
+                  <a:tcPr>
+                    <a:solidFill>
+                      <a:srgbClr val="F7F8FC"/>
+                    </a:solidFill>
+                  </a:tcPr>
+                </a:tc>
+              </a:tr>
+              <a:tr h="274320">
+                <a:tc>
+                  <a:txBody>
+                    <a:bodyPr/>
+                    <a:lstStyle/>
+                    <a:p>
+                      <a:r>
+                        <a:rPr sz="1100">
+                          <a:solidFill>
+                            <a:srgbClr val="1E2761"/>
+                          </a:solidFill>
+                          <a:latin typeface="Calibri"/>
+                        </a:rPr>
+                        <a:t>State drift, Spearman</a:t>
+                      </a:r>
+                    </a:p>
+                  </a:txBody>
+                  <a:tcPr>
+                    <a:solidFill>
+                      <a:srgbClr val="FFFFFF"/>
+                    </a:solidFill>
+                  </a:tcPr>
+                </a:tc>
+                <a:tc>
+                  <a:txBody>
+                    <a:bodyPr/>
+                    <a:lstStyle/>
+                    <a:p>
+                      <a:r>
+                        <a:rPr sz="1100">
+                          <a:solidFill>
+                            <a:srgbClr val="5B5F6E"/>
+                          </a:solidFill>
+                          <a:latin typeface="Calibri"/>
+                        </a:rPr>
+                        <a:t>-1.00</a:t>
+                      </a:r>
+                    </a:p>
+                  </a:txBody>
+                  <a:tcPr>
+                    <a:solidFill>
+                      <a:srgbClr val="FFFFFF"/>
+                    </a:solidFill>
+                  </a:tcPr>
+                </a:tc>
+                <a:tc>
+                  <a:txBody>
+                    <a:bodyPr/>
+                    <a:lstStyle/>
+                    <a:p>
+                      <a:pPr algn="ctr"/>
+                      <a:r>
+                        <a:rPr sz="1100" b="1">
+                          <a:solidFill>
+                            <a:srgbClr val="1E7A4D"/>
+                          </a:solidFill>
+                          <a:latin typeface="Calibri"/>
+                        </a:rPr>
+                        <a:t>PASS</a:t>
+                      </a:r>
+                    </a:p>
+                  </a:txBody>
+                  <a:tcPr>
+                    <a:solidFill>
+                      <a:srgbClr val="FFFFFF"/>
+                    </a:solidFill>
+                  </a:tcPr>
+                </a:tc>
+              </a:tr>
+              <a:tr h="274320">
+                <a:tc>
+                  <a:txBody>
+                    <a:bodyPr/>
+                    <a:lstStyle/>
+                    <a:p>
+                      <a:r>
+                        <a:rPr sz="1100">
+                          <a:solidFill>
+                            <a:srgbClr val="1E2761"/>
+                          </a:solidFill>
+                          <a:latin typeface="Calibri"/>
+                        </a:rPr>
+                        <a:t>Shares equivalent</a:t>
+                      </a:r>
+                    </a:p>
+                  </a:txBody>
+                  <a:tcPr>
+                    <a:solidFill>
+                      <a:srgbClr val="F7F8FC"/>
+                    </a:solidFill>
+                  </a:tcPr>
+                </a:tc>
+                <a:tc>
+                  <a:txBody>
+                    <a:bodyPr/>
+                    <a:lstStyle/>
+                    <a:p>
+                      <a:r>
+                        <a:rPr sz="1100">
+                          <a:solidFill>
+                            <a:srgbClr val="5B5F6E"/>
+                          </a:solidFill>
+                          <a:latin typeface="Calibri"/>
+                        </a:rPr>
+                        <a:t>30 of 30</a:t>
+                      </a:r>
+                    </a:p>
+                  </a:txBody>
+                  <a:tcPr>
+                    <a:solidFill>
+                      <a:srgbClr val="F7F8FC"/>
+                    </a:solidFill>
+                  </a:tcPr>
+                </a:tc>
+                <a:tc>
+                  <a:txBody>
+                    <a:bodyPr/>
+                    <a:lstStyle/>
+                    <a:p>
+                      <a:pPr algn="ctr"/>
+                      <a:r>
+                        <a:rPr sz="1100" b="1">
+                          <a:solidFill>
+                            <a:srgbClr val="5B5F6E"/>
+                          </a:solidFill>
+                          <a:latin typeface="Calibri"/>
+                        </a:rPr>
+                        <a:t>—</a:t>
+                      </a:r>
+                    </a:p>
+                  </a:txBody>
+                  <a:tcPr>
+                    <a:solidFill>
+                      <a:srgbClr val="F7F8FC"/>
+                    </a:solidFill>
+                  </a:tcPr>
+                </a:tc>
+              </a:tr>
+            </a:tbl>
+          </a:graphicData>
+        </a:graphic>
+      </p:graphicFrame>
+      <p:sp>
+        <p:nvSpPr>
+          <p:cNvPr id="20" name="Rectangle 19"/>
+          <p:cNvSpPr/>
+          <p:nvPr/>
+        </p:nvSpPr>
+        <p:spPr>
+          <a:xfrm>
+            <a:off x="5943600" y="4023360"/>
+            <a:ext cx="292608" cy="292608"/>
+          </a:xfrm>
+          <a:prstGeom prst="rect">
+            <a:avLst/>
+          </a:prstGeom>
+          <a:solidFill>
+            <a:srgbClr val="1E2761"/>
+          </a:solidFill>
+          <a:ln>
+            <a:noFill/>
+          </a:ln>
+        </p:spPr>
+        <p:style>
+          <a:lnRef idx="1">
+            <a:schemeClr val="accent1"/>
+          </a:lnRef>
+          <a:fillRef idx="3">
+            <a:schemeClr val="accent1"/>
+          </a:fillRef>
+          <a:effectRef idx="2">
+            <a:schemeClr val="accent1"/>
+          </a:effectRef>
+          <a:fontRef idx="minor">
+            <a:schemeClr val="lt1"/>
+          </a:fontRef>
+        </p:style>
+        <p:txBody>
+          <a:bodyPr rtlCol="0" anchor="ctr"/>
+          <a:lstStyle/>
+          <a:p/>
+        </p:txBody>
+      </p:sp>
+      <p:sp>
+        <p:nvSpPr>
+          <p:cNvPr id="21" name="TextBox 20"/>
+          <p:cNvSpPr txBox="1"/>
+          <p:nvPr/>
+        </p:nvSpPr>
+        <p:spPr>
+          <a:xfrm>
+            <a:off x="6355080" y="3995928"/>
+            <a:ext cx="5349240" cy="347472"/>
+          </a:xfrm>
+          <a:prstGeom prst="rect">
+            <a:avLst/>
+          </a:prstGeom>
+          <a:noFill/>
+        </p:spPr>
+        <p:txBody>
+          <a:bodyPr wrap="square" lIns="0" rIns="0" tIns="0" bIns="0">
+            <a:spAutoFit/>
+          </a:bodyPr>
+          <a:lstStyle/>
+          <a:p>
+            <a:pPr>
+              <a:spcAft>
+                <a:spcPts val="200"/>
+              </a:spcAft>
+            </a:pPr>
+            <a:r>
+              <a:rPr sz="1500" b="1">
+                <a:solidFill>
+                  <a:srgbClr val="1E2761"/>
+                </a:solidFill>
+                <a:latin typeface="Calibri"/>
+              </a:rPr>
+              <a:t>RESEARCH QUESTION</a:t>
+            </a:r>
+          </a:p>
+        </p:txBody>
+      </p:sp>
+      <p:sp>
+        <p:nvSpPr>
+          <p:cNvPr id="22" name="Rectangle 21"/>
+          <p:cNvSpPr/>
+          <p:nvPr/>
+        </p:nvSpPr>
+        <p:spPr>
+          <a:xfrm>
+            <a:off x="5943600" y="4434840"/>
+            <a:ext cx="5760720" cy="1965960"/>
+          </a:xfrm>
+          <a:prstGeom prst="rect">
+            <a:avLst/>
+          </a:prstGeom>
+          <a:solidFill>
+            <a:srgbClr val="F7F8FC"/>
+          </a:solidFill>
+          <a:ln>
+            <a:noFill/>
+          </a:ln>
+        </p:spPr>
+        <p:style>
+          <a:lnRef idx="1">
+            <a:schemeClr val="accent1"/>
+          </a:lnRef>
+          <a:fillRef idx="3">
+            <a:schemeClr val="accent1"/>
+          </a:fillRef>
+          <a:effectRef idx="2">
+            <a:schemeClr val="accent1"/>
+          </a:effectRef>
+          <a:fontRef idx="minor">
+            <a:schemeClr val="lt1"/>
+          </a:fontRef>
+        </p:style>
+        <p:txBody>
+          <a:bodyPr rtlCol="0" anchor="ctr"/>
+          <a:lstStyle/>
+          <a:p/>
+        </p:txBody>
+      </p:sp>
+      <p:sp>
+        <p:nvSpPr>
+          <p:cNvPr id="23" name="TextBox 22"/>
+          <p:cNvSpPr txBox="1"/>
+          <p:nvPr/>
+        </p:nvSpPr>
+        <p:spPr>
+          <a:xfrm>
+            <a:off x="6217920" y="4572000"/>
+            <a:ext cx="5212080" cy="1737360"/>
+          </a:xfrm>
+          <a:prstGeom prst="rect">
+            <a:avLst/>
+          </a:prstGeom>
+          <a:noFill/>
+        </p:spPr>
+        <p:txBody>
+          <a:bodyPr wrap="square" lIns="0" rIns="0" tIns="0" bIns="0">
+            <a:spAutoFit/>
+          </a:bodyPr>
+          <a:lstStyle/>
+          <a:p>
+            <a:pPr>
+              <a:spcAft>
+                <a:spcPts val="500"/>
+              </a:spcAft>
+            </a:pPr>
+            <a:r>
+              <a:rPr sz="1000" b="0">
+                <a:solidFill>
+                  <a:srgbClr val="5B5F6E"/>
+                </a:solidFill>
+                <a:latin typeface="Calibri"/>
+              </a:rPr>
+              <a:t>Does the ratio of systematic policy error to intrinsic teacher stochasticity govern whether one-step imitation error compounds into trajectory divergence?</a:t>
+            </a:r>
+          </a:p>
+          <a:p>
+            <a:pPr>
+              <a:spcAft>
+                <a:spcPts val="500"/>
+              </a:spcAft>
+            </a:pPr>
+            <a:r>
+              <a:rPr sz="1000" b="1">
+                <a:solidFill>
+                  <a:srgbClr val="1E2761"/>
+                </a:solidFill>
+                <a:latin typeface="Calibri"/>
+              </a:rPr>
+              <a:t>Finding: </a:t>
+            </a:r>
+            <a:r>
+              <a:rPr sz="1000" b="0">
+                <a:solidFill>
+                  <a:srgbClr val="5B5F6E"/>
+                </a:solidFill>
+                <a:latin typeface="Calibri"/>
+              </a:rPr>
+              <a:t>Yes for the amplification, exactly. As entropy falls from 0.98 to 0.19 bits with the market level held fixed, R rises 9% → 85% and the amplification rises 1.02x → 1.67x — Spearman -1.00, with the excess growing 160-fold and every interval excluding zero. State drift is equally monotone at -1.00.</a:t>
+            </a:r>
+          </a:p>
+          <a:p>
+            <a:pPr>
+              <a:spcAft>
+                <a:spcPts val="500"/>
+              </a:spcAft>
+            </a:pPr>
+            <a:r>
+              <a:rPr sz="1000" b="1">
+                <a:solidFill>
+                  <a:srgbClr val="1E2761"/>
+                </a:solidFill>
+                <a:latin typeface="Calibri"/>
+              </a:rPr>
+              <a:t>Caveat: </a:t>
+            </a:r>
+            <a:r>
+              <a:rPr sz="1000" b="0">
+                <a:solidFill>
+                  <a:srgbClr val="5B5F6E"/>
+                </a:solidFill>
+                <a:latin typeface="Calibri"/>
+              </a:rPr>
+              <a:t>The fourth link is not reached. Behavioural divergence peaks at 2.49 pp against a ±5 pp margin, and all 30 class-to-tier shares return equivalent in every regime including the sharpest. Teacher stochasticity governs amplification and does not, alone, carry it through to material behaviour — what remains between them is the environment, which 9c ablates. Two corrections this sweep forced: criterion 3's absolute threshold exceeded the entire available range at high entropy, and a fixed architecture would have read 'this model stopped fitting' as 'the environment amplifies error'.</a:t>
             </a:r>
           </a:p>
         </p:txBody>

--- a/project_tracking.pptx
+++ b/project_tracking.pptx
@@ -21,6 +21,7 @@
     <p:sldId id="269" r:id="rId21"/>
     <p:sldId id="270" r:id="rId22"/>
     <p:sldId id="271" r:id="rId23"/>
+    <p:sldId id="272" r:id="rId24"/>
   </p:sldIdLst>
   <p:sldSz cx="12191969" cy="6858000" type="screen4x3"/>
   <p:notesSz cx="6858000" cy="9144000"/>
@@ -15582,6 +15583,1607 @@
                 <a:latin typeface="Calibri"/>
               </a:rPr>
               <a:t>The fourth link is not reached. Behavioural divergence peaks at 2.49 pp against a ±5 pp margin, and all 30 class-to-tier shares return equivalent in every regime including the sharpest. Teacher stochasticity governs amplification and does not, alone, carry it through to material behaviour — what remains between them is the environment, which 9c ablates. Two corrections this sweep forced: criterion 3's absolute threshold exceeded the entire available range at high entropy, and a fixed architecture would have read 'this model stopped fitting' as 'the environment amplifies error'.</a:t>
+            </a:r>
+          </a:p>
+        </p:txBody>
+      </p:sp>
+      <p:sp>
+        <p:nvSpPr>
+          <p:cNvPr id="24" name="TextBox 23"/>
+          <p:cNvSpPr txBox="1"/>
+          <p:nvPr/>
+        </p:nvSpPr>
+        <p:spPr>
+          <a:xfrm>
+            <a:off x="457200" y="6446520"/>
+            <a:ext cx="11247120" cy="274320"/>
+          </a:xfrm>
+          <a:prstGeom prst="rect">
+            <a:avLst/>
+          </a:prstGeom>
+          <a:noFill/>
+        </p:spPr>
+        <p:txBody>
+          <a:bodyPr wrap="square" lIns="0" rIns="0" tIns="0" bIns="0">
+            <a:spAutoFit/>
+          </a:bodyPr>
+          <a:lstStyle/>
+          <a:p>
+            <a:pPr>
+              <a:spcAft>
+                <a:spcPts val="200"/>
+              </a:spcAft>
+            </a:pPr>
+            <a:r>
+              <a:rPr sz="950" b="0">
+                <a:solidFill>
+                  <a:srgbClr val="5B5F6E"/>
+                </a:solidFill>
+                <a:latin typeface="Calibri"/>
+              </a:rPr>
+              <a:t>Generated automatically at phase completion  ·  Phase Completion Deliverable  ·  market-sim project</a:t>
+            </a:r>
+          </a:p>
+        </p:txBody>
+      </p:sp>
+    </p:spTree>
+  </p:cSld>
+  <p:clrMapOvr>
+    <a:masterClrMapping/>
+  </p:clrMapOvr>
+</p:sld>
+</file>
+
+<file path=ppt/slides/slide17.xml><?xml version="1.0" encoding="utf-8"?>
+<p:sld xmlns:a="http://schemas.openxmlformats.org/drawingml/2006/main" xmlns:p="http://schemas.openxmlformats.org/presentationml/2006/main" xmlns:r="http://schemas.openxmlformats.org/officeDocument/2006/relationships">
+  <p:cSld>
+    <p:spTree>
+      <p:nvGrpSpPr>
+        <p:cNvPr id="1" name=""/>
+        <p:cNvGrpSpPr/>
+        <p:nvPr/>
+      </p:nvGrpSpPr>
+      <p:grpSpPr/>
+      <p:sp>
+        <p:nvSpPr>
+          <p:cNvPr id="2" name="TextBox 1"/>
+          <p:cNvSpPr txBox="1"/>
+          <p:nvPr/>
+        </p:nvSpPr>
+        <p:spPr>
+          <a:xfrm>
+            <a:off x="457200" y="320040"/>
+            <a:ext cx="8229600" cy="548640"/>
+          </a:xfrm>
+          <a:prstGeom prst="rect">
+            <a:avLst/>
+          </a:prstGeom>
+          <a:noFill/>
+        </p:spPr>
+        <p:txBody>
+          <a:bodyPr wrap="square" lIns="0" rIns="0" tIns="0" bIns="0">
+            <a:spAutoFit/>
+          </a:bodyPr>
+          <a:lstStyle/>
+          <a:p>
+            <a:pPr>
+              <a:spcAft>
+                <a:spcPts val="200"/>
+              </a:spcAft>
+            </a:pPr>
+            <a:r>
+              <a:rPr sz="3200" b="1">
+                <a:solidFill>
+                  <a:srgbClr val="1E2761"/>
+                </a:solidFill>
+                <a:latin typeface="Cambria"/>
+              </a:rPr>
+              <a:t>Phase 9 — Stabilizer Ablation — 9c</a:t>
+            </a:r>
+          </a:p>
+        </p:txBody>
+      </p:sp>
+      <p:sp>
+        <p:nvSpPr>
+          <p:cNvPr id="3" name="TextBox 2"/>
+          <p:cNvSpPr txBox="1"/>
+          <p:nvPr/>
+        </p:nvSpPr>
+        <p:spPr>
+          <a:xfrm>
+            <a:off x="457200" y="868680"/>
+            <a:ext cx="8229600" cy="274320"/>
+          </a:xfrm>
+          <a:prstGeom prst="rect">
+            <a:avLst/>
+          </a:prstGeom>
+          <a:noFill/>
+        </p:spPr>
+        <p:txBody>
+          <a:bodyPr wrap="square" lIns="0" rIns="0" tIns="0" bIns="0">
+            <a:spAutoFit/>
+          </a:bodyPr>
+          <a:lstStyle/>
+          <a:p>
+            <a:pPr>
+              <a:spcAft>
+                <a:spcPts val="200"/>
+              </a:spcAft>
+            </a:pPr>
+            <a:r>
+              <a:rPr sz="1200" b="0">
+                <a:solidFill>
+                  <a:srgbClr val="5B5F6E"/>
+                </a:solidFill>
+                <a:latin typeface="Calibri"/>
+              </a:rPr>
+              <a:t>Which environment characteristic carries the divergence?  ·  git tag: phase9c-stabilizers  ·  5 cells x 30 deployment seeds</a:t>
+            </a:r>
+          </a:p>
+        </p:txBody>
+      </p:sp>
+      <p:sp>
+        <p:nvSpPr>
+          <p:cNvPr id="4" name="Rounded Rectangle 3"/>
+          <p:cNvSpPr/>
+          <p:nvPr/>
+        </p:nvSpPr>
+        <p:spPr>
+          <a:xfrm>
+            <a:off x="9464040" y="365760"/>
+            <a:ext cx="2240280" cy="384048"/>
+          </a:xfrm>
+          <a:prstGeom prst="roundRect">
+            <a:avLst/>
+          </a:prstGeom>
+          <a:solidFill>
+            <a:srgbClr val="C9922E"/>
+          </a:solidFill>
+          <a:ln>
+            <a:noFill/>
+          </a:ln>
+        </p:spPr>
+        <p:style>
+          <a:lnRef idx="1">
+            <a:schemeClr val="accent1"/>
+          </a:lnRef>
+          <a:fillRef idx="3">
+            <a:schemeClr val="accent1"/>
+          </a:fillRef>
+          <a:effectRef idx="2">
+            <a:schemeClr val="accent1"/>
+          </a:effectRef>
+          <a:fontRef idx="minor">
+            <a:schemeClr val="lt1"/>
+          </a:fontRef>
+        </p:style>
+        <p:txBody>
+          <a:bodyPr rtlCol="0" anchor="ctr"/>
+          <a:lstStyle/>
+          <a:p>
+            <a:pPr algn="ctr"/>
+            <a:r>
+              <a:rPr sz="1050" b="1">
+                <a:solidFill>
+                  <a:srgbClr val="FFFFFF"/>
+                </a:solidFill>
+                <a:latin typeface="Calibri"/>
+              </a:rPr>
+              <a:t>FRAMING REVERSED</a:t>
+            </a:r>
+          </a:p>
+        </p:txBody>
+      </p:sp>
+      <p:sp>
+        <p:nvSpPr>
+          <p:cNvPr id="5" name="Rectangle 4"/>
+          <p:cNvSpPr/>
+          <p:nvPr/>
+        </p:nvSpPr>
+        <p:spPr>
+          <a:xfrm>
+            <a:off x="457200" y="1417320"/>
+            <a:ext cx="292608" cy="292608"/>
+          </a:xfrm>
+          <a:prstGeom prst="rect">
+            <a:avLst/>
+          </a:prstGeom>
+          <a:solidFill>
+            <a:srgbClr val="1E2761"/>
+          </a:solidFill>
+          <a:ln>
+            <a:noFill/>
+          </a:ln>
+        </p:spPr>
+        <p:style>
+          <a:lnRef idx="1">
+            <a:schemeClr val="accent1"/>
+          </a:lnRef>
+          <a:fillRef idx="3">
+            <a:schemeClr val="accent1"/>
+          </a:fillRef>
+          <a:effectRef idx="2">
+            <a:schemeClr val="accent1"/>
+          </a:effectRef>
+          <a:fontRef idx="minor">
+            <a:schemeClr val="lt1"/>
+          </a:fontRef>
+        </p:style>
+        <p:txBody>
+          <a:bodyPr rtlCol="0" anchor="ctr"/>
+          <a:lstStyle/>
+          <a:p/>
+        </p:txBody>
+      </p:sp>
+      <p:sp>
+        <p:nvSpPr>
+          <p:cNvPr id="6" name="TextBox 5"/>
+          <p:cNvSpPr txBox="1"/>
+          <p:nvPr/>
+        </p:nvSpPr>
+        <p:spPr>
+          <a:xfrm>
+            <a:off x="868680" y="1389888"/>
+            <a:ext cx="4617720" cy="347472"/>
+          </a:xfrm>
+          <a:prstGeom prst="rect">
+            <a:avLst/>
+          </a:prstGeom>
+          <a:noFill/>
+        </p:spPr>
+        <p:txBody>
+          <a:bodyPr wrap="square" lIns="0" rIns="0" tIns="0" bIns="0">
+            <a:spAutoFit/>
+          </a:bodyPr>
+          <a:lstStyle/>
+          <a:p>
+            <a:pPr>
+              <a:spcAft>
+                <a:spcPts val="200"/>
+              </a:spcAft>
+            </a:pPr>
+            <a:r>
+              <a:rPr sz="1500" b="1">
+                <a:solidFill>
+                  <a:srgbClr val="1E2761"/>
+                </a:solidFill>
+                <a:latin typeface="Calibri"/>
+              </a:rPr>
+              <a:t>AGENTS</a:t>
+            </a:r>
+          </a:p>
+        </p:txBody>
+      </p:sp>
+      <p:sp>
+        <p:nvSpPr>
+          <p:cNvPr id="7" name="TextBox 6"/>
+          <p:cNvSpPr txBox="1"/>
+          <p:nvPr/>
+        </p:nvSpPr>
+        <p:spPr>
+          <a:xfrm>
+            <a:off x="868680" y="1828800"/>
+            <a:ext cx="4617720" cy="566928"/>
+          </a:xfrm>
+          <a:prstGeom prst="rect">
+            <a:avLst/>
+          </a:prstGeom>
+          <a:noFill/>
+        </p:spPr>
+        <p:txBody>
+          <a:bodyPr wrap="square" lIns="0" rIns="0" tIns="0" bIns="0">
+            <a:spAutoFit/>
+          </a:bodyPr>
+          <a:lstStyle/>
+          <a:p>
+            <a:pPr>
+              <a:spcAft>
+                <a:spcPts val="200"/>
+              </a:spcAft>
+            </a:pPr>
+            <a:r>
+              <a:rPr sz="1300" b="1">
+                <a:solidFill>
+                  <a:srgbClr val="1E2761"/>
+                </a:solidFill>
+                <a:latin typeface="Calibri"/>
+              </a:rPr>
+              <a:t>Buyers: </a:t>
+            </a:r>
+            <a:r>
+              <a:rPr sz="1300" b="0">
+                <a:solidFill>
+                  <a:srgbClr val="5B5F6E"/>
+                </a:solidFill>
+                <a:latin typeface="Calibri"/>
+              </a:rPr>
+              <a:t>100 — a distilled policy deployed against the rule</a:t>
+            </a:r>
+          </a:p>
+          <a:p>
+            <a:pPr>
+              <a:spcAft>
+                <a:spcPts val="200"/>
+              </a:spcAft>
+            </a:pPr>
+            <a:r>
+              <a:rPr sz="1300" b="1">
+                <a:solidFill>
+                  <a:srgbClr val="1E2761"/>
+                </a:solidFill>
+                <a:latin typeface="Calibri"/>
+              </a:rPr>
+              <a:t>Sellers: </a:t>
+            </a:r>
+            <a:r>
+              <a:rPr sz="1300" b="0">
+                <a:solidFill>
+                  <a:srgbClr val="5B5F6E"/>
+                </a:solidFill>
+                <a:latin typeface="Calibri"/>
+              </a:rPr>
+              <a:t>5 — Phase 6's market, unchanged in every cell</a:t>
+            </a:r>
+          </a:p>
+        </p:txBody>
+      </p:sp>
+      <p:sp>
+        <p:nvSpPr>
+          <p:cNvPr id="8" name="Rectangle 7"/>
+          <p:cNvSpPr/>
+          <p:nvPr/>
+        </p:nvSpPr>
+        <p:spPr>
+          <a:xfrm>
+            <a:off x="457200" y="2651760"/>
+            <a:ext cx="292608" cy="292608"/>
+          </a:xfrm>
+          <a:prstGeom prst="rect">
+            <a:avLst/>
+          </a:prstGeom>
+          <a:solidFill>
+            <a:srgbClr val="1E2761"/>
+          </a:solidFill>
+          <a:ln>
+            <a:noFill/>
+          </a:ln>
+        </p:spPr>
+        <p:style>
+          <a:lnRef idx="1">
+            <a:schemeClr val="accent1"/>
+          </a:lnRef>
+          <a:fillRef idx="3">
+            <a:schemeClr val="accent1"/>
+          </a:fillRef>
+          <a:effectRef idx="2">
+            <a:schemeClr val="accent1"/>
+          </a:effectRef>
+          <a:fontRef idx="minor">
+            <a:schemeClr val="lt1"/>
+          </a:fontRef>
+        </p:style>
+        <p:txBody>
+          <a:bodyPr rtlCol="0" anchor="ctr"/>
+          <a:lstStyle/>
+          <a:p/>
+        </p:txBody>
+      </p:sp>
+      <p:sp>
+        <p:nvSpPr>
+          <p:cNvPr id="9" name="TextBox 8"/>
+          <p:cNvSpPr txBox="1"/>
+          <p:nvPr/>
+        </p:nvSpPr>
+        <p:spPr>
+          <a:xfrm>
+            <a:off x="868680" y="2624328"/>
+            <a:ext cx="4617720" cy="347472"/>
+          </a:xfrm>
+          <a:prstGeom prst="rect">
+            <a:avLst/>
+          </a:prstGeom>
+          <a:noFill/>
+        </p:spPr>
+        <p:txBody>
+          <a:bodyPr wrap="square" lIns="0" rIns="0" tIns="0" bIns="0">
+            <a:spAutoFit/>
+          </a:bodyPr>
+          <a:lstStyle/>
+          <a:p>
+            <a:pPr>
+              <a:spcAft>
+                <a:spcPts val="200"/>
+              </a:spcAft>
+            </a:pPr>
+            <a:r>
+              <a:rPr sz="1500" b="1">
+                <a:solidFill>
+                  <a:srgbClr val="1E2761"/>
+                </a:solidFill>
+                <a:latin typeface="Calibri"/>
+              </a:rPr>
+              <a:t>ENVIRONMENT &amp; CONTEXT</a:t>
+            </a:r>
+          </a:p>
+        </p:txBody>
+      </p:sp>
+      <p:sp>
+        <p:nvSpPr>
+          <p:cNvPr id="10" name="TextBox 9"/>
+          <p:cNvSpPr txBox="1"/>
+          <p:nvPr/>
+        </p:nvSpPr>
+        <p:spPr>
+          <a:xfrm>
+            <a:off x="868680" y="3063240"/>
+            <a:ext cx="4617720" cy="548640"/>
+          </a:xfrm>
+          <a:prstGeom prst="rect">
+            <a:avLst/>
+          </a:prstGeom>
+          <a:noFill/>
+        </p:spPr>
+        <p:txBody>
+          <a:bodyPr wrap="square" lIns="0" rIns="0" tIns="0" bIns="0">
+            <a:spAutoFit/>
+          </a:bodyPr>
+          <a:lstStyle/>
+          <a:p>
+            <a:pPr>
+              <a:spcAft>
+                <a:spcPts val="200"/>
+              </a:spcAft>
+            </a:pPr>
+            <a:r>
+              <a:rPr sz="1300" b="0">
+                <a:solidFill>
+                  <a:srgbClr val="5B5F6E"/>
+                </a:solidFill>
+                <a:latin typeface="Calibri"/>
+              </a:rPr>
+              <a:t>-  Budget wall removed by raising Poor's budget 3.0 -&gt; 8.0, which</a:t>
+            </a:r>
+          </a:p>
+          <a:p>
+            <a:pPr>
+              <a:spcAft>
+                <a:spcPts val="200"/>
+              </a:spcAft>
+            </a:pPr>
+            <a:r>
+              <a:rPr sz="1300" b="0">
+                <a:solidFill>
+                  <a:srgbClr val="5B5F6E"/>
+                </a:solidFill>
+                <a:latin typeface="Calibri"/>
+              </a:rPr>
+              <a:t>   opens the premium tier: 0% -&gt; 22% of Poor's encounters.</a:t>
+            </a:r>
+          </a:p>
+          <a:p>
+            <a:pPr>
+              <a:spcAft>
+                <a:spcPts val="200"/>
+              </a:spcAft>
+            </a:pPr>
+            <a:r>
+              <a:rPr sz="1300" b="0">
+                <a:solidFill>
+                  <a:srgbClr val="5B5F6E"/>
+                </a:solidFill>
+                <a:latin typeface="Calibri"/>
+              </a:rPr>
+              <a:t>-  Season-long taste removed by redrawing preference every week.</a:t>
+            </a:r>
+          </a:p>
+          <a:p>
+            <a:pPr>
+              <a:spcAft>
+                <a:spcPts val="200"/>
+              </a:spcAft>
+            </a:pPr>
+            <a:r>
+              <a:rPr sz="1300" b="0">
+                <a:solidFill>
+                  <a:srgbClr val="5B5F6E"/>
+                </a:solidFill>
+                <a:latin typeface="Calibri"/>
+              </a:rPr>
+              <a:t>-  One at a time and then together, at the sharpest entropy 9b saw.</a:t>
+            </a:r>
+          </a:p>
+        </p:txBody>
+      </p:sp>
+      <p:sp>
+        <p:nvSpPr>
+          <p:cNvPr id="11" name="Rectangle 10"/>
+          <p:cNvSpPr/>
+          <p:nvPr/>
+        </p:nvSpPr>
+        <p:spPr>
+          <a:xfrm>
+            <a:off x="457200" y="3886200"/>
+            <a:ext cx="292608" cy="292608"/>
+          </a:xfrm>
+          <a:prstGeom prst="rect">
+            <a:avLst/>
+          </a:prstGeom>
+          <a:solidFill>
+            <a:srgbClr val="1E2761"/>
+          </a:solidFill>
+          <a:ln>
+            <a:noFill/>
+          </a:ln>
+        </p:spPr>
+        <p:style>
+          <a:lnRef idx="1">
+            <a:schemeClr val="accent1"/>
+          </a:lnRef>
+          <a:fillRef idx="3">
+            <a:schemeClr val="accent1"/>
+          </a:fillRef>
+          <a:effectRef idx="2">
+            <a:schemeClr val="accent1"/>
+          </a:effectRef>
+          <a:fontRef idx="minor">
+            <a:schemeClr val="lt1"/>
+          </a:fontRef>
+        </p:style>
+        <p:txBody>
+          <a:bodyPr rtlCol="0" anchor="ctr"/>
+          <a:lstStyle/>
+          <a:p/>
+        </p:txBody>
+      </p:sp>
+      <p:sp>
+        <p:nvSpPr>
+          <p:cNvPr id="12" name="TextBox 11"/>
+          <p:cNvSpPr txBox="1"/>
+          <p:nvPr/>
+        </p:nvSpPr>
+        <p:spPr>
+          <a:xfrm>
+            <a:off x="868680" y="3858768"/>
+            <a:ext cx="4617720" cy="347472"/>
+          </a:xfrm>
+          <a:prstGeom prst="rect">
+            <a:avLst/>
+          </a:prstGeom>
+          <a:noFill/>
+        </p:spPr>
+        <p:txBody>
+          <a:bodyPr wrap="square" lIns="0" rIns="0" tIns="0" bIns="0">
+            <a:spAutoFit/>
+          </a:bodyPr>
+          <a:lstStyle/>
+          <a:p>
+            <a:pPr>
+              <a:spcAft>
+                <a:spcPts val="200"/>
+              </a:spcAft>
+            </a:pPr>
+            <a:r>
+              <a:rPr sz="1500" b="1">
+                <a:solidFill>
+                  <a:srgbClr val="1E2761"/>
+                </a:solidFill>
+                <a:latin typeface="Calibri"/>
+              </a:rPr>
+              <a:t>METHOD</a:t>
+            </a:r>
+          </a:p>
+        </p:txBody>
+      </p:sp>
+      <p:sp>
+        <p:nvSpPr>
+          <p:cNvPr id="13" name="TextBox 12"/>
+          <p:cNvSpPr txBox="1"/>
+          <p:nvPr/>
+        </p:nvSpPr>
+        <p:spPr>
+          <a:xfrm>
+            <a:off x="868680" y="4297680"/>
+            <a:ext cx="4617720" cy="594360"/>
+          </a:xfrm>
+          <a:prstGeom prst="rect">
+            <a:avLst/>
+          </a:prstGeom>
+          <a:noFill/>
+        </p:spPr>
+        <p:txBody>
+          <a:bodyPr wrap="square" lIns="0" rIns="0" tIns="0" bIns="0">
+            <a:spAutoFit/>
+          </a:bodyPr>
+          <a:lstStyle/>
+          <a:p>
+            <a:pPr>
+              <a:spcAft>
+                <a:spcPts val="200"/>
+              </a:spcAft>
+            </a:pPr>
+            <a:r>
+              <a:rPr sz="1300" b="0">
+                <a:solidFill>
+                  <a:srgbClr val="5B5F6E"/>
+                </a:solidFill>
+                <a:latin typeface="Calibri"/>
+              </a:rPr>
+              <a:t>Every cell's offset re-solved to hold the purchase level at 0.4594,</a:t>
+            </a:r>
+          </a:p>
+          <a:p>
+            <a:pPr>
+              <a:spcAft>
+                <a:spcPts val="200"/>
+              </a:spcAft>
+            </a:pPr>
+            <a:r>
+              <a:rPr sz="1300" b="0">
+                <a:solidFill>
+                  <a:srgbClr val="5B5F6E"/>
+                </a:solidFill>
+                <a:latin typeface="Calibri"/>
+              </a:rPr>
+              <a:t>so an ablation opens the action space without changing how much</a:t>
+            </a:r>
+          </a:p>
+          <a:p>
+            <a:pPr>
+              <a:spcAft>
+                <a:spcPts val="200"/>
+              </a:spcAft>
+            </a:pPr>
+            <a:r>
+              <a:rPr sz="1300" b="0">
+                <a:solidFill>
+                  <a:srgbClr val="5B5F6E"/>
+                </a:solidFill>
+                <a:latin typeface="Calibri"/>
+              </a:rPr>
+              <a:t>buying happens. Each cell trains up its own capacity ladder to</a:t>
+            </a:r>
+          </a:p>
+          <a:p>
+            <a:pPr>
+              <a:spcAft>
+                <a:spcPts val="200"/>
+              </a:spcAft>
+            </a:pPr>
+            <a:r>
+              <a:rPr sz="1300" b="0">
+                <a:solidFill>
+                  <a:srgbClr val="5B5F6E"/>
+                </a:solidFill>
+                <a:latin typeface="Calibri"/>
+              </a:rPr>
+              <a:t>Gate 9a before it is deployed.</a:t>
+            </a:r>
+          </a:p>
+        </p:txBody>
+      </p:sp>
+      <p:sp>
+        <p:nvSpPr>
+          <p:cNvPr id="14" name="Rectangle 13"/>
+          <p:cNvSpPr/>
+          <p:nvPr/>
+        </p:nvSpPr>
+        <p:spPr>
+          <a:xfrm>
+            <a:off x="457200" y="5029200"/>
+            <a:ext cx="292608" cy="292608"/>
+          </a:xfrm>
+          <a:prstGeom prst="rect">
+            <a:avLst/>
+          </a:prstGeom>
+          <a:solidFill>
+            <a:srgbClr val="1E2761"/>
+          </a:solidFill>
+          <a:ln>
+            <a:noFill/>
+          </a:ln>
+        </p:spPr>
+        <p:style>
+          <a:lnRef idx="1">
+            <a:schemeClr val="accent1"/>
+          </a:lnRef>
+          <a:fillRef idx="3">
+            <a:schemeClr val="accent1"/>
+          </a:fillRef>
+          <a:effectRef idx="2">
+            <a:schemeClr val="accent1"/>
+          </a:effectRef>
+          <a:fontRef idx="minor">
+            <a:schemeClr val="lt1"/>
+          </a:fontRef>
+        </p:style>
+        <p:txBody>
+          <a:bodyPr rtlCol="0" anchor="ctr"/>
+          <a:lstStyle/>
+          <a:p/>
+        </p:txBody>
+      </p:sp>
+      <p:sp>
+        <p:nvSpPr>
+          <p:cNvPr id="15" name="TextBox 14"/>
+          <p:cNvSpPr txBox="1"/>
+          <p:nvPr/>
+        </p:nvSpPr>
+        <p:spPr>
+          <a:xfrm>
+            <a:off x="868680" y="5001768"/>
+            <a:ext cx="4617720" cy="347472"/>
+          </a:xfrm>
+          <a:prstGeom prst="rect">
+            <a:avLst/>
+          </a:prstGeom>
+          <a:noFill/>
+        </p:spPr>
+        <p:txBody>
+          <a:bodyPr wrap="square" lIns="0" rIns="0" tIns="0" bIns="0">
+            <a:spAutoFit/>
+          </a:bodyPr>
+          <a:lstStyle/>
+          <a:p>
+            <a:pPr>
+              <a:spcAft>
+                <a:spcPts val="200"/>
+              </a:spcAft>
+            </a:pPr>
+            <a:r>
+              <a:rPr sz="1500" b="1">
+                <a:solidFill>
+                  <a:srgbClr val="1E2761"/>
+                </a:solidFill>
+                <a:latin typeface="Calibri"/>
+              </a:rPr>
+              <a:t>LITERATURE BASIS</a:t>
+            </a:r>
+          </a:p>
+        </p:txBody>
+      </p:sp>
+      <p:sp>
+        <p:nvSpPr>
+          <p:cNvPr id="16" name="TextBox 15"/>
+          <p:cNvSpPr txBox="1"/>
+          <p:nvPr/>
+        </p:nvSpPr>
+        <p:spPr>
+          <a:xfrm>
+            <a:off x="868680" y="5440680"/>
+            <a:ext cx="4617720" cy="1005840"/>
+          </a:xfrm>
+          <a:prstGeom prst="rect">
+            <a:avLst/>
+          </a:prstGeom>
+          <a:noFill/>
+        </p:spPr>
+        <p:txBody>
+          <a:bodyPr wrap="square" lIns="0" rIns="0" tIns="0" bIns="0">
+            <a:spAutoFit/>
+          </a:bodyPr>
+          <a:lstStyle/>
+          <a:p>
+            <a:pPr>
+              <a:spcAft>
+                <a:spcPts val="600"/>
+              </a:spcAft>
+            </a:pPr>
+            <a:r>
+              <a:rPr sz="1100" b="1">
+                <a:solidFill>
+                  <a:srgbClr val="1E2761"/>
+                </a:solidFill>
+                <a:latin typeface="Calibri"/>
+              </a:rPr>
+              <a:t>Ross, Gordon &amp; Bagnell (2011), </a:t>
+            </a:r>
+            <a:r>
+              <a:rPr sz="1100" b="0">
+                <a:solidFill>
+                  <a:srgbClr val="5B5F6E"/>
+                </a:solidFill>
+                <a:latin typeface="Calibri"/>
+              </a:rPr>
+              <a:t>“A Reduction of Imitation Learning and Structured Prediction to No-Regret Online Learning” (AISTATS) — whose compounding bound assumes a state that persists to be compounded over.</a:t>
+            </a:r>
+          </a:p>
+        </p:txBody>
+      </p:sp>
+      <p:sp>
+        <p:nvSpPr>
+          <p:cNvPr id="17" name="Rectangle 16"/>
+          <p:cNvSpPr/>
+          <p:nvPr/>
+        </p:nvSpPr>
+        <p:spPr>
+          <a:xfrm>
+            <a:off x="5943600" y="1417320"/>
+            <a:ext cx="292608" cy="292608"/>
+          </a:xfrm>
+          <a:prstGeom prst="rect">
+            <a:avLst/>
+          </a:prstGeom>
+          <a:solidFill>
+            <a:srgbClr val="1E2761"/>
+          </a:solidFill>
+          <a:ln>
+            <a:noFill/>
+          </a:ln>
+        </p:spPr>
+        <p:style>
+          <a:lnRef idx="1">
+            <a:schemeClr val="accent1"/>
+          </a:lnRef>
+          <a:fillRef idx="3">
+            <a:schemeClr val="accent1"/>
+          </a:fillRef>
+          <a:effectRef idx="2">
+            <a:schemeClr val="accent1"/>
+          </a:effectRef>
+          <a:fontRef idx="minor">
+            <a:schemeClr val="lt1"/>
+          </a:fontRef>
+        </p:style>
+        <p:txBody>
+          <a:bodyPr rtlCol="0" anchor="ctr"/>
+          <a:lstStyle/>
+          <a:p/>
+        </p:txBody>
+      </p:sp>
+      <p:sp>
+        <p:nvSpPr>
+          <p:cNvPr id="18" name="TextBox 17"/>
+          <p:cNvSpPr txBox="1"/>
+          <p:nvPr/>
+        </p:nvSpPr>
+        <p:spPr>
+          <a:xfrm>
+            <a:off x="6355080" y="1389888"/>
+            <a:ext cx="5349240" cy="347472"/>
+          </a:xfrm>
+          <a:prstGeom prst="rect">
+            <a:avLst/>
+          </a:prstGeom>
+          <a:noFill/>
+        </p:spPr>
+        <p:txBody>
+          <a:bodyPr wrap="square" lIns="0" rIns="0" tIns="0" bIns="0">
+            <a:spAutoFit/>
+          </a:bodyPr>
+          <a:lstStyle/>
+          <a:p>
+            <a:pPr>
+              <a:spcAft>
+                <a:spcPts val="200"/>
+              </a:spcAft>
+            </a:pPr>
+            <a:r>
+              <a:rPr sz="1500" b="1">
+                <a:solidFill>
+                  <a:srgbClr val="1E2761"/>
+                </a:solidFill>
+                <a:latin typeface="Calibri"/>
+              </a:rPr>
+              <a:t>KEY RESULTS</a:t>
+            </a:r>
+          </a:p>
+        </p:txBody>
+      </p:sp>
+      <p:graphicFrame>
+        <p:nvGraphicFramePr>
+          <p:cNvPr id="19" name="Table 18"/>
+          <p:cNvGraphicFramePr>
+            <a:graphicFrameLocks noGrp="1"/>
+          </p:cNvGraphicFramePr>
+          <p:nvPr/>
+        </p:nvGraphicFramePr>
+        <p:xfrm>
+          <a:off x="5943600" y="1874519"/>
+          <a:ext cx="5760720" cy="1920240"/>
+        </p:xfrm>
+        <a:graphic>
+          <a:graphicData uri="http://schemas.openxmlformats.org/drawingml/2006/table">
+            <a:tbl>
+              <a:tblPr firstRow="1" bandRow="1">
+                <a:tableStyleId>{5C22544A-7EE6-4342-B048-85BDC9FD1C3A}</a:tableStyleId>
+              </a:tblPr>
+              <a:tblGrid>
+                <a:gridCol w="3200400"/>
+                <a:gridCol w="1463040"/>
+                <a:gridCol w="1097280"/>
+              </a:tblGrid>
+              <a:tr h="274320">
+                <a:tc>
+                  <a:txBody>
+                    <a:bodyPr/>
+                    <a:lstStyle/>
+                    <a:p>
+                      <a:r>
+                        <a:rPr sz="1100" b="1">
+                          <a:solidFill>
+                            <a:srgbClr val="FFFFFF"/>
+                          </a:solidFill>
+                          <a:latin typeface="Calibri"/>
+                        </a:rPr>
+                        <a:t>Metric</a:t>
+                      </a:r>
+                    </a:p>
+                  </a:txBody>
+                  <a:tcPr>
+                    <a:solidFill>
+                      <a:srgbClr val="1E2761"/>
+                    </a:solidFill>
+                  </a:tcPr>
+                </a:tc>
+                <a:tc>
+                  <a:txBody>
+                    <a:bodyPr/>
+                    <a:lstStyle/>
+                    <a:p>
+                      <a:r>
+                        <a:rPr sz="1100" b="1">
+                          <a:solidFill>
+                            <a:srgbClr val="FFFFFF"/>
+                          </a:solidFill>
+                          <a:latin typeface="Calibri"/>
+                        </a:rPr>
+                        <a:t>Value</a:t>
+                      </a:r>
+                    </a:p>
+                  </a:txBody>
+                  <a:tcPr>
+                    <a:solidFill>
+                      <a:srgbClr val="1E2761"/>
+                    </a:solidFill>
+                  </a:tcPr>
+                </a:tc>
+                <a:tc>
+                  <a:txBody>
+                    <a:bodyPr/>
+                    <a:lstStyle/>
+                    <a:p>
+                      <a:r>
+                        <a:rPr sz="1100" b="1">
+                          <a:solidFill>
+                            <a:srgbClr val="FFFFFF"/>
+                          </a:solidFill>
+                          <a:latin typeface="Calibri"/>
+                        </a:rPr>
+                        <a:t/>
+                      </a:r>
+                    </a:p>
+                  </a:txBody>
+                  <a:tcPr>
+                    <a:solidFill>
+                      <a:srgbClr val="1E2761"/>
+                    </a:solidFill>
+                  </a:tcPr>
+                </a:tc>
+              </a:tr>
+              <a:tr h="274320">
+                <a:tc>
+                  <a:txBody>
+                    <a:bodyPr/>
+                    <a:lstStyle/>
+                    <a:p>
+                      <a:r>
+                        <a:rPr sz="1100">
+                          <a:solidFill>
+                            <a:srgbClr val="1E2761"/>
+                          </a:solidFill>
+                          <a:latin typeface="Calibri"/>
+                        </a:rPr>
+                        <a:t>Baseline amplification</a:t>
+                      </a:r>
+                    </a:p>
+                  </a:txBody>
+                  <a:tcPr>
+                    <a:solidFill>
+                      <a:srgbClr val="FFFFFF"/>
+                    </a:solidFill>
+                  </a:tcPr>
+                </a:tc>
+                <a:tc>
+                  <a:txBody>
+                    <a:bodyPr/>
+                    <a:lstStyle/>
+                    <a:p>
+                      <a:r>
+                        <a:rPr sz="1100">
+                          <a:solidFill>
+                            <a:srgbClr val="5B5F6E"/>
+                          </a:solidFill>
+                          <a:latin typeface="Calibri"/>
+                        </a:rPr>
+                        <a:t>1.67x</a:t>
+                      </a:r>
+                    </a:p>
+                  </a:txBody>
+                  <a:tcPr>
+                    <a:solidFill>
+                      <a:srgbClr val="FFFFFF"/>
+                    </a:solidFill>
+                  </a:tcPr>
+                </a:tc>
+                <a:tc>
+                  <a:txBody>
+                    <a:bodyPr/>
+                    <a:lstStyle/>
+                    <a:p>
+                      <a:pPr algn="ctr"/>
+                      <a:r>
+                        <a:rPr sz="1100" b="1">
+                          <a:solidFill>
+                            <a:srgbClr val="5B5F6E"/>
+                          </a:solidFill>
+                          <a:latin typeface="Calibri"/>
+                        </a:rPr>
+                        <a:t>—</a:t>
+                      </a:r>
+                    </a:p>
+                  </a:txBody>
+                  <a:tcPr>
+                    <a:solidFill>
+                      <a:srgbClr val="FFFFFF"/>
+                    </a:solidFill>
+                  </a:tcPr>
+                </a:tc>
+              </a:tr>
+              <a:tr h="274320">
+                <a:tc>
+                  <a:txBody>
+                    <a:bodyPr/>
+                    <a:lstStyle/>
+                    <a:p>
+                      <a:r>
+                        <a:rPr sz="1100">
+                          <a:solidFill>
+                            <a:srgbClr val="1E2761"/>
+                          </a:solidFill>
+                          <a:latin typeface="Calibri"/>
+                        </a:rPr>
+                        <a:t>  budget wall removed</a:t>
+                      </a:r>
+                    </a:p>
+                  </a:txBody>
+                  <a:tcPr>
+                    <a:solidFill>
+                      <a:srgbClr val="F7F8FC"/>
+                    </a:solidFill>
+                  </a:tcPr>
+                </a:tc>
+                <a:tc>
+                  <a:txBody>
+                    <a:bodyPr/>
+                    <a:lstStyle/>
+                    <a:p>
+                      <a:r>
+                        <a:rPr sz="1100">
+                          <a:solidFill>
+                            <a:srgbClr val="5B5F6E"/>
+                          </a:solidFill>
+                          <a:latin typeface="Calibri"/>
+                        </a:rPr>
+                        <a:t>1.59x</a:t>
+                      </a:r>
+                    </a:p>
+                  </a:txBody>
+                  <a:tcPr>
+                    <a:solidFill>
+                      <a:srgbClr val="F7F8FC"/>
+                    </a:solidFill>
+                  </a:tcPr>
+                </a:tc>
+                <a:tc>
+                  <a:txBody>
+                    <a:bodyPr/>
+                    <a:lstStyle/>
+                    <a:p>
+                      <a:pPr algn="ctr"/>
+                      <a:r>
+                        <a:rPr sz="1100" b="1">
+                          <a:solidFill>
+                            <a:srgbClr val="5B5F6E"/>
+                          </a:solidFill>
+                          <a:latin typeface="Calibri"/>
+                        </a:rPr>
+                        <a:t>—</a:t>
+                      </a:r>
+                    </a:p>
+                  </a:txBody>
+                  <a:tcPr>
+                    <a:solidFill>
+                      <a:srgbClr val="F7F8FC"/>
+                    </a:solidFill>
+                  </a:tcPr>
+                </a:tc>
+              </a:tr>
+              <a:tr h="274320">
+                <a:tc>
+                  <a:txBody>
+                    <a:bodyPr/>
+                    <a:lstStyle/>
+                    <a:p>
+                      <a:r>
+                        <a:rPr sz="1100">
+                          <a:solidFill>
+                            <a:srgbClr val="1E2761"/>
+                          </a:solidFill>
+                          <a:latin typeface="Calibri"/>
+                        </a:rPr>
+                        <a:t>  fixed taste removed</a:t>
+                      </a:r>
+                    </a:p>
+                  </a:txBody>
+                  <a:tcPr>
+                    <a:solidFill>
+                      <a:srgbClr val="FFFFFF"/>
+                    </a:solidFill>
+                  </a:tcPr>
+                </a:tc>
+                <a:tc>
+                  <a:txBody>
+                    <a:bodyPr/>
+                    <a:lstStyle/>
+                    <a:p>
+                      <a:r>
+                        <a:rPr sz="1100">
+                          <a:solidFill>
+                            <a:srgbClr val="5B5F6E"/>
+                          </a:solidFill>
+                          <a:latin typeface="Calibri"/>
+                        </a:rPr>
+                        <a:t>1.00x</a:t>
+                      </a:r>
+                    </a:p>
+                  </a:txBody>
+                  <a:tcPr>
+                    <a:solidFill>
+                      <a:srgbClr val="FFFFFF"/>
+                    </a:solidFill>
+                  </a:tcPr>
+                </a:tc>
+                <a:tc>
+                  <a:txBody>
+                    <a:bodyPr/>
+                    <a:lstStyle/>
+                    <a:p>
+                      <a:pPr algn="ctr"/>
+                      <a:r>
+                        <a:rPr sz="1100" b="1">
+                          <a:solidFill>
+                            <a:srgbClr val="5B5F6E"/>
+                          </a:solidFill>
+                          <a:latin typeface="Calibri"/>
+                        </a:rPr>
+                        <a:t>—</a:t>
+                      </a:r>
+                    </a:p>
+                  </a:txBody>
+                  <a:tcPr>
+                    <a:solidFill>
+                      <a:srgbClr val="FFFFFF"/>
+                    </a:solidFill>
+                  </a:tcPr>
+                </a:tc>
+              </a:tr>
+              <a:tr h="274320">
+                <a:tc>
+                  <a:txBody>
+                    <a:bodyPr/>
+                    <a:lstStyle/>
+                    <a:p>
+                      <a:r>
+                        <a:rPr sz="1100">
+                          <a:solidFill>
+                            <a:srgbClr val="1E2761"/>
+                          </a:solidFill>
+                          <a:latin typeface="Calibri"/>
+                        </a:rPr>
+                        <a:t>State drift, baseline -&gt; weekly</a:t>
+                      </a:r>
+                    </a:p>
+                  </a:txBody>
+                  <a:tcPr>
+                    <a:solidFill>
+                      <a:srgbClr val="F7F8FC"/>
+                    </a:solidFill>
+                  </a:tcPr>
+                </a:tc>
+                <a:tc>
+                  <a:txBody>
+                    <a:bodyPr/>
+                    <a:lstStyle/>
+                    <a:p>
+                      <a:r>
+                        <a:rPr sz="1100">
+                          <a:solidFill>
+                            <a:srgbClr val="5B5F6E"/>
+                          </a:solidFill>
+                          <a:latin typeface="Calibri"/>
+                        </a:rPr>
+                        <a:t>0.0883 -&gt; 0.0072</a:t>
+                      </a:r>
+                    </a:p>
+                  </a:txBody>
+                  <a:tcPr>
+                    <a:solidFill>
+                      <a:srgbClr val="F7F8FC"/>
+                    </a:solidFill>
+                  </a:tcPr>
+                </a:tc>
+                <a:tc>
+                  <a:txBody>
+                    <a:bodyPr/>
+                    <a:lstStyle/>
+                    <a:p>
+                      <a:pPr algn="ctr"/>
+                      <a:r>
+                        <a:rPr sz="1100" b="1">
+                          <a:solidFill>
+                            <a:srgbClr val="5B5F6E"/>
+                          </a:solidFill>
+                          <a:latin typeface="Calibri"/>
+                        </a:rPr>
+                        <a:t>—</a:t>
+                      </a:r>
+                    </a:p>
+                  </a:txBody>
+                  <a:tcPr>
+                    <a:solidFill>
+                      <a:srgbClr val="F7F8FC"/>
+                    </a:solidFill>
+                  </a:tcPr>
+                </a:tc>
+              </a:tr>
+              <a:tr h="274320">
+                <a:tc>
+                  <a:txBody>
+                    <a:bodyPr/>
+                    <a:lstStyle/>
+                    <a:p>
+                      <a:r>
+                        <a:rPr sz="1100">
+                          <a:solidFill>
+                            <a:srgbClr val="1E2761"/>
+                          </a:solidFill>
+                          <a:latin typeface="Calibri"/>
+                        </a:rPr>
+                        <a:t>R, baseline -&gt; weekly</a:t>
+                      </a:r>
+                    </a:p>
+                  </a:txBody>
+                  <a:tcPr>
+                    <a:solidFill>
+                      <a:srgbClr val="FFFFFF"/>
+                    </a:solidFill>
+                  </a:tcPr>
+                </a:tc>
+                <a:tc>
+                  <a:txBody>
+                    <a:bodyPr/>
+                    <a:lstStyle/>
+                    <a:p>
+                      <a:r>
+                        <a:rPr sz="1100">
+                          <a:solidFill>
+                            <a:srgbClr val="5B5F6E"/>
+                          </a:solidFill>
+                          <a:latin typeface="Calibri"/>
+                        </a:rPr>
+                        <a:t>85% -&gt; 117%</a:t>
+                      </a:r>
+                    </a:p>
+                  </a:txBody>
+                  <a:tcPr>
+                    <a:solidFill>
+                      <a:srgbClr val="FFFFFF"/>
+                    </a:solidFill>
+                  </a:tcPr>
+                </a:tc>
+                <a:tc>
+                  <a:txBody>
+                    <a:bodyPr/>
+                    <a:lstStyle/>
+                    <a:p>
+                      <a:pPr algn="ctr"/>
+                      <a:r>
+                        <a:rPr sz="1100" b="1">
+                          <a:solidFill>
+                            <a:srgbClr val="5B5F6E"/>
+                          </a:solidFill>
+                          <a:latin typeface="Calibri"/>
+                        </a:rPr>
+                        <a:t>—</a:t>
+                      </a:r>
+                    </a:p>
+                  </a:txBody>
+                  <a:tcPr>
+                    <a:solidFill>
+                      <a:srgbClr val="FFFFFF"/>
+                    </a:solidFill>
+                  </a:tcPr>
+                </a:tc>
+              </a:tr>
+              <a:tr h="274320">
+                <a:tc>
+                  <a:txBody>
+                    <a:bodyPr/>
+                    <a:lstStyle/>
+                    <a:p>
+                      <a:r>
+                        <a:rPr sz="1100">
+                          <a:solidFill>
+                            <a:srgbClr val="1E2761"/>
+                          </a:solidFill>
+                          <a:latin typeface="Calibri"/>
+                        </a:rPr>
+                        <a:t>Worst behavioural, any cell</a:t>
+                      </a:r>
+                    </a:p>
+                  </a:txBody>
+                  <a:tcPr>
+                    <a:solidFill>
+                      <a:srgbClr val="F7F8FC"/>
+                    </a:solidFill>
+                  </a:tcPr>
+                </a:tc>
+                <a:tc>
+                  <a:txBody>
+                    <a:bodyPr/>
+                    <a:lstStyle/>
+                    <a:p>
+                      <a:r>
+                        <a:rPr sz="1100">
+                          <a:solidFill>
+                            <a:srgbClr val="5B5F6E"/>
+                          </a:solidFill>
+                          <a:latin typeface="Calibri"/>
+                        </a:rPr>
+                        <a:t>2.49 pp</a:t>
+                      </a:r>
+                    </a:p>
+                  </a:txBody>
+                  <a:tcPr>
+                    <a:solidFill>
+                      <a:srgbClr val="F7F8FC"/>
+                    </a:solidFill>
+                  </a:tcPr>
+                </a:tc>
+                <a:tc>
+                  <a:txBody>
+                    <a:bodyPr/>
+                    <a:lstStyle/>
+                    <a:p>
+                      <a:pPr algn="ctr"/>
+                      <a:r>
+                        <a:rPr sz="1100" b="1">
+                          <a:solidFill>
+                            <a:srgbClr val="5B5F6E"/>
+                          </a:solidFill>
+                          <a:latin typeface="Calibri"/>
+                        </a:rPr>
+                        <a:t>—</a:t>
+                      </a:r>
+                    </a:p>
+                  </a:txBody>
+                  <a:tcPr>
+                    <a:solidFill>
+                      <a:srgbClr val="F7F8FC"/>
+                    </a:solidFill>
+                  </a:tcPr>
+                </a:tc>
+              </a:tr>
+            </a:tbl>
+          </a:graphicData>
+        </a:graphic>
+      </p:graphicFrame>
+      <p:sp>
+        <p:nvSpPr>
+          <p:cNvPr id="20" name="Rectangle 19"/>
+          <p:cNvSpPr/>
+          <p:nvPr/>
+        </p:nvSpPr>
+        <p:spPr>
+          <a:xfrm>
+            <a:off x="5943600" y="4023360"/>
+            <a:ext cx="292608" cy="292608"/>
+          </a:xfrm>
+          <a:prstGeom prst="rect">
+            <a:avLst/>
+          </a:prstGeom>
+          <a:solidFill>
+            <a:srgbClr val="1E2761"/>
+          </a:solidFill>
+          <a:ln>
+            <a:noFill/>
+          </a:ln>
+        </p:spPr>
+        <p:style>
+          <a:lnRef idx="1">
+            <a:schemeClr val="accent1"/>
+          </a:lnRef>
+          <a:fillRef idx="3">
+            <a:schemeClr val="accent1"/>
+          </a:fillRef>
+          <a:effectRef idx="2">
+            <a:schemeClr val="accent1"/>
+          </a:effectRef>
+          <a:fontRef idx="minor">
+            <a:schemeClr val="lt1"/>
+          </a:fontRef>
+        </p:style>
+        <p:txBody>
+          <a:bodyPr rtlCol="0" anchor="ctr"/>
+          <a:lstStyle/>
+          <a:p/>
+        </p:txBody>
+      </p:sp>
+      <p:sp>
+        <p:nvSpPr>
+          <p:cNvPr id="21" name="TextBox 20"/>
+          <p:cNvSpPr txBox="1"/>
+          <p:nvPr/>
+        </p:nvSpPr>
+        <p:spPr>
+          <a:xfrm>
+            <a:off x="6355080" y="3995928"/>
+            <a:ext cx="5349240" cy="347472"/>
+          </a:xfrm>
+          <a:prstGeom prst="rect">
+            <a:avLst/>
+          </a:prstGeom>
+          <a:noFill/>
+        </p:spPr>
+        <p:txBody>
+          <a:bodyPr wrap="square" lIns="0" rIns="0" tIns="0" bIns="0">
+            <a:spAutoFit/>
+          </a:bodyPr>
+          <a:lstStyle/>
+          <a:p>
+            <a:pPr>
+              <a:spcAft>
+                <a:spcPts val="200"/>
+              </a:spcAft>
+            </a:pPr>
+            <a:r>
+              <a:rPr sz="1500" b="1">
+                <a:solidFill>
+                  <a:srgbClr val="1E2761"/>
+                </a:solidFill>
+                <a:latin typeface="Calibri"/>
+              </a:rPr>
+              <a:t>RESEARCH QUESTION</a:t>
+            </a:r>
+          </a:p>
+        </p:txBody>
+      </p:sp>
+      <p:sp>
+        <p:nvSpPr>
+          <p:cNvPr id="22" name="Rectangle 21"/>
+          <p:cNvSpPr/>
+          <p:nvPr/>
+        </p:nvSpPr>
+        <p:spPr>
+          <a:xfrm>
+            <a:off x="5943600" y="4434840"/>
+            <a:ext cx="5760720" cy="1965960"/>
+          </a:xfrm>
+          <a:prstGeom prst="rect">
+            <a:avLst/>
+          </a:prstGeom>
+          <a:solidFill>
+            <a:srgbClr val="F7F8FC"/>
+          </a:solidFill>
+          <a:ln>
+            <a:noFill/>
+          </a:ln>
+        </p:spPr>
+        <p:style>
+          <a:lnRef idx="1">
+            <a:schemeClr val="accent1"/>
+          </a:lnRef>
+          <a:fillRef idx="3">
+            <a:schemeClr val="accent1"/>
+          </a:fillRef>
+          <a:effectRef idx="2">
+            <a:schemeClr val="accent1"/>
+          </a:effectRef>
+          <a:fontRef idx="minor">
+            <a:schemeClr val="lt1"/>
+          </a:fontRef>
+        </p:style>
+        <p:txBody>
+          <a:bodyPr rtlCol="0" anchor="ctr"/>
+          <a:lstStyle/>
+          <a:p/>
+        </p:txBody>
+      </p:sp>
+      <p:sp>
+        <p:nvSpPr>
+          <p:cNvPr id="23" name="TextBox 22"/>
+          <p:cNvSpPr txBox="1"/>
+          <p:nvPr/>
+        </p:nvSpPr>
+        <p:spPr>
+          <a:xfrm>
+            <a:off x="6217920" y="4572000"/>
+            <a:ext cx="5212080" cy="1737360"/>
+          </a:xfrm>
+          <a:prstGeom prst="rect">
+            <a:avLst/>
+          </a:prstGeom>
+          <a:noFill/>
+        </p:spPr>
+        <p:txBody>
+          <a:bodyPr wrap="square" lIns="0" rIns="0" tIns="0" bIns="0">
+            <a:spAutoFit/>
+          </a:bodyPr>
+          <a:lstStyle/>
+          <a:p>
+            <a:pPr>
+              <a:spcAft>
+                <a:spcPts val="500"/>
+              </a:spcAft>
+            </a:pPr>
+            <a:r>
+              <a:rPr sz="1000" b="0">
+                <a:solidFill>
+                  <a:srgbClr val="5B5F6E"/>
+                </a:solidFill>
+                <a:latin typeface="Calibri"/>
+              </a:rPr>
+              <a:t>Which environment characteristics suppress the trajectory divergence that imitation error would otherwise produce?</a:t>
+            </a:r>
+          </a:p>
+          <a:p>
+            <a:pPr>
+              <a:spcAft>
+                <a:spcPts val="500"/>
+              </a:spcAft>
+            </a:pPr>
+            <a:r>
+              <a:rPr sz="1000" b="1">
+                <a:solidFill>
+                  <a:srgbClr val="1E2761"/>
+                </a:solidFill>
+                <a:latin typeface="Calibri"/>
+              </a:rPr>
+              <a:t>Finding: </a:t>
+            </a:r>
+            <a:r>
+              <a:rPr sz="1000" b="0">
+                <a:solidFill>
+                  <a:srgbClr val="5B5F6E"/>
+                </a:solidFill>
+                <a:latin typeface="Calibri"/>
+              </a:rPr>
+              <a:t>Neither — one of them was *carrying* it. Removing the budget wall barely moves the amplification (1.67x → 1.59x). Removing season-long taste collapses it to 1.00x — no amplification at all — and takes the state drift with it (0.0883 → 0.0072). Amplification needs a carrier: an early error has to move the buyer into a state that *persists* long enough to be inhabited.</a:t>
+            </a:r>
+          </a:p>
+          <a:p>
+            <a:pPr>
+              <a:spcAft>
+                <a:spcPts val="500"/>
+              </a:spcAft>
+            </a:pPr>
+            <a:r>
+              <a:rPr sz="1000" b="1">
+                <a:solidFill>
+                  <a:srgbClr val="1E2761"/>
+                </a:solidFill>
+                <a:latin typeface="Calibri"/>
+              </a:rPr>
+              <a:t>Caveat: </a:t>
+            </a:r>
+            <a:r>
+              <a:rPr sz="1000" b="0">
+                <a:solidFill>
+                  <a:srgbClr val="5B5F6E"/>
+                </a:solidFill>
+                <a:latin typeface="Calibri"/>
+              </a:rPr>
+              <a:t>This reverses 9a's own framing, which called fixed taste a stabilizer that would suppress divergence. Both readings are the same mechanism: persistence stabilizes the trajectory and carries the error. It also shows R alone does not govern amplification — the weekly cells have the largest systematic error in the study (117% against 85%) and amplify by exactly 1.00x. Nothing across 9a–9c reached materiality: the worst behavioural divergence anywhere is 2.49 pp against ±5, and every share in every cell is equivalent. One cell fails Gate 9a; its twin passes and shows the same result.</a:t>
             </a:r>
           </a:p>
         </p:txBody>

--- a/project_tracking.pptx
+++ b/project_tracking.pptx
@@ -20,8 +20,8 @@
     <p:sldId id="268" r:id="rId19"/>
     <p:sldId id="269" r:id="rId21"/>
     <p:sldId id="270" r:id="rId22"/>
-    <p:sldId id="271" r:id="rId23"/>
-    <p:sldId id="272" r:id="rId24"/>
+    <p:sldId id="271" r:id="rId25"/>
+    <p:sldId id="272" r:id="rId26"/>
   </p:sldIdLst>
   <p:sldSz cx="12191969" cy="6858000" type="screen4x3"/>
   <p:notesSz cx="6858000" cy="9144000"/>
@@ -14994,7 +14994,7 @@
                           </a:solidFill>
                           <a:latin typeface="Calibri"/>
                         </a:rPr>
-                        <a:t>0.98 → 0.19 bits</a:t>
+                        <a:t>0.98 → 0.02 bits</a:t>
                       </a:r>
                     </a:p>
                   </a:txBody>
@@ -15063,7 +15063,7 @@
                           </a:solidFill>
                           <a:latin typeface="Calibri"/>
                         </a:rPr>
-                        <a:t>9% → 85%</a:t>
+                        <a:t>9% → 319%</a:t>
                       </a:r>
                     </a:p>
                   </a:txBody>
@@ -15132,7 +15132,7 @@
                           </a:solidFill>
                           <a:latin typeface="Calibri"/>
                         </a:rPr>
-                        <a:t>1.02x → 1.67x</a:t>
+                        <a:t>1.02x → 1.78x</a:t>
                       </a:r>
                     </a:p>
                   </a:txBody>
@@ -15270,7 +15270,7 @@
                           </a:solidFill>
                           <a:latin typeface="Calibri"/>
                         </a:rPr>
-                        <a:t>-1.00</a:t>
+                        <a:t>-0.98</a:t>
                       </a:r>
                     </a:p>
                   </a:txBody>
@@ -15339,7 +15339,7 @@
                           </a:solidFill>
                           <a:latin typeface="Calibri"/>
                         </a:rPr>
-                        <a:t>30 of 30</a:t>
+                        <a:t>48 of 48</a:t>
                       </a:r>
                     </a:p>
                   </a:txBody>
@@ -15557,7 +15557,7 @@
                 </a:solidFill>
                 <a:latin typeface="Calibri"/>
               </a:rPr>
-              <a:t>Yes for the amplification, exactly. As entropy falls from 0.98 to 0.19 bits with the market level held fixed, R rises 9% → 85% and the amplification rises 1.02x → 1.67x — Spearman -1.00, with the excess growing 160-fold and every interval excluding zero. State drift is equally monotone at -1.00.</a:t>
+              <a:t>Yes for the amplification, exactly. As entropy falls from 0.98 to 0.02 bits with the market level held fixed, R rises 9% → 319% and the amplification rises 1.02x → 1.78x — Spearman -1.00, with the excess growing 160-fold and every interval excluding zero. State drift is equally monotone at -0.98.</a:t>
             </a:r>
           </a:p>
           <a:p>
@@ -15582,7 +15582,1608 @@
                 </a:solidFill>
                 <a:latin typeface="Calibri"/>
               </a:rPr>
-              <a:t>The fourth link is not reached. Behavioural divergence peaks at 2.49 pp against a ±5 pp margin, and all 30 class-to-tier shares return equivalent in every regime including the sharpest. Teacher stochasticity governs amplification and does not, alone, carry it through to material behaviour — what remains between them is the environment, which 9c ablates. Two corrections this sweep forced: criterion 3's absolute threshold exceeded the entire available range at high entropy, and a fixed architecture would have read 'this model stopped fitting' as 'the environment amplifies error'.</a:t>
+              <a:t>The fourth link is not reached. Behavioural divergence peaks at 3.71 pp against a ±5 pp margin, and all 48 class-to-tier shares return equivalent in every regime including the sharpest. Teacher stochasticity governs amplification and does not, alone, carry it through to material behaviour — what remains between them is the environment, which 9c ablates. Two corrections this sweep forced: criterion 3's absolute threshold exceeded the entire available range at high entropy, and a fixed architecture would have read 'this model stopped fitting' as 'the environment amplifies error'.</a:t>
+            </a:r>
+          </a:p>
+        </p:txBody>
+      </p:sp>
+      <p:sp>
+        <p:nvSpPr>
+          <p:cNvPr id="24" name="TextBox 23"/>
+          <p:cNvSpPr txBox="1"/>
+          <p:nvPr/>
+        </p:nvSpPr>
+        <p:spPr>
+          <a:xfrm>
+            <a:off x="457200" y="6446520"/>
+            <a:ext cx="11247120" cy="274320"/>
+          </a:xfrm>
+          <a:prstGeom prst="rect">
+            <a:avLst/>
+          </a:prstGeom>
+          <a:noFill/>
+        </p:spPr>
+        <p:txBody>
+          <a:bodyPr wrap="square" lIns="0" rIns="0" tIns="0" bIns="0">
+            <a:spAutoFit/>
+          </a:bodyPr>
+          <a:lstStyle/>
+          <a:p>
+            <a:pPr>
+              <a:spcAft>
+                <a:spcPts val="200"/>
+              </a:spcAft>
+            </a:pPr>
+            <a:r>
+              <a:rPr sz="950" b="0">
+                <a:solidFill>
+                  <a:srgbClr val="5B5F6E"/>
+                </a:solidFill>
+                <a:latin typeface="Calibri"/>
+              </a:rPr>
+              <a:t>Generated automatically at phase completion  ·  Phase Completion Deliverable  ·  market-sim project</a:t>
+            </a:r>
+          </a:p>
+        </p:txBody>
+      </p:sp>
+    </p:spTree>
+  </p:cSld>
+  <p:clrMapOvr>
+    <a:masterClrMapping/>
+  </p:clrMapOvr>
+</p:sld>
+</file>
+
+<file path=ppt/slides/slide17.xml><?xml version="1.0" encoding="utf-8"?>
+<p:sld xmlns:a="http://schemas.openxmlformats.org/drawingml/2006/main" xmlns:p="http://schemas.openxmlformats.org/presentationml/2006/main" xmlns:r="http://schemas.openxmlformats.org/officeDocument/2006/relationships">
+  <p:cSld>
+    <p:spTree>
+      <p:nvGrpSpPr>
+        <p:cNvPr id="1" name=""/>
+        <p:cNvGrpSpPr/>
+        <p:nvPr/>
+      </p:nvGrpSpPr>
+      <p:grpSpPr/>
+      <p:sp>
+        <p:nvSpPr>
+          <p:cNvPr id="2" name="TextBox 1"/>
+          <p:cNvSpPr txBox="1"/>
+          <p:nvPr/>
+        </p:nvSpPr>
+        <p:spPr>
+          <a:xfrm>
+            <a:off x="457200" y="320040"/>
+            <a:ext cx="8229600" cy="548640"/>
+          </a:xfrm>
+          <a:prstGeom prst="rect">
+            <a:avLst/>
+          </a:prstGeom>
+          <a:noFill/>
+        </p:spPr>
+        <p:txBody>
+          <a:bodyPr wrap="square" lIns="0" rIns="0" tIns="0" bIns="0">
+            <a:spAutoFit/>
+          </a:bodyPr>
+          <a:lstStyle/>
+          <a:p>
+            <a:pPr>
+              <a:spcAft>
+                <a:spcPts val="200"/>
+              </a:spcAft>
+            </a:pPr>
+            <a:r>
+              <a:rPr sz="3200" b="1">
+                <a:solidFill>
+                  <a:srgbClr val="1E2761"/>
+                </a:solidFill>
+                <a:latin typeface="Cambria"/>
+              </a:rPr>
+              <a:t>Phase 9 — Stabilizer Ablation — 9c</a:t>
+            </a:r>
+          </a:p>
+        </p:txBody>
+      </p:sp>
+      <p:sp>
+        <p:nvSpPr>
+          <p:cNvPr id="3" name="TextBox 2"/>
+          <p:cNvSpPr txBox="1"/>
+          <p:nvPr/>
+        </p:nvSpPr>
+        <p:spPr>
+          <a:xfrm>
+            <a:off x="457200" y="868680"/>
+            <a:ext cx="8229600" cy="274320"/>
+          </a:xfrm>
+          <a:prstGeom prst="rect">
+            <a:avLst/>
+          </a:prstGeom>
+          <a:noFill/>
+        </p:spPr>
+        <p:txBody>
+          <a:bodyPr wrap="square" lIns="0" rIns="0" tIns="0" bIns="0">
+            <a:spAutoFit/>
+          </a:bodyPr>
+          <a:lstStyle/>
+          <a:p>
+            <a:pPr>
+              <a:spcAft>
+                <a:spcPts val="200"/>
+              </a:spcAft>
+            </a:pPr>
+            <a:r>
+              <a:rPr sz="1200" b="0">
+                <a:solidFill>
+                  <a:srgbClr val="5B5F6E"/>
+                </a:solidFill>
+                <a:latin typeface="Calibri"/>
+              </a:rPr>
+              <a:t>Which environment characteristic carries the divergence?  ·  git tag: phase9c-stabilizers  ·  5 cells x 30 deployment seeds</a:t>
+            </a:r>
+          </a:p>
+        </p:txBody>
+      </p:sp>
+      <p:sp>
+        <p:nvSpPr>
+          <p:cNvPr id="4" name="Rounded Rectangle 3"/>
+          <p:cNvSpPr/>
+          <p:nvPr/>
+        </p:nvSpPr>
+        <p:spPr>
+          <a:xfrm>
+            <a:off x="9464040" y="365760"/>
+            <a:ext cx="2240280" cy="384048"/>
+          </a:xfrm>
+          <a:prstGeom prst="roundRect">
+            <a:avLst/>
+          </a:prstGeom>
+          <a:solidFill>
+            <a:srgbClr val="C9922E"/>
+          </a:solidFill>
+          <a:ln>
+            <a:noFill/>
+          </a:ln>
+        </p:spPr>
+        <p:style>
+          <a:lnRef idx="1">
+            <a:schemeClr val="accent1"/>
+          </a:lnRef>
+          <a:fillRef idx="3">
+            <a:schemeClr val="accent1"/>
+          </a:fillRef>
+          <a:effectRef idx="2">
+            <a:schemeClr val="accent1"/>
+          </a:effectRef>
+          <a:fontRef idx="minor">
+            <a:schemeClr val="lt1"/>
+          </a:fontRef>
+        </p:style>
+        <p:txBody>
+          <a:bodyPr rtlCol="0" anchor="ctr"/>
+          <a:lstStyle/>
+          <a:p>
+            <a:pPr algn="ctr"/>
+            <a:r>
+              <a:rPr sz="1050" b="1">
+                <a:solidFill>
+                  <a:srgbClr val="FFFFFF"/>
+                </a:solidFill>
+                <a:latin typeface="Calibri"/>
+              </a:rPr>
+              <a:t>FRAMING REVERSED</a:t>
+            </a:r>
+          </a:p>
+        </p:txBody>
+      </p:sp>
+      <p:sp>
+        <p:nvSpPr>
+          <p:cNvPr id="5" name="Rectangle 4"/>
+          <p:cNvSpPr/>
+          <p:nvPr/>
+        </p:nvSpPr>
+        <p:spPr>
+          <a:xfrm>
+            <a:off x="457200" y="1417320"/>
+            <a:ext cx="292608" cy="292608"/>
+          </a:xfrm>
+          <a:prstGeom prst="rect">
+            <a:avLst/>
+          </a:prstGeom>
+          <a:solidFill>
+            <a:srgbClr val="1E2761"/>
+          </a:solidFill>
+          <a:ln>
+            <a:noFill/>
+          </a:ln>
+        </p:spPr>
+        <p:style>
+          <a:lnRef idx="1">
+            <a:schemeClr val="accent1"/>
+          </a:lnRef>
+          <a:fillRef idx="3">
+            <a:schemeClr val="accent1"/>
+          </a:fillRef>
+          <a:effectRef idx="2">
+            <a:schemeClr val="accent1"/>
+          </a:effectRef>
+          <a:fontRef idx="minor">
+            <a:schemeClr val="lt1"/>
+          </a:fontRef>
+        </p:style>
+        <p:txBody>
+          <a:bodyPr rtlCol="0" anchor="ctr"/>
+          <a:lstStyle/>
+          <a:p/>
+        </p:txBody>
+      </p:sp>
+      <p:sp>
+        <p:nvSpPr>
+          <p:cNvPr id="6" name="TextBox 5"/>
+          <p:cNvSpPr txBox="1"/>
+          <p:nvPr/>
+        </p:nvSpPr>
+        <p:spPr>
+          <a:xfrm>
+            <a:off x="868680" y="1389888"/>
+            <a:ext cx="4617720" cy="347472"/>
+          </a:xfrm>
+          <a:prstGeom prst="rect">
+            <a:avLst/>
+          </a:prstGeom>
+          <a:noFill/>
+        </p:spPr>
+        <p:txBody>
+          <a:bodyPr wrap="square" lIns="0" rIns="0" tIns="0" bIns="0">
+            <a:spAutoFit/>
+          </a:bodyPr>
+          <a:lstStyle/>
+          <a:p>
+            <a:pPr>
+              <a:spcAft>
+                <a:spcPts val="200"/>
+              </a:spcAft>
+            </a:pPr>
+            <a:r>
+              <a:rPr sz="1500" b="1">
+                <a:solidFill>
+                  <a:srgbClr val="1E2761"/>
+                </a:solidFill>
+                <a:latin typeface="Calibri"/>
+              </a:rPr>
+              <a:t>AGENTS</a:t>
+            </a:r>
+          </a:p>
+        </p:txBody>
+      </p:sp>
+      <p:sp>
+        <p:nvSpPr>
+          <p:cNvPr id="7" name="TextBox 6"/>
+          <p:cNvSpPr txBox="1"/>
+          <p:nvPr/>
+        </p:nvSpPr>
+        <p:spPr>
+          <a:xfrm>
+            <a:off x="868680" y="1828800"/>
+            <a:ext cx="4617720" cy="566928"/>
+          </a:xfrm>
+          <a:prstGeom prst="rect">
+            <a:avLst/>
+          </a:prstGeom>
+          <a:noFill/>
+        </p:spPr>
+        <p:txBody>
+          <a:bodyPr wrap="square" lIns="0" rIns="0" tIns="0" bIns="0">
+            <a:spAutoFit/>
+          </a:bodyPr>
+          <a:lstStyle/>
+          <a:p>
+            <a:pPr>
+              <a:spcAft>
+                <a:spcPts val="200"/>
+              </a:spcAft>
+            </a:pPr>
+            <a:r>
+              <a:rPr sz="1300" b="1">
+                <a:solidFill>
+                  <a:srgbClr val="1E2761"/>
+                </a:solidFill>
+                <a:latin typeface="Calibri"/>
+              </a:rPr>
+              <a:t>Buyers: </a:t>
+            </a:r>
+            <a:r>
+              <a:rPr sz="1300" b="0">
+                <a:solidFill>
+                  <a:srgbClr val="5B5F6E"/>
+                </a:solidFill>
+                <a:latin typeface="Calibri"/>
+              </a:rPr>
+              <a:t>100 — a distilled policy deployed against the rule</a:t>
+            </a:r>
+          </a:p>
+          <a:p>
+            <a:pPr>
+              <a:spcAft>
+                <a:spcPts val="200"/>
+              </a:spcAft>
+            </a:pPr>
+            <a:r>
+              <a:rPr sz="1300" b="1">
+                <a:solidFill>
+                  <a:srgbClr val="1E2761"/>
+                </a:solidFill>
+                <a:latin typeface="Calibri"/>
+              </a:rPr>
+              <a:t>Sellers: </a:t>
+            </a:r>
+            <a:r>
+              <a:rPr sz="1300" b="0">
+                <a:solidFill>
+                  <a:srgbClr val="5B5F6E"/>
+                </a:solidFill>
+                <a:latin typeface="Calibri"/>
+              </a:rPr>
+              <a:t>5 — Phase 6's market, unchanged in every cell</a:t>
+            </a:r>
+          </a:p>
+        </p:txBody>
+      </p:sp>
+      <p:sp>
+        <p:nvSpPr>
+          <p:cNvPr id="8" name="Rectangle 7"/>
+          <p:cNvSpPr/>
+          <p:nvPr/>
+        </p:nvSpPr>
+        <p:spPr>
+          <a:xfrm>
+            <a:off x="457200" y="2651760"/>
+            <a:ext cx="292608" cy="292608"/>
+          </a:xfrm>
+          <a:prstGeom prst="rect">
+            <a:avLst/>
+          </a:prstGeom>
+          <a:solidFill>
+            <a:srgbClr val="1E2761"/>
+          </a:solidFill>
+          <a:ln>
+            <a:noFill/>
+          </a:ln>
+        </p:spPr>
+        <p:style>
+          <a:lnRef idx="1">
+            <a:schemeClr val="accent1"/>
+          </a:lnRef>
+          <a:fillRef idx="3">
+            <a:schemeClr val="accent1"/>
+          </a:fillRef>
+          <a:effectRef idx="2">
+            <a:schemeClr val="accent1"/>
+          </a:effectRef>
+          <a:fontRef idx="minor">
+            <a:schemeClr val="lt1"/>
+          </a:fontRef>
+        </p:style>
+        <p:txBody>
+          <a:bodyPr rtlCol="0" anchor="ctr"/>
+          <a:lstStyle/>
+          <a:p/>
+        </p:txBody>
+      </p:sp>
+      <p:sp>
+        <p:nvSpPr>
+          <p:cNvPr id="9" name="TextBox 8"/>
+          <p:cNvSpPr txBox="1"/>
+          <p:nvPr/>
+        </p:nvSpPr>
+        <p:spPr>
+          <a:xfrm>
+            <a:off x="868680" y="2624328"/>
+            <a:ext cx="4617720" cy="347472"/>
+          </a:xfrm>
+          <a:prstGeom prst="rect">
+            <a:avLst/>
+          </a:prstGeom>
+          <a:noFill/>
+        </p:spPr>
+        <p:txBody>
+          <a:bodyPr wrap="square" lIns="0" rIns="0" tIns="0" bIns="0">
+            <a:spAutoFit/>
+          </a:bodyPr>
+          <a:lstStyle/>
+          <a:p>
+            <a:pPr>
+              <a:spcAft>
+                <a:spcPts val="200"/>
+              </a:spcAft>
+            </a:pPr>
+            <a:r>
+              <a:rPr sz="1500" b="1">
+                <a:solidFill>
+                  <a:srgbClr val="1E2761"/>
+                </a:solidFill>
+                <a:latin typeface="Calibri"/>
+              </a:rPr>
+              <a:t>ENVIRONMENT &amp; CONTEXT</a:t>
+            </a:r>
+          </a:p>
+        </p:txBody>
+      </p:sp>
+      <p:sp>
+        <p:nvSpPr>
+          <p:cNvPr id="10" name="TextBox 9"/>
+          <p:cNvSpPr txBox="1"/>
+          <p:nvPr/>
+        </p:nvSpPr>
+        <p:spPr>
+          <a:xfrm>
+            <a:off x="868680" y="3063240"/>
+            <a:ext cx="4617720" cy="548640"/>
+          </a:xfrm>
+          <a:prstGeom prst="rect">
+            <a:avLst/>
+          </a:prstGeom>
+          <a:noFill/>
+        </p:spPr>
+        <p:txBody>
+          <a:bodyPr wrap="square" lIns="0" rIns="0" tIns="0" bIns="0">
+            <a:spAutoFit/>
+          </a:bodyPr>
+          <a:lstStyle/>
+          <a:p>
+            <a:pPr>
+              <a:spcAft>
+                <a:spcPts val="200"/>
+              </a:spcAft>
+            </a:pPr>
+            <a:r>
+              <a:rPr sz="1300" b="0">
+                <a:solidFill>
+                  <a:srgbClr val="5B5F6E"/>
+                </a:solidFill>
+                <a:latin typeface="Calibri"/>
+              </a:rPr>
+              <a:t>-  Budget wall removed by raising Poor's budget 3.0 -&gt; 8.0, which</a:t>
+            </a:r>
+          </a:p>
+          <a:p>
+            <a:pPr>
+              <a:spcAft>
+                <a:spcPts val="200"/>
+              </a:spcAft>
+            </a:pPr>
+            <a:r>
+              <a:rPr sz="1300" b="0">
+                <a:solidFill>
+                  <a:srgbClr val="5B5F6E"/>
+                </a:solidFill>
+                <a:latin typeface="Calibri"/>
+              </a:rPr>
+              <a:t>   opens the premium tier: 0% -&gt; 22% of Poor's encounters.</a:t>
+            </a:r>
+          </a:p>
+          <a:p>
+            <a:pPr>
+              <a:spcAft>
+                <a:spcPts val="200"/>
+              </a:spcAft>
+            </a:pPr>
+            <a:r>
+              <a:rPr sz="1300" b="0">
+                <a:solidFill>
+                  <a:srgbClr val="5B5F6E"/>
+                </a:solidFill>
+                <a:latin typeface="Calibri"/>
+              </a:rPr>
+              <a:t>-  Season-long taste removed by redrawing preference every week.</a:t>
+            </a:r>
+          </a:p>
+          <a:p>
+            <a:pPr>
+              <a:spcAft>
+                <a:spcPts val="200"/>
+              </a:spcAft>
+            </a:pPr>
+            <a:r>
+              <a:rPr sz="1300" b="0">
+                <a:solidFill>
+                  <a:srgbClr val="5B5F6E"/>
+                </a:solidFill>
+                <a:latin typeface="Calibri"/>
+              </a:rPr>
+              <a:t>-  One at a time and then together, at the sharpest entropy 9b saw.</a:t>
+            </a:r>
+          </a:p>
+        </p:txBody>
+      </p:sp>
+      <p:sp>
+        <p:nvSpPr>
+          <p:cNvPr id="11" name="Rectangle 10"/>
+          <p:cNvSpPr/>
+          <p:nvPr/>
+        </p:nvSpPr>
+        <p:spPr>
+          <a:xfrm>
+            <a:off x="457200" y="3886200"/>
+            <a:ext cx="292608" cy="292608"/>
+          </a:xfrm>
+          <a:prstGeom prst="rect">
+            <a:avLst/>
+          </a:prstGeom>
+          <a:solidFill>
+            <a:srgbClr val="1E2761"/>
+          </a:solidFill>
+          <a:ln>
+            <a:noFill/>
+          </a:ln>
+        </p:spPr>
+        <p:style>
+          <a:lnRef idx="1">
+            <a:schemeClr val="accent1"/>
+          </a:lnRef>
+          <a:fillRef idx="3">
+            <a:schemeClr val="accent1"/>
+          </a:fillRef>
+          <a:effectRef idx="2">
+            <a:schemeClr val="accent1"/>
+          </a:effectRef>
+          <a:fontRef idx="minor">
+            <a:schemeClr val="lt1"/>
+          </a:fontRef>
+        </p:style>
+        <p:txBody>
+          <a:bodyPr rtlCol="0" anchor="ctr"/>
+          <a:lstStyle/>
+          <a:p/>
+        </p:txBody>
+      </p:sp>
+      <p:sp>
+        <p:nvSpPr>
+          <p:cNvPr id="12" name="TextBox 11"/>
+          <p:cNvSpPr txBox="1"/>
+          <p:nvPr/>
+        </p:nvSpPr>
+        <p:spPr>
+          <a:xfrm>
+            <a:off x="868680" y="3858768"/>
+            <a:ext cx="4617720" cy="347472"/>
+          </a:xfrm>
+          <a:prstGeom prst="rect">
+            <a:avLst/>
+          </a:prstGeom>
+          <a:noFill/>
+        </p:spPr>
+        <p:txBody>
+          <a:bodyPr wrap="square" lIns="0" rIns="0" tIns="0" bIns="0">
+            <a:spAutoFit/>
+          </a:bodyPr>
+          <a:lstStyle/>
+          <a:p>
+            <a:pPr>
+              <a:spcAft>
+                <a:spcPts val="200"/>
+              </a:spcAft>
+            </a:pPr>
+            <a:r>
+              <a:rPr sz="1500" b="1">
+                <a:solidFill>
+                  <a:srgbClr val="1E2761"/>
+                </a:solidFill>
+                <a:latin typeface="Calibri"/>
+              </a:rPr>
+              <a:t>METHOD</a:t>
+            </a:r>
+          </a:p>
+        </p:txBody>
+      </p:sp>
+      <p:sp>
+        <p:nvSpPr>
+          <p:cNvPr id="13" name="TextBox 12"/>
+          <p:cNvSpPr txBox="1"/>
+          <p:nvPr/>
+        </p:nvSpPr>
+        <p:spPr>
+          <a:xfrm>
+            <a:off x="868680" y="4297680"/>
+            <a:ext cx="4617720" cy="594360"/>
+          </a:xfrm>
+          <a:prstGeom prst="rect">
+            <a:avLst/>
+          </a:prstGeom>
+          <a:noFill/>
+        </p:spPr>
+        <p:txBody>
+          <a:bodyPr wrap="square" lIns="0" rIns="0" tIns="0" bIns="0">
+            <a:spAutoFit/>
+          </a:bodyPr>
+          <a:lstStyle/>
+          <a:p>
+            <a:pPr>
+              <a:spcAft>
+                <a:spcPts val="200"/>
+              </a:spcAft>
+            </a:pPr>
+            <a:r>
+              <a:rPr sz="1300" b="0">
+                <a:solidFill>
+                  <a:srgbClr val="5B5F6E"/>
+                </a:solidFill>
+                <a:latin typeface="Calibri"/>
+              </a:rPr>
+              <a:t>Every cell's offset re-solved to hold the purchase level at 0.4594,</a:t>
+            </a:r>
+          </a:p>
+          <a:p>
+            <a:pPr>
+              <a:spcAft>
+                <a:spcPts val="200"/>
+              </a:spcAft>
+            </a:pPr>
+            <a:r>
+              <a:rPr sz="1300" b="0">
+                <a:solidFill>
+                  <a:srgbClr val="5B5F6E"/>
+                </a:solidFill>
+                <a:latin typeface="Calibri"/>
+              </a:rPr>
+              <a:t>so an ablation opens the action space without changing how much</a:t>
+            </a:r>
+          </a:p>
+          <a:p>
+            <a:pPr>
+              <a:spcAft>
+                <a:spcPts val="200"/>
+              </a:spcAft>
+            </a:pPr>
+            <a:r>
+              <a:rPr sz="1300" b="0">
+                <a:solidFill>
+                  <a:srgbClr val="5B5F6E"/>
+                </a:solidFill>
+                <a:latin typeface="Calibri"/>
+              </a:rPr>
+              <a:t>buying happens. Each cell trains up its own capacity ladder to</a:t>
+            </a:r>
+          </a:p>
+          <a:p>
+            <a:pPr>
+              <a:spcAft>
+                <a:spcPts val="200"/>
+              </a:spcAft>
+            </a:pPr>
+            <a:r>
+              <a:rPr sz="1300" b="0">
+                <a:solidFill>
+                  <a:srgbClr val="5B5F6E"/>
+                </a:solidFill>
+                <a:latin typeface="Calibri"/>
+              </a:rPr>
+              <a:t>Gate 9a before it is deployed.</a:t>
+            </a:r>
+          </a:p>
+        </p:txBody>
+      </p:sp>
+      <p:sp>
+        <p:nvSpPr>
+          <p:cNvPr id="14" name="Rectangle 13"/>
+          <p:cNvSpPr/>
+          <p:nvPr/>
+        </p:nvSpPr>
+        <p:spPr>
+          <a:xfrm>
+            <a:off x="457200" y="5029200"/>
+            <a:ext cx="292608" cy="292608"/>
+          </a:xfrm>
+          <a:prstGeom prst="rect">
+            <a:avLst/>
+          </a:prstGeom>
+          <a:solidFill>
+            <a:srgbClr val="1E2761"/>
+          </a:solidFill>
+          <a:ln>
+            <a:noFill/>
+          </a:ln>
+        </p:spPr>
+        <p:style>
+          <a:lnRef idx="1">
+            <a:schemeClr val="accent1"/>
+          </a:lnRef>
+          <a:fillRef idx="3">
+            <a:schemeClr val="accent1"/>
+          </a:fillRef>
+          <a:effectRef idx="2">
+            <a:schemeClr val="accent1"/>
+          </a:effectRef>
+          <a:fontRef idx="minor">
+            <a:schemeClr val="lt1"/>
+          </a:fontRef>
+        </p:style>
+        <p:txBody>
+          <a:bodyPr rtlCol="0" anchor="ctr"/>
+          <a:lstStyle/>
+          <a:p/>
+        </p:txBody>
+      </p:sp>
+      <p:sp>
+        <p:nvSpPr>
+          <p:cNvPr id="15" name="TextBox 14"/>
+          <p:cNvSpPr txBox="1"/>
+          <p:nvPr/>
+        </p:nvSpPr>
+        <p:spPr>
+          <a:xfrm>
+            <a:off x="868680" y="5001768"/>
+            <a:ext cx="4617720" cy="347472"/>
+          </a:xfrm>
+          <a:prstGeom prst="rect">
+            <a:avLst/>
+          </a:prstGeom>
+          <a:noFill/>
+        </p:spPr>
+        <p:txBody>
+          <a:bodyPr wrap="square" lIns="0" rIns="0" tIns="0" bIns="0">
+            <a:spAutoFit/>
+          </a:bodyPr>
+          <a:lstStyle/>
+          <a:p>
+            <a:pPr>
+              <a:spcAft>
+                <a:spcPts val="200"/>
+              </a:spcAft>
+            </a:pPr>
+            <a:r>
+              <a:rPr sz="1500" b="1">
+                <a:solidFill>
+                  <a:srgbClr val="1E2761"/>
+                </a:solidFill>
+                <a:latin typeface="Calibri"/>
+              </a:rPr>
+              <a:t>LITERATURE BASIS</a:t>
+            </a:r>
+          </a:p>
+        </p:txBody>
+      </p:sp>
+      <p:sp>
+        <p:nvSpPr>
+          <p:cNvPr id="16" name="TextBox 15"/>
+          <p:cNvSpPr txBox="1"/>
+          <p:nvPr/>
+        </p:nvSpPr>
+        <p:spPr>
+          <a:xfrm>
+            <a:off x="868680" y="5440680"/>
+            <a:ext cx="4617720" cy="1005840"/>
+          </a:xfrm>
+          <a:prstGeom prst="rect">
+            <a:avLst/>
+          </a:prstGeom>
+          <a:noFill/>
+        </p:spPr>
+        <p:txBody>
+          <a:bodyPr wrap="square" lIns="0" rIns="0" tIns="0" bIns="0">
+            <a:spAutoFit/>
+          </a:bodyPr>
+          <a:lstStyle/>
+          <a:p>
+            <a:pPr>
+              <a:spcAft>
+                <a:spcPts val="600"/>
+              </a:spcAft>
+            </a:pPr>
+            <a:r>
+              <a:rPr sz="1100" b="1">
+                <a:solidFill>
+                  <a:srgbClr val="1E2761"/>
+                </a:solidFill>
+                <a:latin typeface="Calibri"/>
+              </a:rPr>
+              <a:t>Ross, Gordon &amp; Bagnell (2011), </a:t>
+            </a:r>
+            <a:r>
+              <a:rPr sz="1100" b="0">
+                <a:solidFill>
+                  <a:srgbClr val="5B5F6E"/>
+                </a:solidFill>
+                <a:latin typeface="Calibri"/>
+              </a:rPr>
+              <a:t>“A Reduction of Imitation Learning and Structured Prediction to No-Regret Online Learning” (AISTATS) — whose compounding bound assumes a state that persists to be compounded over.</a:t>
+            </a:r>
+          </a:p>
+        </p:txBody>
+      </p:sp>
+      <p:sp>
+        <p:nvSpPr>
+          <p:cNvPr id="17" name="Rectangle 16"/>
+          <p:cNvSpPr/>
+          <p:nvPr/>
+        </p:nvSpPr>
+        <p:spPr>
+          <a:xfrm>
+            <a:off x="5943600" y="1417320"/>
+            <a:ext cx="292608" cy="292608"/>
+          </a:xfrm>
+          <a:prstGeom prst="rect">
+            <a:avLst/>
+          </a:prstGeom>
+          <a:solidFill>
+            <a:srgbClr val="1E2761"/>
+          </a:solidFill>
+          <a:ln>
+            <a:noFill/>
+          </a:ln>
+        </p:spPr>
+        <p:style>
+          <a:lnRef idx="1">
+            <a:schemeClr val="accent1"/>
+          </a:lnRef>
+          <a:fillRef idx="3">
+            <a:schemeClr val="accent1"/>
+          </a:fillRef>
+          <a:effectRef idx="2">
+            <a:schemeClr val="accent1"/>
+          </a:effectRef>
+          <a:fontRef idx="minor">
+            <a:schemeClr val="lt1"/>
+          </a:fontRef>
+        </p:style>
+        <p:txBody>
+          <a:bodyPr rtlCol="0" anchor="ctr"/>
+          <a:lstStyle/>
+          <a:p/>
+        </p:txBody>
+      </p:sp>
+      <p:sp>
+        <p:nvSpPr>
+          <p:cNvPr id="18" name="TextBox 17"/>
+          <p:cNvSpPr txBox="1"/>
+          <p:nvPr/>
+        </p:nvSpPr>
+        <p:spPr>
+          <a:xfrm>
+            <a:off x="6355080" y="1389888"/>
+            <a:ext cx="5349240" cy="347472"/>
+          </a:xfrm>
+          <a:prstGeom prst="rect">
+            <a:avLst/>
+          </a:prstGeom>
+          <a:noFill/>
+        </p:spPr>
+        <p:txBody>
+          <a:bodyPr wrap="square" lIns="0" rIns="0" tIns="0" bIns="0">
+            <a:spAutoFit/>
+          </a:bodyPr>
+          <a:lstStyle/>
+          <a:p>
+            <a:pPr>
+              <a:spcAft>
+                <a:spcPts val="200"/>
+              </a:spcAft>
+            </a:pPr>
+            <a:r>
+              <a:rPr sz="1500" b="1">
+                <a:solidFill>
+                  <a:srgbClr val="1E2761"/>
+                </a:solidFill>
+                <a:latin typeface="Calibri"/>
+              </a:rPr>
+              <a:t>KEY RESULTS</a:t>
+            </a:r>
+          </a:p>
+        </p:txBody>
+      </p:sp>
+      <p:graphicFrame>
+        <p:nvGraphicFramePr>
+          <p:cNvPr id="19" name="Table 18"/>
+          <p:cNvGraphicFramePr>
+            <a:graphicFrameLocks noGrp="1"/>
+          </p:cNvGraphicFramePr>
+          <p:nvPr/>
+        </p:nvGraphicFramePr>
+        <p:xfrm>
+          <a:off x="5943600" y="1874519"/>
+          <a:ext cx="5760720" cy="1920240"/>
+        </p:xfrm>
+        <a:graphic>
+          <a:graphicData uri="http://schemas.openxmlformats.org/drawingml/2006/table">
+            <a:tbl>
+              <a:tblPr firstRow="1" bandRow="1">
+                <a:tableStyleId>{5C22544A-7EE6-4342-B048-85BDC9FD1C3A}</a:tableStyleId>
+              </a:tblPr>
+              <a:tblGrid>
+                <a:gridCol w="3200400"/>
+                <a:gridCol w="1463040"/>
+                <a:gridCol w="1097280"/>
+              </a:tblGrid>
+              <a:tr h="274320">
+                <a:tc>
+                  <a:txBody>
+                    <a:bodyPr/>
+                    <a:lstStyle/>
+                    <a:p>
+                      <a:r>
+                        <a:rPr sz="1100" b="1">
+                          <a:solidFill>
+                            <a:srgbClr val="FFFFFF"/>
+                          </a:solidFill>
+                          <a:latin typeface="Calibri"/>
+                        </a:rPr>
+                        <a:t>Metric</a:t>
+                      </a:r>
+                    </a:p>
+                  </a:txBody>
+                  <a:tcPr>
+                    <a:solidFill>
+                      <a:srgbClr val="1E2761"/>
+                    </a:solidFill>
+                  </a:tcPr>
+                </a:tc>
+                <a:tc>
+                  <a:txBody>
+                    <a:bodyPr/>
+                    <a:lstStyle/>
+                    <a:p>
+                      <a:r>
+                        <a:rPr sz="1100" b="1">
+                          <a:solidFill>
+                            <a:srgbClr val="FFFFFF"/>
+                          </a:solidFill>
+                          <a:latin typeface="Calibri"/>
+                        </a:rPr>
+                        <a:t>Value</a:t>
+                      </a:r>
+                    </a:p>
+                  </a:txBody>
+                  <a:tcPr>
+                    <a:solidFill>
+                      <a:srgbClr val="1E2761"/>
+                    </a:solidFill>
+                  </a:tcPr>
+                </a:tc>
+                <a:tc>
+                  <a:txBody>
+                    <a:bodyPr/>
+                    <a:lstStyle/>
+                    <a:p>
+                      <a:r>
+                        <a:rPr sz="1100" b="1">
+                          <a:solidFill>
+                            <a:srgbClr val="FFFFFF"/>
+                          </a:solidFill>
+                          <a:latin typeface="Calibri"/>
+                        </a:rPr>
+                        <a:t/>
+                      </a:r>
+                    </a:p>
+                  </a:txBody>
+                  <a:tcPr>
+                    <a:solidFill>
+                      <a:srgbClr val="1E2761"/>
+                    </a:solidFill>
+                  </a:tcPr>
+                </a:tc>
+              </a:tr>
+              <a:tr h="274320">
+                <a:tc>
+                  <a:txBody>
+                    <a:bodyPr/>
+                    <a:lstStyle/>
+                    <a:p>
+                      <a:r>
+                        <a:rPr sz="1100">
+                          <a:solidFill>
+                            <a:srgbClr val="1E2761"/>
+                          </a:solidFill>
+                          <a:latin typeface="Calibri"/>
+                        </a:rPr>
+                        <a:t>Baseline amplification</a:t>
+                      </a:r>
+                    </a:p>
+                  </a:txBody>
+                  <a:tcPr>
+                    <a:solidFill>
+                      <a:srgbClr val="FFFFFF"/>
+                    </a:solidFill>
+                  </a:tcPr>
+                </a:tc>
+                <a:tc>
+                  <a:txBody>
+                    <a:bodyPr/>
+                    <a:lstStyle/>
+                    <a:p>
+                      <a:r>
+                        <a:rPr sz="1100">
+                          <a:solidFill>
+                            <a:srgbClr val="5B5F6E"/>
+                          </a:solidFill>
+                          <a:latin typeface="Calibri"/>
+                        </a:rPr>
+                        <a:t>1.67x</a:t>
+                      </a:r>
+                    </a:p>
+                  </a:txBody>
+                  <a:tcPr>
+                    <a:solidFill>
+                      <a:srgbClr val="FFFFFF"/>
+                    </a:solidFill>
+                  </a:tcPr>
+                </a:tc>
+                <a:tc>
+                  <a:txBody>
+                    <a:bodyPr/>
+                    <a:lstStyle/>
+                    <a:p>
+                      <a:pPr algn="ctr"/>
+                      <a:r>
+                        <a:rPr sz="1100" b="1">
+                          <a:solidFill>
+                            <a:srgbClr val="5B5F6E"/>
+                          </a:solidFill>
+                          <a:latin typeface="Calibri"/>
+                        </a:rPr>
+                        <a:t>—</a:t>
+                      </a:r>
+                    </a:p>
+                  </a:txBody>
+                  <a:tcPr>
+                    <a:solidFill>
+                      <a:srgbClr val="FFFFFF"/>
+                    </a:solidFill>
+                  </a:tcPr>
+                </a:tc>
+              </a:tr>
+              <a:tr h="274320">
+                <a:tc>
+                  <a:txBody>
+                    <a:bodyPr/>
+                    <a:lstStyle/>
+                    <a:p>
+                      <a:r>
+                        <a:rPr sz="1100">
+                          <a:solidFill>
+                            <a:srgbClr val="1E2761"/>
+                          </a:solidFill>
+                          <a:latin typeface="Calibri"/>
+                        </a:rPr>
+                        <a:t>  budget wall removed</a:t>
+                      </a:r>
+                    </a:p>
+                  </a:txBody>
+                  <a:tcPr>
+                    <a:solidFill>
+                      <a:srgbClr val="F7F8FC"/>
+                    </a:solidFill>
+                  </a:tcPr>
+                </a:tc>
+                <a:tc>
+                  <a:txBody>
+                    <a:bodyPr/>
+                    <a:lstStyle/>
+                    <a:p>
+                      <a:r>
+                        <a:rPr sz="1100">
+                          <a:solidFill>
+                            <a:srgbClr val="5B5F6E"/>
+                          </a:solidFill>
+                          <a:latin typeface="Calibri"/>
+                        </a:rPr>
+                        <a:t>1.59x</a:t>
+                      </a:r>
+                    </a:p>
+                  </a:txBody>
+                  <a:tcPr>
+                    <a:solidFill>
+                      <a:srgbClr val="F7F8FC"/>
+                    </a:solidFill>
+                  </a:tcPr>
+                </a:tc>
+                <a:tc>
+                  <a:txBody>
+                    <a:bodyPr/>
+                    <a:lstStyle/>
+                    <a:p>
+                      <a:pPr algn="ctr"/>
+                      <a:r>
+                        <a:rPr sz="1100" b="1">
+                          <a:solidFill>
+                            <a:srgbClr val="5B5F6E"/>
+                          </a:solidFill>
+                          <a:latin typeface="Calibri"/>
+                        </a:rPr>
+                        <a:t>—</a:t>
+                      </a:r>
+                    </a:p>
+                  </a:txBody>
+                  <a:tcPr>
+                    <a:solidFill>
+                      <a:srgbClr val="F7F8FC"/>
+                    </a:solidFill>
+                  </a:tcPr>
+                </a:tc>
+              </a:tr>
+              <a:tr h="274320">
+                <a:tc>
+                  <a:txBody>
+                    <a:bodyPr/>
+                    <a:lstStyle/>
+                    <a:p>
+                      <a:r>
+                        <a:rPr sz="1100">
+                          <a:solidFill>
+                            <a:srgbClr val="1E2761"/>
+                          </a:solidFill>
+                          <a:latin typeface="Calibri"/>
+                        </a:rPr>
+                        <a:t>  fixed taste removed</a:t>
+                      </a:r>
+                    </a:p>
+                  </a:txBody>
+                  <a:tcPr>
+                    <a:solidFill>
+                      <a:srgbClr val="FFFFFF"/>
+                    </a:solidFill>
+                  </a:tcPr>
+                </a:tc>
+                <a:tc>
+                  <a:txBody>
+                    <a:bodyPr/>
+                    <a:lstStyle/>
+                    <a:p>
+                      <a:r>
+                        <a:rPr sz="1100">
+                          <a:solidFill>
+                            <a:srgbClr val="5B5F6E"/>
+                          </a:solidFill>
+                          <a:latin typeface="Calibri"/>
+                        </a:rPr>
+                        <a:t>1.00x</a:t>
+                      </a:r>
+                    </a:p>
+                  </a:txBody>
+                  <a:tcPr>
+                    <a:solidFill>
+                      <a:srgbClr val="FFFFFF"/>
+                    </a:solidFill>
+                  </a:tcPr>
+                </a:tc>
+                <a:tc>
+                  <a:txBody>
+                    <a:bodyPr/>
+                    <a:lstStyle/>
+                    <a:p>
+                      <a:pPr algn="ctr"/>
+                      <a:r>
+                        <a:rPr sz="1100" b="1">
+                          <a:solidFill>
+                            <a:srgbClr val="5B5F6E"/>
+                          </a:solidFill>
+                          <a:latin typeface="Calibri"/>
+                        </a:rPr>
+                        <a:t>—</a:t>
+                      </a:r>
+                    </a:p>
+                  </a:txBody>
+                  <a:tcPr>
+                    <a:solidFill>
+                      <a:srgbClr val="FFFFFF"/>
+                    </a:solidFill>
+                  </a:tcPr>
+                </a:tc>
+              </a:tr>
+              <a:tr h="274320">
+                <a:tc>
+                  <a:txBody>
+                    <a:bodyPr/>
+                    <a:lstStyle/>
+                    <a:p>
+                      <a:r>
+                        <a:rPr sz="1100">
+                          <a:solidFill>
+                            <a:srgbClr val="1E2761"/>
+                          </a:solidFill>
+                          <a:latin typeface="Calibri"/>
+                        </a:rPr>
+                        <a:t>State drift, baseline -&gt; weekly</a:t>
+                      </a:r>
+                    </a:p>
+                  </a:txBody>
+                  <a:tcPr>
+                    <a:solidFill>
+                      <a:srgbClr val="F7F8FC"/>
+                    </a:solidFill>
+                  </a:tcPr>
+                </a:tc>
+                <a:tc>
+                  <a:txBody>
+                    <a:bodyPr/>
+                    <a:lstStyle/>
+                    <a:p>
+                      <a:r>
+                        <a:rPr sz="1100">
+                          <a:solidFill>
+                            <a:srgbClr val="5B5F6E"/>
+                          </a:solidFill>
+                          <a:latin typeface="Calibri"/>
+                        </a:rPr>
+                        <a:t>0.0883 -&gt; 0.0072</a:t>
+                      </a:r>
+                    </a:p>
+                  </a:txBody>
+                  <a:tcPr>
+                    <a:solidFill>
+                      <a:srgbClr val="F7F8FC"/>
+                    </a:solidFill>
+                  </a:tcPr>
+                </a:tc>
+                <a:tc>
+                  <a:txBody>
+                    <a:bodyPr/>
+                    <a:lstStyle/>
+                    <a:p>
+                      <a:pPr algn="ctr"/>
+                      <a:r>
+                        <a:rPr sz="1100" b="1">
+                          <a:solidFill>
+                            <a:srgbClr val="5B5F6E"/>
+                          </a:solidFill>
+                          <a:latin typeface="Calibri"/>
+                        </a:rPr>
+                        <a:t>—</a:t>
+                      </a:r>
+                    </a:p>
+                  </a:txBody>
+                  <a:tcPr>
+                    <a:solidFill>
+                      <a:srgbClr val="F7F8FC"/>
+                    </a:solidFill>
+                  </a:tcPr>
+                </a:tc>
+              </a:tr>
+              <a:tr h="274320">
+                <a:tc>
+                  <a:txBody>
+                    <a:bodyPr/>
+                    <a:lstStyle/>
+                    <a:p>
+                      <a:r>
+                        <a:rPr sz="1100">
+                          <a:solidFill>
+                            <a:srgbClr val="1E2761"/>
+                          </a:solidFill>
+                          <a:latin typeface="Calibri"/>
+                        </a:rPr>
+                        <a:t>R, baseline -&gt; weekly</a:t>
+                      </a:r>
+                    </a:p>
+                  </a:txBody>
+                  <a:tcPr>
+                    <a:solidFill>
+                      <a:srgbClr val="FFFFFF"/>
+                    </a:solidFill>
+                  </a:tcPr>
+                </a:tc>
+                <a:tc>
+                  <a:txBody>
+                    <a:bodyPr/>
+                    <a:lstStyle/>
+                    <a:p>
+                      <a:r>
+                        <a:rPr sz="1100">
+                          <a:solidFill>
+                            <a:srgbClr val="5B5F6E"/>
+                          </a:solidFill>
+                          <a:latin typeface="Calibri"/>
+                        </a:rPr>
+                        <a:t>85% -&gt; 117%</a:t>
+                      </a:r>
+                    </a:p>
+                  </a:txBody>
+                  <a:tcPr>
+                    <a:solidFill>
+                      <a:srgbClr val="FFFFFF"/>
+                    </a:solidFill>
+                  </a:tcPr>
+                </a:tc>
+                <a:tc>
+                  <a:txBody>
+                    <a:bodyPr/>
+                    <a:lstStyle/>
+                    <a:p>
+                      <a:pPr algn="ctr"/>
+                      <a:r>
+                        <a:rPr sz="1100" b="1">
+                          <a:solidFill>
+                            <a:srgbClr val="5B5F6E"/>
+                          </a:solidFill>
+                          <a:latin typeface="Calibri"/>
+                        </a:rPr>
+                        <a:t>—</a:t>
+                      </a:r>
+                    </a:p>
+                  </a:txBody>
+                  <a:tcPr>
+                    <a:solidFill>
+                      <a:srgbClr val="FFFFFF"/>
+                    </a:solidFill>
+                  </a:tcPr>
+                </a:tc>
+              </a:tr>
+              <a:tr h="274320">
+                <a:tc>
+                  <a:txBody>
+                    <a:bodyPr/>
+                    <a:lstStyle/>
+                    <a:p>
+                      <a:r>
+                        <a:rPr sz="1100">
+                          <a:solidFill>
+                            <a:srgbClr val="1E2761"/>
+                          </a:solidFill>
+                          <a:latin typeface="Calibri"/>
+                        </a:rPr>
+                        <a:t>Worst behavioural, any cell</a:t>
+                      </a:r>
+                    </a:p>
+                  </a:txBody>
+                  <a:tcPr>
+                    <a:solidFill>
+                      <a:srgbClr val="F7F8FC"/>
+                    </a:solidFill>
+                  </a:tcPr>
+                </a:tc>
+                <a:tc>
+                  <a:txBody>
+                    <a:bodyPr/>
+                    <a:lstStyle/>
+                    <a:p>
+                      <a:r>
+                        <a:rPr sz="1100">
+                          <a:solidFill>
+                            <a:srgbClr val="5B5F6E"/>
+                          </a:solidFill>
+                          <a:latin typeface="Calibri"/>
+                        </a:rPr>
+                        <a:t>2.49 pp</a:t>
+                      </a:r>
+                    </a:p>
+                  </a:txBody>
+                  <a:tcPr>
+                    <a:solidFill>
+                      <a:srgbClr val="F7F8FC"/>
+                    </a:solidFill>
+                  </a:tcPr>
+                </a:tc>
+                <a:tc>
+                  <a:txBody>
+                    <a:bodyPr/>
+                    <a:lstStyle/>
+                    <a:p>
+                      <a:pPr algn="ctr"/>
+                      <a:r>
+                        <a:rPr sz="1100" b="1">
+                          <a:solidFill>
+                            <a:srgbClr val="5B5F6E"/>
+                          </a:solidFill>
+                          <a:latin typeface="Calibri"/>
+                        </a:rPr>
+                        <a:t>—</a:t>
+                      </a:r>
+                    </a:p>
+                  </a:txBody>
+                  <a:tcPr>
+                    <a:solidFill>
+                      <a:srgbClr val="F7F8FC"/>
+                    </a:solidFill>
+                  </a:tcPr>
+                </a:tc>
+              </a:tr>
+            </a:tbl>
+          </a:graphicData>
+        </a:graphic>
+      </p:graphicFrame>
+      <p:sp>
+        <p:nvSpPr>
+          <p:cNvPr id="20" name="Rectangle 19"/>
+          <p:cNvSpPr/>
+          <p:nvPr/>
+        </p:nvSpPr>
+        <p:spPr>
+          <a:xfrm>
+            <a:off x="5943600" y="4023360"/>
+            <a:ext cx="292608" cy="292608"/>
+          </a:xfrm>
+          <a:prstGeom prst="rect">
+            <a:avLst/>
+          </a:prstGeom>
+          <a:solidFill>
+            <a:srgbClr val="1E2761"/>
+          </a:solidFill>
+          <a:ln>
+            <a:noFill/>
+          </a:ln>
+        </p:spPr>
+        <p:style>
+          <a:lnRef idx="1">
+            <a:schemeClr val="accent1"/>
+          </a:lnRef>
+          <a:fillRef idx="3">
+            <a:schemeClr val="accent1"/>
+          </a:fillRef>
+          <a:effectRef idx="2">
+            <a:schemeClr val="accent1"/>
+          </a:effectRef>
+          <a:fontRef idx="minor">
+            <a:schemeClr val="lt1"/>
+          </a:fontRef>
+        </p:style>
+        <p:txBody>
+          <a:bodyPr rtlCol="0" anchor="ctr"/>
+          <a:lstStyle/>
+          <a:p/>
+        </p:txBody>
+      </p:sp>
+      <p:sp>
+        <p:nvSpPr>
+          <p:cNvPr id="21" name="TextBox 20"/>
+          <p:cNvSpPr txBox="1"/>
+          <p:nvPr/>
+        </p:nvSpPr>
+        <p:spPr>
+          <a:xfrm>
+            <a:off x="6355080" y="3995928"/>
+            <a:ext cx="5349240" cy="347472"/>
+          </a:xfrm>
+          <a:prstGeom prst="rect">
+            <a:avLst/>
+          </a:prstGeom>
+          <a:noFill/>
+        </p:spPr>
+        <p:txBody>
+          <a:bodyPr wrap="square" lIns="0" rIns="0" tIns="0" bIns="0">
+            <a:spAutoFit/>
+          </a:bodyPr>
+          <a:lstStyle/>
+          <a:p>
+            <a:pPr>
+              <a:spcAft>
+                <a:spcPts val="200"/>
+              </a:spcAft>
+            </a:pPr>
+            <a:r>
+              <a:rPr sz="1500" b="1">
+                <a:solidFill>
+                  <a:srgbClr val="1E2761"/>
+                </a:solidFill>
+                <a:latin typeface="Calibri"/>
+              </a:rPr>
+              <a:t>RESEARCH QUESTION</a:t>
+            </a:r>
+          </a:p>
+        </p:txBody>
+      </p:sp>
+      <p:sp>
+        <p:nvSpPr>
+          <p:cNvPr id="22" name="Rectangle 21"/>
+          <p:cNvSpPr/>
+          <p:nvPr/>
+        </p:nvSpPr>
+        <p:spPr>
+          <a:xfrm>
+            <a:off x="5943600" y="4434840"/>
+            <a:ext cx="5760720" cy="1965960"/>
+          </a:xfrm>
+          <a:prstGeom prst="rect">
+            <a:avLst/>
+          </a:prstGeom>
+          <a:solidFill>
+            <a:srgbClr val="F7F8FC"/>
+          </a:solidFill>
+          <a:ln>
+            <a:noFill/>
+          </a:ln>
+        </p:spPr>
+        <p:style>
+          <a:lnRef idx="1">
+            <a:schemeClr val="accent1"/>
+          </a:lnRef>
+          <a:fillRef idx="3">
+            <a:schemeClr val="accent1"/>
+          </a:fillRef>
+          <a:effectRef idx="2">
+            <a:schemeClr val="accent1"/>
+          </a:effectRef>
+          <a:fontRef idx="minor">
+            <a:schemeClr val="lt1"/>
+          </a:fontRef>
+        </p:style>
+        <p:txBody>
+          <a:bodyPr rtlCol="0" anchor="ctr"/>
+          <a:lstStyle/>
+          <a:p/>
+        </p:txBody>
+      </p:sp>
+      <p:sp>
+        <p:nvSpPr>
+          <p:cNvPr id="23" name="TextBox 22"/>
+          <p:cNvSpPr txBox="1"/>
+          <p:nvPr/>
+        </p:nvSpPr>
+        <p:spPr>
+          <a:xfrm>
+            <a:off x="6217920" y="4572000"/>
+            <a:ext cx="5212080" cy="1737360"/>
+          </a:xfrm>
+          <a:prstGeom prst="rect">
+            <a:avLst/>
+          </a:prstGeom>
+          <a:noFill/>
+        </p:spPr>
+        <p:txBody>
+          <a:bodyPr wrap="square" lIns="0" rIns="0" tIns="0" bIns="0">
+            <a:spAutoFit/>
+          </a:bodyPr>
+          <a:lstStyle/>
+          <a:p>
+            <a:pPr>
+              <a:spcAft>
+                <a:spcPts val="500"/>
+              </a:spcAft>
+            </a:pPr>
+            <a:r>
+              <a:rPr sz="1000" b="0">
+                <a:solidFill>
+                  <a:srgbClr val="5B5F6E"/>
+                </a:solidFill>
+                <a:latin typeface="Calibri"/>
+              </a:rPr>
+              <a:t>Which environment characteristics suppress the trajectory divergence that imitation error would otherwise produce?</a:t>
+            </a:r>
+          </a:p>
+          <a:p>
+            <a:pPr>
+              <a:spcAft>
+                <a:spcPts val="500"/>
+              </a:spcAft>
+            </a:pPr>
+            <a:r>
+              <a:rPr sz="1000" b="1">
+                <a:solidFill>
+                  <a:srgbClr val="1E2761"/>
+                </a:solidFill>
+                <a:latin typeface="Calibri"/>
+              </a:rPr>
+              <a:t>Finding: </a:t>
+            </a:r>
+            <a:r>
+              <a:rPr sz="1000" b="0">
+                <a:solidFill>
+                  <a:srgbClr val="5B5F6E"/>
+                </a:solidFill>
+                <a:latin typeface="Calibri"/>
+              </a:rPr>
+              <a:t>Neither — one of them was *carrying* it. Removing the budget wall barely moves the amplification (1.67x → 1.59x). Removing season-long taste collapses it to 1.00x — no amplification at all — and takes the state drift with it (0.0883 → 0.0072). Amplification needs a carrier: an early error has to move the buyer into a state that *persists* long enough to be inhabited.</a:t>
+            </a:r>
+          </a:p>
+          <a:p>
+            <a:pPr>
+              <a:spcAft>
+                <a:spcPts val="500"/>
+              </a:spcAft>
+            </a:pPr>
+            <a:r>
+              <a:rPr sz="1000" b="1">
+                <a:solidFill>
+                  <a:srgbClr val="1E2761"/>
+                </a:solidFill>
+                <a:latin typeface="Calibri"/>
+              </a:rPr>
+              <a:t>Caveat: </a:t>
+            </a:r>
+            <a:r>
+              <a:rPr sz="1000" b="0">
+                <a:solidFill>
+                  <a:srgbClr val="5B5F6E"/>
+                </a:solidFill>
+                <a:latin typeface="Calibri"/>
+              </a:rPr>
+              <a:t>This reverses 9a's own framing, which called fixed taste a stabilizer that would suppress divergence. Both readings are the same mechanism: persistence stabilizes the trajectory and carries the error. It also shows R alone does not govern amplification — the weekly cells have the largest systematic error in the study (117% against 85%) and amplify by exactly 1.00x. Nothing across 9a–9c reached materiality: the worst behavioural divergence anywhere is 2.49 pp against ±5, and every share in every cell is equivalent. One cell fails Gate 9a; its twin passes and shows the same result.</a:t>
             </a:r>
           </a:p>
         </p:txBody>

--- a/project_tracking.pptx
+++ b/project_tracking.pptx
@@ -22,6 +22,8 @@
     <p:sldId id="270" r:id="rId22"/>
     <p:sldId id="271" r:id="rId25"/>
     <p:sldId id="272" r:id="rId26"/>
+    <p:sldId id="273" r:id="rId27"/>
+    <p:sldId id="274" r:id="rId28"/>
   </p:sldIdLst>
   <p:sldSz cx="12191969" cy="6858000" type="screen4x3"/>
   <p:notesSz cx="6858000" cy="9144000"/>
@@ -17235,7 +17237,7 @@
 </p:sld>
 </file>
 
-<file path=ppt/slides/slide17.xml><?xml version="1.0" encoding="utf-8"?>
+<file path=ppt/slides/slide18.xml><?xml version="1.0" encoding="utf-8"?>
 <p:sld xmlns:a="http://schemas.openxmlformats.org/drawingml/2006/main" xmlns:p="http://schemas.openxmlformats.org/presentationml/2006/main" xmlns:r="http://schemas.openxmlformats.org/officeDocument/2006/relationships">
   <p:cSld>
     <p:spTree>
@@ -17279,7 +17281,7 @@
                 </a:solidFill>
                 <a:latin typeface="Cambria"/>
               </a:rPr>
-              <a:t>Phase 9 — Stabilizer Ablation — 9c</a:t>
+              <a:t>Phase 9 — Synthetic Agent Users — 9d</a:t>
             </a:r>
           </a:p>
         </p:txBody>
@@ -17318,7 +17320,7 @@
                 </a:solidFill>
                 <a:latin typeface="Calibri"/>
               </a:rPr>
-              <a:t>Which environment characteristic carries the divergence?  ·  git tag: phase9c-stabilizers  ·  5 cells x 30 deployment seeds</a:t>
+              <a:t>What does an LLM buyer change, against a policy trained on the same rule?  ·  git tag: phase9d-agents  ·  8 seeds, 3 mechanisms in one market</a:t>
             </a:r>
           </a:p>
         </p:txBody>
@@ -17370,7 +17372,7 @@
                 </a:solidFill>
                 <a:latin typeface="Calibri"/>
               </a:rPr>
-              <a:t>FRAMING REVERSED</a:t>
+              <a:t>ORDINALLY RIGHT, CARDINALLY WRONG</a:t>
             </a:r>
           </a:p>
         </p:txBody>
@@ -17498,7 +17500,7 @@
                 </a:solidFill>
                 <a:latin typeface="Calibri"/>
               </a:rPr>
-              <a:t>100 — a distilled policy deployed against the rule</a:t>
+              <a:t>100 — 30 Agent, 35 Phase 9a policy, 35 hand-written rule, stratified within class</a:t>
             </a:r>
           </a:p>
           <a:p>
@@ -17523,7 +17525,7 @@
                 </a:solidFill>
                 <a:latin typeface="Calibri"/>
               </a:rPr>
-              <a:t>5 — Phase 6's market, unchanged in every cell</a:t>
+              <a:t>5 — Phase 6's market, unchanged</a:t>
             </a:r>
           </a:p>
         </p:txBody>
@@ -17642,7 +17644,7 @@
                 </a:solidFill>
                 <a:latin typeface="Calibri"/>
               </a:rPr>
-              <a:t>-  Budget wall removed by raising Poor's budget 3.0 -&gt; 8.0, which</a:t>
+              <a:t>-  gpt-oss:20b run locally, temperature 0, think=low, frozen.</a:t>
             </a:r>
           </a:p>
           <a:p>
@@ -17658,7 +17660,7 @@
                 </a:solidFill>
                 <a:latin typeface="Calibri"/>
               </a:rPr>
-              <a:t>   opens the premium tier: 0% -&gt; 22% of Poor's encounters.</a:t>
+              <a:t>-  Arms stratified inside each class: ids 0-69 are Poor, so</a:t>
             </a:r>
           </a:p>
           <a:p>
@@ -17674,7 +17676,7 @@
                 </a:solidFill>
                 <a:latin typeface="Calibri"/>
               </a:rPr>
-              <a:t>-  Season-long taste removed by redrawing preference every week.</a:t>
+              <a:t>   'the first 30' would have been an all-Poor Agent arm.</a:t>
             </a:r>
           </a:p>
           <a:p>
@@ -17690,7 +17692,23 @@
                 </a:solidFill>
                 <a:latin typeface="Calibri"/>
               </a:rPr>
-              <a:t>-  One at a time and then together, at the sharpest entropy 9b saw.</a:t>
+              <a:t>-  The control is the smallest capacity that passes 9a's own</a:t>
+            </a:r>
+          </a:p>
+          <a:p>
+            <a:pPr>
+              <a:spcAft>
+                <a:spcPts val="200"/>
+              </a:spcAft>
+            </a:pPr>
+            <a:r>
+              <a:rPr sz="1300" b="0">
+                <a:solidFill>
+                  <a:srgbClr val="5B5F6E"/>
+                </a:solidFill>
+                <a:latin typeface="Calibri"/>
+              </a:rPr>
+              <a:t>   offline gate, not one chosen here.</a:t>
             </a:r>
           </a:p>
         </p:txBody>
@@ -17809,7 +17827,7 @@
                 </a:solidFill>
                 <a:latin typeface="Calibri"/>
               </a:rPr>
-              <a:t>Every cell's offset re-solved to hold the purchase level at 0.4594,</a:t>
+              <a:t>Two comparisons. Between-arm, as registered; and within-buyer,</a:t>
             </a:r>
           </a:p>
           <a:p>
@@ -17825,7 +17843,7 @@
                 </a:solidFill>
                 <a:latin typeface="Calibri"/>
               </a:rPr>
-              <a:t>so an ablation opens the action space without changing how much</a:t>
+              <a:t>re-running the market with everyone on the rule on the same seeds</a:t>
             </a:r>
           </a:p>
           <a:p>
@@ -17841,7 +17859,7 @@
                 </a:solidFill>
                 <a:latin typeface="Calibri"/>
               </a:rPr>
-              <a:t>buying happens. Each cell trains up its own capacity ladder to</a:t>
+              <a:t>down to the draw. D_offline / D_shadow then splits the Agent's own</a:t>
             </a:r>
           </a:p>
           <a:p>
@@ -17857,7 +17875,7 @@
                 </a:solidFill>
                 <a:latin typeface="Calibri"/>
               </a:rPr>
-              <a:t>Gate 9a before it is deployed.</a:t>
+              <a:t>error from what the closed loop does to it.</a:t>
             </a:r>
           </a:p>
         </p:txBody>
@@ -17976,7 +17994,7 @@
                 </a:solidFill>
                 <a:latin typeface="Calibri"/>
               </a:rPr>
-              <a:t>Ross, Gordon &amp; Bagnell (2011), </a:t>
+              <a:t>Park et al. (2023), </a:t>
             </a:r>
             <a:r>
               <a:rPr sz="1100" b="0">
@@ -17985,7 +18003,1693 @@
                 </a:solidFill>
                 <a:latin typeface="Calibri"/>
               </a:rPr>
-              <a:t>“A Reduction of Imitation Learning and Structured Prediction to No-Regret Online Learning” (AISTATS) — whose compounding bound assumes a state that persists to be compounded over.</a:t>
+              <a:t>“Generative Agents: Interactive Simulacra of Human Behavior” (UIST) — the LLM-agent architecture this phase instantiates at population scale.</a:t>
+            </a:r>
+          </a:p>
+        </p:txBody>
+      </p:sp>
+      <p:sp>
+        <p:nvSpPr>
+          <p:cNvPr id="17" name="Rectangle 16"/>
+          <p:cNvSpPr/>
+          <p:nvPr/>
+        </p:nvSpPr>
+        <p:spPr>
+          <a:xfrm>
+            <a:off x="5943600" y="1417320"/>
+            <a:ext cx="292608" cy="292608"/>
+          </a:xfrm>
+          <a:prstGeom prst="rect">
+            <a:avLst/>
+          </a:prstGeom>
+          <a:solidFill>
+            <a:srgbClr val="1E2761"/>
+          </a:solidFill>
+          <a:ln>
+            <a:noFill/>
+          </a:ln>
+        </p:spPr>
+        <p:style>
+          <a:lnRef idx="1">
+            <a:schemeClr val="accent1"/>
+          </a:lnRef>
+          <a:fillRef idx="3">
+            <a:schemeClr val="accent1"/>
+          </a:fillRef>
+          <a:effectRef idx="2">
+            <a:schemeClr val="accent1"/>
+          </a:effectRef>
+          <a:fontRef idx="minor">
+            <a:schemeClr val="lt1"/>
+          </a:fontRef>
+        </p:style>
+        <p:txBody>
+          <a:bodyPr rtlCol="0" anchor="ctr"/>
+          <a:lstStyle/>
+          <a:p/>
+        </p:txBody>
+      </p:sp>
+      <p:sp>
+        <p:nvSpPr>
+          <p:cNvPr id="18" name="TextBox 17"/>
+          <p:cNvSpPr txBox="1"/>
+          <p:nvPr/>
+        </p:nvSpPr>
+        <p:spPr>
+          <a:xfrm>
+            <a:off x="6355080" y="1389888"/>
+            <a:ext cx="5349240" cy="347472"/>
+          </a:xfrm>
+          <a:prstGeom prst="rect">
+            <a:avLst/>
+          </a:prstGeom>
+          <a:noFill/>
+        </p:spPr>
+        <p:txBody>
+          <a:bodyPr wrap="square" lIns="0" rIns="0" tIns="0" bIns="0">
+            <a:spAutoFit/>
+          </a:bodyPr>
+          <a:lstStyle/>
+          <a:p>
+            <a:pPr>
+              <a:spcAft>
+                <a:spcPts val="200"/>
+              </a:spcAft>
+            </a:pPr>
+            <a:r>
+              <a:rPr sz="1500" b="1">
+                <a:solidFill>
+                  <a:srgbClr val="1E2761"/>
+                </a:solidFill>
+                <a:latin typeface="Calibri"/>
+              </a:rPr>
+              <a:t>KEY RESULTS</a:t>
+            </a:r>
+          </a:p>
+        </p:txBody>
+      </p:sp>
+      <p:graphicFrame>
+        <p:nvGraphicFramePr>
+          <p:cNvPr id="19" name="Table 18"/>
+          <p:cNvGraphicFramePr>
+            <a:graphicFrameLocks noGrp="1"/>
+          </p:cNvGraphicFramePr>
+          <p:nvPr/>
+        </p:nvGraphicFramePr>
+        <p:xfrm>
+          <a:off x="5943600" y="1874519"/>
+          <a:ext cx="5760720" cy="2194560"/>
+        </p:xfrm>
+        <a:graphic>
+          <a:graphicData uri="http://schemas.openxmlformats.org/drawingml/2006/table">
+            <a:tbl>
+              <a:tblPr firstRow="1" bandRow="1">
+                <a:tableStyleId>{5C22544A-7EE6-4342-B048-85BDC9FD1C3A}</a:tableStyleId>
+              </a:tblPr>
+              <a:tblGrid>
+                <a:gridCol w="3200400"/>
+                <a:gridCol w="1463040"/>
+                <a:gridCol w="1097280"/>
+              </a:tblGrid>
+              <a:tr h="274320">
+                <a:tc>
+                  <a:txBody>
+                    <a:bodyPr/>
+                    <a:lstStyle/>
+                    <a:p>
+                      <a:r>
+                        <a:rPr sz="1100" b="1">
+                          <a:solidFill>
+                            <a:srgbClr val="FFFFFF"/>
+                          </a:solidFill>
+                          <a:latin typeface="Calibri"/>
+                        </a:rPr>
+                        <a:t>Metric</a:t>
+                      </a:r>
+                    </a:p>
+                  </a:txBody>
+                  <a:tcPr>
+                    <a:solidFill>
+                      <a:srgbClr val="1E2761"/>
+                    </a:solidFill>
+                  </a:tcPr>
+                </a:tc>
+                <a:tc>
+                  <a:txBody>
+                    <a:bodyPr/>
+                    <a:lstStyle/>
+                    <a:p>
+                      <a:r>
+                        <a:rPr sz="1100" b="1">
+                          <a:solidFill>
+                            <a:srgbClr val="FFFFFF"/>
+                          </a:solidFill>
+                          <a:latin typeface="Calibri"/>
+                        </a:rPr>
+                        <a:t>Value</a:t>
+                      </a:r>
+                    </a:p>
+                  </a:txBody>
+                  <a:tcPr>
+                    <a:solidFill>
+                      <a:srgbClr val="1E2761"/>
+                    </a:solidFill>
+                  </a:tcPr>
+                </a:tc>
+                <a:tc>
+                  <a:txBody>
+                    <a:bodyPr/>
+                    <a:lstStyle/>
+                    <a:p>
+                      <a:r>
+                        <a:rPr sz="1100" b="1">
+                          <a:solidFill>
+                            <a:srgbClr val="FFFFFF"/>
+                          </a:solidFill>
+                          <a:latin typeface="Calibri"/>
+                        </a:rPr>
+                        <a:t/>
+                      </a:r>
+                    </a:p>
+                  </a:txBody>
+                  <a:tcPr>
+                    <a:solidFill>
+                      <a:srgbClr val="1E2761"/>
+                    </a:solidFill>
+                  </a:tcPr>
+                </a:tc>
+              </a:tr>
+              <a:tr h="274320">
+                <a:tc>
+                  <a:txBody>
+                    <a:bodyPr/>
+                    <a:lstStyle/>
+                    <a:p>
+                      <a:r>
+                        <a:rPr sz="1100">
+                          <a:solidFill>
+                            <a:srgbClr val="1E2761"/>
+                          </a:solidFill>
+                          <a:latin typeface="Calibri"/>
+                        </a:rPr>
+                        <a:t>Agent purchase rate</a:t>
+                      </a:r>
+                    </a:p>
+                  </a:txBody>
+                  <a:tcPr>
+                    <a:solidFill>
+                      <a:srgbClr val="FFFFFF"/>
+                    </a:solidFill>
+                  </a:tcPr>
+                </a:tc>
+                <a:tc>
+                  <a:txBody>
+                    <a:bodyPr/>
+                    <a:lstStyle/>
+                    <a:p>
+                      <a:r>
+                        <a:rPr sz="1100">
+                          <a:solidFill>
+                            <a:srgbClr val="5B5F6E"/>
+                          </a:solidFill>
+                          <a:latin typeface="Calibri"/>
+                        </a:rPr>
+                        <a:t>0.2031</a:t>
+                      </a:r>
+                    </a:p>
+                  </a:txBody>
+                  <a:tcPr>
+                    <a:solidFill>
+                      <a:srgbClr val="FFFFFF"/>
+                    </a:solidFill>
+                  </a:tcPr>
+                </a:tc>
+                <a:tc>
+                  <a:txBody>
+                    <a:bodyPr/>
+                    <a:lstStyle/>
+                    <a:p>
+                      <a:pPr algn="ctr"/>
+                      <a:r>
+                        <a:rPr sz="1100" b="1">
+                          <a:solidFill>
+                            <a:srgbClr val="5B5F6E"/>
+                          </a:solidFill>
+                          <a:latin typeface="Calibri"/>
+                        </a:rPr>
+                        <a:t>rule 0.8109</a:t>
+                      </a:r>
+                    </a:p>
+                  </a:txBody>
+                  <a:tcPr>
+                    <a:solidFill>
+                      <a:srgbClr val="FFFFFF"/>
+                    </a:solidFill>
+                  </a:tcPr>
+                </a:tc>
+              </a:tr>
+              <a:tr h="274320">
+                <a:tc>
+                  <a:txBody>
+                    <a:bodyPr/>
+                    <a:lstStyle/>
+                    <a:p>
+                      <a:r>
+                        <a:rPr sz="1100">
+                          <a:solidFill>
+                            <a:srgbClr val="1E2761"/>
+                          </a:solidFill>
+                          <a:latin typeface="Calibri"/>
+                        </a:rPr>
+                        <a:t>  paired against the same buyers</a:t>
+                      </a:r>
+                    </a:p>
+                  </a:txBody>
+                  <a:tcPr>
+                    <a:solidFill>
+                      <a:srgbClr val="F7F8FC"/>
+                    </a:solidFill>
+                  </a:tcPr>
+                </a:tc>
+                <a:tc>
+                  <a:txBody>
+                    <a:bodyPr/>
+                    <a:lstStyle/>
+                    <a:p>
+                      <a:r>
+                        <a:rPr sz="1100">
+                          <a:solidFill>
+                            <a:srgbClr val="5B5F6E"/>
+                          </a:solidFill>
+                          <a:latin typeface="Calibri"/>
+                        </a:rPr>
+                        <a:t>-0.6214</a:t>
+                      </a:r>
+                    </a:p>
+                  </a:txBody>
+                  <a:tcPr>
+                    <a:solidFill>
+                      <a:srgbClr val="F7F8FC"/>
+                    </a:solidFill>
+                  </a:tcPr>
+                </a:tc>
+                <a:tc>
+                  <a:txBody>
+                    <a:bodyPr/>
+                    <a:lstStyle/>
+                    <a:p>
+                      <a:pPr algn="ctr"/>
+                      <a:r>
+                        <a:rPr sz="1100" b="1">
+                          <a:solidFill>
+                            <a:srgbClr val="5B5F6E"/>
+                          </a:solidFill>
+                          <a:latin typeface="Calibri"/>
+                        </a:rPr>
+                        <a:t>[-0.6370, -0.6058]</a:t>
+                      </a:r>
+                    </a:p>
+                  </a:txBody>
+                  <a:tcPr>
+                    <a:solidFill>
+                      <a:srgbClr val="F7F8FC"/>
+                    </a:solidFill>
+                  </a:tcPr>
+                </a:tc>
+              </a:tr>
+              <a:tr h="274320">
+                <a:tc>
+                  <a:txBody>
+                    <a:bodyPr/>
+                    <a:lstStyle/>
+                    <a:p>
+                      <a:r>
+                        <a:rPr sz="1100">
+                          <a:solidFill>
+                            <a:srgbClr val="1E2761"/>
+                          </a:solidFill>
+                          <a:latin typeface="Calibri"/>
+                        </a:rPr>
+                        <a:t>Mechanism directions</a:t>
+                      </a:r>
+                    </a:p>
+                  </a:txBody>
+                  <a:tcPr>
+                    <a:solidFill>
+                      <a:srgbClr val="FFFFFF"/>
+                    </a:solidFill>
+                  </a:tcPr>
+                </a:tc>
+                <a:tc>
+                  <a:txBody>
+                    <a:bodyPr/>
+                    <a:lstStyle/>
+                    <a:p>
+                      <a:r>
+                        <a:rPr sz="1100">
+                          <a:solidFill>
+                            <a:srgbClr val="5B5F6E"/>
+                          </a:solidFill>
+                          <a:latin typeface="Calibri"/>
+                        </a:rPr>
+                        <a:t>all correct</a:t>
+                      </a:r>
+                    </a:p>
+                  </a:txBody>
+                  <a:tcPr>
+                    <a:solidFill>
+                      <a:srgbClr val="FFFFFF"/>
+                    </a:solidFill>
+                  </a:tcPr>
+                </a:tc>
+                <a:tc>
+                  <a:txBody>
+                    <a:bodyPr/>
+                    <a:lstStyle/>
+                    <a:p>
+                      <a:pPr algn="ctr"/>
+                      <a:r>
+                        <a:rPr sz="1100" b="1">
+                          <a:solidFill>
+                            <a:srgbClr val="5B5F6E"/>
+                          </a:solidFill>
+                          <a:latin typeface="Calibri"/>
+                        </a:rPr>
+                        <a:t>—</a:t>
+                      </a:r>
+                    </a:p>
+                  </a:txBody>
+                  <a:tcPr>
+                    <a:solidFill>
+                      <a:srgbClr val="FFFFFF"/>
+                    </a:solidFill>
+                  </a:tcPr>
+                </a:tc>
+              </a:tr>
+              <a:tr h="274320">
+                <a:tc>
+                  <a:txBody>
+                    <a:bodyPr/>
+                    <a:lstStyle/>
+                    <a:p>
+                      <a:r>
+                        <a:rPr sz="1100">
+                          <a:solidFill>
+                            <a:srgbClr val="1E2761"/>
+                          </a:solidFill>
+                          <a:latin typeface="Calibri"/>
+                        </a:rPr>
+                        <a:t>D_offline → D_shadow</a:t>
+                      </a:r>
+                    </a:p>
+                  </a:txBody>
+                  <a:tcPr>
+                    <a:solidFill>
+                      <a:srgbClr val="F7F8FC"/>
+                    </a:solidFill>
+                  </a:tcPr>
+                </a:tc>
+                <a:tc>
+                  <a:txBody>
+                    <a:bodyPr/>
+                    <a:lstStyle/>
+                    <a:p>
+                      <a:r>
+                        <a:rPr sz="1100">
+                          <a:solidFill>
+                            <a:srgbClr val="5B5F6E"/>
+                          </a:solidFill>
+                          <a:latin typeface="Calibri"/>
+                        </a:rPr>
+                        <a:t>0.2621 → 0.3712</a:t>
+                      </a:r>
+                    </a:p>
+                  </a:txBody>
+                  <a:tcPr>
+                    <a:solidFill>
+                      <a:srgbClr val="F7F8FC"/>
+                    </a:solidFill>
+                  </a:tcPr>
+                </a:tc>
+                <a:tc>
+                  <a:txBody>
+                    <a:bodyPr/>
+                    <a:lstStyle/>
+                    <a:p>
+                      <a:pPr algn="ctr"/>
+                      <a:r>
+                        <a:rPr sz="1100" b="1">
+                          <a:solidFill>
+                            <a:srgbClr val="5B5F6E"/>
+                          </a:solidFill>
+                          <a:latin typeface="Calibri"/>
+                        </a:rPr>
+                        <a:t>1.42x</a:t>
+                      </a:r>
+                    </a:p>
+                  </a:txBody>
+                  <a:tcPr>
+                    <a:solidFill>
+                      <a:srgbClr val="F7F8FC"/>
+                    </a:solidFill>
+                  </a:tcPr>
+                </a:tc>
+              </a:tr>
+              <a:tr h="274320">
+                <a:tc>
+                  <a:txBody>
+                    <a:bodyPr/>
+                    <a:lstStyle/>
+                    <a:p>
+                      <a:r>
+                        <a:rPr sz="1100">
+                          <a:solidFill>
+                            <a:srgbClr val="1E2761"/>
+                          </a:solidFill>
+                          <a:latin typeface="Calibri"/>
+                        </a:rPr>
+                        <a:t>Offline fit against the rule</a:t>
+                      </a:r>
+                    </a:p>
+                  </a:txBody>
+                  <a:tcPr>
+                    <a:solidFill>
+                      <a:srgbClr val="FFFFFF"/>
+                    </a:solidFill>
+                  </a:tcPr>
+                </a:tc>
+                <a:tc>
+                  <a:txBody>
+                    <a:bodyPr/>
+                    <a:lstStyle/>
+                    <a:p>
+                      <a:r>
+                        <a:rPr sz="1100">
+                          <a:solidFill>
+                            <a:srgbClr val="5B5F6E"/>
+                          </a:solidFill>
+                          <a:latin typeface="Calibri"/>
+                        </a:rPr>
+                        <a:t>slope 0.954, intercept −0.219</a:t>
+                      </a:r>
+                    </a:p>
+                  </a:txBody>
+                  <a:tcPr>
+                    <a:solidFill>
+                      <a:srgbClr val="FFFFFF"/>
+                    </a:solidFill>
+                  </a:tcPr>
+                </a:tc>
+                <a:tc>
+                  <a:txBody>
+                    <a:bodyPr/>
+                    <a:lstStyle/>
+                    <a:p>
+                      <a:pPr algn="ctr"/>
+                      <a:r>
+                        <a:rPr sz="1100" b="1">
+                          <a:solidFill>
+                            <a:srgbClr val="5B5F6E"/>
+                          </a:solidFill>
+                          <a:latin typeface="Calibri"/>
+                        </a:rPr>
+                        <a:t>r +0.64</a:t>
+                      </a:r>
+                    </a:p>
+                  </a:txBody>
+                  <a:tcPr>
+                    <a:solidFill>
+                      <a:srgbClr val="FFFFFF"/>
+                    </a:solidFill>
+                  </a:tcPr>
+                </a:tc>
+              </a:tr>
+              <a:tr h="274320">
+                <a:tc>
+                  <a:txBody>
+                    <a:bodyPr/>
+                    <a:lstStyle/>
+                    <a:p>
+                      <a:r>
+                        <a:rPr sz="1100">
+                          <a:solidFill>
+                            <a:srgbClr val="1E2761"/>
+                          </a:solidFill>
+                          <a:latin typeface="Calibri"/>
+                        </a:rPr>
+                        <a:t>Intercept correction recovers</a:t>
+                      </a:r>
+                    </a:p>
+                  </a:txBody>
+                  <a:tcPr>
+                    <a:solidFill>
+                      <a:srgbClr val="F7F8FC"/>
+                    </a:solidFill>
+                  </a:tcPr>
+                </a:tc>
+                <a:tc>
+                  <a:txBody>
+                    <a:bodyPr/>
+                    <a:lstStyle/>
+                    <a:p>
+                      <a:r>
+                        <a:rPr sz="1100">
+                          <a:solidFill>
+                            <a:srgbClr val="5B5F6E"/>
+                          </a:solidFill>
+                          <a:latin typeface="Calibri"/>
+                        </a:rPr>
+                        <a:t>0.6487 of 0.8109</a:t>
+                      </a:r>
+                    </a:p>
+                  </a:txBody>
+                  <a:tcPr>
+                    <a:solidFill>
+                      <a:srgbClr val="F7F8FC"/>
+                    </a:solidFill>
+                  </a:tcPr>
+                </a:tc>
+                <a:tc>
+                  <a:txBody>
+                    <a:bodyPr/>
+                    <a:lstStyle/>
+                    <a:p>
+                      <a:pPr algn="ctr"/>
+                      <a:r>
+                        <a:rPr sz="1100" b="1">
+                          <a:solidFill>
+                            <a:srgbClr val="5B5F6E"/>
+                          </a:solidFill>
+                          <a:latin typeface="Calibri"/>
+                        </a:rPr>
+                        <a:t>71.6%</a:t>
+                      </a:r>
+                    </a:p>
+                  </a:txBody>
+                  <a:tcPr>
+                    <a:solidFill>
+                      <a:srgbClr val="F7F8FC"/>
+                    </a:solidFill>
+                  </a:tcPr>
+                </a:tc>
+              </a:tr>
+              <a:tr h="274320">
+                <a:tc>
+                  <a:txBody>
+                    <a:bodyPr/>
+                    <a:lstStyle/>
+                    <a:p>
+                      <a:r>
+                        <a:rPr sz="1100">
+                          <a:solidFill>
+                            <a:srgbClr val="1E2761"/>
+                          </a:solidFill>
+                          <a:latin typeface="Calibri"/>
+                        </a:rPr>
+                        <a:t>Speed, study against study</a:t>
+                      </a:r>
+                    </a:p>
+                  </a:txBody>
+                  <a:tcPr>
+                    <a:solidFill>
+                      <a:srgbClr val="FFFFFF"/>
+                    </a:solidFill>
+                  </a:tcPr>
+                </a:tc>
+                <a:tc>
+                  <a:txBody>
+                    <a:bodyPr/>
+                    <a:lstStyle/>
+                    <a:p>
+                      <a:r>
+                        <a:rPr sz="1100">
+                          <a:solidFill>
+                            <a:srgbClr val="5B5F6E"/>
+                          </a:solidFill>
+                          <a:latin typeface="Calibri"/>
+                        </a:rPr>
+                        <a:t>3,754x–48,262x</a:t>
+                      </a:r>
+                    </a:p>
+                  </a:txBody>
+                  <a:tcPr>
+                    <a:solidFill>
+                      <a:srgbClr val="FFFFFF"/>
+                    </a:solidFill>
+                  </a:tcPr>
+                </a:tc>
+                <a:tc>
+                  <a:txBody>
+                    <a:bodyPr/>
+                    <a:lstStyle/>
+                    <a:p>
+                      <a:pPr algn="ctr"/>
+                      <a:r>
+                        <a:rPr sz="1100" b="1">
+                          <a:solidFill>
+                            <a:srgbClr val="5B5F6E"/>
+                          </a:solidFill>
+                          <a:latin typeface="Calibri"/>
+                        </a:rPr>
+                        <a:t>cost ratio: not quoted</a:t>
+                      </a:r>
+                    </a:p>
+                  </a:txBody>
+                  <a:tcPr>
+                    <a:solidFill>
+                      <a:srgbClr val="FFFFFF"/>
+                    </a:solidFill>
+                  </a:tcPr>
+                </a:tc>
+              </a:tr>
+            </a:tbl>
+          </a:graphicData>
+        </a:graphic>
+      </p:graphicFrame>
+      <p:sp>
+        <p:nvSpPr>
+          <p:cNvPr id="20" name="Rectangle 19"/>
+          <p:cNvSpPr/>
+          <p:nvPr/>
+        </p:nvSpPr>
+        <p:spPr>
+          <a:xfrm>
+            <a:off x="5943600" y="4023360"/>
+            <a:ext cx="292608" cy="292608"/>
+          </a:xfrm>
+          <a:prstGeom prst="rect">
+            <a:avLst/>
+          </a:prstGeom>
+          <a:solidFill>
+            <a:srgbClr val="1E2761"/>
+          </a:solidFill>
+          <a:ln>
+            <a:noFill/>
+          </a:ln>
+        </p:spPr>
+        <p:style>
+          <a:lnRef idx="1">
+            <a:schemeClr val="accent1"/>
+          </a:lnRef>
+          <a:fillRef idx="3">
+            <a:schemeClr val="accent1"/>
+          </a:fillRef>
+          <a:effectRef idx="2">
+            <a:schemeClr val="accent1"/>
+          </a:effectRef>
+          <a:fontRef idx="minor">
+            <a:schemeClr val="lt1"/>
+          </a:fontRef>
+        </p:style>
+        <p:txBody>
+          <a:bodyPr rtlCol="0" anchor="ctr"/>
+          <a:lstStyle/>
+          <a:p/>
+        </p:txBody>
+      </p:sp>
+      <p:sp>
+        <p:nvSpPr>
+          <p:cNvPr id="21" name="TextBox 20"/>
+          <p:cNvSpPr txBox="1"/>
+          <p:nvPr/>
+        </p:nvSpPr>
+        <p:spPr>
+          <a:xfrm>
+            <a:off x="6355080" y="3995928"/>
+            <a:ext cx="5349240" cy="347472"/>
+          </a:xfrm>
+          <a:prstGeom prst="rect">
+            <a:avLst/>
+          </a:prstGeom>
+          <a:noFill/>
+        </p:spPr>
+        <p:txBody>
+          <a:bodyPr wrap="square" lIns="0" rIns="0" tIns="0" bIns="0">
+            <a:spAutoFit/>
+          </a:bodyPr>
+          <a:lstStyle/>
+          <a:p>
+            <a:pPr>
+              <a:spcAft>
+                <a:spcPts val="200"/>
+              </a:spcAft>
+            </a:pPr>
+            <a:r>
+              <a:rPr sz="1500" b="1">
+                <a:solidFill>
+                  <a:srgbClr val="1E2761"/>
+                </a:solidFill>
+                <a:latin typeface="Calibri"/>
+              </a:rPr>
+              <a:t>RESEARCH QUESTION</a:t>
+            </a:r>
+          </a:p>
+        </p:txBody>
+      </p:sp>
+      <p:sp>
+        <p:nvSpPr>
+          <p:cNvPr id="22" name="Rectangle 21"/>
+          <p:cNvSpPr/>
+          <p:nvPr/>
+        </p:nvSpPr>
+        <p:spPr>
+          <a:xfrm>
+            <a:off x="5943600" y="4434840"/>
+            <a:ext cx="5760720" cy="1965960"/>
+          </a:xfrm>
+          <a:prstGeom prst="rect">
+            <a:avLst/>
+          </a:prstGeom>
+          <a:solidFill>
+            <a:srgbClr val="F7F8FC"/>
+          </a:solidFill>
+          <a:ln>
+            <a:noFill/>
+          </a:ln>
+        </p:spPr>
+        <p:style>
+          <a:lnRef idx="1">
+            <a:schemeClr val="accent1"/>
+          </a:lnRef>
+          <a:fillRef idx="3">
+            <a:schemeClr val="accent1"/>
+          </a:fillRef>
+          <a:effectRef idx="2">
+            <a:schemeClr val="accent1"/>
+          </a:effectRef>
+          <a:fontRef idx="minor">
+            <a:schemeClr val="lt1"/>
+          </a:fontRef>
+        </p:style>
+        <p:txBody>
+          <a:bodyPr rtlCol="0" anchor="ctr"/>
+          <a:lstStyle/>
+          <a:p/>
+        </p:txBody>
+      </p:sp>
+      <p:sp>
+        <p:nvSpPr>
+          <p:cNvPr id="23" name="TextBox 22"/>
+          <p:cNvSpPr txBox="1"/>
+          <p:nvPr/>
+        </p:nvSpPr>
+        <p:spPr>
+          <a:xfrm>
+            <a:off x="6217920" y="4572000"/>
+            <a:ext cx="5212080" cy="1737360"/>
+          </a:xfrm>
+          <a:prstGeom prst="rect">
+            <a:avLst/>
+          </a:prstGeom>
+          <a:noFill/>
+        </p:spPr>
+        <p:txBody>
+          <a:bodyPr wrap="square" lIns="0" rIns="0" tIns="0" bIns="0">
+            <a:spAutoFit/>
+          </a:bodyPr>
+          <a:lstStyle/>
+          <a:p>
+            <a:pPr>
+              <a:spcAft>
+                <a:spcPts val="500"/>
+              </a:spcAft>
+            </a:pPr>
+            <a:r>
+              <a:rPr sz="1000" b="0">
+                <a:solidFill>
+                  <a:srgbClr val="5B5F6E"/>
+                </a:solidFill>
+                <a:latin typeface="Calibri"/>
+              </a:rPr>
+              <a:t>What does replacing the buyer decision function with an LLM-driven Agent change, holding the rest of the simulation fixed?</a:t>
+            </a:r>
+          </a:p>
+          <a:p>
+            <a:pPr>
+              <a:spcAft>
+                <a:spcPts val="500"/>
+              </a:spcAft>
+            </a:pPr>
+            <a:r>
+              <a:rPr sz="1000" b="1">
+                <a:solidFill>
+                  <a:srgbClr val="1E2761"/>
+                </a:solidFill>
+                <a:latin typeface="Calibri"/>
+              </a:rPr>
+              <a:t>Finding: </a:t>
+            </a:r>
+            <a:r>
+              <a:rPr sz="1000" b="0">
+                <a:solidFill>
+                  <a:srgbClr val="5B5F6E"/>
+                </a:solidFill>
+                <a:latin typeface="Calibri"/>
+              </a:rPr>
+              <a:t>Every mechanism direction right and the level a quarter of the truth. The Agent buys 0.2031 against the rule's 0.8109. Fitting it on the rule's own states gives slope 0.954 with intercept −0.219 — not compression, a line of the right gradient sitting low — and adding that one number back recovers 71.6% of the collapse. The loop supplies the rest, amplifying 1.42x against 1.07x for a distilled network.</a:t>
+            </a:r>
+          </a:p>
+          <a:p>
+            <a:pPr>
+              <a:spcAft>
+                <a:spcPts val="500"/>
+              </a:spcAft>
+            </a:pPr>
+            <a:r>
+              <a:rPr sz="1000" b="1">
+                <a:solidFill>
+                  <a:srgbClr val="1E2761"/>
+                </a:solidFill>
+                <a:latin typeface="Calibri"/>
+              </a:rPr>
+              <a:t>Caveat: </a:t>
+            </a:r>
+            <a:r>
+              <a:rPr sz="1000" b="0">
+                <a:solidFill>
+                  <a:srgbClr val="5B5F6E"/>
+                </a:solidFill>
+                <a:latin typeface="Calibri"/>
+              </a:rPr>
+              <a:t>The apparent stickiness was selection: pair stability fell from 0.585 to 0.376 under correction, without the memory mechanism being touched. What survives correction is a class-differential bias — +0.121 for high-income buyers against −0.063 for low-budget ones — which recalibration does not fix and which is Phase 11's subject arriving early. The cost ratio is not quoted: verified per-respondent figures span 15,000x, so its denominator is a choice of source rather than a measurement.</a:t>
+            </a:r>
+          </a:p>
+        </p:txBody>
+      </p:sp>
+      <p:sp>
+        <p:nvSpPr>
+          <p:cNvPr id="24" name="TextBox 23"/>
+          <p:cNvSpPr txBox="1"/>
+          <p:nvPr/>
+        </p:nvSpPr>
+        <p:spPr>
+          <a:xfrm>
+            <a:off x="457200" y="6446520"/>
+            <a:ext cx="11247120" cy="274320"/>
+          </a:xfrm>
+          <a:prstGeom prst="rect">
+            <a:avLst/>
+          </a:prstGeom>
+          <a:noFill/>
+        </p:spPr>
+        <p:txBody>
+          <a:bodyPr wrap="square" lIns="0" rIns="0" tIns="0" bIns="0">
+            <a:spAutoFit/>
+          </a:bodyPr>
+          <a:lstStyle/>
+          <a:p>
+            <a:pPr>
+              <a:spcAft>
+                <a:spcPts val="200"/>
+              </a:spcAft>
+            </a:pPr>
+            <a:r>
+              <a:rPr sz="950" b="0">
+                <a:solidFill>
+                  <a:srgbClr val="5B5F6E"/>
+                </a:solidFill>
+                <a:latin typeface="Calibri"/>
+              </a:rPr>
+              <a:t>Generated automatically at phase completion  ·  Phase Completion Deliverable  ·  market-sim project</a:t>
+            </a:r>
+          </a:p>
+        </p:txBody>
+      </p:sp>
+    </p:spTree>
+  </p:cSld>
+  <p:clrMapOvr>
+    <a:masterClrMapping/>
+  </p:clrMapOvr>
+</p:sld>
+</file>
+
+<file path=ppt/slides/slide19.xml><?xml version="1.0" encoding="utf-8"?>
+<p:sld xmlns:a="http://schemas.openxmlformats.org/drawingml/2006/main" xmlns:p="http://schemas.openxmlformats.org/presentationml/2006/main" xmlns:r="http://schemas.openxmlformats.org/officeDocument/2006/relationships">
+  <p:cSld>
+    <p:spTree>
+      <p:nvGrpSpPr>
+        <p:cNvPr id="1" name=""/>
+        <p:cNvGrpSpPr/>
+        <p:nvPr/>
+      </p:nvGrpSpPr>
+      <p:grpSpPr/>
+      <p:sp>
+        <p:nvSpPr>
+          <p:cNvPr id="2" name="TextBox 1"/>
+          <p:cNvSpPr txBox="1"/>
+          <p:nvPr/>
+        </p:nvSpPr>
+        <p:spPr>
+          <a:xfrm>
+            <a:off x="457200" y="320040"/>
+            <a:ext cx="8229600" cy="548640"/>
+          </a:xfrm>
+          <a:prstGeom prst="rect">
+            <a:avLst/>
+          </a:prstGeom>
+          <a:noFill/>
+        </p:spPr>
+        <p:txBody>
+          <a:bodyPr wrap="square" lIns="0" rIns="0" tIns="0" bIns="0">
+            <a:spAutoFit/>
+          </a:bodyPr>
+          <a:lstStyle/>
+          <a:p>
+            <a:pPr>
+              <a:spcAft>
+                <a:spcPts val="200"/>
+              </a:spcAft>
+            </a:pPr>
+            <a:r>
+              <a:rPr sz="3200" b="1">
+                <a:solidFill>
+                  <a:srgbClr val="1E2761"/>
+                </a:solidFill>
+                <a:latin typeface="Cambria"/>
+              </a:rPr>
+              <a:t>Phase 10 — Human vs Agent</a:t>
+            </a:r>
+          </a:p>
+        </p:txBody>
+      </p:sp>
+      <p:sp>
+        <p:nvSpPr>
+          <p:cNvPr id="3" name="TextBox 2"/>
+          <p:cNvSpPr txBox="1"/>
+          <p:nvPr/>
+        </p:nvSpPr>
+        <p:spPr>
+          <a:xfrm>
+            <a:off x="457200" y="868680"/>
+            <a:ext cx="8229600" cy="274320"/>
+          </a:xfrm>
+          <a:prstGeom prst="rect">
+            <a:avLst/>
+          </a:prstGeom>
+          <a:noFill/>
+        </p:spPr>
+        <p:txBody>
+          <a:bodyPr wrap="square" lIns="0" rIns="0" tIns="0" bIns="0">
+            <a:spAutoFit/>
+          </a:bodyPr>
+          <a:lstStyle/>
+          <a:p>
+            <a:pPr>
+              <a:spcAft>
+                <a:spcPts val="200"/>
+              </a:spcAft>
+            </a:pPr>
+            <a:r>
+              <a:rPr sz="1200" b="0">
+                <a:solidFill>
+                  <a:srgbClr val="5B5F6E"/>
+                </a:solidFill>
+                <a:latin typeface="Calibri"/>
+              </a:rPr>
+              <a:t>Same choice sets, same household history  ·  git tag: phase10-human-comparison  ·  3,289 occasions, Ecdat::Cracker</a:t>
+            </a:r>
+          </a:p>
+        </p:txBody>
+      </p:sp>
+      <p:sp>
+        <p:nvSpPr>
+          <p:cNvPr id="4" name="Rounded Rectangle 3"/>
+          <p:cNvSpPr/>
+          <p:nvPr/>
+        </p:nvSpPr>
+        <p:spPr>
+          <a:xfrm>
+            <a:off x="9464040" y="365760"/>
+            <a:ext cx="2240280" cy="384048"/>
+          </a:xfrm>
+          <a:prstGeom prst="roundRect">
+            <a:avLst/>
+          </a:prstGeom>
+          <a:solidFill>
+            <a:srgbClr val="B3262A"/>
+          </a:solidFill>
+          <a:ln>
+            <a:noFill/>
+          </a:ln>
+        </p:spPr>
+        <p:style>
+          <a:lnRef idx="1">
+            <a:schemeClr val="accent1"/>
+          </a:lnRef>
+          <a:fillRef idx="3">
+            <a:schemeClr val="accent1"/>
+          </a:fillRef>
+          <a:effectRef idx="2">
+            <a:schemeClr val="accent1"/>
+          </a:effectRef>
+          <a:fontRef idx="minor">
+            <a:schemeClr val="lt1"/>
+          </a:fontRef>
+        </p:style>
+        <p:txBody>
+          <a:bodyPr rtlCol="0" anchor="ctr"/>
+          <a:lstStyle/>
+          <a:p>
+            <a:pPr algn="ctr"/>
+            <a:r>
+              <a:rPr sz="1050" b="1">
+                <a:solidFill>
+                  <a:srgbClr val="FFFFFF"/>
+                </a:solidFill>
+                <a:latin typeface="Calibri"/>
+              </a:rPr>
+              <a:t>WORSE THAN THE FLOOR</a:t>
+            </a:r>
+          </a:p>
+        </p:txBody>
+      </p:sp>
+      <p:sp>
+        <p:nvSpPr>
+          <p:cNvPr id="5" name="Rectangle 4"/>
+          <p:cNvSpPr/>
+          <p:nvPr/>
+        </p:nvSpPr>
+        <p:spPr>
+          <a:xfrm>
+            <a:off x="457200" y="1417320"/>
+            <a:ext cx="292608" cy="292608"/>
+          </a:xfrm>
+          <a:prstGeom prst="rect">
+            <a:avLst/>
+          </a:prstGeom>
+          <a:solidFill>
+            <a:srgbClr val="1E2761"/>
+          </a:solidFill>
+          <a:ln>
+            <a:noFill/>
+          </a:ln>
+        </p:spPr>
+        <p:style>
+          <a:lnRef idx="1">
+            <a:schemeClr val="accent1"/>
+          </a:lnRef>
+          <a:fillRef idx="3">
+            <a:schemeClr val="accent1"/>
+          </a:fillRef>
+          <a:effectRef idx="2">
+            <a:schemeClr val="accent1"/>
+          </a:effectRef>
+          <a:fontRef idx="minor">
+            <a:schemeClr val="lt1"/>
+          </a:fontRef>
+        </p:style>
+        <p:txBody>
+          <a:bodyPr rtlCol="0" anchor="ctr"/>
+          <a:lstStyle/>
+          <a:p/>
+        </p:txBody>
+      </p:sp>
+      <p:sp>
+        <p:nvSpPr>
+          <p:cNvPr id="6" name="TextBox 5"/>
+          <p:cNvSpPr txBox="1"/>
+          <p:nvPr/>
+        </p:nvSpPr>
+        <p:spPr>
+          <a:xfrm>
+            <a:off x="868680" y="1389888"/>
+            <a:ext cx="4617720" cy="347472"/>
+          </a:xfrm>
+          <a:prstGeom prst="rect">
+            <a:avLst/>
+          </a:prstGeom>
+          <a:noFill/>
+        </p:spPr>
+        <p:txBody>
+          <a:bodyPr wrap="square" lIns="0" rIns="0" tIns="0" bIns="0">
+            <a:spAutoFit/>
+          </a:bodyPr>
+          <a:lstStyle/>
+          <a:p>
+            <a:pPr>
+              <a:spcAft>
+                <a:spcPts val="200"/>
+              </a:spcAft>
+            </a:pPr>
+            <a:r>
+              <a:rPr sz="1500" b="1">
+                <a:solidFill>
+                  <a:srgbClr val="1E2761"/>
+                </a:solidFill>
+                <a:latin typeface="Calibri"/>
+              </a:rPr>
+              <a:t>AGENTS</a:t>
+            </a:r>
+          </a:p>
+        </p:txBody>
+      </p:sp>
+      <p:sp>
+        <p:nvSpPr>
+          <p:cNvPr id="7" name="TextBox 6"/>
+          <p:cNvSpPr txBox="1"/>
+          <p:nvPr/>
+        </p:nvSpPr>
+        <p:spPr>
+          <a:xfrm>
+            <a:off x="868680" y="1828800"/>
+            <a:ext cx="4617720" cy="566928"/>
+          </a:xfrm>
+          <a:prstGeom prst="rect">
+            <a:avLst/>
+          </a:prstGeom>
+          <a:noFill/>
+        </p:spPr>
+        <p:txBody>
+          <a:bodyPr wrap="square" lIns="0" rIns="0" tIns="0" bIns="0">
+            <a:spAutoFit/>
+          </a:bodyPr>
+          <a:lstStyle/>
+          <a:p>
+            <a:pPr>
+              <a:spcAft>
+                <a:spcPts val="200"/>
+              </a:spcAft>
+            </a:pPr>
+            <a:r>
+              <a:rPr sz="1300" b="1">
+                <a:solidFill>
+                  <a:srgbClr val="1E2761"/>
+                </a:solidFill>
+                <a:latin typeface="Calibri"/>
+              </a:rPr>
+              <a:t>Households: </a:t>
+            </a:r>
+            <a:r>
+              <a:rPr sz="1300" b="0">
+                <a:solidFill>
+                  <a:srgbClr val="5B5F6E"/>
+                </a:solidFill>
+                <a:latin typeface="Calibri"/>
+              </a:rPr>
+              <a:t>136 real households, 3,289 purchase occasions</a:t>
+            </a:r>
+          </a:p>
+          <a:p>
+            <a:pPr>
+              <a:spcAft>
+                <a:spcPts val="200"/>
+              </a:spcAft>
+            </a:pPr>
+            <a:r>
+              <a:rPr sz="1300" b="1">
+                <a:solidFill>
+                  <a:srgbClr val="1E2761"/>
+                </a:solidFill>
+                <a:latin typeface="Calibri"/>
+              </a:rPr>
+              <a:t>Arms: </a:t>
+            </a:r>
+            <a:r>
+              <a:rPr sz="1300" b="0">
+                <a:solidFill>
+                  <a:srgbClr val="5B5F6E"/>
+                </a:solidFill>
+                <a:latin typeface="Calibri"/>
+              </a:rPr>
+              <a:t>marginal shares, conditional model, this project's simulator, and an LLM Agent</a:t>
+            </a:r>
+          </a:p>
+        </p:txBody>
+      </p:sp>
+      <p:sp>
+        <p:nvSpPr>
+          <p:cNvPr id="8" name="Rectangle 7"/>
+          <p:cNvSpPr/>
+          <p:nvPr/>
+        </p:nvSpPr>
+        <p:spPr>
+          <a:xfrm>
+            <a:off x="457200" y="2651760"/>
+            <a:ext cx="292608" cy="292608"/>
+          </a:xfrm>
+          <a:prstGeom prst="rect">
+            <a:avLst/>
+          </a:prstGeom>
+          <a:solidFill>
+            <a:srgbClr val="1E2761"/>
+          </a:solidFill>
+          <a:ln>
+            <a:noFill/>
+          </a:ln>
+        </p:spPr>
+        <p:style>
+          <a:lnRef idx="1">
+            <a:schemeClr val="accent1"/>
+          </a:lnRef>
+          <a:fillRef idx="3">
+            <a:schemeClr val="accent1"/>
+          </a:fillRef>
+          <a:effectRef idx="2">
+            <a:schemeClr val="accent1"/>
+          </a:effectRef>
+          <a:fontRef idx="minor">
+            <a:schemeClr val="lt1"/>
+          </a:fontRef>
+        </p:style>
+        <p:txBody>
+          <a:bodyPr rtlCol="0" anchor="ctr"/>
+          <a:lstStyle/>
+          <a:p/>
+        </p:txBody>
+      </p:sp>
+      <p:sp>
+        <p:nvSpPr>
+          <p:cNvPr id="9" name="TextBox 8"/>
+          <p:cNvSpPr txBox="1"/>
+          <p:nvPr/>
+        </p:nvSpPr>
+        <p:spPr>
+          <a:xfrm>
+            <a:off x="868680" y="2624328"/>
+            <a:ext cx="4617720" cy="347472"/>
+          </a:xfrm>
+          <a:prstGeom prst="rect">
+            <a:avLst/>
+          </a:prstGeom>
+          <a:noFill/>
+        </p:spPr>
+        <p:txBody>
+          <a:bodyPr wrap="square" lIns="0" rIns="0" tIns="0" bIns="0">
+            <a:spAutoFit/>
+          </a:bodyPr>
+          <a:lstStyle/>
+          <a:p>
+            <a:pPr>
+              <a:spcAft>
+                <a:spcPts val="200"/>
+              </a:spcAft>
+            </a:pPr>
+            <a:r>
+              <a:rPr sz="1500" b="1">
+                <a:solidFill>
+                  <a:srgbClr val="1E2761"/>
+                </a:solidFill>
+                <a:latin typeface="Calibri"/>
+              </a:rPr>
+              <a:t>ENVIRONMENT &amp; CONTEXT</a:t>
+            </a:r>
+          </a:p>
+        </p:txBody>
+      </p:sp>
+      <p:sp>
+        <p:nvSpPr>
+          <p:cNvPr id="10" name="TextBox 9"/>
+          <p:cNvSpPr txBox="1"/>
+          <p:nvPr/>
+        </p:nvSpPr>
+        <p:spPr>
+          <a:xfrm>
+            <a:off x="868680" y="3063240"/>
+            <a:ext cx="4617720" cy="548640"/>
+          </a:xfrm>
+          <a:prstGeom prst="rect">
+            <a:avLst/>
+          </a:prstGeom>
+          <a:noFill/>
+        </p:spPr>
+        <p:txBody>
+          <a:bodyPr wrap="square" lIns="0" rIns="0" tIns="0" bIns="0">
+            <a:spAutoFit/>
+          </a:bodyPr>
+          <a:lstStyle/>
+          <a:p>
+            <a:pPr>
+              <a:spcAft>
+                <a:spcPts val="200"/>
+              </a:spcAft>
+            </a:pPr>
+            <a:r>
+              <a:rPr sz="1300" b="0">
+                <a:solidFill>
+                  <a:srgbClr val="5B5F6E"/>
+                </a:solidFill>
+                <a:latin typeface="Calibri"/>
+              </a:rPr>
+              <a:t>-  Ecdat::Cracker scanner panel: four brands, real prices,</a:t>
+            </a:r>
+          </a:p>
+          <a:p>
+            <a:pPr>
+              <a:spcAft>
+                <a:spcPts val="200"/>
+              </a:spcAft>
+            </a:pPr>
+            <a:r>
+              <a:rPr sz="1300" b="0">
+                <a:solidFill>
+                  <a:srgbClr val="5B5F6E"/>
+                </a:solidFill>
+                <a:latin typeface="Calibri"/>
+              </a:rPr>
+              <a:t>   display and feature, conditioned on participation.</a:t>
+            </a:r>
+          </a:p>
+          <a:p>
+            <a:pPr>
+              <a:spcAft>
+                <a:spcPts val="200"/>
+              </a:spcAft>
+            </a:pPr>
+            <a:r>
+              <a:rPr sz="1300" b="0">
+                <a:solidFill>
+                  <a:srgbClr val="5B5F6E"/>
+                </a:solidFill>
+                <a:latin typeface="Calibri"/>
+              </a:rPr>
+              <a:t>-  The identical choice set is given to every non-human arm.</a:t>
+            </a:r>
+          </a:p>
+          <a:p>
+            <a:pPr>
+              <a:spcAft>
+                <a:spcPts val="200"/>
+              </a:spcAft>
+            </a:pPr>
+            <a:r>
+              <a:rPr sz="1300" b="0">
+                <a:solidFill>
+                  <a:srgbClr val="5B5F6E"/>
+                </a:solidFill>
+                <a:latin typeface="Calibri"/>
+              </a:rPr>
+              <a:t>-  openai/gpt-oss-120b, temperature 0, reasoning_effort low,</a:t>
+            </a:r>
+          </a:p>
+          <a:p>
+            <a:pPr>
+              <a:spcAft>
+                <a:spcPts val="200"/>
+              </a:spcAft>
+            </a:pPr>
+            <a:r>
+              <a:rPr sz="1300" b="0">
+                <a:solidFill>
+                  <a:srgbClr val="5B5F6E"/>
+                </a:solidFill>
+                <a:latin typeface="Calibri"/>
+              </a:rPr>
+              <a:t>   frozen before any comparison. 2,212 distinct prompts.</a:t>
+            </a:r>
+          </a:p>
+        </p:txBody>
+      </p:sp>
+      <p:sp>
+        <p:nvSpPr>
+          <p:cNvPr id="11" name="Rectangle 10"/>
+          <p:cNvSpPr/>
+          <p:nvPr/>
+        </p:nvSpPr>
+        <p:spPr>
+          <a:xfrm>
+            <a:off x="457200" y="3886200"/>
+            <a:ext cx="292608" cy="292608"/>
+          </a:xfrm>
+          <a:prstGeom prst="rect">
+            <a:avLst/>
+          </a:prstGeom>
+          <a:solidFill>
+            <a:srgbClr val="1E2761"/>
+          </a:solidFill>
+          <a:ln>
+            <a:noFill/>
+          </a:ln>
+        </p:spPr>
+        <p:style>
+          <a:lnRef idx="1">
+            <a:schemeClr val="accent1"/>
+          </a:lnRef>
+          <a:fillRef idx="3">
+            <a:schemeClr val="accent1"/>
+          </a:fillRef>
+          <a:effectRef idx="2">
+            <a:schemeClr val="accent1"/>
+          </a:effectRef>
+          <a:fontRef idx="minor">
+            <a:schemeClr val="lt1"/>
+          </a:fontRef>
+        </p:style>
+        <p:txBody>
+          <a:bodyPr rtlCol="0" anchor="ctr"/>
+          <a:lstStyle/>
+          <a:p/>
+        </p:txBody>
+      </p:sp>
+      <p:sp>
+        <p:nvSpPr>
+          <p:cNvPr id="12" name="TextBox 11"/>
+          <p:cNvSpPr txBox="1"/>
+          <p:nvPr/>
+        </p:nvSpPr>
+        <p:spPr>
+          <a:xfrm>
+            <a:off x="868680" y="3858768"/>
+            <a:ext cx="4617720" cy="347472"/>
+          </a:xfrm>
+          <a:prstGeom prst="rect">
+            <a:avLst/>
+          </a:prstGeom>
+          <a:noFill/>
+        </p:spPr>
+        <p:txBody>
+          <a:bodyPr wrap="square" lIns="0" rIns="0" tIns="0" bIns="0">
+            <a:spAutoFit/>
+          </a:bodyPr>
+          <a:lstStyle/>
+          <a:p>
+            <a:pPr>
+              <a:spcAft>
+                <a:spcPts val="200"/>
+              </a:spcAft>
+            </a:pPr>
+            <a:r>
+              <a:rPr sz="1500" b="1">
+                <a:solidFill>
+                  <a:srgbClr val="1E2761"/>
+                </a:solidFill>
+                <a:latin typeface="Calibri"/>
+              </a:rPr>
+              <a:t>METHOD</a:t>
+            </a:r>
+          </a:p>
+        </p:txBody>
+      </p:sp>
+      <p:sp>
+        <p:nvSpPr>
+          <p:cNvPr id="13" name="TextBox 12"/>
+          <p:cNvSpPr txBox="1"/>
+          <p:nvPr/>
+        </p:nvSpPr>
+        <p:spPr>
+          <a:xfrm>
+            <a:off x="868680" y="4297680"/>
+            <a:ext cx="4617720" cy="594360"/>
+          </a:xfrm>
+          <a:prstGeom prst="rect">
+            <a:avLst/>
+          </a:prstGeom>
+          <a:noFill/>
+        </p:spPr>
+        <p:txBody>
+          <a:bodyPr wrap="square" lIns="0" rIns="0" tIns="0" bIns="0">
+            <a:spAutoFit/>
+          </a:bodyPr>
+          <a:lstStyle/>
+          <a:p>
+            <a:pPr>
+              <a:spcAft>
+                <a:spcPts val="200"/>
+              </a:spcAft>
+            </a:pPr>
+            <a:r>
+              <a:rPr sz="1300" b="0">
+                <a:solidFill>
+                  <a:srgbClr val="5B5F6E"/>
+                </a:solidFill>
+                <a:latin typeface="Calibri"/>
+              </a:rPr>
+              <a:t>Jensen-Shannon between distributions within a scenario, never per</a:t>
+            </a:r>
+          </a:p>
+          <a:p>
+            <a:pPr>
+              <a:spcAft>
+                <a:spcPts val="200"/>
+              </a:spcAft>
+            </a:pPr>
+            <a:r>
+              <a:rPr sz="1300" b="0">
+                <a:solidFill>
+                  <a:srgbClr val="5B5F6E"/>
+                </a:solidFill>
+                <a:latin typeface="Calibri"/>
+              </a:rPr>
+              <a:t>occasion, plus four pre-registered sign contrasts that must agree</a:t>
+            </a:r>
+          </a:p>
+          <a:p>
+            <a:pPr>
+              <a:spcAft>
+                <a:spcPts val="200"/>
+              </a:spcAft>
+            </a:pPr>
+            <a:r>
+              <a:rPr sz="1300" b="0">
+                <a:solidFill>
+                  <a:srgbClr val="5B5F6E"/>
+                </a:solidFill>
+                <a:latin typeface="Calibri"/>
+              </a:rPr>
+              <a:t>before any magnitude is discussed. The S arm is scored on held-out</a:t>
+            </a:r>
+          </a:p>
+          <a:p>
+            <a:pPr>
+              <a:spcAft>
+                <a:spcPts val="200"/>
+              </a:spcAft>
+            </a:pPr>
+            <a:r>
+              <a:rPr sz="1300" b="0">
+                <a:solidFill>
+                  <a:srgbClr val="5B5F6E"/>
+                </a:solidFill>
+                <a:latin typeface="Calibri"/>
+              </a:rPr>
+              <a:t>occasions only, since its utility is B1's fit plus a memory term.</a:t>
+            </a:r>
+          </a:p>
+        </p:txBody>
+      </p:sp>
+      <p:sp>
+        <p:nvSpPr>
+          <p:cNvPr id="14" name="Rectangle 13"/>
+          <p:cNvSpPr/>
+          <p:nvPr/>
+        </p:nvSpPr>
+        <p:spPr>
+          <a:xfrm>
+            <a:off x="457200" y="5029200"/>
+            <a:ext cx="292608" cy="292608"/>
+          </a:xfrm>
+          <a:prstGeom prst="rect">
+            <a:avLst/>
+          </a:prstGeom>
+          <a:solidFill>
+            <a:srgbClr val="1E2761"/>
+          </a:solidFill>
+          <a:ln>
+            <a:noFill/>
+          </a:ln>
+        </p:spPr>
+        <p:style>
+          <a:lnRef idx="1">
+            <a:schemeClr val="accent1"/>
+          </a:lnRef>
+          <a:fillRef idx="3">
+            <a:schemeClr val="accent1"/>
+          </a:fillRef>
+          <a:effectRef idx="2">
+            <a:schemeClr val="accent1"/>
+          </a:effectRef>
+          <a:fontRef idx="minor">
+            <a:schemeClr val="lt1"/>
+          </a:fontRef>
+        </p:style>
+        <p:txBody>
+          <a:bodyPr rtlCol="0" anchor="ctr"/>
+          <a:lstStyle/>
+          <a:p/>
+        </p:txBody>
+      </p:sp>
+      <p:sp>
+        <p:nvSpPr>
+          <p:cNvPr id="15" name="TextBox 14"/>
+          <p:cNvSpPr txBox="1"/>
+          <p:nvPr/>
+        </p:nvSpPr>
+        <p:spPr>
+          <a:xfrm>
+            <a:off x="868680" y="5001768"/>
+            <a:ext cx="4617720" cy="347472"/>
+          </a:xfrm>
+          <a:prstGeom prst="rect">
+            <a:avLst/>
+          </a:prstGeom>
+          <a:noFill/>
+        </p:spPr>
+        <p:txBody>
+          <a:bodyPr wrap="square" lIns="0" rIns="0" tIns="0" bIns="0">
+            <a:spAutoFit/>
+          </a:bodyPr>
+          <a:lstStyle/>
+          <a:p>
+            <a:pPr>
+              <a:spcAft>
+                <a:spcPts val="200"/>
+              </a:spcAft>
+            </a:pPr>
+            <a:r>
+              <a:rPr sz="1500" b="1">
+                <a:solidFill>
+                  <a:srgbClr val="1E2761"/>
+                </a:solidFill>
+                <a:latin typeface="Calibri"/>
+              </a:rPr>
+              <a:t>LITERATURE BASIS</a:t>
+            </a:r>
+          </a:p>
+        </p:txBody>
+      </p:sp>
+      <p:sp>
+        <p:nvSpPr>
+          <p:cNvPr id="16" name="TextBox 15"/>
+          <p:cNvSpPr txBox="1"/>
+          <p:nvPr/>
+        </p:nvSpPr>
+        <p:spPr>
+          <a:xfrm>
+            <a:off x="868680" y="5440680"/>
+            <a:ext cx="4617720" cy="1005840"/>
+          </a:xfrm>
+          <a:prstGeom prst="rect">
+            <a:avLst/>
+          </a:prstGeom>
+          <a:noFill/>
+        </p:spPr>
+        <p:txBody>
+          <a:bodyPr wrap="square" lIns="0" rIns="0" tIns="0" bIns="0">
+            <a:spAutoFit/>
+          </a:bodyPr>
+          <a:lstStyle/>
+          <a:p>
+            <a:pPr>
+              <a:spcAft>
+                <a:spcPts val="600"/>
+              </a:spcAft>
+            </a:pPr>
+            <a:r>
+              <a:rPr sz="1100" b="1">
+                <a:solidFill>
+                  <a:srgbClr val="1E2761"/>
+                </a:solidFill>
+                <a:latin typeface="Calibri"/>
+              </a:rPr>
+              <a:t>Guadagni &amp; Little (1983), </a:t>
+            </a:r>
+            <a:r>
+              <a:rPr sz="1100" b="0">
+                <a:solidFill>
+                  <a:srgbClr val="5B5F6E"/>
+                </a:solidFill>
+                <a:latin typeface="Calibri"/>
+              </a:rPr>
+              <a:t>“A Logit Model of Brand Choice Calibrated on Scanner Data” (Marketing Science) — the loyalty stock this project rebuilt independently and now measures against.</a:t>
             </a:r>
           </a:p>
         </p:txBody>
@@ -18174,7 +19878,7 @@
                           </a:solidFill>
                           <a:latin typeface="Calibri"/>
                         </a:rPr>
-                        <a:t>Baseline amplification</a:t>
+                        <a:t>Marginal shares (floor)</a:t>
                       </a:r>
                     </a:p>
                   </a:txBody>
@@ -18196,7 +19900,7 @@
                           </a:solidFill>
                           <a:latin typeface="Calibri"/>
                         </a:rPr>
-                        <a:t>1.67x</a:t>
+                        <a:t>JS 0.1256</a:t>
                       </a:r>
                     </a:p>
                   </a:txBody>
@@ -18219,7 +19923,7 @@
                           </a:solidFill>
                           <a:latin typeface="Calibri"/>
                         </a:rPr>
-                        <a:t>—</a:t>
+                        <a:t>1.0696 nats</a:t>
                       </a:r>
                     </a:p>
                   </a:txBody>
@@ -18243,7 +19947,7 @@
                           </a:solidFill>
                           <a:latin typeface="Calibri"/>
                         </a:rPr>
-                        <a:t>  budget wall removed</a:t>
+                        <a:t>Conditional model</a:t>
                       </a:r>
                     </a:p>
                   </a:txBody>
@@ -18265,7 +19969,7 @@
                           </a:solidFill>
                           <a:latin typeface="Calibri"/>
                         </a:rPr>
-                        <a:t>1.59x</a:t>
+                        <a:t>JS 0.0404</a:t>
                       </a:r>
                     </a:p>
                   </a:txBody>
@@ -18288,7 +19992,7 @@
                           </a:solidFill>
                           <a:latin typeface="Calibri"/>
                         </a:rPr>
-                        <a:t>—</a:t>
+                        <a:t>0.7739 nats</a:t>
                       </a:r>
                     </a:p>
                   </a:txBody>
@@ -18312,7 +20016,7 @@
                           </a:solidFill>
                           <a:latin typeface="Calibri"/>
                         </a:rPr>
-                        <a:t>  fixed taste removed</a:t>
+                        <a:t>LLM Agent</a:t>
                       </a:r>
                     </a:p>
                   </a:txBody>
@@ -18334,7 +20038,7 @@
                           </a:solidFill>
                           <a:latin typeface="Calibri"/>
                         </a:rPr>
-                        <a:t>1.00x</a:t>
+                        <a:t>JS 0.2448</a:t>
                       </a:r>
                     </a:p>
                   </a:txBody>
@@ -18357,7 +20061,7 @@
                           </a:solidFill>
                           <a:latin typeface="Calibri"/>
                         </a:rPr>
-                        <a:t>—</a:t>
+                        <a:t>1.8966 nats</a:t>
                       </a:r>
                     </a:p>
                   </a:txBody>
@@ -18381,7 +20085,7 @@
                           </a:solidFill>
                           <a:latin typeface="Calibri"/>
                         </a:rPr>
-                        <a:t>State drift, baseline -&gt; weekly</a:t>
+                        <a:t>Mechanism directions</a:t>
                       </a:r>
                     </a:p>
                   </a:txBody>
@@ -18403,7 +20107,7 @@
                           </a:solidFill>
                           <a:latin typeface="Calibri"/>
                         </a:rPr>
-                        <a:t>0.0883 -&gt; 0.0072</a:t>
+                        <a:t>4/4 for every arm</a:t>
                       </a:r>
                     </a:p>
                   </a:txBody>
@@ -18426,7 +20130,7 @@
                           </a:solidFill>
                           <a:latin typeface="Calibri"/>
                         </a:rPr>
-                        <a:t>—</a:t>
+                        <a:t>including the floor</a:t>
                       </a:r>
                     </a:p>
                   </a:txBody>
@@ -18450,7 +20154,7 @@
                           </a:solidFill>
                           <a:latin typeface="Calibri"/>
                         </a:rPr>
-                        <a:t>R, baseline -&gt; weekly</a:t>
+                        <a:t>Simulator memory over B1</a:t>
                       </a:r>
                     </a:p>
                   </a:txBody>
@@ -18472,7 +20176,7 @@
                           </a:solidFill>
                           <a:latin typeface="Calibri"/>
                         </a:rPr>
-                        <a:t>85% -&gt; 117%</a:t>
+                        <a:t>-0.0049 nats</a:t>
                       </a:r>
                     </a:p>
                   </a:txBody>
@@ -18495,7 +20199,7 @@
                           </a:solidFill>
                           <a:latin typeface="Calibri"/>
                         </a:rPr>
-                        <a:t>—</a:t>
+                        <a:t>[-0.0101, +0.0006]</a:t>
                       </a:r>
                     </a:p>
                   </a:txBody>
@@ -18519,7 +20223,7 @@
                           </a:solidFill>
                           <a:latin typeface="Calibri"/>
                         </a:rPr>
-                        <a:t>Worst behavioural, any cell</a:t>
+                        <a:t>Free-running closed loop</a:t>
                       </a:r>
                     </a:p>
                   </a:txBody>
@@ -18541,7 +20245,7 @@
                           </a:solidFill>
                           <a:latin typeface="Calibri"/>
                         </a:rPr>
-                        <a:t>2.49 pp</a:t>
+                        <a:t>1.09x</a:t>
                       </a:r>
                     </a:p>
                   </a:txBody>
@@ -18564,7 +20268,7 @@
                           </a:solidFill>
                           <a:latin typeface="Calibri"/>
                         </a:rPr>
-                        <a:t>—</a:t>
+                        <a:t>no trend by depth</a:t>
                       </a:r>
                     </a:p>
                   </a:txBody>
@@ -18734,7 +20438,7 @@
                 </a:solidFill>
                 <a:latin typeface="Calibri"/>
               </a:rPr>
-              <a:t>Which environment characteristics suppress the trajectory divergence that imitation error would otherwise produce?</a:t>
+              <a:t>Given the same choice sets and the same household history, does an LLM Agent recover sequential structure that a conditional choice model does not already capture?</a:t>
             </a:r>
           </a:p>
           <a:p>
@@ -18759,7 +20463,7 @@
                 </a:solidFill>
                 <a:latin typeface="Calibri"/>
               </a:rPr>
-              <a:t>Neither — one of them was *carrying* it. Removing the budget wall barely moves the amplification (1.67x → 1.59x). Removing season-long taste collapses it to 1.00x — no amplification at all — and takes the state drift with it (0.0883 → 0.0072). Amplification needs a carrier: an early error has to move the buyer into a state that *persists* long enough to be inhabited.</a:t>
+              <a:t>No — it does not recover what the marginal shares capture. The Agent sits at JS 0.2448 against the floor's 0.1256 and the conditional model's 0.0404, roughly twice as far from the panel as knowing nothing but brand shares. Every arm gets all four pre-registered directions right, the floor included, so sign agreement separates none of them.</a:t>
             </a:r>
           </a:p>
           <a:p>
@@ -18784,7 +20488,7 @@
                 </a:solidFill>
                 <a:latin typeface="Calibri"/>
               </a:rPr>
-              <a:t>This reverses 9a's own framing, which called fixed taste a stabilizer that would suppress divergence. Both readings are the same mechanism: persistence stabilizes the trajectory and carries the error. It also shows R alone does not govern amplification — the weekly cells have the largest systematic error in the study (117% against 85%) and amplify by exactly 1.00x. Nothing across 9a–9c reached materiality: the worst behavioural divergence anywhere is 2.49 pp against ±5, and every share in every cell is equivalent. One cell fails Gate 9a; its twin passes and shows the same result.</a:t>
+              <a:t>The simulator's own memory adds nothing distinguishable to a model that already knows the household: -0.0049 nats, CI spanning zero. And a model knowing no individual matches the aggregate almost as well as one that does while being twice as wrong per household — so aggregate fidelity and sign agreement are jointly insufficient. A 3.4x loyalty claim made earlier was withdrawn: it compared an upper bound against a causal quantity.</a:t>
             </a:r>
           </a:p>
         </p:txBody>
